--- a/presentations/cse_lanes_model.pptx
+++ b/presentations/cse_lanes_model.pptx
@@ -13,9 +13,8 @@
     <p:sldId id="261" r:id="rId12"/>
     <p:sldId id="262" r:id="rId13"/>
     <p:sldId id="263" r:id="rId14"/>
-    <p:sldId id="264" r:id="rId15"/>
   </p:sldIdLst>
-  <p:sldSz cx="9144000" cy="6858000" type="screen4x3"/>
+  <p:sldSz cx="12191695" cy="6858000" type="screen4x3"/>
   <p:notesSz cx="6858000" cy="9144000"/>
   <p:defaultTextStyle>
     <a:defPPr>
@@ -3098,48 +3097,430 @@
       <p:grpSpPr/>
       <p:sp>
         <p:nvSpPr>
-          <p:cNvPr id="2" name="Title 1"/>
-          <p:cNvSpPr>
-            <a:spLocks noGrp="1"/>
-          </p:cNvSpPr>
-          <p:nvPr>
-            <p:ph type="ctrTitle"/>
-          </p:nvPr>
-        </p:nvSpPr>
-        <p:spPr/>
-        <p:txBody>
-          <a:bodyPr/>
-          <a:lstStyle/>
-          <a:p>
-            <a:r>
-              <a:t>CSE Software Stack: The Lanes Model</a:t>
-            </a:r>
-          </a:p>
-        </p:txBody>
-      </p:sp>
-      <p:sp>
-        <p:nvSpPr>
-          <p:cNvPr id="3" name="Subtitle 2"/>
-          <p:cNvSpPr>
-            <a:spLocks noGrp="1"/>
-          </p:cNvSpPr>
-          <p:nvPr>
-            <p:ph type="subTitle" idx="1"/>
-          </p:nvPr>
-        </p:nvSpPr>
-        <p:spPr/>
-        <p:txBody>
-          <a:bodyPr/>
-          <a:lstStyle/>
-          <a:p>
-            <a:r>
-              <a:t>How we got here, what others do, and where we're going</a:t>
-            </a:r>
-          </a:p>
-          <a:p>
-            <a:r>
-              <a:t>July 2026 — working draft</a:t>
-            </a:r>
+          <p:cNvPr id="2" name="Rectangle 1"/>
+          <p:cNvSpPr/>
+          <p:nvPr/>
+        </p:nvSpPr>
+        <p:spPr>
+          <a:xfrm>
+            <a:off x="0" y="0"/>
+            <a:ext cx="12191695" cy="6858000"/>
+          </a:xfrm>
+          <a:prstGeom prst="rect">
+            <a:avLst/>
+          </a:prstGeom>
+          <a:solidFill>
+            <a:srgbClr val="0F172A"/>
+          </a:solidFill>
+          <a:ln>
+            <a:noFill/>
+          </a:ln>
+          <a:effectLst/>
+        </p:spPr>
+        <p:style>
+          <a:lnRef idx="1">
+            <a:schemeClr val="accent1"/>
+          </a:lnRef>
+          <a:fillRef idx="3">
+            <a:schemeClr val="accent1"/>
+          </a:fillRef>
+          <a:effectRef idx="2">
+            <a:schemeClr val="accent1"/>
+          </a:effectRef>
+          <a:fontRef idx="minor">
+            <a:schemeClr val="lt1"/>
+          </a:fontRef>
+        </p:style>
+        <p:txBody>
+          <a:bodyPr rtlCol="0" anchor="ctr"/>
+          <a:lstStyle/>
+          <a:p>
+            <a:pPr algn="ctr"/>
+          </a:p>
+        </p:txBody>
+      </p:sp>
+      <p:sp>
+        <p:nvSpPr>
+          <p:cNvPr id="3" name="Rectangle 2"/>
+          <p:cNvSpPr/>
+          <p:nvPr/>
+        </p:nvSpPr>
+        <p:spPr>
+          <a:xfrm>
+            <a:off x="0" y="6309360"/>
+            <a:ext cx="12191695" cy="548640"/>
+          </a:xfrm>
+          <a:prstGeom prst="rect">
+            <a:avLst/>
+          </a:prstGeom>
+          <a:solidFill>
+            <a:srgbClr val="1E293B"/>
+          </a:solidFill>
+          <a:ln>
+            <a:noFill/>
+          </a:ln>
+          <a:effectLst/>
+        </p:spPr>
+        <p:style>
+          <a:lnRef idx="1">
+            <a:schemeClr val="accent1"/>
+          </a:lnRef>
+          <a:fillRef idx="3">
+            <a:schemeClr val="accent1"/>
+          </a:fillRef>
+          <a:effectRef idx="2">
+            <a:schemeClr val="accent1"/>
+          </a:effectRef>
+          <a:fontRef idx="minor">
+            <a:schemeClr val="lt1"/>
+          </a:fontRef>
+        </p:style>
+        <p:txBody>
+          <a:bodyPr rtlCol="0" anchor="ctr"/>
+          <a:lstStyle/>
+          <a:p>
+            <a:pPr algn="ctr"/>
+          </a:p>
+        </p:txBody>
+      </p:sp>
+      <p:sp>
+        <p:nvSpPr>
+          <p:cNvPr id="4" name="TextBox 3"/>
+          <p:cNvSpPr txBox="1"/>
+          <p:nvPr/>
+        </p:nvSpPr>
+        <p:spPr>
+          <a:xfrm>
+            <a:off x="822960" y="2011680"/>
+            <a:ext cx="10515600" cy="1097280"/>
+          </a:xfrm>
+          <a:prstGeom prst="rect">
+            <a:avLst/>
+          </a:prstGeom>
+          <a:noFill/>
+        </p:spPr>
+        <p:txBody>
+          <a:bodyPr wrap="square" anchor="t">
+            <a:spAutoFit/>
+          </a:bodyPr>
+          <a:lstStyle/>
+          <a:p>
+            <a:pPr algn="l">
+              <a:defRPr sz="4600" b="1">
+                <a:solidFill>
+                  <a:srgbClr val="FFFFFF"/>
+                </a:solidFill>
+                <a:latin typeface="Avenir Next"/>
+              </a:defRPr>
+            </a:pPr>
+            <a:r>
+              <a:t>The CSE Software Stack</a:t>
+            </a:r>
+          </a:p>
+        </p:txBody>
+      </p:sp>
+      <p:sp>
+        <p:nvSpPr>
+          <p:cNvPr id="5" name="Rectangle 4"/>
+          <p:cNvSpPr/>
+          <p:nvPr/>
+        </p:nvSpPr>
+        <p:spPr>
+          <a:xfrm>
+            <a:off x="868680" y="3063240"/>
+            <a:ext cx="2194560" cy="54864"/>
+          </a:xfrm>
+          <a:prstGeom prst="rect">
+            <a:avLst/>
+          </a:prstGeom>
+          <a:solidFill>
+            <a:srgbClr val="14B8A6"/>
+          </a:solidFill>
+          <a:ln>
+            <a:noFill/>
+          </a:ln>
+          <a:effectLst/>
+        </p:spPr>
+        <p:style>
+          <a:lnRef idx="1">
+            <a:schemeClr val="accent1"/>
+          </a:lnRef>
+          <a:fillRef idx="3">
+            <a:schemeClr val="accent1"/>
+          </a:fillRef>
+          <a:effectRef idx="2">
+            <a:schemeClr val="accent1"/>
+          </a:effectRef>
+          <a:fontRef idx="minor">
+            <a:schemeClr val="lt1"/>
+          </a:fontRef>
+        </p:style>
+        <p:txBody>
+          <a:bodyPr rtlCol="0" anchor="ctr"/>
+          <a:lstStyle/>
+          <a:p>
+            <a:pPr algn="ctr"/>
+          </a:p>
+        </p:txBody>
+      </p:sp>
+      <p:sp>
+        <p:nvSpPr>
+          <p:cNvPr id="6" name="TextBox 5"/>
+          <p:cNvSpPr txBox="1"/>
+          <p:nvPr/>
+        </p:nvSpPr>
+        <p:spPr>
+          <a:xfrm>
+            <a:off x="822960" y="3291840"/>
+            <a:ext cx="10515600" cy="1280160"/>
+          </a:xfrm>
+          <a:prstGeom prst="rect">
+            <a:avLst/>
+          </a:prstGeom>
+          <a:noFill/>
+        </p:spPr>
+        <p:txBody>
+          <a:bodyPr wrap="square" anchor="t">
+            <a:spAutoFit/>
+          </a:bodyPr>
+          <a:lstStyle/>
+          <a:p>
+            <a:pPr algn="l">
+              <a:defRPr sz="2200" b="0">
+                <a:solidFill>
+                  <a:srgbClr val="E2E8F0"/>
+                </a:solidFill>
+                <a:latin typeface="Avenir Next"/>
+              </a:defRPr>
+            </a:pPr>
+            <a:r>
+              <a:t>One clean build surface per compiler, MPI, and GPU — the lanes model</a:t>
+            </a:r>
+          </a:p>
+          <a:p>
+            <a:pPr algn="l">
+              <a:defRPr sz="1500" b="0">
+                <a:solidFill>
+                  <a:srgbClr val="94A3B8"/>
+                </a:solidFill>
+                <a:latin typeface="Avenir Next"/>
+              </a:defRPr>
+            </a:pPr>
+            <a:r>
+              <a:t>How we got here, what the community runs, and where we're going</a:t>
+            </a:r>
+          </a:p>
+        </p:txBody>
+      </p:sp>
+      <p:sp>
+        <p:nvSpPr>
+          <p:cNvPr id="7" name="TextBox 6"/>
+          <p:cNvSpPr txBox="1"/>
+          <p:nvPr/>
+        </p:nvSpPr>
+        <p:spPr>
+          <a:xfrm>
+            <a:off x="822960" y="6355080"/>
+            <a:ext cx="10515600" cy="457200"/>
+          </a:xfrm>
+          <a:prstGeom prst="rect">
+            <a:avLst/>
+          </a:prstGeom>
+          <a:noFill/>
+        </p:spPr>
+        <p:txBody>
+          <a:bodyPr wrap="square" anchor="t">
+            <a:spAutoFit/>
+          </a:bodyPr>
+          <a:lstStyle/>
+          <a:p>
+            <a:pPr algn="l">
+              <a:defRPr sz="1200" b="0">
+                <a:solidFill>
+                  <a:srgbClr val="94A3B8"/>
+                </a:solidFill>
+                <a:latin typeface="Avenir Next"/>
+              </a:defRPr>
+            </a:pPr>
+            <a:r>
+              <a:t>July 2026  ·  working draft</a:t>
+            </a:r>
+          </a:p>
+        </p:txBody>
+      </p:sp>
+      <p:sp>
+        <p:nvSpPr>
+          <p:cNvPr id="8" name="Rounded Rectangle 7"/>
+          <p:cNvSpPr/>
+          <p:nvPr/>
+        </p:nvSpPr>
+        <p:spPr>
+          <a:xfrm>
+            <a:off x="8138160" y="2148840"/>
+            <a:ext cx="685800" cy="685800"/>
+          </a:xfrm>
+          <a:prstGeom prst="roundRect">
+            <a:avLst/>
+          </a:prstGeom>
+          <a:solidFill>
+            <a:srgbClr val="14B8A6"/>
+          </a:solidFill>
+          <a:ln>
+            <a:noFill/>
+          </a:ln>
+          <a:effectLst/>
+        </p:spPr>
+        <p:style>
+          <a:lnRef idx="1">
+            <a:schemeClr val="accent1"/>
+          </a:lnRef>
+          <a:fillRef idx="3">
+            <a:schemeClr val="accent1"/>
+          </a:fillRef>
+          <a:effectRef idx="2">
+            <a:schemeClr val="accent1"/>
+          </a:effectRef>
+          <a:fontRef idx="minor">
+            <a:schemeClr val="lt1"/>
+          </a:fontRef>
+        </p:style>
+        <p:txBody>
+          <a:bodyPr rtlCol="0" anchor="ctr"/>
+          <a:lstStyle/>
+          <a:p>
+            <a:pPr algn="ctr"/>
+          </a:p>
+        </p:txBody>
+      </p:sp>
+      <p:sp>
+        <p:nvSpPr>
+          <p:cNvPr id="9" name="Rounded Rectangle 8"/>
+          <p:cNvSpPr/>
+          <p:nvPr/>
+        </p:nvSpPr>
+        <p:spPr>
+          <a:xfrm>
+            <a:off x="9006840" y="2148840"/>
+            <a:ext cx="685800" cy="685800"/>
+          </a:xfrm>
+          <a:prstGeom prst="roundRect">
+            <a:avLst/>
+          </a:prstGeom>
+          <a:solidFill>
+            <a:srgbClr val="F59E0B"/>
+          </a:solidFill>
+          <a:ln>
+            <a:noFill/>
+          </a:ln>
+          <a:effectLst/>
+        </p:spPr>
+        <p:style>
+          <a:lnRef idx="1">
+            <a:schemeClr val="accent1"/>
+          </a:lnRef>
+          <a:fillRef idx="3">
+            <a:schemeClr val="accent1"/>
+          </a:fillRef>
+          <a:effectRef idx="2">
+            <a:schemeClr val="accent1"/>
+          </a:effectRef>
+          <a:fontRef idx="minor">
+            <a:schemeClr val="lt1"/>
+          </a:fontRef>
+        </p:style>
+        <p:txBody>
+          <a:bodyPr rtlCol="0" anchor="ctr"/>
+          <a:lstStyle/>
+          <a:p>
+            <a:pPr algn="ctr"/>
+          </a:p>
+        </p:txBody>
+      </p:sp>
+      <p:sp>
+        <p:nvSpPr>
+          <p:cNvPr id="10" name="Rounded Rectangle 9"/>
+          <p:cNvSpPr/>
+          <p:nvPr/>
+        </p:nvSpPr>
+        <p:spPr>
+          <a:xfrm>
+            <a:off x="9875520" y="2148840"/>
+            <a:ext cx="685800" cy="685800"/>
+          </a:xfrm>
+          <a:prstGeom prst="roundRect">
+            <a:avLst/>
+          </a:prstGeom>
+          <a:solidFill>
+            <a:srgbClr val="3B82F6"/>
+          </a:solidFill>
+          <a:ln>
+            <a:noFill/>
+          </a:ln>
+          <a:effectLst/>
+        </p:spPr>
+        <p:style>
+          <a:lnRef idx="1">
+            <a:schemeClr val="accent1"/>
+          </a:lnRef>
+          <a:fillRef idx="3">
+            <a:schemeClr val="accent1"/>
+          </a:fillRef>
+          <a:effectRef idx="2">
+            <a:schemeClr val="accent1"/>
+          </a:effectRef>
+          <a:fontRef idx="minor">
+            <a:schemeClr val="lt1"/>
+          </a:fontRef>
+        </p:style>
+        <p:txBody>
+          <a:bodyPr rtlCol="0" anchor="ctr"/>
+          <a:lstStyle/>
+          <a:p>
+            <a:pPr algn="ctr"/>
+          </a:p>
+        </p:txBody>
+      </p:sp>
+      <p:sp>
+        <p:nvSpPr>
+          <p:cNvPr id="11" name="Rounded Rectangle 10"/>
+          <p:cNvSpPr/>
+          <p:nvPr/>
+        </p:nvSpPr>
+        <p:spPr>
+          <a:xfrm>
+            <a:off x="10744200" y="2148840"/>
+            <a:ext cx="685800" cy="685800"/>
+          </a:xfrm>
+          <a:prstGeom prst="roundRect">
+            <a:avLst/>
+          </a:prstGeom>
+          <a:solidFill>
+            <a:srgbClr val="8B5CF6"/>
+          </a:solidFill>
+          <a:ln>
+            <a:noFill/>
+          </a:ln>
+          <a:effectLst/>
+        </p:spPr>
+        <p:style>
+          <a:lnRef idx="1">
+            <a:schemeClr val="accent1"/>
+          </a:lnRef>
+          <a:fillRef idx="3">
+            <a:schemeClr val="accent1"/>
+          </a:fillRef>
+          <a:effectRef idx="2">
+            <a:schemeClr val="accent1"/>
+          </a:effectRef>
+          <a:fontRef idx="minor">
+            <a:schemeClr val="lt1"/>
+          </a:fontRef>
+        </p:style>
+        <p:txBody>
+          <a:bodyPr rtlCol="0" anchor="ctr"/>
+          <a:lstStyle/>
+          <a:p>
+            <a:pPr algn="ctr"/>
           </a:p>
         </p:txBody>
       </p:sp>
@@ -3163,109 +3544,1562 @@
       <p:grpSpPr/>
       <p:sp>
         <p:nvSpPr>
-          <p:cNvPr id="2" name="Title 1"/>
-          <p:cNvSpPr>
-            <a:spLocks noGrp="1"/>
-          </p:cNvSpPr>
-          <p:nvPr>
-            <p:ph type="title"/>
-          </p:nvPr>
-        </p:nvSpPr>
-        <p:spPr/>
-        <p:txBody>
-          <a:bodyPr/>
-          <a:lstStyle/>
-          <a:p>
-            <a:r>
-              <a:t>Where CSE is today</a:t>
-            </a:r>
-          </a:p>
-        </p:txBody>
-      </p:sp>
-      <p:sp>
-        <p:nvSpPr>
-          <p:cNvPr id="3" name="Content Placeholder 2"/>
-          <p:cNvSpPr>
-            <a:spLocks noGrp="1"/>
-          </p:cNvSpPr>
-          <p:nvPr>
-            <p:ph idx="1"/>
-          </p:nvPr>
-        </p:nvSpPr>
-        <p:spPr/>
-        <p:txBody>
-          <a:bodyPr wrap="square"/>
-          <a:lstStyle/>
-          <a:p>
-            <a:pPr>
-              <a:defRPr sz="2000"/>
-            </a:pPr>
-            <a:r>
-              <a:t>One entry module: CSEinit</a:t>
-            </a:r>
-          </a:p>
-          <a:p>
-            <a:pPr lvl="1">
-              <a:defRPr sz="1600"/>
-            </a:pPr>
-            <a:r>
-              <a:t>Two modes: standard (preloads MPI etc.) and noloads</a:t>
-            </a:r>
-          </a:p>
-          <a:p>
-            <a:pPr lvl="1">
-              <a:defRPr sz="1600"/>
-            </a:pPr>
-            <a:r>
-              <a:t>Two flavors: GCC-backed and Intel-backed</a:t>
-            </a:r>
-          </a:p>
-          <a:p>
-            <a:pPr lvl="1">
-              <a:defRPr sz="1600"/>
-            </a:pPr>
-            <a:r>
-              <a:t>Loading extends MODULEPATH and exposes compilers + packages</a:t>
-            </a:r>
-          </a:p>
-          <a:p>
-            <a:pPr>
-              <a:defRPr sz="2000"/>
-            </a:pPr>
-            <a:r>
-              <a:t>What works: the entry-module pattern, multiple compiler surfaces</a:t>
-            </a:r>
-          </a:p>
-          <a:p>
-            <a:pPr>
-              <a:defRPr sz="2000"/>
-            </a:pPr>
-            <a:r>
-              <a:t>What strains:</a:t>
-            </a:r>
-          </a:p>
-          <a:p>
-            <a:pPr lvl="1">
-              <a:defRPr sz="1600"/>
-            </a:pPr>
-            <a:r>
-              <a:t>Flat exposure — every package visible at once, conflicts by convention</a:t>
-            </a:r>
-          </a:p>
-          <a:p>
-            <a:pPr lvl="1">
-              <a:defRPr sz="1600"/>
-            </a:pPr>
-            <a:r>
-              <a:t>Hand-curated per system; a major upgrade means rebuilding everything</a:t>
-            </a:r>
-          </a:p>
-          <a:p>
-            <a:pPr lvl="1">
-              <a:defRPr sz="1600"/>
-            </a:pPr>
-            <a:r>
-              <a:t>No isolation between MPI/GPU build surfaces</a:t>
+          <p:cNvPr id="2" name="Rectangle 1"/>
+          <p:cNvSpPr/>
+          <p:nvPr/>
+        </p:nvSpPr>
+        <p:spPr>
+          <a:xfrm>
+            <a:off x="0" y="0"/>
+            <a:ext cx="12191695" cy="6858000"/>
+          </a:xfrm>
+          <a:prstGeom prst="rect">
+            <a:avLst/>
+          </a:prstGeom>
+          <a:solidFill>
+            <a:srgbClr val="0F172A"/>
+          </a:solidFill>
+          <a:ln>
+            <a:noFill/>
+          </a:ln>
+          <a:effectLst/>
+        </p:spPr>
+        <p:style>
+          <a:lnRef idx="1">
+            <a:schemeClr val="accent1"/>
+          </a:lnRef>
+          <a:fillRef idx="3">
+            <a:schemeClr val="accent1"/>
+          </a:fillRef>
+          <a:effectRef idx="2">
+            <a:schemeClr val="accent1"/>
+          </a:effectRef>
+          <a:fontRef idx="minor">
+            <a:schemeClr val="lt1"/>
+          </a:fontRef>
+        </p:style>
+        <p:txBody>
+          <a:bodyPr rtlCol="0" anchor="ctr"/>
+          <a:lstStyle/>
+          <a:p>
+            <a:pPr algn="ctr"/>
+          </a:p>
+        </p:txBody>
+      </p:sp>
+      <p:sp>
+        <p:nvSpPr>
+          <p:cNvPr id="3" name="TextBox 2"/>
+          <p:cNvSpPr txBox="1"/>
+          <p:nvPr/>
+        </p:nvSpPr>
+        <p:spPr>
+          <a:xfrm>
+            <a:off x="548640" y="256032"/>
+            <a:ext cx="10972800" cy="365760"/>
+          </a:xfrm>
+          <a:prstGeom prst="rect">
+            <a:avLst/>
+          </a:prstGeom>
+          <a:noFill/>
+        </p:spPr>
+        <p:txBody>
+          <a:bodyPr wrap="square" anchor="t">
+            <a:spAutoFit/>
+          </a:bodyPr>
+          <a:lstStyle/>
+          <a:p>
+            <a:pPr algn="l">
+              <a:defRPr sz="1300" b="1">
+                <a:solidFill>
+                  <a:srgbClr val="14B8A6"/>
+                </a:solidFill>
+                <a:latin typeface="Avenir Next"/>
+              </a:defRPr>
+            </a:pPr>
+            <a:r>
+              <a:t>WHERE WE ARE · WHERE WE'RE GOING</a:t>
+            </a:r>
+          </a:p>
+        </p:txBody>
+      </p:sp>
+      <p:sp>
+        <p:nvSpPr>
+          <p:cNvPr id="4" name="TextBox 3"/>
+          <p:cNvSpPr txBox="1"/>
+          <p:nvPr/>
+        </p:nvSpPr>
+        <p:spPr>
+          <a:xfrm>
+            <a:off x="548640" y="566928"/>
+            <a:ext cx="11064240" cy="731520"/>
+          </a:xfrm>
+          <a:prstGeom prst="rect">
+            <a:avLst/>
+          </a:prstGeom>
+          <a:noFill/>
+        </p:spPr>
+        <p:txBody>
+          <a:bodyPr wrap="square" anchor="t">
+            <a:spAutoFit/>
+          </a:bodyPr>
+          <a:lstStyle/>
+          <a:p>
+            <a:pPr algn="l">
+              <a:defRPr sz="3000" b="1">
+                <a:solidFill>
+                  <a:srgbClr val="FFFFFF"/>
+                </a:solidFill>
+                <a:latin typeface="Avenir Next"/>
+              </a:defRPr>
+            </a:pPr>
+            <a:r>
+              <a:t>From one flat surface to lanes</a:t>
+            </a:r>
+          </a:p>
+        </p:txBody>
+      </p:sp>
+      <p:sp>
+        <p:nvSpPr>
+          <p:cNvPr id="5" name="Rectangle 4"/>
+          <p:cNvSpPr/>
+          <p:nvPr/>
+        </p:nvSpPr>
+        <p:spPr>
+          <a:xfrm>
+            <a:off x="566928" y="1298448"/>
+            <a:ext cx="1463040" cy="41148"/>
+          </a:xfrm>
+          <a:prstGeom prst="rect">
+            <a:avLst/>
+          </a:prstGeom>
+          <a:solidFill>
+            <a:srgbClr val="14B8A6"/>
+          </a:solidFill>
+          <a:ln>
+            <a:noFill/>
+          </a:ln>
+          <a:effectLst/>
+        </p:spPr>
+        <p:style>
+          <a:lnRef idx="1">
+            <a:schemeClr val="accent1"/>
+          </a:lnRef>
+          <a:fillRef idx="3">
+            <a:schemeClr val="accent1"/>
+          </a:fillRef>
+          <a:effectRef idx="2">
+            <a:schemeClr val="accent1"/>
+          </a:effectRef>
+          <a:fontRef idx="minor">
+            <a:schemeClr val="lt1"/>
+          </a:fontRef>
+        </p:style>
+        <p:txBody>
+          <a:bodyPr rtlCol="0" anchor="ctr"/>
+          <a:lstStyle/>
+          <a:p>
+            <a:pPr algn="ctr"/>
+          </a:p>
+        </p:txBody>
+      </p:sp>
+      <p:sp>
+        <p:nvSpPr>
+          <p:cNvPr id="6" name="Rounded Rectangle 5"/>
+          <p:cNvSpPr/>
+          <p:nvPr/>
+        </p:nvSpPr>
+        <p:spPr>
+          <a:xfrm>
+            <a:off x="548640" y="1600200"/>
+            <a:ext cx="5349240" cy="4709160"/>
+          </a:xfrm>
+          <a:prstGeom prst="roundRect">
+            <a:avLst/>
+          </a:prstGeom>
+          <a:solidFill>
+            <a:srgbClr val="1E293B"/>
+          </a:solidFill>
+          <a:ln>
+            <a:noFill/>
+          </a:ln>
+          <a:effectLst/>
+        </p:spPr>
+        <p:style>
+          <a:lnRef idx="1">
+            <a:schemeClr val="accent1"/>
+          </a:lnRef>
+          <a:fillRef idx="3">
+            <a:schemeClr val="accent1"/>
+          </a:fillRef>
+          <a:effectRef idx="2">
+            <a:schemeClr val="accent1"/>
+          </a:effectRef>
+          <a:fontRef idx="minor">
+            <a:schemeClr val="lt1"/>
+          </a:fontRef>
+        </p:style>
+        <p:txBody>
+          <a:bodyPr rtlCol="0" anchor="ctr"/>
+          <a:lstStyle/>
+          <a:p>
+            <a:pPr algn="ctr"/>
+          </a:p>
+        </p:txBody>
+      </p:sp>
+      <p:sp>
+        <p:nvSpPr>
+          <p:cNvPr id="7" name="TextBox 6"/>
+          <p:cNvSpPr txBox="1"/>
+          <p:nvPr/>
+        </p:nvSpPr>
+        <p:spPr>
+          <a:xfrm>
+            <a:off x="777240" y="1783080"/>
+            <a:ext cx="4937760" cy="457200"/>
+          </a:xfrm>
+          <a:prstGeom prst="rect">
+            <a:avLst/>
+          </a:prstGeom>
+          <a:noFill/>
+        </p:spPr>
+        <p:txBody>
+          <a:bodyPr wrap="square" anchor="t">
+            <a:spAutoFit/>
+          </a:bodyPr>
+          <a:lstStyle/>
+          <a:p>
+            <a:pPr algn="l">
+              <a:defRPr sz="1700" b="1">
+                <a:solidFill>
+                  <a:srgbClr val="FFFFFF"/>
+                </a:solidFill>
+                <a:latin typeface="Avenir Next"/>
+              </a:defRPr>
+            </a:pPr>
+            <a:r>
+              <a:t>Today — CSEinit</a:t>
+            </a:r>
+          </a:p>
+        </p:txBody>
+      </p:sp>
+      <p:sp>
+        <p:nvSpPr>
+          <p:cNvPr id="8" name="TextBox 7"/>
+          <p:cNvSpPr txBox="1"/>
+          <p:nvPr/>
+        </p:nvSpPr>
+        <p:spPr>
+          <a:xfrm>
+            <a:off x="777240" y="2212848"/>
+            <a:ext cx="4937760" cy="365760"/>
+          </a:xfrm>
+          <a:prstGeom prst="rect">
+            <a:avLst/>
+          </a:prstGeom>
+          <a:noFill/>
+        </p:spPr>
+        <p:txBody>
+          <a:bodyPr wrap="square" anchor="t">
+            <a:spAutoFit/>
+          </a:bodyPr>
+          <a:lstStyle/>
+          <a:p>
+            <a:pPr algn="l">
+              <a:defRPr sz="1250" b="0">
+                <a:solidFill>
+                  <a:srgbClr val="94A3B8"/>
+                </a:solidFill>
+                <a:latin typeface="Avenir Next"/>
+              </a:defRPr>
+            </a:pPr>
+            <a:r>
+              <a:t>GCC- and Intel-backed flavors · standard / noloads · extends MODULEPATH</a:t>
+            </a:r>
+          </a:p>
+        </p:txBody>
+      </p:sp>
+      <p:sp>
+        <p:nvSpPr>
+          <p:cNvPr id="9" name="Rounded Rectangle 8"/>
+          <p:cNvSpPr/>
+          <p:nvPr/>
+        </p:nvSpPr>
+        <p:spPr>
+          <a:xfrm>
+            <a:off x="822960" y="2743200"/>
+            <a:ext cx="1481328" cy="384048"/>
+          </a:xfrm>
+          <a:prstGeom prst="roundRect">
+            <a:avLst/>
+          </a:prstGeom>
+          <a:solidFill>
+            <a:srgbClr val="2A374D"/>
+          </a:solidFill>
+          <a:ln>
+            <a:noFill/>
+          </a:ln>
+          <a:effectLst/>
+        </p:spPr>
+        <p:style>
+          <a:lnRef idx="1">
+            <a:schemeClr val="accent1"/>
+          </a:lnRef>
+          <a:fillRef idx="3">
+            <a:schemeClr val="accent1"/>
+          </a:fillRef>
+          <a:effectRef idx="2">
+            <a:schemeClr val="accent1"/>
+          </a:effectRef>
+          <a:fontRef idx="minor">
+            <a:schemeClr val="lt1"/>
+          </a:fontRef>
+        </p:style>
+        <p:txBody>
+          <a:bodyPr rtlCol="0" anchor="ctr" wrap="square" lIns="109728" rIns="109728"/>
+          <a:lstStyle/>
+          <a:p>
+            <a:pPr algn="ctr">
+              <a:defRPr sz="1200" b="0">
+                <a:solidFill>
+                  <a:srgbClr val="E2E8F0"/>
+                </a:solidFill>
+                <a:latin typeface="Avenir Next"/>
+              </a:defRPr>
+            </a:pPr>
+            <a:r>
+              <a:t>hdf5/1.14.6</a:t>
+            </a:r>
+          </a:p>
+        </p:txBody>
+      </p:sp>
+      <p:sp>
+        <p:nvSpPr>
+          <p:cNvPr id="10" name="Rounded Rectangle 9"/>
+          <p:cNvSpPr/>
+          <p:nvPr/>
+        </p:nvSpPr>
+        <p:spPr>
+          <a:xfrm>
+            <a:off x="2450592" y="2743200"/>
+            <a:ext cx="1481328" cy="384048"/>
+          </a:xfrm>
+          <a:prstGeom prst="roundRect">
+            <a:avLst/>
+          </a:prstGeom>
+          <a:solidFill>
+            <a:srgbClr val="2A374D"/>
+          </a:solidFill>
+          <a:ln>
+            <a:noFill/>
+          </a:ln>
+          <a:effectLst/>
+        </p:spPr>
+        <p:style>
+          <a:lnRef idx="1">
+            <a:schemeClr val="accent1"/>
+          </a:lnRef>
+          <a:fillRef idx="3">
+            <a:schemeClr val="accent1"/>
+          </a:fillRef>
+          <a:effectRef idx="2">
+            <a:schemeClr val="accent1"/>
+          </a:effectRef>
+          <a:fontRef idx="minor">
+            <a:schemeClr val="lt1"/>
+          </a:fontRef>
+        </p:style>
+        <p:txBody>
+          <a:bodyPr rtlCol="0" anchor="ctr" wrap="square" lIns="109728" rIns="109728"/>
+          <a:lstStyle/>
+          <a:p>
+            <a:pPr algn="ctr">
+              <a:defRPr sz="1200" b="0">
+                <a:solidFill>
+                  <a:srgbClr val="E2E8F0"/>
+                </a:solidFill>
+                <a:latin typeface="Avenir Next"/>
+              </a:defRPr>
+            </a:pPr>
+            <a:r>
+              <a:t>hdf5/1.10</a:t>
+            </a:r>
+          </a:p>
+        </p:txBody>
+      </p:sp>
+      <p:sp>
+        <p:nvSpPr>
+          <p:cNvPr id="11" name="Rounded Rectangle 10"/>
+          <p:cNvSpPr/>
+          <p:nvPr/>
+        </p:nvSpPr>
+        <p:spPr>
+          <a:xfrm>
+            <a:off x="4078224" y="2743200"/>
+            <a:ext cx="1481328" cy="384048"/>
+          </a:xfrm>
+          <a:prstGeom prst="roundRect">
+            <a:avLst/>
+          </a:prstGeom>
+          <a:solidFill>
+            <a:srgbClr val="2A374D"/>
+          </a:solidFill>
+          <a:ln>
+            <a:noFill/>
+          </a:ln>
+          <a:effectLst/>
+        </p:spPr>
+        <p:style>
+          <a:lnRef idx="1">
+            <a:schemeClr val="accent1"/>
+          </a:lnRef>
+          <a:fillRef idx="3">
+            <a:schemeClr val="accent1"/>
+          </a:fillRef>
+          <a:effectRef idx="2">
+            <a:schemeClr val="accent1"/>
+          </a:effectRef>
+          <a:fontRef idx="minor">
+            <a:schemeClr val="lt1"/>
+          </a:fontRef>
+        </p:style>
+        <p:txBody>
+          <a:bodyPr rtlCol="0" anchor="ctr" wrap="square" lIns="109728" rIns="109728"/>
+          <a:lstStyle/>
+          <a:p>
+            <a:pPr algn="ctr">
+              <a:defRPr sz="1200" b="0">
+                <a:solidFill>
+                  <a:srgbClr val="E2E8F0"/>
+                </a:solidFill>
+                <a:latin typeface="Avenir Next"/>
+              </a:defRPr>
+            </a:pPr>
+            <a:r>
+              <a:t>openmpi</a:t>
+            </a:r>
+          </a:p>
+        </p:txBody>
+      </p:sp>
+      <p:sp>
+        <p:nvSpPr>
+          <p:cNvPr id="12" name="Rounded Rectangle 11"/>
+          <p:cNvSpPr/>
+          <p:nvPr/>
+        </p:nvSpPr>
+        <p:spPr>
+          <a:xfrm>
+            <a:off x="822960" y="3255264"/>
+            <a:ext cx="1481328" cy="384048"/>
+          </a:xfrm>
+          <a:prstGeom prst="roundRect">
+            <a:avLst/>
+          </a:prstGeom>
+          <a:solidFill>
+            <a:srgbClr val="2A374D"/>
+          </a:solidFill>
+          <a:ln>
+            <a:noFill/>
+          </a:ln>
+          <a:effectLst/>
+        </p:spPr>
+        <p:style>
+          <a:lnRef idx="1">
+            <a:schemeClr val="accent1"/>
+          </a:lnRef>
+          <a:fillRef idx="3">
+            <a:schemeClr val="accent1"/>
+          </a:fillRef>
+          <a:effectRef idx="2">
+            <a:schemeClr val="accent1"/>
+          </a:effectRef>
+          <a:fontRef idx="minor">
+            <a:schemeClr val="lt1"/>
+          </a:fontRef>
+        </p:style>
+        <p:txBody>
+          <a:bodyPr rtlCol="0" anchor="ctr" wrap="square" lIns="109728" rIns="109728"/>
+          <a:lstStyle/>
+          <a:p>
+            <a:pPr algn="ctr">
+              <a:defRPr sz="1200" b="0">
+                <a:solidFill>
+                  <a:srgbClr val="E2E8F0"/>
+                </a:solidFill>
+                <a:latin typeface="Avenir Next"/>
+              </a:defRPr>
+            </a:pPr>
+            <a:r>
+              <a:t>boost</a:t>
+            </a:r>
+          </a:p>
+        </p:txBody>
+      </p:sp>
+      <p:sp>
+        <p:nvSpPr>
+          <p:cNvPr id="13" name="Rounded Rectangle 12"/>
+          <p:cNvSpPr/>
+          <p:nvPr/>
+        </p:nvSpPr>
+        <p:spPr>
+          <a:xfrm>
+            <a:off x="2450592" y="3255264"/>
+            <a:ext cx="1481328" cy="384048"/>
+          </a:xfrm>
+          <a:prstGeom prst="roundRect">
+            <a:avLst/>
+          </a:prstGeom>
+          <a:solidFill>
+            <a:srgbClr val="2A374D"/>
+          </a:solidFill>
+          <a:ln>
+            <a:noFill/>
+          </a:ln>
+          <a:effectLst/>
+        </p:spPr>
+        <p:style>
+          <a:lnRef idx="1">
+            <a:schemeClr val="accent1"/>
+          </a:lnRef>
+          <a:fillRef idx="3">
+            <a:schemeClr val="accent1"/>
+          </a:fillRef>
+          <a:effectRef idx="2">
+            <a:schemeClr val="accent1"/>
+          </a:effectRef>
+          <a:fontRef idx="minor">
+            <a:schemeClr val="lt1"/>
+          </a:fontRef>
+        </p:style>
+        <p:txBody>
+          <a:bodyPr rtlCol="0" anchor="ctr" wrap="square" lIns="109728" rIns="109728"/>
+          <a:lstStyle/>
+          <a:p>
+            <a:pPr algn="ctr">
+              <a:defRPr sz="1200" b="0">
+                <a:solidFill>
+                  <a:srgbClr val="E2E8F0"/>
+                </a:solidFill>
+                <a:latin typeface="Avenir Next"/>
+              </a:defRPr>
+            </a:pPr>
+            <a:r>
+              <a:t>netcdf</a:t>
+            </a:r>
+          </a:p>
+        </p:txBody>
+      </p:sp>
+      <p:sp>
+        <p:nvSpPr>
+          <p:cNvPr id="14" name="Rounded Rectangle 13"/>
+          <p:cNvSpPr/>
+          <p:nvPr/>
+        </p:nvSpPr>
+        <p:spPr>
+          <a:xfrm>
+            <a:off x="4078224" y="3255264"/>
+            <a:ext cx="1481328" cy="384048"/>
+          </a:xfrm>
+          <a:prstGeom prst="roundRect">
+            <a:avLst/>
+          </a:prstGeom>
+          <a:solidFill>
+            <a:srgbClr val="2A374D"/>
+          </a:solidFill>
+          <a:ln>
+            <a:noFill/>
+          </a:ln>
+          <a:effectLst/>
+        </p:spPr>
+        <p:style>
+          <a:lnRef idx="1">
+            <a:schemeClr val="accent1"/>
+          </a:lnRef>
+          <a:fillRef idx="3">
+            <a:schemeClr val="accent1"/>
+          </a:fillRef>
+          <a:effectRef idx="2">
+            <a:schemeClr val="accent1"/>
+          </a:effectRef>
+          <a:fontRef idx="minor">
+            <a:schemeClr val="lt1"/>
+          </a:fontRef>
+        </p:style>
+        <p:txBody>
+          <a:bodyPr rtlCol="0" anchor="ctr" wrap="square" lIns="109728" rIns="109728"/>
+          <a:lstStyle/>
+          <a:p>
+            <a:pPr algn="ctr">
+              <a:defRPr sz="1200" b="0">
+                <a:solidFill>
+                  <a:srgbClr val="E2E8F0"/>
+                </a:solidFill>
+                <a:latin typeface="Avenir Next"/>
+              </a:defRPr>
+            </a:pPr>
+            <a:r>
+              <a:t>fftw</a:t>
+            </a:r>
+          </a:p>
+        </p:txBody>
+      </p:sp>
+      <p:sp>
+        <p:nvSpPr>
+          <p:cNvPr id="15" name="Rounded Rectangle 14"/>
+          <p:cNvSpPr/>
+          <p:nvPr/>
+        </p:nvSpPr>
+        <p:spPr>
+          <a:xfrm>
+            <a:off x="822960" y="3767328"/>
+            <a:ext cx="1481328" cy="384048"/>
+          </a:xfrm>
+          <a:prstGeom prst="roundRect">
+            <a:avLst/>
+          </a:prstGeom>
+          <a:solidFill>
+            <a:srgbClr val="2A374D"/>
+          </a:solidFill>
+          <a:ln>
+            <a:noFill/>
+          </a:ln>
+          <a:effectLst/>
+        </p:spPr>
+        <p:style>
+          <a:lnRef idx="1">
+            <a:schemeClr val="accent1"/>
+          </a:lnRef>
+          <a:fillRef idx="3">
+            <a:schemeClr val="accent1"/>
+          </a:fillRef>
+          <a:effectRef idx="2">
+            <a:schemeClr val="accent1"/>
+          </a:effectRef>
+          <a:fontRef idx="minor">
+            <a:schemeClr val="lt1"/>
+          </a:fontRef>
+        </p:style>
+        <p:txBody>
+          <a:bodyPr rtlCol="0" anchor="ctr" wrap="square" lIns="109728" rIns="109728"/>
+          <a:lstStyle/>
+          <a:p>
+            <a:pPr algn="ctr">
+              <a:defRPr sz="1200" b="0">
+                <a:solidFill>
+                  <a:srgbClr val="E2E8F0"/>
+                </a:solidFill>
+                <a:latin typeface="Avenir Next"/>
+              </a:defRPr>
+            </a:pPr>
+            <a:r>
+              <a:t>python</a:t>
+            </a:r>
+          </a:p>
+        </p:txBody>
+      </p:sp>
+      <p:sp>
+        <p:nvSpPr>
+          <p:cNvPr id="16" name="Rounded Rectangle 15"/>
+          <p:cNvSpPr/>
+          <p:nvPr/>
+        </p:nvSpPr>
+        <p:spPr>
+          <a:xfrm>
+            <a:off x="2450592" y="3767328"/>
+            <a:ext cx="1481328" cy="384048"/>
+          </a:xfrm>
+          <a:prstGeom prst="roundRect">
+            <a:avLst/>
+          </a:prstGeom>
+          <a:solidFill>
+            <a:srgbClr val="2A374D"/>
+          </a:solidFill>
+          <a:ln>
+            <a:noFill/>
+          </a:ln>
+          <a:effectLst/>
+        </p:spPr>
+        <p:style>
+          <a:lnRef idx="1">
+            <a:schemeClr val="accent1"/>
+          </a:lnRef>
+          <a:fillRef idx="3">
+            <a:schemeClr val="accent1"/>
+          </a:fillRef>
+          <a:effectRef idx="2">
+            <a:schemeClr val="accent1"/>
+          </a:effectRef>
+          <a:fontRef idx="minor">
+            <a:schemeClr val="lt1"/>
+          </a:fontRef>
+        </p:style>
+        <p:txBody>
+          <a:bodyPr rtlCol="0" anchor="ctr" wrap="square" lIns="109728" rIns="109728"/>
+          <a:lstStyle/>
+          <a:p>
+            <a:pPr algn="ctr">
+              <a:defRPr sz="1200" b="0">
+                <a:solidFill>
+                  <a:srgbClr val="E2E8F0"/>
+                </a:solidFill>
+                <a:latin typeface="Avenir Next"/>
+              </a:defRPr>
+            </a:pPr>
+            <a:r>
+              <a:t>mkl</a:t>
+            </a:r>
+          </a:p>
+        </p:txBody>
+      </p:sp>
+      <p:sp>
+        <p:nvSpPr>
+          <p:cNvPr id="17" name="Rounded Rectangle 16"/>
+          <p:cNvSpPr/>
+          <p:nvPr/>
+        </p:nvSpPr>
+        <p:spPr>
+          <a:xfrm>
+            <a:off x="4078224" y="3767328"/>
+            <a:ext cx="1481328" cy="384048"/>
+          </a:xfrm>
+          <a:prstGeom prst="roundRect">
+            <a:avLst/>
+          </a:prstGeom>
+          <a:solidFill>
+            <a:srgbClr val="2A374D"/>
+          </a:solidFill>
+          <a:ln>
+            <a:noFill/>
+          </a:ln>
+          <a:effectLst/>
+        </p:spPr>
+        <p:style>
+          <a:lnRef idx="1">
+            <a:schemeClr val="accent1"/>
+          </a:lnRef>
+          <a:fillRef idx="3">
+            <a:schemeClr val="accent1"/>
+          </a:fillRef>
+          <a:effectRef idx="2">
+            <a:schemeClr val="accent1"/>
+          </a:effectRef>
+          <a:fontRef idx="minor">
+            <a:schemeClr val="lt1"/>
+          </a:fontRef>
+        </p:style>
+        <p:txBody>
+          <a:bodyPr rtlCol="0" anchor="ctr" wrap="square" lIns="109728" rIns="109728"/>
+          <a:lstStyle/>
+          <a:p>
+            <a:pPr algn="ctr">
+              <a:defRPr sz="1200" b="0">
+                <a:solidFill>
+                  <a:srgbClr val="E2E8F0"/>
+                </a:solidFill>
+                <a:latin typeface="Avenir Next"/>
+              </a:defRPr>
+            </a:pPr>
+            <a:r>
+              <a:t>gsl</a:t>
+            </a:r>
+          </a:p>
+        </p:txBody>
+      </p:sp>
+      <p:sp>
+        <p:nvSpPr>
+          <p:cNvPr id="18" name="Rounded Rectangle 17"/>
+          <p:cNvSpPr/>
+          <p:nvPr/>
+        </p:nvSpPr>
+        <p:spPr>
+          <a:xfrm>
+            <a:off x="822960" y="4279392"/>
+            <a:ext cx="1481328" cy="384048"/>
+          </a:xfrm>
+          <a:prstGeom prst="roundRect">
+            <a:avLst/>
+          </a:prstGeom>
+          <a:solidFill>
+            <a:srgbClr val="2A374D"/>
+          </a:solidFill>
+          <a:ln>
+            <a:noFill/>
+          </a:ln>
+          <a:effectLst/>
+        </p:spPr>
+        <p:style>
+          <a:lnRef idx="1">
+            <a:schemeClr val="accent1"/>
+          </a:lnRef>
+          <a:fillRef idx="3">
+            <a:schemeClr val="accent1"/>
+          </a:fillRef>
+          <a:effectRef idx="2">
+            <a:schemeClr val="accent1"/>
+          </a:effectRef>
+          <a:fontRef idx="minor">
+            <a:schemeClr val="lt1"/>
+          </a:fontRef>
+        </p:style>
+        <p:txBody>
+          <a:bodyPr rtlCol="0" anchor="ctr" wrap="square" lIns="109728" rIns="109728"/>
+          <a:lstStyle/>
+          <a:p>
+            <a:pPr algn="ctr">
+              <a:defRPr sz="1200" b="0">
+                <a:solidFill>
+                  <a:srgbClr val="E2E8F0"/>
+                </a:solidFill>
+                <a:latin typeface="Avenir Next"/>
+              </a:defRPr>
+            </a:pPr>
+            <a:r>
+              <a:t>tau</a:t>
+            </a:r>
+          </a:p>
+        </p:txBody>
+      </p:sp>
+      <p:sp>
+        <p:nvSpPr>
+          <p:cNvPr id="19" name="Rounded Rectangle 18"/>
+          <p:cNvSpPr/>
+          <p:nvPr/>
+        </p:nvSpPr>
+        <p:spPr>
+          <a:xfrm>
+            <a:off x="2450592" y="4279392"/>
+            <a:ext cx="1481328" cy="384048"/>
+          </a:xfrm>
+          <a:prstGeom prst="roundRect">
+            <a:avLst/>
+          </a:prstGeom>
+          <a:solidFill>
+            <a:srgbClr val="2A374D"/>
+          </a:solidFill>
+          <a:ln>
+            <a:noFill/>
+          </a:ln>
+          <a:effectLst/>
+        </p:spPr>
+        <p:style>
+          <a:lnRef idx="1">
+            <a:schemeClr val="accent1"/>
+          </a:lnRef>
+          <a:fillRef idx="3">
+            <a:schemeClr val="accent1"/>
+          </a:fillRef>
+          <a:effectRef idx="2">
+            <a:schemeClr val="accent1"/>
+          </a:effectRef>
+          <a:fontRef idx="minor">
+            <a:schemeClr val="lt1"/>
+          </a:fontRef>
+        </p:style>
+        <p:txBody>
+          <a:bodyPr rtlCol="0" anchor="ctr" wrap="square" lIns="109728" rIns="109728"/>
+          <a:lstStyle/>
+          <a:p>
+            <a:pPr algn="ctr">
+              <a:defRPr sz="1200" b="0">
+                <a:solidFill>
+                  <a:srgbClr val="E2E8F0"/>
+                </a:solidFill>
+                <a:latin typeface="Avenir Next"/>
+              </a:defRPr>
+            </a:pPr>
+            <a:r>
+              <a:t>cmake</a:t>
+            </a:r>
+          </a:p>
+        </p:txBody>
+      </p:sp>
+      <p:sp>
+        <p:nvSpPr>
+          <p:cNvPr id="20" name="Rounded Rectangle 19"/>
+          <p:cNvSpPr/>
+          <p:nvPr/>
+        </p:nvSpPr>
+        <p:spPr>
+          <a:xfrm>
+            <a:off x="4078224" y="4279392"/>
+            <a:ext cx="1481328" cy="384048"/>
+          </a:xfrm>
+          <a:prstGeom prst="roundRect">
+            <a:avLst/>
+          </a:prstGeom>
+          <a:solidFill>
+            <a:srgbClr val="2A374D"/>
+          </a:solidFill>
+          <a:ln>
+            <a:noFill/>
+          </a:ln>
+          <a:effectLst/>
+        </p:spPr>
+        <p:style>
+          <a:lnRef idx="1">
+            <a:schemeClr val="accent1"/>
+          </a:lnRef>
+          <a:fillRef idx="3">
+            <a:schemeClr val="accent1"/>
+          </a:fillRef>
+          <a:effectRef idx="2">
+            <a:schemeClr val="accent1"/>
+          </a:effectRef>
+          <a:fontRef idx="minor">
+            <a:schemeClr val="lt1"/>
+          </a:fontRef>
+        </p:style>
+        <p:txBody>
+          <a:bodyPr rtlCol="0" anchor="ctr" wrap="square" lIns="109728" rIns="109728"/>
+          <a:lstStyle/>
+          <a:p>
+            <a:pPr algn="ctr">
+              <a:defRPr sz="1200" b="0">
+                <a:solidFill>
+                  <a:srgbClr val="E2E8F0"/>
+                </a:solidFill>
+                <a:latin typeface="Avenir Next"/>
+              </a:defRPr>
+            </a:pPr>
+            <a:r>
+              <a:t>openblas</a:t>
+            </a:r>
+          </a:p>
+        </p:txBody>
+      </p:sp>
+      <p:sp>
+        <p:nvSpPr>
+          <p:cNvPr id="21" name="TextBox 20"/>
+          <p:cNvSpPr txBox="1"/>
+          <p:nvPr/>
+        </p:nvSpPr>
+        <p:spPr>
+          <a:xfrm>
+            <a:off x="777240" y="4983480"/>
+            <a:ext cx="4937760" cy="1188720"/>
+          </a:xfrm>
+          <a:prstGeom prst="rect">
+            <a:avLst/>
+          </a:prstGeom>
+          <a:noFill/>
+        </p:spPr>
+        <p:txBody>
+          <a:bodyPr wrap="square" anchor="t">
+            <a:spAutoFit/>
+          </a:bodyPr>
+          <a:lstStyle/>
+          <a:p>
+            <a:pPr algn="l">
+              <a:defRPr sz="1350" b="1">
+                <a:solidFill>
+                  <a:srgbClr val="F59E0B"/>
+                </a:solidFill>
+                <a:latin typeface="Avenir Next"/>
+              </a:defRPr>
+            </a:pPr>
+            <a:r>
+              <a:t>Everything visible at once.</a:t>
+            </a:r>
+          </a:p>
+          <a:p>
+            <a:pPr algn="l">
+              <a:defRPr sz="1250" b="0">
+                <a:solidFill>
+                  <a:srgbClr val="94A3B8"/>
+                </a:solidFill>
+                <a:latin typeface="Avenir Next"/>
+              </a:defRPr>
+            </a:pPr>
+            <a:r>
+              <a:t>Conflicts avoided by convention · MPI/GPU surfaces not isolated ·</a:t>
+            </a:r>
+          </a:p>
+          <a:p>
+            <a:pPr algn="l">
+              <a:defRPr sz="1250" b="0">
+                <a:solidFill>
+                  <a:srgbClr val="94A3B8"/>
+                </a:solidFill>
+                <a:latin typeface="Avenir Next"/>
+              </a:defRPr>
+            </a:pPr>
+            <a:r>
+              <a:t>hand-curated per system — upgrades mean rebuilding everything</a:t>
+            </a:r>
+          </a:p>
+        </p:txBody>
+      </p:sp>
+      <p:sp>
+        <p:nvSpPr>
+          <p:cNvPr id="22" name="Rounded Rectangle 21"/>
+          <p:cNvSpPr/>
+          <p:nvPr/>
+        </p:nvSpPr>
+        <p:spPr>
+          <a:xfrm>
+            <a:off x="6263640" y="1600200"/>
+            <a:ext cx="5349240" cy="4709160"/>
+          </a:xfrm>
+          <a:prstGeom prst="roundRect">
+            <a:avLst/>
+          </a:prstGeom>
+          <a:solidFill>
+            <a:srgbClr val="1E293B"/>
+          </a:solidFill>
+          <a:ln>
+            <a:noFill/>
+          </a:ln>
+          <a:effectLst/>
+        </p:spPr>
+        <p:style>
+          <a:lnRef idx="1">
+            <a:schemeClr val="accent1"/>
+          </a:lnRef>
+          <a:fillRef idx="3">
+            <a:schemeClr val="accent1"/>
+          </a:fillRef>
+          <a:effectRef idx="2">
+            <a:schemeClr val="accent1"/>
+          </a:effectRef>
+          <a:fontRef idx="minor">
+            <a:schemeClr val="lt1"/>
+          </a:fontRef>
+        </p:style>
+        <p:txBody>
+          <a:bodyPr rtlCol="0" anchor="ctr"/>
+          <a:lstStyle/>
+          <a:p>
+            <a:pPr algn="ctr"/>
+          </a:p>
+        </p:txBody>
+      </p:sp>
+      <p:sp>
+        <p:nvSpPr>
+          <p:cNvPr id="23" name="TextBox 22"/>
+          <p:cNvSpPr txBox="1"/>
+          <p:nvPr/>
+        </p:nvSpPr>
+        <p:spPr>
+          <a:xfrm>
+            <a:off x="6492240" y="1783080"/>
+            <a:ext cx="4937760" cy="457200"/>
+          </a:xfrm>
+          <a:prstGeom prst="rect">
+            <a:avLst/>
+          </a:prstGeom>
+          <a:noFill/>
+        </p:spPr>
+        <p:txBody>
+          <a:bodyPr wrap="square" anchor="t">
+            <a:spAutoFit/>
+          </a:bodyPr>
+          <a:lstStyle/>
+          <a:p>
+            <a:pPr algn="l">
+              <a:defRPr sz="1700" b="1">
+                <a:solidFill>
+                  <a:srgbClr val="FFFFFF"/>
+                </a:solidFill>
+                <a:latin typeface="Avenir Next"/>
+              </a:defRPr>
+            </a:pPr>
+            <a:r>
+              <a:t>The lanes model</a:t>
+            </a:r>
+          </a:p>
+        </p:txBody>
+      </p:sp>
+      <p:sp>
+        <p:nvSpPr>
+          <p:cNvPr id="24" name="Rounded Rectangle 23"/>
+          <p:cNvSpPr/>
+          <p:nvPr/>
+        </p:nvSpPr>
+        <p:spPr>
+          <a:xfrm>
+            <a:off x="6766560" y="2331720"/>
+            <a:ext cx="4343400" cy="457200"/>
+          </a:xfrm>
+          <a:prstGeom prst="roundRect">
+            <a:avLst/>
+          </a:prstGeom>
+          <a:solidFill>
+            <a:srgbClr val="2A374D"/>
+          </a:solidFill>
+          <a:ln>
+            <a:noFill/>
+          </a:ln>
+          <a:effectLst/>
+        </p:spPr>
+        <p:style>
+          <a:lnRef idx="1">
+            <a:schemeClr val="accent1"/>
+          </a:lnRef>
+          <a:fillRef idx="3">
+            <a:schemeClr val="accent1"/>
+          </a:fillRef>
+          <a:effectRef idx="2">
+            <a:schemeClr val="accent1"/>
+          </a:effectRef>
+          <a:fontRef idx="minor">
+            <a:schemeClr val="lt1"/>
+          </a:fontRef>
+        </p:style>
+        <p:txBody>
+          <a:bodyPr rtlCol="0" anchor="ctr" wrap="square" lIns="109728" rIns="109728"/>
+          <a:lstStyle/>
+          <a:p>
+            <a:pPr algn="ctr">
+              <a:defRPr sz="1300" b="1">
+                <a:solidFill>
+                  <a:srgbClr val="E2E8F0"/>
+                </a:solidFill>
+                <a:latin typeface="Avenir Next"/>
+              </a:defRPr>
+            </a:pPr>
+            <a:r>
+              <a:t>module load cse/gcc</a:t>
+            </a:r>
+          </a:p>
+        </p:txBody>
+      </p:sp>
+      <p:cxnSp>
+        <p:nvCxnSpPr>
+          <p:cNvPr id="25" name="Connector 24"/>
+          <p:cNvCxnSpPr/>
+          <p:nvPr/>
+        </p:nvCxnSpPr>
+        <p:spPr>
+          <a:xfrm>
+            <a:off x="8938260" y="2788920"/>
+            <a:ext cx="0" cy="274320"/>
+          </a:xfrm>
+          <a:prstGeom prst="line">
+            <a:avLst/>
+          </a:prstGeom>
+          <a:ln w="31750">
+            <a:solidFill>
+              <a:srgbClr val="94A3B8"/>
+            </a:solidFill>
+            <a:tailEnd type="triangle" w="med" len="med"/>
+          </a:ln>
+          <a:effectLst/>
+        </p:spPr>
+        <p:style>
+          <a:lnRef idx="2">
+            <a:schemeClr val="accent1"/>
+          </a:lnRef>
+          <a:fillRef idx="0">
+            <a:schemeClr val="accent1"/>
+          </a:fillRef>
+          <a:effectRef idx="1">
+            <a:schemeClr val="accent1"/>
+          </a:effectRef>
+          <a:fontRef idx="minor">
+            <a:schemeClr val="tx1"/>
+          </a:fontRef>
+        </p:style>
+      </p:cxnSp>
+      <p:sp>
+        <p:nvSpPr>
+          <p:cNvPr id="26" name="Rounded Rectangle 25"/>
+          <p:cNvSpPr/>
+          <p:nvPr/>
+        </p:nvSpPr>
+        <p:spPr>
+          <a:xfrm>
+            <a:off x="6766560" y="3063240"/>
+            <a:ext cx="2103120" cy="566928"/>
+          </a:xfrm>
+          <a:prstGeom prst="roundRect">
+            <a:avLst/>
+          </a:prstGeom>
+          <a:solidFill>
+            <a:srgbClr val="14B8A6"/>
+          </a:solidFill>
+          <a:ln>
+            <a:noFill/>
+          </a:ln>
+          <a:effectLst/>
+        </p:spPr>
+        <p:style>
+          <a:lnRef idx="1">
+            <a:schemeClr val="accent1"/>
+          </a:lnRef>
+          <a:fillRef idx="3">
+            <a:schemeClr val="accent1"/>
+          </a:fillRef>
+          <a:effectRef idx="2">
+            <a:schemeClr val="accent1"/>
+          </a:effectRef>
+          <a:fontRef idx="minor">
+            <a:schemeClr val="lt1"/>
+          </a:fontRef>
+        </p:style>
+        <p:txBody>
+          <a:bodyPr rtlCol="0" anchor="ctr" wrap="square" lIns="109728" rIns="109728"/>
+          <a:lstStyle/>
+          <a:p>
+            <a:pPr algn="ctr">
+              <a:defRPr sz="1250" b="1">
+                <a:solidFill>
+                  <a:srgbClr val="FFFFFF"/>
+                </a:solidFill>
+                <a:latin typeface="Avenir Next"/>
+              </a:defRPr>
+            </a:pPr>
+            <a:r>
+              <a:t>Core — automatic</a:t>
+            </a:r>
+          </a:p>
+        </p:txBody>
+      </p:sp>
+      <p:sp>
+        <p:nvSpPr>
+          <p:cNvPr id="27" name="Rounded Rectangle 26"/>
+          <p:cNvSpPr/>
+          <p:nvPr/>
+        </p:nvSpPr>
+        <p:spPr>
+          <a:xfrm>
+            <a:off x="9006840" y="3063240"/>
+            <a:ext cx="2103120" cy="566928"/>
+          </a:xfrm>
+          <a:prstGeom prst="roundRect">
+            <a:avLst/>
+          </a:prstGeom>
+          <a:solidFill>
+            <a:srgbClr val="64748B"/>
+          </a:solidFill>
+          <a:ln>
+            <a:noFill/>
+          </a:ln>
+          <a:effectLst/>
+        </p:spPr>
+        <p:style>
+          <a:lnRef idx="1">
+            <a:schemeClr val="accent1"/>
+          </a:lnRef>
+          <a:fillRef idx="3">
+            <a:schemeClr val="accent1"/>
+          </a:fillRef>
+          <a:effectRef idx="2">
+            <a:schemeClr val="accent1"/>
+          </a:effectRef>
+          <a:fontRef idx="minor">
+            <a:schemeClr val="lt1"/>
+          </a:fontRef>
+        </p:style>
+        <p:txBody>
+          <a:bodyPr rtlCol="0" anchor="ctr" wrap="square" lIns="109728" rIns="109728"/>
+          <a:lstStyle/>
+          <a:p>
+            <a:pPr algn="ctr">
+              <a:defRPr sz="1250" b="1">
+                <a:solidFill>
+                  <a:srgbClr val="FFFFFF"/>
+                </a:solidFill>
+                <a:latin typeface="Avenir Next"/>
+              </a:defRPr>
+            </a:pPr>
+            <a:r>
+              <a:t>Foundation — in view</a:t>
+            </a:r>
+          </a:p>
+        </p:txBody>
+      </p:sp>
+      <p:cxnSp>
+        <p:nvCxnSpPr>
+          <p:cNvPr id="28" name="Connector 27"/>
+          <p:cNvCxnSpPr/>
+          <p:nvPr/>
+        </p:nvCxnSpPr>
+        <p:spPr>
+          <a:xfrm>
+            <a:off x="8938260" y="3630168"/>
+            <a:ext cx="0" cy="274319"/>
+          </a:xfrm>
+          <a:prstGeom prst="line">
+            <a:avLst/>
+          </a:prstGeom>
+          <a:ln w="31750">
+            <a:solidFill>
+              <a:srgbClr val="94A3B8"/>
+            </a:solidFill>
+            <a:tailEnd type="triangle" w="med" len="med"/>
+          </a:ln>
+          <a:effectLst/>
+        </p:spPr>
+        <p:style>
+          <a:lnRef idx="2">
+            <a:schemeClr val="accent1"/>
+          </a:lnRef>
+          <a:fillRef idx="0">
+            <a:schemeClr val="accent1"/>
+          </a:fillRef>
+          <a:effectRef idx="1">
+            <a:schemeClr val="accent1"/>
+          </a:effectRef>
+          <a:fontRef idx="minor">
+            <a:schemeClr val="tx1"/>
+          </a:fontRef>
+        </p:style>
+      </p:cxnSp>
+      <p:sp>
+        <p:nvSpPr>
+          <p:cNvPr id="29" name="TextBox 28"/>
+          <p:cNvSpPr txBox="1"/>
+          <p:nvPr/>
+        </p:nvSpPr>
+        <p:spPr>
+          <a:xfrm>
+            <a:off x="6766560" y="3904487"/>
+            <a:ext cx="4480560" cy="320040"/>
+          </a:xfrm>
+          <a:prstGeom prst="rect">
+            <a:avLst/>
+          </a:prstGeom>
+          <a:noFill/>
+        </p:spPr>
+        <p:txBody>
+          <a:bodyPr wrap="square" anchor="t">
+            <a:spAutoFit/>
+          </a:bodyPr>
+          <a:lstStyle/>
+          <a:p>
+            <a:pPr algn="ctr">
+              <a:defRPr sz="1150" b="1">
+                <a:solidFill>
+                  <a:srgbClr val="94A3B8"/>
+                </a:solidFill>
+                <a:latin typeface="Avenir Next"/>
+              </a:defRPr>
+            </a:pPr>
+            <a:r>
+              <a:t>CHOOSE EXACTLY ONE</a:t>
+            </a:r>
+          </a:p>
+        </p:txBody>
+      </p:sp>
+      <p:sp>
+        <p:nvSpPr>
+          <p:cNvPr id="30" name="Rounded Rectangle 29"/>
+          <p:cNvSpPr/>
+          <p:nvPr/>
+        </p:nvSpPr>
+        <p:spPr>
+          <a:xfrm>
+            <a:off x="6766560" y="4224528"/>
+            <a:ext cx="1371600" cy="548640"/>
+          </a:xfrm>
+          <a:prstGeom prst="roundRect">
+            <a:avLst/>
+          </a:prstGeom>
+          <a:solidFill>
+            <a:srgbClr val="F59E0B"/>
+          </a:solidFill>
+          <a:ln>
+            <a:noFill/>
+          </a:ln>
+          <a:effectLst/>
+        </p:spPr>
+        <p:style>
+          <a:lnRef idx="1">
+            <a:schemeClr val="accent1"/>
+          </a:lnRef>
+          <a:fillRef idx="3">
+            <a:schemeClr val="accent1"/>
+          </a:fillRef>
+          <a:effectRef idx="2">
+            <a:schemeClr val="accent1"/>
+          </a:effectRef>
+          <a:fontRef idx="minor">
+            <a:schemeClr val="lt1"/>
+          </a:fontRef>
+        </p:style>
+        <p:txBody>
+          <a:bodyPr rtlCol="0" anchor="ctr" wrap="square" lIns="109728" rIns="109728"/>
+          <a:lstStyle/>
+          <a:p>
+            <a:pPr algn="ctr">
+              <a:defRPr sz="1250" b="1">
+                <a:solidFill>
+                  <a:srgbClr val="FFFFFF"/>
+                </a:solidFill>
+                <a:latin typeface="Avenir Next"/>
+              </a:defRPr>
+            </a:pPr>
+            <a:r>
+              <a:t>serial</a:t>
+            </a:r>
+          </a:p>
+        </p:txBody>
+      </p:sp>
+      <p:sp>
+        <p:nvSpPr>
+          <p:cNvPr id="31" name="Rounded Rectangle 30"/>
+          <p:cNvSpPr/>
+          <p:nvPr/>
+        </p:nvSpPr>
+        <p:spPr>
+          <a:xfrm>
+            <a:off x="8229600" y="4224528"/>
+            <a:ext cx="1371600" cy="548640"/>
+          </a:xfrm>
+          <a:prstGeom prst="roundRect">
+            <a:avLst/>
+          </a:prstGeom>
+          <a:solidFill>
+            <a:srgbClr val="3B82F6"/>
+          </a:solidFill>
+          <a:ln>
+            <a:noFill/>
+          </a:ln>
+          <a:effectLst/>
+        </p:spPr>
+        <p:style>
+          <a:lnRef idx="1">
+            <a:schemeClr val="accent1"/>
+          </a:lnRef>
+          <a:fillRef idx="3">
+            <a:schemeClr val="accent1"/>
+          </a:fillRef>
+          <a:effectRef idx="2">
+            <a:schemeClr val="accent1"/>
+          </a:effectRef>
+          <a:fontRef idx="minor">
+            <a:schemeClr val="lt1"/>
+          </a:fontRef>
+        </p:style>
+        <p:txBody>
+          <a:bodyPr rtlCol="0" anchor="ctr" wrap="square" lIns="109728" rIns="109728"/>
+          <a:lstStyle/>
+          <a:p>
+            <a:pPr algn="ctr">
+              <a:defRPr sz="1250" b="1">
+                <a:solidFill>
+                  <a:srgbClr val="FFFFFF"/>
+                </a:solidFill>
+                <a:latin typeface="Avenir Next"/>
+              </a:defRPr>
+            </a:pPr>
+            <a:r>
+              <a:t>mpi</a:t>
+            </a:r>
+          </a:p>
+        </p:txBody>
+      </p:sp>
+      <p:sp>
+        <p:nvSpPr>
+          <p:cNvPr id="32" name="Rounded Rectangle 31"/>
+          <p:cNvSpPr/>
+          <p:nvPr/>
+        </p:nvSpPr>
+        <p:spPr>
+          <a:xfrm>
+            <a:off x="9692640" y="4224528"/>
+            <a:ext cx="1417320" cy="548640"/>
+          </a:xfrm>
+          <a:prstGeom prst="roundRect">
+            <a:avLst/>
+          </a:prstGeom>
+          <a:solidFill>
+            <a:srgbClr val="8B5CF6"/>
+          </a:solidFill>
+          <a:ln>
+            <a:noFill/>
+          </a:ln>
+          <a:effectLst/>
+        </p:spPr>
+        <p:style>
+          <a:lnRef idx="1">
+            <a:schemeClr val="accent1"/>
+          </a:lnRef>
+          <a:fillRef idx="3">
+            <a:schemeClr val="accent1"/>
+          </a:fillRef>
+          <a:effectRef idx="2">
+            <a:schemeClr val="accent1"/>
+          </a:effectRef>
+          <a:fontRef idx="minor">
+            <a:schemeClr val="lt1"/>
+          </a:fontRef>
+        </p:style>
+        <p:txBody>
+          <a:bodyPr rtlCol="0" anchor="ctr" wrap="square" lIns="109728" rIns="109728"/>
+          <a:lstStyle/>
+          <a:p>
+            <a:pPr algn="ctr">
+              <a:defRPr sz="1250" b="1">
+                <a:solidFill>
+                  <a:srgbClr val="FFFFFF"/>
+                </a:solidFill>
+                <a:latin typeface="Avenir Next"/>
+              </a:defRPr>
+            </a:pPr>
+            <a:r>
+              <a:t>gpu</a:t>
+            </a:r>
+          </a:p>
+        </p:txBody>
+      </p:sp>
+      <p:sp>
+        <p:nvSpPr>
+          <p:cNvPr id="33" name="TextBox 32"/>
+          <p:cNvSpPr txBox="1"/>
+          <p:nvPr/>
+        </p:nvSpPr>
+        <p:spPr>
+          <a:xfrm>
+            <a:off x="6492240" y="4983480"/>
+            <a:ext cx="4937760" cy="1188720"/>
+          </a:xfrm>
+          <a:prstGeom prst="rect">
+            <a:avLst/>
+          </a:prstGeom>
+          <a:noFill/>
+        </p:spPr>
+        <p:txBody>
+          <a:bodyPr wrap="square" anchor="t">
+            <a:spAutoFit/>
+          </a:bodyPr>
+          <a:lstStyle/>
+          <a:p>
+            <a:pPr algn="l">
+              <a:defRPr sz="1350" b="1">
+                <a:solidFill>
+                  <a:srgbClr val="14B8A6"/>
+                </a:solidFill>
+                <a:latin typeface="Avenir Next"/>
+              </a:defRPr>
+            </a:pPr>
+            <a:r>
+              <a:t>You see exactly one lane.</a:t>
+            </a:r>
+          </a:p>
+          <a:p>
+            <a:pPr algn="l">
+              <a:defRPr sz="1250" b="0">
+                <a:solidFill>
+                  <a:srgbClr val="94A3B8"/>
+                </a:solidFill>
+                <a:latin typeface="Avenir Next"/>
+              </a:defRPr>
+            </a:pPr>
+            <a:r>
+              <a:t>No contamination, no accidental MPI/GPU linkage ·</a:t>
+            </a:r>
+          </a:p>
+          <a:p>
+            <a:pPr algn="l">
+              <a:defRPr sz="1250" b="0">
+                <a:solidFill>
+                  <a:srgbClr val="94A3B8"/>
+                </a:solidFill>
+                <a:latin typeface="Avenir Next"/>
+              </a:defRPr>
+            </a:pPr>
+            <a:r>
+              <a:t>versions inside a lane stay a one-at-a-time module choice</a:t>
             </a:r>
           </a:p>
         </p:txBody>
@@ -3290,117 +5124,880 @@
       <p:grpSpPr/>
       <p:sp>
         <p:nvSpPr>
-          <p:cNvPr id="2" name="Title 1"/>
-          <p:cNvSpPr>
-            <a:spLocks noGrp="1"/>
-          </p:cNvSpPr>
-          <p:nvPr>
-            <p:ph type="title"/>
-          </p:nvPr>
-        </p:nvSpPr>
-        <p:spPr/>
-        <p:txBody>
-          <a:bodyPr/>
-          <a:lstStyle/>
-          <a:p>
-            <a:r>
-              <a:t>What the community runs in production</a:t>
-            </a:r>
-          </a:p>
-        </p:txBody>
-      </p:sp>
-      <p:sp>
-        <p:nvSpPr>
-          <p:cNvPr id="3" name="Content Placeholder 2"/>
-          <p:cNvSpPr>
-            <a:spLocks noGrp="1"/>
-          </p:cNvSpPr>
-          <p:nvPr>
-            <p:ph idx="1"/>
-          </p:nvPr>
-        </p:nvSpPr>
-        <p:spPr/>
-        <p:txBody>
-          <a:bodyPr wrap="square"/>
-          <a:lstStyle/>
-          <a:p>
-            <a:pPr>
-              <a:defRPr sz="2000"/>
-            </a:pPr>
-            <a:r>
-              <a:t>NASA JSC Flight Sciences Lab (HPSF 2026)</a:t>
-            </a:r>
-          </a:p>
-          <a:p>
-            <a:pPr lvl="1">
-              <a:defRPr sz="1600"/>
-            </a:pPr>
-            <a:r>
-              <a:t>Lmod hierarchy: Core → Compiler → MPI; 1,000+ packages, 4 compiler suites, 3 MPIs</a:t>
-            </a:r>
-          </a:p>
-          <a:p>
-            <a:pPr lvl="1">
-              <a:defRPr sz="1600"/>
-            </a:pPr>
-            <a:r>
-              <a:t>“Users see modules, not spack… Users never run a spack command”</a:t>
-            </a:r>
-          </a:p>
-          <a:p>
-            <a:pPr lvl="1">
-              <a:defRPr sz="1600"/>
-            </a:pPr>
-            <a:r>
-              <a:t>Six ordered environments: compilers → base → mpis → hpc-libs → hpc-apps</a:t>
-            </a:r>
-          </a:p>
-          <a:p>
-            <a:pPr>
-              <a:defRPr sz="2000"/>
-            </a:pPr>
-            <a:r>
-              <a:t>ALCF Polaris Spack PE</a:t>
-            </a:r>
-          </a:p>
-          <a:p>
-            <a:pPr lvl="1">
-              <a:defRPr sz="1600"/>
-            </a:pPr>
-            <a:r>
-              <a:t>spack-pe-base (system GCC, PE-agnostic) + spack-pe-gnu (PrgEnv lane)</a:t>
-            </a:r>
-          </a:p>
-          <a:p>
-            <a:pPr lvl="1">
-              <a:defRPr sz="1600"/>
-            </a:pPr>
-            <a:r>
-              <a:t>Meta-module gates MODULEPATH — packages appear after the stack loads</a:t>
-            </a:r>
-          </a:p>
-          <a:p>
-            <a:pPr>
-              <a:defRPr sz="2000"/>
-            </a:pPr>
-            <a:r>
-              <a:t>Spack project / community (Kitware, E4S, HPSF)</a:t>
-            </a:r>
-          </a:p>
-          <a:p>
-            <a:pPr lvl="1">
-              <a:defRPr sz="1600"/>
-            </a:pPr>
-            <a:r>
-              <a:t>Incremental concretization: Foundation → GPU/MPI/Python columns → integrations</a:t>
-            </a:r>
-          </a:p>
-          <a:p>
-            <a:pPr lvl="1">
-              <a:defRPr sz="1600"/>
-            </a:pPr>
-            <a:r>
-              <a:t>Environment chaining + build caches as load-bearing infrastructure</a:t>
+          <p:cNvPr id="2" name="Rectangle 1"/>
+          <p:cNvSpPr/>
+          <p:nvPr/>
+        </p:nvSpPr>
+        <p:spPr>
+          <a:xfrm>
+            <a:off x="0" y="0"/>
+            <a:ext cx="12191695" cy="6858000"/>
+          </a:xfrm>
+          <a:prstGeom prst="rect">
+            <a:avLst/>
+          </a:prstGeom>
+          <a:solidFill>
+            <a:srgbClr val="0F172A"/>
+          </a:solidFill>
+          <a:ln>
+            <a:noFill/>
+          </a:ln>
+          <a:effectLst/>
+        </p:spPr>
+        <p:style>
+          <a:lnRef idx="1">
+            <a:schemeClr val="accent1"/>
+          </a:lnRef>
+          <a:fillRef idx="3">
+            <a:schemeClr val="accent1"/>
+          </a:fillRef>
+          <a:effectRef idx="2">
+            <a:schemeClr val="accent1"/>
+          </a:effectRef>
+          <a:fontRef idx="minor">
+            <a:schemeClr val="lt1"/>
+          </a:fontRef>
+        </p:style>
+        <p:txBody>
+          <a:bodyPr rtlCol="0" anchor="ctr"/>
+          <a:lstStyle/>
+          <a:p>
+            <a:pPr algn="ctr"/>
+          </a:p>
+        </p:txBody>
+      </p:sp>
+      <p:sp>
+        <p:nvSpPr>
+          <p:cNvPr id="3" name="TextBox 2"/>
+          <p:cNvSpPr txBox="1"/>
+          <p:nvPr/>
+        </p:nvSpPr>
+        <p:spPr>
+          <a:xfrm>
+            <a:off x="548640" y="256032"/>
+            <a:ext cx="10972800" cy="365760"/>
+          </a:xfrm>
+          <a:prstGeom prst="rect">
+            <a:avLst/>
+          </a:prstGeom>
+          <a:noFill/>
+        </p:spPr>
+        <p:txBody>
+          <a:bodyPr wrap="square" anchor="t">
+            <a:spAutoFit/>
+          </a:bodyPr>
+          <a:lstStyle/>
+          <a:p>
+            <a:pPr algn="l">
+              <a:defRPr sz="1300" b="1">
+                <a:solidFill>
+                  <a:srgbClr val="14B8A6"/>
+                </a:solidFill>
+                <a:latin typeface="Avenir Next"/>
+              </a:defRPr>
+            </a:pPr>
+            <a:r>
+              <a:t>VALIDATION · PRODUCTION PRIOR ART</a:t>
+            </a:r>
+          </a:p>
+        </p:txBody>
+      </p:sp>
+      <p:sp>
+        <p:nvSpPr>
+          <p:cNvPr id="4" name="TextBox 3"/>
+          <p:cNvSpPr txBox="1"/>
+          <p:nvPr/>
+        </p:nvSpPr>
+        <p:spPr>
+          <a:xfrm>
+            <a:off x="548640" y="566928"/>
+            <a:ext cx="11064240" cy="731520"/>
+          </a:xfrm>
+          <a:prstGeom prst="rect">
+            <a:avLst/>
+          </a:prstGeom>
+          <a:noFill/>
+        </p:spPr>
+        <p:txBody>
+          <a:bodyPr wrap="square" anchor="t">
+            <a:spAutoFit/>
+          </a:bodyPr>
+          <a:lstStyle/>
+          <a:p>
+            <a:pPr algn="l">
+              <a:defRPr sz="3000" b="1">
+                <a:solidFill>
+                  <a:srgbClr val="FFFFFF"/>
+                </a:solidFill>
+                <a:latin typeface="Avenir Next"/>
+              </a:defRPr>
+            </a:pPr>
+            <a:r>
+              <a:t>The shape everyone converges on</a:t>
+            </a:r>
+          </a:p>
+        </p:txBody>
+      </p:sp>
+      <p:sp>
+        <p:nvSpPr>
+          <p:cNvPr id="5" name="Rectangle 4"/>
+          <p:cNvSpPr/>
+          <p:nvPr/>
+        </p:nvSpPr>
+        <p:spPr>
+          <a:xfrm>
+            <a:off x="566928" y="1298448"/>
+            <a:ext cx="1463040" cy="41148"/>
+          </a:xfrm>
+          <a:prstGeom prst="rect">
+            <a:avLst/>
+          </a:prstGeom>
+          <a:solidFill>
+            <a:srgbClr val="14B8A6"/>
+          </a:solidFill>
+          <a:ln>
+            <a:noFill/>
+          </a:ln>
+          <a:effectLst/>
+        </p:spPr>
+        <p:style>
+          <a:lnRef idx="1">
+            <a:schemeClr val="accent1"/>
+          </a:lnRef>
+          <a:fillRef idx="3">
+            <a:schemeClr val="accent1"/>
+          </a:fillRef>
+          <a:effectRef idx="2">
+            <a:schemeClr val="accent1"/>
+          </a:effectRef>
+          <a:fontRef idx="minor">
+            <a:schemeClr val="lt1"/>
+          </a:fontRef>
+        </p:style>
+        <p:txBody>
+          <a:bodyPr rtlCol="0" anchor="ctr"/>
+          <a:lstStyle/>
+          <a:p>
+            <a:pPr algn="ctr"/>
+          </a:p>
+        </p:txBody>
+      </p:sp>
+      <p:sp>
+        <p:nvSpPr>
+          <p:cNvPr id="6" name="Rounded Rectangle 5"/>
+          <p:cNvSpPr/>
+          <p:nvPr/>
+        </p:nvSpPr>
+        <p:spPr>
+          <a:xfrm>
+            <a:off x="548640" y="1600200"/>
+            <a:ext cx="3611880" cy="3977639"/>
+          </a:xfrm>
+          <a:prstGeom prst="roundRect">
+            <a:avLst/>
+          </a:prstGeom>
+          <a:solidFill>
+            <a:srgbClr val="1E293B"/>
+          </a:solidFill>
+          <a:ln>
+            <a:noFill/>
+          </a:ln>
+          <a:effectLst/>
+        </p:spPr>
+        <p:style>
+          <a:lnRef idx="1">
+            <a:schemeClr val="accent1"/>
+          </a:lnRef>
+          <a:fillRef idx="3">
+            <a:schemeClr val="accent1"/>
+          </a:fillRef>
+          <a:effectRef idx="2">
+            <a:schemeClr val="accent1"/>
+          </a:effectRef>
+          <a:fontRef idx="minor">
+            <a:schemeClr val="lt1"/>
+          </a:fontRef>
+        </p:style>
+        <p:txBody>
+          <a:bodyPr rtlCol="0" anchor="ctr"/>
+          <a:lstStyle/>
+          <a:p>
+            <a:pPr algn="ctr"/>
+          </a:p>
+        </p:txBody>
+      </p:sp>
+      <p:sp>
+        <p:nvSpPr>
+          <p:cNvPr id="7" name="Rectangle 6"/>
+          <p:cNvSpPr/>
+          <p:nvPr/>
+        </p:nvSpPr>
+        <p:spPr>
+          <a:xfrm>
+            <a:off x="548640" y="1600200"/>
+            <a:ext cx="3611880" cy="82296"/>
+          </a:xfrm>
+          <a:prstGeom prst="rect">
+            <a:avLst/>
+          </a:prstGeom>
+          <a:solidFill>
+            <a:srgbClr val="3B82F6"/>
+          </a:solidFill>
+          <a:ln>
+            <a:noFill/>
+          </a:ln>
+          <a:effectLst/>
+        </p:spPr>
+        <p:style>
+          <a:lnRef idx="1">
+            <a:schemeClr val="accent1"/>
+          </a:lnRef>
+          <a:fillRef idx="3">
+            <a:schemeClr val="accent1"/>
+          </a:fillRef>
+          <a:effectRef idx="2">
+            <a:schemeClr val="accent1"/>
+          </a:effectRef>
+          <a:fontRef idx="minor">
+            <a:schemeClr val="lt1"/>
+          </a:fontRef>
+        </p:style>
+        <p:txBody>
+          <a:bodyPr rtlCol="0" anchor="ctr"/>
+          <a:lstStyle/>
+          <a:p>
+            <a:pPr algn="ctr"/>
+          </a:p>
+        </p:txBody>
+      </p:sp>
+      <p:sp>
+        <p:nvSpPr>
+          <p:cNvPr id="8" name="TextBox 7"/>
+          <p:cNvSpPr txBox="1"/>
+          <p:nvPr/>
+        </p:nvSpPr>
+        <p:spPr>
+          <a:xfrm>
+            <a:off x="777240" y="1828800"/>
+            <a:ext cx="3200400" cy="502920"/>
+          </a:xfrm>
+          <a:prstGeom prst="rect">
+            <a:avLst/>
+          </a:prstGeom>
+          <a:noFill/>
+        </p:spPr>
+        <p:txBody>
+          <a:bodyPr wrap="square" anchor="t">
+            <a:spAutoFit/>
+          </a:bodyPr>
+          <a:lstStyle/>
+          <a:p>
+            <a:pPr algn="l">
+              <a:defRPr sz="1450" b="1">
+                <a:solidFill>
+                  <a:srgbClr val="FFFFFF"/>
+                </a:solidFill>
+                <a:latin typeface="Avenir Next"/>
+              </a:defRPr>
+            </a:pPr>
+            <a:r>
+              <a:t>NASA JSC  ·  Flight Sciences Lab</a:t>
+            </a:r>
+          </a:p>
+        </p:txBody>
+      </p:sp>
+      <p:sp>
+        <p:nvSpPr>
+          <p:cNvPr id="9" name="TextBox 8"/>
+          <p:cNvSpPr txBox="1"/>
+          <p:nvPr/>
+        </p:nvSpPr>
+        <p:spPr>
+          <a:xfrm>
+            <a:off x="777240" y="2395728"/>
+            <a:ext cx="3200400" cy="685800"/>
+          </a:xfrm>
+          <a:prstGeom prst="rect">
+            <a:avLst/>
+          </a:prstGeom>
+          <a:noFill/>
+        </p:spPr>
+        <p:txBody>
+          <a:bodyPr wrap="square" anchor="t">
+            <a:spAutoFit/>
+          </a:bodyPr>
+          <a:lstStyle/>
+          <a:p>
+            <a:pPr algn="l">
+              <a:defRPr sz="1600" b="1">
+                <a:solidFill>
+                  <a:srgbClr val="3B82F6"/>
+                </a:solidFill>
+                <a:latin typeface="Avenir Next"/>
+              </a:defRPr>
+            </a:pPr>
+            <a:r>
+              <a:t>1,000+ packages · 4 compiler suites · 3 MPIs</a:t>
+            </a:r>
+          </a:p>
+        </p:txBody>
+      </p:sp>
+      <p:sp>
+        <p:nvSpPr>
+          <p:cNvPr id="10" name="TextBox 9"/>
+          <p:cNvSpPr txBox="1"/>
+          <p:nvPr/>
+        </p:nvSpPr>
+        <p:spPr>
+          <a:xfrm>
+            <a:off x="777240" y="3200400"/>
+            <a:ext cx="3200400" cy="2194560"/>
+          </a:xfrm>
+          <a:prstGeom prst="rect">
+            <a:avLst/>
+          </a:prstGeom>
+          <a:noFill/>
+        </p:spPr>
+        <p:txBody>
+          <a:bodyPr wrap="square" anchor="t">
+            <a:spAutoFit/>
+          </a:bodyPr>
+          <a:lstStyle/>
+          <a:p>
+            <a:pPr algn="l">
+              <a:defRPr sz="1250" b="0">
+                <a:solidFill>
+                  <a:srgbClr val="E2E8F0"/>
+                </a:solidFill>
+                <a:latin typeface="Avenir Next"/>
+              </a:defRPr>
+            </a:pPr>
+            <a:r>
+              <a:t>Lmod hierarchy: Core → Compiler → MPI</a:t>
+            </a:r>
+          </a:p>
+          <a:p>
+            <a:pPr algn="l">
+              <a:defRPr sz="1250" b="0">
+                <a:solidFill>
+                  <a:srgbClr val="E2E8F0"/>
+                </a:solidFill>
+                <a:latin typeface="Avenir Next"/>
+              </a:defRPr>
+            </a:pPr>
+            <a:r>
+              <a:t>compiler_mixing: false — lanes stay isolated</a:t>
+            </a:r>
+          </a:p>
+          <a:p>
+            <a:pPr algn="l">
+              <a:defRPr sz="1250" b="0">
+                <a:solidFill>
+                  <a:srgbClr val="E2E8F0"/>
+                </a:solidFill>
+                <a:latin typeface="Avenir Next"/>
+              </a:defRPr>
+            </a:pPr>
+            <a:r>
+              <a:t>“Users never run a spack command.”</a:t>
+            </a:r>
+          </a:p>
+        </p:txBody>
+      </p:sp>
+      <p:sp>
+        <p:nvSpPr>
+          <p:cNvPr id="11" name="Rounded Rectangle 10"/>
+          <p:cNvSpPr/>
+          <p:nvPr/>
+        </p:nvSpPr>
+        <p:spPr>
+          <a:xfrm>
+            <a:off x="4370831" y="1600200"/>
+            <a:ext cx="3611880" cy="3977639"/>
+          </a:xfrm>
+          <a:prstGeom prst="roundRect">
+            <a:avLst/>
+          </a:prstGeom>
+          <a:solidFill>
+            <a:srgbClr val="1E293B"/>
+          </a:solidFill>
+          <a:ln>
+            <a:noFill/>
+          </a:ln>
+          <a:effectLst/>
+        </p:spPr>
+        <p:style>
+          <a:lnRef idx="1">
+            <a:schemeClr val="accent1"/>
+          </a:lnRef>
+          <a:fillRef idx="3">
+            <a:schemeClr val="accent1"/>
+          </a:fillRef>
+          <a:effectRef idx="2">
+            <a:schemeClr val="accent1"/>
+          </a:effectRef>
+          <a:fontRef idx="minor">
+            <a:schemeClr val="lt1"/>
+          </a:fontRef>
+        </p:style>
+        <p:txBody>
+          <a:bodyPr rtlCol="0" anchor="ctr"/>
+          <a:lstStyle/>
+          <a:p>
+            <a:pPr algn="ctr"/>
+          </a:p>
+        </p:txBody>
+      </p:sp>
+      <p:sp>
+        <p:nvSpPr>
+          <p:cNvPr id="12" name="Rectangle 11"/>
+          <p:cNvSpPr/>
+          <p:nvPr/>
+        </p:nvSpPr>
+        <p:spPr>
+          <a:xfrm>
+            <a:off x="4370831" y="1600200"/>
+            <a:ext cx="3611880" cy="82296"/>
+          </a:xfrm>
+          <a:prstGeom prst="rect">
+            <a:avLst/>
+          </a:prstGeom>
+          <a:solidFill>
+            <a:srgbClr val="8B5CF6"/>
+          </a:solidFill>
+          <a:ln>
+            <a:noFill/>
+          </a:ln>
+          <a:effectLst/>
+        </p:spPr>
+        <p:style>
+          <a:lnRef idx="1">
+            <a:schemeClr val="accent1"/>
+          </a:lnRef>
+          <a:fillRef idx="3">
+            <a:schemeClr val="accent1"/>
+          </a:fillRef>
+          <a:effectRef idx="2">
+            <a:schemeClr val="accent1"/>
+          </a:effectRef>
+          <a:fontRef idx="minor">
+            <a:schemeClr val="lt1"/>
+          </a:fontRef>
+        </p:style>
+        <p:txBody>
+          <a:bodyPr rtlCol="0" anchor="ctr"/>
+          <a:lstStyle/>
+          <a:p>
+            <a:pPr algn="ctr"/>
+          </a:p>
+        </p:txBody>
+      </p:sp>
+      <p:sp>
+        <p:nvSpPr>
+          <p:cNvPr id="13" name="TextBox 12"/>
+          <p:cNvSpPr txBox="1"/>
+          <p:nvPr/>
+        </p:nvSpPr>
+        <p:spPr>
+          <a:xfrm>
+            <a:off x="4599431" y="1828800"/>
+            <a:ext cx="3200400" cy="502920"/>
+          </a:xfrm>
+          <a:prstGeom prst="rect">
+            <a:avLst/>
+          </a:prstGeom>
+          <a:noFill/>
+        </p:spPr>
+        <p:txBody>
+          <a:bodyPr wrap="square" anchor="t">
+            <a:spAutoFit/>
+          </a:bodyPr>
+          <a:lstStyle/>
+          <a:p>
+            <a:pPr algn="l">
+              <a:defRPr sz="1450" b="1">
+                <a:solidFill>
+                  <a:srgbClr val="FFFFFF"/>
+                </a:solidFill>
+                <a:latin typeface="Avenir Next"/>
+              </a:defRPr>
+            </a:pPr>
+            <a:r>
+              <a:t>ALCF  ·  Polaris Spack PE</a:t>
+            </a:r>
+          </a:p>
+        </p:txBody>
+      </p:sp>
+      <p:sp>
+        <p:nvSpPr>
+          <p:cNvPr id="14" name="TextBox 13"/>
+          <p:cNvSpPr txBox="1"/>
+          <p:nvPr/>
+        </p:nvSpPr>
+        <p:spPr>
+          <a:xfrm>
+            <a:off x="4599431" y="2395728"/>
+            <a:ext cx="3200400" cy="685800"/>
+          </a:xfrm>
+          <a:prstGeom prst="rect">
+            <a:avLst/>
+          </a:prstGeom>
+          <a:noFill/>
+        </p:spPr>
+        <p:txBody>
+          <a:bodyPr wrap="square" anchor="t">
+            <a:spAutoFit/>
+          </a:bodyPr>
+          <a:lstStyle/>
+          <a:p>
+            <a:pPr algn="l">
+              <a:defRPr sz="1600" b="1">
+                <a:solidFill>
+                  <a:srgbClr val="8B5CF6"/>
+                </a:solidFill>
+                <a:latin typeface="Avenir Next"/>
+              </a:defRPr>
+            </a:pPr>
+            <a:r>
+              <a:t>spack-pe-base + spack-pe-gnu</a:t>
+            </a:r>
+          </a:p>
+        </p:txBody>
+      </p:sp>
+      <p:sp>
+        <p:nvSpPr>
+          <p:cNvPr id="15" name="TextBox 14"/>
+          <p:cNvSpPr txBox="1"/>
+          <p:nvPr/>
+        </p:nvSpPr>
+        <p:spPr>
+          <a:xfrm>
+            <a:off x="4599431" y="3200400"/>
+            <a:ext cx="3200400" cy="2194560"/>
+          </a:xfrm>
+          <a:prstGeom prst="rect">
+            <a:avLst/>
+          </a:prstGeom>
+          <a:noFill/>
+        </p:spPr>
+        <p:txBody>
+          <a:bodyPr wrap="square" anchor="t">
+            <a:spAutoFit/>
+          </a:bodyPr>
+          <a:lstStyle/>
+          <a:p>
+            <a:pPr algn="l">
+              <a:defRPr sz="1250" b="0">
+                <a:solidFill>
+                  <a:srgbClr val="E2E8F0"/>
+                </a:solidFill>
+                <a:latin typeface="Avenir Next"/>
+              </a:defRPr>
+            </a:pPr>
+            <a:r>
+              <a:t>Base built once with system GCC, PE-agnostic</a:t>
+            </a:r>
+          </a:p>
+          <a:p>
+            <a:pPr algn="l">
+              <a:defRPr sz="1250" b="0">
+                <a:solidFill>
+                  <a:srgbClr val="E2E8F0"/>
+                </a:solidFill>
+                <a:latin typeface="Avenir Next"/>
+              </a:defRPr>
+            </a:pPr>
+            <a:r>
+              <a:t>Meta-module gates MODULEPATH</a:t>
+            </a:r>
+          </a:p>
+          <a:p>
+            <a:pPr algn="l">
+              <a:defRPr sz="1250" b="0">
+                <a:solidFill>
+                  <a:srgbClr val="E2E8F0"/>
+                </a:solidFill>
+                <a:latin typeface="Avenir Next"/>
+              </a:defRPr>
+            </a:pPr>
+            <a:r>
+              <a:t>Packages appear only after the stack loads</a:t>
+            </a:r>
+          </a:p>
+        </p:txBody>
+      </p:sp>
+      <p:sp>
+        <p:nvSpPr>
+          <p:cNvPr id="16" name="Rounded Rectangle 15"/>
+          <p:cNvSpPr/>
+          <p:nvPr/>
+        </p:nvSpPr>
+        <p:spPr>
+          <a:xfrm>
+            <a:off x="8193023" y="1600200"/>
+            <a:ext cx="3611880" cy="3977639"/>
+          </a:xfrm>
+          <a:prstGeom prst="roundRect">
+            <a:avLst/>
+          </a:prstGeom>
+          <a:solidFill>
+            <a:srgbClr val="1E293B"/>
+          </a:solidFill>
+          <a:ln>
+            <a:noFill/>
+          </a:ln>
+          <a:effectLst/>
+        </p:spPr>
+        <p:style>
+          <a:lnRef idx="1">
+            <a:schemeClr val="accent1"/>
+          </a:lnRef>
+          <a:fillRef idx="3">
+            <a:schemeClr val="accent1"/>
+          </a:fillRef>
+          <a:effectRef idx="2">
+            <a:schemeClr val="accent1"/>
+          </a:effectRef>
+          <a:fontRef idx="minor">
+            <a:schemeClr val="lt1"/>
+          </a:fontRef>
+        </p:style>
+        <p:txBody>
+          <a:bodyPr rtlCol="0" anchor="ctr"/>
+          <a:lstStyle/>
+          <a:p>
+            <a:pPr algn="ctr"/>
+          </a:p>
+        </p:txBody>
+      </p:sp>
+      <p:sp>
+        <p:nvSpPr>
+          <p:cNvPr id="17" name="Rectangle 16"/>
+          <p:cNvSpPr/>
+          <p:nvPr/>
+        </p:nvSpPr>
+        <p:spPr>
+          <a:xfrm>
+            <a:off x="8193023" y="1600200"/>
+            <a:ext cx="3611880" cy="82296"/>
+          </a:xfrm>
+          <a:prstGeom prst="rect">
+            <a:avLst/>
+          </a:prstGeom>
+          <a:solidFill>
+            <a:srgbClr val="14B8A6"/>
+          </a:solidFill>
+          <a:ln>
+            <a:noFill/>
+          </a:ln>
+          <a:effectLst/>
+        </p:spPr>
+        <p:style>
+          <a:lnRef idx="1">
+            <a:schemeClr val="accent1"/>
+          </a:lnRef>
+          <a:fillRef idx="3">
+            <a:schemeClr val="accent1"/>
+          </a:fillRef>
+          <a:effectRef idx="2">
+            <a:schemeClr val="accent1"/>
+          </a:effectRef>
+          <a:fontRef idx="minor">
+            <a:schemeClr val="lt1"/>
+          </a:fontRef>
+        </p:style>
+        <p:txBody>
+          <a:bodyPr rtlCol="0" anchor="ctr"/>
+          <a:lstStyle/>
+          <a:p>
+            <a:pPr algn="ctr"/>
+          </a:p>
+        </p:txBody>
+      </p:sp>
+      <p:sp>
+        <p:nvSpPr>
+          <p:cNvPr id="18" name="TextBox 17"/>
+          <p:cNvSpPr txBox="1"/>
+          <p:nvPr/>
+        </p:nvSpPr>
+        <p:spPr>
+          <a:xfrm>
+            <a:off x="8421624" y="1828800"/>
+            <a:ext cx="3200400" cy="502920"/>
+          </a:xfrm>
+          <a:prstGeom prst="rect">
+            <a:avLst/>
+          </a:prstGeom>
+          <a:noFill/>
+        </p:spPr>
+        <p:txBody>
+          <a:bodyPr wrap="square" anchor="t">
+            <a:spAutoFit/>
+          </a:bodyPr>
+          <a:lstStyle/>
+          <a:p>
+            <a:pPr algn="l">
+              <a:defRPr sz="1450" b="1">
+                <a:solidFill>
+                  <a:srgbClr val="FFFFFF"/>
+                </a:solidFill>
+                <a:latin typeface="Avenir Next"/>
+              </a:defRPr>
+            </a:pPr>
+            <a:r>
+              <a:t>Spack project  ·  E4S / HPSF</a:t>
+            </a:r>
+          </a:p>
+        </p:txBody>
+      </p:sp>
+      <p:sp>
+        <p:nvSpPr>
+          <p:cNvPr id="19" name="TextBox 18"/>
+          <p:cNvSpPr txBox="1"/>
+          <p:nvPr/>
+        </p:nvSpPr>
+        <p:spPr>
+          <a:xfrm>
+            <a:off x="8421624" y="2395728"/>
+            <a:ext cx="3200400" cy="685800"/>
+          </a:xfrm>
+          <a:prstGeom prst="rect">
+            <a:avLst/>
+          </a:prstGeom>
+          <a:noFill/>
+        </p:spPr>
+        <p:txBody>
+          <a:bodyPr wrap="square" anchor="t">
+            <a:spAutoFit/>
+          </a:bodyPr>
+          <a:lstStyle/>
+          <a:p>
+            <a:pPr algn="l">
+              <a:defRPr sz="1600" b="1">
+                <a:solidFill>
+                  <a:srgbClr val="14B8A6"/>
+                </a:solidFill>
+                <a:latin typeface="Avenir Next"/>
+              </a:defRPr>
+            </a:pPr>
+            <a:r>
+              <a:t>Incremental concretization</a:t>
+            </a:r>
+          </a:p>
+        </p:txBody>
+      </p:sp>
+      <p:sp>
+        <p:nvSpPr>
+          <p:cNvPr id="20" name="TextBox 19"/>
+          <p:cNvSpPr txBox="1"/>
+          <p:nvPr/>
+        </p:nvSpPr>
+        <p:spPr>
+          <a:xfrm>
+            <a:off x="8421624" y="3200400"/>
+            <a:ext cx="3200400" cy="2194560"/>
+          </a:xfrm>
+          <a:prstGeom prst="rect">
+            <a:avLst/>
+          </a:prstGeom>
+          <a:noFill/>
+        </p:spPr>
+        <p:txBody>
+          <a:bodyPr wrap="square" anchor="t">
+            <a:spAutoFit/>
+          </a:bodyPr>
+          <a:lstStyle/>
+          <a:p>
+            <a:pPr algn="l">
+              <a:defRPr sz="1250" b="0">
+                <a:solidFill>
+                  <a:srgbClr val="E2E8F0"/>
+                </a:solidFill>
+                <a:latin typeface="Avenir Next"/>
+              </a:defRPr>
+            </a:pPr>
+            <a:r>
+              <a:t>Foundation → GPU/MPI/Python → integrations</a:t>
+            </a:r>
+          </a:p>
+          <a:p>
+            <a:pPr algn="l">
+              <a:defRPr sz="1250" b="0">
+                <a:solidFill>
+                  <a:srgbClr val="E2E8F0"/>
+                </a:solidFill>
+                <a:latin typeface="Avenir Next"/>
+              </a:defRPr>
+            </a:pPr>
+            <a:r>
+              <a:t>Flat 270-spec environments hang the solver</a:t>
+            </a:r>
+          </a:p>
+          <a:p>
+            <a:pPr algn="l">
+              <a:defRPr sz="1250" b="0">
+                <a:solidFill>
+                  <a:srgbClr val="E2E8F0"/>
+                </a:solidFill>
+                <a:latin typeface="Avenir Next"/>
+              </a:defRPr>
+            </a:pPr>
+            <a:r>
+              <a:t>Build caches are load-bearing, not optional</a:t>
+            </a:r>
+          </a:p>
+        </p:txBody>
+      </p:sp>
+      <p:sp>
+        <p:nvSpPr>
+          <p:cNvPr id="21" name="Rounded Rectangle 20"/>
+          <p:cNvSpPr/>
+          <p:nvPr/>
+        </p:nvSpPr>
+        <p:spPr>
+          <a:xfrm>
+            <a:off x="548640" y="5806440"/>
+            <a:ext cx="11091672" cy="566928"/>
+          </a:xfrm>
+          <a:prstGeom prst="roundRect">
+            <a:avLst/>
+          </a:prstGeom>
+          <a:solidFill>
+            <a:srgbClr val="2A374D"/>
+          </a:solidFill>
+          <a:ln>
+            <a:noFill/>
+          </a:ln>
+          <a:effectLst/>
+        </p:spPr>
+        <p:style>
+          <a:lnRef idx="1">
+            <a:schemeClr val="accent1"/>
+          </a:lnRef>
+          <a:fillRef idx="3">
+            <a:schemeClr val="accent1"/>
+          </a:fillRef>
+          <a:effectRef idx="2">
+            <a:schemeClr val="accent1"/>
+          </a:effectRef>
+          <a:fontRef idx="minor">
+            <a:schemeClr val="lt1"/>
+          </a:fontRef>
+        </p:style>
+        <p:txBody>
+          <a:bodyPr rtlCol="0" anchor="ctr" wrap="square" lIns="109728" rIns="109728"/>
+          <a:lstStyle/>
+          <a:p>
+            <a:pPr algn="ctr">
+              <a:defRPr sz="1400" b="1">
+                <a:solidFill>
+                  <a:srgbClr val="FFFFFF"/>
+                </a:solidFill>
+                <a:latin typeface="Avenir Next"/>
+              </a:defRPr>
+            </a:pPr>
+            <a:r>
+              <a:t>Base built once  →  isolated per-compiler/MPI fan-out  →  modules are the user contract</a:t>
             </a:r>
           </a:p>
         </p:txBody>
@@ -3425,101 +6022,1146 @@
       <p:grpSpPr/>
       <p:sp>
         <p:nvSpPr>
-          <p:cNvPr id="2" name="Title 1"/>
-          <p:cNvSpPr>
-            <a:spLocks noGrp="1"/>
-          </p:cNvSpPr>
-          <p:nvPr>
-            <p:ph type="title"/>
-          </p:nvPr>
-        </p:nvSpPr>
-        <p:spPr/>
-        <p:txBody>
-          <a:bodyPr/>
-          <a:lstStyle/>
-          <a:p>
-            <a:r>
-              <a:t>The lessons that chose our route</a:t>
-            </a:r>
-          </a:p>
-        </p:txBody>
-      </p:sp>
-      <p:sp>
-        <p:nvSpPr>
-          <p:cNvPr id="3" name="Content Placeholder 2"/>
-          <p:cNvSpPr>
-            <a:spLocks noGrp="1"/>
-          </p:cNvSpPr>
-          <p:nvPr>
-            <p:ph idx="1"/>
-          </p:nvPr>
-        </p:nvSpPr>
-        <p:spPr/>
-        <p:txBody>
-          <a:bodyPr wrap="square"/>
-          <a:lstStyle/>
-          <a:p>
-            <a:pPr>
-              <a:defRPr sz="2000"/>
-            </a:pPr>
-            <a:r>
-              <a:t>Flat environments don't scale</a:t>
-            </a:r>
-          </a:p>
-          <a:p>
-            <a:pPr lvl="1">
-              <a:defRPr sz="1600"/>
-            </a:pPr>
-            <a:r>
-              <a:t>NASA: 270+ root specs in one environment hung the concretizer → split into ordered environments</a:t>
-            </a:r>
-          </a:p>
-          <a:p>
-            <a:pPr>
-              <a:defRPr sz="2000"/>
-            </a:pPr>
-            <a:r>
-              <a:t>Never mix compilers within a build surface</a:t>
-            </a:r>
-          </a:p>
-          <a:p>
-            <a:pPr lvl="1">
-              <a:defRPr sz="1600"/>
-            </a:pPr>
-            <a:r>
-              <a:t>NASA enforces compiler_mixing: false; mixed-Fortran apps must stay in one PrgEnv (mpi.mod)</a:t>
-            </a:r>
-          </a:p>
-          <a:p>
-            <a:pPr>
-              <a:defRPr sz="2000"/>
-            </a:pPr>
-            <a:r>
-              <a:t>Build the common base once, portable target, reuse everywhere</a:t>
-            </a:r>
-          </a:p>
-          <a:p>
-            <a:pPr>
-              <a:defRPr sz="2000"/>
-            </a:pPr>
-            <a:r>
-              <a:t>Users get modules and views — the package manager stays invisible</a:t>
-            </a:r>
-          </a:p>
-          <a:p>
-            <a:pPr>
-              <a:defRPr sz="2000"/>
-            </a:pPr>
-            <a:r>
-              <a:t>Build caches turn 12-hour rebuilds into 2–3 hours (NASA)</a:t>
-            </a:r>
-          </a:p>
-          <a:p>
-            <a:pPr>
-              <a:defRPr sz="2000"/>
-            </a:pPr>
-            <a:r>
-              <a:t>Every one of these is a first-class rule in the lanes model — by design, not by rediscovery</a:t>
+          <p:cNvPr id="2" name="Rectangle 1"/>
+          <p:cNvSpPr/>
+          <p:nvPr/>
+        </p:nvSpPr>
+        <p:spPr>
+          <a:xfrm>
+            <a:off x="0" y="0"/>
+            <a:ext cx="12191695" cy="6858000"/>
+          </a:xfrm>
+          <a:prstGeom prst="rect">
+            <a:avLst/>
+          </a:prstGeom>
+          <a:solidFill>
+            <a:srgbClr val="0F172A"/>
+          </a:solidFill>
+          <a:ln>
+            <a:noFill/>
+          </a:ln>
+          <a:effectLst/>
+        </p:spPr>
+        <p:style>
+          <a:lnRef idx="1">
+            <a:schemeClr val="accent1"/>
+          </a:lnRef>
+          <a:fillRef idx="3">
+            <a:schemeClr val="accent1"/>
+          </a:fillRef>
+          <a:effectRef idx="2">
+            <a:schemeClr val="accent1"/>
+          </a:effectRef>
+          <a:fontRef idx="minor">
+            <a:schemeClr val="lt1"/>
+          </a:fontRef>
+        </p:style>
+        <p:txBody>
+          <a:bodyPr rtlCol="0" anchor="ctr"/>
+          <a:lstStyle/>
+          <a:p>
+            <a:pPr algn="ctr"/>
+          </a:p>
+        </p:txBody>
+      </p:sp>
+      <p:sp>
+        <p:nvSpPr>
+          <p:cNvPr id="3" name="TextBox 2"/>
+          <p:cNvSpPr txBox="1"/>
+          <p:nvPr/>
+        </p:nvSpPr>
+        <p:spPr>
+          <a:xfrm>
+            <a:off x="548640" y="256032"/>
+            <a:ext cx="10972800" cy="365760"/>
+          </a:xfrm>
+          <a:prstGeom prst="rect">
+            <a:avLst/>
+          </a:prstGeom>
+          <a:noFill/>
+        </p:spPr>
+        <p:txBody>
+          <a:bodyPr wrap="square" anchor="t">
+            <a:spAutoFit/>
+          </a:bodyPr>
+          <a:lstStyle/>
+          <a:p>
+            <a:pPr algn="l">
+              <a:defRPr sz="1300" b="1">
+                <a:solidFill>
+                  <a:srgbClr val="14B8A6"/>
+                </a:solidFill>
+                <a:latin typeface="Avenir Next"/>
+              </a:defRPr>
+            </a:pPr>
+            <a:r>
+              <a:t>SCHEMATIC · GENERATED, NOT HAND-CURATED</a:t>
+            </a:r>
+          </a:p>
+        </p:txBody>
+      </p:sp>
+      <p:sp>
+        <p:nvSpPr>
+          <p:cNvPr id="4" name="TextBox 3"/>
+          <p:cNvSpPr txBox="1"/>
+          <p:nvPr/>
+        </p:nvSpPr>
+        <p:spPr>
+          <a:xfrm>
+            <a:off x="548640" y="566928"/>
+            <a:ext cx="11064240" cy="731520"/>
+          </a:xfrm>
+          <a:prstGeom prst="rect">
+            <a:avLst/>
+          </a:prstGeom>
+          <a:noFill/>
+        </p:spPr>
+        <p:txBody>
+          <a:bodyPr wrap="square" anchor="t">
+            <a:spAutoFit/>
+          </a:bodyPr>
+          <a:lstStyle/>
+          <a:p>
+            <a:pPr algn="l">
+              <a:defRPr sz="3000" b="1">
+                <a:solidFill>
+                  <a:srgbClr val="FFFFFF"/>
+                </a:solidFill>
+                <a:latin typeface="Avenir Next"/>
+              </a:defRPr>
+            </a:pPr>
+            <a:r>
+              <a:t>How a stack is built</a:t>
+            </a:r>
+          </a:p>
+        </p:txBody>
+      </p:sp>
+      <p:sp>
+        <p:nvSpPr>
+          <p:cNvPr id="5" name="Rectangle 4"/>
+          <p:cNvSpPr/>
+          <p:nvPr/>
+        </p:nvSpPr>
+        <p:spPr>
+          <a:xfrm>
+            <a:off x="566928" y="1298448"/>
+            <a:ext cx="1463040" cy="41148"/>
+          </a:xfrm>
+          <a:prstGeom prst="rect">
+            <a:avLst/>
+          </a:prstGeom>
+          <a:solidFill>
+            <a:srgbClr val="14B8A6"/>
+          </a:solidFill>
+          <a:ln>
+            <a:noFill/>
+          </a:ln>
+          <a:effectLst/>
+        </p:spPr>
+        <p:style>
+          <a:lnRef idx="1">
+            <a:schemeClr val="accent1"/>
+          </a:lnRef>
+          <a:fillRef idx="3">
+            <a:schemeClr val="accent1"/>
+          </a:fillRef>
+          <a:effectRef idx="2">
+            <a:schemeClr val="accent1"/>
+          </a:effectRef>
+          <a:fontRef idx="minor">
+            <a:schemeClr val="lt1"/>
+          </a:fontRef>
+        </p:style>
+        <p:txBody>
+          <a:bodyPr rtlCol="0" anchor="ctr"/>
+          <a:lstStyle/>
+          <a:p>
+            <a:pPr algn="ctr"/>
+          </a:p>
+        </p:txBody>
+      </p:sp>
+      <p:sp>
+        <p:nvSpPr>
+          <p:cNvPr id="6" name="Rounded Rectangle 5"/>
+          <p:cNvSpPr/>
+          <p:nvPr/>
+        </p:nvSpPr>
+        <p:spPr>
+          <a:xfrm>
+            <a:off x="548640" y="1645920"/>
+            <a:ext cx="2057400" cy="960120"/>
+          </a:xfrm>
+          <a:prstGeom prst="roundRect">
+            <a:avLst/>
+          </a:prstGeom>
+          <a:solidFill>
+            <a:srgbClr val="1E293B"/>
+          </a:solidFill>
+          <a:ln w="19050">
+            <a:solidFill>
+              <a:srgbClr val="14B8A6"/>
+            </a:solidFill>
+          </a:ln>
+          <a:effectLst/>
+        </p:spPr>
+        <p:style>
+          <a:lnRef idx="1">
+            <a:schemeClr val="accent1"/>
+          </a:lnRef>
+          <a:fillRef idx="3">
+            <a:schemeClr val="accent1"/>
+          </a:fillRef>
+          <a:effectRef idx="2">
+            <a:schemeClr val="accent1"/>
+          </a:effectRef>
+          <a:fontRef idx="minor">
+            <a:schemeClr val="lt1"/>
+          </a:fontRef>
+        </p:style>
+        <p:txBody>
+          <a:bodyPr rtlCol="0" anchor="ctr" wrap="square" lIns="109728" rIns="109728"/>
+          <a:lstStyle/>
+          <a:p>
+            <a:pPr algn="ctr">
+              <a:defRPr sz="1500" b="1">
+                <a:solidFill>
+                  <a:srgbClr val="FFFFFF"/>
+                </a:solidFill>
+                <a:latin typeface="Avenir Next"/>
+              </a:defRPr>
+            </a:pPr>
+            <a:r>
+              <a:t>PROBE</a:t>
+            </a:r>
+          </a:p>
+          <a:p>
+            <a:pPr algn="ctr">
+              <a:defRPr sz="1100" b="0">
+                <a:solidFill>
+                  <a:srgbClr val="94A3B8"/>
+                </a:solidFill>
+                <a:latin typeface="Avenir Next"/>
+              </a:defRPr>
+            </a:pPr>
+            <a:r>
+              <a:t>cluster-inspector</a:t>
+            </a:r>
+          </a:p>
+          <a:p>
+            <a:pPr algn="ctr">
+              <a:defRPr sz="1100" b="0">
+                <a:solidFill>
+                  <a:srgbClr val="94A3B8"/>
+                </a:solidFill>
+                <a:latin typeface="Avenir Next"/>
+              </a:defRPr>
+            </a:pPr>
+            <a:r>
+              <a:t>reads the system</a:t>
+            </a:r>
+          </a:p>
+        </p:txBody>
+      </p:sp>
+      <p:cxnSp>
+        <p:nvCxnSpPr>
+          <p:cNvPr id="7" name="Connector 6"/>
+          <p:cNvCxnSpPr/>
+          <p:nvPr/>
+        </p:nvCxnSpPr>
+        <p:spPr>
+          <a:xfrm>
+            <a:off x="2624328" y="2121408"/>
+            <a:ext cx="210312" cy="0"/>
+          </a:xfrm>
+          <a:prstGeom prst="line">
+            <a:avLst/>
+          </a:prstGeom>
+          <a:ln w="31750">
+            <a:solidFill>
+              <a:srgbClr val="14B8A6"/>
+            </a:solidFill>
+            <a:tailEnd type="triangle" w="med" len="med"/>
+          </a:ln>
+          <a:effectLst/>
+        </p:spPr>
+        <p:style>
+          <a:lnRef idx="2">
+            <a:schemeClr val="accent1"/>
+          </a:lnRef>
+          <a:fillRef idx="0">
+            <a:schemeClr val="accent1"/>
+          </a:fillRef>
+          <a:effectRef idx="1">
+            <a:schemeClr val="accent1"/>
+          </a:effectRef>
+          <a:fontRef idx="minor">
+            <a:schemeClr val="tx1"/>
+          </a:fontRef>
+        </p:style>
+      </p:cxnSp>
+      <p:sp>
+        <p:nvSpPr>
+          <p:cNvPr id="8" name="Rounded Rectangle 7"/>
+          <p:cNvSpPr/>
+          <p:nvPr/>
+        </p:nvSpPr>
+        <p:spPr>
+          <a:xfrm>
+            <a:off x="2852928" y="1645920"/>
+            <a:ext cx="2057400" cy="960120"/>
+          </a:xfrm>
+          <a:prstGeom prst="roundRect">
+            <a:avLst/>
+          </a:prstGeom>
+          <a:solidFill>
+            <a:srgbClr val="1E293B"/>
+          </a:solidFill>
+          <a:ln w="19050">
+            <a:solidFill>
+              <a:srgbClr val="14B8A6"/>
+            </a:solidFill>
+          </a:ln>
+          <a:effectLst/>
+        </p:spPr>
+        <p:style>
+          <a:lnRef idx="1">
+            <a:schemeClr val="accent1"/>
+          </a:lnRef>
+          <a:fillRef idx="3">
+            <a:schemeClr val="accent1"/>
+          </a:fillRef>
+          <a:effectRef idx="2">
+            <a:schemeClr val="accent1"/>
+          </a:effectRef>
+          <a:fontRef idx="minor">
+            <a:schemeClr val="lt1"/>
+          </a:fontRef>
+        </p:style>
+        <p:txBody>
+          <a:bodyPr rtlCol="0" anchor="ctr" wrap="square" lIns="109728" rIns="109728"/>
+          <a:lstStyle/>
+          <a:p>
+            <a:pPr algn="ctr">
+              <a:defRPr sz="1500" b="1">
+                <a:solidFill>
+                  <a:srgbClr val="FFFFFF"/>
+                </a:solidFill>
+                <a:latin typeface="Avenir Next"/>
+              </a:defRPr>
+            </a:pPr>
+            <a:r>
+              <a:t>POLICY</a:t>
+            </a:r>
+          </a:p>
+          <a:p>
+            <a:pPr algn="ctr">
+              <a:defRPr sz="1100" b="0">
+                <a:solidFill>
+                  <a:srgbClr val="94A3B8"/>
+                </a:solidFill>
+                <a:latin typeface="Avenir Next"/>
+              </a:defRPr>
+            </a:pPr>
+            <a:r>
+              <a:t>one small site</a:t>
+            </a:r>
+          </a:p>
+          <a:p>
+            <a:pPr algn="ctr">
+              <a:defRPr sz="1100" b="0">
+                <a:solidFill>
+                  <a:srgbClr val="94A3B8"/>
+                </a:solidFill>
+                <a:latin typeface="Avenir Next"/>
+              </a:defRPr>
+            </a:pPr>
+            <a:r>
+              <a:t>defaults file</a:t>
+            </a:r>
+          </a:p>
+        </p:txBody>
+      </p:sp>
+      <p:cxnSp>
+        <p:nvCxnSpPr>
+          <p:cNvPr id="9" name="Connector 8"/>
+          <p:cNvCxnSpPr/>
+          <p:nvPr/>
+        </p:nvCxnSpPr>
+        <p:spPr>
+          <a:xfrm>
+            <a:off x="4928616" y="2121408"/>
+            <a:ext cx="210312" cy="0"/>
+          </a:xfrm>
+          <a:prstGeom prst="line">
+            <a:avLst/>
+          </a:prstGeom>
+          <a:ln w="31750">
+            <a:solidFill>
+              <a:srgbClr val="14B8A6"/>
+            </a:solidFill>
+            <a:tailEnd type="triangle" w="med" len="med"/>
+          </a:ln>
+          <a:effectLst/>
+        </p:spPr>
+        <p:style>
+          <a:lnRef idx="2">
+            <a:schemeClr val="accent1"/>
+          </a:lnRef>
+          <a:fillRef idx="0">
+            <a:schemeClr val="accent1"/>
+          </a:fillRef>
+          <a:effectRef idx="1">
+            <a:schemeClr val="accent1"/>
+          </a:effectRef>
+          <a:fontRef idx="minor">
+            <a:schemeClr val="tx1"/>
+          </a:fontRef>
+        </p:style>
+      </p:cxnSp>
+      <p:sp>
+        <p:nvSpPr>
+          <p:cNvPr id="10" name="Rounded Rectangle 9"/>
+          <p:cNvSpPr/>
+          <p:nvPr/>
+        </p:nvSpPr>
+        <p:spPr>
+          <a:xfrm>
+            <a:off x="5157216" y="1645920"/>
+            <a:ext cx="2057400" cy="960120"/>
+          </a:xfrm>
+          <a:prstGeom prst="roundRect">
+            <a:avLst/>
+          </a:prstGeom>
+          <a:solidFill>
+            <a:srgbClr val="1E293B"/>
+          </a:solidFill>
+          <a:ln w="19050">
+            <a:solidFill>
+              <a:srgbClr val="14B8A6"/>
+            </a:solidFill>
+          </a:ln>
+          <a:effectLst/>
+        </p:spPr>
+        <p:style>
+          <a:lnRef idx="1">
+            <a:schemeClr val="accent1"/>
+          </a:lnRef>
+          <a:fillRef idx="3">
+            <a:schemeClr val="accent1"/>
+          </a:fillRef>
+          <a:effectRef idx="2">
+            <a:schemeClr val="accent1"/>
+          </a:effectRef>
+          <a:fontRef idx="minor">
+            <a:schemeClr val="lt1"/>
+          </a:fontRef>
+        </p:style>
+        <p:txBody>
+          <a:bodyPr rtlCol="0" anchor="ctr" wrap="square" lIns="109728" rIns="109728"/>
+          <a:lstStyle/>
+          <a:p>
+            <a:pPr algn="ctr">
+              <a:defRPr sz="1500" b="1">
+                <a:solidFill>
+                  <a:srgbClr val="FFFFFF"/>
+                </a:solidFill>
+                <a:latin typeface="Avenir Next"/>
+              </a:defRPr>
+            </a:pPr>
+            <a:r>
+              <a:t>RENDER</a:t>
+            </a:r>
+          </a:p>
+          <a:p>
+            <a:pPr algn="ctr">
+              <a:defRPr sz="1100" b="0">
+                <a:solidFill>
+                  <a:srgbClr val="94A3B8"/>
+                </a:solidFill>
+                <a:latin typeface="Avenir Next"/>
+              </a:defRPr>
+            </a:pPr>
+            <a:r>
+              <a:t>stack-composer</a:t>
+            </a:r>
+          </a:p>
+          <a:p>
+            <a:pPr algn="ctr">
+              <a:defRPr sz="1100" b="0">
+                <a:solidFill>
+                  <a:srgbClr val="94A3B8"/>
+                </a:solidFill>
+                <a:latin typeface="Avenir Next"/>
+              </a:defRPr>
+            </a:pPr>
+            <a:r>
+              <a:t>emits every lane</a:t>
+            </a:r>
+          </a:p>
+        </p:txBody>
+      </p:sp>
+      <p:cxnSp>
+        <p:nvCxnSpPr>
+          <p:cNvPr id="11" name="Connector 10"/>
+          <p:cNvCxnSpPr/>
+          <p:nvPr/>
+        </p:nvCxnSpPr>
+        <p:spPr>
+          <a:xfrm>
+            <a:off x="7232904" y="2121408"/>
+            <a:ext cx="210312" cy="0"/>
+          </a:xfrm>
+          <a:prstGeom prst="line">
+            <a:avLst/>
+          </a:prstGeom>
+          <a:ln w="31750">
+            <a:solidFill>
+              <a:srgbClr val="14B8A6"/>
+            </a:solidFill>
+            <a:tailEnd type="triangle" w="med" len="med"/>
+          </a:ln>
+          <a:effectLst/>
+        </p:spPr>
+        <p:style>
+          <a:lnRef idx="2">
+            <a:schemeClr val="accent1"/>
+          </a:lnRef>
+          <a:fillRef idx="0">
+            <a:schemeClr val="accent1"/>
+          </a:fillRef>
+          <a:effectRef idx="1">
+            <a:schemeClr val="accent1"/>
+          </a:effectRef>
+          <a:fontRef idx="minor">
+            <a:schemeClr val="tx1"/>
+          </a:fontRef>
+        </p:style>
+      </p:cxnSp>
+      <p:sp>
+        <p:nvSpPr>
+          <p:cNvPr id="12" name="Rounded Rectangle 11"/>
+          <p:cNvSpPr/>
+          <p:nvPr/>
+        </p:nvSpPr>
+        <p:spPr>
+          <a:xfrm>
+            <a:off x="7461504" y="1645920"/>
+            <a:ext cx="2057400" cy="960120"/>
+          </a:xfrm>
+          <a:prstGeom prst="roundRect">
+            <a:avLst/>
+          </a:prstGeom>
+          <a:solidFill>
+            <a:srgbClr val="1E293B"/>
+          </a:solidFill>
+          <a:ln w="19050">
+            <a:solidFill>
+              <a:srgbClr val="14B8A6"/>
+            </a:solidFill>
+          </a:ln>
+          <a:effectLst/>
+        </p:spPr>
+        <p:style>
+          <a:lnRef idx="1">
+            <a:schemeClr val="accent1"/>
+          </a:lnRef>
+          <a:fillRef idx="3">
+            <a:schemeClr val="accent1"/>
+          </a:fillRef>
+          <a:effectRef idx="2">
+            <a:schemeClr val="accent1"/>
+          </a:effectRef>
+          <a:fontRef idx="minor">
+            <a:schemeClr val="lt1"/>
+          </a:fontRef>
+        </p:style>
+        <p:txBody>
+          <a:bodyPr rtlCol="0" anchor="ctr" wrap="square" lIns="109728" rIns="109728"/>
+          <a:lstStyle/>
+          <a:p>
+            <a:pPr algn="ctr">
+              <a:defRPr sz="1500" b="1">
+                <a:solidFill>
+                  <a:srgbClr val="FFFFFF"/>
+                </a:solidFill>
+                <a:latin typeface="Avenir Next"/>
+              </a:defRPr>
+            </a:pPr>
+            <a:r>
+              <a:t>BUILD</a:t>
+            </a:r>
+          </a:p>
+          <a:p>
+            <a:pPr algn="ctr">
+              <a:defRPr sz="1100" b="0">
+                <a:solidFill>
+                  <a:srgbClr val="94A3B8"/>
+                </a:solidFill>
+                <a:latin typeface="Avenir Next"/>
+              </a:defRPr>
+            </a:pPr>
+            <a:r>
+              <a:t>Spack · lanes build</a:t>
+            </a:r>
+          </a:p>
+          <a:p>
+            <a:pPr algn="ctr">
+              <a:defRPr sz="1100" b="0">
+                <a:solidFill>
+                  <a:srgbClr val="94A3B8"/>
+                </a:solidFill>
+                <a:latin typeface="Avenir Next"/>
+              </a:defRPr>
+            </a:pPr>
+            <a:r>
+              <a:t>in parallel</a:t>
+            </a:r>
+          </a:p>
+        </p:txBody>
+      </p:sp>
+      <p:cxnSp>
+        <p:nvCxnSpPr>
+          <p:cNvPr id="13" name="Connector 12"/>
+          <p:cNvCxnSpPr/>
+          <p:nvPr/>
+        </p:nvCxnSpPr>
+        <p:spPr>
+          <a:xfrm>
+            <a:off x="9537192" y="2121408"/>
+            <a:ext cx="210312" cy="0"/>
+          </a:xfrm>
+          <a:prstGeom prst="line">
+            <a:avLst/>
+          </a:prstGeom>
+          <a:ln w="31750">
+            <a:solidFill>
+              <a:srgbClr val="14B8A6"/>
+            </a:solidFill>
+            <a:tailEnd type="triangle" w="med" len="med"/>
+          </a:ln>
+          <a:effectLst/>
+        </p:spPr>
+        <p:style>
+          <a:lnRef idx="2">
+            <a:schemeClr val="accent1"/>
+          </a:lnRef>
+          <a:fillRef idx="0">
+            <a:schemeClr val="accent1"/>
+          </a:fillRef>
+          <a:effectRef idx="1">
+            <a:schemeClr val="accent1"/>
+          </a:effectRef>
+          <a:fontRef idx="minor">
+            <a:schemeClr val="tx1"/>
+          </a:fontRef>
+        </p:style>
+      </p:cxnSp>
+      <p:sp>
+        <p:nvSpPr>
+          <p:cNvPr id="14" name="Rounded Rectangle 13"/>
+          <p:cNvSpPr/>
+          <p:nvPr/>
+        </p:nvSpPr>
+        <p:spPr>
+          <a:xfrm>
+            <a:off x="9765792" y="1645920"/>
+            <a:ext cx="2057400" cy="960120"/>
+          </a:xfrm>
+          <a:prstGeom prst="roundRect">
+            <a:avLst/>
+          </a:prstGeom>
+          <a:solidFill>
+            <a:srgbClr val="1E293B"/>
+          </a:solidFill>
+          <a:ln w="19050">
+            <a:solidFill>
+              <a:srgbClr val="14B8A6"/>
+            </a:solidFill>
+          </a:ln>
+          <a:effectLst/>
+        </p:spPr>
+        <p:style>
+          <a:lnRef idx="1">
+            <a:schemeClr val="accent1"/>
+          </a:lnRef>
+          <a:fillRef idx="3">
+            <a:schemeClr val="accent1"/>
+          </a:fillRef>
+          <a:effectRef idx="2">
+            <a:schemeClr val="accent1"/>
+          </a:effectRef>
+          <a:fontRef idx="minor">
+            <a:schemeClr val="lt1"/>
+          </a:fontRef>
+        </p:style>
+        <p:txBody>
+          <a:bodyPr rtlCol="0" anchor="ctr" wrap="square" lIns="109728" rIns="109728"/>
+          <a:lstStyle/>
+          <a:p>
+            <a:pPr algn="ctr">
+              <a:defRPr sz="1500" b="1">
+                <a:solidFill>
+                  <a:srgbClr val="FFFFFF"/>
+                </a:solidFill>
+                <a:latin typeface="Avenir Next"/>
+              </a:defRPr>
+            </a:pPr>
+            <a:r>
+              <a:t>PUBLISH</a:t>
+            </a:r>
+          </a:p>
+          <a:p>
+            <a:pPr algn="ctr">
+              <a:defRPr sz="1100" b="0">
+                <a:solidFill>
+                  <a:srgbClr val="94A3B8"/>
+                </a:solidFill>
+                <a:latin typeface="Avenir Next"/>
+              </a:defRPr>
+            </a:pPr>
+            <a:r>
+              <a:t>modules · views</a:t>
+            </a:r>
+          </a:p>
+          <a:p>
+            <a:pPr algn="ctr">
+              <a:defRPr sz="1100" b="0">
+                <a:solidFill>
+                  <a:srgbClr val="94A3B8"/>
+                </a:solidFill>
+                <a:latin typeface="Avenir Next"/>
+              </a:defRPr>
+            </a:pPr>
+            <a:r>
+              <a:t>build caches</a:t>
+            </a:r>
+          </a:p>
+        </p:txBody>
+      </p:sp>
+      <p:sp>
+        <p:nvSpPr>
+          <p:cNvPr id="15" name="Rounded Rectangle 14"/>
+          <p:cNvSpPr/>
+          <p:nvPr/>
+        </p:nvSpPr>
+        <p:spPr>
+          <a:xfrm>
+            <a:off x="2148840" y="3108960"/>
+            <a:ext cx="7863840" cy="685800"/>
+          </a:xfrm>
+          <a:prstGeom prst="roundRect">
+            <a:avLst/>
+          </a:prstGeom>
+          <a:solidFill>
+            <a:srgbClr val="2A374D"/>
+          </a:solidFill>
+          <a:ln>
+            <a:noFill/>
+          </a:ln>
+          <a:effectLst/>
+        </p:spPr>
+        <p:style>
+          <a:lnRef idx="1">
+            <a:schemeClr val="accent1"/>
+          </a:lnRef>
+          <a:fillRef idx="3">
+            <a:schemeClr val="accent1"/>
+          </a:fillRef>
+          <a:effectRef idx="2">
+            <a:schemeClr val="accent1"/>
+          </a:effectRef>
+          <a:fontRef idx="minor">
+            <a:schemeClr val="lt1"/>
+          </a:fontRef>
+        </p:style>
+        <p:txBody>
+          <a:bodyPr rtlCol="0" anchor="ctr" wrap="square" lIns="109728" rIns="109728"/>
+          <a:lstStyle/>
+          <a:p>
+            <a:pPr algn="ctr">
+              <a:defRPr sz="1450" b="1">
+                <a:solidFill>
+                  <a:srgbClr val="FFFFFF"/>
+                </a:solidFill>
+                <a:latin typeface="Avenir Next"/>
+              </a:defRPr>
+            </a:pPr>
+            <a:r>
+              <a:t>Core + Foundation — built once per compiler surface, portable target</a:t>
+            </a:r>
+          </a:p>
+          <a:p>
+            <a:pPr algn="ctr">
+              <a:defRPr sz="1150" b="0">
+                <a:solidFill>
+                  <a:srgbClr val="94A3B8"/>
+                </a:solidFill>
+                <a:latin typeface="Avenir Next"/>
+              </a:defRPr>
+            </a:pPr>
+            <a:r>
+              <a:t>cmake · python · miniforge   |   zlib · xz · zstd (single pinned version)</a:t>
+            </a:r>
+          </a:p>
+        </p:txBody>
+      </p:sp>
+      <p:cxnSp>
+        <p:nvCxnSpPr>
+          <p:cNvPr id="16" name="Connector 15"/>
+          <p:cNvCxnSpPr/>
+          <p:nvPr/>
+        </p:nvCxnSpPr>
+        <p:spPr>
+          <a:xfrm flipH="1">
+            <a:off x="2880360" y="3794760"/>
+            <a:ext cx="3200400" cy="548640"/>
+          </a:xfrm>
+          <a:prstGeom prst="line">
+            <a:avLst/>
+          </a:prstGeom>
+          <a:ln w="31750">
+            <a:solidFill>
+              <a:srgbClr val="F59E0B"/>
+            </a:solidFill>
+            <a:tailEnd type="triangle" w="med" len="med"/>
+          </a:ln>
+          <a:effectLst/>
+        </p:spPr>
+        <p:style>
+          <a:lnRef idx="2">
+            <a:schemeClr val="accent1"/>
+          </a:lnRef>
+          <a:fillRef idx="0">
+            <a:schemeClr val="accent1"/>
+          </a:fillRef>
+          <a:effectRef idx="1">
+            <a:schemeClr val="accent1"/>
+          </a:effectRef>
+          <a:fontRef idx="minor">
+            <a:schemeClr val="tx1"/>
+          </a:fontRef>
+        </p:style>
+      </p:cxnSp>
+      <p:sp>
+        <p:nvSpPr>
+          <p:cNvPr id="17" name="Rounded Rectangle 16"/>
+          <p:cNvSpPr/>
+          <p:nvPr/>
+        </p:nvSpPr>
+        <p:spPr>
+          <a:xfrm>
+            <a:off x="1371600" y="4343400"/>
+            <a:ext cx="3017520" cy="868680"/>
+          </a:xfrm>
+          <a:prstGeom prst="roundRect">
+            <a:avLst/>
+          </a:prstGeom>
+          <a:solidFill>
+            <a:srgbClr val="F59E0B"/>
+          </a:solidFill>
+          <a:ln>
+            <a:noFill/>
+          </a:ln>
+          <a:effectLst/>
+        </p:spPr>
+        <p:style>
+          <a:lnRef idx="1">
+            <a:schemeClr val="accent1"/>
+          </a:lnRef>
+          <a:fillRef idx="3">
+            <a:schemeClr val="accent1"/>
+          </a:fillRef>
+          <a:effectRef idx="2">
+            <a:schemeClr val="accent1"/>
+          </a:effectRef>
+          <a:fontRef idx="minor">
+            <a:schemeClr val="lt1"/>
+          </a:fontRef>
+        </p:style>
+        <p:txBody>
+          <a:bodyPr rtlCol="0" anchor="ctr" wrap="square" lIns="109728" rIns="109728"/>
+          <a:lstStyle/>
+          <a:p>
+            <a:pPr algn="ctr">
+              <a:defRPr sz="1450" b="1">
+                <a:solidFill>
+                  <a:srgbClr val="FFFFFF"/>
+                </a:solidFill>
+                <a:latin typeface="Avenir Next"/>
+              </a:defRPr>
+            </a:pPr>
+            <a:r>
+              <a:t>serial</a:t>
+            </a:r>
+          </a:p>
+          <a:p>
+            <a:pPr algn="ctr">
+              <a:defRPr sz="1100" b="0">
+                <a:solidFill>
+                  <a:srgbClr val="FFFFFF"/>
+                </a:solidFill>
+                <a:latin typeface="Avenir Next"/>
+              </a:defRPr>
+            </a:pPr>
+            <a:r>
+              <a:t>hdf5~mpi · fftw~mpi · boost</a:t>
+            </a:r>
+          </a:p>
+        </p:txBody>
+      </p:sp>
+      <p:cxnSp>
+        <p:nvCxnSpPr>
+          <p:cNvPr id="18" name="Connector 17"/>
+          <p:cNvCxnSpPr/>
+          <p:nvPr/>
+        </p:nvCxnSpPr>
+        <p:spPr>
+          <a:xfrm>
+            <a:off x="6080760" y="3794760"/>
+            <a:ext cx="91440" cy="548640"/>
+          </a:xfrm>
+          <a:prstGeom prst="line">
+            <a:avLst/>
+          </a:prstGeom>
+          <a:ln w="31750">
+            <a:solidFill>
+              <a:srgbClr val="3B82F6"/>
+            </a:solidFill>
+            <a:tailEnd type="triangle" w="med" len="med"/>
+          </a:ln>
+          <a:effectLst/>
+        </p:spPr>
+        <p:style>
+          <a:lnRef idx="2">
+            <a:schemeClr val="accent1"/>
+          </a:lnRef>
+          <a:fillRef idx="0">
+            <a:schemeClr val="accent1"/>
+          </a:fillRef>
+          <a:effectRef idx="1">
+            <a:schemeClr val="accent1"/>
+          </a:effectRef>
+          <a:fontRef idx="minor">
+            <a:schemeClr val="tx1"/>
+          </a:fontRef>
+        </p:style>
+      </p:cxnSp>
+      <p:sp>
+        <p:nvSpPr>
+          <p:cNvPr id="19" name="Rounded Rectangle 18"/>
+          <p:cNvSpPr/>
+          <p:nvPr/>
+        </p:nvSpPr>
+        <p:spPr>
+          <a:xfrm>
+            <a:off x="4663440" y="4343400"/>
+            <a:ext cx="3017520" cy="868680"/>
+          </a:xfrm>
+          <a:prstGeom prst="roundRect">
+            <a:avLst/>
+          </a:prstGeom>
+          <a:solidFill>
+            <a:srgbClr val="3B82F6"/>
+          </a:solidFill>
+          <a:ln>
+            <a:noFill/>
+          </a:ln>
+          <a:effectLst/>
+        </p:spPr>
+        <p:style>
+          <a:lnRef idx="1">
+            <a:schemeClr val="accent1"/>
+          </a:lnRef>
+          <a:fillRef idx="3">
+            <a:schemeClr val="accent1"/>
+          </a:fillRef>
+          <a:effectRef idx="2">
+            <a:schemeClr val="accent1"/>
+          </a:effectRef>
+          <a:fontRef idx="minor">
+            <a:schemeClr val="lt1"/>
+          </a:fontRef>
+        </p:style>
+        <p:txBody>
+          <a:bodyPr rtlCol="0" anchor="ctr" wrap="square" lIns="109728" rIns="109728"/>
+          <a:lstStyle/>
+          <a:p>
+            <a:pPr algn="ctr">
+              <a:defRPr sz="1450" b="1">
+                <a:solidFill>
+                  <a:srgbClr val="FFFFFF"/>
+                </a:solidFill>
+                <a:latin typeface="Avenir Next"/>
+              </a:defRPr>
+            </a:pPr>
+            <a:r>
+              <a:t>mpi-craympich</a:t>
+            </a:r>
+          </a:p>
+          <a:p>
+            <a:pPr algn="ctr">
+              <a:defRPr sz="1100" b="0">
+                <a:solidFill>
+                  <a:srgbClr val="FFFFFF"/>
+                </a:solidFill>
+                <a:latin typeface="Avenir Next"/>
+              </a:defRPr>
+            </a:pPr>
+            <a:r>
+              <a:t>hdf5+mpi · netcdf · tau</a:t>
+            </a:r>
+          </a:p>
+        </p:txBody>
+      </p:sp>
+      <p:cxnSp>
+        <p:nvCxnSpPr>
+          <p:cNvPr id="20" name="Connector 19"/>
+          <p:cNvCxnSpPr/>
+          <p:nvPr/>
+        </p:nvCxnSpPr>
+        <p:spPr>
+          <a:xfrm>
+            <a:off x="6080760" y="3794760"/>
+            <a:ext cx="3383280" cy="548640"/>
+          </a:xfrm>
+          <a:prstGeom prst="line">
+            <a:avLst/>
+          </a:prstGeom>
+          <a:ln w="31750">
+            <a:solidFill>
+              <a:srgbClr val="8B5CF6"/>
+            </a:solidFill>
+            <a:tailEnd type="triangle" w="med" len="med"/>
+          </a:ln>
+          <a:effectLst/>
+        </p:spPr>
+        <p:style>
+          <a:lnRef idx="2">
+            <a:schemeClr val="accent1"/>
+          </a:lnRef>
+          <a:fillRef idx="0">
+            <a:schemeClr val="accent1"/>
+          </a:fillRef>
+          <a:effectRef idx="1">
+            <a:schemeClr val="accent1"/>
+          </a:effectRef>
+          <a:fontRef idx="minor">
+            <a:schemeClr val="tx1"/>
+          </a:fontRef>
+        </p:style>
+      </p:cxnSp>
+      <p:sp>
+        <p:nvSpPr>
+          <p:cNvPr id="21" name="Rounded Rectangle 20"/>
+          <p:cNvSpPr/>
+          <p:nvPr/>
+        </p:nvSpPr>
+        <p:spPr>
+          <a:xfrm>
+            <a:off x="7955279" y="4343400"/>
+            <a:ext cx="3017520" cy="868680"/>
+          </a:xfrm>
+          <a:prstGeom prst="roundRect">
+            <a:avLst/>
+          </a:prstGeom>
+          <a:solidFill>
+            <a:srgbClr val="8B5CF6"/>
+          </a:solidFill>
+          <a:ln>
+            <a:noFill/>
+          </a:ln>
+          <a:effectLst/>
+        </p:spPr>
+        <p:style>
+          <a:lnRef idx="1">
+            <a:schemeClr val="accent1"/>
+          </a:lnRef>
+          <a:fillRef idx="3">
+            <a:schemeClr val="accent1"/>
+          </a:fillRef>
+          <a:effectRef idx="2">
+            <a:schemeClr val="accent1"/>
+          </a:effectRef>
+          <a:fontRef idx="minor">
+            <a:schemeClr val="lt1"/>
+          </a:fontRef>
+        </p:style>
+        <p:txBody>
+          <a:bodyPr rtlCol="0" anchor="ctr" wrap="square" lIns="109728" rIns="109728"/>
+          <a:lstStyle/>
+          <a:p>
+            <a:pPr algn="ctr">
+              <a:defRPr sz="1450" b="1">
+                <a:solidFill>
+                  <a:srgbClr val="FFFFFF"/>
+                </a:solidFill>
+                <a:latin typeface="Avenir Next"/>
+              </a:defRPr>
+            </a:pPr>
+            <a:r>
+              <a:t>gpu-craympich-gfx942</a:t>
+            </a:r>
+          </a:p>
+          <a:p>
+            <a:pPr algn="ctr">
+              <a:defRPr sz="1100" b="0">
+                <a:solidFill>
+                  <a:srgbClr val="FFFFFF"/>
+                </a:solidFill>
+                <a:latin typeface="Avenir Next"/>
+              </a:defRPr>
+            </a:pPr>
+            <a:r>
+              <a:t>kokkos — arch from the probe</a:t>
+            </a:r>
+          </a:p>
+        </p:txBody>
+      </p:sp>
+      <p:sp>
+        <p:nvSpPr>
+          <p:cNvPr id="22" name="TextBox 21"/>
+          <p:cNvSpPr txBox="1"/>
+          <p:nvPr/>
+        </p:nvSpPr>
+        <p:spPr>
+          <a:xfrm>
+            <a:off x="548640" y="5623560"/>
+            <a:ext cx="11064240" cy="822960"/>
+          </a:xfrm>
+          <a:prstGeom prst="rect">
+            <a:avLst/>
+          </a:prstGeom>
+          <a:noFill/>
+        </p:spPr>
+        <p:txBody>
+          <a:bodyPr wrap="square" anchor="t">
+            <a:spAutoFit/>
+          </a:bodyPr>
+          <a:lstStyle/>
+          <a:p>
+            <a:pPr algn="l">
+              <a:defRPr sz="1400" b="1">
+                <a:solidFill>
+                  <a:srgbClr val="14B8A6"/>
+                </a:solidFill>
+                <a:latin typeface="Avenir Next"/>
+              </a:defRPr>
+            </a:pPr>
+            <a:r>
+              <a:t>A new system is a probe + a render — not months of curation.</a:t>
+            </a:r>
+          </a:p>
+          <a:p>
+            <a:pPr algn="l">
+              <a:defRPr sz="1250" b="0">
+                <a:solidFill>
+                  <a:srgbClr val="94A3B8"/>
+                </a:solidFill>
+                <a:latin typeface="Avenir Next"/>
+              </a:defRPr>
+            </a:pPr>
+            <a:r>
+              <a:t>The same pipeline produced a Cray EX (MI300A · ROCm) stack and an NVIDIA A100 Linux stack, unchanged.</a:t>
             </a:r>
           </a:p>
         </p:txBody>
@@ -3544,101 +7186,726 @@
       <p:grpSpPr/>
       <p:sp>
         <p:nvSpPr>
-          <p:cNvPr id="2" name="Title 1"/>
-          <p:cNvSpPr>
-            <a:spLocks noGrp="1"/>
-          </p:cNvSpPr>
-          <p:nvPr>
-            <p:ph type="title"/>
-          </p:nvPr>
-        </p:nvSpPr>
-        <p:spPr/>
-        <p:txBody>
-          <a:bodyPr/>
-          <a:lstStyle/>
-          <a:p>
-            <a:r>
-              <a:t>The lanes model — what a user does</a:t>
-            </a:r>
-          </a:p>
-        </p:txBody>
-      </p:sp>
-      <p:sp>
-        <p:nvSpPr>
-          <p:cNvPr id="3" name="Content Placeholder 2"/>
-          <p:cNvSpPr>
-            <a:spLocks noGrp="1"/>
-          </p:cNvSpPr>
-          <p:nvPr>
-            <p:ph idx="1"/>
-          </p:nvPr>
-        </p:nvSpPr>
-        <p:spPr/>
-        <p:txBody>
-          <a:bodyPr wrap="square"/>
-          <a:lstStyle/>
-          <a:p>
-            <a:pPr>
-              <a:defRPr sz="2000"/>
-            </a:pPr>
-            <a:r>
-              <a:t>1.  module load cse/&lt;compiler&gt;   (the compiler surface: system default or GCC)</a:t>
-            </a:r>
-          </a:p>
-          <a:p>
-            <a:pPr lvl="1">
-              <a:defRPr sz="1600"/>
-            </a:pPr>
-            <a:r>
-              <a:t>Core loads automatically: cmake, python, miniforge — the tool layer</a:t>
-            </a:r>
-          </a:p>
-          <a:p>
-            <a:pPr lvl="1">
-              <a:defRPr sz="1600"/>
-            </a:pPr>
-            <a:r>
-              <a:t>Foundation libraries (zlib, xz, zstd) arrive ambient in the view, one pinned version</a:t>
-            </a:r>
-          </a:p>
-          <a:p>
-            <a:pPr>
-              <a:defRPr sz="2000"/>
-            </a:pPr>
-            <a:r>
-              <a:t>2.  Pick exactly one lane</a:t>
-            </a:r>
-          </a:p>
-          <a:p>
-            <a:pPr lvl="1">
-              <a:defRPr sz="1600"/>
-            </a:pPr>
-            <a:r>
-              <a:t>serial   |   mpi-craympich   |   gpu-craympich-gfx942</a:t>
-            </a:r>
-          </a:p>
-          <a:p>
-            <a:pPr>
-              <a:defRPr sz="2000"/>
-            </a:pPr>
-            <a:r>
-              <a:t>3.  You see only that lane's packages</a:t>
-            </a:r>
-          </a:p>
-          <a:p>
-            <a:pPr lvl="1">
-              <a:defRPr sz="1600"/>
-            </a:pPr>
-            <a:r>
-              <a:t>No cross-lane contamination; no accidental MPI/GPU linkage</a:t>
-            </a:r>
-          </a:p>
-          <a:p>
-            <a:pPr lvl="1">
-              <a:defRPr sz="1600"/>
-            </a:pPr>
-            <a:r>
-              <a:t>Multiple versions inside a lane stay a familiar one-at-a-time module choice (hdf5/1.14.6 vs 1.14.5)</a:t>
+          <p:cNvPr id="2" name="Rectangle 1"/>
+          <p:cNvSpPr/>
+          <p:nvPr/>
+        </p:nvSpPr>
+        <p:spPr>
+          <a:xfrm>
+            <a:off x="0" y="0"/>
+            <a:ext cx="12191695" cy="6858000"/>
+          </a:xfrm>
+          <a:prstGeom prst="rect">
+            <a:avLst/>
+          </a:prstGeom>
+          <a:solidFill>
+            <a:srgbClr val="0F172A"/>
+          </a:solidFill>
+          <a:ln>
+            <a:noFill/>
+          </a:ln>
+          <a:effectLst/>
+        </p:spPr>
+        <p:style>
+          <a:lnRef idx="1">
+            <a:schemeClr val="accent1"/>
+          </a:lnRef>
+          <a:fillRef idx="3">
+            <a:schemeClr val="accent1"/>
+          </a:fillRef>
+          <a:effectRef idx="2">
+            <a:schemeClr val="accent1"/>
+          </a:effectRef>
+          <a:fontRef idx="minor">
+            <a:schemeClr val="lt1"/>
+          </a:fontRef>
+        </p:style>
+        <p:txBody>
+          <a:bodyPr rtlCol="0" anchor="ctr"/>
+          <a:lstStyle/>
+          <a:p>
+            <a:pPr algn="ctr"/>
+          </a:p>
+        </p:txBody>
+      </p:sp>
+      <p:sp>
+        <p:nvSpPr>
+          <p:cNvPr id="3" name="TextBox 2"/>
+          <p:cNvSpPr txBox="1"/>
+          <p:nvPr/>
+        </p:nvSpPr>
+        <p:spPr>
+          <a:xfrm>
+            <a:off x="548640" y="256032"/>
+            <a:ext cx="10972800" cy="365760"/>
+          </a:xfrm>
+          <a:prstGeom prst="rect">
+            <a:avLst/>
+          </a:prstGeom>
+          <a:noFill/>
+        </p:spPr>
+        <p:txBody>
+          <a:bodyPr wrap="square" anchor="t">
+            <a:spAutoFit/>
+          </a:bodyPr>
+          <a:lstStyle/>
+          <a:p>
+            <a:pPr algn="l">
+              <a:defRPr sz="1300" b="1">
+                <a:solidFill>
+                  <a:srgbClr val="14B8A6"/>
+                </a:solidFill>
+                <a:latin typeface="Avenir Next"/>
+              </a:defRPr>
+            </a:pPr>
+            <a:r>
+              <a:t>SCHEMATIC · THE FRONT DOOR</a:t>
+            </a:r>
+          </a:p>
+        </p:txBody>
+      </p:sp>
+      <p:sp>
+        <p:nvSpPr>
+          <p:cNvPr id="4" name="TextBox 3"/>
+          <p:cNvSpPr txBox="1"/>
+          <p:nvPr/>
+        </p:nvSpPr>
+        <p:spPr>
+          <a:xfrm>
+            <a:off x="548640" y="566928"/>
+            <a:ext cx="11064240" cy="731520"/>
+          </a:xfrm>
+          <a:prstGeom prst="rect">
+            <a:avLst/>
+          </a:prstGeom>
+          <a:noFill/>
+        </p:spPr>
+        <p:txBody>
+          <a:bodyPr wrap="square" anchor="t">
+            <a:spAutoFit/>
+          </a:bodyPr>
+          <a:lstStyle/>
+          <a:p>
+            <a:pPr algn="l">
+              <a:defRPr sz="3000" b="1">
+                <a:solidFill>
+                  <a:srgbClr val="FFFFFF"/>
+                </a:solidFill>
+                <a:latin typeface="Avenir Next"/>
+              </a:defRPr>
+            </a:pPr>
+            <a:r>
+              <a:t>What a user experiences</a:t>
+            </a:r>
+          </a:p>
+        </p:txBody>
+      </p:sp>
+      <p:sp>
+        <p:nvSpPr>
+          <p:cNvPr id="5" name="Rectangle 4"/>
+          <p:cNvSpPr/>
+          <p:nvPr/>
+        </p:nvSpPr>
+        <p:spPr>
+          <a:xfrm>
+            <a:off x="566928" y="1298448"/>
+            <a:ext cx="1463040" cy="41148"/>
+          </a:xfrm>
+          <a:prstGeom prst="rect">
+            <a:avLst/>
+          </a:prstGeom>
+          <a:solidFill>
+            <a:srgbClr val="14B8A6"/>
+          </a:solidFill>
+          <a:ln>
+            <a:noFill/>
+          </a:ln>
+          <a:effectLst/>
+        </p:spPr>
+        <p:style>
+          <a:lnRef idx="1">
+            <a:schemeClr val="accent1"/>
+          </a:lnRef>
+          <a:fillRef idx="3">
+            <a:schemeClr val="accent1"/>
+          </a:fillRef>
+          <a:effectRef idx="2">
+            <a:schemeClr val="accent1"/>
+          </a:effectRef>
+          <a:fontRef idx="minor">
+            <a:schemeClr val="lt1"/>
+          </a:fontRef>
+        </p:style>
+        <p:txBody>
+          <a:bodyPr rtlCol="0" anchor="ctr"/>
+          <a:lstStyle/>
+          <a:p>
+            <a:pPr algn="ctr"/>
+          </a:p>
+        </p:txBody>
+      </p:sp>
+      <p:sp>
+        <p:nvSpPr>
+          <p:cNvPr id="6" name="Rounded Rectangle 5"/>
+          <p:cNvSpPr/>
+          <p:nvPr/>
+        </p:nvSpPr>
+        <p:spPr>
+          <a:xfrm>
+            <a:off x="3809390" y="1645920"/>
+            <a:ext cx="4572000" cy="566928"/>
+          </a:xfrm>
+          <a:prstGeom prst="roundRect">
+            <a:avLst/>
+          </a:prstGeom>
+          <a:solidFill>
+            <a:srgbClr val="2A374D"/>
+          </a:solidFill>
+          <a:ln>
+            <a:noFill/>
+          </a:ln>
+          <a:effectLst/>
+        </p:spPr>
+        <p:style>
+          <a:lnRef idx="1">
+            <a:schemeClr val="accent1"/>
+          </a:lnRef>
+          <a:fillRef idx="3">
+            <a:schemeClr val="accent1"/>
+          </a:fillRef>
+          <a:effectRef idx="2">
+            <a:schemeClr val="accent1"/>
+          </a:effectRef>
+          <a:fontRef idx="minor">
+            <a:schemeClr val="lt1"/>
+          </a:fontRef>
+        </p:style>
+        <p:txBody>
+          <a:bodyPr rtlCol="0" anchor="ctr" wrap="square" lIns="109728" rIns="109728"/>
+          <a:lstStyle/>
+          <a:p>
+            <a:pPr algn="ctr">
+              <a:defRPr sz="1600" b="1">
+                <a:solidFill>
+                  <a:srgbClr val="FFFFFF"/>
+                </a:solidFill>
+                <a:latin typeface="Avenir Next"/>
+              </a:defRPr>
+            </a:pPr>
+            <a:r>
+              <a:t>$ module load cse/gcc</a:t>
+            </a:r>
+          </a:p>
+        </p:txBody>
+      </p:sp>
+      <p:cxnSp>
+        <p:nvCxnSpPr>
+          <p:cNvPr id="7" name="Connector 6"/>
+          <p:cNvCxnSpPr/>
+          <p:nvPr/>
+        </p:nvCxnSpPr>
+        <p:spPr>
+          <a:xfrm>
+            <a:off x="6095390" y="2212848"/>
+            <a:ext cx="0" cy="365760"/>
+          </a:xfrm>
+          <a:prstGeom prst="line">
+            <a:avLst/>
+          </a:prstGeom>
+          <a:ln w="31750">
+            <a:solidFill>
+              <a:srgbClr val="94A3B8"/>
+            </a:solidFill>
+            <a:tailEnd type="triangle" w="med" len="med"/>
+          </a:ln>
+          <a:effectLst/>
+        </p:spPr>
+        <p:style>
+          <a:lnRef idx="2">
+            <a:schemeClr val="accent1"/>
+          </a:lnRef>
+          <a:fillRef idx="0">
+            <a:schemeClr val="accent1"/>
+          </a:fillRef>
+          <a:effectRef idx="1">
+            <a:schemeClr val="accent1"/>
+          </a:effectRef>
+          <a:fontRef idx="minor">
+            <a:schemeClr val="tx1"/>
+          </a:fontRef>
+        </p:style>
+      </p:cxnSp>
+      <p:sp>
+        <p:nvSpPr>
+          <p:cNvPr id="8" name="Rounded Rectangle 7"/>
+          <p:cNvSpPr/>
+          <p:nvPr/>
+        </p:nvSpPr>
+        <p:spPr>
+          <a:xfrm>
+            <a:off x="2163470" y="2578608"/>
+            <a:ext cx="3749039" cy="914400"/>
+          </a:xfrm>
+          <a:prstGeom prst="roundRect">
+            <a:avLst/>
+          </a:prstGeom>
+          <a:solidFill>
+            <a:srgbClr val="14B8A6"/>
+          </a:solidFill>
+          <a:ln>
+            <a:noFill/>
+          </a:ln>
+          <a:effectLst/>
+        </p:spPr>
+        <p:style>
+          <a:lnRef idx="1">
+            <a:schemeClr val="accent1"/>
+          </a:lnRef>
+          <a:fillRef idx="3">
+            <a:schemeClr val="accent1"/>
+          </a:fillRef>
+          <a:effectRef idx="2">
+            <a:schemeClr val="accent1"/>
+          </a:effectRef>
+          <a:fontRef idx="minor">
+            <a:schemeClr val="lt1"/>
+          </a:fontRef>
+        </p:style>
+        <p:txBody>
+          <a:bodyPr rtlCol="0" anchor="ctr" wrap="square" lIns="109728" rIns="109728"/>
+          <a:lstStyle/>
+          <a:p>
+            <a:pPr algn="ctr">
+              <a:defRPr sz="1450" b="1">
+                <a:solidFill>
+                  <a:srgbClr val="FFFFFF"/>
+                </a:solidFill>
+                <a:latin typeface="Avenir Next"/>
+              </a:defRPr>
+            </a:pPr>
+            <a:r>
+              <a:t>Core — loads automatically</a:t>
+            </a:r>
+          </a:p>
+          <a:p>
+            <a:pPr algn="ctr">
+              <a:defRPr sz="1150" b="0">
+                <a:solidFill>
+                  <a:srgbClr val="FFFFFF"/>
+                </a:solidFill>
+                <a:latin typeface="Avenir Next"/>
+              </a:defRPr>
+            </a:pPr>
+            <a:r>
+              <a:t>cmake · python · miniforge · gsl</a:t>
+            </a:r>
+          </a:p>
+        </p:txBody>
+      </p:sp>
+      <p:sp>
+        <p:nvSpPr>
+          <p:cNvPr id="9" name="Rounded Rectangle 8"/>
+          <p:cNvSpPr/>
+          <p:nvPr/>
+        </p:nvSpPr>
+        <p:spPr>
+          <a:xfrm>
+            <a:off x="6278270" y="2578608"/>
+            <a:ext cx="3749039" cy="914400"/>
+          </a:xfrm>
+          <a:prstGeom prst="roundRect">
+            <a:avLst/>
+          </a:prstGeom>
+          <a:solidFill>
+            <a:srgbClr val="64748B"/>
+          </a:solidFill>
+          <a:ln>
+            <a:noFill/>
+          </a:ln>
+          <a:effectLst/>
+        </p:spPr>
+        <p:style>
+          <a:lnRef idx="1">
+            <a:schemeClr val="accent1"/>
+          </a:lnRef>
+          <a:fillRef idx="3">
+            <a:schemeClr val="accent1"/>
+          </a:fillRef>
+          <a:effectRef idx="2">
+            <a:schemeClr val="accent1"/>
+          </a:effectRef>
+          <a:fontRef idx="minor">
+            <a:schemeClr val="lt1"/>
+          </a:fontRef>
+        </p:style>
+        <p:txBody>
+          <a:bodyPr rtlCol="0" anchor="ctr" wrap="square" lIns="109728" rIns="109728"/>
+          <a:lstStyle/>
+          <a:p>
+            <a:pPr algn="ctr">
+              <a:defRPr sz="1450" b="1">
+                <a:solidFill>
+                  <a:srgbClr val="FFFFFF"/>
+                </a:solidFill>
+                <a:latin typeface="Avenir Next"/>
+              </a:defRPr>
+            </a:pPr>
+            <a:r>
+              <a:t>Foundation — ambient in the view</a:t>
+            </a:r>
+          </a:p>
+          <a:p>
+            <a:pPr algn="ctr">
+              <a:defRPr sz="1150" b="0">
+                <a:solidFill>
+                  <a:srgbClr val="FFFFFF"/>
+                </a:solidFill>
+                <a:latin typeface="Avenir Next"/>
+              </a:defRPr>
+            </a:pPr>
+            <a:r>
+              <a:t>zlib · xz · zstd — one pinned version</a:t>
+            </a:r>
+          </a:p>
+        </p:txBody>
+      </p:sp>
+      <p:cxnSp>
+        <p:nvCxnSpPr>
+          <p:cNvPr id="10" name="Connector 9"/>
+          <p:cNvCxnSpPr/>
+          <p:nvPr/>
+        </p:nvCxnSpPr>
+        <p:spPr>
+          <a:xfrm>
+            <a:off x="6095390" y="3493008"/>
+            <a:ext cx="0" cy="457200"/>
+          </a:xfrm>
+          <a:prstGeom prst="line">
+            <a:avLst/>
+          </a:prstGeom>
+          <a:ln w="31750">
+            <a:solidFill>
+              <a:srgbClr val="94A3B8"/>
+            </a:solidFill>
+            <a:tailEnd type="triangle" w="med" len="med"/>
+          </a:ln>
+          <a:effectLst/>
+        </p:spPr>
+        <p:style>
+          <a:lnRef idx="2">
+            <a:schemeClr val="accent1"/>
+          </a:lnRef>
+          <a:fillRef idx="0">
+            <a:schemeClr val="accent1"/>
+          </a:fillRef>
+          <a:effectRef idx="1">
+            <a:schemeClr val="accent1"/>
+          </a:effectRef>
+          <a:fontRef idx="minor">
+            <a:schemeClr val="tx1"/>
+          </a:fontRef>
+        </p:style>
+      </p:cxnSp>
+      <p:sp>
+        <p:nvSpPr>
+          <p:cNvPr id="11" name="TextBox 10"/>
+          <p:cNvSpPr txBox="1"/>
+          <p:nvPr/>
+        </p:nvSpPr>
+        <p:spPr>
+          <a:xfrm>
+            <a:off x="3809390" y="3950208"/>
+            <a:ext cx="4572000" cy="347472"/>
+          </a:xfrm>
+          <a:prstGeom prst="rect">
+            <a:avLst/>
+          </a:prstGeom>
+          <a:noFill/>
+        </p:spPr>
+        <p:txBody>
+          <a:bodyPr wrap="square" anchor="t">
+            <a:spAutoFit/>
+          </a:bodyPr>
+          <a:lstStyle/>
+          <a:p>
+            <a:pPr algn="ctr">
+              <a:defRPr sz="1250" b="1">
+                <a:solidFill>
+                  <a:srgbClr val="94A3B8"/>
+                </a:solidFill>
+                <a:latin typeface="Avenir Next"/>
+              </a:defRPr>
+            </a:pPr>
+            <a:r>
+              <a:t>CHOOSE EXACTLY ONE LANE</a:t>
+            </a:r>
+          </a:p>
+        </p:txBody>
+      </p:sp>
+      <p:sp>
+        <p:nvSpPr>
+          <p:cNvPr id="12" name="Rounded Rectangle 11"/>
+          <p:cNvSpPr/>
+          <p:nvPr/>
+        </p:nvSpPr>
+        <p:spPr>
+          <a:xfrm>
+            <a:off x="685800" y="4343400"/>
+            <a:ext cx="3474720" cy="914400"/>
+          </a:xfrm>
+          <a:prstGeom prst="roundRect">
+            <a:avLst/>
+          </a:prstGeom>
+          <a:solidFill>
+            <a:srgbClr val="F59E0B"/>
+          </a:solidFill>
+          <a:ln>
+            <a:noFill/>
+          </a:ln>
+          <a:effectLst/>
+        </p:spPr>
+        <p:style>
+          <a:lnRef idx="1">
+            <a:schemeClr val="accent1"/>
+          </a:lnRef>
+          <a:fillRef idx="3">
+            <a:schemeClr val="accent1"/>
+          </a:fillRef>
+          <a:effectRef idx="2">
+            <a:schemeClr val="accent1"/>
+          </a:effectRef>
+          <a:fontRef idx="minor">
+            <a:schemeClr val="lt1"/>
+          </a:fontRef>
+        </p:style>
+        <p:txBody>
+          <a:bodyPr rtlCol="0" anchor="ctr" wrap="square" lIns="109728" rIns="109728"/>
+          <a:lstStyle/>
+          <a:p>
+            <a:pPr algn="ctr">
+              <a:defRPr sz="1500" b="1">
+                <a:solidFill>
+                  <a:srgbClr val="FFFFFF"/>
+                </a:solidFill>
+                <a:latin typeface="Avenir Next"/>
+              </a:defRPr>
+            </a:pPr>
+            <a:r>
+              <a:t>serial</a:t>
+            </a:r>
+          </a:p>
+          <a:p>
+            <a:pPr algn="ctr">
+              <a:defRPr sz="1150" b="0">
+                <a:solidFill>
+                  <a:srgbClr val="FFFFFF"/>
+                </a:solidFill>
+                <a:latin typeface="Avenir Next"/>
+              </a:defRPr>
+            </a:pPr>
+            <a:r>
+              <a:t>hdf5~mpi 1.14.6 / 1.14.5 · fftw · boost</a:t>
+            </a:r>
+          </a:p>
+        </p:txBody>
+      </p:sp>
+      <p:sp>
+        <p:nvSpPr>
+          <p:cNvPr id="13" name="Rounded Rectangle 12"/>
+          <p:cNvSpPr/>
+          <p:nvPr/>
+        </p:nvSpPr>
+        <p:spPr>
+          <a:xfrm>
+            <a:off x="4343400" y="4343400"/>
+            <a:ext cx="3474720" cy="914400"/>
+          </a:xfrm>
+          <a:prstGeom prst="roundRect">
+            <a:avLst/>
+          </a:prstGeom>
+          <a:solidFill>
+            <a:srgbClr val="3B82F6"/>
+          </a:solidFill>
+          <a:ln>
+            <a:noFill/>
+          </a:ln>
+          <a:effectLst/>
+        </p:spPr>
+        <p:style>
+          <a:lnRef idx="1">
+            <a:schemeClr val="accent1"/>
+          </a:lnRef>
+          <a:fillRef idx="3">
+            <a:schemeClr val="accent1"/>
+          </a:fillRef>
+          <a:effectRef idx="2">
+            <a:schemeClr val="accent1"/>
+          </a:effectRef>
+          <a:fontRef idx="minor">
+            <a:schemeClr val="lt1"/>
+          </a:fontRef>
+        </p:style>
+        <p:txBody>
+          <a:bodyPr rtlCol="0" anchor="ctr" wrap="square" lIns="109728" rIns="109728"/>
+          <a:lstStyle/>
+          <a:p>
+            <a:pPr algn="ctr">
+              <a:defRPr sz="1500" b="1">
+                <a:solidFill>
+                  <a:srgbClr val="FFFFFF"/>
+                </a:solidFill>
+                <a:latin typeface="Avenir Next"/>
+              </a:defRPr>
+            </a:pPr>
+            <a:r>
+              <a:t>mpi-craympich</a:t>
+            </a:r>
+          </a:p>
+          <a:p>
+            <a:pPr algn="ctr">
+              <a:defRPr sz="1150" b="0">
+                <a:solidFill>
+                  <a:srgbClr val="FFFFFF"/>
+                </a:solidFill>
+                <a:latin typeface="Avenir Next"/>
+              </a:defRPr>
+            </a:pPr>
+            <a:r>
+              <a:t>hdf5+mpi · netcdf · tau</a:t>
+            </a:r>
+          </a:p>
+        </p:txBody>
+      </p:sp>
+      <p:sp>
+        <p:nvSpPr>
+          <p:cNvPr id="14" name="Rounded Rectangle 13"/>
+          <p:cNvSpPr/>
+          <p:nvPr/>
+        </p:nvSpPr>
+        <p:spPr>
+          <a:xfrm>
+            <a:off x="8001000" y="4343400"/>
+            <a:ext cx="3474720" cy="914400"/>
+          </a:xfrm>
+          <a:prstGeom prst="roundRect">
+            <a:avLst/>
+          </a:prstGeom>
+          <a:solidFill>
+            <a:srgbClr val="8B5CF6"/>
+          </a:solidFill>
+          <a:ln>
+            <a:noFill/>
+          </a:ln>
+          <a:effectLst/>
+        </p:spPr>
+        <p:style>
+          <a:lnRef idx="1">
+            <a:schemeClr val="accent1"/>
+          </a:lnRef>
+          <a:fillRef idx="3">
+            <a:schemeClr val="accent1"/>
+          </a:fillRef>
+          <a:effectRef idx="2">
+            <a:schemeClr val="accent1"/>
+          </a:effectRef>
+          <a:fontRef idx="minor">
+            <a:schemeClr val="lt1"/>
+          </a:fontRef>
+        </p:style>
+        <p:txBody>
+          <a:bodyPr rtlCol="0" anchor="ctr" wrap="square" lIns="109728" rIns="109728"/>
+          <a:lstStyle/>
+          <a:p>
+            <a:pPr algn="ctr">
+              <a:defRPr sz="1500" b="1">
+                <a:solidFill>
+                  <a:srgbClr val="FFFFFF"/>
+                </a:solidFill>
+                <a:latin typeface="Avenir Next"/>
+              </a:defRPr>
+            </a:pPr>
+            <a:r>
+              <a:t>gpu-craympich-gfx942</a:t>
+            </a:r>
+          </a:p>
+          <a:p>
+            <a:pPr algn="ctr">
+              <a:defRPr sz="1150" b="0">
+                <a:solidFill>
+                  <a:srgbClr val="FFFFFF"/>
+                </a:solidFill>
+                <a:latin typeface="Avenir Next"/>
+              </a:defRPr>
+            </a:pPr>
+            <a:r>
+              <a:t>kokkos +rocm gfx942</a:t>
+            </a:r>
+          </a:p>
+        </p:txBody>
+      </p:sp>
+      <p:sp>
+        <p:nvSpPr>
+          <p:cNvPr id="15" name="Rounded Rectangle 14"/>
+          <p:cNvSpPr/>
+          <p:nvPr/>
+        </p:nvSpPr>
+        <p:spPr>
+          <a:xfrm>
+            <a:off x="685800" y="5577840"/>
+            <a:ext cx="10835640" cy="777240"/>
+          </a:xfrm>
+          <a:prstGeom prst="roundRect">
+            <a:avLst/>
+          </a:prstGeom>
+          <a:solidFill>
+            <a:srgbClr val="1E293B"/>
+          </a:solidFill>
+          <a:ln>
+            <a:noFill/>
+          </a:ln>
+          <a:effectLst/>
+        </p:spPr>
+        <p:style>
+          <a:lnRef idx="1">
+            <a:schemeClr val="accent1"/>
+          </a:lnRef>
+          <a:fillRef idx="3">
+            <a:schemeClr val="accent1"/>
+          </a:fillRef>
+          <a:effectRef idx="2">
+            <a:schemeClr val="accent1"/>
+          </a:effectRef>
+          <a:fontRef idx="minor">
+            <a:schemeClr val="lt1"/>
+          </a:fontRef>
+        </p:style>
+        <p:txBody>
+          <a:bodyPr rtlCol="0" anchor="ctr" wrap="square" lIns="109728" rIns="109728"/>
+          <a:lstStyle/>
+          <a:p>
+            <a:pPr algn="ctr">
+              <a:defRPr sz="1350" b="1">
+                <a:solidFill>
+                  <a:srgbClr val="FFFFFF"/>
+                </a:solidFill>
+                <a:latin typeface="Avenir Next"/>
+              </a:defRPr>
+            </a:pPr>
+            <a:r>
+              <a:t>Only the chosen lane is visible — no contamination, no accidental MPI/GPU linkage.</a:t>
+            </a:r>
+          </a:p>
+          <a:p>
+            <a:pPr algn="ctr">
+              <a:defRPr sz="1200" b="0">
+                <a:solidFill>
+                  <a:srgbClr val="94A3B8"/>
+                </a:solidFill>
+                <a:latin typeface="Avenir Next"/>
+              </a:defRPr>
+            </a:pPr>
+            <a:r>
+              <a:t>Two HDF5 versions in a lane? The same one-at-a-time module choice users already know.</a:t>
             </a:r>
           </a:p>
         </p:txBody>
@@ -3663,19 +7930,114 @@
       <p:grpSpPr/>
       <p:sp>
         <p:nvSpPr>
-          <p:cNvPr id="2" name="Title 1"/>
-          <p:cNvSpPr>
-            <a:spLocks noGrp="1"/>
-          </p:cNvSpPr>
-          <p:nvPr>
-            <p:ph type="title"/>
-          </p:nvPr>
-        </p:nvSpPr>
-        <p:spPr/>
-        <p:txBody>
-          <a:bodyPr/>
-          <a:lstStyle/>
-          <a:p>
+          <p:cNvPr id="2" name="Rectangle 1"/>
+          <p:cNvSpPr/>
+          <p:nvPr/>
+        </p:nvSpPr>
+        <p:spPr>
+          <a:xfrm>
+            <a:off x="0" y="0"/>
+            <a:ext cx="12191695" cy="6858000"/>
+          </a:xfrm>
+          <a:prstGeom prst="rect">
+            <a:avLst/>
+          </a:prstGeom>
+          <a:solidFill>
+            <a:srgbClr val="0F172A"/>
+          </a:solidFill>
+          <a:ln>
+            <a:noFill/>
+          </a:ln>
+          <a:effectLst/>
+        </p:spPr>
+        <p:style>
+          <a:lnRef idx="1">
+            <a:schemeClr val="accent1"/>
+          </a:lnRef>
+          <a:fillRef idx="3">
+            <a:schemeClr val="accent1"/>
+          </a:fillRef>
+          <a:effectRef idx="2">
+            <a:schemeClr val="accent1"/>
+          </a:effectRef>
+          <a:fontRef idx="minor">
+            <a:schemeClr val="lt1"/>
+          </a:fontRef>
+        </p:style>
+        <p:txBody>
+          <a:bodyPr rtlCol="0" anchor="ctr"/>
+          <a:lstStyle/>
+          <a:p>
+            <a:pPr algn="ctr"/>
+          </a:p>
+        </p:txBody>
+      </p:sp>
+      <p:sp>
+        <p:nvSpPr>
+          <p:cNvPr id="3" name="TextBox 2"/>
+          <p:cNvSpPr txBox="1"/>
+          <p:nvPr/>
+        </p:nvSpPr>
+        <p:spPr>
+          <a:xfrm>
+            <a:off x="548640" y="256032"/>
+            <a:ext cx="10972800" cy="365760"/>
+          </a:xfrm>
+          <a:prstGeom prst="rect">
+            <a:avLst/>
+          </a:prstGeom>
+          <a:noFill/>
+        </p:spPr>
+        <p:txBody>
+          <a:bodyPr wrap="square" anchor="t">
+            <a:spAutoFit/>
+          </a:bodyPr>
+          <a:lstStyle/>
+          <a:p>
+            <a:pPr algn="l">
+              <a:defRPr sz="1300" b="1">
+                <a:solidFill>
+                  <a:srgbClr val="14B8A6"/>
+                </a:solidFill>
+                <a:latin typeface="Avenir Next"/>
+              </a:defRPr>
+            </a:pPr>
+            <a:r>
+              <a:t>NAMES CARRY FACTS, NOT CONTENTS</a:t>
+            </a:r>
+          </a:p>
+        </p:txBody>
+      </p:sp>
+      <p:sp>
+        <p:nvSpPr>
+          <p:cNvPr id="4" name="TextBox 3"/>
+          <p:cNvSpPr txBox="1"/>
+          <p:nvPr/>
+        </p:nvSpPr>
+        <p:spPr>
+          <a:xfrm>
+            <a:off x="548640" y="566928"/>
+            <a:ext cx="11064240" cy="731520"/>
+          </a:xfrm>
+          <a:prstGeom prst="rect">
+            <a:avLst/>
+          </a:prstGeom>
+          <a:noFill/>
+        </p:spPr>
+        <p:txBody>
+          <a:bodyPr wrap="square" anchor="t">
+            <a:spAutoFit/>
+          </a:bodyPr>
+          <a:lstStyle/>
+          <a:p>
+            <a:pPr algn="l">
+              <a:defRPr sz="3000" b="1">
+                <a:solidFill>
+                  <a:srgbClr val="FFFFFF"/>
+                </a:solidFill>
+                <a:latin typeface="Avenir Next"/>
+              </a:defRPr>
+            </a:pPr>
             <a:r>
               <a:t>Lane vocabulary</a:t>
             </a:r>
@@ -3684,64 +8046,882 @@
       </p:sp>
       <p:sp>
         <p:nvSpPr>
-          <p:cNvPr id="3" name="Content Placeholder 2"/>
-          <p:cNvSpPr>
-            <a:spLocks noGrp="1"/>
-          </p:cNvSpPr>
-          <p:nvPr>
-            <p:ph idx="1"/>
-          </p:nvPr>
-        </p:nvSpPr>
-        <p:spPr/>
-        <p:txBody>
-          <a:bodyPr wrap="square"/>
-          <a:lstStyle/>
-          <a:p>
-            <a:pPr>
-              <a:defRPr sz="2000"/>
-            </a:pPr>
-            <a:r>
-              <a:t>core — packages with no MPI implementation at all (GSL) plus compiler-agnostic building blocks (Python, Miniforge, CMake); loadable</a:t>
-            </a:r>
-          </a:p>
-          <a:p>
-            <a:pPr>
-              <a:defRPr sz="2000"/>
-            </a:pPr>
-            <a:r>
-              <a:t>serial — MPI-capable packages deliberately built without MPI (hdf5~mpi)</a:t>
-            </a:r>
-          </a:p>
-          <a:p>
-            <a:pPr>
-              <a:defRPr sz="2000"/>
-            </a:pPr>
-            <a:r>
-              <a:t>mpi-&lt;impl&gt; — built against the named MPI (mpi-craympich, mpi-openmpi)</a:t>
-            </a:r>
-          </a:p>
-          <a:p>
-            <a:pPr>
-              <a:defRPr sz="2000"/>
-            </a:pPr>
-            <a:r>
-              <a:t>gpu-&lt;impl&gt;-&lt;arch&gt; — GPU backend over GPU-aware MPI (gpu-craympich-gfx942)</a:t>
-            </a:r>
-          </a:p>
-          <a:p>
-            <a:pPr>
-              <a:defRPr sz="2000"/>
-            </a:pPr>
-            <a:r>
-              <a:t>Names carry facts, not contents: the lane is called gpu-…, never gpu-kokkos</a:t>
-            </a:r>
-          </a:p>
-          <a:p>
-            <a:pPr>
-              <a:defRPr sz="2000"/>
-            </a:pPr>
-            <a:r>
-              <a:t>Same vocabulary on every system — Cray or generic Linux</a:t>
+          <p:cNvPr id="5" name="Rectangle 4"/>
+          <p:cNvSpPr/>
+          <p:nvPr/>
+        </p:nvSpPr>
+        <p:spPr>
+          <a:xfrm>
+            <a:off x="566928" y="1298448"/>
+            <a:ext cx="1463040" cy="41148"/>
+          </a:xfrm>
+          <a:prstGeom prst="rect">
+            <a:avLst/>
+          </a:prstGeom>
+          <a:solidFill>
+            <a:srgbClr val="14B8A6"/>
+          </a:solidFill>
+          <a:ln>
+            <a:noFill/>
+          </a:ln>
+          <a:effectLst/>
+        </p:spPr>
+        <p:style>
+          <a:lnRef idx="1">
+            <a:schemeClr val="accent1"/>
+          </a:lnRef>
+          <a:fillRef idx="3">
+            <a:schemeClr val="accent1"/>
+          </a:fillRef>
+          <a:effectRef idx="2">
+            <a:schemeClr val="accent1"/>
+          </a:effectRef>
+          <a:fontRef idx="minor">
+            <a:schemeClr val="lt1"/>
+          </a:fontRef>
+        </p:style>
+        <p:txBody>
+          <a:bodyPr rtlCol="0" anchor="ctr"/>
+          <a:lstStyle/>
+          <a:p>
+            <a:pPr algn="ctr"/>
+          </a:p>
+        </p:txBody>
+      </p:sp>
+      <p:sp>
+        <p:nvSpPr>
+          <p:cNvPr id="6" name="Rounded Rectangle 5"/>
+          <p:cNvSpPr/>
+          <p:nvPr/>
+        </p:nvSpPr>
+        <p:spPr>
+          <a:xfrm>
+            <a:off x="548640" y="1645920"/>
+            <a:ext cx="2743200" cy="3840480"/>
+          </a:xfrm>
+          <a:prstGeom prst="roundRect">
+            <a:avLst/>
+          </a:prstGeom>
+          <a:solidFill>
+            <a:srgbClr val="1E293B"/>
+          </a:solidFill>
+          <a:ln>
+            <a:noFill/>
+          </a:ln>
+          <a:effectLst/>
+        </p:spPr>
+        <p:style>
+          <a:lnRef idx="1">
+            <a:schemeClr val="accent1"/>
+          </a:lnRef>
+          <a:fillRef idx="3">
+            <a:schemeClr val="accent1"/>
+          </a:fillRef>
+          <a:effectRef idx="2">
+            <a:schemeClr val="accent1"/>
+          </a:effectRef>
+          <a:fontRef idx="minor">
+            <a:schemeClr val="lt1"/>
+          </a:fontRef>
+        </p:style>
+        <p:txBody>
+          <a:bodyPr rtlCol="0" anchor="ctr"/>
+          <a:lstStyle/>
+          <a:p>
+            <a:pPr algn="ctr"/>
+          </a:p>
+        </p:txBody>
+      </p:sp>
+      <p:sp>
+        <p:nvSpPr>
+          <p:cNvPr id="7" name="Rounded Rectangle 6"/>
+          <p:cNvSpPr/>
+          <p:nvPr/>
+        </p:nvSpPr>
+        <p:spPr>
+          <a:xfrm>
+            <a:off x="548640" y="1645920"/>
+            <a:ext cx="2743200" cy="685800"/>
+          </a:xfrm>
+          <a:prstGeom prst="roundRect">
+            <a:avLst/>
+          </a:prstGeom>
+          <a:solidFill>
+            <a:srgbClr val="14B8A6"/>
+          </a:solidFill>
+          <a:ln>
+            <a:noFill/>
+          </a:ln>
+          <a:effectLst/>
+        </p:spPr>
+        <p:style>
+          <a:lnRef idx="1">
+            <a:schemeClr val="accent1"/>
+          </a:lnRef>
+          <a:fillRef idx="3">
+            <a:schemeClr val="accent1"/>
+          </a:fillRef>
+          <a:effectRef idx="2">
+            <a:schemeClr val="accent1"/>
+          </a:effectRef>
+          <a:fontRef idx="minor">
+            <a:schemeClr val="lt1"/>
+          </a:fontRef>
+        </p:style>
+        <p:txBody>
+          <a:bodyPr rtlCol="0" anchor="ctr"/>
+          <a:lstStyle/>
+          <a:p>
+            <a:pPr algn="ctr"/>
+          </a:p>
+        </p:txBody>
+      </p:sp>
+      <p:sp>
+        <p:nvSpPr>
+          <p:cNvPr id="8" name="TextBox 7"/>
+          <p:cNvSpPr txBox="1"/>
+          <p:nvPr/>
+        </p:nvSpPr>
+        <p:spPr>
+          <a:xfrm>
+            <a:off x="685800" y="1755648"/>
+            <a:ext cx="2468880" cy="502920"/>
+          </a:xfrm>
+          <a:prstGeom prst="rect">
+            <a:avLst/>
+          </a:prstGeom>
+          <a:noFill/>
+        </p:spPr>
+        <p:txBody>
+          <a:bodyPr wrap="square" anchor="t">
+            <a:spAutoFit/>
+          </a:bodyPr>
+          <a:lstStyle/>
+          <a:p>
+            <a:pPr algn="ctr">
+              <a:defRPr sz="1700" b="1">
+                <a:solidFill>
+                  <a:srgbClr val="FFFFFF"/>
+                </a:solidFill>
+                <a:latin typeface="Avenir Next"/>
+              </a:defRPr>
+            </a:pPr>
+            <a:r>
+              <a:t>core</a:t>
+            </a:r>
+          </a:p>
+        </p:txBody>
+      </p:sp>
+      <p:sp>
+        <p:nvSpPr>
+          <p:cNvPr id="9" name="TextBox 8"/>
+          <p:cNvSpPr txBox="1"/>
+          <p:nvPr/>
+        </p:nvSpPr>
+        <p:spPr>
+          <a:xfrm>
+            <a:off x="749808" y="2514600"/>
+            <a:ext cx="2377440" cy="1828800"/>
+          </a:xfrm>
+          <a:prstGeom prst="rect">
+            <a:avLst/>
+          </a:prstGeom>
+          <a:noFill/>
+        </p:spPr>
+        <p:txBody>
+          <a:bodyPr wrap="square" anchor="t">
+            <a:spAutoFit/>
+          </a:bodyPr>
+          <a:lstStyle/>
+          <a:p>
+            <a:pPr algn="l">
+              <a:defRPr sz="1250" b="0">
+                <a:solidFill>
+                  <a:srgbClr val="E2E8F0"/>
+                </a:solidFill>
+                <a:latin typeface="Avenir Next"/>
+              </a:defRPr>
+            </a:pPr>
+            <a:r>
+              <a:t>No MPI implementation exists for it, or it is a compiler-agnostic building block.</a:t>
+            </a:r>
+          </a:p>
+        </p:txBody>
+      </p:sp>
+      <p:sp>
+        <p:nvSpPr>
+          <p:cNvPr id="10" name="TextBox 9"/>
+          <p:cNvSpPr txBox="1"/>
+          <p:nvPr/>
+        </p:nvSpPr>
+        <p:spPr>
+          <a:xfrm>
+            <a:off x="749808" y="4480560"/>
+            <a:ext cx="2377440" cy="822960"/>
+          </a:xfrm>
+          <a:prstGeom prst="rect">
+            <a:avLst/>
+          </a:prstGeom>
+          <a:noFill/>
+        </p:spPr>
+        <p:txBody>
+          <a:bodyPr wrap="square" anchor="t">
+            <a:spAutoFit/>
+          </a:bodyPr>
+          <a:lstStyle/>
+          <a:p>
+            <a:pPr algn="l">
+              <a:defRPr sz="1150" b="0">
+                <a:solidFill>
+                  <a:srgbClr val="94A3B8"/>
+                </a:solidFill>
+                <a:latin typeface="Avenir Next"/>
+              </a:defRPr>
+            </a:pPr>
+            <a:r>
+              <a:t>gsl · python · miniforge · cmake</a:t>
+            </a:r>
+          </a:p>
+        </p:txBody>
+      </p:sp>
+      <p:sp>
+        <p:nvSpPr>
+          <p:cNvPr id="11" name="Rounded Rectangle 10"/>
+          <p:cNvSpPr/>
+          <p:nvPr/>
+        </p:nvSpPr>
+        <p:spPr>
+          <a:xfrm>
+            <a:off x="3493008" y="1645920"/>
+            <a:ext cx="2743200" cy="3840480"/>
+          </a:xfrm>
+          <a:prstGeom prst="roundRect">
+            <a:avLst/>
+          </a:prstGeom>
+          <a:solidFill>
+            <a:srgbClr val="1E293B"/>
+          </a:solidFill>
+          <a:ln>
+            <a:noFill/>
+          </a:ln>
+          <a:effectLst/>
+        </p:spPr>
+        <p:style>
+          <a:lnRef idx="1">
+            <a:schemeClr val="accent1"/>
+          </a:lnRef>
+          <a:fillRef idx="3">
+            <a:schemeClr val="accent1"/>
+          </a:fillRef>
+          <a:effectRef idx="2">
+            <a:schemeClr val="accent1"/>
+          </a:effectRef>
+          <a:fontRef idx="minor">
+            <a:schemeClr val="lt1"/>
+          </a:fontRef>
+        </p:style>
+        <p:txBody>
+          <a:bodyPr rtlCol="0" anchor="ctr"/>
+          <a:lstStyle/>
+          <a:p>
+            <a:pPr algn="ctr"/>
+          </a:p>
+        </p:txBody>
+      </p:sp>
+      <p:sp>
+        <p:nvSpPr>
+          <p:cNvPr id="12" name="Rounded Rectangle 11"/>
+          <p:cNvSpPr/>
+          <p:nvPr/>
+        </p:nvSpPr>
+        <p:spPr>
+          <a:xfrm>
+            <a:off x="3493008" y="1645920"/>
+            <a:ext cx="2743200" cy="685800"/>
+          </a:xfrm>
+          <a:prstGeom prst="roundRect">
+            <a:avLst/>
+          </a:prstGeom>
+          <a:solidFill>
+            <a:srgbClr val="F59E0B"/>
+          </a:solidFill>
+          <a:ln>
+            <a:noFill/>
+          </a:ln>
+          <a:effectLst/>
+        </p:spPr>
+        <p:style>
+          <a:lnRef idx="1">
+            <a:schemeClr val="accent1"/>
+          </a:lnRef>
+          <a:fillRef idx="3">
+            <a:schemeClr val="accent1"/>
+          </a:fillRef>
+          <a:effectRef idx="2">
+            <a:schemeClr val="accent1"/>
+          </a:effectRef>
+          <a:fontRef idx="minor">
+            <a:schemeClr val="lt1"/>
+          </a:fontRef>
+        </p:style>
+        <p:txBody>
+          <a:bodyPr rtlCol="0" anchor="ctr"/>
+          <a:lstStyle/>
+          <a:p>
+            <a:pPr algn="ctr"/>
+          </a:p>
+        </p:txBody>
+      </p:sp>
+      <p:sp>
+        <p:nvSpPr>
+          <p:cNvPr id="13" name="TextBox 12"/>
+          <p:cNvSpPr txBox="1"/>
+          <p:nvPr/>
+        </p:nvSpPr>
+        <p:spPr>
+          <a:xfrm>
+            <a:off x="3630168" y="1755648"/>
+            <a:ext cx="2468880" cy="502920"/>
+          </a:xfrm>
+          <a:prstGeom prst="rect">
+            <a:avLst/>
+          </a:prstGeom>
+          <a:noFill/>
+        </p:spPr>
+        <p:txBody>
+          <a:bodyPr wrap="square" anchor="t">
+            <a:spAutoFit/>
+          </a:bodyPr>
+          <a:lstStyle/>
+          <a:p>
+            <a:pPr algn="ctr">
+              <a:defRPr sz="1700" b="1">
+                <a:solidFill>
+                  <a:srgbClr val="FFFFFF"/>
+                </a:solidFill>
+                <a:latin typeface="Avenir Next"/>
+              </a:defRPr>
+            </a:pPr>
+            <a:r>
+              <a:t>serial</a:t>
+            </a:r>
+          </a:p>
+        </p:txBody>
+      </p:sp>
+      <p:sp>
+        <p:nvSpPr>
+          <p:cNvPr id="14" name="TextBox 13"/>
+          <p:cNvSpPr txBox="1"/>
+          <p:nvPr/>
+        </p:nvSpPr>
+        <p:spPr>
+          <a:xfrm>
+            <a:off x="3694176" y="2514600"/>
+            <a:ext cx="2377440" cy="1828800"/>
+          </a:xfrm>
+          <a:prstGeom prst="rect">
+            <a:avLst/>
+          </a:prstGeom>
+          <a:noFill/>
+        </p:spPr>
+        <p:txBody>
+          <a:bodyPr wrap="square" anchor="t">
+            <a:spAutoFit/>
+          </a:bodyPr>
+          <a:lstStyle/>
+          <a:p>
+            <a:pPr algn="l">
+              <a:defRPr sz="1250" b="0">
+                <a:solidFill>
+                  <a:srgbClr val="E2E8F0"/>
+                </a:solidFill>
+                <a:latin typeface="Avenir Next"/>
+              </a:defRPr>
+            </a:pPr>
+            <a:r>
+              <a:t>MPI-capable — deliberately built without MPI for users who want it plain.</a:t>
+            </a:r>
+          </a:p>
+        </p:txBody>
+      </p:sp>
+      <p:sp>
+        <p:nvSpPr>
+          <p:cNvPr id="15" name="TextBox 14"/>
+          <p:cNvSpPr txBox="1"/>
+          <p:nvPr/>
+        </p:nvSpPr>
+        <p:spPr>
+          <a:xfrm>
+            <a:off x="3694176" y="4480560"/>
+            <a:ext cx="2377440" cy="822960"/>
+          </a:xfrm>
+          <a:prstGeom prst="rect">
+            <a:avLst/>
+          </a:prstGeom>
+          <a:noFill/>
+        </p:spPr>
+        <p:txBody>
+          <a:bodyPr wrap="square" anchor="t">
+            <a:spAutoFit/>
+          </a:bodyPr>
+          <a:lstStyle/>
+          <a:p>
+            <a:pPr algn="l">
+              <a:defRPr sz="1150" b="0">
+                <a:solidFill>
+                  <a:srgbClr val="94A3B8"/>
+                </a:solidFill>
+                <a:latin typeface="Avenir Next"/>
+              </a:defRPr>
+            </a:pPr>
+            <a:r>
+              <a:t>hdf5~mpi · fftw~mpi</a:t>
+            </a:r>
+          </a:p>
+        </p:txBody>
+      </p:sp>
+      <p:sp>
+        <p:nvSpPr>
+          <p:cNvPr id="16" name="Rounded Rectangle 15"/>
+          <p:cNvSpPr/>
+          <p:nvPr/>
+        </p:nvSpPr>
+        <p:spPr>
+          <a:xfrm>
+            <a:off x="6437376" y="1645920"/>
+            <a:ext cx="2743200" cy="3840480"/>
+          </a:xfrm>
+          <a:prstGeom prst="roundRect">
+            <a:avLst/>
+          </a:prstGeom>
+          <a:solidFill>
+            <a:srgbClr val="1E293B"/>
+          </a:solidFill>
+          <a:ln>
+            <a:noFill/>
+          </a:ln>
+          <a:effectLst/>
+        </p:spPr>
+        <p:style>
+          <a:lnRef idx="1">
+            <a:schemeClr val="accent1"/>
+          </a:lnRef>
+          <a:fillRef idx="3">
+            <a:schemeClr val="accent1"/>
+          </a:fillRef>
+          <a:effectRef idx="2">
+            <a:schemeClr val="accent1"/>
+          </a:effectRef>
+          <a:fontRef idx="minor">
+            <a:schemeClr val="lt1"/>
+          </a:fontRef>
+        </p:style>
+        <p:txBody>
+          <a:bodyPr rtlCol="0" anchor="ctr"/>
+          <a:lstStyle/>
+          <a:p>
+            <a:pPr algn="ctr"/>
+          </a:p>
+        </p:txBody>
+      </p:sp>
+      <p:sp>
+        <p:nvSpPr>
+          <p:cNvPr id="17" name="Rounded Rectangle 16"/>
+          <p:cNvSpPr/>
+          <p:nvPr/>
+        </p:nvSpPr>
+        <p:spPr>
+          <a:xfrm>
+            <a:off x="6437376" y="1645920"/>
+            <a:ext cx="2743200" cy="685800"/>
+          </a:xfrm>
+          <a:prstGeom prst="roundRect">
+            <a:avLst/>
+          </a:prstGeom>
+          <a:solidFill>
+            <a:srgbClr val="3B82F6"/>
+          </a:solidFill>
+          <a:ln>
+            <a:noFill/>
+          </a:ln>
+          <a:effectLst/>
+        </p:spPr>
+        <p:style>
+          <a:lnRef idx="1">
+            <a:schemeClr val="accent1"/>
+          </a:lnRef>
+          <a:fillRef idx="3">
+            <a:schemeClr val="accent1"/>
+          </a:fillRef>
+          <a:effectRef idx="2">
+            <a:schemeClr val="accent1"/>
+          </a:effectRef>
+          <a:fontRef idx="minor">
+            <a:schemeClr val="lt1"/>
+          </a:fontRef>
+        </p:style>
+        <p:txBody>
+          <a:bodyPr rtlCol="0" anchor="ctr"/>
+          <a:lstStyle/>
+          <a:p>
+            <a:pPr algn="ctr"/>
+          </a:p>
+        </p:txBody>
+      </p:sp>
+      <p:sp>
+        <p:nvSpPr>
+          <p:cNvPr id="18" name="TextBox 17"/>
+          <p:cNvSpPr txBox="1"/>
+          <p:nvPr/>
+        </p:nvSpPr>
+        <p:spPr>
+          <a:xfrm>
+            <a:off x="6574536" y="1755648"/>
+            <a:ext cx="2468880" cy="502920"/>
+          </a:xfrm>
+          <a:prstGeom prst="rect">
+            <a:avLst/>
+          </a:prstGeom>
+          <a:noFill/>
+        </p:spPr>
+        <p:txBody>
+          <a:bodyPr wrap="square" anchor="t">
+            <a:spAutoFit/>
+          </a:bodyPr>
+          <a:lstStyle/>
+          <a:p>
+            <a:pPr algn="ctr">
+              <a:defRPr sz="1700" b="1">
+                <a:solidFill>
+                  <a:srgbClr val="FFFFFF"/>
+                </a:solidFill>
+                <a:latin typeface="Avenir Next"/>
+              </a:defRPr>
+            </a:pPr>
+            <a:r>
+              <a:t>mpi-&lt;impl&gt;</a:t>
+            </a:r>
+          </a:p>
+        </p:txBody>
+      </p:sp>
+      <p:sp>
+        <p:nvSpPr>
+          <p:cNvPr id="19" name="TextBox 18"/>
+          <p:cNvSpPr txBox="1"/>
+          <p:nvPr/>
+        </p:nvSpPr>
+        <p:spPr>
+          <a:xfrm>
+            <a:off x="6638544" y="2514600"/>
+            <a:ext cx="2377440" cy="1828800"/>
+          </a:xfrm>
+          <a:prstGeom prst="rect">
+            <a:avLst/>
+          </a:prstGeom>
+          <a:noFill/>
+        </p:spPr>
+        <p:txBody>
+          <a:bodyPr wrap="square" anchor="t">
+            <a:spAutoFit/>
+          </a:bodyPr>
+          <a:lstStyle/>
+          <a:p>
+            <a:pPr algn="l">
+              <a:defRPr sz="1250" b="0">
+                <a:solidFill>
+                  <a:srgbClr val="E2E8F0"/>
+                </a:solidFill>
+                <a:latin typeface="Avenir Next"/>
+              </a:defRPr>
+            </a:pPr>
+            <a:r>
+              <a:t>Built against the named MPI implementation.</a:t>
+            </a:r>
+          </a:p>
+        </p:txBody>
+      </p:sp>
+      <p:sp>
+        <p:nvSpPr>
+          <p:cNvPr id="20" name="TextBox 19"/>
+          <p:cNvSpPr txBox="1"/>
+          <p:nvPr/>
+        </p:nvSpPr>
+        <p:spPr>
+          <a:xfrm>
+            <a:off x="6638544" y="4480560"/>
+            <a:ext cx="2377440" cy="822960"/>
+          </a:xfrm>
+          <a:prstGeom prst="rect">
+            <a:avLst/>
+          </a:prstGeom>
+          <a:noFill/>
+        </p:spPr>
+        <p:txBody>
+          <a:bodyPr wrap="square" anchor="t">
+            <a:spAutoFit/>
+          </a:bodyPr>
+          <a:lstStyle/>
+          <a:p>
+            <a:pPr algn="l">
+              <a:defRPr sz="1150" b="0">
+                <a:solidFill>
+                  <a:srgbClr val="94A3B8"/>
+                </a:solidFill>
+                <a:latin typeface="Avenir Next"/>
+              </a:defRPr>
+            </a:pPr>
+            <a:r>
+              <a:t>mpi-craympich · mpi-openmpi</a:t>
+            </a:r>
+          </a:p>
+        </p:txBody>
+      </p:sp>
+      <p:sp>
+        <p:nvSpPr>
+          <p:cNvPr id="21" name="Rounded Rectangle 20"/>
+          <p:cNvSpPr/>
+          <p:nvPr/>
+        </p:nvSpPr>
+        <p:spPr>
+          <a:xfrm>
+            <a:off x="9381744" y="1645920"/>
+            <a:ext cx="2743200" cy="3840480"/>
+          </a:xfrm>
+          <a:prstGeom prst="roundRect">
+            <a:avLst/>
+          </a:prstGeom>
+          <a:solidFill>
+            <a:srgbClr val="1E293B"/>
+          </a:solidFill>
+          <a:ln>
+            <a:noFill/>
+          </a:ln>
+          <a:effectLst/>
+        </p:spPr>
+        <p:style>
+          <a:lnRef idx="1">
+            <a:schemeClr val="accent1"/>
+          </a:lnRef>
+          <a:fillRef idx="3">
+            <a:schemeClr val="accent1"/>
+          </a:fillRef>
+          <a:effectRef idx="2">
+            <a:schemeClr val="accent1"/>
+          </a:effectRef>
+          <a:fontRef idx="minor">
+            <a:schemeClr val="lt1"/>
+          </a:fontRef>
+        </p:style>
+        <p:txBody>
+          <a:bodyPr rtlCol="0" anchor="ctr"/>
+          <a:lstStyle/>
+          <a:p>
+            <a:pPr algn="ctr"/>
+          </a:p>
+        </p:txBody>
+      </p:sp>
+      <p:sp>
+        <p:nvSpPr>
+          <p:cNvPr id="22" name="Rounded Rectangle 21"/>
+          <p:cNvSpPr/>
+          <p:nvPr/>
+        </p:nvSpPr>
+        <p:spPr>
+          <a:xfrm>
+            <a:off x="9381744" y="1645920"/>
+            <a:ext cx="2743200" cy="685800"/>
+          </a:xfrm>
+          <a:prstGeom prst="roundRect">
+            <a:avLst/>
+          </a:prstGeom>
+          <a:solidFill>
+            <a:srgbClr val="8B5CF6"/>
+          </a:solidFill>
+          <a:ln>
+            <a:noFill/>
+          </a:ln>
+          <a:effectLst/>
+        </p:spPr>
+        <p:style>
+          <a:lnRef idx="1">
+            <a:schemeClr val="accent1"/>
+          </a:lnRef>
+          <a:fillRef idx="3">
+            <a:schemeClr val="accent1"/>
+          </a:fillRef>
+          <a:effectRef idx="2">
+            <a:schemeClr val="accent1"/>
+          </a:effectRef>
+          <a:fontRef idx="minor">
+            <a:schemeClr val="lt1"/>
+          </a:fontRef>
+        </p:style>
+        <p:txBody>
+          <a:bodyPr rtlCol="0" anchor="ctr"/>
+          <a:lstStyle/>
+          <a:p>
+            <a:pPr algn="ctr"/>
+          </a:p>
+        </p:txBody>
+      </p:sp>
+      <p:sp>
+        <p:nvSpPr>
+          <p:cNvPr id="23" name="TextBox 22"/>
+          <p:cNvSpPr txBox="1"/>
+          <p:nvPr/>
+        </p:nvSpPr>
+        <p:spPr>
+          <a:xfrm>
+            <a:off x="9518904" y="1755648"/>
+            <a:ext cx="2468880" cy="502920"/>
+          </a:xfrm>
+          <a:prstGeom prst="rect">
+            <a:avLst/>
+          </a:prstGeom>
+          <a:noFill/>
+        </p:spPr>
+        <p:txBody>
+          <a:bodyPr wrap="square" anchor="t">
+            <a:spAutoFit/>
+          </a:bodyPr>
+          <a:lstStyle/>
+          <a:p>
+            <a:pPr algn="ctr">
+              <a:defRPr sz="1700" b="1">
+                <a:solidFill>
+                  <a:srgbClr val="FFFFFF"/>
+                </a:solidFill>
+                <a:latin typeface="Avenir Next"/>
+              </a:defRPr>
+            </a:pPr>
+            <a:r>
+              <a:t>gpu-&lt;impl&gt;-&lt;arch&gt;</a:t>
+            </a:r>
+          </a:p>
+        </p:txBody>
+      </p:sp>
+      <p:sp>
+        <p:nvSpPr>
+          <p:cNvPr id="24" name="TextBox 23"/>
+          <p:cNvSpPr txBox="1"/>
+          <p:nvPr/>
+        </p:nvSpPr>
+        <p:spPr>
+          <a:xfrm>
+            <a:off x="9582912" y="2514600"/>
+            <a:ext cx="2377440" cy="1828800"/>
+          </a:xfrm>
+          <a:prstGeom prst="rect">
+            <a:avLst/>
+          </a:prstGeom>
+          <a:noFill/>
+        </p:spPr>
+        <p:txBody>
+          <a:bodyPr wrap="square" anchor="t">
+            <a:spAutoFit/>
+          </a:bodyPr>
+          <a:lstStyle/>
+          <a:p>
+            <a:pPr algn="l">
+              <a:defRPr sz="1250" b="0">
+                <a:solidFill>
+                  <a:srgbClr val="E2E8F0"/>
+                </a:solidFill>
+                <a:latin typeface="Avenir Next"/>
+              </a:defRPr>
+            </a:pPr>
+            <a:r>
+              <a:t>GPU backend over GPU-aware MPI, targeted at the probed architecture.</a:t>
+            </a:r>
+          </a:p>
+        </p:txBody>
+      </p:sp>
+      <p:sp>
+        <p:nvSpPr>
+          <p:cNvPr id="25" name="TextBox 24"/>
+          <p:cNvSpPr txBox="1"/>
+          <p:nvPr/>
+        </p:nvSpPr>
+        <p:spPr>
+          <a:xfrm>
+            <a:off x="9582912" y="4480560"/>
+            <a:ext cx="2377440" cy="822960"/>
+          </a:xfrm>
+          <a:prstGeom prst="rect">
+            <a:avLst/>
+          </a:prstGeom>
+          <a:noFill/>
+        </p:spPr>
+        <p:txBody>
+          <a:bodyPr wrap="square" anchor="t">
+            <a:spAutoFit/>
+          </a:bodyPr>
+          <a:lstStyle/>
+          <a:p>
+            <a:pPr algn="l">
+              <a:defRPr sz="1150" b="0">
+                <a:solidFill>
+                  <a:srgbClr val="94A3B8"/>
+                </a:solidFill>
+                <a:latin typeface="Avenir Next"/>
+              </a:defRPr>
+            </a:pPr>
+            <a:r>
+              <a:t>gpu-craympich-gfx942</a:t>
+            </a:r>
+          </a:p>
+        </p:txBody>
+      </p:sp>
+      <p:sp>
+        <p:nvSpPr>
+          <p:cNvPr id="26" name="Rounded Rectangle 25"/>
+          <p:cNvSpPr/>
+          <p:nvPr/>
+        </p:nvSpPr>
+        <p:spPr>
+          <a:xfrm>
+            <a:off x="548640" y="5760720"/>
+            <a:ext cx="11091672" cy="566928"/>
+          </a:xfrm>
+          <a:prstGeom prst="roundRect">
+            <a:avLst/>
+          </a:prstGeom>
+          <a:solidFill>
+            <a:srgbClr val="2A374D"/>
+          </a:solidFill>
+          <a:ln>
+            <a:noFill/>
+          </a:ln>
+          <a:effectLst/>
+        </p:spPr>
+        <p:style>
+          <a:lnRef idx="1">
+            <a:schemeClr val="accent1"/>
+          </a:lnRef>
+          <a:fillRef idx="3">
+            <a:schemeClr val="accent1"/>
+          </a:fillRef>
+          <a:effectRef idx="2">
+            <a:schemeClr val="accent1"/>
+          </a:effectRef>
+          <a:fontRef idx="minor">
+            <a:schemeClr val="lt1"/>
+          </a:fontRef>
+        </p:style>
+        <p:txBody>
+          <a:bodyPr rtlCol="0" anchor="ctr" wrap="square" lIns="109728" rIns="109728"/>
+          <a:lstStyle/>
+          <a:p>
+            <a:pPr algn="ctr">
+              <a:defRPr sz="1400" b="1">
+                <a:solidFill>
+                  <a:srgbClr val="FFFFFF"/>
+                </a:solidFill>
+                <a:latin typeface="Avenir Next"/>
+              </a:defRPr>
+            </a:pPr>
+            <a:r>
+              <a:t>The GPU lane is called gpu-craympich-gfx942 — never gpu-kokkos. Kokkos is what it carries today.</a:t>
             </a:r>
           </a:p>
         </p:txBody>
@@ -3766,19 +8946,114 @@
       <p:grpSpPr/>
       <p:sp>
         <p:nvSpPr>
-          <p:cNvPr id="2" name="Title 1"/>
-          <p:cNvSpPr>
-            <a:spLocks noGrp="1"/>
-          </p:cNvSpPr>
-          <p:nvPr>
-            <p:ph type="title"/>
-          </p:nvPr>
-        </p:nvSpPr>
-        <p:spPr/>
-        <p:txBody>
-          <a:bodyPr/>
-          <a:lstStyle/>
-          <a:p>
+          <p:cNvPr id="2" name="Rectangle 1"/>
+          <p:cNvSpPr/>
+          <p:nvPr/>
+        </p:nvSpPr>
+        <p:spPr>
+          <a:xfrm>
+            <a:off x="0" y="0"/>
+            <a:ext cx="12191695" cy="6858000"/>
+          </a:xfrm>
+          <a:prstGeom prst="rect">
+            <a:avLst/>
+          </a:prstGeom>
+          <a:solidFill>
+            <a:srgbClr val="0F172A"/>
+          </a:solidFill>
+          <a:ln>
+            <a:noFill/>
+          </a:ln>
+          <a:effectLst/>
+        </p:spPr>
+        <p:style>
+          <a:lnRef idx="1">
+            <a:schemeClr val="accent1"/>
+          </a:lnRef>
+          <a:fillRef idx="3">
+            <a:schemeClr val="accent1"/>
+          </a:fillRef>
+          <a:effectRef idx="2">
+            <a:schemeClr val="accent1"/>
+          </a:effectRef>
+          <a:fontRef idx="minor">
+            <a:schemeClr val="lt1"/>
+          </a:fontRef>
+        </p:style>
+        <p:txBody>
+          <a:bodyPr rtlCol="0" anchor="ctr"/>
+          <a:lstStyle/>
+          <a:p>
+            <a:pPr algn="ctr"/>
+          </a:p>
+        </p:txBody>
+      </p:sp>
+      <p:sp>
+        <p:nvSpPr>
+          <p:cNvPr id="3" name="TextBox 2"/>
+          <p:cNvSpPr txBox="1"/>
+          <p:nvPr/>
+        </p:nvSpPr>
+        <p:spPr>
+          <a:xfrm>
+            <a:off x="548640" y="256032"/>
+            <a:ext cx="10972800" cy="365760"/>
+          </a:xfrm>
+          <a:prstGeom prst="rect">
+            <a:avLst/>
+          </a:prstGeom>
+          <a:noFill/>
+        </p:spPr>
+        <p:txBody>
+          <a:bodyPr wrap="square" anchor="t">
+            <a:spAutoFit/>
+          </a:bodyPr>
+          <a:lstStyle/>
+          <a:p>
+            <a:pPr algn="l">
+              <a:defRPr sz="1300" b="1">
+                <a:solidFill>
+                  <a:srgbClr val="14B8A6"/>
+                </a:solidFill>
+                <a:latin typeface="Avenir Next"/>
+              </a:defRPr>
+            </a:pPr>
+            <a:r>
+              <a:t>TWO COMPILER SURFACES · ONE CRAY SYSTEM FIRST</a:t>
+            </a:r>
+          </a:p>
+        </p:txBody>
+      </p:sp>
+      <p:sp>
+        <p:nvSpPr>
+          <p:cNvPr id="4" name="TextBox 3"/>
+          <p:cNvSpPr txBox="1"/>
+          <p:nvPr/>
+        </p:nvSpPr>
+        <p:spPr>
+          <a:xfrm>
+            <a:off x="548640" y="566928"/>
+            <a:ext cx="11064240" cy="731520"/>
+          </a:xfrm>
+          <a:prstGeom prst="rect">
+            <a:avLst/>
+          </a:prstGeom>
+          <a:noFill/>
+        </p:spPr>
+        <p:txBody>
+          <a:bodyPr wrap="square" anchor="t">
+            <a:spAutoFit/>
+          </a:bodyPr>
+          <a:lstStyle/>
+          <a:p>
+            <a:pPr algn="l">
+              <a:defRPr sz="3000" b="1">
+                <a:solidFill>
+                  <a:srgbClr val="FFFFFF"/>
+                </a:solidFill>
+                <a:latin typeface="Avenir Next"/>
+              </a:defRPr>
+            </a:pPr>
             <a:r>
               <a:t>Pilot scope</a:t>
             </a:r>
@@ -3787,80 +9062,1590 @@
       </p:sp>
       <p:sp>
         <p:nvSpPr>
-          <p:cNvPr id="3" name="Content Placeholder 2"/>
-          <p:cNvSpPr>
-            <a:spLocks noGrp="1"/>
-          </p:cNvSpPr>
-          <p:nvPr>
-            <p:ph idx="1"/>
-          </p:nvPr>
-        </p:nvSpPr>
-        <p:spPr/>
-        <p:txBody>
-          <a:bodyPr wrap="square"/>
-          <a:lstStyle/>
-          <a:p>
-            <a:pPr>
-              <a:defRPr sz="2000"/>
-            </a:pPr>
-            <a:r>
-              <a:t>Two compiler surfaces to start</a:t>
-            </a:r>
-          </a:p>
-          <a:p>
-            <a:pPr lvl="1">
-              <a:defRPr sz="1600"/>
-            </a:pPr>
-            <a:r>
-              <a:t>The system baseline (what the machine ships as default) and GCC</a:t>
-            </a:r>
-          </a:p>
-          <a:p>
-            <a:pPr>
-              <a:defRPr sz="2000"/>
-            </a:pPr>
-            <a:r>
-              <a:t>One Cray system first, then a generic Linux cluster (already probed)</a:t>
-            </a:r>
-          </a:p>
-          <a:p>
-            <a:pPr>
-              <a:defRPr sz="2000"/>
-            </a:pPr>
-            <a:r>
-              <a:t>Representative package roster (evolving; ~two versions each)</a:t>
-            </a:r>
-          </a:p>
-          <a:p>
-            <a:pPr lvl="1">
-              <a:defRPr sz="1600"/>
-            </a:pPr>
-            <a:r>
-              <a:t>Science: HDF5, NetCDF (C/Fortran/C++), FFTW, OpenBLAS, Boost, GSL, TAU</a:t>
-            </a:r>
-          </a:p>
-          <a:p>
-            <a:pPr lvl="1">
-              <a:defRPr sz="1600"/>
-            </a:pPr>
-            <a:r>
-              <a:t>GPU: Kokkos (pilot GPU lane content)</a:t>
-            </a:r>
-          </a:p>
-          <a:p>
-            <a:pPr lvl="1">
-              <a:defRPr sz="1600"/>
-            </a:pPr>
-            <a:r>
-              <a:t>Core: CMake, Python, Miniforge</a:t>
-            </a:r>
-          </a:p>
-          <a:p>
-            <a:pPr>
-              <a:defRPr sz="2000"/>
-            </a:pPr>
-            <a:r>
-              <a:t>Multi-version by policy: unify:false lanes + single-version pinned foundation</a:t>
+          <p:cNvPr id="5" name="Rectangle 4"/>
+          <p:cNvSpPr/>
+          <p:nvPr/>
+        </p:nvSpPr>
+        <p:spPr>
+          <a:xfrm>
+            <a:off x="566928" y="1298448"/>
+            <a:ext cx="1463040" cy="41148"/>
+          </a:xfrm>
+          <a:prstGeom prst="rect">
+            <a:avLst/>
+          </a:prstGeom>
+          <a:solidFill>
+            <a:srgbClr val="14B8A6"/>
+          </a:solidFill>
+          <a:ln>
+            <a:noFill/>
+          </a:ln>
+          <a:effectLst/>
+        </p:spPr>
+        <p:style>
+          <a:lnRef idx="1">
+            <a:schemeClr val="accent1"/>
+          </a:lnRef>
+          <a:fillRef idx="3">
+            <a:schemeClr val="accent1"/>
+          </a:fillRef>
+          <a:effectRef idx="2">
+            <a:schemeClr val="accent1"/>
+          </a:effectRef>
+          <a:fontRef idx="minor">
+            <a:schemeClr val="lt1"/>
+          </a:fontRef>
+        </p:style>
+        <p:txBody>
+          <a:bodyPr rtlCol="0" anchor="ctr"/>
+          <a:lstStyle/>
+          <a:p>
+            <a:pPr algn="ctr"/>
+          </a:p>
+        </p:txBody>
+      </p:sp>
+      <p:sp>
+        <p:nvSpPr>
+          <p:cNvPr id="6" name="Rounded Rectangle 5"/>
+          <p:cNvSpPr/>
+          <p:nvPr/>
+        </p:nvSpPr>
+        <p:spPr>
+          <a:xfrm>
+            <a:off x="548640" y="1645920"/>
+            <a:ext cx="5394960" cy="2651760"/>
+          </a:xfrm>
+          <a:prstGeom prst="roundRect">
+            <a:avLst/>
+          </a:prstGeom>
+          <a:solidFill>
+            <a:srgbClr val="1E293B"/>
+          </a:solidFill>
+          <a:ln>
+            <a:noFill/>
+          </a:ln>
+          <a:effectLst/>
+        </p:spPr>
+        <p:style>
+          <a:lnRef idx="1">
+            <a:schemeClr val="accent1"/>
+          </a:lnRef>
+          <a:fillRef idx="3">
+            <a:schemeClr val="accent1"/>
+          </a:fillRef>
+          <a:effectRef idx="2">
+            <a:schemeClr val="accent1"/>
+          </a:effectRef>
+          <a:fontRef idx="minor">
+            <a:schemeClr val="lt1"/>
+          </a:fontRef>
+        </p:style>
+        <p:txBody>
+          <a:bodyPr rtlCol="0" anchor="ctr"/>
+          <a:lstStyle/>
+          <a:p>
+            <a:pPr algn="ctr"/>
+          </a:p>
+        </p:txBody>
+      </p:sp>
+      <p:sp>
+        <p:nvSpPr>
+          <p:cNvPr id="7" name="TextBox 6"/>
+          <p:cNvSpPr txBox="1"/>
+          <p:nvPr/>
+        </p:nvSpPr>
+        <p:spPr>
+          <a:xfrm>
+            <a:off x="777240" y="1810512"/>
+            <a:ext cx="4937760" cy="457200"/>
+          </a:xfrm>
+          <a:prstGeom prst="rect">
+            <a:avLst/>
+          </a:prstGeom>
+          <a:noFill/>
+        </p:spPr>
+        <p:txBody>
+          <a:bodyPr wrap="square" anchor="t">
+            <a:spAutoFit/>
+          </a:bodyPr>
+          <a:lstStyle/>
+          <a:p>
+            <a:pPr algn="l">
+              <a:defRPr sz="1600" b="1">
+                <a:solidFill>
+                  <a:srgbClr val="FFFFFF"/>
+                </a:solidFill>
+                <a:latin typeface="Avenir Next"/>
+              </a:defRPr>
+            </a:pPr>
+            <a:r>
+              <a:t>cse/&lt;system-default&gt;</a:t>
+            </a:r>
+          </a:p>
+        </p:txBody>
+      </p:sp>
+      <p:sp>
+        <p:nvSpPr>
+          <p:cNvPr id="8" name="TextBox 7"/>
+          <p:cNvSpPr txBox="1"/>
+          <p:nvPr/>
+        </p:nvSpPr>
+        <p:spPr>
+          <a:xfrm>
+            <a:off x="777240" y="2286000"/>
+            <a:ext cx="4937760" cy="365760"/>
+          </a:xfrm>
+          <a:prstGeom prst="rect">
+            <a:avLst/>
+          </a:prstGeom>
+          <a:noFill/>
+        </p:spPr>
+        <p:txBody>
+          <a:bodyPr wrap="square" anchor="t">
+            <a:spAutoFit/>
+          </a:bodyPr>
+          <a:lstStyle/>
+          <a:p>
+            <a:pPr algn="l">
+              <a:defRPr sz="1200" b="0">
+                <a:solidFill>
+                  <a:srgbClr val="94A3B8"/>
+                </a:solidFill>
+                <a:latin typeface="Avenir Next"/>
+              </a:defRPr>
+            </a:pPr>
+            <a:r>
+              <a:t>whatever the machine blesses as its baseline</a:t>
+            </a:r>
+          </a:p>
+        </p:txBody>
+      </p:sp>
+      <p:sp>
+        <p:nvSpPr>
+          <p:cNvPr id="9" name="Rounded Rectangle 8"/>
+          <p:cNvSpPr/>
+          <p:nvPr/>
+        </p:nvSpPr>
+        <p:spPr>
+          <a:xfrm>
+            <a:off x="822959" y="2743200"/>
+            <a:ext cx="2331720" cy="502920"/>
+          </a:xfrm>
+          <a:prstGeom prst="roundRect">
+            <a:avLst/>
+          </a:prstGeom>
+          <a:solidFill>
+            <a:srgbClr val="14B8A6"/>
+          </a:solidFill>
+          <a:ln>
+            <a:noFill/>
+          </a:ln>
+          <a:effectLst/>
+        </p:spPr>
+        <p:style>
+          <a:lnRef idx="1">
+            <a:schemeClr val="accent1"/>
+          </a:lnRef>
+          <a:fillRef idx="3">
+            <a:schemeClr val="accent1"/>
+          </a:fillRef>
+          <a:effectRef idx="2">
+            <a:schemeClr val="accent1"/>
+          </a:effectRef>
+          <a:fontRef idx="minor">
+            <a:schemeClr val="lt1"/>
+          </a:fontRef>
+        </p:style>
+        <p:txBody>
+          <a:bodyPr rtlCol="0" anchor="ctr" wrap="square" lIns="109728" rIns="109728"/>
+          <a:lstStyle/>
+          <a:p>
+            <a:pPr algn="ctr">
+              <a:defRPr sz="1200" b="1">
+                <a:solidFill>
+                  <a:srgbClr val="FFFFFF"/>
+                </a:solidFill>
+                <a:latin typeface="Avenir Next"/>
+              </a:defRPr>
+            </a:pPr>
+            <a:r>
+              <a:t>core (automatic)</a:t>
+            </a:r>
+          </a:p>
+        </p:txBody>
+      </p:sp>
+      <p:sp>
+        <p:nvSpPr>
+          <p:cNvPr id="10" name="Rounded Rectangle 9"/>
+          <p:cNvSpPr/>
+          <p:nvPr/>
+        </p:nvSpPr>
+        <p:spPr>
+          <a:xfrm>
+            <a:off x="3291840" y="2743200"/>
+            <a:ext cx="2331720" cy="502920"/>
+          </a:xfrm>
+          <a:prstGeom prst="roundRect">
+            <a:avLst/>
+          </a:prstGeom>
+          <a:solidFill>
+            <a:srgbClr val="64748B"/>
+          </a:solidFill>
+          <a:ln>
+            <a:noFill/>
+          </a:ln>
+          <a:effectLst/>
+        </p:spPr>
+        <p:style>
+          <a:lnRef idx="1">
+            <a:schemeClr val="accent1"/>
+          </a:lnRef>
+          <a:fillRef idx="3">
+            <a:schemeClr val="accent1"/>
+          </a:fillRef>
+          <a:effectRef idx="2">
+            <a:schemeClr val="accent1"/>
+          </a:effectRef>
+          <a:fontRef idx="minor">
+            <a:schemeClr val="lt1"/>
+          </a:fontRef>
+        </p:style>
+        <p:txBody>
+          <a:bodyPr rtlCol="0" anchor="ctr" wrap="square" lIns="109728" rIns="109728"/>
+          <a:lstStyle/>
+          <a:p>
+            <a:pPr algn="ctr">
+              <a:defRPr sz="1200" b="1">
+                <a:solidFill>
+                  <a:srgbClr val="FFFFFF"/>
+                </a:solidFill>
+                <a:latin typeface="Avenir Next"/>
+              </a:defRPr>
+            </a:pPr>
+            <a:r>
+              <a:t>foundation (view)</a:t>
+            </a:r>
+          </a:p>
+        </p:txBody>
+      </p:sp>
+      <p:sp>
+        <p:nvSpPr>
+          <p:cNvPr id="11" name="Rounded Rectangle 10"/>
+          <p:cNvSpPr/>
+          <p:nvPr/>
+        </p:nvSpPr>
+        <p:spPr>
+          <a:xfrm>
+            <a:off x="822959" y="3401568"/>
+            <a:ext cx="1508760" cy="566928"/>
+          </a:xfrm>
+          <a:prstGeom prst="roundRect">
+            <a:avLst/>
+          </a:prstGeom>
+          <a:solidFill>
+            <a:srgbClr val="F59E0B"/>
+          </a:solidFill>
+          <a:ln>
+            <a:noFill/>
+          </a:ln>
+          <a:effectLst/>
+        </p:spPr>
+        <p:style>
+          <a:lnRef idx="1">
+            <a:schemeClr val="accent1"/>
+          </a:lnRef>
+          <a:fillRef idx="3">
+            <a:schemeClr val="accent1"/>
+          </a:fillRef>
+          <a:effectRef idx="2">
+            <a:schemeClr val="accent1"/>
+          </a:effectRef>
+          <a:fontRef idx="minor">
+            <a:schemeClr val="lt1"/>
+          </a:fontRef>
+        </p:style>
+        <p:txBody>
+          <a:bodyPr rtlCol="0" anchor="ctr" wrap="square" lIns="109728" rIns="109728"/>
+          <a:lstStyle/>
+          <a:p>
+            <a:pPr algn="ctr">
+              <a:defRPr sz="1200" b="1">
+                <a:solidFill>
+                  <a:srgbClr val="FFFFFF"/>
+                </a:solidFill>
+                <a:latin typeface="Avenir Next"/>
+              </a:defRPr>
+            </a:pPr>
+            <a:r>
+              <a:t>serial</a:t>
+            </a:r>
+          </a:p>
+        </p:txBody>
+      </p:sp>
+      <p:sp>
+        <p:nvSpPr>
+          <p:cNvPr id="12" name="Rounded Rectangle 11"/>
+          <p:cNvSpPr/>
+          <p:nvPr/>
+        </p:nvSpPr>
+        <p:spPr>
+          <a:xfrm>
+            <a:off x="2468880" y="3401568"/>
+            <a:ext cx="1508760" cy="566928"/>
+          </a:xfrm>
+          <a:prstGeom prst="roundRect">
+            <a:avLst/>
+          </a:prstGeom>
+          <a:solidFill>
+            <a:srgbClr val="3B82F6"/>
+          </a:solidFill>
+          <a:ln>
+            <a:noFill/>
+          </a:ln>
+          <a:effectLst/>
+        </p:spPr>
+        <p:style>
+          <a:lnRef idx="1">
+            <a:schemeClr val="accent1"/>
+          </a:lnRef>
+          <a:fillRef idx="3">
+            <a:schemeClr val="accent1"/>
+          </a:fillRef>
+          <a:effectRef idx="2">
+            <a:schemeClr val="accent1"/>
+          </a:effectRef>
+          <a:fontRef idx="minor">
+            <a:schemeClr val="lt1"/>
+          </a:fontRef>
+        </p:style>
+        <p:txBody>
+          <a:bodyPr rtlCol="0" anchor="ctr" wrap="square" lIns="109728" rIns="109728"/>
+          <a:lstStyle/>
+          <a:p>
+            <a:pPr algn="ctr">
+              <a:defRPr sz="1200" b="1">
+                <a:solidFill>
+                  <a:srgbClr val="FFFFFF"/>
+                </a:solidFill>
+                <a:latin typeface="Avenir Next"/>
+              </a:defRPr>
+            </a:pPr>
+            <a:r>
+              <a:t>mpi</a:t>
+            </a:r>
+          </a:p>
+        </p:txBody>
+      </p:sp>
+      <p:sp>
+        <p:nvSpPr>
+          <p:cNvPr id="13" name="Rounded Rectangle 12"/>
+          <p:cNvSpPr/>
+          <p:nvPr/>
+        </p:nvSpPr>
+        <p:spPr>
+          <a:xfrm>
+            <a:off x="4114800" y="3401568"/>
+            <a:ext cx="1508760" cy="566928"/>
+          </a:xfrm>
+          <a:prstGeom prst="roundRect">
+            <a:avLst/>
+          </a:prstGeom>
+          <a:solidFill>
+            <a:srgbClr val="8B5CF6"/>
+          </a:solidFill>
+          <a:ln>
+            <a:noFill/>
+          </a:ln>
+          <a:effectLst/>
+        </p:spPr>
+        <p:style>
+          <a:lnRef idx="1">
+            <a:schemeClr val="accent1"/>
+          </a:lnRef>
+          <a:fillRef idx="3">
+            <a:schemeClr val="accent1"/>
+          </a:fillRef>
+          <a:effectRef idx="2">
+            <a:schemeClr val="accent1"/>
+          </a:effectRef>
+          <a:fontRef idx="minor">
+            <a:schemeClr val="lt1"/>
+          </a:fontRef>
+        </p:style>
+        <p:txBody>
+          <a:bodyPr rtlCol="0" anchor="ctr" wrap="square" lIns="109728" rIns="109728"/>
+          <a:lstStyle/>
+          <a:p>
+            <a:pPr algn="ctr">
+              <a:defRPr sz="1200" b="1">
+                <a:solidFill>
+                  <a:srgbClr val="FFFFFF"/>
+                </a:solidFill>
+                <a:latin typeface="Avenir Next"/>
+              </a:defRPr>
+            </a:pPr>
+            <a:r>
+              <a:t>gpu</a:t>
+            </a:r>
+          </a:p>
+        </p:txBody>
+      </p:sp>
+      <p:sp>
+        <p:nvSpPr>
+          <p:cNvPr id="14" name="Rounded Rectangle 13"/>
+          <p:cNvSpPr/>
+          <p:nvPr/>
+        </p:nvSpPr>
+        <p:spPr>
+          <a:xfrm>
+            <a:off x="6263640" y="1645920"/>
+            <a:ext cx="5394960" cy="2651760"/>
+          </a:xfrm>
+          <a:prstGeom prst="roundRect">
+            <a:avLst/>
+          </a:prstGeom>
+          <a:solidFill>
+            <a:srgbClr val="1E293B"/>
+          </a:solidFill>
+          <a:ln>
+            <a:noFill/>
+          </a:ln>
+          <a:effectLst/>
+        </p:spPr>
+        <p:style>
+          <a:lnRef idx="1">
+            <a:schemeClr val="accent1"/>
+          </a:lnRef>
+          <a:fillRef idx="3">
+            <a:schemeClr val="accent1"/>
+          </a:fillRef>
+          <a:effectRef idx="2">
+            <a:schemeClr val="accent1"/>
+          </a:effectRef>
+          <a:fontRef idx="minor">
+            <a:schemeClr val="lt1"/>
+          </a:fontRef>
+        </p:style>
+        <p:txBody>
+          <a:bodyPr rtlCol="0" anchor="ctr"/>
+          <a:lstStyle/>
+          <a:p>
+            <a:pPr algn="ctr"/>
+          </a:p>
+        </p:txBody>
+      </p:sp>
+      <p:sp>
+        <p:nvSpPr>
+          <p:cNvPr id="15" name="TextBox 14"/>
+          <p:cNvSpPr txBox="1"/>
+          <p:nvPr/>
+        </p:nvSpPr>
+        <p:spPr>
+          <a:xfrm>
+            <a:off x="6492240" y="1810512"/>
+            <a:ext cx="4937760" cy="457200"/>
+          </a:xfrm>
+          <a:prstGeom prst="rect">
+            <a:avLst/>
+          </a:prstGeom>
+          <a:noFill/>
+        </p:spPr>
+        <p:txBody>
+          <a:bodyPr wrap="square" anchor="t">
+            <a:spAutoFit/>
+          </a:bodyPr>
+          <a:lstStyle/>
+          <a:p>
+            <a:pPr algn="l">
+              <a:defRPr sz="1600" b="1">
+                <a:solidFill>
+                  <a:srgbClr val="FFFFFF"/>
+                </a:solidFill>
+                <a:latin typeface="Avenir Next"/>
+              </a:defRPr>
+            </a:pPr>
+            <a:r>
+              <a:t>cse/gcc</a:t>
+            </a:r>
+          </a:p>
+        </p:txBody>
+      </p:sp>
+      <p:sp>
+        <p:nvSpPr>
+          <p:cNvPr id="16" name="TextBox 15"/>
+          <p:cNvSpPr txBox="1"/>
+          <p:nvPr/>
+        </p:nvSpPr>
+        <p:spPr>
+          <a:xfrm>
+            <a:off x="6492240" y="2286000"/>
+            <a:ext cx="4937760" cy="365760"/>
+          </a:xfrm>
+          <a:prstGeom prst="rect">
+            <a:avLst/>
+          </a:prstGeom>
+          <a:noFill/>
+        </p:spPr>
+        <p:txBody>
+          <a:bodyPr wrap="square" anchor="t">
+            <a:spAutoFit/>
+          </a:bodyPr>
+          <a:lstStyle/>
+          <a:p>
+            <a:pPr algn="l">
+              <a:defRPr sz="1200" b="0">
+                <a:solidFill>
+                  <a:srgbClr val="94A3B8"/>
+                </a:solidFill>
+                <a:latin typeface="Avenir Next"/>
+              </a:defRPr>
+            </a:pPr>
+            <a:r>
+              <a:t>the portable reference surface</a:t>
+            </a:r>
+          </a:p>
+        </p:txBody>
+      </p:sp>
+      <p:sp>
+        <p:nvSpPr>
+          <p:cNvPr id="17" name="Rounded Rectangle 16"/>
+          <p:cNvSpPr/>
+          <p:nvPr/>
+        </p:nvSpPr>
+        <p:spPr>
+          <a:xfrm>
+            <a:off x="6537959" y="2743200"/>
+            <a:ext cx="2331720" cy="502920"/>
+          </a:xfrm>
+          <a:prstGeom prst="roundRect">
+            <a:avLst/>
+          </a:prstGeom>
+          <a:solidFill>
+            <a:srgbClr val="14B8A6"/>
+          </a:solidFill>
+          <a:ln>
+            <a:noFill/>
+          </a:ln>
+          <a:effectLst/>
+        </p:spPr>
+        <p:style>
+          <a:lnRef idx="1">
+            <a:schemeClr val="accent1"/>
+          </a:lnRef>
+          <a:fillRef idx="3">
+            <a:schemeClr val="accent1"/>
+          </a:fillRef>
+          <a:effectRef idx="2">
+            <a:schemeClr val="accent1"/>
+          </a:effectRef>
+          <a:fontRef idx="minor">
+            <a:schemeClr val="lt1"/>
+          </a:fontRef>
+        </p:style>
+        <p:txBody>
+          <a:bodyPr rtlCol="0" anchor="ctr" wrap="square" lIns="109728" rIns="109728"/>
+          <a:lstStyle/>
+          <a:p>
+            <a:pPr algn="ctr">
+              <a:defRPr sz="1200" b="1">
+                <a:solidFill>
+                  <a:srgbClr val="FFFFFF"/>
+                </a:solidFill>
+                <a:latin typeface="Avenir Next"/>
+              </a:defRPr>
+            </a:pPr>
+            <a:r>
+              <a:t>core (automatic)</a:t>
+            </a:r>
+          </a:p>
+        </p:txBody>
+      </p:sp>
+      <p:sp>
+        <p:nvSpPr>
+          <p:cNvPr id="18" name="Rounded Rectangle 17"/>
+          <p:cNvSpPr/>
+          <p:nvPr/>
+        </p:nvSpPr>
+        <p:spPr>
+          <a:xfrm>
+            <a:off x="9006840" y="2743200"/>
+            <a:ext cx="2331720" cy="502920"/>
+          </a:xfrm>
+          <a:prstGeom prst="roundRect">
+            <a:avLst/>
+          </a:prstGeom>
+          <a:solidFill>
+            <a:srgbClr val="64748B"/>
+          </a:solidFill>
+          <a:ln>
+            <a:noFill/>
+          </a:ln>
+          <a:effectLst/>
+        </p:spPr>
+        <p:style>
+          <a:lnRef idx="1">
+            <a:schemeClr val="accent1"/>
+          </a:lnRef>
+          <a:fillRef idx="3">
+            <a:schemeClr val="accent1"/>
+          </a:fillRef>
+          <a:effectRef idx="2">
+            <a:schemeClr val="accent1"/>
+          </a:effectRef>
+          <a:fontRef idx="minor">
+            <a:schemeClr val="lt1"/>
+          </a:fontRef>
+        </p:style>
+        <p:txBody>
+          <a:bodyPr rtlCol="0" anchor="ctr" wrap="square" lIns="109728" rIns="109728"/>
+          <a:lstStyle/>
+          <a:p>
+            <a:pPr algn="ctr">
+              <a:defRPr sz="1200" b="1">
+                <a:solidFill>
+                  <a:srgbClr val="FFFFFF"/>
+                </a:solidFill>
+                <a:latin typeface="Avenir Next"/>
+              </a:defRPr>
+            </a:pPr>
+            <a:r>
+              <a:t>foundation (view)</a:t>
+            </a:r>
+          </a:p>
+        </p:txBody>
+      </p:sp>
+      <p:sp>
+        <p:nvSpPr>
+          <p:cNvPr id="19" name="Rounded Rectangle 18"/>
+          <p:cNvSpPr/>
+          <p:nvPr/>
+        </p:nvSpPr>
+        <p:spPr>
+          <a:xfrm>
+            <a:off x="6537959" y="3401568"/>
+            <a:ext cx="1508760" cy="566928"/>
+          </a:xfrm>
+          <a:prstGeom prst="roundRect">
+            <a:avLst/>
+          </a:prstGeom>
+          <a:solidFill>
+            <a:srgbClr val="F59E0B"/>
+          </a:solidFill>
+          <a:ln>
+            <a:noFill/>
+          </a:ln>
+          <a:effectLst/>
+        </p:spPr>
+        <p:style>
+          <a:lnRef idx="1">
+            <a:schemeClr val="accent1"/>
+          </a:lnRef>
+          <a:fillRef idx="3">
+            <a:schemeClr val="accent1"/>
+          </a:fillRef>
+          <a:effectRef idx="2">
+            <a:schemeClr val="accent1"/>
+          </a:effectRef>
+          <a:fontRef idx="minor">
+            <a:schemeClr val="lt1"/>
+          </a:fontRef>
+        </p:style>
+        <p:txBody>
+          <a:bodyPr rtlCol="0" anchor="ctr" wrap="square" lIns="109728" rIns="109728"/>
+          <a:lstStyle/>
+          <a:p>
+            <a:pPr algn="ctr">
+              <a:defRPr sz="1200" b="1">
+                <a:solidFill>
+                  <a:srgbClr val="FFFFFF"/>
+                </a:solidFill>
+                <a:latin typeface="Avenir Next"/>
+              </a:defRPr>
+            </a:pPr>
+            <a:r>
+              <a:t>serial</a:t>
+            </a:r>
+          </a:p>
+        </p:txBody>
+      </p:sp>
+      <p:sp>
+        <p:nvSpPr>
+          <p:cNvPr id="20" name="Rounded Rectangle 19"/>
+          <p:cNvSpPr/>
+          <p:nvPr/>
+        </p:nvSpPr>
+        <p:spPr>
+          <a:xfrm>
+            <a:off x="8183879" y="3401568"/>
+            <a:ext cx="1508760" cy="566928"/>
+          </a:xfrm>
+          <a:prstGeom prst="roundRect">
+            <a:avLst/>
+          </a:prstGeom>
+          <a:solidFill>
+            <a:srgbClr val="3B82F6"/>
+          </a:solidFill>
+          <a:ln>
+            <a:noFill/>
+          </a:ln>
+          <a:effectLst/>
+        </p:spPr>
+        <p:style>
+          <a:lnRef idx="1">
+            <a:schemeClr val="accent1"/>
+          </a:lnRef>
+          <a:fillRef idx="3">
+            <a:schemeClr val="accent1"/>
+          </a:fillRef>
+          <a:effectRef idx="2">
+            <a:schemeClr val="accent1"/>
+          </a:effectRef>
+          <a:fontRef idx="minor">
+            <a:schemeClr val="lt1"/>
+          </a:fontRef>
+        </p:style>
+        <p:txBody>
+          <a:bodyPr rtlCol="0" anchor="ctr" wrap="square" lIns="109728" rIns="109728"/>
+          <a:lstStyle/>
+          <a:p>
+            <a:pPr algn="ctr">
+              <a:defRPr sz="1200" b="1">
+                <a:solidFill>
+                  <a:srgbClr val="FFFFFF"/>
+                </a:solidFill>
+                <a:latin typeface="Avenir Next"/>
+              </a:defRPr>
+            </a:pPr>
+            <a:r>
+              <a:t>mpi</a:t>
+            </a:r>
+          </a:p>
+        </p:txBody>
+      </p:sp>
+      <p:sp>
+        <p:nvSpPr>
+          <p:cNvPr id="21" name="Rounded Rectangle 20"/>
+          <p:cNvSpPr/>
+          <p:nvPr/>
+        </p:nvSpPr>
+        <p:spPr>
+          <a:xfrm>
+            <a:off x="9829800" y="3401568"/>
+            <a:ext cx="1508760" cy="566928"/>
+          </a:xfrm>
+          <a:prstGeom prst="roundRect">
+            <a:avLst/>
+          </a:prstGeom>
+          <a:solidFill>
+            <a:srgbClr val="8B5CF6"/>
+          </a:solidFill>
+          <a:ln>
+            <a:noFill/>
+          </a:ln>
+          <a:effectLst/>
+        </p:spPr>
+        <p:style>
+          <a:lnRef idx="1">
+            <a:schemeClr val="accent1"/>
+          </a:lnRef>
+          <a:fillRef idx="3">
+            <a:schemeClr val="accent1"/>
+          </a:fillRef>
+          <a:effectRef idx="2">
+            <a:schemeClr val="accent1"/>
+          </a:effectRef>
+          <a:fontRef idx="minor">
+            <a:schemeClr val="lt1"/>
+          </a:fontRef>
+        </p:style>
+        <p:txBody>
+          <a:bodyPr rtlCol="0" anchor="ctr" wrap="square" lIns="109728" rIns="109728"/>
+          <a:lstStyle/>
+          <a:p>
+            <a:pPr algn="ctr">
+              <a:defRPr sz="1200" b="1">
+                <a:solidFill>
+                  <a:srgbClr val="FFFFFF"/>
+                </a:solidFill>
+                <a:latin typeface="Avenir Next"/>
+              </a:defRPr>
+            </a:pPr>
+            <a:r>
+              <a:t>gpu</a:t>
+            </a:r>
+          </a:p>
+        </p:txBody>
+      </p:sp>
+      <p:sp>
+        <p:nvSpPr>
+          <p:cNvPr id="22" name="TextBox 21"/>
+          <p:cNvSpPr txBox="1"/>
+          <p:nvPr/>
+        </p:nvSpPr>
+        <p:spPr>
+          <a:xfrm>
+            <a:off x="548640" y="4526280"/>
+            <a:ext cx="10972800" cy="365760"/>
+          </a:xfrm>
+          <a:prstGeom prst="rect">
+            <a:avLst/>
+          </a:prstGeom>
+          <a:noFill/>
+        </p:spPr>
+        <p:txBody>
+          <a:bodyPr wrap="square" anchor="t">
+            <a:spAutoFit/>
+          </a:bodyPr>
+          <a:lstStyle/>
+          <a:p>
+            <a:pPr algn="l">
+              <a:defRPr sz="1300" b="1">
+                <a:solidFill>
+                  <a:srgbClr val="FFFFFF"/>
+                </a:solidFill>
+                <a:latin typeface="Avenir Next"/>
+              </a:defRPr>
+            </a:pPr>
+            <a:r>
+              <a:t>Representative roster — evolving, ~two versions each</a:t>
+            </a:r>
+          </a:p>
+        </p:txBody>
+      </p:sp>
+      <p:sp>
+        <p:nvSpPr>
+          <p:cNvPr id="23" name="Rounded Rectangle 22"/>
+          <p:cNvSpPr/>
+          <p:nvPr/>
+        </p:nvSpPr>
+        <p:spPr>
+          <a:xfrm>
+            <a:off x="548640" y="4937760"/>
+            <a:ext cx="1481328" cy="384048"/>
+          </a:xfrm>
+          <a:prstGeom prst="roundRect">
+            <a:avLst/>
+          </a:prstGeom>
+          <a:solidFill>
+            <a:srgbClr val="2A374D"/>
+          </a:solidFill>
+          <a:ln>
+            <a:noFill/>
+          </a:ln>
+          <a:effectLst/>
+        </p:spPr>
+        <p:style>
+          <a:lnRef idx="1">
+            <a:schemeClr val="accent1"/>
+          </a:lnRef>
+          <a:fillRef idx="3">
+            <a:schemeClr val="accent1"/>
+          </a:fillRef>
+          <a:effectRef idx="2">
+            <a:schemeClr val="accent1"/>
+          </a:effectRef>
+          <a:fontRef idx="minor">
+            <a:schemeClr val="lt1"/>
+          </a:fontRef>
+        </p:style>
+        <p:txBody>
+          <a:bodyPr rtlCol="0" anchor="ctr" wrap="square" lIns="109728" rIns="109728"/>
+          <a:lstStyle/>
+          <a:p>
+            <a:pPr algn="ctr">
+              <a:defRPr sz="1200" b="0">
+                <a:solidFill>
+                  <a:srgbClr val="E2E8F0"/>
+                </a:solidFill>
+                <a:latin typeface="Avenir Next"/>
+              </a:defRPr>
+            </a:pPr>
+            <a:r>
+              <a:t>HDF5</a:t>
+            </a:r>
+          </a:p>
+        </p:txBody>
+      </p:sp>
+      <p:sp>
+        <p:nvSpPr>
+          <p:cNvPr id="24" name="Rounded Rectangle 23"/>
+          <p:cNvSpPr/>
+          <p:nvPr/>
+        </p:nvSpPr>
+        <p:spPr>
+          <a:xfrm>
+            <a:off x="2176272" y="4937760"/>
+            <a:ext cx="1481328" cy="384048"/>
+          </a:xfrm>
+          <a:prstGeom prst="roundRect">
+            <a:avLst/>
+          </a:prstGeom>
+          <a:solidFill>
+            <a:srgbClr val="2A374D"/>
+          </a:solidFill>
+          <a:ln>
+            <a:noFill/>
+          </a:ln>
+          <a:effectLst/>
+        </p:spPr>
+        <p:style>
+          <a:lnRef idx="1">
+            <a:schemeClr val="accent1"/>
+          </a:lnRef>
+          <a:fillRef idx="3">
+            <a:schemeClr val="accent1"/>
+          </a:fillRef>
+          <a:effectRef idx="2">
+            <a:schemeClr val="accent1"/>
+          </a:effectRef>
+          <a:fontRef idx="minor">
+            <a:schemeClr val="lt1"/>
+          </a:fontRef>
+        </p:style>
+        <p:txBody>
+          <a:bodyPr rtlCol="0" anchor="ctr" wrap="square" lIns="109728" rIns="109728"/>
+          <a:lstStyle/>
+          <a:p>
+            <a:pPr algn="ctr">
+              <a:defRPr sz="1200" b="0">
+                <a:solidFill>
+                  <a:srgbClr val="E2E8F0"/>
+                </a:solidFill>
+                <a:latin typeface="Avenir Next"/>
+              </a:defRPr>
+            </a:pPr>
+            <a:r>
+              <a:t>NetCDF-C</a:t>
+            </a:r>
+          </a:p>
+        </p:txBody>
+      </p:sp>
+      <p:sp>
+        <p:nvSpPr>
+          <p:cNvPr id="25" name="Rounded Rectangle 24"/>
+          <p:cNvSpPr/>
+          <p:nvPr/>
+        </p:nvSpPr>
+        <p:spPr>
+          <a:xfrm>
+            <a:off x="3803904" y="4937760"/>
+            <a:ext cx="1481328" cy="384048"/>
+          </a:xfrm>
+          <a:prstGeom prst="roundRect">
+            <a:avLst/>
+          </a:prstGeom>
+          <a:solidFill>
+            <a:srgbClr val="2A374D"/>
+          </a:solidFill>
+          <a:ln>
+            <a:noFill/>
+          </a:ln>
+          <a:effectLst/>
+        </p:spPr>
+        <p:style>
+          <a:lnRef idx="1">
+            <a:schemeClr val="accent1"/>
+          </a:lnRef>
+          <a:fillRef idx="3">
+            <a:schemeClr val="accent1"/>
+          </a:fillRef>
+          <a:effectRef idx="2">
+            <a:schemeClr val="accent1"/>
+          </a:effectRef>
+          <a:fontRef idx="minor">
+            <a:schemeClr val="lt1"/>
+          </a:fontRef>
+        </p:style>
+        <p:txBody>
+          <a:bodyPr rtlCol="0" anchor="ctr" wrap="square" lIns="109728" rIns="109728"/>
+          <a:lstStyle/>
+          <a:p>
+            <a:pPr algn="ctr">
+              <a:defRPr sz="1200" b="0">
+                <a:solidFill>
+                  <a:srgbClr val="E2E8F0"/>
+                </a:solidFill>
+                <a:latin typeface="Avenir Next"/>
+              </a:defRPr>
+            </a:pPr>
+            <a:r>
+              <a:t>NetCDF-Fortran</a:t>
+            </a:r>
+          </a:p>
+        </p:txBody>
+      </p:sp>
+      <p:sp>
+        <p:nvSpPr>
+          <p:cNvPr id="26" name="Rounded Rectangle 25"/>
+          <p:cNvSpPr/>
+          <p:nvPr/>
+        </p:nvSpPr>
+        <p:spPr>
+          <a:xfrm>
+            <a:off x="5431536" y="4937760"/>
+            <a:ext cx="1481328" cy="384048"/>
+          </a:xfrm>
+          <a:prstGeom prst="roundRect">
+            <a:avLst/>
+          </a:prstGeom>
+          <a:solidFill>
+            <a:srgbClr val="2A374D"/>
+          </a:solidFill>
+          <a:ln>
+            <a:noFill/>
+          </a:ln>
+          <a:effectLst/>
+        </p:spPr>
+        <p:style>
+          <a:lnRef idx="1">
+            <a:schemeClr val="accent1"/>
+          </a:lnRef>
+          <a:fillRef idx="3">
+            <a:schemeClr val="accent1"/>
+          </a:fillRef>
+          <a:effectRef idx="2">
+            <a:schemeClr val="accent1"/>
+          </a:effectRef>
+          <a:fontRef idx="minor">
+            <a:schemeClr val="lt1"/>
+          </a:fontRef>
+        </p:style>
+        <p:txBody>
+          <a:bodyPr rtlCol="0" anchor="ctr" wrap="square" lIns="109728" rIns="109728"/>
+          <a:lstStyle/>
+          <a:p>
+            <a:pPr algn="ctr">
+              <a:defRPr sz="1200" b="0">
+                <a:solidFill>
+                  <a:srgbClr val="E2E8F0"/>
+                </a:solidFill>
+                <a:latin typeface="Avenir Next"/>
+              </a:defRPr>
+            </a:pPr>
+            <a:r>
+              <a:t>NetCDF-C++</a:t>
+            </a:r>
+          </a:p>
+        </p:txBody>
+      </p:sp>
+      <p:sp>
+        <p:nvSpPr>
+          <p:cNvPr id="27" name="Rounded Rectangle 26"/>
+          <p:cNvSpPr/>
+          <p:nvPr/>
+        </p:nvSpPr>
+        <p:spPr>
+          <a:xfrm>
+            <a:off x="7059168" y="4937760"/>
+            <a:ext cx="1481328" cy="384048"/>
+          </a:xfrm>
+          <a:prstGeom prst="roundRect">
+            <a:avLst/>
+          </a:prstGeom>
+          <a:solidFill>
+            <a:srgbClr val="2A374D"/>
+          </a:solidFill>
+          <a:ln>
+            <a:noFill/>
+          </a:ln>
+          <a:effectLst/>
+        </p:spPr>
+        <p:style>
+          <a:lnRef idx="1">
+            <a:schemeClr val="accent1"/>
+          </a:lnRef>
+          <a:fillRef idx="3">
+            <a:schemeClr val="accent1"/>
+          </a:fillRef>
+          <a:effectRef idx="2">
+            <a:schemeClr val="accent1"/>
+          </a:effectRef>
+          <a:fontRef idx="minor">
+            <a:schemeClr val="lt1"/>
+          </a:fontRef>
+        </p:style>
+        <p:txBody>
+          <a:bodyPr rtlCol="0" anchor="ctr" wrap="square" lIns="109728" rIns="109728"/>
+          <a:lstStyle/>
+          <a:p>
+            <a:pPr algn="ctr">
+              <a:defRPr sz="1200" b="0">
+                <a:solidFill>
+                  <a:srgbClr val="E2E8F0"/>
+                </a:solidFill>
+                <a:latin typeface="Avenir Next"/>
+              </a:defRPr>
+            </a:pPr>
+            <a:r>
+              <a:t>FFTW</a:t>
+            </a:r>
+          </a:p>
+        </p:txBody>
+      </p:sp>
+      <p:sp>
+        <p:nvSpPr>
+          <p:cNvPr id="28" name="Rounded Rectangle 27"/>
+          <p:cNvSpPr/>
+          <p:nvPr/>
+        </p:nvSpPr>
+        <p:spPr>
+          <a:xfrm>
+            <a:off x="8686800" y="4937760"/>
+            <a:ext cx="1481328" cy="384048"/>
+          </a:xfrm>
+          <a:prstGeom prst="roundRect">
+            <a:avLst/>
+          </a:prstGeom>
+          <a:solidFill>
+            <a:srgbClr val="2A374D"/>
+          </a:solidFill>
+          <a:ln>
+            <a:noFill/>
+          </a:ln>
+          <a:effectLst/>
+        </p:spPr>
+        <p:style>
+          <a:lnRef idx="1">
+            <a:schemeClr val="accent1"/>
+          </a:lnRef>
+          <a:fillRef idx="3">
+            <a:schemeClr val="accent1"/>
+          </a:fillRef>
+          <a:effectRef idx="2">
+            <a:schemeClr val="accent1"/>
+          </a:effectRef>
+          <a:fontRef idx="minor">
+            <a:schemeClr val="lt1"/>
+          </a:fontRef>
+        </p:style>
+        <p:txBody>
+          <a:bodyPr rtlCol="0" anchor="ctr" wrap="square" lIns="109728" rIns="109728"/>
+          <a:lstStyle/>
+          <a:p>
+            <a:pPr algn="ctr">
+              <a:defRPr sz="1200" b="0">
+                <a:solidFill>
+                  <a:srgbClr val="E2E8F0"/>
+                </a:solidFill>
+                <a:latin typeface="Avenir Next"/>
+              </a:defRPr>
+            </a:pPr>
+            <a:r>
+              <a:t>OpenBLAS</a:t>
+            </a:r>
+          </a:p>
+        </p:txBody>
+      </p:sp>
+      <p:sp>
+        <p:nvSpPr>
+          <p:cNvPr id="29" name="Rounded Rectangle 28"/>
+          <p:cNvSpPr/>
+          <p:nvPr/>
+        </p:nvSpPr>
+        <p:spPr>
+          <a:xfrm>
+            <a:off x="10314432" y="4937760"/>
+            <a:ext cx="1481328" cy="384048"/>
+          </a:xfrm>
+          <a:prstGeom prst="roundRect">
+            <a:avLst/>
+          </a:prstGeom>
+          <a:solidFill>
+            <a:srgbClr val="2A374D"/>
+          </a:solidFill>
+          <a:ln>
+            <a:noFill/>
+          </a:ln>
+          <a:effectLst/>
+        </p:spPr>
+        <p:style>
+          <a:lnRef idx="1">
+            <a:schemeClr val="accent1"/>
+          </a:lnRef>
+          <a:fillRef idx="3">
+            <a:schemeClr val="accent1"/>
+          </a:fillRef>
+          <a:effectRef idx="2">
+            <a:schemeClr val="accent1"/>
+          </a:effectRef>
+          <a:fontRef idx="minor">
+            <a:schemeClr val="lt1"/>
+          </a:fontRef>
+        </p:style>
+        <p:txBody>
+          <a:bodyPr rtlCol="0" anchor="ctr" wrap="square" lIns="109728" rIns="109728"/>
+          <a:lstStyle/>
+          <a:p>
+            <a:pPr algn="ctr">
+              <a:defRPr sz="1200" b="0">
+                <a:solidFill>
+                  <a:srgbClr val="E2E8F0"/>
+                </a:solidFill>
+                <a:latin typeface="Avenir Next"/>
+              </a:defRPr>
+            </a:pPr>
+            <a:r>
+              <a:t>Boost</a:t>
+            </a:r>
+          </a:p>
+        </p:txBody>
+      </p:sp>
+      <p:sp>
+        <p:nvSpPr>
+          <p:cNvPr id="30" name="Rounded Rectangle 29"/>
+          <p:cNvSpPr/>
+          <p:nvPr/>
+        </p:nvSpPr>
+        <p:spPr>
+          <a:xfrm>
+            <a:off x="548640" y="5449824"/>
+            <a:ext cx="1481328" cy="384048"/>
+          </a:xfrm>
+          <a:prstGeom prst="roundRect">
+            <a:avLst/>
+          </a:prstGeom>
+          <a:solidFill>
+            <a:srgbClr val="2A374D"/>
+          </a:solidFill>
+          <a:ln>
+            <a:noFill/>
+          </a:ln>
+          <a:effectLst/>
+        </p:spPr>
+        <p:style>
+          <a:lnRef idx="1">
+            <a:schemeClr val="accent1"/>
+          </a:lnRef>
+          <a:fillRef idx="3">
+            <a:schemeClr val="accent1"/>
+          </a:fillRef>
+          <a:effectRef idx="2">
+            <a:schemeClr val="accent1"/>
+          </a:effectRef>
+          <a:fontRef idx="minor">
+            <a:schemeClr val="lt1"/>
+          </a:fontRef>
+        </p:style>
+        <p:txBody>
+          <a:bodyPr rtlCol="0" anchor="ctr" wrap="square" lIns="109728" rIns="109728"/>
+          <a:lstStyle/>
+          <a:p>
+            <a:pPr algn="ctr">
+              <a:defRPr sz="1200" b="0">
+                <a:solidFill>
+                  <a:srgbClr val="E2E8F0"/>
+                </a:solidFill>
+                <a:latin typeface="Avenir Next"/>
+              </a:defRPr>
+            </a:pPr>
+            <a:r>
+              <a:t>GSL</a:t>
+            </a:r>
+          </a:p>
+        </p:txBody>
+      </p:sp>
+      <p:sp>
+        <p:nvSpPr>
+          <p:cNvPr id="31" name="Rounded Rectangle 30"/>
+          <p:cNvSpPr/>
+          <p:nvPr/>
+        </p:nvSpPr>
+        <p:spPr>
+          <a:xfrm>
+            <a:off x="2176272" y="5449824"/>
+            <a:ext cx="1481328" cy="384048"/>
+          </a:xfrm>
+          <a:prstGeom prst="roundRect">
+            <a:avLst/>
+          </a:prstGeom>
+          <a:solidFill>
+            <a:srgbClr val="2A374D"/>
+          </a:solidFill>
+          <a:ln>
+            <a:noFill/>
+          </a:ln>
+          <a:effectLst/>
+        </p:spPr>
+        <p:style>
+          <a:lnRef idx="1">
+            <a:schemeClr val="accent1"/>
+          </a:lnRef>
+          <a:fillRef idx="3">
+            <a:schemeClr val="accent1"/>
+          </a:fillRef>
+          <a:effectRef idx="2">
+            <a:schemeClr val="accent1"/>
+          </a:effectRef>
+          <a:fontRef idx="minor">
+            <a:schemeClr val="lt1"/>
+          </a:fontRef>
+        </p:style>
+        <p:txBody>
+          <a:bodyPr rtlCol="0" anchor="ctr" wrap="square" lIns="109728" rIns="109728"/>
+          <a:lstStyle/>
+          <a:p>
+            <a:pPr algn="ctr">
+              <a:defRPr sz="1200" b="0">
+                <a:solidFill>
+                  <a:srgbClr val="E2E8F0"/>
+                </a:solidFill>
+                <a:latin typeface="Avenir Next"/>
+              </a:defRPr>
+            </a:pPr>
+            <a:r>
+              <a:t>TAU</a:t>
+            </a:r>
+          </a:p>
+        </p:txBody>
+      </p:sp>
+      <p:sp>
+        <p:nvSpPr>
+          <p:cNvPr id="32" name="Rounded Rectangle 31"/>
+          <p:cNvSpPr/>
+          <p:nvPr/>
+        </p:nvSpPr>
+        <p:spPr>
+          <a:xfrm>
+            <a:off x="3803904" y="5449824"/>
+            <a:ext cx="1481328" cy="384048"/>
+          </a:xfrm>
+          <a:prstGeom prst="roundRect">
+            <a:avLst/>
+          </a:prstGeom>
+          <a:solidFill>
+            <a:srgbClr val="2A374D"/>
+          </a:solidFill>
+          <a:ln>
+            <a:noFill/>
+          </a:ln>
+          <a:effectLst/>
+        </p:spPr>
+        <p:style>
+          <a:lnRef idx="1">
+            <a:schemeClr val="accent1"/>
+          </a:lnRef>
+          <a:fillRef idx="3">
+            <a:schemeClr val="accent1"/>
+          </a:fillRef>
+          <a:effectRef idx="2">
+            <a:schemeClr val="accent1"/>
+          </a:effectRef>
+          <a:fontRef idx="minor">
+            <a:schemeClr val="lt1"/>
+          </a:fontRef>
+        </p:style>
+        <p:txBody>
+          <a:bodyPr rtlCol="0" anchor="ctr" wrap="square" lIns="109728" rIns="109728"/>
+          <a:lstStyle/>
+          <a:p>
+            <a:pPr algn="ctr">
+              <a:defRPr sz="1200" b="0">
+                <a:solidFill>
+                  <a:srgbClr val="E2E8F0"/>
+                </a:solidFill>
+                <a:latin typeface="Avenir Next"/>
+              </a:defRPr>
+            </a:pPr>
+            <a:r>
+              <a:t>Kokkos</a:t>
+            </a:r>
+          </a:p>
+        </p:txBody>
+      </p:sp>
+      <p:sp>
+        <p:nvSpPr>
+          <p:cNvPr id="33" name="Rounded Rectangle 32"/>
+          <p:cNvSpPr/>
+          <p:nvPr/>
+        </p:nvSpPr>
+        <p:spPr>
+          <a:xfrm>
+            <a:off x="5431536" y="5449824"/>
+            <a:ext cx="1481328" cy="384048"/>
+          </a:xfrm>
+          <a:prstGeom prst="roundRect">
+            <a:avLst/>
+          </a:prstGeom>
+          <a:solidFill>
+            <a:srgbClr val="2A374D"/>
+          </a:solidFill>
+          <a:ln>
+            <a:noFill/>
+          </a:ln>
+          <a:effectLst/>
+        </p:spPr>
+        <p:style>
+          <a:lnRef idx="1">
+            <a:schemeClr val="accent1"/>
+          </a:lnRef>
+          <a:fillRef idx="3">
+            <a:schemeClr val="accent1"/>
+          </a:fillRef>
+          <a:effectRef idx="2">
+            <a:schemeClr val="accent1"/>
+          </a:effectRef>
+          <a:fontRef idx="minor">
+            <a:schemeClr val="lt1"/>
+          </a:fontRef>
+        </p:style>
+        <p:txBody>
+          <a:bodyPr rtlCol="0" anchor="ctr" wrap="square" lIns="109728" rIns="109728"/>
+          <a:lstStyle/>
+          <a:p>
+            <a:pPr algn="ctr">
+              <a:defRPr sz="1200" b="0">
+                <a:solidFill>
+                  <a:srgbClr val="E2E8F0"/>
+                </a:solidFill>
+                <a:latin typeface="Avenir Next"/>
+              </a:defRPr>
+            </a:pPr>
+            <a:r>
+              <a:t>CMake</a:t>
+            </a:r>
+          </a:p>
+        </p:txBody>
+      </p:sp>
+      <p:sp>
+        <p:nvSpPr>
+          <p:cNvPr id="34" name="Rounded Rectangle 33"/>
+          <p:cNvSpPr/>
+          <p:nvPr/>
+        </p:nvSpPr>
+        <p:spPr>
+          <a:xfrm>
+            <a:off x="7059168" y="5449824"/>
+            <a:ext cx="1481328" cy="384048"/>
+          </a:xfrm>
+          <a:prstGeom prst="roundRect">
+            <a:avLst/>
+          </a:prstGeom>
+          <a:solidFill>
+            <a:srgbClr val="2A374D"/>
+          </a:solidFill>
+          <a:ln>
+            <a:noFill/>
+          </a:ln>
+          <a:effectLst/>
+        </p:spPr>
+        <p:style>
+          <a:lnRef idx="1">
+            <a:schemeClr val="accent1"/>
+          </a:lnRef>
+          <a:fillRef idx="3">
+            <a:schemeClr val="accent1"/>
+          </a:fillRef>
+          <a:effectRef idx="2">
+            <a:schemeClr val="accent1"/>
+          </a:effectRef>
+          <a:fontRef idx="minor">
+            <a:schemeClr val="lt1"/>
+          </a:fontRef>
+        </p:style>
+        <p:txBody>
+          <a:bodyPr rtlCol="0" anchor="ctr" wrap="square" lIns="109728" rIns="109728"/>
+          <a:lstStyle/>
+          <a:p>
+            <a:pPr algn="ctr">
+              <a:defRPr sz="1200" b="0">
+                <a:solidFill>
+                  <a:srgbClr val="E2E8F0"/>
+                </a:solidFill>
+                <a:latin typeface="Avenir Next"/>
+              </a:defRPr>
+            </a:pPr>
+            <a:r>
+              <a:t>Python</a:t>
+            </a:r>
+          </a:p>
+        </p:txBody>
+      </p:sp>
+      <p:sp>
+        <p:nvSpPr>
+          <p:cNvPr id="35" name="Rounded Rectangle 34"/>
+          <p:cNvSpPr/>
+          <p:nvPr/>
+        </p:nvSpPr>
+        <p:spPr>
+          <a:xfrm>
+            <a:off x="8686800" y="5449824"/>
+            <a:ext cx="1481328" cy="384048"/>
+          </a:xfrm>
+          <a:prstGeom prst="roundRect">
+            <a:avLst/>
+          </a:prstGeom>
+          <a:solidFill>
+            <a:srgbClr val="2A374D"/>
+          </a:solidFill>
+          <a:ln>
+            <a:noFill/>
+          </a:ln>
+          <a:effectLst/>
+        </p:spPr>
+        <p:style>
+          <a:lnRef idx="1">
+            <a:schemeClr val="accent1"/>
+          </a:lnRef>
+          <a:fillRef idx="3">
+            <a:schemeClr val="accent1"/>
+          </a:fillRef>
+          <a:effectRef idx="2">
+            <a:schemeClr val="accent1"/>
+          </a:effectRef>
+          <a:fontRef idx="minor">
+            <a:schemeClr val="lt1"/>
+          </a:fontRef>
+        </p:style>
+        <p:txBody>
+          <a:bodyPr rtlCol="0" anchor="ctr" wrap="square" lIns="109728" rIns="109728"/>
+          <a:lstStyle/>
+          <a:p>
+            <a:pPr algn="ctr">
+              <a:defRPr sz="1200" b="0">
+                <a:solidFill>
+                  <a:srgbClr val="E2E8F0"/>
+                </a:solidFill>
+                <a:latin typeface="Avenir Next"/>
+              </a:defRPr>
+            </a:pPr>
+            <a:r>
+              <a:t>Miniforge</a:t>
+            </a:r>
+          </a:p>
+        </p:txBody>
+      </p:sp>
+      <p:sp>
+        <p:nvSpPr>
+          <p:cNvPr id="36" name="TextBox 35"/>
+          <p:cNvSpPr txBox="1"/>
+          <p:nvPr/>
+        </p:nvSpPr>
+        <p:spPr>
+          <a:xfrm>
+            <a:off x="548640" y="6080760"/>
+            <a:ext cx="11064240" cy="457200"/>
+          </a:xfrm>
+          <a:prstGeom prst="rect">
+            <a:avLst/>
+          </a:prstGeom>
+          <a:noFill/>
+        </p:spPr>
+        <p:txBody>
+          <a:bodyPr wrap="square" anchor="t">
+            <a:spAutoFit/>
+          </a:bodyPr>
+          <a:lstStyle/>
+          <a:p>
+            <a:pPr algn="l">
+              <a:defRPr sz="1200" b="0">
+                <a:solidFill>
+                  <a:srgbClr val="94A3B8"/>
+                </a:solidFill>
+                <a:latin typeface="Avenir Next"/>
+              </a:defRPr>
+            </a:pPr>
+            <a:r>
+              <a:t>Multi-version by policy: unify:false lanes · single-version pinned foundation · conflicts stay a module choice</a:t>
             </a:r>
           </a:p>
         </p:txBody>
@@ -3885,138 +10670,114 @@
       <p:grpSpPr/>
       <p:sp>
         <p:nvSpPr>
-          <p:cNvPr id="2" name="Title 1"/>
-          <p:cNvSpPr>
-            <a:spLocks noGrp="1"/>
-          </p:cNvSpPr>
-          <p:nvPr>
-            <p:ph type="title"/>
-          </p:nvPr>
-        </p:nvSpPr>
-        <p:spPr/>
-        <p:txBody>
-          <a:bodyPr/>
-          <a:lstStyle/>
-          <a:p>
-            <a:r>
-              <a:t>What's different: generated, not hand-curated</a:t>
-            </a:r>
-          </a:p>
-        </p:txBody>
-      </p:sp>
-      <p:sp>
-        <p:nvSpPr>
-          <p:cNvPr id="3" name="Content Placeholder 2"/>
-          <p:cNvSpPr>
-            <a:spLocks noGrp="1"/>
-          </p:cNvSpPr>
-          <p:nvPr>
-            <p:ph idx="1"/>
-          </p:nvPr>
-        </p:nvSpPr>
-        <p:spPr/>
-        <p:txBody>
-          <a:bodyPr wrap="square"/>
-          <a:lstStyle/>
-          <a:p>
-            <a:pPr>
-              <a:defRPr sz="2000"/>
-            </a:pPr>
-            <a:r>
-              <a:t>NASA and ALCF hand-maintain their stacks per machine</a:t>
-            </a:r>
-          </a:p>
-          <a:p>
-            <a:pPr>
-              <a:defRPr sz="2000"/>
-            </a:pPr>
-            <a:r>
-              <a:t>CSE generates the same shape from facts + policy:</a:t>
-            </a:r>
-          </a:p>
-          <a:p>
-            <a:pPr lvl="1">
-              <a:defRPr sz="1600"/>
-            </a:pPr>
-            <a:r>
-              <a:t>cluster-inspector probes the system → verified facts (compilers, MPIs, GPUs, fabric)</a:t>
-            </a:r>
-          </a:p>
-          <a:p>
-            <a:pPr lvl="1">
-              <a:defRPr sz="1600"/>
-            </a:pPr>
-            <a:r>
-              <a:t>site policy defaults (one small file) → which compiler family, which MPI, newest-version rules</a:t>
-            </a:r>
-          </a:p>
-          <a:p>
-            <a:pPr lvl="1">
-              <a:defRPr sz="1600"/>
-            </a:pPr>
-            <a:r>
-              <a:t>stack-composer renders every lane's configs — templates never contain policy</a:t>
-            </a:r>
-          </a:p>
-          <a:p>
-            <a:pPr lvl="1">
-              <a:defRPr sz="1600"/>
-            </a:pPr>
-            <a:r>
-              <a:t>Spack builds; modules and views are published to users</a:t>
-            </a:r>
-          </a:p>
-          <a:p>
-            <a:pPr>
-              <a:defRPr sz="2000"/>
-            </a:pPr>
-            <a:r>
-              <a:t>A new system is a probe + a render — not months of curation</a:t>
-            </a:r>
-          </a:p>
-          <a:p>
-            <a:pPr>
-              <a:defRPr sz="2000"/>
-            </a:pPr>
-            <a:r>
-              <a:t>Same pipeline handled a Cray EX (MI300A/ROCm) and an NVIDIA A100 Linux cluster unchanged</a:t>
-            </a:r>
-          </a:p>
-        </p:txBody>
-      </p:sp>
-    </p:spTree>
-  </p:cSld>
-  <p:clrMapOvr>
-    <a:masterClrMapping/>
-  </p:clrMapOvr>
-</p:sld>
-</file>
-
-<file path=ppt/slides/slide9.xml><?xml version="1.0" encoding="utf-8"?>
-<p:sld xmlns:a="http://schemas.openxmlformats.org/drawingml/2006/main" xmlns:p="http://schemas.openxmlformats.org/presentationml/2006/main" xmlns:r="http://schemas.openxmlformats.org/officeDocument/2006/relationships">
-  <p:cSld>
-    <p:spTree>
-      <p:nvGrpSpPr>
-        <p:cNvPr id="1" name=""/>
-        <p:cNvGrpSpPr/>
-        <p:nvPr/>
-      </p:nvGrpSpPr>
-      <p:grpSpPr/>
-      <p:sp>
-        <p:nvSpPr>
-          <p:cNvPr id="2" name="Title 1"/>
-          <p:cNvSpPr>
-            <a:spLocks noGrp="1"/>
-          </p:cNvSpPr>
-          <p:nvPr>
-            <p:ph type="title"/>
-          </p:nvPr>
-        </p:nvSpPr>
-        <p:spPr/>
-        <p:txBody>
-          <a:bodyPr/>
-          <a:lstStyle/>
-          <a:p>
+          <p:cNvPr id="2" name="Rectangle 1"/>
+          <p:cNvSpPr/>
+          <p:nvPr/>
+        </p:nvSpPr>
+        <p:spPr>
+          <a:xfrm>
+            <a:off x="0" y="0"/>
+            <a:ext cx="12191695" cy="6858000"/>
+          </a:xfrm>
+          <a:prstGeom prst="rect">
+            <a:avLst/>
+          </a:prstGeom>
+          <a:solidFill>
+            <a:srgbClr val="0F172A"/>
+          </a:solidFill>
+          <a:ln>
+            <a:noFill/>
+          </a:ln>
+          <a:effectLst/>
+        </p:spPr>
+        <p:style>
+          <a:lnRef idx="1">
+            <a:schemeClr val="accent1"/>
+          </a:lnRef>
+          <a:fillRef idx="3">
+            <a:schemeClr val="accent1"/>
+          </a:fillRef>
+          <a:effectRef idx="2">
+            <a:schemeClr val="accent1"/>
+          </a:effectRef>
+          <a:fontRef idx="minor">
+            <a:schemeClr val="lt1"/>
+          </a:fontRef>
+        </p:style>
+        <p:txBody>
+          <a:bodyPr rtlCol="0" anchor="ctr"/>
+          <a:lstStyle/>
+          <a:p>
+            <a:pPr algn="ctr"/>
+          </a:p>
+        </p:txBody>
+      </p:sp>
+      <p:sp>
+        <p:nvSpPr>
+          <p:cNvPr id="3" name="TextBox 2"/>
+          <p:cNvSpPr txBox="1"/>
+          <p:nvPr/>
+        </p:nvSpPr>
+        <p:spPr>
+          <a:xfrm>
+            <a:off x="548640" y="256032"/>
+            <a:ext cx="10972800" cy="365760"/>
+          </a:xfrm>
+          <a:prstGeom prst="rect">
+            <a:avLst/>
+          </a:prstGeom>
+          <a:noFill/>
+        </p:spPr>
+        <p:txBody>
+          <a:bodyPr wrap="square" anchor="t">
+            <a:spAutoFit/>
+          </a:bodyPr>
+          <a:lstStyle/>
+          <a:p>
+            <a:pPr algn="l">
+              <a:defRPr sz="1300" b="1">
+                <a:solidFill>
+                  <a:srgbClr val="14B8A6"/>
+                </a:solidFill>
+                <a:latin typeface="Avenir Next"/>
+              </a:defRPr>
+            </a:pPr>
+            <a:r>
+              <a:t>WHERE THE PIPELINE IS TODAY</a:t>
+            </a:r>
+          </a:p>
+        </p:txBody>
+      </p:sp>
+      <p:sp>
+        <p:nvSpPr>
+          <p:cNvPr id="4" name="TextBox 3"/>
+          <p:cNvSpPr txBox="1"/>
+          <p:nvPr/>
+        </p:nvSpPr>
+        <p:spPr>
+          <a:xfrm>
+            <a:off x="548640" y="566928"/>
+            <a:ext cx="11064240" cy="731520"/>
+          </a:xfrm>
+          <a:prstGeom prst="rect">
+            <a:avLst/>
+          </a:prstGeom>
+          <a:noFill/>
+        </p:spPr>
+        <p:txBody>
+          <a:bodyPr wrap="square" anchor="t">
+            <a:spAutoFit/>
+          </a:bodyPr>
+          <a:lstStyle/>
+          <a:p>
+            <a:pPr algn="l">
+              <a:defRPr sz="3000" b="1">
+                <a:solidFill>
+                  <a:srgbClr val="FFFFFF"/>
+                </a:solidFill>
+                <a:latin typeface="Avenir Next"/>
+              </a:defRPr>
+            </a:pPr>
             <a:r>
               <a:t>Status and next steps</a:t>
             </a:r>
@@ -4025,77 +10786,633 @@
       </p:sp>
       <p:sp>
         <p:nvSpPr>
-          <p:cNvPr id="3" name="Content Placeholder 2"/>
-          <p:cNvSpPr>
-            <a:spLocks noGrp="1"/>
-          </p:cNvSpPr>
-          <p:nvPr>
-            <p:ph idx="1"/>
-          </p:nvPr>
-        </p:nvSpPr>
-        <p:spPr/>
-        <p:txBody>
-          <a:bodyPr wrap="square"/>
-          <a:lstStyle/>
-          <a:p>
-            <a:pPr>
-              <a:defRPr sz="2000"/>
+          <p:cNvPr id="5" name="Rectangle 4"/>
+          <p:cNvSpPr/>
+          <p:nvPr/>
+        </p:nvSpPr>
+        <p:spPr>
+          <a:xfrm>
+            <a:off x="566928" y="1298448"/>
+            <a:ext cx="1463040" cy="41148"/>
+          </a:xfrm>
+          <a:prstGeom prst="rect">
+            <a:avLst/>
+          </a:prstGeom>
+          <a:solidFill>
+            <a:srgbClr val="14B8A6"/>
+          </a:solidFill>
+          <a:ln>
+            <a:noFill/>
+          </a:ln>
+          <a:effectLst/>
+        </p:spPr>
+        <p:style>
+          <a:lnRef idx="1">
+            <a:schemeClr val="accent1"/>
+          </a:lnRef>
+          <a:fillRef idx="3">
+            <a:schemeClr val="accent1"/>
+          </a:fillRef>
+          <a:effectRef idx="2">
+            <a:schemeClr val="accent1"/>
+          </a:effectRef>
+          <a:fontRef idx="minor">
+            <a:schemeClr val="lt1"/>
+          </a:fontRef>
+        </p:style>
+        <p:txBody>
+          <a:bodyPr rtlCol="0" anchor="ctr"/>
+          <a:lstStyle/>
+          <a:p>
+            <a:pPr algn="ctr"/>
+          </a:p>
+        </p:txBody>
+      </p:sp>
+      <p:sp>
+        <p:nvSpPr>
+          <p:cNvPr id="6" name="Rounded Rectangle 5"/>
+          <p:cNvSpPr/>
+          <p:nvPr/>
+        </p:nvSpPr>
+        <p:spPr>
+          <a:xfrm>
+            <a:off x="548640" y="1645920"/>
+            <a:ext cx="5440680" cy="4480560"/>
+          </a:xfrm>
+          <a:prstGeom prst="roundRect">
+            <a:avLst/>
+          </a:prstGeom>
+          <a:solidFill>
+            <a:srgbClr val="1E293B"/>
+          </a:solidFill>
+          <a:ln>
+            <a:noFill/>
+          </a:ln>
+          <a:effectLst/>
+        </p:spPr>
+        <p:style>
+          <a:lnRef idx="1">
+            <a:schemeClr val="accent1"/>
+          </a:lnRef>
+          <a:fillRef idx="3">
+            <a:schemeClr val="accent1"/>
+          </a:fillRef>
+          <a:effectRef idx="2">
+            <a:schemeClr val="accent1"/>
+          </a:effectRef>
+          <a:fontRef idx="minor">
+            <a:schemeClr val="lt1"/>
+          </a:fontRef>
+        </p:style>
+        <p:txBody>
+          <a:bodyPr rtlCol="0" anchor="ctr"/>
+          <a:lstStyle/>
+          <a:p>
+            <a:pPr algn="ctr"/>
+          </a:p>
+        </p:txBody>
+      </p:sp>
+      <p:sp>
+        <p:nvSpPr>
+          <p:cNvPr id="7" name="TextBox 6"/>
+          <p:cNvSpPr txBox="1"/>
+          <p:nvPr/>
+        </p:nvSpPr>
+        <p:spPr>
+          <a:xfrm>
+            <a:off x="822960" y="1828800"/>
+            <a:ext cx="4937760" cy="457200"/>
+          </a:xfrm>
+          <a:prstGeom prst="rect">
+            <a:avLst/>
+          </a:prstGeom>
+          <a:noFill/>
+        </p:spPr>
+        <p:txBody>
+          <a:bodyPr wrap="square" anchor="t">
+            <a:spAutoFit/>
+          </a:bodyPr>
+          <a:lstStyle/>
+          <a:p>
+            <a:pPr algn="l">
+              <a:defRPr sz="1700" b="1">
+                <a:solidFill>
+                  <a:srgbClr val="22C55E"/>
+                </a:solidFill>
+                <a:latin typeface="Avenir Next"/>
+              </a:defRPr>
             </a:pPr>
             <a:r>
               <a:t>Done</a:t>
             </a:r>
           </a:p>
-          <a:p>
-            <a:pPr lvl="1">
-              <a:defRPr sz="1600"/>
-            </a:pPr>
-            <a:r>
-              <a:t>End-to-end Cray smoke: probe → render → concretize → build (PrgEnv-gnu + cray-mpich + ROCm)</a:t>
-            </a:r>
-          </a:p>
-          <a:p>
-            <a:pPr lvl="1">
-              <a:defRPr sz="1600"/>
+        </p:txBody>
+      </p:sp>
+      <p:sp>
+        <p:nvSpPr>
+          <p:cNvPr id="8" name="TextBox 7"/>
+          <p:cNvSpPr txBox="1"/>
+          <p:nvPr/>
+        </p:nvSpPr>
+        <p:spPr>
+          <a:xfrm>
+            <a:off x="822960" y="2377440"/>
+            <a:ext cx="365760" cy="457200"/>
+          </a:xfrm>
+          <a:prstGeom prst="rect">
+            <a:avLst/>
+          </a:prstGeom>
+          <a:noFill/>
+        </p:spPr>
+        <p:txBody>
+          <a:bodyPr wrap="square" anchor="t">
+            <a:spAutoFit/>
+          </a:bodyPr>
+          <a:lstStyle/>
+          <a:p>
+            <a:pPr algn="l">
+              <a:defRPr sz="1600" b="1">
+                <a:solidFill>
+                  <a:srgbClr val="22C55E"/>
+                </a:solidFill>
+                <a:latin typeface="Avenir Next"/>
+              </a:defRPr>
+            </a:pPr>
+            <a:r>
+              <a:t>✓</a:t>
+            </a:r>
+          </a:p>
+        </p:txBody>
+      </p:sp>
+      <p:sp>
+        <p:nvSpPr>
+          <p:cNvPr id="9" name="TextBox 8"/>
+          <p:cNvSpPr txBox="1"/>
+          <p:nvPr/>
+        </p:nvSpPr>
+        <p:spPr>
+          <a:xfrm>
+            <a:off x="1234440" y="2377440"/>
+            <a:ext cx="4526280" cy="1005840"/>
+          </a:xfrm>
+          <a:prstGeom prst="rect">
+            <a:avLst/>
+          </a:prstGeom>
+          <a:noFill/>
+        </p:spPr>
+        <p:txBody>
+          <a:bodyPr wrap="square" anchor="t">
+            <a:spAutoFit/>
+          </a:bodyPr>
+          <a:lstStyle/>
+          <a:p>
+            <a:pPr algn="l">
+              <a:defRPr sz="1300" b="0">
+                <a:solidFill>
+                  <a:srgbClr val="E2E8F0"/>
+                </a:solidFill>
+                <a:latin typeface="Avenir Next"/>
+              </a:defRPr>
+            </a:pPr>
+            <a:r>
+              <a:t>End-to-end Cray smoke: probe → render → concretize → build (PrgEnv-gnu · cray-mpich · ROCm)</a:t>
+            </a:r>
+          </a:p>
+        </p:txBody>
+      </p:sp>
+      <p:sp>
+        <p:nvSpPr>
+          <p:cNvPr id="10" name="TextBox 9"/>
+          <p:cNvSpPr txBox="1"/>
+          <p:nvPr/>
+        </p:nvSpPr>
+        <p:spPr>
+          <a:xfrm>
+            <a:off x="822960" y="3429000"/>
+            <a:ext cx="365760" cy="457200"/>
+          </a:xfrm>
+          <a:prstGeom prst="rect">
+            <a:avLst/>
+          </a:prstGeom>
+          <a:noFill/>
+        </p:spPr>
+        <p:txBody>
+          <a:bodyPr wrap="square" anchor="t">
+            <a:spAutoFit/>
+          </a:bodyPr>
+          <a:lstStyle/>
+          <a:p>
+            <a:pPr algn="l">
+              <a:defRPr sz="1600" b="1">
+                <a:solidFill>
+                  <a:srgbClr val="22C55E"/>
+                </a:solidFill>
+                <a:latin typeface="Avenir Next"/>
+              </a:defRPr>
+            </a:pPr>
+            <a:r>
+              <a:t>✓</a:t>
+            </a:r>
+          </a:p>
+        </p:txBody>
+      </p:sp>
+      <p:sp>
+        <p:nvSpPr>
+          <p:cNvPr id="11" name="TextBox 10"/>
+          <p:cNvSpPr txBox="1"/>
+          <p:nvPr/>
+        </p:nvSpPr>
+        <p:spPr>
+          <a:xfrm>
+            <a:off x="1234440" y="3429000"/>
+            <a:ext cx="4526280" cy="1005840"/>
+          </a:xfrm>
+          <a:prstGeom prst="rect">
+            <a:avLst/>
+          </a:prstGeom>
+          <a:noFill/>
+        </p:spPr>
+        <p:txBody>
+          <a:bodyPr wrap="square" anchor="t">
+            <a:spAutoFit/>
+          </a:bodyPr>
+          <a:lstStyle/>
+          <a:p>
+            <a:pPr algn="l">
+              <a:defRPr sz="1300" b="0">
+                <a:solidFill>
+                  <a:srgbClr val="E2E8F0"/>
+                </a:solidFill>
+                <a:latin typeface="Avenir Next"/>
+              </a:defRPr>
             </a:pPr>
             <a:r>
               <a:t>Second system validated the generic-Linux path and hardened the prober</a:t>
             </a:r>
           </a:p>
-          <a:p>
-            <a:pPr lvl="1">
-              <a:defRPr sz="1600"/>
-            </a:pPr>
-            <a:r>
-              <a:t>Science stack (4 lanes, two-version roster) renders clean today</a:t>
-            </a:r>
-          </a:p>
-          <a:p>
-            <a:pPr>
-              <a:defRPr sz="2000"/>
+        </p:txBody>
+      </p:sp>
+      <p:sp>
+        <p:nvSpPr>
+          <p:cNvPr id="12" name="TextBox 11"/>
+          <p:cNvSpPr txBox="1"/>
+          <p:nvPr/>
+        </p:nvSpPr>
+        <p:spPr>
+          <a:xfrm>
+            <a:off x="822960" y="4480560"/>
+            <a:ext cx="365760" cy="457200"/>
+          </a:xfrm>
+          <a:prstGeom prst="rect">
+            <a:avLst/>
+          </a:prstGeom>
+          <a:noFill/>
+        </p:spPr>
+        <p:txBody>
+          <a:bodyPr wrap="square" anchor="t">
+            <a:spAutoFit/>
+          </a:bodyPr>
+          <a:lstStyle/>
+          <a:p>
+            <a:pPr algn="l">
+              <a:defRPr sz="1600" b="1">
+                <a:solidFill>
+                  <a:srgbClr val="22C55E"/>
+                </a:solidFill>
+                <a:latin typeface="Avenir Next"/>
+              </a:defRPr>
+            </a:pPr>
+            <a:r>
+              <a:t>✓</a:t>
+            </a:r>
+          </a:p>
+        </p:txBody>
+      </p:sp>
+      <p:sp>
+        <p:nvSpPr>
+          <p:cNvPr id="13" name="TextBox 12"/>
+          <p:cNvSpPr txBox="1"/>
+          <p:nvPr/>
+        </p:nvSpPr>
+        <p:spPr>
+          <a:xfrm>
+            <a:off x="1234440" y="4480560"/>
+            <a:ext cx="4526280" cy="1005840"/>
+          </a:xfrm>
+          <a:prstGeom prst="rect">
+            <a:avLst/>
+          </a:prstGeom>
+          <a:noFill/>
+        </p:spPr>
+        <p:txBody>
+          <a:bodyPr wrap="square" anchor="t">
+            <a:spAutoFit/>
+          </a:bodyPr>
+          <a:lstStyle/>
+          <a:p>
+            <a:pPr algn="l">
+              <a:defRPr sz="1300" b="0">
+                <a:solidFill>
+                  <a:srgbClr val="E2E8F0"/>
+                </a:solidFill>
+                <a:latin typeface="Avenir Next"/>
+              </a:defRPr>
+            </a:pPr>
+            <a:r>
+              <a:t>Science stack — four lanes, two-version roster — renders clean today</a:t>
+            </a:r>
+          </a:p>
+        </p:txBody>
+      </p:sp>
+      <p:sp>
+        <p:nvSpPr>
+          <p:cNvPr id="14" name="Rounded Rectangle 13"/>
+          <p:cNvSpPr/>
+          <p:nvPr/>
+        </p:nvSpPr>
+        <p:spPr>
+          <a:xfrm>
+            <a:off x="6263640" y="1645920"/>
+            <a:ext cx="5349240" cy="4480560"/>
+          </a:xfrm>
+          <a:prstGeom prst="roundRect">
+            <a:avLst/>
+          </a:prstGeom>
+          <a:solidFill>
+            <a:srgbClr val="1E293B"/>
+          </a:solidFill>
+          <a:ln>
+            <a:noFill/>
+          </a:ln>
+          <a:effectLst/>
+        </p:spPr>
+        <p:style>
+          <a:lnRef idx="1">
+            <a:schemeClr val="accent1"/>
+          </a:lnRef>
+          <a:fillRef idx="3">
+            <a:schemeClr val="accent1"/>
+          </a:fillRef>
+          <a:effectRef idx="2">
+            <a:schemeClr val="accent1"/>
+          </a:effectRef>
+          <a:fontRef idx="minor">
+            <a:schemeClr val="lt1"/>
+          </a:fontRef>
+        </p:style>
+        <p:txBody>
+          <a:bodyPr rtlCol="0" anchor="ctr"/>
+          <a:lstStyle/>
+          <a:p>
+            <a:pPr algn="ctr"/>
+          </a:p>
+        </p:txBody>
+      </p:sp>
+      <p:sp>
+        <p:nvSpPr>
+          <p:cNvPr id="15" name="TextBox 14"/>
+          <p:cNvSpPr txBox="1"/>
+          <p:nvPr/>
+        </p:nvSpPr>
+        <p:spPr>
+          <a:xfrm>
+            <a:off x="6537960" y="1828800"/>
+            <a:ext cx="4846320" cy="457200"/>
+          </a:xfrm>
+          <a:prstGeom prst="rect">
+            <a:avLst/>
+          </a:prstGeom>
+          <a:noFill/>
+        </p:spPr>
+        <p:txBody>
+          <a:bodyPr wrap="square" anchor="t">
+            <a:spAutoFit/>
+          </a:bodyPr>
+          <a:lstStyle/>
+          <a:p>
+            <a:pPr algn="l">
+              <a:defRPr sz="1700" b="1">
+                <a:solidFill>
+                  <a:srgbClr val="F59E0B"/>
+                </a:solidFill>
+                <a:latin typeface="Avenir Next"/>
+              </a:defRPr>
             </a:pPr>
             <a:r>
               <a:t>Next</a:t>
             </a:r>
           </a:p>
-          <a:p>
-            <a:pPr lvl="1">
-              <a:defRPr sz="1600"/>
-            </a:pPr>
-            <a:r>
-              <a:t>Build out the science lanes on the Cray system; verify the module/view user flow</a:t>
-            </a:r>
-          </a:p>
-          <a:p>
-            <a:pPr lvl="1">
-              <a:defRPr sz="1600"/>
-            </a:pPr>
-            <a:r>
-              <a:t>Add the second compiler surface; then the NVIDIA system in parallel</a:t>
-            </a:r>
-          </a:p>
-          <a:p>
-            <a:pPr lvl="1">
-              <a:defRPr sz="1600"/>
+        </p:txBody>
+      </p:sp>
+      <p:sp>
+        <p:nvSpPr>
+          <p:cNvPr id="16" name="TextBox 15"/>
+          <p:cNvSpPr txBox="1"/>
+          <p:nvPr/>
+        </p:nvSpPr>
+        <p:spPr>
+          <a:xfrm>
+            <a:off x="6537960" y="2377440"/>
+            <a:ext cx="365760" cy="457200"/>
+          </a:xfrm>
+          <a:prstGeom prst="rect">
+            <a:avLst/>
+          </a:prstGeom>
+          <a:noFill/>
+        </p:spPr>
+        <p:txBody>
+          <a:bodyPr wrap="square" anchor="t">
+            <a:spAutoFit/>
+          </a:bodyPr>
+          <a:lstStyle/>
+          <a:p>
+            <a:pPr algn="l">
+              <a:defRPr sz="1600" b="1">
+                <a:solidFill>
+                  <a:srgbClr val="F59E0B"/>
+                </a:solidFill>
+                <a:latin typeface="Avenir Next"/>
+              </a:defRPr>
+            </a:pPr>
+            <a:r>
+              <a:t>→</a:t>
+            </a:r>
+          </a:p>
+        </p:txBody>
+      </p:sp>
+      <p:sp>
+        <p:nvSpPr>
+          <p:cNvPr id="17" name="TextBox 16"/>
+          <p:cNvSpPr txBox="1"/>
+          <p:nvPr/>
+        </p:nvSpPr>
+        <p:spPr>
+          <a:xfrm>
+            <a:off x="6949440" y="2377440"/>
+            <a:ext cx="4434840" cy="1005840"/>
+          </a:xfrm>
+          <a:prstGeom prst="rect">
+            <a:avLst/>
+          </a:prstGeom>
+          <a:noFill/>
+        </p:spPr>
+        <p:txBody>
+          <a:bodyPr wrap="square" anchor="t">
+            <a:spAutoFit/>
+          </a:bodyPr>
+          <a:lstStyle/>
+          <a:p>
+            <a:pPr algn="l">
+              <a:defRPr sz="1300" b="0">
+                <a:solidFill>
+                  <a:srgbClr val="E2E8F0"/>
+                </a:solidFill>
+                <a:latin typeface="Avenir Next"/>
+              </a:defRPr>
+            </a:pPr>
+            <a:r>
+              <a:t>Build the science lanes on the Cray system; verify the module/view front door</a:t>
+            </a:r>
+          </a:p>
+        </p:txBody>
+      </p:sp>
+      <p:sp>
+        <p:nvSpPr>
+          <p:cNvPr id="18" name="TextBox 17"/>
+          <p:cNvSpPr txBox="1"/>
+          <p:nvPr/>
+        </p:nvSpPr>
+        <p:spPr>
+          <a:xfrm>
+            <a:off x="6537960" y="3429000"/>
+            <a:ext cx="365760" cy="457200"/>
+          </a:xfrm>
+          <a:prstGeom prst="rect">
+            <a:avLst/>
+          </a:prstGeom>
+          <a:noFill/>
+        </p:spPr>
+        <p:txBody>
+          <a:bodyPr wrap="square" anchor="t">
+            <a:spAutoFit/>
+          </a:bodyPr>
+          <a:lstStyle/>
+          <a:p>
+            <a:pPr algn="l">
+              <a:defRPr sz="1600" b="1">
+                <a:solidFill>
+                  <a:srgbClr val="F59E0B"/>
+                </a:solidFill>
+                <a:latin typeface="Avenir Next"/>
+              </a:defRPr>
+            </a:pPr>
+            <a:r>
+              <a:t>→</a:t>
+            </a:r>
+          </a:p>
+        </p:txBody>
+      </p:sp>
+      <p:sp>
+        <p:nvSpPr>
+          <p:cNvPr id="19" name="TextBox 18"/>
+          <p:cNvSpPr txBox="1"/>
+          <p:nvPr/>
+        </p:nvSpPr>
+        <p:spPr>
+          <a:xfrm>
+            <a:off x="6949440" y="3429000"/>
+            <a:ext cx="4434840" cy="1005840"/>
+          </a:xfrm>
+          <a:prstGeom prst="rect">
+            <a:avLst/>
+          </a:prstGeom>
+          <a:noFill/>
+        </p:spPr>
+        <p:txBody>
+          <a:bodyPr wrap="square" anchor="t">
+            <a:spAutoFit/>
+          </a:bodyPr>
+          <a:lstStyle/>
+          <a:p>
+            <a:pPr algn="l">
+              <a:defRPr sz="1300" b="0">
+                <a:solidFill>
+                  <a:srgbClr val="E2E8F0"/>
+                </a:solidFill>
+                <a:latin typeface="Avenir Next"/>
+              </a:defRPr>
+            </a:pPr>
+            <a:r>
+              <a:t>Add the second compiler surface, then the NVIDIA system in parallel</a:t>
+            </a:r>
+          </a:p>
+        </p:txBody>
+      </p:sp>
+      <p:sp>
+        <p:nvSpPr>
+          <p:cNvPr id="20" name="TextBox 19"/>
+          <p:cNvSpPr txBox="1"/>
+          <p:nvPr/>
+        </p:nvSpPr>
+        <p:spPr>
+          <a:xfrm>
+            <a:off x="6537960" y="4480560"/>
+            <a:ext cx="365760" cy="457200"/>
+          </a:xfrm>
+          <a:prstGeom prst="rect">
+            <a:avLst/>
+          </a:prstGeom>
+          <a:noFill/>
+        </p:spPr>
+        <p:txBody>
+          <a:bodyPr wrap="square" anchor="t">
+            <a:spAutoFit/>
+          </a:bodyPr>
+          <a:lstStyle/>
+          <a:p>
+            <a:pPr algn="l">
+              <a:defRPr sz="1600" b="1">
+                <a:solidFill>
+                  <a:srgbClr val="F59E0B"/>
+                </a:solidFill>
+                <a:latin typeface="Avenir Next"/>
+              </a:defRPr>
+            </a:pPr>
+            <a:r>
+              <a:t>→</a:t>
+            </a:r>
+          </a:p>
+        </p:txBody>
+      </p:sp>
+      <p:sp>
+        <p:nvSpPr>
+          <p:cNvPr id="21" name="TextBox 20"/>
+          <p:cNvSpPr txBox="1"/>
+          <p:nvPr/>
+        </p:nvSpPr>
+        <p:spPr>
+          <a:xfrm>
+            <a:off x="6949440" y="4480560"/>
+            <a:ext cx="4434840" cy="1005840"/>
+          </a:xfrm>
+          <a:prstGeom prst="rect">
+            <a:avLst/>
+          </a:prstGeom>
+          <a:noFill/>
+        </p:spPr>
+        <p:txBody>
+          <a:bodyPr wrap="square" anchor="t">
+            <a:spAutoFit/>
+          </a:bodyPr>
+          <a:lstStyle/>
+          <a:p>
+            <a:pPr algn="l">
+              <a:defRPr sz="1300" b="0">
+                <a:solidFill>
+                  <a:srgbClr val="E2E8F0"/>
+                </a:solidFill>
+                <a:latin typeface="Avenir Next"/>
+              </a:defRPr>
             </a:pPr>
             <a:r>
               <a:t>Release process: build caches, lockfiles, release manifest</a:t>

--- a/presentations/cse_lanes_model.pptx
+++ b/presentations/cse_lanes_model.pptx
@@ -3110,7 +3110,7 @@
             <a:avLst/>
           </a:prstGeom>
           <a:solidFill>
-            <a:srgbClr val="0F172A"/>
+            <a:srgbClr val="FFFFFF"/>
           </a:solidFill>
           <a:ln>
             <a:noFill/>
@@ -3154,7 +3154,7 @@
             <a:avLst/>
           </a:prstGeom>
           <a:solidFill>
-            <a:srgbClr val="1E293B"/>
+            <a:srgbClr val="F1F5F9"/>
           </a:solidFill>
           <a:ln>
             <a:noFill/>
@@ -3208,7 +3208,7 @@
             <a:pPr algn="l">
               <a:defRPr sz="4600" b="1">
                 <a:solidFill>
-                  <a:srgbClr val="FFFFFF"/>
+                  <a:srgbClr val="0F172A"/>
                 </a:solidFill>
                 <a:latin typeface="Avenir Next"/>
               </a:defRPr>
@@ -3234,7 +3234,7 @@
             <a:avLst/>
           </a:prstGeom>
           <a:solidFill>
-            <a:srgbClr val="14B8A6"/>
+            <a:srgbClr val="0D9488"/>
           </a:solidFill>
           <a:ln>
             <a:noFill/>
@@ -3288,7 +3288,7 @@
             <a:pPr algn="l">
               <a:defRPr sz="2200" b="0">
                 <a:solidFill>
-                  <a:srgbClr val="E2E8F0"/>
+                  <a:srgbClr val="334155"/>
                 </a:solidFill>
                 <a:latin typeface="Avenir Next"/>
               </a:defRPr>
@@ -3301,7 +3301,7 @@
             <a:pPr algn="l">
               <a:defRPr sz="1500" b="0">
                 <a:solidFill>
-                  <a:srgbClr val="94A3B8"/>
+                  <a:srgbClr val="64748B"/>
                 </a:solidFill>
                 <a:latin typeface="Avenir Next"/>
               </a:defRPr>
@@ -3337,7 +3337,7 @@
             <a:pPr algn="l">
               <a:defRPr sz="1200" b="0">
                 <a:solidFill>
-                  <a:srgbClr val="94A3B8"/>
+                  <a:srgbClr val="64748B"/>
                 </a:solidFill>
                 <a:latin typeface="Avenir Next"/>
               </a:defRPr>
@@ -3363,7 +3363,7 @@
             <a:avLst/>
           </a:prstGeom>
           <a:solidFill>
-            <a:srgbClr val="14B8A6"/>
+            <a:srgbClr val="0D9488"/>
           </a:solidFill>
           <a:ln>
             <a:noFill/>
@@ -3407,7 +3407,7 @@
             <a:avLst/>
           </a:prstGeom>
           <a:solidFill>
-            <a:srgbClr val="F59E0B"/>
+            <a:srgbClr val="D97706"/>
           </a:solidFill>
           <a:ln>
             <a:noFill/>
@@ -3451,7 +3451,7 @@
             <a:avLst/>
           </a:prstGeom>
           <a:solidFill>
-            <a:srgbClr val="3B82F6"/>
+            <a:srgbClr val="2563EB"/>
           </a:solidFill>
           <a:ln>
             <a:noFill/>
@@ -3495,7 +3495,7 @@
             <a:avLst/>
           </a:prstGeom>
           <a:solidFill>
-            <a:srgbClr val="8B5CF6"/>
+            <a:srgbClr val="7C3AED"/>
           </a:solidFill>
           <a:ln>
             <a:noFill/>
@@ -3557,7 +3557,7 @@
             <a:avLst/>
           </a:prstGeom>
           <a:solidFill>
-            <a:srgbClr val="0F172A"/>
+            <a:srgbClr val="FFFFFF"/>
           </a:solidFill>
           <a:ln>
             <a:noFill/>
@@ -3611,7 +3611,7 @@
             <a:pPr algn="l">
               <a:defRPr sz="1300" b="1">
                 <a:solidFill>
-                  <a:srgbClr val="14B8A6"/>
+                  <a:srgbClr val="0D9488"/>
                 </a:solidFill>
                 <a:latin typeface="Avenir Next"/>
               </a:defRPr>
@@ -3647,7 +3647,7 @@
             <a:pPr algn="l">
               <a:defRPr sz="3000" b="1">
                 <a:solidFill>
-                  <a:srgbClr val="FFFFFF"/>
+                  <a:srgbClr val="0F172A"/>
                 </a:solidFill>
                 <a:latin typeface="Avenir Next"/>
               </a:defRPr>
@@ -3673,7 +3673,7 @@
             <a:avLst/>
           </a:prstGeom>
           <a:solidFill>
-            <a:srgbClr val="14B8A6"/>
+            <a:srgbClr val="0D9488"/>
           </a:solidFill>
           <a:ln>
             <a:noFill/>
@@ -3717,7 +3717,7 @@
             <a:avLst/>
           </a:prstGeom>
           <a:solidFill>
-            <a:srgbClr val="1E293B"/>
+            <a:srgbClr val="F1F5F9"/>
           </a:solidFill>
           <a:ln>
             <a:noFill/>
@@ -3771,7 +3771,7 @@
             <a:pPr algn="l">
               <a:defRPr sz="1700" b="1">
                 <a:solidFill>
-                  <a:srgbClr val="FFFFFF"/>
+                  <a:srgbClr val="0F172A"/>
                 </a:solidFill>
                 <a:latin typeface="Avenir Next"/>
               </a:defRPr>
@@ -3807,7 +3807,7 @@
             <a:pPr algn="l">
               <a:defRPr sz="1250" b="0">
                 <a:solidFill>
-                  <a:srgbClr val="94A3B8"/>
+                  <a:srgbClr val="64748B"/>
                 </a:solidFill>
                 <a:latin typeface="Avenir Next"/>
               </a:defRPr>
@@ -3833,7 +3833,7 @@
             <a:avLst/>
           </a:prstGeom>
           <a:solidFill>
-            <a:srgbClr val="2A374D"/>
+            <a:srgbClr val="E2E8F0"/>
           </a:solidFill>
           <a:ln>
             <a:noFill/>
@@ -3861,7 +3861,7 @@
             <a:pPr algn="ctr">
               <a:defRPr sz="1200" b="0">
                 <a:solidFill>
-                  <a:srgbClr val="E2E8F0"/>
+                  <a:srgbClr val="334155"/>
                 </a:solidFill>
                 <a:latin typeface="Avenir Next"/>
               </a:defRPr>
@@ -3887,7 +3887,7 @@
             <a:avLst/>
           </a:prstGeom>
           <a:solidFill>
-            <a:srgbClr val="2A374D"/>
+            <a:srgbClr val="E2E8F0"/>
           </a:solidFill>
           <a:ln>
             <a:noFill/>
@@ -3915,7 +3915,7 @@
             <a:pPr algn="ctr">
               <a:defRPr sz="1200" b="0">
                 <a:solidFill>
-                  <a:srgbClr val="E2E8F0"/>
+                  <a:srgbClr val="334155"/>
                 </a:solidFill>
                 <a:latin typeface="Avenir Next"/>
               </a:defRPr>
@@ -3941,7 +3941,7 @@
             <a:avLst/>
           </a:prstGeom>
           <a:solidFill>
-            <a:srgbClr val="2A374D"/>
+            <a:srgbClr val="E2E8F0"/>
           </a:solidFill>
           <a:ln>
             <a:noFill/>
@@ -3969,7 +3969,7 @@
             <a:pPr algn="ctr">
               <a:defRPr sz="1200" b="0">
                 <a:solidFill>
-                  <a:srgbClr val="E2E8F0"/>
+                  <a:srgbClr val="334155"/>
                 </a:solidFill>
                 <a:latin typeface="Avenir Next"/>
               </a:defRPr>
@@ -3995,7 +3995,7 @@
             <a:avLst/>
           </a:prstGeom>
           <a:solidFill>
-            <a:srgbClr val="2A374D"/>
+            <a:srgbClr val="E2E8F0"/>
           </a:solidFill>
           <a:ln>
             <a:noFill/>
@@ -4023,7 +4023,7 @@
             <a:pPr algn="ctr">
               <a:defRPr sz="1200" b="0">
                 <a:solidFill>
-                  <a:srgbClr val="E2E8F0"/>
+                  <a:srgbClr val="334155"/>
                 </a:solidFill>
                 <a:latin typeface="Avenir Next"/>
               </a:defRPr>
@@ -4049,7 +4049,7 @@
             <a:avLst/>
           </a:prstGeom>
           <a:solidFill>
-            <a:srgbClr val="2A374D"/>
+            <a:srgbClr val="E2E8F0"/>
           </a:solidFill>
           <a:ln>
             <a:noFill/>
@@ -4077,7 +4077,7 @@
             <a:pPr algn="ctr">
               <a:defRPr sz="1200" b="0">
                 <a:solidFill>
-                  <a:srgbClr val="E2E8F0"/>
+                  <a:srgbClr val="334155"/>
                 </a:solidFill>
                 <a:latin typeface="Avenir Next"/>
               </a:defRPr>
@@ -4103,7 +4103,7 @@
             <a:avLst/>
           </a:prstGeom>
           <a:solidFill>
-            <a:srgbClr val="2A374D"/>
+            <a:srgbClr val="E2E8F0"/>
           </a:solidFill>
           <a:ln>
             <a:noFill/>
@@ -4131,7 +4131,7 @@
             <a:pPr algn="ctr">
               <a:defRPr sz="1200" b="0">
                 <a:solidFill>
-                  <a:srgbClr val="E2E8F0"/>
+                  <a:srgbClr val="334155"/>
                 </a:solidFill>
                 <a:latin typeface="Avenir Next"/>
               </a:defRPr>
@@ -4157,7 +4157,7 @@
             <a:avLst/>
           </a:prstGeom>
           <a:solidFill>
-            <a:srgbClr val="2A374D"/>
+            <a:srgbClr val="E2E8F0"/>
           </a:solidFill>
           <a:ln>
             <a:noFill/>
@@ -4185,7 +4185,7 @@
             <a:pPr algn="ctr">
               <a:defRPr sz="1200" b="0">
                 <a:solidFill>
-                  <a:srgbClr val="E2E8F0"/>
+                  <a:srgbClr val="334155"/>
                 </a:solidFill>
                 <a:latin typeface="Avenir Next"/>
               </a:defRPr>
@@ -4211,7 +4211,7 @@
             <a:avLst/>
           </a:prstGeom>
           <a:solidFill>
-            <a:srgbClr val="2A374D"/>
+            <a:srgbClr val="E2E8F0"/>
           </a:solidFill>
           <a:ln>
             <a:noFill/>
@@ -4239,7 +4239,7 @@
             <a:pPr algn="ctr">
               <a:defRPr sz="1200" b="0">
                 <a:solidFill>
-                  <a:srgbClr val="E2E8F0"/>
+                  <a:srgbClr val="334155"/>
                 </a:solidFill>
                 <a:latin typeface="Avenir Next"/>
               </a:defRPr>
@@ -4265,7 +4265,7 @@
             <a:avLst/>
           </a:prstGeom>
           <a:solidFill>
-            <a:srgbClr val="2A374D"/>
+            <a:srgbClr val="E2E8F0"/>
           </a:solidFill>
           <a:ln>
             <a:noFill/>
@@ -4293,7 +4293,7 @@
             <a:pPr algn="ctr">
               <a:defRPr sz="1200" b="0">
                 <a:solidFill>
-                  <a:srgbClr val="E2E8F0"/>
+                  <a:srgbClr val="334155"/>
                 </a:solidFill>
                 <a:latin typeface="Avenir Next"/>
               </a:defRPr>
@@ -4319,7 +4319,7 @@
             <a:avLst/>
           </a:prstGeom>
           <a:solidFill>
-            <a:srgbClr val="2A374D"/>
+            <a:srgbClr val="E2E8F0"/>
           </a:solidFill>
           <a:ln>
             <a:noFill/>
@@ -4347,7 +4347,7 @@
             <a:pPr algn="ctr">
               <a:defRPr sz="1200" b="0">
                 <a:solidFill>
-                  <a:srgbClr val="E2E8F0"/>
+                  <a:srgbClr val="334155"/>
                 </a:solidFill>
                 <a:latin typeface="Avenir Next"/>
               </a:defRPr>
@@ -4373,7 +4373,7 @@
             <a:avLst/>
           </a:prstGeom>
           <a:solidFill>
-            <a:srgbClr val="2A374D"/>
+            <a:srgbClr val="E2E8F0"/>
           </a:solidFill>
           <a:ln>
             <a:noFill/>
@@ -4401,7 +4401,7 @@
             <a:pPr algn="ctr">
               <a:defRPr sz="1200" b="0">
                 <a:solidFill>
-                  <a:srgbClr val="E2E8F0"/>
+                  <a:srgbClr val="334155"/>
                 </a:solidFill>
                 <a:latin typeface="Avenir Next"/>
               </a:defRPr>
@@ -4427,7 +4427,7 @@
             <a:avLst/>
           </a:prstGeom>
           <a:solidFill>
-            <a:srgbClr val="2A374D"/>
+            <a:srgbClr val="E2E8F0"/>
           </a:solidFill>
           <a:ln>
             <a:noFill/>
@@ -4455,7 +4455,7 @@
             <a:pPr algn="ctr">
               <a:defRPr sz="1200" b="0">
                 <a:solidFill>
-                  <a:srgbClr val="E2E8F0"/>
+                  <a:srgbClr val="334155"/>
                 </a:solidFill>
                 <a:latin typeface="Avenir Next"/>
               </a:defRPr>
@@ -4491,7 +4491,7 @@
             <a:pPr algn="l">
               <a:defRPr sz="1350" b="1">
                 <a:solidFill>
-                  <a:srgbClr val="F59E0B"/>
+                  <a:srgbClr val="D97706"/>
                 </a:solidFill>
                 <a:latin typeface="Avenir Next"/>
               </a:defRPr>
@@ -4504,7 +4504,7 @@
             <a:pPr algn="l">
               <a:defRPr sz="1250" b="0">
                 <a:solidFill>
-                  <a:srgbClr val="94A3B8"/>
+                  <a:srgbClr val="64748B"/>
                 </a:solidFill>
                 <a:latin typeface="Avenir Next"/>
               </a:defRPr>
@@ -4517,7 +4517,7 @@
             <a:pPr algn="l">
               <a:defRPr sz="1250" b="0">
                 <a:solidFill>
-                  <a:srgbClr val="94A3B8"/>
+                  <a:srgbClr val="64748B"/>
                 </a:solidFill>
                 <a:latin typeface="Avenir Next"/>
               </a:defRPr>
@@ -4543,7 +4543,7 @@
             <a:avLst/>
           </a:prstGeom>
           <a:solidFill>
-            <a:srgbClr val="1E293B"/>
+            <a:srgbClr val="F1F5F9"/>
           </a:solidFill>
           <a:ln>
             <a:noFill/>
@@ -4597,7 +4597,7 @@
             <a:pPr algn="l">
               <a:defRPr sz="1700" b="1">
                 <a:solidFill>
-                  <a:srgbClr val="FFFFFF"/>
+                  <a:srgbClr val="0F172A"/>
                 </a:solidFill>
                 <a:latin typeface="Avenir Next"/>
               </a:defRPr>
@@ -4623,10 +4623,12 @@
             <a:avLst/>
           </a:prstGeom>
           <a:solidFill>
-            <a:srgbClr val="2A374D"/>
-          </a:solidFill>
-          <a:ln>
-            <a:noFill/>
+            <a:srgbClr val="FFFFFF"/>
+          </a:solidFill>
+          <a:ln w="15875">
+            <a:solidFill>
+              <a:srgbClr val="E2E8F0"/>
+            </a:solidFill>
           </a:ln>
           <a:effectLst/>
         </p:spPr>
@@ -4651,7 +4653,7 @@
             <a:pPr algn="ctr">
               <a:defRPr sz="1300" b="1">
                 <a:solidFill>
-                  <a:srgbClr val="E2E8F0"/>
+                  <a:srgbClr val="0F172A"/>
                 </a:solidFill>
                 <a:latin typeface="Avenir Next"/>
               </a:defRPr>
@@ -4676,9 +4678,9 @@
           <a:prstGeom prst="line">
             <a:avLst/>
           </a:prstGeom>
-          <a:ln w="31750">
+          <a:ln w="28575">
             <a:solidFill>
-              <a:srgbClr val="94A3B8"/>
+              <a:srgbClr val="0D9488"/>
             </a:solidFill>
             <a:tailEnd type="triangle" w="med" len="med"/>
           </a:ln>
@@ -4714,7 +4716,7 @@
             <a:avLst/>
           </a:prstGeom>
           <a:solidFill>
-            <a:srgbClr val="14B8A6"/>
+            <a:srgbClr val="0D9488"/>
           </a:solidFill>
           <a:ln>
             <a:noFill/>
@@ -4768,7 +4770,7 @@
             <a:avLst/>
           </a:prstGeom>
           <a:solidFill>
-            <a:srgbClr val="64748B"/>
+            <a:srgbClr val="475569"/>
           </a:solidFill>
           <a:ln>
             <a:noFill/>
@@ -4821,9 +4823,9 @@
           <a:prstGeom prst="line">
             <a:avLst/>
           </a:prstGeom>
-          <a:ln w="31750">
+          <a:ln w="28575">
             <a:solidFill>
-              <a:srgbClr val="94A3B8"/>
+              <a:srgbClr val="0D9488"/>
             </a:solidFill>
             <a:tailEnd type="triangle" w="med" len="med"/>
           </a:ln>
@@ -4869,7 +4871,7 @@
             <a:pPr algn="ctr">
               <a:defRPr sz="1150" b="1">
                 <a:solidFill>
-                  <a:srgbClr val="94A3B8"/>
+                  <a:srgbClr val="64748B"/>
                 </a:solidFill>
                 <a:latin typeface="Avenir Next"/>
               </a:defRPr>
@@ -4895,7 +4897,7 @@
             <a:avLst/>
           </a:prstGeom>
           <a:solidFill>
-            <a:srgbClr val="F59E0B"/>
+            <a:srgbClr val="D97706"/>
           </a:solidFill>
           <a:ln>
             <a:noFill/>
@@ -4949,7 +4951,7 @@
             <a:avLst/>
           </a:prstGeom>
           <a:solidFill>
-            <a:srgbClr val="3B82F6"/>
+            <a:srgbClr val="2563EB"/>
           </a:solidFill>
           <a:ln>
             <a:noFill/>
@@ -5003,7 +5005,7 @@
             <a:avLst/>
           </a:prstGeom>
           <a:solidFill>
-            <a:srgbClr val="8B5CF6"/>
+            <a:srgbClr val="7C3AED"/>
           </a:solidFill>
           <a:ln>
             <a:noFill/>
@@ -5067,7 +5069,7 @@
             <a:pPr algn="l">
               <a:defRPr sz="1350" b="1">
                 <a:solidFill>
-                  <a:srgbClr val="14B8A6"/>
+                  <a:srgbClr val="0D9488"/>
                 </a:solidFill>
                 <a:latin typeface="Avenir Next"/>
               </a:defRPr>
@@ -5080,7 +5082,7 @@
             <a:pPr algn="l">
               <a:defRPr sz="1250" b="0">
                 <a:solidFill>
-                  <a:srgbClr val="94A3B8"/>
+                  <a:srgbClr val="64748B"/>
                 </a:solidFill>
                 <a:latin typeface="Avenir Next"/>
               </a:defRPr>
@@ -5093,7 +5095,7 @@
             <a:pPr algn="l">
               <a:defRPr sz="1250" b="0">
                 <a:solidFill>
-                  <a:srgbClr val="94A3B8"/>
+                  <a:srgbClr val="64748B"/>
                 </a:solidFill>
                 <a:latin typeface="Avenir Next"/>
               </a:defRPr>
@@ -5137,7 +5139,7 @@
             <a:avLst/>
           </a:prstGeom>
           <a:solidFill>
-            <a:srgbClr val="0F172A"/>
+            <a:srgbClr val="FFFFFF"/>
           </a:solidFill>
           <a:ln>
             <a:noFill/>
@@ -5191,7 +5193,7 @@
             <a:pPr algn="l">
               <a:defRPr sz="1300" b="1">
                 <a:solidFill>
-                  <a:srgbClr val="14B8A6"/>
+                  <a:srgbClr val="0D9488"/>
                 </a:solidFill>
                 <a:latin typeface="Avenir Next"/>
               </a:defRPr>
@@ -5227,7 +5229,7 @@
             <a:pPr algn="l">
               <a:defRPr sz="3000" b="1">
                 <a:solidFill>
-                  <a:srgbClr val="FFFFFF"/>
+                  <a:srgbClr val="0F172A"/>
                 </a:solidFill>
                 <a:latin typeface="Avenir Next"/>
               </a:defRPr>
@@ -5253,7 +5255,7 @@
             <a:avLst/>
           </a:prstGeom>
           <a:solidFill>
-            <a:srgbClr val="14B8A6"/>
+            <a:srgbClr val="0D9488"/>
           </a:solidFill>
           <a:ln>
             <a:noFill/>
@@ -5291,13 +5293,13 @@
         <p:spPr>
           <a:xfrm>
             <a:off x="548640" y="1600200"/>
-            <a:ext cx="3611880" cy="3977639"/>
+            <a:ext cx="3611880" cy="3566160"/>
           </a:xfrm>
           <a:prstGeom prst="roundRect">
             <a:avLst/>
           </a:prstGeom>
           <a:solidFill>
-            <a:srgbClr val="1E293B"/>
+            <a:srgbClr val="F1F5F9"/>
           </a:solidFill>
           <a:ln>
             <a:noFill/>
@@ -5341,7 +5343,7 @@
             <a:avLst/>
           </a:prstGeom>
           <a:solidFill>
-            <a:srgbClr val="3B82F6"/>
+            <a:srgbClr val="2563EB"/>
           </a:solidFill>
           <a:ln>
             <a:noFill/>
@@ -5395,7 +5397,7 @@
             <a:pPr algn="l">
               <a:defRPr sz="1450" b="1">
                 <a:solidFill>
-                  <a:srgbClr val="FFFFFF"/>
+                  <a:srgbClr val="0F172A"/>
                 </a:solidFill>
                 <a:latin typeface="Avenir Next"/>
               </a:defRPr>
@@ -5431,7 +5433,7 @@
             <a:pPr algn="l">
               <a:defRPr sz="1600" b="1">
                 <a:solidFill>
-                  <a:srgbClr val="3B82F6"/>
+                  <a:srgbClr val="2563EB"/>
                 </a:solidFill>
                 <a:latin typeface="Avenir Next"/>
               </a:defRPr>
@@ -5450,8 +5452,8 @@
         </p:nvSpPr>
         <p:spPr>
           <a:xfrm>
-            <a:off x="777240" y="3200400"/>
-            <a:ext cx="3200400" cy="2194560"/>
+            <a:off x="777240" y="3246120"/>
+            <a:ext cx="3200400" cy="1828800"/>
           </a:xfrm>
           <a:prstGeom prst="rect">
             <a:avLst/>
@@ -5467,7 +5469,7 @@
             <a:pPr algn="l">
               <a:defRPr sz="1250" b="0">
                 <a:solidFill>
-                  <a:srgbClr val="E2E8F0"/>
+                  <a:srgbClr val="334155"/>
                 </a:solidFill>
                 <a:latin typeface="Avenir Next"/>
               </a:defRPr>
@@ -5480,7 +5482,7 @@
             <a:pPr algn="l">
               <a:defRPr sz="1250" b="0">
                 <a:solidFill>
-                  <a:srgbClr val="E2E8F0"/>
+                  <a:srgbClr val="334155"/>
                 </a:solidFill>
                 <a:latin typeface="Avenir Next"/>
               </a:defRPr>
@@ -5493,7 +5495,7 @@
             <a:pPr algn="l">
               <a:defRPr sz="1250" b="0">
                 <a:solidFill>
-                  <a:srgbClr val="E2E8F0"/>
+                  <a:srgbClr val="334155"/>
                 </a:solidFill>
                 <a:latin typeface="Avenir Next"/>
               </a:defRPr>
@@ -5513,13 +5515,13 @@
         <p:spPr>
           <a:xfrm>
             <a:off x="4370831" y="1600200"/>
-            <a:ext cx="3611880" cy="3977639"/>
+            <a:ext cx="3611880" cy="3566160"/>
           </a:xfrm>
           <a:prstGeom prst="roundRect">
             <a:avLst/>
           </a:prstGeom>
           <a:solidFill>
-            <a:srgbClr val="1E293B"/>
+            <a:srgbClr val="F1F5F9"/>
           </a:solidFill>
           <a:ln>
             <a:noFill/>
@@ -5563,7 +5565,7 @@
             <a:avLst/>
           </a:prstGeom>
           <a:solidFill>
-            <a:srgbClr val="8B5CF6"/>
+            <a:srgbClr val="7C3AED"/>
           </a:solidFill>
           <a:ln>
             <a:noFill/>
@@ -5617,7 +5619,7 @@
             <a:pPr algn="l">
               <a:defRPr sz="1450" b="1">
                 <a:solidFill>
-                  <a:srgbClr val="FFFFFF"/>
+                  <a:srgbClr val="0F172A"/>
                 </a:solidFill>
                 <a:latin typeface="Avenir Next"/>
               </a:defRPr>
@@ -5653,7 +5655,7 @@
             <a:pPr algn="l">
               <a:defRPr sz="1600" b="1">
                 <a:solidFill>
-                  <a:srgbClr val="8B5CF6"/>
+                  <a:srgbClr val="7C3AED"/>
                 </a:solidFill>
                 <a:latin typeface="Avenir Next"/>
               </a:defRPr>
@@ -5672,8 +5674,8 @@
         </p:nvSpPr>
         <p:spPr>
           <a:xfrm>
-            <a:off x="4599431" y="3200400"/>
-            <a:ext cx="3200400" cy="2194560"/>
+            <a:off x="4599431" y="3246120"/>
+            <a:ext cx="3200400" cy="1828800"/>
           </a:xfrm>
           <a:prstGeom prst="rect">
             <a:avLst/>
@@ -5689,7 +5691,7 @@
             <a:pPr algn="l">
               <a:defRPr sz="1250" b="0">
                 <a:solidFill>
-                  <a:srgbClr val="E2E8F0"/>
+                  <a:srgbClr val="334155"/>
                 </a:solidFill>
                 <a:latin typeface="Avenir Next"/>
               </a:defRPr>
@@ -5702,7 +5704,7 @@
             <a:pPr algn="l">
               <a:defRPr sz="1250" b="0">
                 <a:solidFill>
-                  <a:srgbClr val="E2E8F0"/>
+                  <a:srgbClr val="334155"/>
                 </a:solidFill>
                 <a:latin typeface="Avenir Next"/>
               </a:defRPr>
@@ -5715,7 +5717,7 @@
             <a:pPr algn="l">
               <a:defRPr sz="1250" b="0">
                 <a:solidFill>
-                  <a:srgbClr val="E2E8F0"/>
+                  <a:srgbClr val="334155"/>
                 </a:solidFill>
                 <a:latin typeface="Avenir Next"/>
               </a:defRPr>
@@ -5735,13 +5737,13 @@
         <p:spPr>
           <a:xfrm>
             <a:off x="8193023" y="1600200"/>
-            <a:ext cx="3611880" cy="3977639"/>
+            <a:ext cx="3611880" cy="3566160"/>
           </a:xfrm>
           <a:prstGeom prst="roundRect">
             <a:avLst/>
           </a:prstGeom>
           <a:solidFill>
-            <a:srgbClr val="1E293B"/>
+            <a:srgbClr val="F1F5F9"/>
           </a:solidFill>
           <a:ln>
             <a:noFill/>
@@ -5785,7 +5787,7 @@
             <a:avLst/>
           </a:prstGeom>
           <a:solidFill>
-            <a:srgbClr val="14B8A6"/>
+            <a:srgbClr val="0D9488"/>
           </a:solidFill>
           <a:ln>
             <a:noFill/>
@@ -5839,7 +5841,7 @@
             <a:pPr algn="l">
               <a:defRPr sz="1450" b="1">
                 <a:solidFill>
-                  <a:srgbClr val="FFFFFF"/>
+                  <a:srgbClr val="0F172A"/>
                 </a:solidFill>
                 <a:latin typeface="Avenir Next"/>
               </a:defRPr>
@@ -5875,7 +5877,7 @@
             <a:pPr algn="l">
               <a:defRPr sz="1600" b="1">
                 <a:solidFill>
-                  <a:srgbClr val="14B8A6"/>
+                  <a:srgbClr val="0D9488"/>
                 </a:solidFill>
                 <a:latin typeface="Avenir Next"/>
               </a:defRPr>
@@ -5894,8 +5896,8 @@
         </p:nvSpPr>
         <p:spPr>
           <a:xfrm>
-            <a:off x="8421624" y="3200400"/>
-            <a:ext cx="3200400" cy="2194560"/>
+            <a:off x="8421624" y="3246120"/>
+            <a:ext cx="3200400" cy="1828800"/>
           </a:xfrm>
           <a:prstGeom prst="rect">
             <a:avLst/>
@@ -5911,7 +5913,7 @@
             <a:pPr algn="l">
               <a:defRPr sz="1250" b="0">
                 <a:solidFill>
-                  <a:srgbClr val="E2E8F0"/>
+                  <a:srgbClr val="334155"/>
                 </a:solidFill>
                 <a:latin typeface="Avenir Next"/>
               </a:defRPr>
@@ -5924,7 +5926,7 @@
             <a:pPr algn="l">
               <a:defRPr sz="1250" b="0">
                 <a:solidFill>
-                  <a:srgbClr val="E2E8F0"/>
+                  <a:srgbClr val="334155"/>
                 </a:solidFill>
                 <a:latin typeface="Avenir Next"/>
               </a:defRPr>
@@ -5937,7 +5939,7 @@
             <a:pPr algn="l">
               <a:defRPr sz="1250" b="0">
                 <a:solidFill>
-                  <a:srgbClr val="E2E8F0"/>
+                  <a:srgbClr val="334155"/>
                 </a:solidFill>
                 <a:latin typeface="Avenir Next"/>
               </a:defRPr>
@@ -5956,14 +5958,14 @@
         </p:nvSpPr>
         <p:spPr>
           <a:xfrm>
-            <a:off x="548640" y="5806440"/>
+            <a:off x="548640" y="5486400"/>
             <a:ext cx="11091672" cy="566928"/>
           </a:xfrm>
           <a:prstGeom prst="roundRect">
             <a:avLst/>
           </a:prstGeom>
           <a:solidFill>
-            <a:srgbClr val="2A374D"/>
+            <a:srgbClr val="E2E8F0"/>
           </a:solidFill>
           <a:ln>
             <a:noFill/>
@@ -5991,7 +5993,7 @@
             <a:pPr algn="ctr">
               <a:defRPr sz="1400" b="1">
                 <a:solidFill>
-                  <a:srgbClr val="FFFFFF"/>
+                  <a:srgbClr val="0F172A"/>
                 </a:solidFill>
                 <a:latin typeface="Avenir Next"/>
               </a:defRPr>
@@ -6035,7 +6037,7 @@
             <a:avLst/>
           </a:prstGeom>
           <a:solidFill>
-            <a:srgbClr val="0F172A"/>
+            <a:srgbClr val="FFFFFF"/>
           </a:solidFill>
           <a:ln>
             <a:noFill/>
@@ -6089,7 +6091,7 @@
             <a:pPr algn="l">
               <a:defRPr sz="1300" b="1">
                 <a:solidFill>
-                  <a:srgbClr val="14B8A6"/>
+                  <a:srgbClr val="0D9488"/>
                 </a:solidFill>
                 <a:latin typeface="Avenir Next"/>
               </a:defRPr>
@@ -6125,7 +6127,7 @@
             <a:pPr algn="l">
               <a:defRPr sz="3000" b="1">
                 <a:solidFill>
-                  <a:srgbClr val="FFFFFF"/>
+                  <a:srgbClr val="0F172A"/>
                 </a:solidFill>
                 <a:latin typeface="Avenir Next"/>
               </a:defRPr>
@@ -6151,7 +6153,7 @@
             <a:avLst/>
           </a:prstGeom>
           <a:solidFill>
-            <a:srgbClr val="14B8A6"/>
+            <a:srgbClr val="0D9488"/>
           </a:solidFill>
           <a:ln>
             <a:noFill/>
@@ -6195,11 +6197,11 @@
             <a:avLst/>
           </a:prstGeom>
           <a:solidFill>
-            <a:srgbClr val="1E293B"/>
-          </a:solidFill>
-          <a:ln w="19050">
+            <a:srgbClr val="F1F5F9"/>
+          </a:solidFill>
+          <a:ln w="15875">
             <a:solidFill>
-              <a:srgbClr val="14B8A6"/>
+              <a:srgbClr val="E2E8F0"/>
             </a:solidFill>
           </a:ln>
           <a:effectLst/>
@@ -6225,7 +6227,7 @@
             <a:pPr algn="ctr">
               <a:defRPr sz="1500" b="1">
                 <a:solidFill>
-                  <a:srgbClr val="FFFFFF"/>
+                  <a:srgbClr val="0F172A"/>
                 </a:solidFill>
                 <a:latin typeface="Avenir Next"/>
               </a:defRPr>
@@ -6238,7 +6240,7 @@
             <a:pPr algn="ctr">
               <a:defRPr sz="1100" b="0">
                 <a:solidFill>
-                  <a:srgbClr val="94A3B8"/>
+                  <a:srgbClr val="64748B"/>
                 </a:solidFill>
                 <a:latin typeface="Avenir Next"/>
               </a:defRPr>
@@ -6251,7 +6253,7 @@
             <a:pPr algn="ctr">
               <a:defRPr sz="1100" b="0">
                 <a:solidFill>
-                  <a:srgbClr val="94A3B8"/>
+                  <a:srgbClr val="64748B"/>
                 </a:solidFill>
                 <a:latin typeface="Avenir Next"/>
               </a:defRPr>
@@ -6276,9 +6278,9 @@
           <a:prstGeom prst="line">
             <a:avLst/>
           </a:prstGeom>
-          <a:ln w="31750">
+          <a:ln w="28575">
             <a:solidFill>
-              <a:srgbClr val="14B8A6"/>
+              <a:srgbClr val="0D9488"/>
             </a:solidFill>
             <a:tailEnd type="triangle" w="med" len="med"/>
           </a:ln>
@@ -6314,11 +6316,11 @@
             <a:avLst/>
           </a:prstGeom>
           <a:solidFill>
-            <a:srgbClr val="1E293B"/>
-          </a:solidFill>
-          <a:ln w="19050">
+            <a:srgbClr val="F1F5F9"/>
+          </a:solidFill>
+          <a:ln w="15875">
             <a:solidFill>
-              <a:srgbClr val="14B8A6"/>
+              <a:srgbClr val="E2E8F0"/>
             </a:solidFill>
           </a:ln>
           <a:effectLst/>
@@ -6344,7 +6346,7 @@
             <a:pPr algn="ctr">
               <a:defRPr sz="1500" b="1">
                 <a:solidFill>
-                  <a:srgbClr val="FFFFFF"/>
+                  <a:srgbClr val="0F172A"/>
                 </a:solidFill>
                 <a:latin typeface="Avenir Next"/>
               </a:defRPr>
@@ -6357,7 +6359,7 @@
             <a:pPr algn="ctr">
               <a:defRPr sz="1100" b="0">
                 <a:solidFill>
-                  <a:srgbClr val="94A3B8"/>
+                  <a:srgbClr val="64748B"/>
                 </a:solidFill>
                 <a:latin typeface="Avenir Next"/>
               </a:defRPr>
@@ -6370,7 +6372,7 @@
             <a:pPr algn="ctr">
               <a:defRPr sz="1100" b="0">
                 <a:solidFill>
-                  <a:srgbClr val="94A3B8"/>
+                  <a:srgbClr val="64748B"/>
                 </a:solidFill>
                 <a:latin typeface="Avenir Next"/>
               </a:defRPr>
@@ -6395,9 +6397,9 @@
           <a:prstGeom prst="line">
             <a:avLst/>
           </a:prstGeom>
-          <a:ln w="31750">
+          <a:ln w="28575">
             <a:solidFill>
-              <a:srgbClr val="14B8A6"/>
+              <a:srgbClr val="0D9488"/>
             </a:solidFill>
             <a:tailEnd type="triangle" w="med" len="med"/>
           </a:ln>
@@ -6433,11 +6435,11 @@
             <a:avLst/>
           </a:prstGeom>
           <a:solidFill>
-            <a:srgbClr val="1E293B"/>
-          </a:solidFill>
-          <a:ln w="19050">
+            <a:srgbClr val="F1F5F9"/>
+          </a:solidFill>
+          <a:ln w="15875">
             <a:solidFill>
-              <a:srgbClr val="14B8A6"/>
+              <a:srgbClr val="E2E8F0"/>
             </a:solidFill>
           </a:ln>
           <a:effectLst/>
@@ -6463,7 +6465,7 @@
             <a:pPr algn="ctr">
               <a:defRPr sz="1500" b="1">
                 <a:solidFill>
-                  <a:srgbClr val="FFFFFF"/>
+                  <a:srgbClr val="0F172A"/>
                 </a:solidFill>
                 <a:latin typeface="Avenir Next"/>
               </a:defRPr>
@@ -6476,7 +6478,7 @@
             <a:pPr algn="ctr">
               <a:defRPr sz="1100" b="0">
                 <a:solidFill>
-                  <a:srgbClr val="94A3B8"/>
+                  <a:srgbClr val="64748B"/>
                 </a:solidFill>
                 <a:latin typeface="Avenir Next"/>
               </a:defRPr>
@@ -6489,7 +6491,7 @@
             <a:pPr algn="ctr">
               <a:defRPr sz="1100" b="0">
                 <a:solidFill>
-                  <a:srgbClr val="94A3B8"/>
+                  <a:srgbClr val="64748B"/>
                 </a:solidFill>
                 <a:latin typeface="Avenir Next"/>
               </a:defRPr>
@@ -6514,9 +6516,9 @@
           <a:prstGeom prst="line">
             <a:avLst/>
           </a:prstGeom>
-          <a:ln w="31750">
+          <a:ln w="28575">
             <a:solidFill>
-              <a:srgbClr val="14B8A6"/>
+              <a:srgbClr val="0D9488"/>
             </a:solidFill>
             <a:tailEnd type="triangle" w="med" len="med"/>
           </a:ln>
@@ -6552,11 +6554,11 @@
             <a:avLst/>
           </a:prstGeom>
           <a:solidFill>
-            <a:srgbClr val="1E293B"/>
-          </a:solidFill>
-          <a:ln w="19050">
+            <a:srgbClr val="F1F5F9"/>
+          </a:solidFill>
+          <a:ln w="15875">
             <a:solidFill>
-              <a:srgbClr val="14B8A6"/>
+              <a:srgbClr val="E2E8F0"/>
             </a:solidFill>
           </a:ln>
           <a:effectLst/>
@@ -6582,7 +6584,7 @@
             <a:pPr algn="ctr">
               <a:defRPr sz="1500" b="1">
                 <a:solidFill>
-                  <a:srgbClr val="FFFFFF"/>
+                  <a:srgbClr val="0F172A"/>
                 </a:solidFill>
                 <a:latin typeface="Avenir Next"/>
               </a:defRPr>
@@ -6595,7 +6597,7 @@
             <a:pPr algn="ctr">
               <a:defRPr sz="1100" b="0">
                 <a:solidFill>
-                  <a:srgbClr val="94A3B8"/>
+                  <a:srgbClr val="64748B"/>
                 </a:solidFill>
                 <a:latin typeface="Avenir Next"/>
               </a:defRPr>
@@ -6608,7 +6610,7 @@
             <a:pPr algn="ctr">
               <a:defRPr sz="1100" b="0">
                 <a:solidFill>
-                  <a:srgbClr val="94A3B8"/>
+                  <a:srgbClr val="64748B"/>
                 </a:solidFill>
                 <a:latin typeface="Avenir Next"/>
               </a:defRPr>
@@ -6633,9 +6635,9 @@
           <a:prstGeom prst="line">
             <a:avLst/>
           </a:prstGeom>
-          <a:ln w="31750">
+          <a:ln w="28575">
             <a:solidFill>
-              <a:srgbClr val="14B8A6"/>
+              <a:srgbClr val="0D9488"/>
             </a:solidFill>
             <a:tailEnd type="triangle" w="med" len="med"/>
           </a:ln>
@@ -6671,11 +6673,11 @@
             <a:avLst/>
           </a:prstGeom>
           <a:solidFill>
-            <a:srgbClr val="1E293B"/>
-          </a:solidFill>
-          <a:ln w="19050">
+            <a:srgbClr val="F1F5F9"/>
+          </a:solidFill>
+          <a:ln w="15875">
             <a:solidFill>
-              <a:srgbClr val="14B8A6"/>
+              <a:srgbClr val="E2E8F0"/>
             </a:solidFill>
           </a:ln>
           <a:effectLst/>
@@ -6701,7 +6703,7 @@
             <a:pPr algn="ctr">
               <a:defRPr sz="1500" b="1">
                 <a:solidFill>
-                  <a:srgbClr val="FFFFFF"/>
+                  <a:srgbClr val="0F172A"/>
                 </a:solidFill>
                 <a:latin typeface="Avenir Next"/>
               </a:defRPr>
@@ -6714,7 +6716,7 @@
             <a:pPr algn="ctr">
               <a:defRPr sz="1100" b="0">
                 <a:solidFill>
-                  <a:srgbClr val="94A3B8"/>
+                  <a:srgbClr val="64748B"/>
                 </a:solidFill>
                 <a:latin typeface="Avenir Next"/>
               </a:defRPr>
@@ -6727,7 +6729,7 @@
             <a:pPr algn="ctr">
               <a:defRPr sz="1100" b="0">
                 <a:solidFill>
-                  <a:srgbClr val="94A3B8"/>
+                  <a:srgbClr val="64748B"/>
                 </a:solidFill>
                 <a:latin typeface="Avenir Next"/>
               </a:defRPr>
@@ -6753,10 +6755,12 @@
             <a:avLst/>
           </a:prstGeom>
           <a:solidFill>
-            <a:srgbClr val="2A374D"/>
-          </a:solidFill>
-          <a:ln>
-            <a:noFill/>
+            <a:srgbClr val="FFFFFF"/>
+          </a:solidFill>
+          <a:ln w="15875">
+            <a:solidFill>
+              <a:srgbClr val="0D9488"/>
+            </a:solidFill>
           </a:ln>
           <a:effectLst/>
         </p:spPr>
@@ -6781,7 +6785,7 @@
             <a:pPr algn="ctr">
               <a:defRPr sz="1450" b="1">
                 <a:solidFill>
-                  <a:srgbClr val="FFFFFF"/>
+                  <a:srgbClr val="0F172A"/>
                 </a:solidFill>
                 <a:latin typeface="Avenir Next"/>
               </a:defRPr>
@@ -6794,7 +6798,7 @@
             <a:pPr algn="ctr">
               <a:defRPr sz="1150" b="0">
                 <a:solidFill>
-                  <a:srgbClr val="94A3B8"/>
+                  <a:srgbClr val="64748B"/>
                 </a:solidFill>
                 <a:latin typeface="Avenir Next"/>
               </a:defRPr>
@@ -6819,9 +6823,9 @@
           <a:prstGeom prst="line">
             <a:avLst/>
           </a:prstGeom>
-          <a:ln w="31750">
+          <a:ln w="28575">
             <a:solidFill>
-              <a:srgbClr val="F59E0B"/>
+              <a:srgbClr val="D97706"/>
             </a:solidFill>
             <a:tailEnd type="triangle" w="med" len="med"/>
           </a:ln>
@@ -6857,7 +6861,7 @@
             <a:avLst/>
           </a:prstGeom>
           <a:solidFill>
-            <a:srgbClr val="F59E0B"/>
+            <a:srgbClr val="D97706"/>
           </a:solidFill>
           <a:ln>
             <a:noFill/>
@@ -6923,9 +6927,9 @@
           <a:prstGeom prst="line">
             <a:avLst/>
           </a:prstGeom>
-          <a:ln w="31750">
+          <a:ln w="28575">
             <a:solidFill>
-              <a:srgbClr val="3B82F6"/>
+              <a:srgbClr val="2563EB"/>
             </a:solidFill>
             <a:tailEnd type="triangle" w="med" len="med"/>
           </a:ln>
@@ -6961,7 +6965,7 @@
             <a:avLst/>
           </a:prstGeom>
           <a:solidFill>
-            <a:srgbClr val="3B82F6"/>
+            <a:srgbClr val="2563EB"/>
           </a:solidFill>
           <a:ln>
             <a:noFill/>
@@ -7027,9 +7031,9 @@
           <a:prstGeom prst="line">
             <a:avLst/>
           </a:prstGeom>
-          <a:ln w="31750">
+          <a:ln w="28575">
             <a:solidFill>
-              <a:srgbClr val="8B5CF6"/>
+              <a:srgbClr val="7C3AED"/>
             </a:solidFill>
             <a:tailEnd type="triangle" w="med" len="med"/>
           </a:ln>
@@ -7065,7 +7069,7 @@
             <a:avLst/>
           </a:prstGeom>
           <a:solidFill>
-            <a:srgbClr val="8B5CF6"/>
+            <a:srgbClr val="7C3AED"/>
           </a:solidFill>
           <a:ln>
             <a:noFill/>
@@ -7142,7 +7146,7 @@
             <a:pPr algn="l">
               <a:defRPr sz="1400" b="1">
                 <a:solidFill>
-                  <a:srgbClr val="14B8A6"/>
+                  <a:srgbClr val="0D9488"/>
                 </a:solidFill>
                 <a:latin typeface="Avenir Next"/>
               </a:defRPr>
@@ -7155,7 +7159,7 @@
             <a:pPr algn="l">
               <a:defRPr sz="1250" b="0">
                 <a:solidFill>
-                  <a:srgbClr val="94A3B8"/>
+                  <a:srgbClr val="64748B"/>
                 </a:solidFill>
                 <a:latin typeface="Avenir Next"/>
               </a:defRPr>
@@ -7199,7 +7203,7 @@
             <a:avLst/>
           </a:prstGeom>
           <a:solidFill>
-            <a:srgbClr val="0F172A"/>
+            <a:srgbClr val="FFFFFF"/>
           </a:solidFill>
           <a:ln>
             <a:noFill/>
@@ -7253,7 +7257,7 @@
             <a:pPr algn="l">
               <a:defRPr sz="1300" b="1">
                 <a:solidFill>
-                  <a:srgbClr val="14B8A6"/>
+                  <a:srgbClr val="0D9488"/>
                 </a:solidFill>
                 <a:latin typeface="Avenir Next"/>
               </a:defRPr>
@@ -7289,7 +7293,7 @@
             <a:pPr algn="l">
               <a:defRPr sz="3000" b="1">
                 <a:solidFill>
-                  <a:srgbClr val="FFFFFF"/>
+                  <a:srgbClr val="0F172A"/>
                 </a:solidFill>
                 <a:latin typeface="Avenir Next"/>
               </a:defRPr>
@@ -7315,7 +7319,7 @@
             <a:avLst/>
           </a:prstGeom>
           <a:solidFill>
-            <a:srgbClr val="14B8A6"/>
+            <a:srgbClr val="0D9488"/>
           </a:solidFill>
           <a:ln>
             <a:noFill/>
@@ -7359,10 +7363,12 @@
             <a:avLst/>
           </a:prstGeom>
           <a:solidFill>
-            <a:srgbClr val="2A374D"/>
-          </a:solidFill>
-          <a:ln>
-            <a:noFill/>
+            <a:srgbClr val="FFFFFF"/>
+          </a:solidFill>
+          <a:ln w="15875">
+            <a:solidFill>
+              <a:srgbClr val="E2E8F0"/>
+            </a:solidFill>
           </a:ln>
           <a:effectLst/>
         </p:spPr>
@@ -7387,7 +7393,7 @@
             <a:pPr algn="ctr">
               <a:defRPr sz="1600" b="1">
                 <a:solidFill>
-                  <a:srgbClr val="FFFFFF"/>
+                  <a:srgbClr val="0F172A"/>
                 </a:solidFill>
                 <a:latin typeface="Avenir Next"/>
               </a:defRPr>
@@ -7412,9 +7418,9 @@
           <a:prstGeom prst="line">
             <a:avLst/>
           </a:prstGeom>
-          <a:ln w="31750">
+          <a:ln w="28575">
             <a:solidFill>
-              <a:srgbClr val="94A3B8"/>
+              <a:srgbClr val="0D9488"/>
             </a:solidFill>
             <a:tailEnd type="triangle" w="med" len="med"/>
           </a:ln>
@@ -7450,7 +7456,7 @@
             <a:avLst/>
           </a:prstGeom>
           <a:solidFill>
-            <a:srgbClr val="14B8A6"/>
+            <a:srgbClr val="0D9488"/>
           </a:solidFill>
           <a:ln>
             <a:noFill/>
@@ -7517,7 +7523,7 @@
             <a:avLst/>
           </a:prstGeom>
           <a:solidFill>
-            <a:srgbClr val="64748B"/>
+            <a:srgbClr val="475569"/>
           </a:solidFill>
           <a:ln>
             <a:noFill/>
@@ -7583,9 +7589,9 @@
           <a:prstGeom prst="line">
             <a:avLst/>
           </a:prstGeom>
-          <a:ln w="31750">
+          <a:ln w="28575">
             <a:solidFill>
-              <a:srgbClr val="94A3B8"/>
+              <a:srgbClr val="0D9488"/>
             </a:solidFill>
             <a:tailEnd type="triangle" w="med" len="med"/>
           </a:ln>
@@ -7631,7 +7637,7 @@
             <a:pPr algn="ctr">
               <a:defRPr sz="1250" b="1">
                 <a:solidFill>
-                  <a:srgbClr val="94A3B8"/>
+                  <a:srgbClr val="64748B"/>
                 </a:solidFill>
                 <a:latin typeface="Avenir Next"/>
               </a:defRPr>
@@ -7657,7 +7663,7 @@
             <a:avLst/>
           </a:prstGeom>
           <a:solidFill>
-            <a:srgbClr val="F59E0B"/>
+            <a:srgbClr val="D97706"/>
           </a:solidFill>
           <a:ln>
             <a:noFill/>
@@ -7724,7 +7730,7 @@
             <a:avLst/>
           </a:prstGeom>
           <a:solidFill>
-            <a:srgbClr val="3B82F6"/>
+            <a:srgbClr val="2563EB"/>
           </a:solidFill>
           <a:ln>
             <a:noFill/>
@@ -7791,7 +7797,7 @@
             <a:avLst/>
           </a:prstGeom>
           <a:solidFill>
-            <a:srgbClr val="8B5CF6"/>
+            <a:srgbClr val="7C3AED"/>
           </a:solidFill>
           <a:ln>
             <a:noFill/>
@@ -7858,7 +7864,7 @@
             <a:avLst/>
           </a:prstGeom>
           <a:solidFill>
-            <a:srgbClr val="1E293B"/>
+            <a:srgbClr val="F1F5F9"/>
           </a:solidFill>
           <a:ln>
             <a:noFill/>
@@ -7886,7 +7892,7 @@
             <a:pPr algn="ctr">
               <a:defRPr sz="1350" b="1">
                 <a:solidFill>
-                  <a:srgbClr val="FFFFFF"/>
+                  <a:srgbClr val="0F172A"/>
                 </a:solidFill>
                 <a:latin typeface="Avenir Next"/>
               </a:defRPr>
@@ -7899,7 +7905,7 @@
             <a:pPr algn="ctr">
               <a:defRPr sz="1200" b="0">
                 <a:solidFill>
-                  <a:srgbClr val="94A3B8"/>
+                  <a:srgbClr val="64748B"/>
                 </a:solidFill>
                 <a:latin typeface="Avenir Next"/>
               </a:defRPr>
@@ -7943,7 +7949,7 @@
             <a:avLst/>
           </a:prstGeom>
           <a:solidFill>
-            <a:srgbClr val="0F172A"/>
+            <a:srgbClr val="FFFFFF"/>
           </a:solidFill>
           <a:ln>
             <a:noFill/>
@@ -7997,7 +8003,7 @@
             <a:pPr algn="l">
               <a:defRPr sz="1300" b="1">
                 <a:solidFill>
-                  <a:srgbClr val="14B8A6"/>
+                  <a:srgbClr val="0D9488"/>
                 </a:solidFill>
                 <a:latin typeface="Avenir Next"/>
               </a:defRPr>
@@ -8033,7 +8039,7 @@
             <a:pPr algn="l">
               <a:defRPr sz="3000" b="1">
                 <a:solidFill>
-                  <a:srgbClr val="FFFFFF"/>
+                  <a:srgbClr val="0F172A"/>
                 </a:solidFill>
                 <a:latin typeface="Avenir Next"/>
               </a:defRPr>
@@ -8059,7 +8065,7 @@
             <a:avLst/>
           </a:prstGeom>
           <a:solidFill>
-            <a:srgbClr val="14B8A6"/>
+            <a:srgbClr val="0D9488"/>
           </a:solidFill>
           <a:ln>
             <a:noFill/>
@@ -8097,13 +8103,13 @@
         <p:spPr>
           <a:xfrm>
             <a:off x="548640" y="1645920"/>
-            <a:ext cx="2743200" cy="3840480"/>
+            <a:ext cx="2743200" cy="3246120"/>
           </a:xfrm>
           <a:prstGeom prst="roundRect">
             <a:avLst/>
           </a:prstGeom>
           <a:solidFill>
-            <a:srgbClr val="1E293B"/>
+            <a:srgbClr val="F1F5F9"/>
           </a:solidFill>
           <a:ln>
             <a:noFill/>
@@ -8147,7 +8153,7 @@
             <a:avLst/>
           </a:prstGeom>
           <a:solidFill>
-            <a:srgbClr val="14B8A6"/>
+            <a:srgbClr val="0D9488"/>
           </a:solidFill>
           <a:ln>
             <a:noFill/>
@@ -8221,7 +8227,7 @@
         <p:spPr>
           <a:xfrm>
             <a:off x="749808" y="2514600"/>
-            <a:ext cx="2377440" cy="1828800"/>
+            <a:ext cx="2377440" cy="1554480"/>
           </a:xfrm>
           <a:prstGeom prst="rect">
             <a:avLst/>
@@ -8237,7 +8243,7 @@
             <a:pPr algn="l">
               <a:defRPr sz="1250" b="0">
                 <a:solidFill>
-                  <a:srgbClr val="E2E8F0"/>
+                  <a:srgbClr val="334155"/>
                 </a:solidFill>
                 <a:latin typeface="Avenir Next"/>
               </a:defRPr>
@@ -8256,8 +8262,8 @@
         </p:nvSpPr>
         <p:spPr>
           <a:xfrm>
-            <a:off x="749808" y="4480560"/>
-            <a:ext cx="2377440" cy="822960"/>
+            <a:off x="749808" y="4160520"/>
+            <a:ext cx="2377440" cy="640080"/>
           </a:xfrm>
           <a:prstGeom prst="rect">
             <a:avLst/>
@@ -8273,7 +8279,7 @@
             <a:pPr algn="l">
               <a:defRPr sz="1150" b="0">
                 <a:solidFill>
-                  <a:srgbClr val="94A3B8"/>
+                  <a:srgbClr val="64748B"/>
                 </a:solidFill>
                 <a:latin typeface="Avenir Next"/>
               </a:defRPr>
@@ -8293,13 +8299,13 @@
         <p:spPr>
           <a:xfrm>
             <a:off x="3493008" y="1645920"/>
-            <a:ext cx="2743200" cy="3840480"/>
+            <a:ext cx="2743200" cy="3246120"/>
           </a:xfrm>
           <a:prstGeom prst="roundRect">
             <a:avLst/>
           </a:prstGeom>
           <a:solidFill>
-            <a:srgbClr val="1E293B"/>
+            <a:srgbClr val="F1F5F9"/>
           </a:solidFill>
           <a:ln>
             <a:noFill/>
@@ -8343,7 +8349,7 @@
             <a:avLst/>
           </a:prstGeom>
           <a:solidFill>
-            <a:srgbClr val="F59E0B"/>
+            <a:srgbClr val="D97706"/>
           </a:solidFill>
           <a:ln>
             <a:noFill/>
@@ -8417,7 +8423,7 @@
         <p:spPr>
           <a:xfrm>
             <a:off x="3694176" y="2514600"/>
-            <a:ext cx="2377440" cy="1828800"/>
+            <a:ext cx="2377440" cy="1554480"/>
           </a:xfrm>
           <a:prstGeom prst="rect">
             <a:avLst/>
@@ -8433,7 +8439,7 @@
             <a:pPr algn="l">
               <a:defRPr sz="1250" b="0">
                 <a:solidFill>
-                  <a:srgbClr val="E2E8F0"/>
+                  <a:srgbClr val="334155"/>
                 </a:solidFill>
                 <a:latin typeface="Avenir Next"/>
               </a:defRPr>
@@ -8452,8 +8458,8 @@
         </p:nvSpPr>
         <p:spPr>
           <a:xfrm>
-            <a:off x="3694176" y="4480560"/>
-            <a:ext cx="2377440" cy="822960"/>
+            <a:off x="3694176" y="4160520"/>
+            <a:ext cx="2377440" cy="640080"/>
           </a:xfrm>
           <a:prstGeom prst="rect">
             <a:avLst/>
@@ -8469,7 +8475,7 @@
             <a:pPr algn="l">
               <a:defRPr sz="1150" b="0">
                 <a:solidFill>
-                  <a:srgbClr val="94A3B8"/>
+                  <a:srgbClr val="64748B"/>
                 </a:solidFill>
                 <a:latin typeface="Avenir Next"/>
               </a:defRPr>
@@ -8489,13 +8495,13 @@
         <p:spPr>
           <a:xfrm>
             <a:off x="6437376" y="1645920"/>
-            <a:ext cx="2743200" cy="3840480"/>
+            <a:ext cx="2743200" cy="3246120"/>
           </a:xfrm>
           <a:prstGeom prst="roundRect">
             <a:avLst/>
           </a:prstGeom>
           <a:solidFill>
-            <a:srgbClr val="1E293B"/>
+            <a:srgbClr val="F1F5F9"/>
           </a:solidFill>
           <a:ln>
             <a:noFill/>
@@ -8539,7 +8545,7 @@
             <a:avLst/>
           </a:prstGeom>
           <a:solidFill>
-            <a:srgbClr val="3B82F6"/>
+            <a:srgbClr val="2563EB"/>
           </a:solidFill>
           <a:ln>
             <a:noFill/>
@@ -8613,7 +8619,7 @@
         <p:spPr>
           <a:xfrm>
             <a:off x="6638544" y="2514600"/>
-            <a:ext cx="2377440" cy="1828800"/>
+            <a:ext cx="2377440" cy="1554480"/>
           </a:xfrm>
           <a:prstGeom prst="rect">
             <a:avLst/>
@@ -8629,7 +8635,7 @@
             <a:pPr algn="l">
               <a:defRPr sz="1250" b="0">
                 <a:solidFill>
-                  <a:srgbClr val="E2E8F0"/>
+                  <a:srgbClr val="334155"/>
                 </a:solidFill>
                 <a:latin typeface="Avenir Next"/>
               </a:defRPr>
@@ -8648,8 +8654,8 @@
         </p:nvSpPr>
         <p:spPr>
           <a:xfrm>
-            <a:off x="6638544" y="4480560"/>
-            <a:ext cx="2377440" cy="822960"/>
+            <a:off x="6638544" y="4160520"/>
+            <a:ext cx="2377440" cy="640080"/>
           </a:xfrm>
           <a:prstGeom prst="rect">
             <a:avLst/>
@@ -8665,7 +8671,7 @@
             <a:pPr algn="l">
               <a:defRPr sz="1150" b="0">
                 <a:solidFill>
-                  <a:srgbClr val="94A3B8"/>
+                  <a:srgbClr val="64748B"/>
                 </a:solidFill>
                 <a:latin typeface="Avenir Next"/>
               </a:defRPr>
@@ -8685,13 +8691,13 @@
         <p:spPr>
           <a:xfrm>
             <a:off x="9381744" y="1645920"/>
-            <a:ext cx="2743200" cy="3840480"/>
+            <a:ext cx="2743200" cy="3246120"/>
           </a:xfrm>
           <a:prstGeom prst="roundRect">
             <a:avLst/>
           </a:prstGeom>
           <a:solidFill>
-            <a:srgbClr val="1E293B"/>
+            <a:srgbClr val="F1F5F9"/>
           </a:solidFill>
           <a:ln>
             <a:noFill/>
@@ -8735,7 +8741,7 @@
             <a:avLst/>
           </a:prstGeom>
           <a:solidFill>
-            <a:srgbClr val="8B5CF6"/>
+            <a:srgbClr val="7C3AED"/>
           </a:solidFill>
           <a:ln>
             <a:noFill/>
@@ -8809,7 +8815,7 @@
         <p:spPr>
           <a:xfrm>
             <a:off x="9582912" y="2514600"/>
-            <a:ext cx="2377440" cy="1828800"/>
+            <a:ext cx="2377440" cy="1554480"/>
           </a:xfrm>
           <a:prstGeom prst="rect">
             <a:avLst/>
@@ -8825,7 +8831,7 @@
             <a:pPr algn="l">
               <a:defRPr sz="1250" b="0">
                 <a:solidFill>
-                  <a:srgbClr val="E2E8F0"/>
+                  <a:srgbClr val="334155"/>
                 </a:solidFill>
                 <a:latin typeface="Avenir Next"/>
               </a:defRPr>
@@ -8844,8 +8850,8 @@
         </p:nvSpPr>
         <p:spPr>
           <a:xfrm>
-            <a:off x="9582912" y="4480560"/>
-            <a:ext cx="2377440" cy="822960"/>
+            <a:off x="9582912" y="4160520"/>
+            <a:ext cx="2377440" cy="640080"/>
           </a:xfrm>
           <a:prstGeom prst="rect">
             <a:avLst/>
@@ -8861,7 +8867,7 @@
             <a:pPr algn="l">
               <a:defRPr sz="1150" b="0">
                 <a:solidFill>
-                  <a:srgbClr val="94A3B8"/>
+                  <a:srgbClr val="64748B"/>
                 </a:solidFill>
                 <a:latin typeface="Avenir Next"/>
               </a:defRPr>
@@ -8880,14 +8886,14 @@
         </p:nvSpPr>
         <p:spPr>
           <a:xfrm>
-            <a:off x="548640" y="5760720"/>
+            <a:off x="548640" y="5257800"/>
             <a:ext cx="11091672" cy="566928"/>
           </a:xfrm>
           <a:prstGeom prst="roundRect">
             <a:avLst/>
           </a:prstGeom>
           <a:solidFill>
-            <a:srgbClr val="2A374D"/>
+            <a:srgbClr val="E2E8F0"/>
           </a:solidFill>
           <a:ln>
             <a:noFill/>
@@ -8915,7 +8921,7 @@
             <a:pPr algn="ctr">
               <a:defRPr sz="1400" b="1">
                 <a:solidFill>
-                  <a:srgbClr val="FFFFFF"/>
+                  <a:srgbClr val="0F172A"/>
                 </a:solidFill>
                 <a:latin typeface="Avenir Next"/>
               </a:defRPr>
@@ -8959,7 +8965,7 @@
             <a:avLst/>
           </a:prstGeom>
           <a:solidFill>
-            <a:srgbClr val="0F172A"/>
+            <a:srgbClr val="FFFFFF"/>
           </a:solidFill>
           <a:ln>
             <a:noFill/>
@@ -9013,7 +9019,7 @@
             <a:pPr algn="l">
               <a:defRPr sz="1300" b="1">
                 <a:solidFill>
-                  <a:srgbClr val="14B8A6"/>
+                  <a:srgbClr val="0D9488"/>
                 </a:solidFill>
                 <a:latin typeface="Avenir Next"/>
               </a:defRPr>
@@ -9049,7 +9055,7 @@
             <a:pPr algn="l">
               <a:defRPr sz="3000" b="1">
                 <a:solidFill>
-                  <a:srgbClr val="FFFFFF"/>
+                  <a:srgbClr val="0F172A"/>
                 </a:solidFill>
                 <a:latin typeface="Avenir Next"/>
               </a:defRPr>
@@ -9075,7 +9081,7 @@
             <a:avLst/>
           </a:prstGeom>
           <a:solidFill>
-            <a:srgbClr val="14B8A6"/>
+            <a:srgbClr val="0D9488"/>
           </a:solidFill>
           <a:ln>
             <a:noFill/>
@@ -9119,7 +9125,7 @@
             <a:avLst/>
           </a:prstGeom>
           <a:solidFill>
-            <a:srgbClr val="1E293B"/>
+            <a:srgbClr val="F1F5F9"/>
           </a:solidFill>
           <a:ln>
             <a:noFill/>
@@ -9173,7 +9179,7 @@
             <a:pPr algn="l">
               <a:defRPr sz="1600" b="1">
                 <a:solidFill>
-                  <a:srgbClr val="FFFFFF"/>
+                  <a:srgbClr val="0F172A"/>
                 </a:solidFill>
                 <a:latin typeface="Avenir Next"/>
               </a:defRPr>
@@ -9209,7 +9215,7 @@
             <a:pPr algn="l">
               <a:defRPr sz="1200" b="0">
                 <a:solidFill>
-                  <a:srgbClr val="94A3B8"/>
+                  <a:srgbClr val="64748B"/>
                 </a:solidFill>
                 <a:latin typeface="Avenir Next"/>
               </a:defRPr>
@@ -9235,7 +9241,7 @@
             <a:avLst/>
           </a:prstGeom>
           <a:solidFill>
-            <a:srgbClr val="14B8A6"/>
+            <a:srgbClr val="0D9488"/>
           </a:solidFill>
           <a:ln>
             <a:noFill/>
@@ -9289,7 +9295,7 @@
             <a:avLst/>
           </a:prstGeom>
           <a:solidFill>
-            <a:srgbClr val="64748B"/>
+            <a:srgbClr val="475569"/>
           </a:solidFill>
           <a:ln>
             <a:noFill/>
@@ -9343,7 +9349,7 @@
             <a:avLst/>
           </a:prstGeom>
           <a:solidFill>
-            <a:srgbClr val="F59E0B"/>
+            <a:srgbClr val="D97706"/>
           </a:solidFill>
           <a:ln>
             <a:noFill/>
@@ -9397,7 +9403,7 @@
             <a:avLst/>
           </a:prstGeom>
           <a:solidFill>
-            <a:srgbClr val="3B82F6"/>
+            <a:srgbClr val="2563EB"/>
           </a:solidFill>
           <a:ln>
             <a:noFill/>
@@ -9451,7 +9457,7 @@
             <a:avLst/>
           </a:prstGeom>
           <a:solidFill>
-            <a:srgbClr val="8B5CF6"/>
+            <a:srgbClr val="7C3AED"/>
           </a:solidFill>
           <a:ln>
             <a:noFill/>
@@ -9505,7 +9511,7 @@
             <a:avLst/>
           </a:prstGeom>
           <a:solidFill>
-            <a:srgbClr val="1E293B"/>
+            <a:srgbClr val="F1F5F9"/>
           </a:solidFill>
           <a:ln>
             <a:noFill/>
@@ -9559,7 +9565,7 @@
             <a:pPr algn="l">
               <a:defRPr sz="1600" b="1">
                 <a:solidFill>
-                  <a:srgbClr val="FFFFFF"/>
+                  <a:srgbClr val="0F172A"/>
                 </a:solidFill>
                 <a:latin typeface="Avenir Next"/>
               </a:defRPr>
@@ -9595,7 +9601,7 @@
             <a:pPr algn="l">
               <a:defRPr sz="1200" b="0">
                 <a:solidFill>
-                  <a:srgbClr val="94A3B8"/>
+                  <a:srgbClr val="64748B"/>
                 </a:solidFill>
                 <a:latin typeface="Avenir Next"/>
               </a:defRPr>
@@ -9621,7 +9627,7 @@
             <a:avLst/>
           </a:prstGeom>
           <a:solidFill>
-            <a:srgbClr val="14B8A6"/>
+            <a:srgbClr val="0D9488"/>
           </a:solidFill>
           <a:ln>
             <a:noFill/>
@@ -9675,7 +9681,7 @@
             <a:avLst/>
           </a:prstGeom>
           <a:solidFill>
-            <a:srgbClr val="64748B"/>
+            <a:srgbClr val="475569"/>
           </a:solidFill>
           <a:ln>
             <a:noFill/>
@@ -9729,7 +9735,7 @@
             <a:avLst/>
           </a:prstGeom>
           <a:solidFill>
-            <a:srgbClr val="F59E0B"/>
+            <a:srgbClr val="D97706"/>
           </a:solidFill>
           <a:ln>
             <a:noFill/>
@@ -9783,7 +9789,7 @@
             <a:avLst/>
           </a:prstGeom>
           <a:solidFill>
-            <a:srgbClr val="3B82F6"/>
+            <a:srgbClr val="2563EB"/>
           </a:solidFill>
           <a:ln>
             <a:noFill/>
@@ -9837,7 +9843,7 @@
             <a:avLst/>
           </a:prstGeom>
           <a:solidFill>
-            <a:srgbClr val="8B5CF6"/>
+            <a:srgbClr val="7C3AED"/>
           </a:solidFill>
           <a:ln>
             <a:noFill/>
@@ -9901,7 +9907,7 @@
             <a:pPr algn="l">
               <a:defRPr sz="1300" b="1">
                 <a:solidFill>
-                  <a:srgbClr val="FFFFFF"/>
+                  <a:srgbClr val="0F172A"/>
                 </a:solidFill>
                 <a:latin typeface="Avenir Next"/>
               </a:defRPr>
@@ -9927,7 +9933,7 @@
             <a:avLst/>
           </a:prstGeom>
           <a:solidFill>
-            <a:srgbClr val="2A374D"/>
+            <a:srgbClr val="E2E8F0"/>
           </a:solidFill>
           <a:ln>
             <a:noFill/>
@@ -9955,7 +9961,7 @@
             <a:pPr algn="ctr">
               <a:defRPr sz="1200" b="0">
                 <a:solidFill>
-                  <a:srgbClr val="E2E8F0"/>
+                  <a:srgbClr val="334155"/>
                 </a:solidFill>
                 <a:latin typeface="Avenir Next"/>
               </a:defRPr>
@@ -9981,7 +9987,7 @@
             <a:avLst/>
           </a:prstGeom>
           <a:solidFill>
-            <a:srgbClr val="2A374D"/>
+            <a:srgbClr val="E2E8F0"/>
           </a:solidFill>
           <a:ln>
             <a:noFill/>
@@ -10009,7 +10015,7 @@
             <a:pPr algn="ctr">
               <a:defRPr sz="1200" b="0">
                 <a:solidFill>
-                  <a:srgbClr val="E2E8F0"/>
+                  <a:srgbClr val="334155"/>
                 </a:solidFill>
                 <a:latin typeface="Avenir Next"/>
               </a:defRPr>
@@ -10035,7 +10041,7 @@
             <a:avLst/>
           </a:prstGeom>
           <a:solidFill>
-            <a:srgbClr val="2A374D"/>
+            <a:srgbClr val="E2E8F0"/>
           </a:solidFill>
           <a:ln>
             <a:noFill/>
@@ -10063,7 +10069,7 @@
             <a:pPr algn="ctr">
               <a:defRPr sz="1200" b="0">
                 <a:solidFill>
-                  <a:srgbClr val="E2E8F0"/>
+                  <a:srgbClr val="334155"/>
                 </a:solidFill>
                 <a:latin typeface="Avenir Next"/>
               </a:defRPr>
@@ -10089,7 +10095,7 @@
             <a:avLst/>
           </a:prstGeom>
           <a:solidFill>
-            <a:srgbClr val="2A374D"/>
+            <a:srgbClr val="E2E8F0"/>
           </a:solidFill>
           <a:ln>
             <a:noFill/>
@@ -10117,7 +10123,7 @@
             <a:pPr algn="ctr">
               <a:defRPr sz="1200" b="0">
                 <a:solidFill>
-                  <a:srgbClr val="E2E8F0"/>
+                  <a:srgbClr val="334155"/>
                 </a:solidFill>
                 <a:latin typeface="Avenir Next"/>
               </a:defRPr>
@@ -10143,7 +10149,7 @@
             <a:avLst/>
           </a:prstGeom>
           <a:solidFill>
-            <a:srgbClr val="2A374D"/>
+            <a:srgbClr val="E2E8F0"/>
           </a:solidFill>
           <a:ln>
             <a:noFill/>
@@ -10171,7 +10177,7 @@
             <a:pPr algn="ctr">
               <a:defRPr sz="1200" b="0">
                 <a:solidFill>
-                  <a:srgbClr val="E2E8F0"/>
+                  <a:srgbClr val="334155"/>
                 </a:solidFill>
                 <a:latin typeface="Avenir Next"/>
               </a:defRPr>
@@ -10197,7 +10203,7 @@
             <a:avLst/>
           </a:prstGeom>
           <a:solidFill>
-            <a:srgbClr val="2A374D"/>
+            <a:srgbClr val="E2E8F0"/>
           </a:solidFill>
           <a:ln>
             <a:noFill/>
@@ -10225,7 +10231,7 @@
             <a:pPr algn="ctr">
               <a:defRPr sz="1200" b="0">
                 <a:solidFill>
-                  <a:srgbClr val="E2E8F0"/>
+                  <a:srgbClr val="334155"/>
                 </a:solidFill>
                 <a:latin typeface="Avenir Next"/>
               </a:defRPr>
@@ -10251,7 +10257,7 @@
             <a:avLst/>
           </a:prstGeom>
           <a:solidFill>
-            <a:srgbClr val="2A374D"/>
+            <a:srgbClr val="E2E8F0"/>
           </a:solidFill>
           <a:ln>
             <a:noFill/>
@@ -10279,7 +10285,7 @@
             <a:pPr algn="ctr">
               <a:defRPr sz="1200" b="0">
                 <a:solidFill>
-                  <a:srgbClr val="E2E8F0"/>
+                  <a:srgbClr val="334155"/>
                 </a:solidFill>
                 <a:latin typeface="Avenir Next"/>
               </a:defRPr>
@@ -10305,7 +10311,7 @@
             <a:avLst/>
           </a:prstGeom>
           <a:solidFill>
-            <a:srgbClr val="2A374D"/>
+            <a:srgbClr val="E2E8F0"/>
           </a:solidFill>
           <a:ln>
             <a:noFill/>
@@ -10333,7 +10339,7 @@
             <a:pPr algn="ctr">
               <a:defRPr sz="1200" b="0">
                 <a:solidFill>
-                  <a:srgbClr val="E2E8F0"/>
+                  <a:srgbClr val="334155"/>
                 </a:solidFill>
                 <a:latin typeface="Avenir Next"/>
               </a:defRPr>
@@ -10359,7 +10365,7 @@
             <a:avLst/>
           </a:prstGeom>
           <a:solidFill>
-            <a:srgbClr val="2A374D"/>
+            <a:srgbClr val="E2E8F0"/>
           </a:solidFill>
           <a:ln>
             <a:noFill/>
@@ -10387,7 +10393,7 @@
             <a:pPr algn="ctr">
               <a:defRPr sz="1200" b="0">
                 <a:solidFill>
-                  <a:srgbClr val="E2E8F0"/>
+                  <a:srgbClr val="334155"/>
                 </a:solidFill>
                 <a:latin typeface="Avenir Next"/>
               </a:defRPr>
@@ -10413,7 +10419,7 @@
             <a:avLst/>
           </a:prstGeom>
           <a:solidFill>
-            <a:srgbClr val="2A374D"/>
+            <a:srgbClr val="E2E8F0"/>
           </a:solidFill>
           <a:ln>
             <a:noFill/>
@@ -10441,7 +10447,7 @@
             <a:pPr algn="ctr">
               <a:defRPr sz="1200" b="0">
                 <a:solidFill>
-                  <a:srgbClr val="E2E8F0"/>
+                  <a:srgbClr val="334155"/>
                 </a:solidFill>
                 <a:latin typeface="Avenir Next"/>
               </a:defRPr>
@@ -10467,7 +10473,7 @@
             <a:avLst/>
           </a:prstGeom>
           <a:solidFill>
-            <a:srgbClr val="2A374D"/>
+            <a:srgbClr val="E2E8F0"/>
           </a:solidFill>
           <a:ln>
             <a:noFill/>
@@ -10495,7 +10501,7 @@
             <a:pPr algn="ctr">
               <a:defRPr sz="1200" b="0">
                 <a:solidFill>
-                  <a:srgbClr val="E2E8F0"/>
+                  <a:srgbClr val="334155"/>
                 </a:solidFill>
                 <a:latin typeface="Avenir Next"/>
               </a:defRPr>
@@ -10521,7 +10527,7 @@
             <a:avLst/>
           </a:prstGeom>
           <a:solidFill>
-            <a:srgbClr val="2A374D"/>
+            <a:srgbClr val="E2E8F0"/>
           </a:solidFill>
           <a:ln>
             <a:noFill/>
@@ -10549,7 +10555,7 @@
             <a:pPr algn="ctr">
               <a:defRPr sz="1200" b="0">
                 <a:solidFill>
-                  <a:srgbClr val="E2E8F0"/>
+                  <a:srgbClr val="334155"/>
                 </a:solidFill>
                 <a:latin typeface="Avenir Next"/>
               </a:defRPr>
@@ -10575,7 +10581,7 @@
             <a:avLst/>
           </a:prstGeom>
           <a:solidFill>
-            <a:srgbClr val="2A374D"/>
+            <a:srgbClr val="E2E8F0"/>
           </a:solidFill>
           <a:ln>
             <a:noFill/>
@@ -10603,7 +10609,7 @@
             <a:pPr algn="ctr">
               <a:defRPr sz="1200" b="0">
                 <a:solidFill>
-                  <a:srgbClr val="E2E8F0"/>
+                  <a:srgbClr val="334155"/>
                 </a:solidFill>
                 <a:latin typeface="Avenir Next"/>
               </a:defRPr>
@@ -10639,7 +10645,7 @@
             <a:pPr algn="l">
               <a:defRPr sz="1200" b="0">
                 <a:solidFill>
-                  <a:srgbClr val="94A3B8"/>
+                  <a:srgbClr val="64748B"/>
                 </a:solidFill>
                 <a:latin typeface="Avenir Next"/>
               </a:defRPr>
@@ -10683,7 +10689,7 @@
             <a:avLst/>
           </a:prstGeom>
           <a:solidFill>
-            <a:srgbClr val="0F172A"/>
+            <a:srgbClr val="FFFFFF"/>
           </a:solidFill>
           <a:ln>
             <a:noFill/>
@@ -10737,7 +10743,7 @@
             <a:pPr algn="l">
               <a:defRPr sz="1300" b="1">
                 <a:solidFill>
-                  <a:srgbClr val="14B8A6"/>
+                  <a:srgbClr val="0D9488"/>
                 </a:solidFill>
                 <a:latin typeface="Avenir Next"/>
               </a:defRPr>
@@ -10773,7 +10779,7 @@
             <a:pPr algn="l">
               <a:defRPr sz="3000" b="1">
                 <a:solidFill>
-                  <a:srgbClr val="FFFFFF"/>
+                  <a:srgbClr val="0F172A"/>
                 </a:solidFill>
                 <a:latin typeface="Avenir Next"/>
               </a:defRPr>
@@ -10799,7 +10805,7 @@
             <a:avLst/>
           </a:prstGeom>
           <a:solidFill>
-            <a:srgbClr val="14B8A6"/>
+            <a:srgbClr val="0D9488"/>
           </a:solidFill>
           <a:ln>
             <a:noFill/>
@@ -10843,7 +10849,7 @@
             <a:avLst/>
           </a:prstGeom>
           <a:solidFill>
-            <a:srgbClr val="1E293B"/>
+            <a:srgbClr val="F1F5F9"/>
           </a:solidFill>
           <a:ln>
             <a:noFill/>
@@ -10897,7 +10903,7 @@
             <a:pPr algn="l">
               <a:defRPr sz="1700" b="1">
                 <a:solidFill>
-                  <a:srgbClr val="22C55E"/>
+                  <a:srgbClr val="15803D"/>
                 </a:solidFill>
                 <a:latin typeface="Avenir Next"/>
               </a:defRPr>
@@ -10933,7 +10939,7 @@
             <a:pPr algn="l">
               <a:defRPr sz="1600" b="1">
                 <a:solidFill>
-                  <a:srgbClr val="22C55E"/>
+                  <a:srgbClr val="15803D"/>
                 </a:solidFill>
                 <a:latin typeface="Avenir Next"/>
               </a:defRPr>
@@ -10969,7 +10975,7 @@
             <a:pPr algn="l">
               <a:defRPr sz="1300" b="0">
                 <a:solidFill>
-                  <a:srgbClr val="E2E8F0"/>
+                  <a:srgbClr val="334155"/>
                 </a:solidFill>
                 <a:latin typeface="Avenir Next"/>
               </a:defRPr>
@@ -11005,7 +11011,7 @@
             <a:pPr algn="l">
               <a:defRPr sz="1600" b="1">
                 <a:solidFill>
-                  <a:srgbClr val="22C55E"/>
+                  <a:srgbClr val="15803D"/>
                 </a:solidFill>
                 <a:latin typeface="Avenir Next"/>
               </a:defRPr>
@@ -11041,7 +11047,7 @@
             <a:pPr algn="l">
               <a:defRPr sz="1300" b="0">
                 <a:solidFill>
-                  <a:srgbClr val="E2E8F0"/>
+                  <a:srgbClr val="334155"/>
                 </a:solidFill>
                 <a:latin typeface="Avenir Next"/>
               </a:defRPr>
@@ -11077,7 +11083,7 @@
             <a:pPr algn="l">
               <a:defRPr sz="1600" b="1">
                 <a:solidFill>
-                  <a:srgbClr val="22C55E"/>
+                  <a:srgbClr val="15803D"/>
                 </a:solidFill>
                 <a:latin typeface="Avenir Next"/>
               </a:defRPr>
@@ -11113,7 +11119,7 @@
             <a:pPr algn="l">
               <a:defRPr sz="1300" b="0">
                 <a:solidFill>
-                  <a:srgbClr val="E2E8F0"/>
+                  <a:srgbClr val="334155"/>
                 </a:solidFill>
                 <a:latin typeface="Avenir Next"/>
               </a:defRPr>
@@ -11139,7 +11145,7 @@
             <a:avLst/>
           </a:prstGeom>
           <a:solidFill>
-            <a:srgbClr val="1E293B"/>
+            <a:srgbClr val="F1F5F9"/>
           </a:solidFill>
           <a:ln>
             <a:noFill/>
@@ -11193,7 +11199,7 @@
             <a:pPr algn="l">
               <a:defRPr sz="1700" b="1">
                 <a:solidFill>
-                  <a:srgbClr val="F59E0B"/>
+                  <a:srgbClr val="D97706"/>
                 </a:solidFill>
                 <a:latin typeface="Avenir Next"/>
               </a:defRPr>
@@ -11229,7 +11235,7 @@
             <a:pPr algn="l">
               <a:defRPr sz="1600" b="1">
                 <a:solidFill>
-                  <a:srgbClr val="F59E0B"/>
+                  <a:srgbClr val="D97706"/>
                 </a:solidFill>
                 <a:latin typeface="Avenir Next"/>
               </a:defRPr>
@@ -11265,7 +11271,7 @@
             <a:pPr algn="l">
               <a:defRPr sz="1300" b="0">
                 <a:solidFill>
-                  <a:srgbClr val="E2E8F0"/>
+                  <a:srgbClr val="334155"/>
                 </a:solidFill>
                 <a:latin typeface="Avenir Next"/>
               </a:defRPr>
@@ -11301,7 +11307,7 @@
             <a:pPr algn="l">
               <a:defRPr sz="1600" b="1">
                 <a:solidFill>
-                  <a:srgbClr val="F59E0B"/>
+                  <a:srgbClr val="D97706"/>
                 </a:solidFill>
                 <a:latin typeface="Avenir Next"/>
               </a:defRPr>
@@ -11337,7 +11343,7 @@
             <a:pPr algn="l">
               <a:defRPr sz="1300" b="0">
                 <a:solidFill>
-                  <a:srgbClr val="E2E8F0"/>
+                  <a:srgbClr val="334155"/>
                 </a:solidFill>
                 <a:latin typeface="Avenir Next"/>
               </a:defRPr>
@@ -11373,7 +11379,7 @@
             <a:pPr algn="l">
               <a:defRPr sz="1600" b="1">
                 <a:solidFill>
-                  <a:srgbClr val="F59E0B"/>
+                  <a:srgbClr val="D97706"/>
                 </a:solidFill>
                 <a:latin typeface="Avenir Next"/>
               </a:defRPr>
@@ -11409,7 +11415,7 @@
             <a:pPr algn="l">
               <a:defRPr sz="1300" b="0">
                 <a:solidFill>
-                  <a:srgbClr val="E2E8F0"/>
+                  <a:srgbClr val="334155"/>
                 </a:solidFill>
                 <a:latin typeface="Avenir Next"/>
               </a:defRPr>

--- a/presentations/cse_lanes_model.pptx
+++ b/presentations/cse_lanes_model.pptx
@@ -4659,7 +4659,7 @@
               </a:defRPr>
             </a:pPr>
             <a:r>
-              <a:t>module load cse/gcc</a:t>
+              <a:t>module load CSE/GCC</a:t>
             </a:r>
           </a:p>
         </p:txBody>
@@ -4931,7 +4931,7 @@
               </a:defRPr>
             </a:pPr>
             <a:r>
-              <a:t>serial</a:t>
+              <a:t>Serial</a:t>
             </a:r>
           </a:p>
         </p:txBody>
@@ -4985,7 +4985,7 @@
               </a:defRPr>
             </a:pPr>
             <a:r>
-              <a:t>mpi</a:t>
+              <a:t>MPI</a:t>
             </a:r>
           </a:p>
         </p:txBody>
@@ -5039,7 +5039,7 @@
               </a:defRPr>
             </a:pPr>
             <a:r>
-              <a:t>gpu</a:t>
+              <a:t>GPU</a:t>
             </a:r>
           </a:p>
         </p:txBody>
@@ -6895,7 +6895,7 @@
               </a:defRPr>
             </a:pPr>
             <a:r>
-              <a:t>serial</a:t>
+              <a:t>Serial</a:t>
             </a:r>
           </a:p>
           <a:p>
@@ -6999,7 +6999,7 @@
               </a:defRPr>
             </a:pPr>
             <a:r>
-              <a:t>mpi-craympich</a:t>
+              <a:t>MPI</a:t>
             </a:r>
           </a:p>
           <a:p>
@@ -7012,7 +7012,7 @@
               </a:defRPr>
             </a:pPr>
             <a:r>
-              <a:t>hdf5+mpi · netcdf · tau</a:t>
+              <a:t>Cray MPICH · hdf5+mpi · netcdf · tau</a:t>
             </a:r>
           </a:p>
         </p:txBody>
@@ -7103,7 +7103,7 @@
               </a:defRPr>
             </a:pPr>
             <a:r>
-              <a:t>gpu-craympich-gfx942</a:t>
+              <a:t>GPU</a:t>
             </a:r>
           </a:p>
           <a:p>
@@ -7116,7 +7116,7 @@
               </a:defRPr>
             </a:pPr>
             <a:r>
-              <a:t>kokkos — arch from the probe</a:t>
+              <a:t>kokkos · rocm — arch from the probe</a:t>
             </a:r>
           </a:p>
         </p:txBody>
@@ -7399,7 +7399,7 @@
               </a:defRPr>
             </a:pPr>
             <a:r>
-              <a:t>$ module load cse/gcc</a:t>
+              <a:t>$ module load CSE/GCC</a:t>
             </a:r>
           </a:p>
         </p:txBody>
@@ -7697,7 +7697,7 @@
               </a:defRPr>
             </a:pPr>
             <a:r>
-              <a:t>serial</a:t>
+              <a:t>Serial</a:t>
             </a:r>
           </a:p>
           <a:p>
@@ -7764,7 +7764,7 @@
               </a:defRPr>
             </a:pPr>
             <a:r>
-              <a:t>mpi-craympich</a:t>
+              <a:t>MPI</a:t>
             </a:r>
           </a:p>
           <a:p>
@@ -7777,7 +7777,7 @@
               </a:defRPr>
             </a:pPr>
             <a:r>
-              <a:t>hdf5+mpi · netcdf · tau</a:t>
+              <a:t>Cray MPICH · hdf5+mpi · netcdf · tau</a:t>
             </a:r>
           </a:p>
         </p:txBody>
@@ -7831,7 +7831,7 @@
               </a:defRPr>
             </a:pPr>
             <a:r>
-              <a:t>gpu-craympich-gfx942</a:t>
+              <a:t>GPU</a:t>
             </a:r>
           </a:p>
           <a:p>
@@ -8213,7 +8213,7 @@
               </a:defRPr>
             </a:pPr>
             <a:r>
-              <a:t>core</a:t>
+              <a:t>Core</a:t>
             </a:r>
           </a:p>
         </p:txBody>
@@ -8249,7 +8249,7 @@
               </a:defRPr>
             </a:pPr>
             <a:r>
-              <a:t>No MPI implementation exists for it, or it is a compiler-agnostic building block.</a:t>
+              <a:t>No MPI implementation exists for it, or it is a compiler-agnostic building block. Loads with the surface.</a:t>
             </a:r>
           </a:p>
         </p:txBody>
@@ -8409,7 +8409,7 @@
               </a:defRPr>
             </a:pPr>
             <a:r>
-              <a:t>serial</a:t>
+              <a:t>Serial</a:t>
             </a:r>
           </a:p>
         </p:txBody>
@@ -8605,7 +8605,7 @@
               </a:defRPr>
             </a:pPr>
             <a:r>
-              <a:t>mpi-&lt;impl&gt;</a:t>
+              <a:t>MPI</a:t>
             </a:r>
           </a:p>
         </p:txBody>
@@ -8641,7 +8641,7 @@
               </a:defRPr>
             </a:pPr>
             <a:r>
-              <a:t>Built against the named MPI implementation.</a:t>
+              <a:t>Built against the system MPI. Qualified only when the system offers more than one.</a:t>
             </a:r>
           </a:p>
         </p:txBody>
@@ -8677,7 +8677,7 @@
               </a:defRPr>
             </a:pPr>
             <a:r>
-              <a:t>mpi-craympich · mpi-openmpi</a:t>
+              <a:t>MPI  ·  or MPI-openmpi / MPI-mpich</a:t>
             </a:r>
           </a:p>
         </p:txBody>
@@ -8801,7 +8801,7 @@
               </a:defRPr>
             </a:pPr>
             <a:r>
-              <a:t>gpu-&lt;impl&gt;-&lt;arch&gt;</a:t>
+              <a:t>GPU</a:t>
             </a:r>
           </a:p>
         </p:txBody>
@@ -8837,7 +8837,7 @@
               </a:defRPr>
             </a:pPr>
             <a:r>
-              <a:t>GPU backend over GPU-aware MPI, targeted at the probed architecture.</a:t>
+              <a:t>GPU backend over GPU-aware MPI. Qualified by MPI or arch only when the system is ambiguous.</a:t>
             </a:r>
           </a:p>
         </p:txBody>
@@ -8873,7 +8873,7 @@
               </a:defRPr>
             </a:pPr>
             <a:r>
-              <a:t>gpu-craympich-gfx942</a:t>
+              <a:t>GPU  ·  or GPU-gfx90a / GPU-gfx942</a:t>
             </a:r>
           </a:p>
         </p:txBody>
@@ -8927,7 +8927,7 @@
               </a:defRPr>
             </a:pPr>
             <a:r>
-              <a:t>The GPU lane is called gpu-craympich-gfx942 — never gpu-kokkos. Kokkos is what it carries today.</a:t>
+              <a:t>Modules: CSE/&lt;Compiler&gt;/&lt;Lane&gt; — named by facts, qualified only when ambiguous, never by contents (GPU, not GPU-kokkos).</a:t>
             </a:r>
           </a:p>
         </p:txBody>
@@ -9185,7 +9185,7 @@
               </a:defRPr>
             </a:pPr>
             <a:r>
-              <a:t>cse/&lt;system-default&gt;</a:t>
+              <a:t>CSE/&lt;SystemDefault&gt;</a:t>
             </a:r>
           </a:p>
         </p:txBody>
@@ -9275,7 +9275,7 @@
               </a:defRPr>
             </a:pPr>
             <a:r>
-              <a:t>core (automatic)</a:t>
+              <a:t>Core (automatic)</a:t>
             </a:r>
           </a:p>
         </p:txBody>
@@ -9329,7 +9329,7 @@
               </a:defRPr>
             </a:pPr>
             <a:r>
-              <a:t>foundation (view)</a:t>
+              <a:t>Foundation (view)</a:t>
             </a:r>
           </a:p>
         </p:txBody>
@@ -9383,7 +9383,7 @@
               </a:defRPr>
             </a:pPr>
             <a:r>
-              <a:t>serial</a:t>
+              <a:t>Serial</a:t>
             </a:r>
           </a:p>
         </p:txBody>
@@ -9437,7 +9437,7 @@
               </a:defRPr>
             </a:pPr>
             <a:r>
-              <a:t>mpi</a:t>
+              <a:t>MPI</a:t>
             </a:r>
           </a:p>
         </p:txBody>
@@ -9491,7 +9491,7 @@
               </a:defRPr>
             </a:pPr>
             <a:r>
-              <a:t>gpu</a:t>
+              <a:t>GPU</a:t>
             </a:r>
           </a:p>
         </p:txBody>
@@ -9571,7 +9571,7 @@
               </a:defRPr>
             </a:pPr>
             <a:r>
-              <a:t>cse/gcc</a:t>
+              <a:t>CSE/GCC</a:t>
             </a:r>
           </a:p>
         </p:txBody>
@@ -9661,7 +9661,7 @@
               </a:defRPr>
             </a:pPr>
             <a:r>
-              <a:t>core (automatic)</a:t>
+              <a:t>Core (automatic)</a:t>
             </a:r>
           </a:p>
         </p:txBody>
@@ -9715,7 +9715,7 @@
               </a:defRPr>
             </a:pPr>
             <a:r>
-              <a:t>foundation (view)</a:t>
+              <a:t>Foundation (view)</a:t>
             </a:r>
           </a:p>
         </p:txBody>
@@ -9769,7 +9769,7 @@
               </a:defRPr>
             </a:pPr>
             <a:r>
-              <a:t>serial</a:t>
+              <a:t>Serial</a:t>
             </a:r>
           </a:p>
         </p:txBody>
@@ -9823,7 +9823,7 @@
               </a:defRPr>
             </a:pPr>
             <a:r>
-              <a:t>mpi</a:t>
+              <a:t>MPI</a:t>
             </a:r>
           </a:p>
         </p:txBody>
@@ -9877,7 +9877,7 @@
               </a:defRPr>
             </a:pPr>
             <a:r>
-              <a:t>gpu</a:t>
+              <a:t>GPU</a:t>
             </a:r>
           </a:p>
         </p:txBody>

--- a/presentations/cse_lanes_model.pptx
+++ b/presentations/cse_lanes_model.pptx
@@ -4510,7 +4510,7 @@
               </a:defRPr>
             </a:pPr>
             <a:r>
-              <a:t>Conflicts avoided by convention · MPI/GPU surfaces not isolated ·</a:t>
+              <a:t>GPU is a complete MPI-capable lane when the selected toolchain supports it ·</a:t>
             </a:r>
           </a:p>
           <a:p>
@@ -4523,7 +4523,7 @@
               </a:defRPr>
             </a:pPr>
             <a:r>
-              <a:t>hand-curated per system — upgrades mean rebuilding everything</a:t>
+              <a:t>package modules prevent incompatible version mixes</a:t>
             </a:r>
           </a:p>
         </p:txBody>
@@ -4659,7 +4659,7 @@
               </a:defRPr>
             </a:pPr>
             <a:r>
-              <a:t>module load CSE/GCC</a:t>
+              <a:t>module load cse/GCC</a:t>
             </a:r>
           </a:p>
         </p:txBody>
@@ -5101,7 +5101,7 @@
               </a:defRPr>
             </a:pPr>
             <a:r>
-              <a:t>versions inside a lane stay a one-at-a-time module choice</a:t>
+              <a:t>versions inside a lane stay a policy-backed module choice</a:t>
             </a:r>
           </a:p>
         </p:txBody>
@@ -7399,7 +7399,7 @@
               </a:defRPr>
             </a:pPr>
             <a:r>
-              <a:t>$ module load CSE/GCC</a:t>
+              <a:t>$ module load cse/GCC</a:t>
             </a:r>
           </a:p>
         </p:txBody>
@@ -7844,7 +7844,7 @@
               </a:defRPr>
             </a:pPr>
             <a:r>
-              <a:t>kokkos +rocm gfx942</a:t>
+              <a:t>GPU-aware MPI · kokkos +rocm gfx942</a:t>
             </a:r>
           </a:p>
         </p:txBody>
@@ -7898,7 +7898,7 @@
               </a:defRPr>
             </a:pPr>
             <a:r>
-              <a:t>Only the chosen lane is visible — no contamination, no accidental MPI/GPU linkage.</a:t>
+              <a:t>Only the chosen lane is visible — GPU includes its compatible MPI surface.</a:t>
             </a:r>
           </a:p>
           <a:p>
@@ -7911,7 +7911,7 @@
               </a:defRPr>
             </a:pPr>
             <a:r>
-              <a:t>Two HDF5 versions in a lane? The same one-at-a-time module choice users already know.</a:t>
+              <a:t>Clean module names stay; module metadata blocks incompatible HDF5/NetCDF-style version mixes.</a:t>
             </a:r>
           </a:p>
         </p:txBody>
@@ -8837,7 +8837,7 @@
               </a:defRPr>
             </a:pPr>
             <a:r>
-              <a:t>GPU backend over GPU-aware MPI. Qualified by MPI or arch only when the system is ambiguous.</a:t>
+              <a:t>Complete MPI+GPU lane over a compatible compiler, MPI, and GPU toolkit. Load GPU instead of MPI, not in addition to it.</a:t>
             </a:r>
           </a:p>
         </p:txBody>
@@ -8927,7 +8927,7 @@
               </a:defRPr>
             </a:pPr>
             <a:r>
-              <a:t>Modules: CSE/&lt;Compiler&gt;/&lt;Lane&gt; — named by facts, qualified only when ambiguous, never by contents (GPU, not GPU-kokkos).</a:t>
+              <a:t>Modules: cse/&lt;Compiler&gt;/&lt;Lane&gt; — short names for users; dependency compatibility is enforced by module metadata.</a:t>
             </a:r>
           </a:p>
         </p:txBody>
@@ -9185,7 +9185,7 @@
               </a:defRPr>
             </a:pPr>
             <a:r>
-              <a:t>CSE/&lt;SystemDefault&gt;</a:t>
+              <a:t>cse/&lt;SystemDefault&gt;</a:t>
             </a:r>
           </a:p>
         </p:txBody>
@@ -9571,7 +9571,7 @@
               </a:defRPr>
             </a:pPr>
             <a:r>
-              <a:t>CSE/GCC</a:t>
+              <a:t>cse/GCC</a:t>
             </a:r>
           </a:p>
         </p:txBody>
@@ -10651,7 +10651,7 @@
               </a:defRPr>
             </a:pPr>
             <a:r>
-              <a:t>Multi-version by policy: unify:false lanes · single-version pinned foundation · conflicts stay a module choice</a:t>
+              <a:t>Multi-version by policy: clean package names · compatible chains load · incompatible mixes fail clearly</a:t>
             </a:r>
           </a:p>
         </p:txBody>
@@ -11277,7 +11277,7 @@
               </a:defRPr>
             </a:pPr>
             <a:r>
-              <a:t>Build the science lanes on the Cray system; verify the module/view front door</a:t>
+              <a:t>Build science lanes on Cray and Linux systems; verify the module/view front door</a:t>
             </a:r>
           </a:p>
         </p:txBody>
@@ -11349,7 +11349,7 @@
               </a:defRPr>
             </a:pPr>
             <a:r>
-              <a:t>Add the second compiler surface, then the NVIDIA system in parallel</a:t>
+              <a:t>Encode module compatibility checks for multi-version package chains</a:t>
             </a:r>
           </a:p>
         </p:txBody>

--- a/presentations/cse_lanes_model.pptx
+++ b/presentations/cse_lanes_model.pptx
@@ -13,6 +13,9 @@
     <p:sldId id="261" r:id="rId12"/>
     <p:sldId id="262" r:id="rId13"/>
     <p:sldId id="263" r:id="rId14"/>
+    <p:sldId id="264" r:id="rId15"/>
+    <p:sldId id="265" r:id="rId16"/>
+    <p:sldId id="266" r:id="rId17"/>
   </p:sldIdLst>
   <p:sldSz cx="12191695" cy="6858000" type="screen4x3"/>
   <p:notesSz cx="6858000" cy="9144000"/>
@@ -3532,6 +3535,2452 @@
 </p:sld>
 </file>
 
+<file path=ppt/slides/slide10.xml><?xml version="1.0" encoding="utf-8"?>
+<p:sld xmlns:a="http://schemas.openxmlformats.org/drawingml/2006/main" xmlns:p="http://schemas.openxmlformats.org/presentationml/2006/main" xmlns:r="http://schemas.openxmlformats.org/officeDocument/2006/relationships">
+  <p:cSld>
+    <p:spTree>
+      <p:nvGrpSpPr>
+        <p:cNvPr id="1" name=""/>
+        <p:cNvGrpSpPr/>
+        <p:nvPr/>
+      </p:nvGrpSpPr>
+      <p:grpSpPr/>
+      <p:sp>
+        <p:nvSpPr>
+          <p:cNvPr id="2" name="Rectangle 1"/>
+          <p:cNvSpPr/>
+          <p:nvPr/>
+        </p:nvSpPr>
+        <p:spPr>
+          <a:xfrm>
+            <a:off x="0" y="0"/>
+            <a:ext cx="12191695" cy="6858000"/>
+          </a:xfrm>
+          <a:prstGeom prst="rect">
+            <a:avLst/>
+          </a:prstGeom>
+          <a:solidFill>
+            <a:srgbClr val="FFFFFF"/>
+          </a:solidFill>
+          <a:ln>
+            <a:noFill/>
+          </a:ln>
+          <a:effectLst/>
+        </p:spPr>
+        <p:style>
+          <a:lnRef idx="1">
+            <a:schemeClr val="accent1"/>
+          </a:lnRef>
+          <a:fillRef idx="3">
+            <a:schemeClr val="accent1"/>
+          </a:fillRef>
+          <a:effectRef idx="2">
+            <a:schemeClr val="accent1"/>
+          </a:effectRef>
+          <a:fontRef idx="minor">
+            <a:schemeClr val="lt1"/>
+          </a:fontRef>
+        </p:style>
+        <p:txBody>
+          <a:bodyPr rtlCol="0" anchor="ctr"/>
+          <a:lstStyle/>
+          <a:p>
+            <a:pPr algn="ctr"/>
+          </a:p>
+        </p:txBody>
+      </p:sp>
+      <p:sp>
+        <p:nvSpPr>
+          <p:cNvPr id="3" name="TextBox 2"/>
+          <p:cNvSpPr txBox="1"/>
+          <p:nvPr/>
+        </p:nvSpPr>
+        <p:spPr>
+          <a:xfrm>
+            <a:off x="548640" y="256032"/>
+            <a:ext cx="10972800" cy="365760"/>
+          </a:xfrm>
+          <a:prstGeom prst="rect">
+            <a:avLst/>
+          </a:prstGeom>
+          <a:noFill/>
+        </p:spPr>
+        <p:txBody>
+          <a:bodyPr wrap="square" anchor="t">
+            <a:spAutoFit/>
+          </a:bodyPr>
+          <a:lstStyle/>
+          <a:p>
+            <a:pPr algn="l">
+              <a:defRPr sz="1300" b="1">
+                <a:solidFill>
+                  <a:srgbClr val="0D9488"/>
+                </a:solidFill>
+                <a:latin typeface="Avenir Next"/>
+              </a:defRPr>
+            </a:pPr>
+            <a:r>
+              <a:t>APPENDIX · EXACT BUILD ROOTS</a:t>
+            </a:r>
+          </a:p>
+        </p:txBody>
+      </p:sp>
+      <p:sp>
+        <p:nvSpPr>
+          <p:cNvPr id="4" name="TextBox 3"/>
+          <p:cNvSpPr txBox="1"/>
+          <p:nvPr/>
+        </p:nvSpPr>
+        <p:spPr>
+          <a:xfrm>
+            <a:off x="548640" y="566928"/>
+            <a:ext cx="11064240" cy="731520"/>
+          </a:xfrm>
+          <a:prstGeom prst="rect">
+            <a:avLst/>
+          </a:prstGeom>
+          <a:noFill/>
+        </p:spPr>
+        <p:txBody>
+          <a:bodyPr wrap="square" anchor="t">
+            <a:spAutoFit/>
+          </a:bodyPr>
+          <a:lstStyle/>
+          <a:p>
+            <a:pPr algn="l">
+              <a:defRPr sz="3000" b="1">
+                <a:solidFill>
+                  <a:srgbClr val="0F172A"/>
+                </a:solidFill>
+                <a:latin typeface="Avenir Next"/>
+              </a:defRPr>
+            </a:pPr>
+            <a:r>
+              <a:t>Serial lane — MPI-capable, deliberately built without MPI</a:t>
+            </a:r>
+          </a:p>
+        </p:txBody>
+      </p:sp>
+      <p:sp>
+        <p:nvSpPr>
+          <p:cNvPr id="5" name="Rectangle 4"/>
+          <p:cNvSpPr/>
+          <p:nvPr/>
+        </p:nvSpPr>
+        <p:spPr>
+          <a:xfrm>
+            <a:off x="566928" y="1298448"/>
+            <a:ext cx="1463040" cy="41148"/>
+          </a:xfrm>
+          <a:prstGeom prst="rect">
+            <a:avLst/>
+          </a:prstGeom>
+          <a:solidFill>
+            <a:srgbClr val="0D9488"/>
+          </a:solidFill>
+          <a:ln>
+            <a:noFill/>
+          </a:ln>
+          <a:effectLst/>
+        </p:spPr>
+        <p:style>
+          <a:lnRef idx="1">
+            <a:schemeClr val="accent1"/>
+          </a:lnRef>
+          <a:fillRef idx="3">
+            <a:schemeClr val="accent1"/>
+          </a:fillRef>
+          <a:effectRef idx="2">
+            <a:schemeClr val="accent1"/>
+          </a:effectRef>
+          <a:fontRef idx="minor">
+            <a:schemeClr val="lt1"/>
+          </a:fontRef>
+        </p:style>
+        <p:txBody>
+          <a:bodyPr rtlCol="0" anchor="ctr"/>
+          <a:lstStyle/>
+          <a:p>
+            <a:pPr algn="ctr"/>
+          </a:p>
+        </p:txBody>
+      </p:sp>
+      <p:graphicFrame>
+        <p:nvGraphicFramePr>
+          <p:cNvPr id="6" name="Table 5"/>
+          <p:cNvGraphicFramePr>
+            <a:graphicFrameLocks noGrp="1"/>
+          </p:cNvGraphicFramePr>
+          <p:nvPr/>
+        </p:nvGraphicFramePr>
+        <p:xfrm>
+          <a:off x="548640" y="1481328"/>
+          <a:ext cx="11091672" cy="3922776"/>
+        </p:xfrm>
+        <a:graphic>
+          <a:graphicData uri="http://schemas.openxmlformats.org/drawingml/2006/table">
+            <a:tbl>
+              <a:tblPr>
+                <a:tableStyleId>{5C22544A-7EE6-4342-B048-85BDC9FD1C3A}</a:tableStyleId>
+              </a:tblPr>
+              <a:tblGrid>
+                <a:gridCol w="1920240"/>
+                <a:gridCol w="2286000"/>
+                <a:gridCol w="6885432"/>
+              </a:tblGrid>
+              <a:tr h="301752">
+                <a:tc>
+                  <a:txBody>
+                    <a:bodyPr/>
+                    <a:lstStyle/>
+                    <a:p>
+                      <a:pPr>
+                        <a:defRPr sz="1100" b="1">
+                          <a:solidFill>
+                            <a:srgbClr val="64748B"/>
+                          </a:solidFill>
+                          <a:latin typeface="Avenir Next"/>
+                        </a:defRPr>
+                      </a:pPr>
+                      <a:r>
+                        <a:t>Package</a:t>
+                      </a:r>
+                    </a:p>
+                  </a:txBody>
+                  <a:tcPr marL="109728" marR="73152" marT="13716" marB="13716" anchor="ctr">
+                    <a:solidFill>
+                      <a:srgbClr val="FFFFFF"/>
+                    </a:solidFill>
+                  </a:tcPr>
+                </a:tc>
+                <a:tc>
+                  <a:txBody>
+                    <a:bodyPr/>
+                    <a:lstStyle/>
+                    <a:p>
+                      <a:pPr>
+                        <a:defRPr sz="1100" b="1">
+                          <a:solidFill>
+                            <a:srgbClr val="64748B"/>
+                          </a:solidFill>
+                          <a:latin typeface="Avenir Next"/>
+                        </a:defRPr>
+                      </a:pPr>
+                      <a:r>
+                        <a:t>Versions</a:t>
+                      </a:r>
+                    </a:p>
+                  </a:txBody>
+                  <a:tcPr marL="109728" marR="73152" marT="13716" marB="13716" anchor="ctr">
+                    <a:solidFill>
+                      <a:srgbClr val="FFFFFF"/>
+                    </a:solidFill>
+                  </a:tcPr>
+                </a:tc>
+                <a:tc>
+                  <a:txBody>
+                    <a:bodyPr/>
+                    <a:lstStyle/>
+                    <a:p>
+                      <a:pPr>
+                        <a:defRPr sz="1100" b="1">
+                          <a:solidFill>
+                            <a:srgbClr val="64748B"/>
+                          </a:solidFill>
+                          <a:latin typeface="Avenir Next"/>
+                        </a:defRPr>
+                      </a:pPr>
+                      <a:r>
+                        <a:t>Built as · pairing</a:t>
+                      </a:r>
+                    </a:p>
+                  </a:txBody>
+                  <a:tcPr marL="109728" marR="73152" marT="13716" marB="13716" anchor="ctr">
+                    <a:solidFill>
+                      <a:srgbClr val="FFFFFF"/>
+                    </a:solidFill>
+                  </a:tcPr>
+                </a:tc>
+              </a:tr>
+              <a:tr h="301752">
+                <a:tc gridSpan="3">
+                  <a:txBody>
+                    <a:bodyPr/>
+                    <a:lstStyle/>
+                    <a:p>
+                      <a:pPr>
+                        <a:defRPr sz="1150" b="1">
+                          <a:solidFill>
+                            <a:srgbClr val="FFFFFF"/>
+                          </a:solidFill>
+                          <a:latin typeface="Avenir Next"/>
+                        </a:defRPr>
+                      </a:pPr>
+                      <a:r>
+                        <a:t>Serial data chains — each netcdf rides one named hdf5</a:t>
+                      </a:r>
+                    </a:p>
+                  </a:txBody>
+                  <a:tcPr marL="109728" marR="73152" marT="13716" marB="13716" anchor="ctr">
+                    <a:solidFill>
+                      <a:srgbClr val="D97706"/>
+                    </a:solidFill>
+                  </a:tcPr>
+                </a:tc>
+                <a:tc hMerge="1">
+                  <a:txBody>
+                    <a:bodyPr/>
+                    <a:lstStyle/>
+                    <a:p/>
+                  </a:txBody>
+                  <a:tcPr/>
+                </a:tc>
+                <a:tc hMerge="1">
+                  <a:txBody>
+                    <a:bodyPr/>
+                    <a:lstStyle/>
+                    <a:p/>
+                  </a:txBody>
+                  <a:tcPr/>
+                </a:tc>
+              </a:tr>
+              <a:tr h="301752">
+                <a:tc>
+                  <a:txBody>
+                    <a:bodyPr/>
+                    <a:lstStyle/>
+                    <a:p>
+                      <a:pPr>
+                        <a:defRPr sz="1100" b="1">
+                          <a:solidFill>
+                            <a:srgbClr val="0F172A"/>
+                          </a:solidFill>
+                          <a:latin typeface="Avenir Next"/>
+                        </a:defRPr>
+                      </a:pPr>
+                      <a:r>
+                        <a:t>hdf5</a:t>
+                      </a:r>
+                    </a:p>
+                  </a:txBody>
+                  <a:tcPr marL="109728" marR="73152" marT="13716" marB="13716" anchor="ctr">
+                    <a:solidFill>
+                      <a:srgbClr val="FFFFFF"/>
+                    </a:solidFill>
+                  </a:tcPr>
+                </a:tc>
+                <a:tc>
+                  <a:txBody>
+                    <a:bodyPr/>
+                    <a:lstStyle/>
+                    <a:p>
+                      <a:pPr>
+                        <a:defRPr sz="1100" b="0">
+                          <a:solidFill>
+                            <a:srgbClr val="334155"/>
+                          </a:solidFill>
+                          <a:latin typeface="Avenir Next"/>
+                        </a:defRPr>
+                      </a:pPr>
+                      <a:r>
+                        <a:t>2.1.0 · 1.14.6</a:t>
+                      </a:r>
+                    </a:p>
+                  </a:txBody>
+                  <a:tcPr marL="109728" marR="73152" marT="13716" marB="13716" anchor="ctr">
+                    <a:solidFill>
+                      <a:srgbClr val="FFFFFF"/>
+                    </a:solidFill>
+                  </a:tcPr>
+                </a:tc>
+                <a:tc>
+                  <a:txBody>
+                    <a:bodyPr/>
+                    <a:lstStyle/>
+                    <a:p>
+                      <a:pPr>
+                        <a:defRPr sz="1050" b="0">
+                          <a:solidFill>
+                            <a:srgbClr val="64748B"/>
+                          </a:solidFill>
+                          <a:latin typeface="Avenir Next"/>
+                        </a:defRPr>
+                      </a:pPr>
+                      <a:r>
+                        <a:t>~mpi +fortran +cxx +hl</a:t>
+                      </a:r>
+                    </a:p>
+                  </a:txBody>
+                  <a:tcPr marL="109728" marR="73152" marT="13716" marB="13716" anchor="ctr">
+                    <a:solidFill>
+                      <a:srgbClr val="FFFFFF"/>
+                    </a:solidFill>
+                  </a:tcPr>
+                </a:tc>
+              </a:tr>
+              <a:tr h="301752">
+                <a:tc>
+                  <a:txBody>
+                    <a:bodyPr/>
+                    <a:lstStyle/>
+                    <a:p>
+                      <a:pPr>
+                        <a:defRPr sz="1100" b="1">
+                          <a:solidFill>
+                            <a:srgbClr val="0F172A"/>
+                          </a:solidFill>
+                          <a:latin typeface="Avenir Next"/>
+                        </a:defRPr>
+                      </a:pPr>
+                      <a:r>
+                        <a:t>netcdf-c</a:t>
+                      </a:r>
+                    </a:p>
+                  </a:txBody>
+                  <a:tcPr marL="109728" marR="73152" marT="13716" marB="13716" anchor="ctr">
+                    <a:solidFill>
+                      <a:srgbClr val="FFFFFF"/>
+                    </a:solidFill>
+                  </a:tcPr>
+                </a:tc>
+                <a:tc>
+                  <a:txBody>
+                    <a:bodyPr/>
+                    <a:lstStyle/>
+                    <a:p>
+                      <a:pPr>
+                        <a:defRPr sz="1100" b="0">
+                          <a:solidFill>
+                            <a:srgbClr val="334155"/>
+                          </a:solidFill>
+                          <a:latin typeface="Avenir Next"/>
+                        </a:defRPr>
+                      </a:pPr>
+                      <a:r>
+                        <a:t>4.10.0 · 4.9.3</a:t>
+                      </a:r>
+                    </a:p>
+                  </a:txBody>
+                  <a:tcPr marL="109728" marR="73152" marT="13716" marB="13716" anchor="ctr">
+                    <a:solidFill>
+                      <a:srgbClr val="FFFFFF"/>
+                    </a:solidFill>
+                  </a:tcPr>
+                </a:tc>
+                <a:tc>
+                  <a:txBody>
+                    <a:bodyPr/>
+                    <a:lstStyle/>
+                    <a:p>
+                      <a:pPr>
+                        <a:defRPr sz="1050" b="0">
+                          <a:solidFill>
+                            <a:srgbClr val="64748B"/>
+                          </a:solidFill>
+                          <a:latin typeface="Avenir Next"/>
+                        </a:defRPr>
+                      </a:pPr>
+                      <a:r>
+                        <a:t>~mpi — paired to hdf5 2.1.0 / 1.14.6</a:t>
+                      </a:r>
+                    </a:p>
+                  </a:txBody>
+                  <a:tcPr marL="109728" marR="73152" marT="13716" marB="13716" anchor="ctr">
+                    <a:solidFill>
+                      <a:srgbClr val="FFFFFF"/>
+                    </a:solidFill>
+                  </a:tcPr>
+                </a:tc>
+              </a:tr>
+              <a:tr h="301752">
+                <a:tc>
+                  <a:txBody>
+                    <a:bodyPr/>
+                    <a:lstStyle/>
+                    <a:p>
+                      <a:pPr>
+                        <a:defRPr sz="1100" b="1">
+                          <a:solidFill>
+                            <a:srgbClr val="0F172A"/>
+                          </a:solidFill>
+                          <a:latin typeface="Avenir Next"/>
+                        </a:defRPr>
+                      </a:pPr>
+                      <a:r>
+                        <a:t>netcdf-fortran</a:t>
+                      </a:r>
+                    </a:p>
+                  </a:txBody>
+                  <a:tcPr marL="109728" marR="73152" marT="13716" marB="13716" anchor="ctr">
+                    <a:solidFill>
+                      <a:srgbClr val="FFFFFF"/>
+                    </a:solidFill>
+                  </a:tcPr>
+                </a:tc>
+                <a:tc>
+                  <a:txBody>
+                    <a:bodyPr/>
+                    <a:lstStyle/>
+                    <a:p>
+                      <a:pPr>
+                        <a:defRPr sz="1100" b="0">
+                          <a:solidFill>
+                            <a:srgbClr val="334155"/>
+                          </a:solidFill>
+                          <a:latin typeface="Avenir Next"/>
+                        </a:defRPr>
+                      </a:pPr>
+                      <a:r>
+                        <a:t>4.6.2 · 4.6.1</a:t>
+                      </a:r>
+                    </a:p>
+                  </a:txBody>
+                  <a:tcPr marL="109728" marR="73152" marT="13716" marB="13716" anchor="ctr">
+                    <a:solidFill>
+                      <a:srgbClr val="FFFFFF"/>
+                    </a:solidFill>
+                  </a:tcPr>
+                </a:tc>
+                <a:tc>
+                  <a:txBody>
+                    <a:bodyPr/>
+                    <a:lstStyle/>
+                    <a:p>
+                      <a:pPr>
+                        <a:defRPr sz="1050" b="0">
+                          <a:solidFill>
+                            <a:srgbClr val="64748B"/>
+                          </a:solidFill>
+                          <a:latin typeface="Avenir Next"/>
+                        </a:defRPr>
+                      </a:pPr>
+                      <a:r>
+                        <a:t>rides its paired netcdf-c / hdf5 chain</a:t>
+                      </a:r>
+                    </a:p>
+                  </a:txBody>
+                  <a:tcPr marL="109728" marR="73152" marT="13716" marB="13716" anchor="ctr">
+                    <a:solidFill>
+                      <a:srgbClr val="FFFFFF"/>
+                    </a:solidFill>
+                  </a:tcPr>
+                </a:tc>
+              </a:tr>
+              <a:tr h="301752">
+                <a:tc>
+                  <a:txBody>
+                    <a:bodyPr/>
+                    <a:lstStyle/>
+                    <a:p>
+                      <a:pPr>
+                        <a:defRPr sz="1100" b="1">
+                          <a:solidFill>
+                            <a:srgbClr val="0F172A"/>
+                          </a:solidFill>
+                          <a:latin typeface="Avenir Next"/>
+                        </a:defRPr>
+                      </a:pPr>
+                      <a:r>
+                        <a:t>netcdf-cxx4</a:t>
+                      </a:r>
+                    </a:p>
+                  </a:txBody>
+                  <a:tcPr marL="109728" marR="73152" marT="13716" marB="13716" anchor="ctr">
+                    <a:solidFill>
+                      <a:srgbClr val="FFFFFF"/>
+                    </a:solidFill>
+                  </a:tcPr>
+                </a:tc>
+                <a:tc>
+                  <a:txBody>
+                    <a:bodyPr/>
+                    <a:lstStyle/>
+                    <a:p>
+                      <a:pPr>
+                        <a:defRPr sz="1100" b="0">
+                          <a:solidFill>
+                            <a:srgbClr val="334155"/>
+                          </a:solidFill>
+                          <a:latin typeface="Avenir Next"/>
+                        </a:defRPr>
+                      </a:pPr>
+                      <a:r>
+                        <a:t>4.3.1</a:t>
+                      </a:r>
+                    </a:p>
+                  </a:txBody>
+                  <a:tcPr marL="109728" marR="73152" marT="13716" marB="13716" anchor="ctr">
+                    <a:solidFill>
+                      <a:srgbClr val="FFFFFF"/>
+                    </a:solidFill>
+                  </a:tcPr>
+                </a:tc>
+                <a:tc>
+                  <a:txBody>
+                    <a:bodyPr/>
+                    <a:lstStyle/>
+                    <a:p>
+                      <a:pPr>
+                        <a:defRPr sz="1050" b="0">
+                          <a:solidFill>
+                            <a:srgbClr val="64748B"/>
+                          </a:solidFill>
+                          <a:latin typeface="Avenir Next"/>
+                        </a:defRPr>
+                      </a:pPr>
+                      <a:r>
+                        <a:t>single recipe version — newest chain only</a:t>
+                      </a:r>
+                    </a:p>
+                  </a:txBody>
+                  <a:tcPr marL="109728" marR="73152" marT="13716" marB="13716" anchor="ctr">
+                    <a:solidFill>
+                      <a:srgbClr val="FFFFFF"/>
+                    </a:solidFill>
+                  </a:tcPr>
+                </a:tc>
+              </a:tr>
+              <a:tr h="301752">
+                <a:tc gridSpan="3">
+                  <a:txBody>
+                    <a:bodyPr/>
+                    <a:lstStyle/>
+                    <a:p>
+                      <a:pPr>
+                        <a:defRPr sz="1150" b="1">
+                          <a:solidFill>
+                            <a:srgbClr val="FFFFFF"/>
+                          </a:solidFill>
+                          <a:latin typeface="Avenir Next"/>
+                        </a:defRPr>
+                      </a:pPr>
+                      <a:r>
+                        <a:t>Serial math</a:t>
+                      </a:r>
+                    </a:p>
+                  </a:txBody>
+                  <a:tcPr marL="109728" marR="73152" marT="13716" marB="13716" anchor="ctr">
+                    <a:solidFill>
+                      <a:srgbClr val="D97706"/>
+                    </a:solidFill>
+                  </a:tcPr>
+                </a:tc>
+                <a:tc hMerge="1">
+                  <a:txBody>
+                    <a:bodyPr/>
+                    <a:lstStyle/>
+                    <a:p/>
+                  </a:txBody>
+                  <a:tcPr/>
+                </a:tc>
+                <a:tc hMerge="1">
+                  <a:txBody>
+                    <a:bodyPr/>
+                    <a:lstStyle/>
+                    <a:p/>
+                  </a:txBody>
+                  <a:tcPr/>
+                </a:tc>
+              </a:tr>
+              <a:tr h="301752">
+                <a:tc>
+                  <a:txBody>
+                    <a:bodyPr/>
+                    <a:lstStyle/>
+                    <a:p>
+                      <a:pPr>
+                        <a:defRPr sz="1100" b="1">
+                          <a:solidFill>
+                            <a:srgbClr val="0F172A"/>
+                          </a:solidFill>
+                          <a:latin typeface="Avenir Next"/>
+                        </a:defRPr>
+                      </a:pPr>
+                      <a:r>
+                        <a:t>fftw</a:t>
+                      </a:r>
+                    </a:p>
+                  </a:txBody>
+                  <a:tcPr marL="109728" marR="73152" marT="13716" marB="13716" anchor="ctr">
+                    <a:solidFill>
+                      <a:srgbClr val="FFFFFF"/>
+                    </a:solidFill>
+                  </a:tcPr>
+                </a:tc>
+                <a:tc>
+                  <a:txBody>
+                    <a:bodyPr/>
+                    <a:lstStyle/>
+                    <a:p>
+                      <a:pPr>
+                        <a:defRPr sz="1100" b="0">
+                          <a:solidFill>
+                            <a:srgbClr val="334155"/>
+                          </a:solidFill>
+                          <a:latin typeface="Avenir Next"/>
+                        </a:defRPr>
+                      </a:pPr>
+                      <a:r>
+                        <a:t>3.3.11 · 3.3.10</a:t>
+                      </a:r>
+                    </a:p>
+                  </a:txBody>
+                  <a:tcPr marL="109728" marR="73152" marT="13716" marB="13716" anchor="ctr">
+                    <a:solidFill>
+                      <a:srgbClr val="FFFFFF"/>
+                    </a:solidFill>
+                  </a:tcPr>
+                </a:tc>
+                <a:tc>
+                  <a:txBody>
+                    <a:bodyPr/>
+                    <a:lstStyle/>
+                    <a:p>
+                      <a:pPr>
+                        <a:defRPr sz="1050" b="0">
+                          <a:solidFill>
+                            <a:srgbClr val="64748B"/>
+                          </a:solidFill>
+                          <a:latin typeface="Avenir Next"/>
+                        </a:defRPr>
+                      </a:pPr>
+                      <a:r>
+                        <a:t>~mpi</a:t>
+                      </a:r>
+                    </a:p>
+                  </a:txBody>
+                  <a:tcPr marL="109728" marR="73152" marT="13716" marB="13716" anchor="ctr">
+                    <a:solidFill>
+                      <a:srgbClr val="FFFFFF"/>
+                    </a:solidFill>
+                  </a:tcPr>
+                </a:tc>
+              </a:tr>
+              <a:tr h="301752">
+                <a:tc>
+                  <a:txBody>
+                    <a:bodyPr/>
+                    <a:lstStyle/>
+                    <a:p>
+                      <a:pPr>
+                        <a:defRPr sz="1100" b="1">
+                          <a:solidFill>
+                            <a:srgbClr val="0F172A"/>
+                          </a:solidFill>
+                          <a:latin typeface="Avenir Next"/>
+                        </a:defRPr>
+                      </a:pPr>
+                      <a:r>
+                        <a:t>boost</a:t>
+                      </a:r>
+                    </a:p>
+                  </a:txBody>
+                  <a:tcPr marL="109728" marR="73152" marT="13716" marB="13716" anchor="ctr">
+                    <a:solidFill>
+                      <a:srgbClr val="FFFFFF"/>
+                    </a:solidFill>
+                  </a:tcPr>
+                </a:tc>
+                <a:tc>
+                  <a:txBody>
+                    <a:bodyPr/>
+                    <a:lstStyle/>
+                    <a:p>
+                      <a:pPr>
+                        <a:defRPr sz="1100" b="0">
+                          <a:solidFill>
+                            <a:srgbClr val="334155"/>
+                          </a:solidFill>
+                          <a:latin typeface="Avenir Next"/>
+                        </a:defRPr>
+                      </a:pPr>
+                      <a:r>
+                        <a:t>1.90.0 · 1.89.0</a:t>
+                      </a:r>
+                    </a:p>
+                  </a:txBody>
+                  <a:tcPr marL="109728" marR="73152" marT="13716" marB="13716" anchor="ctr">
+                    <a:solidFill>
+                      <a:srgbClr val="FFFFFF"/>
+                    </a:solidFill>
+                  </a:tcPr>
+                </a:tc>
+                <a:tc>
+                  <a:txBody>
+                    <a:bodyPr/>
+                    <a:lstStyle/>
+                    <a:p>
+                      <a:pPr>
+                        <a:defRPr sz="1050" b="0">
+                          <a:solidFill>
+                            <a:srgbClr val="64748B"/>
+                          </a:solidFill>
+                          <a:latin typeface="Avenir Next"/>
+                        </a:defRPr>
+                      </a:pPr>
+                      <a:r>
+                        <a:t>~mpi — dual-build: the MPI lane carries its own +mpi boost</a:t>
+                      </a:r>
+                    </a:p>
+                  </a:txBody>
+                  <a:tcPr marL="109728" marR="73152" marT="13716" marB="13716" anchor="ctr">
+                    <a:solidFill>
+                      <a:srgbClr val="FFFFFF"/>
+                    </a:solidFill>
+                  </a:tcPr>
+                </a:tc>
+              </a:tr>
+              <a:tr h="301752">
+                <a:tc gridSpan="3">
+                  <a:txBody>
+                    <a:bodyPr/>
+                    <a:lstStyle/>
+                    <a:p>
+                      <a:pPr>
+                        <a:defRPr sz="1150" b="1">
+                          <a:solidFill>
+                            <a:srgbClr val="FFFFFF"/>
+                          </a:solidFill>
+                          <a:latin typeface="Avenir Next"/>
+                        </a:defRPr>
+                      </a:pPr>
+                      <a:r>
+                        <a:t>Lane-agnostic — built here once, module-visible in every lane</a:t>
+                      </a:r>
+                    </a:p>
+                  </a:txBody>
+                  <a:tcPr marL="109728" marR="73152" marT="13716" marB="13716" anchor="ctr">
+                    <a:solidFill>
+                      <a:srgbClr val="15803D"/>
+                    </a:solidFill>
+                  </a:tcPr>
+                </a:tc>
+                <a:tc hMerge="1">
+                  <a:txBody>
+                    <a:bodyPr/>
+                    <a:lstStyle/>
+                    <a:p/>
+                  </a:txBody>
+                  <a:tcPr/>
+                </a:tc>
+                <a:tc hMerge="1">
+                  <a:txBody>
+                    <a:bodyPr/>
+                    <a:lstStyle/>
+                    <a:p/>
+                  </a:txBody>
+                  <a:tcPr/>
+                </a:tc>
+              </a:tr>
+              <a:tr h="301752">
+                <a:tc>
+                  <a:txBody>
+                    <a:bodyPr/>
+                    <a:lstStyle/>
+                    <a:p>
+                      <a:pPr>
+                        <a:defRPr sz="1100" b="1">
+                          <a:solidFill>
+                            <a:srgbClr val="0F172A"/>
+                          </a:solidFill>
+                          <a:latin typeface="Avenir Next"/>
+                        </a:defRPr>
+                      </a:pPr>
+                      <a:r>
+                        <a:t>openblas</a:t>
+                      </a:r>
+                    </a:p>
+                  </a:txBody>
+                  <a:tcPr marL="109728" marR="73152" marT="13716" marB="13716" anchor="ctr">
+                    <a:solidFill>
+                      <a:srgbClr val="FFFFFF"/>
+                    </a:solidFill>
+                  </a:tcPr>
+                </a:tc>
+                <a:tc>
+                  <a:txBody>
+                    <a:bodyPr/>
+                    <a:lstStyle/>
+                    <a:p>
+                      <a:pPr>
+                        <a:defRPr sz="1100" b="0">
+                          <a:solidFill>
+                            <a:srgbClr val="334155"/>
+                          </a:solidFill>
+                          <a:latin typeface="Avenir Next"/>
+                        </a:defRPr>
+                      </a:pPr>
+                      <a:r>
+                        <a:t>0.3.33 · 0.3.32</a:t>
+                      </a:r>
+                    </a:p>
+                  </a:txBody>
+                  <a:tcPr marL="109728" marR="73152" marT="13716" marB="13716" anchor="ctr">
+                    <a:solidFill>
+                      <a:srgbClr val="FFFFFF"/>
+                    </a:solidFill>
+                  </a:tcPr>
+                </a:tc>
+                <a:tc>
+                  <a:txBody>
+                    <a:bodyPr/>
+                    <a:lstStyle/>
+                    <a:p>
+                      <a:pPr>
+                        <a:defRPr sz="1050" b="0">
+                          <a:solidFill>
+                            <a:srgbClr val="64748B"/>
+                          </a:solidFill>
+                          <a:latin typeface="Avenir Next"/>
+                        </a:defRPr>
+                      </a:pPr>
+                      <a:r>
+                        <a:t>performance-sensitive so payload, not core — BLAS for all lanes</a:t>
+                      </a:r>
+                    </a:p>
+                  </a:txBody>
+                  <a:tcPr marL="109728" marR="73152" marT="13716" marB="13716" anchor="ctr">
+                    <a:solidFill>
+                      <a:srgbClr val="FFFFFF"/>
+                    </a:solidFill>
+                  </a:tcPr>
+                </a:tc>
+              </a:tr>
+              <a:tr h="301752">
+                <a:tc>
+                  <a:txBody>
+                    <a:bodyPr/>
+                    <a:lstStyle/>
+                    <a:p>
+                      <a:pPr>
+                        <a:defRPr sz="1100" b="1">
+                          <a:solidFill>
+                            <a:srgbClr val="0F172A"/>
+                          </a:solidFill>
+                          <a:latin typeface="Avenir Next"/>
+                        </a:defRPr>
+                      </a:pPr>
+                      <a:r>
+                        <a:t>netlib-lapack</a:t>
+                      </a:r>
+                    </a:p>
+                  </a:txBody>
+                  <a:tcPr marL="109728" marR="73152" marT="13716" marB="13716" anchor="ctr">
+                    <a:solidFill>
+                      <a:srgbClr val="FFFFFF"/>
+                    </a:solidFill>
+                  </a:tcPr>
+                </a:tc>
+                <a:tc>
+                  <a:txBody>
+                    <a:bodyPr/>
+                    <a:lstStyle/>
+                    <a:p>
+                      <a:pPr>
+                        <a:defRPr sz="1100" b="0">
+                          <a:solidFill>
+                            <a:srgbClr val="334155"/>
+                          </a:solidFill>
+                          <a:latin typeface="Avenir Next"/>
+                        </a:defRPr>
+                      </a:pPr>
+                      <a:r>
+                        <a:t>3.12.1 · 3.12.0</a:t>
+                      </a:r>
+                    </a:p>
+                  </a:txBody>
+                  <a:tcPr marL="109728" marR="73152" marT="13716" marB="13716" anchor="ctr">
+                    <a:solidFill>
+                      <a:srgbClr val="FFFFFF"/>
+                    </a:solidFill>
+                  </a:tcPr>
+                </a:tc>
+                <a:tc>
+                  <a:txBody>
+                    <a:bodyPr/>
+                    <a:lstStyle/>
+                    <a:p>
+                      <a:pPr>
+                        <a:defRPr sz="1050" b="0">
+                          <a:solidFill>
+                            <a:srgbClr val="64748B"/>
+                          </a:solidFill>
+                          <a:latin typeface="Avenir Next"/>
+                        </a:defRPr>
+                      </a:pPr>
+                      <a:r>
+                        <a:t>reference LAPACK alongside openblas — flagged for team review</a:t>
+                      </a:r>
+                    </a:p>
+                  </a:txBody>
+                  <a:tcPr marL="109728" marR="73152" marT="13716" marB="13716" anchor="ctr">
+                    <a:solidFill>
+                      <a:srgbClr val="FFFFFF"/>
+                    </a:solidFill>
+                  </a:tcPr>
+                </a:tc>
+              </a:tr>
+              <a:tr h="301752">
+                <a:tc>
+                  <a:txBody>
+                    <a:bodyPr/>
+                    <a:lstStyle/>
+                    <a:p>
+                      <a:pPr>
+                        <a:defRPr sz="1100" b="1">
+                          <a:solidFill>
+                            <a:srgbClr val="0F172A"/>
+                          </a:solidFill>
+                          <a:latin typeface="Avenir Next"/>
+                        </a:defRPr>
+                      </a:pPr>
+                      <a:r>
+                        <a:t>gnuplot</a:t>
+                      </a:r>
+                    </a:p>
+                  </a:txBody>
+                  <a:tcPr marL="109728" marR="73152" marT="13716" marB="13716" anchor="ctr">
+                    <a:solidFill>
+                      <a:srgbClr val="FFFFFF"/>
+                    </a:solidFill>
+                  </a:tcPr>
+                </a:tc>
+                <a:tc>
+                  <a:txBody>
+                    <a:bodyPr/>
+                    <a:lstStyle/>
+                    <a:p>
+                      <a:pPr>
+                        <a:defRPr sz="1100" b="0">
+                          <a:solidFill>
+                            <a:srgbClr val="334155"/>
+                          </a:solidFill>
+                          <a:latin typeface="Avenir Next"/>
+                        </a:defRPr>
+                      </a:pPr>
+                      <a:r>
+                        <a:t>6.0.0 · 5.4.10</a:t>
+                      </a:r>
+                    </a:p>
+                  </a:txBody>
+                  <a:tcPr marL="109728" marR="73152" marT="13716" marB="13716" anchor="ctr">
+                    <a:solidFill>
+                      <a:srgbClr val="FFFFFF"/>
+                    </a:solidFill>
+                  </a:tcPr>
+                </a:tc>
+                <a:tc>
+                  <a:txBody>
+                    <a:bodyPr/>
+                    <a:lstStyle/>
+                    <a:p>
+                      <a:pPr>
+                        <a:defRPr sz="1050" b="0">
+                          <a:solidFill>
+                            <a:srgbClr val="64748B"/>
+                          </a:solidFill>
+                          <a:latin typeface="Avenir Next"/>
+                        </a:defRPr>
+                      </a:pPr>
+                      <a:r>
+                        <a:t>needs the surface's compiler for compatibility — payload, not core</a:t>
+                      </a:r>
+                    </a:p>
+                  </a:txBody>
+                  <a:tcPr marL="109728" marR="73152" marT="13716" marB="13716" anchor="ctr">
+                    <a:solidFill>
+                      <a:srgbClr val="FFFFFF"/>
+                    </a:solidFill>
+                  </a:tcPr>
+                </a:tc>
+              </a:tr>
+            </a:tbl>
+          </a:graphicData>
+        </a:graphic>
+      </p:graphicFrame>
+      <p:sp>
+        <p:nvSpPr>
+          <p:cNvPr id="7" name="TextBox 6"/>
+          <p:cNvSpPr txBox="1"/>
+          <p:nvPr/>
+        </p:nvSpPr>
+        <p:spPr>
+          <a:xfrm>
+            <a:off x="548640" y="6583680"/>
+            <a:ext cx="11064240" cy="256032"/>
+          </a:xfrm>
+          <a:prstGeom prst="rect">
+            <a:avLst/>
+          </a:prstGeom>
+          <a:noFill/>
+        </p:spPr>
+        <p:txBody>
+          <a:bodyPr wrap="square" anchor="t">
+            <a:spAutoFit/>
+          </a:bodyPr>
+          <a:lstStyle/>
+          <a:p>
+            <a:pPr algn="l">
+              <a:defRPr sz="1050" b="0">
+                <a:solidFill>
+                  <a:srgbClr val="64748B"/>
+                </a:solidFill>
+                <a:latin typeface="Avenir Next"/>
+              </a:defRPr>
+            </a:pPr>
+            <a:r>
+              <a:t>Version policy: newest supported + immediate predecessor · pinned to spack-packages v2026.06.0 (Spack v1.1.1)</a:t>
+            </a:r>
+          </a:p>
+        </p:txBody>
+      </p:sp>
+    </p:spTree>
+  </p:cSld>
+  <p:clrMapOvr>
+    <a:masterClrMapping/>
+  </p:clrMapOvr>
+</p:sld>
+</file>
+
+<file path=ppt/slides/slide11.xml><?xml version="1.0" encoding="utf-8"?>
+<p:sld xmlns:a="http://schemas.openxmlformats.org/drawingml/2006/main" xmlns:p="http://schemas.openxmlformats.org/presentationml/2006/main" xmlns:r="http://schemas.openxmlformats.org/officeDocument/2006/relationships">
+  <p:cSld>
+    <p:spTree>
+      <p:nvGrpSpPr>
+        <p:cNvPr id="1" name=""/>
+        <p:cNvGrpSpPr/>
+        <p:nvPr/>
+      </p:nvGrpSpPr>
+      <p:grpSpPr/>
+      <p:sp>
+        <p:nvSpPr>
+          <p:cNvPr id="2" name="Rectangle 1"/>
+          <p:cNvSpPr/>
+          <p:nvPr/>
+        </p:nvSpPr>
+        <p:spPr>
+          <a:xfrm>
+            <a:off x="0" y="0"/>
+            <a:ext cx="12191695" cy="6858000"/>
+          </a:xfrm>
+          <a:prstGeom prst="rect">
+            <a:avLst/>
+          </a:prstGeom>
+          <a:solidFill>
+            <a:srgbClr val="FFFFFF"/>
+          </a:solidFill>
+          <a:ln>
+            <a:noFill/>
+          </a:ln>
+          <a:effectLst/>
+        </p:spPr>
+        <p:style>
+          <a:lnRef idx="1">
+            <a:schemeClr val="accent1"/>
+          </a:lnRef>
+          <a:fillRef idx="3">
+            <a:schemeClr val="accent1"/>
+          </a:fillRef>
+          <a:effectRef idx="2">
+            <a:schemeClr val="accent1"/>
+          </a:effectRef>
+          <a:fontRef idx="minor">
+            <a:schemeClr val="lt1"/>
+          </a:fontRef>
+        </p:style>
+        <p:txBody>
+          <a:bodyPr rtlCol="0" anchor="ctr"/>
+          <a:lstStyle/>
+          <a:p>
+            <a:pPr algn="ctr"/>
+          </a:p>
+        </p:txBody>
+      </p:sp>
+      <p:sp>
+        <p:nvSpPr>
+          <p:cNvPr id="3" name="TextBox 2"/>
+          <p:cNvSpPr txBox="1"/>
+          <p:nvPr/>
+        </p:nvSpPr>
+        <p:spPr>
+          <a:xfrm>
+            <a:off x="548640" y="256032"/>
+            <a:ext cx="10972800" cy="365760"/>
+          </a:xfrm>
+          <a:prstGeom prst="rect">
+            <a:avLst/>
+          </a:prstGeom>
+          <a:noFill/>
+        </p:spPr>
+        <p:txBody>
+          <a:bodyPr wrap="square" anchor="t">
+            <a:spAutoFit/>
+          </a:bodyPr>
+          <a:lstStyle/>
+          <a:p>
+            <a:pPr algn="l">
+              <a:defRPr sz="1300" b="1">
+                <a:solidFill>
+                  <a:srgbClr val="0D9488"/>
+                </a:solidFill>
+                <a:latin typeface="Avenir Next"/>
+              </a:defRPr>
+            </a:pPr>
+            <a:r>
+              <a:t>APPENDIX · EXACT BUILD ROOTS</a:t>
+            </a:r>
+          </a:p>
+        </p:txBody>
+      </p:sp>
+      <p:sp>
+        <p:nvSpPr>
+          <p:cNvPr id="4" name="TextBox 3"/>
+          <p:cNvSpPr txBox="1"/>
+          <p:nvPr/>
+        </p:nvSpPr>
+        <p:spPr>
+          <a:xfrm>
+            <a:off x="548640" y="566928"/>
+            <a:ext cx="11064240" cy="731520"/>
+          </a:xfrm>
+          <a:prstGeom prst="rect">
+            <a:avLst/>
+          </a:prstGeom>
+          <a:noFill/>
+        </p:spPr>
+        <p:txBody>
+          <a:bodyPr wrap="square" anchor="t">
+            <a:spAutoFit/>
+          </a:bodyPr>
+          <a:lstStyle/>
+          <a:p>
+            <a:pPr algn="l">
+              <a:defRPr sz="3000" b="1">
+                <a:solidFill>
+                  <a:srgbClr val="0F172A"/>
+                </a:solidFill>
+                <a:latin typeface="Avenir Next"/>
+              </a:defRPr>
+            </a:pPr>
+            <a:r>
+              <a:t>MPI and GPU lanes — built against the system MPI</a:t>
+            </a:r>
+          </a:p>
+        </p:txBody>
+      </p:sp>
+      <p:sp>
+        <p:nvSpPr>
+          <p:cNvPr id="5" name="Rectangle 4"/>
+          <p:cNvSpPr/>
+          <p:nvPr/>
+        </p:nvSpPr>
+        <p:spPr>
+          <a:xfrm>
+            <a:off x="566928" y="1298448"/>
+            <a:ext cx="1463040" cy="41148"/>
+          </a:xfrm>
+          <a:prstGeom prst="rect">
+            <a:avLst/>
+          </a:prstGeom>
+          <a:solidFill>
+            <a:srgbClr val="0D9488"/>
+          </a:solidFill>
+          <a:ln>
+            <a:noFill/>
+          </a:ln>
+          <a:effectLst/>
+        </p:spPr>
+        <p:style>
+          <a:lnRef idx="1">
+            <a:schemeClr val="accent1"/>
+          </a:lnRef>
+          <a:fillRef idx="3">
+            <a:schemeClr val="accent1"/>
+          </a:fillRef>
+          <a:effectRef idx="2">
+            <a:schemeClr val="accent1"/>
+          </a:effectRef>
+          <a:fontRef idx="minor">
+            <a:schemeClr val="lt1"/>
+          </a:fontRef>
+        </p:style>
+        <p:txBody>
+          <a:bodyPr rtlCol="0" anchor="ctr"/>
+          <a:lstStyle/>
+          <a:p>
+            <a:pPr algn="ctr"/>
+          </a:p>
+        </p:txBody>
+      </p:sp>
+      <p:graphicFrame>
+        <p:nvGraphicFramePr>
+          <p:cNvPr id="6" name="Table 5"/>
+          <p:cNvGraphicFramePr>
+            <a:graphicFrameLocks noGrp="1"/>
+          </p:cNvGraphicFramePr>
+          <p:nvPr/>
+        </p:nvGraphicFramePr>
+        <p:xfrm>
+          <a:off x="548640" y="1481328"/>
+          <a:ext cx="11091672" cy="5129784"/>
+        </p:xfrm>
+        <a:graphic>
+          <a:graphicData uri="http://schemas.openxmlformats.org/drawingml/2006/table">
+            <a:tbl>
+              <a:tblPr>
+                <a:tableStyleId>{5C22544A-7EE6-4342-B048-85BDC9FD1C3A}</a:tableStyleId>
+              </a:tblPr>
+              <a:tblGrid>
+                <a:gridCol w="1920240"/>
+                <a:gridCol w="2286000"/>
+                <a:gridCol w="6885432"/>
+              </a:tblGrid>
+              <a:tr h="301752">
+                <a:tc>
+                  <a:txBody>
+                    <a:bodyPr/>
+                    <a:lstStyle/>
+                    <a:p>
+                      <a:pPr>
+                        <a:defRPr sz="1100" b="1">
+                          <a:solidFill>
+                            <a:srgbClr val="64748B"/>
+                          </a:solidFill>
+                          <a:latin typeface="Avenir Next"/>
+                        </a:defRPr>
+                      </a:pPr>
+                      <a:r>
+                        <a:t>Package</a:t>
+                      </a:r>
+                    </a:p>
+                  </a:txBody>
+                  <a:tcPr marL="109728" marR="73152" marT="13716" marB="13716" anchor="ctr">
+                    <a:solidFill>
+                      <a:srgbClr val="FFFFFF"/>
+                    </a:solidFill>
+                  </a:tcPr>
+                </a:tc>
+                <a:tc>
+                  <a:txBody>
+                    <a:bodyPr/>
+                    <a:lstStyle/>
+                    <a:p>
+                      <a:pPr>
+                        <a:defRPr sz="1100" b="1">
+                          <a:solidFill>
+                            <a:srgbClr val="64748B"/>
+                          </a:solidFill>
+                          <a:latin typeface="Avenir Next"/>
+                        </a:defRPr>
+                      </a:pPr>
+                      <a:r>
+                        <a:t>Versions</a:t>
+                      </a:r>
+                    </a:p>
+                  </a:txBody>
+                  <a:tcPr marL="109728" marR="73152" marT="13716" marB="13716" anchor="ctr">
+                    <a:solidFill>
+                      <a:srgbClr val="FFFFFF"/>
+                    </a:solidFill>
+                  </a:tcPr>
+                </a:tc>
+                <a:tc>
+                  <a:txBody>
+                    <a:bodyPr/>
+                    <a:lstStyle/>
+                    <a:p>
+                      <a:pPr>
+                        <a:defRPr sz="1100" b="1">
+                          <a:solidFill>
+                            <a:srgbClr val="64748B"/>
+                          </a:solidFill>
+                          <a:latin typeface="Avenir Next"/>
+                        </a:defRPr>
+                      </a:pPr>
+                      <a:r>
+                        <a:t>Built as · pairing</a:t>
+                      </a:r>
+                    </a:p>
+                  </a:txBody>
+                  <a:tcPr marL="109728" marR="73152" marT="13716" marB="13716" anchor="ctr">
+                    <a:solidFill>
+                      <a:srgbClr val="FFFFFF"/>
+                    </a:solidFill>
+                  </a:tcPr>
+                </a:tc>
+              </a:tr>
+              <a:tr h="301752">
+                <a:tc gridSpan="3">
+                  <a:txBody>
+                    <a:bodyPr/>
+                    <a:lstStyle/>
+                    <a:p>
+                      <a:pPr>
+                        <a:defRPr sz="1150" b="1">
+                          <a:solidFill>
+                            <a:srgbClr val="FFFFFF"/>
+                          </a:solidFill>
+                          <a:latin typeface="Avenir Next"/>
+                        </a:defRPr>
+                      </a:pPr>
+                      <a:r>
+                        <a:t>MPI data chains — same pairing rule as serial</a:t>
+                      </a:r>
+                    </a:p>
+                  </a:txBody>
+                  <a:tcPr marL="109728" marR="73152" marT="13716" marB="13716" anchor="ctr">
+                    <a:solidFill>
+                      <a:srgbClr val="2563EB"/>
+                    </a:solidFill>
+                  </a:tcPr>
+                </a:tc>
+                <a:tc hMerge="1">
+                  <a:txBody>
+                    <a:bodyPr/>
+                    <a:lstStyle/>
+                    <a:p/>
+                  </a:txBody>
+                  <a:tcPr/>
+                </a:tc>
+                <a:tc hMerge="1">
+                  <a:txBody>
+                    <a:bodyPr/>
+                    <a:lstStyle/>
+                    <a:p/>
+                  </a:txBody>
+                  <a:tcPr/>
+                </a:tc>
+              </a:tr>
+              <a:tr h="301752">
+                <a:tc>
+                  <a:txBody>
+                    <a:bodyPr/>
+                    <a:lstStyle/>
+                    <a:p>
+                      <a:pPr>
+                        <a:defRPr sz="1100" b="1">
+                          <a:solidFill>
+                            <a:srgbClr val="0F172A"/>
+                          </a:solidFill>
+                          <a:latin typeface="Avenir Next"/>
+                        </a:defRPr>
+                      </a:pPr>
+                      <a:r>
+                        <a:t>hdf5</a:t>
+                      </a:r>
+                    </a:p>
+                  </a:txBody>
+                  <a:tcPr marL="109728" marR="73152" marT="13716" marB="13716" anchor="ctr">
+                    <a:solidFill>
+                      <a:srgbClr val="FFFFFF"/>
+                    </a:solidFill>
+                  </a:tcPr>
+                </a:tc>
+                <a:tc>
+                  <a:txBody>
+                    <a:bodyPr/>
+                    <a:lstStyle/>
+                    <a:p>
+                      <a:pPr>
+                        <a:defRPr sz="1100" b="0">
+                          <a:solidFill>
+                            <a:srgbClr val="334155"/>
+                          </a:solidFill>
+                          <a:latin typeface="Avenir Next"/>
+                        </a:defRPr>
+                      </a:pPr>
+                      <a:r>
+                        <a:t>2.1.0 · 1.14.6</a:t>
+                      </a:r>
+                    </a:p>
+                  </a:txBody>
+                  <a:tcPr marL="109728" marR="73152" marT="13716" marB="13716" anchor="ctr">
+                    <a:solidFill>
+                      <a:srgbClr val="FFFFFF"/>
+                    </a:solidFill>
+                  </a:tcPr>
+                </a:tc>
+                <a:tc>
+                  <a:txBody>
+                    <a:bodyPr/>
+                    <a:lstStyle/>
+                    <a:p>
+                      <a:pPr>
+                        <a:defRPr sz="1050" b="0">
+                          <a:solidFill>
+                            <a:srgbClr val="64748B"/>
+                          </a:solidFill>
+                          <a:latin typeface="Avenir Next"/>
+                        </a:defRPr>
+                      </a:pPr>
+                      <a:r>
+                        <a:t>+mpi +fortran +cxx +hl</a:t>
+                      </a:r>
+                    </a:p>
+                  </a:txBody>
+                  <a:tcPr marL="109728" marR="73152" marT="13716" marB="13716" anchor="ctr">
+                    <a:solidFill>
+                      <a:srgbClr val="FFFFFF"/>
+                    </a:solidFill>
+                  </a:tcPr>
+                </a:tc>
+              </a:tr>
+              <a:tr h="301752">
+                <a:tc>
+                  <a:txBody>
+                    <a:bodyPr/>
+                    <a:lstStyle/>
+                    <a:p>
+                      <a:pPr>
+                        <a:defRPr sz="1100" b="1">
+                          <a:solidFill>
+                            <a:srgbClr val="0F172A"/>
+                          </a:solidFill>
+                          <a:latin typeface="Avenir Next"/>
+                        </a:defRPr>
+                      </a:pPr>
+                      <a:r>
+                        <a:t>netcdf-c</a:t>
+                      </a:r>
+                    </a:p>
+                  </a:txBody>
+                  <a:tcPr marL="109728" marR="73152" marT="13716" marB="13716" anchor="ctr">
+                    <a:solidFill>
+                      <a:srgbClr val="FFFFFF"/>
+                    </a:solidFill>
+                  </a:tcPr>
+                </a:tc>
+                <a:tc>
+                  <a:txBody>
+                    <a:bodyPr/>
+                    <a:lstStyle/>
+                    <a:p>
+                      <a:pPr>
+                        <a:defRPr sz="1100" b="0">
+                          <a:solidFill>
+                            <a:srgbClr val="334155"/>
+                          </a:solidFill>
+                          <a:latin typeface="Avenir Next"/>
+                        </a:defRPr>
+                      </a:pPr>
+                      <a:r>
+                        <a:t>4.10.0 · 4.9.3</a:t>
+                      </a:r>
+                    </a:p>
+                  </a:txBody>
+                  <a:tcPr marL="109728" marR="73152" marT="13716" marB="13716" anchor="ctr">
+                    <a:solidFill>
+                      <a:srgbClr val="FFFFFF"/>
+                    </a:solidFill>
+                  </a:tcPr>
+                </a:tc>
+                <a:tc>
+                  <a:txBody>
+                    <a:bodyPr/>
+                    <a:lstStyle/>
+                    <a:p>
+                      <a:pPr>
+                        <a:defRPr sz="1050" b="0">
+                          <a:solidFill>
+                            <a:srgbClr val="64748B"/>
+                          </a:solidFill>
+                          <a:latin typeface="Avenir Next"/>
+                        </a:defRPr>
+                      </a:pPr>
+                      <a:r>
+                        <a:t>+mpi +parallel-netcdf — paired to hdf5 2.1.0 / 1.14.6</a:t>
+                      </a:r>
+                    </a:p>
+                  </a:txBody>
+                  <a:tcPr marL="109728" marR="73152" marT="13716" marB="13716" anchor="ctr">
+                    <a:solidFill>
+                      <a:srgbClr val="FFFFFF"/>
+                    </a:solidFill>
+                  </a:tcPr>
+                </a:tc>
+              </a:tr>
+              <a:tr h="301752">
+                <a:tc>
+                  <a:txBody>
+                    <a:bodyPr/>
+                    <a:lstStyle/>
+                    <a:p>
+                      <a:pPr>
+                        <a:defRPr sz="1100" b="1">
+                          <a:solidFill>
+                            <a:srgbClr val="0F172A"/>
+                          </a:solidFill>
+                          <a:latin typeface="Avenir Next"/>
+                        </a:defRPr>
+                      </a:pPr>
+                      <a:r>
+                        <a:t>netcdf-fortran</a:t>
+                      </a:r>
+                    </a:p>
+                  </a:txBody>
+                  <a:tcPr marL="109728" marR="73152" marT="13716" marB="13716" anchor="ctr">
+                    <a:solidFill>
+                      <a:srgbClr val="FFFFFF"/>
+                    </a:solidFill>
+                  </a:tcPr>
+                </a:tc>
+                <a:tc>
+                  <a:txBody>
+                    <a:bodyPr/>
+                    <a:lstStyle/>
+                    <a:p>
+                      <a:pPr>
+                        <a:defRPr sz="1100" b="0">
+                          <a:solidFill>
+                            <a:srgbClr val="334155"/>
+                          </a:solidFill>
+                          <a:latin typeface="Avenir Next"/>
+                        </a:defRPr>
+                      </a:pPr>
+                      <a:r>
+                        <a:t>4.6.2 · 4.6.1</a:t>
+                      </a:r>
+                    </a:p>
+                  </a:txBody>
+                  <a:tcPr marL="109728" marR="73152" marT="13716" marB="13716" anchor="ctr">
+                    <a:solidFill>
+                      <a:srgbClr val="FFFFFF"/>
+                    </a:solidFill>
+                  </a:tcPr>
+                </a:tc>
+                <a:tc>
+                  <a:txBody>
+                    <a:bodyPr/>
+                    <a:lstStyle/>
+                    <a:p>
+                      <a:pPr>
+                        <a:defRPr sz="1050" b="0">
+                          <a:solidFill>
+                            <a:srgbClr val="64748B"/>
+                          </a:solidFill>
+                          <a:latin typeface="Avenir Next"/>
+                        </a:defRPr>
+                      </a:pPr>
+                      <a:r>
+                        <a:t>rides its paired netcdf-c / hdf5 chain</a:t>
+                      </a:r>
+                    </a:p>
+                  </a:txBody>
+                  <a:tcPr marL="109728" marR="73152" marT="13716" marB="13716" anchor="ctr">
+                    <a:solidFill>
+                      <a:srgbClr val="FFFFFF"/>
+                    </a:solidFill>
+                  </a:tcPr>
+                </a:tc>
+              </a:tr>
+              <a:tr h="301752">
+                <a:tc>
+                  <a:txBody>
+                    <a:bodyPr/>
+                    <a:lstStyle/>
+                    <a:p>
+                      <a:pPr>
+                        <a:defRPr sz="1100" b="1">
+                          <a:solidFill>
+                            <a:srgbClr val="0F172A"/>
+                          </a:solidFill>
+                          <a:latin typeface="Avenir Next"/>
+                        </a:defRPr>
+                      </a:pPr>
+                      <a:r>
+                        <a:t>netcdf-cxx4</a:t>
+                      </a:r>
+                    </a:p>
+                  </a:txBody>
+                  <a:tcPr marL="109728" marR="73152" marT="13716" marB="13716" anchor="ctr">
+                    <a:solidFill>
+                      <a:srgbClr val="FFFFFF"/>
+                    </a:solidFill>
+                  </a:tcPr>
+                </a:tc>
+                <a:tc>
+                  <a:txBody>
+                    <a:bodyPr/>
+                    <a:lstStyle/>
+                    <a:p>
+                      <a:pPr>
+                        <a:defRPr sz="1100" b="0">
+                          <a:solidFill>
+                            <a:srgbClr val="334155"/>
+                          </a:solidFill>
+                          <a:latin typeface="Avenir Next"/>
+                        </a:defRPr>
+                      </a:pPr>
+                      <a:r>
+                        <a:t>4.3.1</a:t>
+                      </a:r>
+                    </a:p>
+                  </a:txBody>
+                  <a:tcPr marL="109728" marR="73152" marT="13716" marB="13716" anchor="ctr">
+                    <a:solidFill>
+                      <a:srgbClr val="FFFFFF"/>
+                    </a:solidFill>
+                  </a:tcPr>
+                </a:tc>
+                <a:tc>
+                  <a:txBody>
+                    <a:bodyPr/>
+                    <a:lstStyle/>
+                    <a:p>
+                      <a:pPr>
+                        <a:defRPr sz="1050" b="0">
+                          <a:solidFill>
+                            <a:srgbClr val="64748B"/>
+                          </a:solidFill>
+                          <a:latin typeface="Avenir Next"/>
+                        </a:defRPr>
+                      </a:pPr>
+                      <a:r>
+                        <a:t>single recipe version — newest chain only</a:t>
+                      </a:r>
+                    </a:p>
+                  </a:txBody>
+                  <a:tcPr marL="109728" marR="73152" marT="13716" marB="13716" anchor="ctr">
+                    <a:solidFill>
+                      <a:srgbClr val="FFFFFF"/>
+                    </a:solidFill>
+                  </a:tcPr>
+                </a:tc>
+              </a:tr>
+              <a:tr h="301752">
+                <a:tc gridSpan="3">
+                  <a:txBody>
+                    <a:bodyPr/>
+                    <a:lstStyle/>
+                    <a:p>
+                      <a:pPr>
+                        <a:defRPr sz="1150" b="1">
+                          <a:solidFill>
+                            <a:srgbClr val="FFFFFF"/>
+                          </a:solidFill>
+                          <a:latin typeface="Avenir Next"/>
+                        </a:defRPr>
+                      </a:pPr>
+                      <a:r>
+                        <a:t>MPI math and tools</a:t>
+                      </a:r>
+                    </a:p>
+                  </a:txBody>
+                  <a:tcPr marL="109728" marR="73152" marT="13716" marB="13716" anchor="ctr">
+                    <a:solidFill>
+                      <a:srgbClr val="2563EB"/>
+                    </a:solidFill>
+                  </a:tcPr>
+                </a:tc>
+                <a:tc hMerge="1">
+                  <a:txBody>
+                    <a:bodyPr/>
+                    <a:lstStyle/>
+                    <a:p/>
+                  </a:txBody>
+                  <a:tcPr/>
+                </a:tc>
+                <a:tc hMerge="1">
+                  <a:txBody>
+                    <a:bodyPr/>
+                    <a:lstStyle/>
+                    <a:p/>
+                  </a:txBody>
+                  <a:tcPr/>
+                </a:tc>
+              </a:tr>
+              <a:tr h="301752">
+                <a:tc>
+                  <a:txBody>
+                    <a:bodyPr/>
+                    <a:lstStyle/>
+                    <a:p>
+                      <a:pPr>
+                        <a:defRPr sz="1100" b="1">
+                          <a:solidFill>
+                            <a:srgbClr val="0F172A"/>
+                          </a:solidFill>
+                          <a:latin typeface="Avenir Next"/>
+                        </a:defRPr>
+                      </a:pPr>
+                      <a:r>
+                        <a:t>fftw</a:t>
+                      </a:r>
+                    </a:p>
+                  </a:txBody>
+                  <a:tcPr marL="109728" marR="73152" marT="13716" marB="13716" anchor="ctr">
+                    <a:solidFill>
+                      <a:srgbClr val="FFFFFF"/>
+                    </a:solidFill>
+                  </a:tcPr>
+                </a:tc>
+                <a:tc>
+                  <a:txBody>
+                    <a:bodyPr/>
+                    <a:lstStyle/>
+                    <a:p>
+                      <a:pPr>
+                        <a:defRPr sz="1100" b="0">
+                          <a:solidFill>
+                            <a:srgbClr val="334155"/>
+                          </a:solidFill>
+                          <a:latin typeface="Avenir Next"/>
+                        </a:defRPr>
+                      </a:pPr>
+                      <a:r>
+                        <a:t>3.3.11 · 3.3.10</a:t>
+                      </a:r>
+                    </a:p>
+                  </a:txBody>
+                  <a:tcPr marL="109728" marR="73152" marT="13716" marB="13716" anchor="ctr">
+                    <a:solidFill>
+                      <a:srgbClr val="FFFFFF"/>
+                    </a:solidFill>
+                  </a:tcPr>
+                </a:tc>
+                <a:tc>
+                  <a:txBody>
+                    <a:bodyPr/>
+                    <a:lstStyle/>
+                    <a:p>
+                      <a:pPr>
+                        <a:defRPr sz="1050" b="0">
+                          <a:solidFill>
+                            <a:srgbClr val="64748B"/>
+                          </a:solidFill>
+                          <a:latin typeface="Avenir Next"/>
+                        </a:defRPr>
+                      </a:pPr>
+                      <a:r>
+                        <a:t>+mpi</a:t>
+                      </a:r>
+                    </a:p>
+                  </a:txBody>
+                  <a:tcPr marL="109728" marR="73152" marT="13716" marB="13716" anchor="ctr">
+                    <a:solidFill>
+                      <a:srgbClr val="FFFFFF"/>
+                    </a:solidFill>
+                  </a:tcPr>
+                </a:tc>
+              </a:tr>
+              <a:tr h="301752">
+                <a:tc>
+                  <a:txBody>
+                    <a:bodyPr/>
+                    <a:lstStyle/>
+                    <a:p>
+                      <a:pPr>
+                        <a:defRPr sz="1100" b="1">
+                          <a:solidFill>
+                            <a:srgbClr val="0F172A"/>
+                          </a:solidFill>
+                          <a:latin typeface="Avenir Next"/>
+                        </a:defRPr>
+                      </a:pPr>
+                      <a:r>
+                        <a:t>boost</a:t>
+                      </a:r>
+                    </a:p>
+                  </a:txBody>
+                  <a:tcPr marL="109728" marR="73152" marT="13716" marB="13716" anchor="ctr">
+                    <a:solidFill>
+                      <a:srgbClr val="FFFFFF"/>
+                    </a:solidFill>
+                  </a:tcPr>
+                </a:tc>
+                <a:tc>
+                  <a:txBody>
+                    <a:bodyPr/>
+                    <a:lstStyle/>
+                    <a:p>
+                      <a:pPr>
+                        <a:defRPr sz="1100" b="0">
+                          <a:solidFill>
+                            <a:srgbClr val="334155"/>
+                          </a:solidFill>
+                          <a:latin typeface="Avenir Next"/>
+                        </a:defRPr>
+                      </a:pPr>
+                      <a:r>
+                        <a:t>1.90.0 · 1.89.0</a:t>
+                      </a:r>
+                    </a:p>
+                  </a:txBody>
+                  <a:tcPr marL="109728" marR="73152" marT="13716" marB="13716" anchor="ctr">
+                    <a:solidFill>
+                      <a:srgbClr val="FFFFFF"/>
+                    </a:solidFill>
+                  </a:tcPr>
+                </a:tc>
+                <a:tc>
+                  <a:txBody>
+                    <a:bodyPr/>
+                    <a:lstStyle/>
+                    <a:p>
+                      <a:pPr>
+                        <a:defRPr sz="1050" b="0">
+                          <a:solidFill>
+                            <a:srgbClr val="64748B"/>
+                          </a:solidFill>
+                          <a:latin typeface="Avenir Next"/>
+                        </a:defRPr>
+                      </a:pPr>
+                      <a:r>
+                        <a:t>+mpi — dual-build with the serial lane's ~mpi boost</a:t>
+                      </a:r>
+                    </a:p>
+                  </a:txBody>
+                  <a:tcPr marL="109728" marR="73152" marT="13716" marB="13716" anchor="ctr">
+                    <a:solidFill>
+                      <a:srgbClr val="FFFFFF"/>
+                    </a:solidFill>
+                  </a:tcPr>
+                </a:tc>
+              </a:tr>
+              <a:tr h="301752">
+                <a:tc>
+                  <a:txBody>
+                    <a:bodyPr/>
+                    <a:lstStyle/>
+                    <a:p>
+                      <a:pPr>
+                        <a:defRPr sz="1100" b="1">
+                          <a:solidFill>
+                            <a:srgbClr val="0F172A"/>
+                          </a:solidFill>
+                          <a:latin typeface="Avenir Next"/>
+                        </a:defRPr>
+                      </a:pPr>
+                      <a:r>
+                        <a:t>tau</a:t>
+                      </a:r>
+                    </a:p>
+                  </a:txBody>
+                  <a:tcPr marL="109728" marR="73152" marT="13716" marB="13716" anchor="ctr">
+                    <a:solidFill>
+                      <a:srgbClr val="FFFFFF"/>
+                    </a:solidFill>
+                  </a:tcPr>
+                </a:tc>
+                <a:tc>
+                  <a:txBody>
+                    <a:bodyPr/>
+                    <a:lstStyle/>
+                    <a:p>
+                      <a:pPr>
+                        <a:defRPr sz="1100" b="0">
+                          <a:solidFill>
+                            <a:srgbClr val="334155"/>
+                          </a:solidFill>
+                          <a:latin typeface="Avenir Next"/>
+                        </a:defRPr>
+                      </a:pPr>
+                      <a:r>
+                        <a:t>2.35.1 · 2.35</a:t>
+                      </a:r>
+                    </a:p>
+                  </a:txBody>
+                  <a:tcPr marL="109728" marR="73152" marT="13716" marB="13716" anchor="ctr">
+                    <a:solidFill>
+                      <a:srgbClr val="FFFFFF"/>
+                    </a:solidFill>
+                  </a:tcPr>
+                </a:tc>
+                <a:tc>
+                  <a:txBody>
+                    <a:bodyPr/>
+                    <a:lstStyle/>
+                    <a:p>
+                      <a:pPr>
+                        <a:defRPr sz="1050" b="0">
+                          <a:solidFill>
+                            <a:srgbClr val="64748B"/>
+                          </a:solidFill>
+                          <a:latin typeface="Avenir Next"/>
+                        </a:defRPr>
+                      </a:pPr>
+                      <a:r>
+                        <a:t>+mpi</a:t>
+                      </a:r>
+                    </a:p>
+                  </a:txBody>
+                  <a:tcPr marL="109728" marR="73152" marT="13716" marB="13716" anchor="ctr">
+                    <a:solidFill>
+                      <a:srgbClr val="FFFFFF"/>
+                    </a:solidFill>
+                  </a:tcPr>
+                </a:tc>
+              </a:tr>
+              <a:tr h="301752">
+                <a:tc>
+                  <a:txBody>
+                    <a:bodyPr/>
+                    <a:lstStyle/>
+                    <a:p>
+                      <a:pPr>
+                        <a:defRPr sz="1100" b="1">
+                          <a:solidFill>
+                            <a:srgbClr val="0F172A"/>
+                          </a:solidFill>
+                          <a:latin typeface="Avenir Next"/>
+                        </a:defRPr>
+                      </a:pPr>
+                      <a:r>
+                        <a:t>dakota</a:t>
+                      </a:r>
+                    </a:p>
+                  </a:txBody>
+                  <a:tcPr marL="109728" marR="73152" marT="13716" marB="13716" anchor="ctr">
+                    <a:solidFill>
+                      <a:srgbClr val="FFFFFF"/>
+                    </a:solidFill>
+                  </a:tcPr>
+                </a:tc>
+                <a:tc>
+                  <a:txBody>
+                    <a:bodyPr/>
+                    <a:lstStyle/>
+                    <a:p>
+                      <a:pPr>
+                        <a:defRPr sz="1100" b="0">
+                          <a:solidFill>
+                            <a:srgbClr val="334155"/>
+                          </a:solidFill>
+                          <a:latin typeface="Avenir Next"/>
+                        </a:defRPr>
+                      </a:pPr>
+                      <a:r>
+                        <a:t>6.24.0 · 6.23.0</a:t>
+                      </a:r>
+                    </a:p>
+                  </a:txBody>
+                  <a:tcPr marL="109728" marR="73152" marT="13716" marB="13716" anchor="ctr">
+                    <a:solidFill>
+                      <a:srgbClr val="FFFFFF"/>
+                    </a:solidFill>
+                  </a:tcPr>
+                </a:tc>
+                <a:tc>
+                  <a:txBody>
+                    <a:bodyPr/>
+                    <a:lstStyle/>
+                    <a:p>
+                      <a:pPr>
+                        <a:defRPr sz="1050" b="0">
+                          <a:solidFill>
+                            <a:srgbClr val="64748B"/>
+                          </a:solidFill>
+                          <a:latin typeface="Avenir Next"/>
+                        </a:defRPr>
+                      </a:pPr>
+                      <a:r>
+                        <a:t>+mpi — heaviest build in the roster</a:t>
+                      </a:r>
+                    </a:p>
+                  </a:txBody>
+                  <a:tcPr marL="109728" marR="73152" marT="13716" marB="13716" anchor="ctr">
+                    <a:solidFill>
+                      <a:srgbClr val="FFFFFF"/>
+                    </a:solidFill>
+                  </a:tcPr>
+                </a:tc>
+              </a:tr>
+              <a:tr h="301752">
+                <a:tc gridSpan="3">
+                  <a:txBody>
+                    <a:bodyPr/>
+                    <a:lstStyle/>
+                    <a:p>
+                      <a:pPr>
+                        <a:defRPr sz="1150" b="1">
+                          <a:solidFill>
+                            <a:srgbClr val="FFFFFF"/>
+                          </a:solidFill>
+                          <a:latin typeface="Avenir Next"/>
+                        </a:defRPr>
+                      </a:pPr>
+                      <a:r>
+                        <a:t>GPU lane — complete MPI-capable lane, arch from the probe</a:t>
+                      </a:r>
+                    </a:p>
+                  </a:txBody>
+                  <a:tcPr marL="109728" marR="73152" marT="13716" marB="13716" anchor="ctr">
+                    <a:solidFill>
+                      <a:srgbClr val="7C3AED"/>
+                    </a:solidFill>
+                  </a:tcPr>
+                </a:tc>
+                <a:tc hMerge="1">
+                  <a:txBody>
+                    <a:bodyPr/>
+                    <a:lstStyle/>
+                    <a:p/>
+                  </a:txBody>
+                  <a:tcPr/>
+                </a:tc>
+                <a:tc hMerge="1">
+                  <a:txBody>
+                    <a:bodyPr/>
+                    <a:lstStyle/>
+                    <a:p/>
+                  </a:txBody>
+                  <a:tcPr/>
+                </a:tc>
+              </a:tr>
+              <a:tr h="301752">
+                <a:tc>
+                  <a:txBody>
+                    <a:bodyPr/>
+                    <a:lstStyle/>
+                    <a:p>
+                      <a:pPr>
+                        <a:defRPr sz="1100" b="1">
+                          <a:solidFill>
+                            <a:srgbClr val="0F172A"/>
+                          </a:solidFill>
+                          <a:latin typeface="Avenir Next"/>
+                        </a:defRPr>
+                      </a:pPr>
+                      <a:r>
+                        <a:t>kokkos</a:t>
+                      </a:r>
+                    </a:p>
+                  </a:txBody>
+                  <a:tcPr marL="109728" marR="73152" marT="13716" marB="13716" anchor="ctr">
+                    <a:solidFill>
+                      <a:srgbClr val="FFFFFF"/>
+                    </a:solidFill>
+                  </a:tcPr>
+                </a:tc>
+                <a:tc>
+                  <a:txBody>
+                    <a:bodyPr/>
+                    <a:lstStyle/>
+                    <a:p>
+                      <a:pPr>
+                        <a:defRPr sz="1100" b="0">
+                          <a:solidFill>
+                            <a:srgbClr val="334155"/>
+                          </a:solidFill>
+                          <a:latin typeface="Avenir Next"/>
+                        </a:defRPr>
+                      </a:pPr>
+                      <a:r>
+                        <a:t>5.1.1 · 5.1.0</a:t>
+                      </a:r>
+                    </a:p>
+                  </a:txBody>
+                  <a:tcPr marL="109728" marR="73152" marT="13716" marB="13716" anchor="ctr">
+                    <a:solidFill>
+                      <a:srgbClr val="FFFFFF"/>
+                    </a:solidFill>
+                  </a:tcPr>
+                </a:tc>
+                <a:tc>
+                  <a:txBody>
+                    <a:bodyPr/>
+                    <a:lstStyle/>
+                    <a:p>
+                      <a:pPr>
+                        <a:defRPr sz="1050" b="0">
+                          <a:solidFill>
+                            <a:srgbClr val="64748B"/>
+                          </a:solidFill>
+                          <a:latin typeface="Avenir Next"/>
+                        </a:defRPr>
+                      </a:pPr>
+                      <a:r>
+                        <a:t>+gpu → expands per lane: +rocm amdgpu_target=&lt;arch&gt; or +cuda cuda_arch=&lt;n&gt;</a:t>
+                      </a:r>
+                    </a:p>
+                  </a:txBody>
+                  <a:tcPr marL="109728" marR="73152" marT="13716" marB="13716" anchor="ctr">
+                    <a:solidFill>
+                      <a:srgbClr val="FFFFFF"/>
+                    </a:solidFill>
+                  </a:tcPr>
+                </a:tc>
+              </a:tr>
+              <a:tr h="301752">
+                <a:tc gridSpan="3">
+                  <a:txBody>
+                    <a:bodyPr/>
+                    <a:lstStyle/>
+                    <a:p>
+                      <a:pPr>
+                        <a:defRPr sz="1150" b="1">
+                          <a:solidFill>
+                            <a:srgbClr val="FFFFFF"/>
+                          </a:solidFill>
+                          <a:latin typeface="Avenir Next"/>
+                        </a:defRPr>
+                      </a:pPr>
+                      <a:r>
+                        <a:t>Lane-agnostic — one serial-lane build, exposed here too</a:t>
+                      </a:r>
+                    </a:p>
+                  </a:txBody>
+                  <a:tcPr marL="109728" marR="73152" marT="13716" marB="13716" anchor="ctr">
+                    <a:solidFill>
+                      <a:srgbClr val="15803D"/>
+                    </a:solidFill>
+                  </a:tcPr>
+                </a:tc>
+                <a:tc hMerge="1">
+                  <a:txBody>
+                    <a:bodyPr/>
+                    <a:lstStyle/>
+                    <a:p/>
+                  </a:txBody>
+                  <a:tcPr/>
+                </a:tc>
+                <a:tc hMerge="1">
+                  <a:txBody>
+                    <a:bodyPr/>
+                    <a:lstStyle/>
+                    <a:p/>
+                  </a:txBody>
+                  <a:tcPr/>
+                </a:tc>
+              </a:tr>
+              <a:tr h="301752">
+                <a:tc>
+                  <a:txBody>
+                    <a:bodyPr/>
+                    <a:lstStyle/>
+                    <a:p>
+                      <a:pPr>
+                        <a:defRPr sz="1100" b="1">
+                          <a:solidFill>
+                            <a:srgbClr val="0F172A"/>
+                          </a:solidFill>
+                          <a:latin typeface="Avenir Next"/>
+                        </a:defRPr>
+                      </a:pPr>
+                      <a:r>
+                        <a:t>lane-agnostic set</a:t>
+                      </a:r>
+                    </a:p>
+                  </a:txBody>
+                  <a:tcPr marL="109728" marR="73152" marT="13716" marB="13716" anchor="ctr">
+                    <a:solidFill>
+                      <a:srgbClr val="FFFFFF"/>
+                    </a:solidFill>
+                  </a:tcPr>
+                </a:tc>
+                <a:tc>
+                  <a:txBody>
+                    <a:bodyPr/>
+                    <a:lstStyle/>
+                    <a:p>
+                      <a:pPr>
+                        <a:defRPr sz="1100" b="0">
+                          <a:solidFill>
+                            <a:srgbClr val="334155"/>
+                          </a:solidFill>
+                          <a:latin typeface="Avenir Next"/>
+                        </a:defRPr>
+                      </a:pPr>
+                      <a:r>
+                        <a:t>see Serial</a:t>
+                      </a:r>
+                    </a:p>
+                  </a:txBody>
+                  <a:tcPr marL="109728" marR="73152" marT="13716" marB="13716" anchor="ctr">
+                    <a:solidFill>
+                      <a:srgbClr val="FFFFFF"/>
+                    </a:solidFill>
+                  </a:tcPr>
+                </a:tc>
+                <a:tc>
+                  <a:txBody>
+                    <a:bodyPr/>
+                    <a:lstStyle/>
+                    <a:p>
+                      <a:pPr>
+                        <a:defRPr sz="1050" b="0">
+                          <a:solidFill>
+                            <a:srgbClr val="64748B"/>
+                          </a:solidFill>
+                          <a:latin typeface="Avenir Next"/>
+                        </a:defRPr>
+                      </a:pPr>
+                      <a:r>
+                        <a:t>openblas · netlib-lapack · gnuplot — same modules via the shared root, no rebuild</a:t>
+                      </a:r>
+                    </a:p>
+                  </a:txBody>
+                  <a:tcPr marL="109728" marR="73152" marT="13716" marB="13716" anchor="ctr">
+                    <a:solidFill>
+                      <a:srgbClr val="FFFFFF"/>
+                    </a:solidFill>
+                  </a:tcPr>
+                </a:tc>
+              </a:tr>
+              <a:tr h="301752">
+                <a:tc gridSpan="3">
+                  <a:txBody>
+                    <a:bodyPr/>
+                    <a:lstStyle/>
+                    <a:p>
+                      <a:pPr>
+                        <a:defRPr sz="1150" b="1">
+                          <a:solidFill>
+                            <a:srgbClr val="FFFFFF"/>
+                          </a:solidFill>
+                          <a:latin typeface="Avenir Next"/>
+                        </a:defRPr>
+                      </a:pPr>
+                      <a:r>
+                        <a:t>Externals — used from the system, never built</a:t>
+                      </a:r>
+                    </a:p>
+                  </a:txBody>
+                  <a:tcPr marL="109728" marR="73152" marT="13716" marB="13716" anchor="ctr">
+                    <a:solidFill>
+                      <a:srgbClr val="475569"/>
+                    </a:solidFill>
+                  </a:tcPr>
+                </a:tc>
+                <a:tc hMerge="1">
+                  <a:txBody>
+                    <a:bodyPr/>
+                    <a:lstStyle/>
+                    <a:p/>
+                  </a:txBody>
+                  <a:tcPr/>
+                </a:tc>
+                <a:tc hMerge="1">
+                  <a:txBody>
+                    <a:bodyPr/>
+                    <a:lstStyle/>
+                    <a:p/>
+                  </a:txBody>
+                  <a:tcPr/>
+                </a:tc>
+              </a:tr>
+              <a:tr h="301752">
+                <a:tc>
+                  <a:txBody>
+                    <a:bodyPr/>
+                    <a:lstStyle/>
+                    <a:p>
+                      <a:pPr>
+                        <a:defRPr sz="1100" b="1">
+                          <a:solidFill>
+                            <a:srgbClr val="0F172A"/>
+                          </a:solidFill>
+                          <a:latin typeface="Avenir Next"/>
+                        </a:defRPr>
+                      </a:pPr>
+                      <a:r>
+                        <a:t>externals</a:t>
+                      </a:r>
+                    </a:p>
+                  </a:txBody>
+                  <a:tcPr marL="109728" marR="73152" marT="13716" marB="13716" anchor="ctr">
+                    <a:solidFill>
+                      <a:srgbClr val="FFFFFF"/>
+                    </a:solidFill>
+                  </a:tcPr>
+                </a:tc>
+                <a:tc>
+                  <a:txBody>
+                    <a:bodyPr/>
+                    <a:lstStyle/>
+                    <a:p>
+                      <a:pPr>
+                        <a:defRPr sz="1100" b="0">
+                          <a:solidFill>
+                            <a:srgbClr val="334155"/>
+                          </a:solidFill>
+                          <a:latin typeface="Avenir Next"/>
+                        </a:defRPr>
+                      </a:pPr>
+                      <a:r>
+                        <a:t>system</a:t>
+                      </a:r>
+                    </a:p>
+                  </a:txBody>
+                  <a:tcPr marL="109728" marR="73152" marT="13716" marB="13716" anchor="ctr">
+                    <a:solidFill>
+                      <a:srgbClr val="FFFFFF"/>
+                    </a:solidFill>
+                  </a:tcPr>
+                </a:tc>
+                <a:tc>
+                  <a:txBody>
+                    <a:bodyPr/>
+                    <a:lstStyle/>
+                    <a:p>
+                      <a:pPr>
+                        <a:defRPr sz="1050" b="0">
+                          <a:solidFill>
+                            <a:srgbClr val="64748B"/>
+                          </a:solidFill>
+                          <a:latin typeface="Avenir Next"/>
+                        </a:defRPr>
+                      </a:pPr>
+                      <a:r>
+                        <a:t>cray-mpich (Platform-backed) · openmpi, openssl (Site-external)</a:t>
+                      </a:r>
+                    </a:p>
+                  </a:txBody>
+                  <a:tcPr marL="109728" marR="73152" marT="13716" marB="13716" anchor="ctr">
+                    <a:solidFill>
+                      <a:srgbClr val="FFFFFF"/>
+                    </a:solidFill>
+                  </a:tcPr>
+                </a:tc>
+              </a:tr>
+            </a:tbl>
+          </a:graphicData>
+        </a:graphic>
+      </p:graphicFrame>
+      <p:sp>
+        <p:nvSpPr>
+          <p:cNvPr id="7" name="TextBox 6"/>
+          <p:cNvSpPr txBox="1"/>
+          <p:nvPr/>
+        </p:nvSpPr>
+        <p:spPr>
+          <a:xfrm>
+            <a:off x="548640" y="6583680"/>
+            <a:ext cx="11064240" cy="256032"/>
+          </a:xfrm>
+          <a:prstGeom prst="rect">
+            <a:avLst/>
+          </a:prstGeom>
+          <a:noFill/>
+        </p:spPr>
+        <p:txBody>
+          <a:bodyPr wrap="square" anchor="t">
+            <a:spAutoFit/>
+          </a:bodyPr>
+          <a:lstStyle/>
+          <a:p>
+            <a:pPr algn="l">
+              <a:defRPr sz="1050" b="0">
+                <a:solidFill>
+                  <a:srgbClr val="64748B"/>
+                </a:solidFill>
+                <a:latin typeface="Avenir Next"/>
+              </a:defRPr>
+            </a:pPr>
+            <a:r>
+              <a:t>Version policy: newest supported + immediate predecessor · pinned to spack-packages v2026.06.0 (Spack v1.1.1)</a:t>
+            </a:r>
+          </a:p>
+        </p:txBody>
+      </p:sp>
+    </p:spTree>
+  </p:cSld>
+  <p:clrMapOvr>
+    <a:masterClrMapping/>
+  </p:clrMapOvr>
+</p:sld>
+</file>
+
 <file path=ppt/slides/slide2.xml><?xml version="1.0" encoding="utf-8"?>
 <p:sld xmlns:a="http://schemas.openxmlformats.org/drawingml/2006/main" xmlns:p="http://schemas.openxmlformats.org/presentationml/2006/main" xmlns:r="http://schemas.openxmlformats.org/officeDocument/2006/relationships">
   <p:cSld>
@@ -4510,7 +6959,7 @@
               </a:defRPr>
             </a:pPr>
             <a:r>
-              <a:t>GPU is a complete MPI-capable lane when the selected toolchain supports it ·</a:t>
+              <a:t>Conflicts avoided by convention · MPI/GPU surfaces not isolated ·</a:t>
             </a:r>
           </a:p>
           <a:p>
@@ -4523,7 +6972,7 @@
               </a:defRPr>
             </a:pPr>
             <a:r>
-              <a:t>package modules prevent incompatible version mixes</a:t>
+              <a:t>hand-curated per system — upgrades mean rebuilding everything</a:t>
             </a:r>
           </a:p>
         </p:txBody>
@@ -5088,7 +7537,7 @@
               </a:defRPr>
             </a:pPr>
             <a:r>
-              <a:t>No contamination, no accidental MPI/GPU linkage ·</a:t>
+              <a:t>GPU is a complete MPI-capable lane when the selected toolchain supports it ·</a:t>
             </a:r>
           </a:p>
           <a:p>
@@ -5101,7 +7550,7 @@
               </a:defRPr>
             </a:pPr>
             <a:r>
-              <a:t>versions inside a lane stay a policy-backed module choice</a:t>
+              <a:t>package modules prevent incompatible version mixes</a:t>
             </a:r>
           </a:p>
         </p:txBody>
@@ -7116,7 +9565,7 @@
               </a:defRPr>
             </a:pPr>
             <a:r>
-              <a:t>kokkos · rocm — arch from the probe</a:t>
+              <a:t>GPU-aware MPI · rocm/cuda — arch from the probe</a:t>
             </a:r>
           </a:p>
         </p:txBody>
@@ -7710,7 +10159,7 @@
               </a:defRPr>
             </a:pPr>
             <a:r>
-              <a:t>hdf5~mpi 1.14.6 / 1.14.5 · fftw · boost</a:t>
+              <a:t>hdf5~mpi 2.1.0 / 1.14.6 · fftw · boost</a:t>
             </a:r>
           </a:p>
         </p:txBody>
@@ -9913,7 +12362,7 @@
               </a:defRPr>
             </a:pPr>
             <a:r>
-              <a:t>Representative roster — evolving, ~two versions each</a:t>
+              <a:t>Representative roster — newest two supported releases</a:t>
             </a:r>
           </a:p>
         </p:txBody>
@@ -10651,7 +13100,7 @@
               </a:defRPr>
             </a:pPr>
             <a:r>
-              <a:t>Multi-version by policy: clean package names · compatible chains load · incompatible mixes fail clearly</a:t>
+              <a:t>Newest-two policy: clean package names · compatible chains load · incompatible mixes fail clearly</a:t>
             </a:r>
           </a:p>
         </p:txBody>
@@ -11277,7 +13726,7 @@
               </a:defRPr>
             </a:pPr>
             <a:r>
-              <a:t>Build science lanes on Cray and Linux systems; verify the module/view front door</a:t>
+              <a:t>Build the science lanes on the Cray and Linux systems; verify the module/view front door</a:t>
             </a:r>
           </a:p>
         </p:txBody>
@@ -11422,6 +13871,1178 @@
             </a:pPr>
             <a:r>
               <a:t>Release process: build caches, lockfiles, release manifest</a:t>
+            </a:r>
+          </a:p>
+        </p:txBody>
+      </p:sp>
+    </p:spTree>
+  </p:cSld>
+  <p:clrMapOvr>
+    <a:masterClrMapping/>
+  </p:clrMapOvr>
+</p:sld>
+</file>
+
+<file path=ppt/slides/slide9.xml><?xml version="1.0" encoding="utf-8"?>
+<p:sld xmlns:a="http://schemas.openxmlformats.org/drawingml/2006/main" xmlns:p="http://schemas.openxmlformats.org/presentationml/2006/main" xmlns:r="http://schemas.openxmlformats.org/officeDocument/2006/relationships">
+  <p:cSld>
+    <p:spTree>
+      <p:nvGrpSpPr>
+        <p:cNvPr id="1" name=""/>
+        <p:cNvGrpSpPr/>
+        <p:nvPr/>
+      </p:nvGrpSpPr>
+      <p:grpSpPr/>
+      <p:sp>
+        <p:nvSpPr>
+          <p:cNvPr id="2" name="Rectangle 1"/>
+          <p:cNvSpPr/>
+          <p:nvPr/>
+        </p:nvSpPr>
+        <p:spPr>
+          <a:xfrm>
+            <a:off x="0" y="0"/>
+            <a:ext cx="12191695" cy="6858000"/>
+          </a:xfrm>
+          <a:prstGeom prst="rect">
+            <a:avLst/>
+          </a:prstGeom>
+          <a:solidFill>
+            <a:srgbClr val="FFFFFF"/>
+          </a:solidFill>
+          <a:ln>
+            <a:noFill/>
+          </a:ln>
+          <a:effectLst/>
+        </p:spPr>
+        <p:style>
+          <a:lnRef idx="1">
+            <a:schemeClr val="accent1"/>
+          </a:lnRef>
+          <a:fillRef idx="3">
+            <a:schemeClr val="accent1"/>
+          </a:fillRef>
+          <a:effectRef idx="2">
+            <a:schemeClr val="accent1"/>
+          </a:effectRef>
+          <a:fontRef idx="minor">
+            <a:schemeClr val="lt1"/>
+          </a:fontRef>
+        </p:style>
+        <p:txBody>
+          <a:bodyPr rtlCol="0" anchor="ctr"/>
+          <a:lstStyle/>
+          <a:p>
+            <a:pPr algn="ctr"/>
+          </a:p>
+        </p:txBody>
+      </p:sp>
+      <p:sp>
+        <p:nvSpPr>
+          <p:cNvPr id="3" name="TextBox 2"/>
+          <p:cNvSpPr txBox="1"/>
+          <p:nvPr/>
+        </p:nvSpPr>
+        <p:spPr>
+          <a:xfrm>
+            <a:off x="548640" y="256032"/>
+            <a:ext cx="10972800" cy="365760"/>
+          </a:xfrm>
+          <a:prstGeom prst="rect">
+            <a:avLst/>
+          </a:prstGeom>
+          <a:noFill/>
+        </p:spPr>
+        <p:txBody>
+          <a:bodyPr wrap="square" anchor="t">
+            <a:spAutoFit/>
+          </a:bodyPr>
+          <a:lstStyle/>
+          <a:p>
+            <a:pPr algn="l">
+              <a:defRPr sz="1300" b="1">
+                <a:solidFill>
+                  <a:srgbClr val="0D9488"/>
+                </a:solidFill>
+                <a:latin typeface="Avenir Next"/>
+              </a:defRPr>
+            </a:pPr>
+            <a:r>
+              <a:t>APPENDIX · EXACT BUILD ROOTS</a:t>
+            </a:r>
+          </a:p>
+        </p:txBody>
+      </p:sp>
+      <p:sp>
+        <p:nvSpPr>
+          <p:cNvPr id="4" name="TextBox 3"/>
+          <p:cNvSpPr txBox="1"/>
+          <p:nvPr/>
+        </p:nvSpPr>
+        <p:spPr>
+          <a:xfrm>
+            <a:off x="548640" y="566928"/>
+            <a:ext cx="11064240" cy="731520"/>
+          </a:xfrm>
+          <a:prstGeom prst="rect">
+            <a:avLst/>
+          </a:prstGeom>
+          <a:noFill/>
+        </p:spPr>
+        <p:txBody>
+          <a:bodyPr wrap="square" anchor="t">
+            <a:spAutoFit/>
+          </a:bodyPr>
+          <a:lstStyle/>
+          <a:p>
+            <a:pPr algn="l">
+              <a:defRPr sz="3000" b="1">
+                <a:solidFill>
+                  <a:srgbClr val="0F172A"/>
+                </a:solidFill>
+                <a:latin typeface="Avenir Next"/>
+              </a:defRPr>
+            </a:pPr>
+            <a:r>
+              <a:t>Core and foundation — built once per compiler surface</a:t>
+            </a:r>
+          </a:p>
+        </p:txBody>
+      </p:sp>
+      <p:sp>
+        <p:nvSpPr>
+          <p:cNvPr id="5" name="Rectangle 4"/>
+          <p:cNvSpPr/>
+          <p:nvPr/>
+        </p:nvSpPr>
+        <p:spPr>
+          <a:xfrm>
+            <a:off x="566928" y="1298448"/>
+            <a:ext cx="1463040" cy="41148"/>
+          </a:xfrm>
+          <a:prstGeom prst="rect">
+            <a:avLst/>
+          </a:prstGeom>
+          <a:solidFill>
+            <a:srgbClr val="0D9488"/>
+          </a:solidFill>
+          <a:ln>
+            <a:noFill/>
+          </a:ln>
+          <a:effectLst/>
+        </p:spPr>
+        <p:style>
+          <a:lnRef idx="1">
+            <a:schemeClr val="accent1"/>
+          </a:lnRef>
+          <a:fillRef idx="3">
+            <a:schemeClr val="accent1"/>
+          </a:fillRef>
+          <a:effectRef idx="2">
+            <a:schemeClr val="accent1"/>
+          </a:effectRef>
+          <a:fontRef idx="minor">
+            <a:schemeClr val="lt1"/>
+          </a:fontRef>
+        </p:style>
+        <p:txBody>
+          <a:bodyPr rtlCol="0" anchor="ctr"/>
+          <a:lstStyle/>
+          <a:p>
+            <a:pPr algn="ctr"/>
+          </a:p>
+        </p:txBody>
+      </p:sp>
+      <p:graphicFrame>
+        <p:nvGraphicFramePr>
+          <p:cNvPr id="6" name="Table 5"/>
+          <p:cNvGraphicFramePr>
+            <a:graphicFrameLocks noGrp="1"/>
+          </p:cNvGraphicFramePr>
+          <p:nvPr/>
+        </p:nvGraphicFramePr>
+        <p:xfrm>
+          <a:off x="548640" y="1481328"/>
+          <a:ext cx="11091672" cy="4224528"/>
+        </p:xfrm>
+        <a:graphic>
+          <a:graphicData uri="http://schemas.openxmlformats.org/drawingml/2006/table">
+            <a:tbl>
+              <a:tblPr>
+                <a:tableStyleId>{5C22544A-7EE6-4342-B048-85BDC9FD1C3A}</a:tableStyleId>
+              </a:tblPr>
+              <a:tblGrid>
+                <a:gridCol w="1920240"/>
+                <a:gridCol w="2286000"/>
+                <a:gridCol w="6885432"/>
+              </a:tblGrid>
+              <a:tr h="301752">
+                <a:tc>
+                  <a:txBody>
+                    <a:bodyPr/>
+                    <a:lstStyle/>
+                    <a:p>
+                      <a:pPr>
+                        <a:defRPr sz="1100" b="1">
+                          <a:solidFill>
+                            <a:srgbClr val="64748B"/>
+                          </a:solidFill>
+                          <a:latin typeface="Avenir Next"/>
+                        </a:defRPr>
+                      </a:pPr>
+                      <a:r>
+                        <a:t>Package</a:t>
+                      </a:r>
+                    </a:p>
+                  </a:txBody>
+                  <a:tcPr marL="109728" marR="73152" marT="13716" marB="13716" anchor="ctr">
+                    <a:solidFill>
+                      <a:srgbClr val="FFFFFF"/>
+                    </a:solidFill>
+                  </a:tcPr>
+                </a:tc>
+                <a:tc>
+                  <a:txBody>
+                    <a:bodyPr/>
+                    <a:lstStyle/>
+                    <a:p>
+                      <a:pPr>
+                        <a:defRPr sz="1100" b="1">
+                          <a:solidFill>
+                            <a:srgbClr val="64748B"/>
+                          </a:solidFill>
+                          <a:latin typeface="Avenir Next"/>
+                        </a:defRPr>
+                      </a:pPr>
+                      <a:r>
+                        <a:t>Versions</a:t>
+                      </a:r>
+                    </a:p>
+                  </a:txBody>
+                  <a:tcPr marL="109728" marR="73152" marT="13716" marB="13716" anchor="ctr">
+                    <a:solidFill>
+                      <a:srgbClr val="FFFFFF"/>
+                    </a:solidFill>
+                  </a:tcPr>
+                </a:tc>
+                <a:tc>
+                  <a:txBody>
+                    <a:bodyPr/>
+                    <a:lstStyle/>
+                    <a:p>
+                      <a:pPr>
+                        <a:defRPr sz="1100" b="1">
+                          <a:solidFill>
+                            <a:srgbClr val="64748B"/>
+                          </a:solidFill>
+                          <a:latin typeface="Avenir Next"/>
+                        </a:defRPr>
+                      </a:pPr>
+                      <a:r>
+                        <a:t>Built as · pairing</a:t>
+                      </a:r>
+                    </a:p>
+                  </a:txBody>
+                  <a:tcPr marL="109728" marR="73152" marT="13716" marB="13716" anchor="ctr">
+                    <a:solidFill>
+                      <a:srgbClr val="FFFFFF"/>
+                    </a:solidFill>
+                  </a:tcPr>
+                </a:tc>
+              </a:tr>
+              <a:tr h="301752">
+                <a:tc gridSpan="3">
+                  <a:txBody>
+                    <a:bodyPr/>
+                    <a:lstStyle/>
+                    <a:p>
+                      <a:pPr>
+                        <a:defRPr sz="1150" b="1">
+                          <a:solidFill>
+                            <a:srgbClr val="FFFFFF"/>
+                          </a:solidFill>
+                          <a:latin typeface="Avenir Next"/>
+                        </a:defRPr>
+                      </a:pPr>
+                      <a:r>
+                        <a:t>Foundation — ambient in the lane view, never a module</a:t>
+                      </a:r>
+                    </a:p>
+                  </a:txBody>
+                  <a:tcPr marL="109728" marR="73152" marT="13716" marB="13716" anchor="ctr">
+                    <a:solidFill>
+                      <a:srgbClr val="475569"/>
+                    </a:solidFill>
+                  </a:tcPr>
+                </a:tc>
+                <a:tc hMerge="1">
+                  <a:txBody>
+                    <a:bodyPr/>
+                    <a:lstStyle/>
+                    <a:p/>
+                  </a:txBody>
+                  <a:tcPr/>
+                </a:tc>
+                <a:tc hMerge="1">
+                  <a:txBody>
+                    <a:bodyPr/>
+                    <a:lstStyle/>
+                    <a:p/>
+                  </a:txBody>
+                  <a:tcPr/>
+                </a:tc>
+              </a:tr>
+              <a:tr h="301752">
+                <a:tc>
+                  <a:txBody>
+                    <a:bodyPr/>
+                    <a:lstStyle/>
+                    <a:p>
+                      <a:pPr>
+                        <a:defRPr sz="1100" b="1">
+                          <a:solidFill>
+                            <a:srgbClr val="0F172A"/>
+                          </a:solidFill>
+                          <a:latin typeface="Avenir Next"/>
+                        </a:defRPr>
+                      </a:pPr>
+                      <a:r>
+                        <a:t>zlib</a:t>
+                      </a:r>
+                    </a:p>
+                  </a:txBody>
+                  <a:tcPr marL="109728" marR="73152" marT="13716" marB="13716" anchor="ctr">
+                    <a:solidFill>
+                      <a:srgbClr val="FFFFFF"/>
+                    </a:solidFill>
+                  </a:tcPr>
+                </a:tc>
+                <a:tc>
+                  <a:txBody>
+                    <a:bodyPr/>
+                    <a:lstStyle/>
+                    <a:p>
+                      <a:pPr>
+                        <a:defRPr sz="1100" b="0">
+                          <a:solidFill>
+                            <a:srgbClr val="334155"/>
+                          </a:solidFill>
+                          <a:latin typeface="Avenir Next"/>
+                        </a:defRPr>
+                      </a:pPr>
+                      <a:r>
+                        <a:t>1.3.1</a:t>
+                      </a:r>
+                    </a:p>
+                  </a:txBody>
+                  <a:tcPr marL="109728" marR="73152" marT="13716" marB="13716" anchor="ctr">
+                    <a:solidFill>
+                      <a:srgbClr val="FFFFFF"/>
+                    </a:solidFill>
+                  </a:tcPr>
+                </a:tc>
+                <a:tc>
+                  <a:txBody>
+                    <a:bodyPr/>
+                    <a:lstStyle/>
+                    <a:p>
+                      <a:pPr>
+                        <a:defRPr sz="1050" b="0">
+                          <a:solidFill>
+                            <a:srgbClr val="64748B"/>
+                          </a:solidFill>
+                          <a:latin typeface="Avenir Next"/>
+                        </a:defRPr>
+                      </a:pPr>
+                      <a:r>
+                        <a:t>single pinned version (require: pin)</a:t>
+                      </a:r>
+                    </a:p>
+                  </a:txBody>
+                  <a:tcPr marL="109728" marR="73152" marT="13716" marB="13716" anchor="ctr">
+                    <a:solidFill>
+                      <a:srgbClr val="FFFFFF"/>
+                    </a:solidFill>
+                  </a:tcPr>
+                </a:tc>
+              </a:tr>
+              <a:tr h="301752">
+                <a:tc>
+                  <a:txBody>
+                    <a:bodyPr/>
+                    <a:lstStyle/>
+                    <a:p>
+                      <a:pPr>
+                        <a:defRPr sz="1100" b="1">
+                          <a:solidFill>
+                            <a:srgbClr val="0F172A"/>
+                          </a:solidFill>
+                          <a:latin typeface="Avenir Next"/>
+                        </a:defRPr>
+                      </a:pPr>
+                      <a:r>
+                        <a:t>xz</a:t>
+                      </a:r>
+                    </a:p>
+                  </a:txBody>
+                  <a:tcPr marL="109728" marR="73152" marT="13716" marB="13716" anchor="ctr">
+                    <a:solidFill>
+                      <a:srgbClr val="FFFFFF"/>
+                    </a:solidFill>
+                  </a:tcPr>
+                </a:tc>
+                <a:tc>
+                  <a:txBody>
+                    <a:bodyPr/>
+                    <a:lstStyle/>
+                    <a:p>
+                      <a:pPr>
+                        <a:defRPr sz="1100" b="0">
+                          <a:solidFill>
+                            <a:srgbClr val="334155"/>
+                          </a:solidFill>
+                          <a:latin typeface="Avenir Next"/>
+                        </a:defRPr>
+                      </a:pPr>
+                      <a:r>
+                        <a:t>5.4.6</a:t>
+                      </a:r>
+                    </a:p>
+                  </a:txBody>
+                  <a:tcPr marL="109728" marR="73152" marT="13716" marB="13716" anchor="ctr">
+                    <a:solidFill>
+                      <a:srgbClr val="FFFFFF"/>
+                    </a:solidFill>
+                  </a:tcPr>
+                </a:tc>
+                <a:tc>
+                  <a:txBody>
+                    <a:bodyPr/>
+                    <a:lstStyle/>
+                    <a:p>
+                      <a:pPr>
+                        <a:defRPr sz="1050" b="0">
+                          <a:solidFill>
+                            <a:srgbClr val="64748B"/>
+                          </a:solidFill>
+                          <a:latin typeface="Avenir Next"/>
+                        </a:defRPr>
+                      </a:pPr>
+                      <a:r>
+                        <a:t>single pinned version</a:t>
+                      </a:r>
+                    </a:p>
+                  </a:txBody>
+                  <a:tcPr marL="109728" marR="73152" marT="13716" marB="13716" anchor="ctr">
+                    <a:solidFill>
+                      <a:srgbClr val="FFFFFF"/>
+                    </a:solidFill>
+                  </a:tcPr>
+                </a:tc>
+              </a:tr>
+              <a:tr h="301752">
+                <a:tc>
+                  <a:txBody>
+                    <a:bodyPr/>
+                    <a:lstStyle/>
+                    <a:p>
+                      <a:pPr>
+                        <a:defRPr sz="1100" b="1">
+                          <a:solidFill>
+                            <a:srgbClr val="0F172A"/>
+                          </a:solidFill>
+                          <a:latin typeface="Avenir Next"/>
+                        </a:defRPr>
+                      </a:pPr>
+                      <a:r>
+                        <a:t>zstd</a:t>
+                      </a:r>
+                    </a:p>
+                  </a:txBody>
+                  <a:tcPr marL="109728" marR="73152" marT="13716" marB="13716" anchor="ctr">
+                    <a:solidFill>
+                      <a:srgbClr val="FFFFFF"/>
+                    </a:solidFill>
+                  </a:tcPr>
+                </a:tc>
+                <a:tc>
+                  <a:txBody>
+                    <a:bodyPr/>
+                    <a:lstStyle/>
+                    <a:p>
+                      <a:pPr>
+                        <a:defRPr sz="1100" b="0">
+                          <a:solidFill>
+                            <a:srgbClr val="334155"/>
+                          </a:solidFill>
+                          <a:latin typeface="Avenir Next"/>
+                        </a:defRPr>
+                      </a:pPr>
+                      <a:r>
+                        <a:t>1.5.6</a:t>
+                      </a:r>
+                    </a:p>
+                  </a:txBody>
+                  <a:tcPr marL="109728" marR="73152" marT="13716" marB="13716" anchor="ctr">
+                    <a:solidFill>
+                      <a:srgbClr val="FFFFFF"/>
+                    </a:solidFill>
+                  </a:tcPr>
+                </a:tc>
+                <a:tc>
+                  <a:txBody>
+                    <a:bodyPr/>
+                    <a:lstStyle/>
+                    <a:p>
+                      <a:pPr>
+                        <a:defRPr sz="1050" b="0">
+                          <a:solidFill>
+                            <a:srgbClr val="64748B"/>
+                          </a:solidFill>
+                          <a:latin typeface="Avenir Next"/>
+                        </a:defRPr>
+                      </a:pPr>
+                      <a:r>
+                        <a:t>single pinned version</a:t>
+                      </a:r>
+                    </a:p>
+                  </a:txBody>
+                  <a:tcPr marL="109728" marR="73152" marT="13716" marB="13716" anchor="ctr">
+                    <a:solidFill>
+                      <a:srgbClr val="FFFFFF"/>
+                    </a:solidFill>
+                  </a:tcPr>
+                </a:tc>
+              </a:tr>
+              <a:tr h="301752">
+                <a:tc gridSpan="3">
+                  <a:txBody>
+                    <a:bodyPr/>
+                    <a:lstStyle/>
+                    <a:p>
+                      <a:pPr>
+                        <a:defRPr sz="1150" b="1">
+                          <a:solidFill>
+                            <a:srgbClr val="FFFFFF"/>
+                          </a:solidFill>
+                          <a:latin typeface="Avenir Next"/>
+                        </a:defRPr>
+                      </a:pPr>
+                      <a:r>
+                        <a:t>Core tools — user-loadable, compiler-agnostic</a:t>
+                      </a:r>
+                    </a:p>
+                  </a:txBody>
+                  <a:tcPr marL="109728" marR="73152" marT="13716" marB="13716" anchor="ctr">
+                    <a:solidFill>
+                      <a:srgbClr val="0D9488"/>
+                    </a:solidFill>
+                  </a:tcPr>
+                </a:tc>
+                <a:tc hMerge="1">
+                  <a:txBody>
+                    <a:bodyPr/>
+                    <a:lstStyle/>
+                    <a:p/>
+                  </a:txBody>
+                  <a:tcPr/>
+                </a:tc>
+                <a:tc hMerge="1">
+                  <a:txBody>
+                    <a:bodyPr/>
+                    <a:lstStyle/>
+                    <a:p/>
+                  </a:txBody>
+                  <a:tcPr/>
+                </a:tc>
+              </a:tr>
+              <a:tr h="301752">
+                <a:tc>
+                  <a:txBody>
+                    <a:bodyPr/>
+                    <a:lstStyle/>
+                    <a:p>
+                      <a:pPr>
+                        <a:defRPr sz="1100" b="1">
+                          <a:solidFill>
+                            <a:srgbClr val="0F172A"/>
+                          </a:solidFill>
+                          <a:latin typeface="Avenir Next"/>
+                        </a:defRPr>
+                      </a:pPr>
+                      <a:r>
+                        <a:t>cmake</a:t>
+                      </a:r>
+                    </a:p>
+                  </a:txBody>
+                  <a:tcPr marL="109728" marR="73152" marT="13716" marB="13716" anchor="ctr">
+                    <a:solidFill>
+                      <a:srgbClr val="FFFFFF"/>
+                    </a:solidFill>
+                  </a:tcPr>
+                </a:tc>
+                <a:tc>
+                  <a:txBody>
+                    <a:bodyPr/>
+                    <a:lstStyle/>
+                    <a:p>
+                      <a:pPr>
+                        <a:defRPr sz="1100" b="0">
+                          <a:solidFill>
+                            <a:srgbClr val="334155"/>
+                          </a:solidFill>
+                          <a:latin typeface="Avenir Next"/>
+                        </a:defRPr>
+                      </a:pPr>
+                      <a:r>
+                        <a:t>4.3.3 · 4.2.3</a:t>
+                      </a:r>
+                    </a:p>
+                  </a:txBody>
+                  <a:tcPr marL="109728" marR="73152" marT="13716" marB="13716" anchor="ctr">
+                    <a:solidFill>
+                      <a:srgbClr val="FFFFFF"/>
+                    </a:solidFill>
+                  </a:tcPr>
+                </a:tc>
+                <a:tc>
+                  <a:txBody>
+                    <a:bodyPr/>
+                    <a:lstStyle/>
+                    <a:p>
+                      <a:pPr>
+                        <a:defRPr sz="1050" b="0">
+                          <a:solidFill>
+                            <a:srgbClr val="64748B"/>
+                          </a:solidFill>
+                          <a:latin typeface="Avenir Next"/>
+                        </a:defRPr>
+                      </a:pPr>
+                    </a:p>
+                  </a:txBody>
+                  <a:tcPr marL="109728" marR="73152" marT="13716" marB="13716" anchor="ctr">
+                    <a:solidFill>
+                      <a:srgbClr val="FFFFFF"/>
+                    </a:solidFill>
+                  </a:tcPr>
+                </a:tc>
+              </a:tr>
+              <a:tr h="301752">
+                <a:tc>
+                  <a:txBody>
+                    <a:bodyPr/>
+                    <a:lstStyle/>
+                    <a:p>
+                      <a:pPr>
+                        <a:defRPr sz="1100" b="1">
+                          <a:solidFill>
+                            <a:srgbClr val="0F172A"/>
+                          </a:solidFill>
+                          <a:latin typeface="Avenir Next"/>
+                        </a:defRPr>
+                      </a:pPr>
+                      <a:r>
+                        <a:t>ninja · pkgconf · git</a:t>
+                      </a:r>
+                    </a:p>
+                  </a:txBody>
+                  <a:tcPr marL="109728" marR="73152" marT="13716" marB="13716" anchor="ctr">
+                    <a:solidFill>
+                      <a:srgbClr val="FFFFFF"/>
+                    </a:solidFill>
+                  </a:tcPr>
+                </a:tc>
+                <a:tc>
+                  <a:txBody>
+                    <a:bodyPr/>
+                    <a:lstStyle/>
+                    <a:p>
+                      <a:pPr>
+                        <a:defRPr sz="1100" b="0">
+                          <a:solidFill>
+                            <a:srgbClr val="334155"/>
+                          </a:solidFill>
+                          <a:latin typeface="Avenir Next"/>
+                        </a:defRPr>
+                      </a:pPr>
+                      <a:r>
+                        <a:t>newest</a:t>
+                      </a:r>
+                    </a:p>
+                  </a:txBody>
+                  <a:tcPr marL="109728" marR="73152" marT="13716" marB="13716" anchor="ctr">
+                    <a:solidFill>
+                      <a:srgbClr val="FFFFFF"/>
+                    </a:solidFill>
+                  </a:tcPr>
+                </a:tc>
+                <a:tc>
+                  <a:txBody>
+                    <a:bodyPr/>
+                    <a:lstStyle/>
+                    <a:p>
+                      <a:pPr>
+                        <a:defRPr sz="1050" b="0">
+                          <a:solidFill>
+                            <a:srgbClr val="64748B"/>
+                          </a:solidFill>
+                          <a:latin typeface="Avenir Next"/>
+                        </a:defRPr>
+                      </a:pPr>
+                      <a:r>
+                        <a:t>unpinned — newest from the recipe generation</a:t>
+                      </a:r>
+                    </a:p>
+                  </a:txBody>
+                  <a:tcPr marL="109728" marR="73152" marT="13716" marB="13716" anchor="ctr">
+                    <a:solidFill>
+                      <a:srgbClr val="FFFFFF"/>
+                    </a:solidFill>
+                  </a:tcPr>
+                </a:tc>
+              </a:tr>
+              <a:tr h="301752">
+                <a:tc>
+                  <a:txBody>
+                    <a:bodyPr/>
+                    <a:lstStyle/>
+                    <a:p>
+                      <a:pPr>
+                        <a:defRPr sz="1100" b="1">
+                          <a:solidFill>
+                            <a:srgbClr val="0F172A"/>
+                          </a:solidFill>
+                          <a:latin typeface="Avenir Next"/>
+                        </a:defRPr>
+                      </a:pPr>
+                      <a:r>
+                        <a:t>python</a:t>
+                      </a:r>
+                    </a:p>
+                  </a:txBody>
+                  <a:tcPr marL="109728" marR="73152" marT="13716" marB="13716" anchor="ctr">
+                    <a:solidFill>
+                      <a:srgbClr val="FFFFFF"/>
+                    </a:solidFill>
+                  </a:tcPr>
+                </a:tc>
+                <a:tc>
+                  <a:txBody>
+                    <a:bodyPr/>
+                    <a:lstStyle/>
+                    <a:p>
+                      <a:pPr>
+                        <a:defRPr sz="1100" b="0">
+                          <a:solidFill>
+                            <a:srgbClr val="334155"/>
+                          </a:solidFill>
+                          <a:latin typeface="Avenir Next"/>
+                        </a:defRPr>
+                      </a:pPr>
+                      <a:r>
+                        <a:t>3.14.5 · 3.13.13</a:t>
+                      </a:r>
+                    </a:p>
+                  </a:txBody>
+                  <a:tcPr marL="109728" marR="73152" marT="13716" marB="13716" anchor="ctr">
+                    <a:solidFill>
+                      <a:srgbClr val="FFFFFF"/>
+                    </a:solidFill>
+                  </a:tcPr>
+                </a:tc>
+                <a:tc>
+                  <a:txBody>
+                    <a:bodyPr/>
+                    <a:lstStyle/>
+                    <a:p>
+                      <a:pPr>
+                        <a:defRPr sz="1050" b="0">
+                          <a:solidFill>
+                            <a:srgbClr val="64748B"/>
+                          </a:solidFill>
+                          <a:latin typeface="Avenir Next"/>
+                        </a:defRPr>
+                      </a:pPr>
+                      <a:r>
+                        <a:t>the two newest supported minor lines</a:t>
+                      </a:r>
+                    </a:p>
+                  </a:txBody>
+                  <a:tcPr marL="109728" marR="73152" marT="13716" marB="13716" anchor="ctr">
+                    <a:solidFill>
+                      <a:srgbClr val="FFFFFF"/>
+                    </a:solidFill>
+                  </a:tcPr>
+                </a:tc>
+              </a:tr>
+              <a:tr h="301752">
+                <a:tc>
+                  <a:txBody>
+                    <a:bodyPr/>
+                    <a:lstStyle/>
+                    <a:p>
+                      <a:pPr>
+                        <a:defRPr sz="1100" b="1">
+                          <a:solidFill>
+                            <a:srgbClr val="0F172A"/>
+                          </a:solidFill>
+                          <a:latin typeface="Avenir Next"/>
+                        </a:defRPr>
+                      </a:pPr>
+                      <a:r>
+                        <a:t>py-numpy</a:t>
+                      </a:r>
+                    </a:p>
+                  </a:txBody>
+                  <a:tcPr marL="109728" marR="73152" marT="13716" marB="13716" anchor="ctr">
+                    <a:solidFill>
+                      <a:srgbClr val="FFFFFF"/>
+                    </a:solidFill>
+                  </a:tcPr>
+                </a:tc>
+                <a:tc>
+                  <a:txBody>
+                    <a:bodyPr/>
+                    <a:lstStyle/>
+                    <a:p>
+                      <a:pPr>
+                        <a:defRPr sz="1100" b="0">
+                          <a:solidFill>
+                            <a:srgbClr val="334155"/>
+                          </a:solidFill>
+                          <a:latin typeface="Avenir Next"/>
+                        </a:defRPr>
+                      </a:pPr>
+                      <a:r>
+                        <a:t>2.4.6</a:t>
+                      </a:r>
+                    </a:p>
+                  </a:txBody>
+                  <a:tcPr marL="109728" marR="73152" marT="13716" marB="13716" anchor="ctr">
+                    <a:solidFill>
+                      <a:srgbClr val="FFFFFF"/>
+                    </a:solidFill>
+                  </a:tcPr>
+                </a:tc>
+                <a:tc>
+                  <a:txBody>
+                    <a:bodyPr/>
+                    <a:lstStyle/>
+                    <a:p>
+                      <a:pPr>
+                        <a:defRPr sz="1050" b="0">
+                          <a:solidFill>
+                            <a:srgbClr val="64748B"/>
+                          </a:solidFill>
+                          <a:latin typeface="Avenir Next"/>
+                        </a:defRPr>
+                      </a:pPr>
+                      <a:r>
+                        <a:t>built against each python line (newest non-deprecated recipe)</a:t>
+                      </a:r>
+                    </a:p>
+                  </a:txBody>
+                  <a:tcPr marL="109728" marR="73152" marT="13716" marB="13716" anchor="ctr">
+                    <a:solidFill>
+                      <a:srgbClr val="FFFFFF"/>
+                    </a:solidFill>
+                  </a:tcPr>
+                </a:tc>
+              </a:tr>
+              <a:tr h="301752">
+                <a:tc>
+                  <a:txBody>
+                    <a:bodyPr/>
+                    <a:lstStyle/>
+                    <a:p>
+                      <a:pPr>
+                        <a:defRPr sz="1100" b="1">
+                          <a:solidFill>
+                            <a:srgbClr val="0F172A"/>
+                          </a:solidFill>
+                          <a:latin typeface="Avenir Next"/>
+                        </a:defRPr>
+                      </a:pPr>
+                      <a:r>
+                        <a:t>miniforge3</a:t>
+                      </a:r>
+                    </a:p>
+                  </a:txBody>
+                  <a:tcPr marL="109728" marR="73152" marT="13716" marB="13716" anchor="ctr">
+                    <a:solidFill>
+                      <a:srgbClr val="FFFFFF"/>
+                    </a:solidFill>
+                  </a:tcPr>
+                </a:tc>
+                <a:tc>
+                  <a:txBody>
+                    <a:bodyPr/>
+                    <a:lstStyle/>
+                    <a:p>
+                      <a:pPr>
+                        <a:defRPr sz="1100" b="0">
+                          <a:solidFill>
+                            <a:srgbClr val="334155"/>
+                          </a:solidFill>
+                          <a:latin typeface="Avenir Next"/>
+                        </a:defRPr>
+                      </a:pPr>
+                      <a:r>
+                        <a:t>26.1.1-3</a:t>
+                      </a:r>
+                    </a:p>
+                  </a:txBody>
+                  <a:tcPr marL="109728" marR="73152" marT="13716" marB="13716" anchor="ctr">
+                    <a:solidFill>
+                      <a:srgbClr val="FFFFFF"/>
+                    </a:solidFill>
+                  </a:tcPr>
+                </a:tc>
+                <a:tc>
+                  <a:txBody>
+                    <a:bodyPr/>
+                    <a:lstStyle/>
+                    <a:p>
+                      <a:pPr>
+                        <a:defRPr sz="1050" b="0">
+                          <a:solidFill>
+                            <a:srgbClr val="64748B"/>
+                          </a:solidFill>
+                          <a:latin typeface="Avenir Next"/>
+                        </a:defRPr>
+                      </a:pPr>
+                      <a:r>
+                        <a:t>single by nature — installer for user-managed environments</a:t>
+                      </a:r>
+                    </a:p>
+                  </a:txBody>
+                  <a:tcPr marL="109728" marR="73152" marT="13716" marB="13716" anchor="ctr">
+                    <a:solidFill>
+                      <a:srgbClr val="FFFFFF"/>
+                    </a:solidFill>
+                  </a:tcPr>
+                </a:tc>
+              </a:tr>
+              <a:tr h="301752">
+                <a:tc gridSpan="3">
+                  <a:txBody>
+                    <a:bodyPr/>
+                    <a:lstStyle/>
+                    <a:p>
+                      <a:pPr>
+                        <a:defRPr sz="1150" b="1">
+                          <a:solidFill>
+                            <a:srgbClr val="FFFFFF"/>
+                          </a:solidFill>
+                          <a:latin typeface="Avenir Next"/>
+                        </a:defRPr>
+                      </a:pPr>
+                      <a:r>
+                        <a:t>Only-serial by nature — no MPI implementation exists</a:t>
+                      </a:r>
+                    </a:p>
+                  </a:txBody>
+                  <a:tcPr marL="109728" marR="73152" marT="13716" marB="13716" anchor="ctr">
+                    <a:solidFill>
+                      <a:srgbClr val="0D9488"/>
+                    </a:solidFill>
+                  </a:tcPr>
+                </a:tc>
+                <a:tc hMerge="1">
+                  <a:txBody>
+                    <a:bodyPr/>
+                    <a:lstStyle/>
+                    <a:p/>
+                  </a:txBody>
+                  <a:tcPr/>
+                </a:tc>
+                <a:tc hMerge="1">
+                  <a:txBody>
+                    <a:bodyPr/>
+                    <a:lstStyle/>
+                    <a:p/>
+                  </a:txBody>
+                  <a:tcPr/>
+                </a:tc>
+              </a:tr>
+              <a:tr h="301752">
+                <a:tc>
+                  <a:txBody>
+                    <a:bodyPr/>
+                    <a:lstStyle/>
+                    <a:p>
+                      <a:pPr>
+                        <a:defRPr sz="1100" b="1">
+                          <a:solidFill>
+                            <a:srgbClr val="0F172A"/>
+                          </a:solidFill>
+                          <a:latin typeface="Avenir Next"/>
+                        </a:defRPr>
+                      </a:pPr>
+                      <a:r>
+                        <a:t>gsl</a:t>
+                      </a:r>
+                    </a:p>
+                  </a:txBody>
+                  <a:tcPr marL="109728" marR="73152" marT="13716" marB="13716" anchor="ctr">
+                    <a:solidFill>
+                      <a:srgbClr val="FFFFFF"/>
+                    </a:solidFill>
+                  </a:tcPr>
+                </a:tc>
+                <a:tc>
+                  <a:txBody>
+                    <a:bodyPr/>
+                    <a:lstStyle/>
+                    <a:p>
+                      <a:pPr>
+                        <a:defRPr sz="1100" b="0">
+                          <a:solidFill>
+                            <a:srgbClr val="334155"/>
+                          </a:solidFill>
+                          <a:latin typeface="Avenir Next"/>
+                        </a:defRPr>
+                      </a:pPr>
+                      <a:r>
+                        <a:t>2.8 · 2.7.1</a:t>
+                      </a:r>
+                    </a:p>
+                  </a:txBody>
+                  <a:tcPr marL="109728" marR="73152" marT="13716" marB="13716" anchor="ctr">
+                    <a:solidFill>
+                      <a:srgbClr val="FFFFFF"/>
+                    </a:solidFill>
+                  </a:tcPr>
+                </a:tc>
+                <a:tc>
+                  <a:txBody>
+                    <a:bodyPr/>
+                    <a:lstStyle/>
+                    <a:p>
+                      <a:pPr>
+                        <a:defRPr sz="1050" b="0">
+                          <a:solidFill>
+                            <a:srgbClr val="64748B"/>
+                          </a:solidFill>
+                          <a:latin typeface="Avenir Next"/>
+                        </a:defRPr>
+                      </a:pPr>
+                    </a:p>
+                  </a:txBody>
+                  <a:tcPr marL="109728" marR="73152" marT="13716" marB="13716" anchor="ctr">
+                    <a:solidFill>
+                      <a:srgbClr val="FFFFFF"/>
+                    </a:solidFill>
+                  </a:tcPr>
+                </a:tc>
+              </a:tr>
+              <a:tr h="301752">
+                <a:tc>
+                  <a:txBody>
+                    <a:bodyPr/>
+                    <a:lstStyle/>
+                    <a:p>
+                      <a:pPr>
+                        <a:defRPr sz="1100" b="1">
+                          <a:solidFill>
+                            <a:srgbClr val="0F172A"/>
+                          </a:solidFill>
+                          <a:latin typeface="Avenir Next"/>
+                        </a:defRPr>
+                      </a:pPr>
+                      <a:r>
+                        <a:t>sqlite</a:t>
+                      </a:r>
+                    </a:p>
+                  </a:txBody>
+                  <a:tcPr marL="109728" marR="73152" marT="13716" marB="13716" anchor="ctr">
+                    <a:solidFill>
+                      <a:srgbClr val="FFFFFF"/>
+                    </a:solidFill>
+                  </a:tcPr>
+                </a:tc>
+                <a:tc>
+                  <a:txBody>
+                    <a:bodyPr/>
+                    <a:lstStyle/>
+                    <a:p>
+                      <a:pPr>
+                        <a:defRPr sz="1100" b="0">
+                          <a:solidFill>
+                            <a:srgbClr val="334155"/>
+                          </a:solidFill>
+                          <a:latin typeface="Avenir Next"/>
+                        </a:defRPr>
+                      </a:pPr>
+                      <a:r>
+                        <a:t>3.53.1 · 3.51.2</a:t>
+                      </a:r>
+                    </a:p>
+                  </a:txBody>
+                  <a:tcPr marL="109728" marR="73152" marT="13716" marB="13716" anchor="ctr">
+                    <a:solidFill>
+                      <a:srgbClr val="FFFFFF"/>
+                    </a:solidFill>
+                  </a:tcPr>
+                </a:tc>
+                <a:tc>
+                  <a:txBody>
+                    <a:bodyPr/>
+                    <a:lstStyle/>
+                    <a:p>
+                      <a:pPr>
+                        <a:defRPr sz="1050" b="0">
+                          <a:solidFill>
+                            <a:srgbClr val="64748B"/>
+                          </a:solidFill>
+                          <a:latin typeface="Avenir Next"/>
+                        </a:defRPr>
+                      </a:pPr>
+                    </a:p>
+                  </a:txBody>
+                  <a:tcPr marL="109728" marR="73152" marT="13716" marB="13716" anchor="ctr">
+                    <a:solidFill>
+                      <a:srgbClr val="FFFFFF"/>
+                    </a:solidFill>
+                  </a:tcPr>
+                </a:tc>
+              </a:tr>
+            </a:tbl>
+          </a:graphicData>
+        </a:graphic>
+      </p:graphicFrame>
+      <p:sp>
+        <p:nvSpPr>
+          <p:cNvPr id="7" name="TextBox 6"/>
+          <p:cNvSpPr txBox="1"/>
+          <p:nvPr/>
+        </p:nvSpPr>
+        <p:spPr>
+          <a:xfrm>
+            <a:off x="548640" y="6583680"/>
+            <a:ext cx="11064240" cy="256032"/>
+          </a:xfrm>
+          <a:prstGeom prst="rect">
+            <a:avLst/>
+          </a:prstGeom>
+          <a:noFill/>
+        </p:spPr>
+        <p:txBody>
+          <a:bodyPr wrap="square" anchor="t">
+            <a:spAutoFit/>
+          </a:bodyPr>
+          <a:lstStyle/>
+          <a:p>
+            <a:pPr algn="l">
+              <a:defRPr sz="1050" b="0">
+                <a:solidFill>
+                  <a:srgbClr val="64748B"/>
+                </a:solidFill>
+                <a:latin typeface="Avenir Next"/>
+              </a:defRPr>
+            </a:pPr>
+            <a:r>
+              <a:t>Version policy: newest supported + immediate predecessor · pinned to spack-packages v2026.06.0 (Spack v1.1.1)</a:t>
             </a:r>
           </a:p>
         </p:txBody>

--- a/presentations/cse_lanes_model.pptx
+++ b/presentations/cse_lanes_model.pptx
@@ -5600,7 +5600,7 @@
                         </a:defRPr>
                       </a:pPr>
                       <a:r>
-                        <a:t>GPU lane — complete MPI-capable lane, arch from the probe</a:t>
+                        <a:t>GPU lane — selects the full MPI roster above, plus the GPU payload</a:t>
                       </a:r>
                     </a:p>
                   </a:txBody>

--- a/presentations/cse_lanes_model.pptx
+++ b/presentations/cse_lanes_model.pptx
@@ -4319,7 +4319,7 @@
                         </a:defRPr>
                       </a:pPr>
                       <a:r>
-                        <a:t>~mpi — dual-build: the MPI lane carries its own +mpi boost</a:t>
+                        <a:t>~mpi here; the MPI lane carries its own +mpi build</a:t>
                       </a:r>
                     </a:p>
                   </a:txBody>
@@ -4345,7 +4345,7 @@
                         </a:defRPr>
                       </a:pPr>
                       <a:r>
-                        <a:t>Lane-agnostic — built here once, module-visible in every lane</a:t>
+                        <a:t>Common compiler-dependent — built here once, available in every lane</a:t>
                       </a:r>
                     </a:p>
                   </a:txBody>
@@ -4435,7 +4435,7 @@
                         </a:defRPr>
                       </a:pPr>
                       <a:r>
-                        <a:t>performance-sensitive so payload, not core — BLAS for all lanes</a:t>
+                        <a:t>performance-sensitive, so payload rather than core; the BLAS every lane links</a:t>
                       </a:r>
                     </a:p>
                   </a:txBody>
@@ -4509,7 +4509,7 @@
                         </a:defRPr>
                       </a:pPr>
                       <a:r>
-                        <a:t>reference LAPACK alongside openblas — flagged for team review</a:t>
+                        <a:t>reference LAPACK alongside openblas (flagged for team review)</a:t>
                       </a:r>
                     </a:p>
                   </a:txBody>
@@ -4583,7 +4583,7 @@
                         </a:defRPr>
                       </a:pPr>
                       <a:r>
-                        <a:t>needs the surface's compiler for compatibility — payload, not core</a:t>
+                        <a:t>needs the surface's compiler, so payload rather than core</a:t>
                       </a:r>
                     </a:p>
                   </a:txBody>
@@ -5426,7 +5426,7 @@
                         </a:defRPr>
                       </a:pPr>
                       <a:r>
-                        <a:t>+mpi — dual-build with the serial lane's ~mpi boost</a:t>
+                        <a:t>+mpi; the Serial lane carries its own ~mpi build</a:t>
                       </a:r>
                     </a:p>
                   </a:txBody>
@@ -5716,7 +5716,7 @@
                         </a:defRPr>
                       </a:pPr>
                       <a:r>
-                        <a:t>Lane-agnostic — one serial-lane build, exposed here too</a:t>
+                        <a:t>Common compiler-dependent — the Serial-lane build, available here too</a:t>
                       </a:r>
                     </a:p>
                   </a:txBody>
@@ -5758,7 +5758,7 @@
                         </a:defRPr>
                       </a:pPr>
                       <a:r>
-                        <a:t>lane-agnostic set</a:t>
+                        <a:t>common packages</a:t>
                       </a:r>
                     </a:p>
                   </a:txBody>
@@ -5806,7 +5806,7 @@
                         </a:defRPr>
                       </a:pPr>
                       <a:r>
-                        <a:t>openblas · netlib-lapack · gnuplot — same modules via the shared root, no rebuild</a:t>
+                        <a:t>openblas · netlib-lapack · gnuplot: the same modules through the shared root, nothing rebuilt</a:t>
                       </a:r>
                     </a:p>
                   </a:txBody>
@@ -13574,7 +13574,7 @@
               </a:defRPr>
             </a:pPr>
             <a:r>
-              <a:t>Science stack — four lanes, two-version roster — renders clean today</a:t>
+              <a:t>Science stack renders clean today: four lanes, two-version roster</a:t>
             </a:r>
           </a:p>
         </p:txBody>

--- a/presentations/cse_lanes_model.pptx
+++ b/presentations/cse_lanes_model.pptx
@@ -16,6 +16,7 @@
     <p:sldId id="264" r:id="rId15"/>
     <p:sldId id="265" r:id="rId16"/>
     <p:sldId id="266" r:id="rId17"/>
+    <p:sldId id="267" r:id="rId18"/>
   </p:sldIdLst>
   <p:sldSz cx="12191695" cy="6858000" type="screen4x3"/>
   <p:notesSz cx="6858000" cy="9144000"/>
@@ -3536,6 +3537,1178 @@
 </file>
 
 <file path=ppt/slides/slide10.xml><?xml version="1.0" encoding="utf-8"?>
+<p:sld xmlns:a="http://schemas.openxmlformats.org/drawingml/2006/main" xmlns:p="http://schemas.openxmlformats.org/presentationml/2006/main" xmlns:r="http://schemas.openxmlformats.org/officeDocument/2006/relationships">
+  <p:cSld>
+    <p:spTree>
+      <p:nvGrpSpPr>
+        <p:cNvPr id="1" name=""/>
+        <p:cNvGrpSpPr/>
+        <p:nvPr/>
+      </p:nvGrpSpPr>
+      <p:grpSpPr/>
+      <p:sp>
+        <p:nvSpPr>
+          <p:cNvPr id="2" name="Rectangle 1"/>
+          <p:cNvSpPr/>
+          <p:nvPr/>
+        </p:nvSpPr>
+        <p:spPr>
+          <a:xfrm>
+            <a:off x="0" y="0"/>
+            <a:ext cx="12191695" cy="6858000"/>
+          </a:xfrm>
+          <a:prstGeom prst="rect">
+            <a:avLst/>
+          </a:prstGeom>
+          <a:solidFill>
+            <a:srgbClr val="FFFFFF"/>
+          </a:solidFill>
+          <a:ln>
+            <a:noFill/>
+          </a:ln>
+          <a:effectLst/>
+        </p:spPr>
+        <p:style>
+          <a:lnRef idx="1">
+            <a:schemeClr val="accent1"/>
+          </a:lnRef>
+          <a:fillRef idx="3">
+            <a:schemeClr val="accent1"/>
+          </a:fillRef>
+          <a:effectRef idx="2">
+            <a:schemeClr val="accent1"/>
+          </a:effectRef>
+          <a:fontRef idx="minor">
+            <a:schemeClr val="lt1"/>
+          </a:fontRef>
+        </p:style>
+        <p:txBody>
+          <a:bodyPr rtlCol="0" anchor="ctr"/>
+          <a:lstStyle/>
+          <a:p>
+            <a:pPr algn="ctr"/>
+          </a:p>
+        </p:txBody>
+      </p:sp>
+      <p:sp>
+        <p:nvSpPr>
+          <p:cNvPr id="3" name="TextBox 2"/>
+          <p:cNvSpPr txBox="1"/>
+          <p:nvPr/>
+        </p:nvSpPr>
+        <p:spPr>
+          <a:xfrm>
+            <a:off x="548640" y="256032"/>
+            <a:ext cx="10972800" cy="365760"/>
+          </a:xfrm>
+          <a:prstGeom prst="rect">
+            <a:avLst/>
+          </a:prstGeom>
+          <a:noFill/>
+        </p:spPr>
+        <p:txBody>
+          <a:bodyPr wrap="square" anchor="t">
+            <a:spAutoFit/>
+          </a:bodyPr>
+          <a:lstStyle/>
+          <a:p>
+            <a:pPr algn="l">
+              <a:defRPr sz="1300" b="1">
+                <a:solidFill>
+                  <a:srgbClr val="0D9488"/>
+                </a:solidFill>
+                <a:latin typeface="Avenir Next"/>
+              </a:defRPr>
+            </a:pPr>
+            <a:r>
+              <a:t>APPENDIX · EXACT BUILD ROOTS</a:t>
+            </a:r>
+          </a:p>
+        </p:txBody>
+      </p:sp>
+      <p:sp>
+        <p:nvSpPr>
+          <p:cNvPr id="4" name="TextBox 3"/>
+          <p:cNvSpPr txBox="1"/>
+          <p:nvPr/>
+        </p:nvSpPr>
+        <p:spPr>
+          <a:xfrm>
+            <a:off x="548640" y="566928"/>
+            <a:ext cx="11064240" cy="731520"/>
+          </a:xfrm>
+          <a:prstGeom prst="rect">
+            <a:avLst/>
+          </a:prstGeom>
+          <a:noFill/>
+        </p:spPr>
+        <p:txBody>
+          <a:bodyPr wrap="square" anchor="t">
+            <a:spAutoFit/>
+          </a:bodyPr>
+          <a:lstStyle/>
+          <a:p>
+            <a:pPr algn="l">
+              <a:defRPr sz="3000" b="1">
+                <a:solidFill>
+                  <a:srgbClr val="0F172A"/>
+                </a:solidFill>
+                <a:latin typeface="Avenir Next"/>
+              </a:defRPr>
+            </a:pPr>
+            <a:r>
+              <a:t>Core and foundation — built once per compiler surface</a:t>
+            </a:r>
+          </a:p>
+        </p:txBody>
+      </p:sp>
+      <p:sp>
+        <p:nvSpPr>
+          <p:cNvPr id="5" name="Rectangle 4"/>
+          <p:cNvSpPr/>
+          <p:nvPr/>
+        </p:nvSpPr>
+        <p:spPr>
+          <a:xfrm>
+            <a:off x="566928" y="1298448"/>
+            <a:ext cx="1463040" cy="41148"/>
+          </a:xfrm>
+          <a:prstGeom prst="rect">
+            <a:avLst/>
+          </a:prstGeom>
+          <a:solidFill>
+            <a:srgbClr val="0D9488"/>
+          </a:solidFill>
+          <a:ln>
+            <a:noFill/>
+          </a:ln>
+          <a:effectLst/>
+        </p:spPr>
+        <p:style>
+          <a:lnRef idx="1">
+            <a:schemeClr val="accent1"/>
+          </a:lnRef>
+          <a:fillRef idx="3">
+            <a:schemeClr val="accent1"/>
+          </a:fillRef>
+          <a:effectRef idx="2">
+            <a:schemeClr val="accent1"/>
+          </a:effectRef>
+          <a:fontRef idx="minor">
+            <a:schemeClr val="lt1"/>
+          </a:fontRef>
+        </p:style>
+        <p:txBody>
+          <a:bodyPr rtlCol="0" anchor="ctr"/>
+          <a:lstStyle/>
+          <a:p>
+            <a:pPr algn="ctr"/>
+          </a:p>
+        </p:txBody>
+      </p:sp>
+      <p:graphicFrame>
+        <p:nvGraphicFramePr>
+          <p:cNvPr id="6" name="Table 5"/>
+          <p:cNvGraphicFramePr>
+            <a:graphicFrameLocks noGrp="1"/>
+          </p:cNvGraphicFramePr>
+          <p:nvPr/>
+        </p:nvGraphicFramePr>
+        <p:xfrm>
+          <a:off x="548640" y="1481328"/>
+          <a:ext cx="11091672" cy="4224528"/>
+        </p:xfrm>
+        <a:graphic>
+          <a:graphicData uri="http://schemas.openxmlformats.org/drawingml/2006/table">
+            <a:tbl>
+              <a:tblPr>
+                <a:tableStyleId>{5C22544A-7EE6-4342-B048-85BDC9FD1C3A}</a:tableStyleId>
+              </a:tblPr>
+              <a:tblGrid>
+                <a:gridCol w="1920240"/>
+                <a:gridCol w="2286000"/>
+                <a:gridCol w="6885432"/>
+              </a:tblGrid>
+              <a:tr h="301752">
+                <a:tc>
+                  <a:txBody>
+                    <a:bodyPr/>
+                    <a:lstStyle/>
+                    <a:p>
+                      <a:pPr>
+                        <a:defRPr sz="1100" b="1">
+                          <a:solidFill>
+                            <a:srgbClr val="64748B"/>
+                          </a:solidFill>
+                          <a:latin typeface="Avenir Next"/>
+                        </a:defRPr>
+                      </a:pPr>
+                      <a:r>
+                        <a:t>Package</a:t>
+                      </a:r>
+                    </a:p>
+                  </a:txBody>
+                  <a:tcPr marL="109728" marR="73152" marT="13716" marB="13716" anchor="ctr">
+                    <a:solidFill>
+                      <a:srgbClr val="FFFFFF"/>
+                    </a:solidFill>
+                  </a:tcPr>
+                </a:tc>
+                <a:tc>
+                  <a:txBody>
+                    <a:bodyPr/>
+                    <a:lstStyle/>
+                    <a:p>
+                      <a:pPr>
+                        <a:defRPr sz="1100" b="1">
+                          <a:solidFill>
+                            <a:srgbClr val="64748B"/>
+                          </a:solidFill>
+                          <a:latin typeface="Avenir Next"/>
+                        </a:defRPr>
+                      </a:pPr>
+                      <a:r>
+                        <a:t>Versions</a:t>
+                      </a:r>
+                    </a:p>
+                  </a:txBody>
+                  <a:tcPr marL="109728" marR="73152" marT="13716" marB="13716" anchor="ctr">
+                    <a:solidFill>
+                      <a:srgbClr val="FFFFFF"/>
+                    </a:solidFill>
+                  </a:tcPr>
+                </a:tc>
+                <a:tc>
+                  <a:txBody>
+                    <a:bodyPr/>
+                    <a:lstStyle/>
+                    <a:p>
+                      <a:pPr>
+                        <a:defRPr sz="1100" b="1">
+                          <a:solidFill>
+                            <a:srgbClr val="64748B"/>
+                          </a:solidFill>
+                          <a:latin typeface="Avenir Next"/>
+                        </a:defRPr>
+                      </a:pPr>
+                      <a:r>
+                        <a:t>Built as · pairing</a:t>
+                      </a:r>
+                    </a:p>
+                  </a:txBody>
+                  <a:tcPr marL="109728" marR="73152" marT="13716" marB="13716" anchor="ctr">
+                    <a:solidFill>
+                      <a:srgbClr val="FFFFFF"/>
+                    </a:solidFill>
+                  </a:tcPr>
+                </a:tc>
+              </a:tr>
+              <a:tr h="301752">
+                <a:tc gridSpan="3">
+                  <a:txBody>
+                    <a:bodyPr/>
+                    <a:lstStyle/>
+                    <a:p>
+                      <a:pPr>
+                        <a:defRPr sz="1150" b="1">
+                          <a:solidFill>
+                            <a:srgbClr val="FFFFFF"/>
+                          </a:solidFill>
+                          <a:latin typeface="Avenir Next"/>
+                        </a:defRPr>
+                      </a:pPr>
+                      <a:r>
+                        <a:t>Foundation — ambient in the lane view, never a module</a:t>
+                      </a:r>
+                    </a:p>
+                  </a:txBody>
+                  <a:tcPr marL="109728" marR="73152" marT="13716" marB="13716" anchor="ctr">
+                    <a:solidFill>
+                      <a:srgbClr val="475569"/>
+                    </a:solidFill>
+                  </a:tcPr>
+                </a:tc>
+                <a:tc hMerge="1">
+                  <a:txBody>
+                    <a:bodyPr/>
+                    <a:lstStyle/>
+                    <a:p/>
+                  </a:txBody>
+                  <a:tcPr/>
+                </a:tc>
+                <a:tc hMerge="1">
+                  <a:txBody>
+                    <a:bodyPr/>
+                    <a:lstStyle/>
+                    <a:p/>
+                  </a:txBody>
+                  <a:tcPr/>
+                </a:tc>
+              </a:tr>
+              <a:tr h="301752">
+                <a:tc>
+                  <a:txBody>
+                    <a:bodyPr/>
+                    <a:lstStyle/>
+                    <a:p>
+                      <a:pPr>
+                        <a:defRPr sz="1100" b="1">
+                          <a:solidFill>
+                            <a:srgbClr val="0F172A"/>
+                          </a:solidFill>
+                          <a:latin typeface="Avenir Next"/>
+                        </a:defRPr>
+                      </a:pPr>
+                      <a:r>
+                        <a:t>zlib</a:t>
+                      </a:r>
+                    </a:p>
+                  </a:txBody>
+                  <a:tcPr marL="109728" marR="73152" marT="13716" marB="13716" anchor="ctr">
+                    <a:solidFill>
+                      <a:srgbClr val="FFFFFF"/>
+                    </a:solidFill>
+                  </a:tcPr>
+                </a:tc>
+                <a:tc>
+                  <a:txBody>
+                    <a:bodyPr/>
+                    <a:lstStyle/>
+                    <a:p>
+                      <a:pPr>
+                        <a:defRPr sz="1100" b="0">
+                          <a:solidFill>
+                            <a:srgbClr val="334155"/>
+                          </a:solidFill>
+                          <a:latin typeface="Avenir Next"/>
+                        </a:defRPr>
+                      </a:pPr>
+                      <a:r>
+                        <a:t>1.3.1</a:t>
+                      </a:r>
+                    </a:p>
+                  </a:txBody>
+                  <a:tcPr marL="109728" marR="73152" marT="13716" marB="13716" anchor="ctr">
+                    <a:solidFill>
+                      <a:srgbClr val="FFFFFF"/>
+                    </a:solidFill>
+                  </a:tcPr>
+                </a:tc>
+                <a:tc>
+                  <a:txBody>
+                    <a:bodyPr/>
+                    <a:lstStyle/>
+                    <a:p>
+                      <a:pPr>
+                        <a:defRPr sz="1050" b="0">
+                          <a:solidFill>
+                            <a:srgbClr val="64748B"/>
+                          </a:solidFill>
+                          <a:latin typeface="Avenir Next"/>
+                        </a:defRPr>
+                      </a:pPr>
+                      <a:r>
+                        <a:t>single pinned version (require: pin)</a:t>
+                      </a:r>
+                    </a:p>
+                  </a:txBody>
+                  <a:tcPr marL="109728" marR="73152" marT="13716" marB="13716" anchor="ctr">
+                    <a:solidFill>
+                      <a:srgbClr val="FFFFFF"/>
+                    </a:solidFill>
+                  </a:tcPr>
+                </a:tc>
+              </a:tr>
+              <a:tr h="301752">
+                <a:tc>
+                  <a:txBody>
+                    <a:bodyPr/>
+                    <a:lstStyle/>
+                    <a:p>
+                      <a:pPr>
+                        <a:defRPr sz="1100" b="1">
+                          <a:solidFill>
+                            <a:srgbClr val="0F172A"/>
+                          </a:solidFill>
+                          <a:latin typeface="Avenir Next"/>
+                        </a:defRPr>
+                      </a:pPr>
+                      <a:r>
+                        <a:t>xz</a:t>
+                      </a:r>
+                    </a:p>
+                  </a:txBody>
+                  <a:tcPr marL="109728" marR="73152" marT="13716" marB="13716" anchor="ctr">
+                    <a:solidFill>
+                      <a:srgbClr val="FFFFFF"/>
+                    </a:solidFill>
+                  </a:tcPr>
+                </a:tc>
+                <a:tc>
+                  <a:txBody>
+                    <a:bodyPr/>
+                    <a:lstStyle/>
+                    <a:p>
+                      <a:pPr>
+                        <a:defRPr sz="1100" b="0">
+                          <a:solidFill>
+                            <a:srgbClr val="334155"/>
+                          </a:solidFill>
+                          <a:latin typeface="Avenir Next"/>
+                        </a:defRPr>
+                      </a:pPr>
+                      <a:r>
+                        <a:t>5.4.6</a:t>
+                      </a:r>
+                    </a:p>
+                  </a:txBody>
+                  <a:tcPr marL="109728" marR="73152" marT="13716" marB="13716" anchor="ctr">
+                    <a:solidFill>
+                      <a:srgbClr val="FFFFFF"/>
+                    </a:solidFill>
+                  </a:tcPr>
+                </a:tc>
+                <a:tc>
+                  <a:txBody>
+                    <a:bodyPr/>
+                    <a:lstStyle/>
+                    <a:p>
+                      <a:pPr>
+                        <a:defRPr sz="1050" b="0">
+                          <a:solidFill>
+                            <a:srgbClr val="64748B"/>
+                          </a:solidFill>
+                          <a:latin typeface="Avenir Next"/>
+                        </a:defRPr>
+                      </a:pPr>
+                      <a:r>
+                        <a:t>single pinned version</a:t>
+                      </a:r>
+                    </a:p>
+                  </a:txBody>
+                  <a:tcPr marL="109728" marR="73152" marT="13716" marB="13716" anchor="ctr">
+                    <a:solidFill>
+                      <a:srgbClr val="FFFFFF"/>
+                    </a:solidFill>
+                  </a:tcPr>
+                </a:tc>
+              </a:tr>
+              <a:tr h="301752">
+                <a:tc>
+                  <a:txBody>
+                    <a:bodyPr/>
+                    <a:lstStyle/>
+                    <a:p>
+                      <a:pPr>
+                        <a:defRPr sz="1100" b="1">
+                          <a:solidFill>
+                            <a:srgbClr val="0F172A"/>
+                          </a:solidFill>
+                          <a:latin typeface="Avenir Next"/>
+                        </a:defRPr>
+                      </a:pPr>
+                      <a:r>
+                        <a:t>zstd</a:t>
+                      </a:r>
+                    </a:p>
+                  </a:txBody>
+                  <a:tcPr marL="109728" marR="73152" marT="13716" marB="13716" anchor="ctr">
+                    <a:solidFill>
+                      <a:srgbClr val="FFFFFF"/>
+                    </a:solidFill>
+                  </a:tcPr>
+                </a:tc>
+                <a:tc>
+                  <a:txBody>
+                    <a:bodyPr/>
+                    <a:lstStyle/>
+                    <a:p>
+                      <a:pPr>
+                        <a:defRPr sz="1100" b="0">
+                          <a:solidFill>
+                            <a:srgbClr val="334155"/>
+                          </a:solidFill>
+                          <a:latin typeface="Avenir Next"/>
+                        </a:defRPr>
+                      </a:pPr>
+                      <a:r>
+                        <a:t>1.5.6</a:t>
+                      </a:r>
+                    </a:p>
+                  </a:txBody>
+                  <a:tcPr marL="109728" marR="73152" marT="13716" marB="13716" anchor="ctr">
+                    <a:solidFill>
+                      <a:srgbClr val="FFFFFF"/>
+                    </a:solidFill>
+                  </a:tcPr>
+                </a:tc>
+                <a:tc>
+                  <a:txBody>
+                    <a:bodyPr/>
+                    <a:lstStyle/>
+                    <a:p>
+                      <a:pPr>
+                        <a:defRPr sz="1050" b="0">
+                          <a:solidFill>
+                            <a:srgbClr val="64748B"/>
+                          </a:solidFill>
+                          <a:latin typeface="Avenir Next"/>
+                        </a:defRPr>
+                      </a:pPr>
+                      <a:r>
+                        <a:t>single pinned version</a:t>
+                      </a:r>
+                    </a:p>
+                  </a:txBody>
+                  <a:tcPr marL="109728" marR="73152" marT="13716" marB="13716" anchor="ctr">
+                    <a:solidFill>
+                      <a:srgbClr val="FFFFFF"/>
+                    </a:solidFill>
+                  </a:tcPr>
+                </a:tc>
+              </a:tr>
+              <a:tr h="301752">
+                <a:tc gridSpan="3">
+                  <a:txBody>
+                    <a:bodyPr/>
+                    <a:lstStyle/>
+                    <a:p>
+                      <a:pPr>
+                        <a:defRPr sz="1150" b="1">
+                          <a:solidFill>
+                            <a:srgbClr val="FFFFFF"/>
+                          </a:solidFill>
+                          <a:latin typeface="Avenir Next"/>
+                        </a:defRPr>
+                      </a:pPr>
+                      <a:r>
+                        <a:t>Core tools — user-loadable, compiler-agnostic</a:t>
+                      </a:r>
+                    </a:p>
+                  </a:txBody>
+                  <a:tcPr marL="109728" marR="73152" marT="13716" marB="13716" anchor="ctr">
+                    <a:solidFill>
+                      <a:srgbClr val="0D9488"/>
+                    </a:solidFill>
+                  </a:tcPr>
+                </a:tc>
+                <a:tc hMerge="1">
+                  <a:txBody>
+                    <a:bodyPr/>
+                    <a:lstStyle/>
+                    <a:p/>
+                  </a:txBody>
+                  <a:tcPr/>
+                </a:tc>
+                <a:tc hMerge="1">
+                  <a:txBody>
+                    <a:bodyPr/>
+                    <a:lstStyle/>
+                    <a:p/>
+                  </a:txBody>
+                  <a:tcPr/>
+                </a:tc>
+              </a:tr>
+              <a:tr h="301752">
+                <a:tc>
+                  <a:txBody>
+                    <a:bodyPr/>
+                    <a:lstStyle/>
+                    <a:p>
+                      <a:pPr>
+                        <a:defRPr sz="1100" b="1">
+                          <a:solidFill>
+                            <a:srgbClr val="0F172A"/>
+                          </a:solidFill>
+                          <a:latin typeface="Avenir Next"/>
+                        </a:defRPr>
+                      </a:pPr>
+                      <a:r>
+                        <a:t>cmake</a:t>
+                      </a:r>
+                    </a:p>
+                  </a:txBody>
+                  <a:tcPr marL="109728" marR="73152" marT="13716" marB="13716" anchor="ctr">
+                    <a:solidFill>
+                      <a:srgbClr val="FFFFFF"/>
+                    </a:solidFill>
+                  </a:tcPr>
+                </a:tc>
+                <a:tc>
+                  <a:txBody>
+                    <a:bodyPr/>
+                    <a:lstStyle/>
+                    <a:p>
+                      <a:pPr>
+                        <a:defRPr sz="1100" b="0">
+                          <a:solidFill>
+                            <a:srgbClr val="334155"/>
+                          </a:solidFill>
+                          <a:latin typeface="Avenir Next"/>
+                        </a:defRPr>
+                      </a:pPr>
+                      <a:r>
+                        <a:t>4.3.3 · 4.2.3</a:t>
+                      </a:r>
+                    </a:p>
+                  </a:txBody>
+                  <a:tcPr marL="109728" marR="73152" marT="13716" marB="13716" anchor="ctr">
+                    <a:solidFill>
+                      <a:srgbClr val="FFFFFF"/>
+                    </a:solidFill>
+                  </a:tcPr>
+                </a:tc>
+                <a:tc>
+                  <a:txBody>
+                    <a:bodyPr/>
+                    <a:lstStyle/>
+                    <a:p>
+                      <a:pPr>
+                        <a:defRPr sz="1050" b="0">
+                          <a:solidFill>
+                            <a:srgbClr val="64748B"/>
+                          </a:solidFill>
+                          <a:latin typeface="Avenir Next"/>
+                        </a:defRPr>
+                      </a:pPr>
+                    </a:p>
+                  </a:txBody>
+                  <a:tcPr marL="109728" marR="73152" marT="13716" marB="13716" anchor="ctr">
+                    <a:solidFill>
+                      <a:srgbClr val="FFFFFF"/>
+                    </a:solidFill>
+                  </a:tcPr>
+                </a:tc>
+              </a:tr>
+              <a:tr h="301752">
+                <a:tc>
+                  <a:txBody>
+                    <a:bodyPr/>
+                    <a:lstStyle/>
+                    <a:p>
+                      <a:pPr>
+                        <a:defRPr sz="1100" b="1">
+                          <a:solidFill>
+                            <a:srgbClr val="0F172A"/>
+                          </a:solidFill>
+                          <a:latin typeface="Avenir Next"/>
+                        </a:defRPr>
+                      </a:pPr>
+                      <a:r>
+                        <a:t>ninja · pkgconf · git</a:t>
+                      </a:r>
+                    </a:p>
+                  </a:txBody>
+                  <a:tcPr marL="109728" marR="73152" marT="13716" marB="13716" anchor="ctr">
+                    <a:solidFill>
+                      <a:srgbClr val="FFFFFF"/>
+                    </a:solidFill>
+                  </a:tcPr>
+                </a:tc>
+                <a:tc>
+                  <a:txBody>
+                    <a:bodyPr/>
+                    <a:lstStyle/>
+                    <a:p>
+                      <a:pPr>
+                        <a:defRPr sz="1100" b="0">
+                          <a:solidFill>
+                            <a:srgbClr val="334155"/>
+                          </a:solidFill>
+                          <a:latin typeface="Avenir Next"/>
+                        </a:defRPr>
+                      </a:pPr>
+                      <a:r>
+                        <a:t>newest</a:t>
+                      </a:r>
+                    </a:p>
+                  </a:txBody>
+                  <a:tcPr marL="109728" marR="73152" marT="13716" marB="13716" anchor="ctr">
+                    <a:solidFill>
+                      <a:srgbClr val="FFFFFF"/>
+                    </a:solidFill>
+                  </a:tcPr>
+                </a:tc>
+                <a:tc>
+                  <a:txBody>
+                    <a:bodyPr/>
+                    <a:lstStyle/>
+                    <a:p>
+                      <a:pPr>
+                        <a:defRPr sz="1050" b="0">
+                          <a:solidFill>
+                            <a:srgbClr val="64748B"/>
+                          </a:solidFill>
+                          <a:latin typeface="Avenir Next"/>
+                        </a:defRPr>
+                      </a:pPr>
+                      <a:r>
+                        <a:t>unpinned — newest from the recipe generation</a:t>
+                      </a:r>
+                    </a:p>
+                  </a:txBody>
+                  <a:tcPr marL="109728" marR="73152" marT="13716" marB="13716" anchor="ctr">
+                    <a:solidFill>
+                      <a:srgbClr val="FFFFFF"/>
+                    </a:solidFill>
+                  </a:tcPr>
+                </a:tc>
+              </a:tr>
+              <a:tr h="301752">
+                <a:tc>
+                  <a:txBody>
+                    <a:bodyPr/>
+                    <a:lstStyle/>
+                    <a:p>
+                      <a:pPr>
+                        <a:defRPr sz="1100" b="1">
+                          <a:solidFill>
+                            <a:srgbClr val="0F172A"/>
+                          </a:solidFill>
+                          <a:latin typeface="Avenir Next"/>
+                        </a:defRPr>
+                      </a:pPr>
+                      <a:r>
+                        <a:t>python</a:t>
+                      </a:r>
+                    </a:p>
+                  </a:txBody>
+                  <a:tcPr marL="109728" marR="73152" marT="13716" marB="13716" anchor="ctr">
+                    <a:solidFill>
+                      <a:srgbClr val="FFFFFF"/>
+                    </a:solidFill>
+                  </a:tcPr>
+                </a:tc>
+                <a:tc>
+                  <a:txBody>
+                    <a:bodyPr/>
+                    <a:lstStyle/>
+                    <a:p>
+                      <a:pPr>
+                        <a:defRPr sz="1100" b="0">
+                          <a:solidFill>
+                            <a:srgbClr val="334155"/>
+                          </a:solidFill>
+                          <a:latin typeface="Avenir Next"/>
+                        </a:defRPr>
+                      </a:pPr>
+                      <a:r>
+                        <a:t>3.14.5 · 3.13.13</a:t>
+                      </a:r>
+                    </a:p>
+                  </a:txBody>
+                  <a:tcPr marL="109728" marR="73152" marT="13716" marB="13716" anchor="ctr">
+                    <a:solidFill>
+                      <a:srgbClr val="FFFFFF"/>
+                    </a:solidFill>
+                  </a:tcPr>
+                </a:tc>
+                <a:tc>
+                  <a:txBody>
+                    <a:bodyPr/>
+                    <a:lstStyle/>
+                    <a:p>
+                      <a:pPr>
+                        <a:defRPr sz="1050" b="0">
+                          <a:solidFill>
+                            <a:srgbClr val="64748B"/>
+                          </a:solidFill>
+                          <a:latin typeface="Avenir Next"/>
+                        </a:defRPr>
+                      </a:pPr>
+                      <a:r>
+                        <a:t>the two newest supported minor lines</a:t>
+                      </a:r>
+                    </a:p>
+                  </a:txBody>
+                  <a:tcPr marL="109728" marR="73152" marT="13716" marB="13716" anchor="ctr">
+                    <a:solidFill>
+                      <a:srgbClr val="FFFFFF"/>
+                    </a:solidFill>
+                  </a:tcPr>
+                </a:tc>
+              </a:tr>
+              <a:tr h="301752">
+                <a:tc>
+                  <a:txBody>
+                    <a:bodyPr/>
+                    <a:lstStyle/>
+                    <a:p>
+                      <a:pPr>
+                        <a:defRPr sz="1100" b="1">
+                          <a:solidFill>
+                            <a:srgbClr val="0F172A"/>
+                          </a:solidFill>
+                          <a:latin typeface="Avenir Next"/>
+                        </a:defRPr>
+                      </a:pPr>
+                      <a:r>
+                        <a:t>py-numpy</a:t>
+                      </a:r>
+                    </a:p>
+                  </a:txBody>
+                  <a:tcPr marL="109728" marR="73152" marT="13716" marB="13716" anchor="ctr">
+                    <a:solidFill>
+                      <a:srgbClr val="FFFFFF"/>
+                    </a:solidFill>
+                  </a:tcPr>
+                </a:tc>
+                <a:tc>
+                  <a:txBody>
+                    <a:bodyPr/>
+                    <a:lstStyle/>
+                    <a:p>
+                      <a:pPr>
+                        <a:defRPr sz="1100" b="0">
+                          <a:solidFill>
+                            <a:srgbClr val="334155"/>
+                          </a:solidFill>
+                          <a:latin typeface="Avenir Next"/>
+                        </a:defRPr>
+                      </a:pPr>
+                      <a:r>
+                        <a:t>2.4.6</a:t>
+                      </a:r>
+                    </a:p>
+                  </a:txBody>
+                  <a:tcPr marL="109728" marR="73152" marT="13716" marB="13716" anchor="ctr">
+                    <a:solidFill>
+                      <a:srgbClr val="FFFFFF"/>
+                    </a:solidFill>
+                  </a:tcPr>
+                </a:tc>
+                <a:tc>
+                  <a:txBody>
+                    <a:bodyPr/>
+                    <a:lstStyle/>
+                    <a:p>
+                      <a:pPr>
+                        <a:defRPr sz="1050" b="0">
+                          <a:solidFill>
+                            <a:srgbClr val="64748B"/>
+                          </a:solidFill>
+                          <a:latin typeface="Avenir Next"/>
+                        </a:defRPr>
+                      </a:pPr>
+                      <a:r>
+                        <a:t>built against each python line (newest non-deprecated recipe)</a:t>
+                      </a:r>
+                    </a:p>
+                  </a:txBody>
+                  <a:tcPr marL="109728" marR="73152" marT="13716" marB="13716" anchor="ctr">
+                    <a:solidFill>
+                      <a:srgbClr val="FFFFFF"/>
+                    </a:solidFill>
+                  </a:tcPr>
+                </a:tc>
+              </a:tr>
+              <a:tr h="301752">
+                <a:tc>
+                  <a:txBody>
+                    <a:bodyPr/>
+                    <a:lstStyle/>
+                    <a:p>
+                      <a:pPr>
+                        <a:defRPr sz="1100" b="1">
+                          <a:solidFill>
+                            <a:srgbClr val="0F172A"/>
+                          </a:solidFill>
+                          <a:latin typeface="Avenir Next"/>
+                        </a:defRPr>
+                      </a:pPr>
+                      <a:r>
+                        <a:t>miniforge3</a:t>
+                      </a:r>
+                    </a:p>
+                  </a:txBody>
+                  <a:tcPr marL="109728" marR="73152" marT="13716" marB="13716" anchor="ctr">
+                    <a:solidFill>
+                      <a:srgbClr val="FFFFFF"/>
+                    </a:solidFill>
+                  </a:tcPr>
+                </a:tc>
+                <a:tc>
+                  <a:txBody>
+                    <a:bodyPr/>
+                    <a:lstStyle/>
+                    <a:p>
+                      <a:pPr>
+                        <a:defRPr sz="1100" b="0">
+                          <a:solidFill>
+                            <a:srgbClr val="334155"/>
+                          </a:solidFill>
+                          <a:latin typeface="Avenir Next"/>
+                        </a:defRPr>
+                      </a:pPr>
+                      <a:r>
+                        <a:t>26.1.1-3</a:t>
+                      </a:r>
+                    </a:p>
+                  </a:txBody>
+                  <a:tcPr marL="109728" marR="73152" marT="13716" marB="13716" anchor="ctr">
+                    <a:solidFill>
+                      <a:srgbClr val="FFFFFF"/>
+                    </a:solidFill>
+                  </a:tcPr>
+                </a:tc>
+                <a:tc>
+                  <a:txBody>
+                    <a:bodyPr/>
+                    <a:lstStyle/>
+                    <a:p>
+                      <a:pPr>
+                        <a:defRPr sz="1050" b="0">
+                          <a:solidFill>
+                            <a:srgbClr val="64748B"/>
+                          </a:solidFill>
+                          <a:latin typeface="Avenir Next"/>
+                        </a:defRPr>
+                      </a:pPr>
+                      <a:r>
+                        <a:t>single by nature — installer for user-managed environments</a:t>
+                      </a:r>
+                    </a:p>
+                  </a:txBody>
+                  <a:tcPr marL="109728" marR="73152" marT="13716" marB="13716" anchor="ctr">
+                    <a:solidFill>
+                      <a:srgbClr val="FFFFFF"/>
+                    </a:solidFill>
+                  </a:tcPr>
+                </a:tc>
+              </a:tr>
+              <a:tr h="301752">
+                <a:tc gridSpan="3">
+                  <a:txBody>
+                    <a:bodyPr/>
+                    <a:lstStyle/>
+                    <a:p>
+                      <a:pPr>
+                        <a:defRPr sz="1150" b="1">
+                          <a:solidFill>
+                            <a:srgbClr val="FFFFFF"/>
+                          </a:solidFill>
+                          <a:latin typeface="Avenir Next"/>
+                        </a:defRPr>
+                      </a:pPr>
+                      <a:r>
+                        <a:t>Only-serial by nature — no MPI implementation exists</a:t>
+                      </a:r>
+                    </a:p>
+                  </a:txBody>
+                  <a:tcPr marL="109728" marR="73152" marT="13716" marB="13716" anchor="ctr">
+                    <a:solidFill>
+                      <a:srgbClr val="0D9488"/>
+                    </a:solidFill>
+                  </a:tcPr>
+                </a:tc>
+                <a:tc hMerge="1">
+                  <a:txBody>
+                    <a:bodyPr/>
+                    <a:lstStyle/>
+                    <a:p/>
+                  </a:txBody>
+                  <a:tcPr/>
+                </a:tc>
+                <a:tc hMerge="1">
+                  <a:txBody>
+                    <a:bodyPr/>
+                    <a:lstStyle/>
+                    <a:p/>
+                  </a:txBody>
+                  <a:tcPr/>
+                </a:tc>
+              </a:tr>
+              <a:tr h="301752">
+                <a:tc>
+                  <a:txBody>
+                    <a:bodyPr/>
+                    <a:lstStyle/>
+                    <a:p>
+                      <a:pPr>
+                        <a:defRPr sz="1100" b="1">
+                          <a:solidFill>
+                            <a:srgbClr val="0F172A"/>
+                          </a:solidFill>
+                          <a:latin typeface="Avenir Next"/>
+                        </a:defRPr>
+                      </a:pPr>
+                      <a:r>
+                        <a:t>gsl</a:t>
+                      </a:r>
+                    </a:p>
+                  </a:txBody>
+                  <a:tcPr marL="109728" marR="73152" marT="13716" marB="13716" anchor="ctr">
+                    <a:solidFill>
+                      <a:srgbClr val="FFFFFF"/>
+                    </a:solidFill>
+                  </a:tcPr>
+                </a:tc>
+                <a:tc>
+                  <a:txBody>
+                    <a:bodyPr/>
+                    <a:lstStyle/>
+                    <a:p>
+                      <a:pPr>
+                        <a:defRPr sz="1100" b="0">
+                          <a:solidFill>
+                            <a:srgbClr val="334155"/>
+                          </a:solidFill>
+                          <a:latin typeface="Avenir Next"/>
+                        </a:defRPr>
+                      </a:pPr>
+                      <a:r>
+                        <a:t>2.8 · 2.7.1</a:t>
+                      </a:r>
+                    </a:p>
+                  </a:txBody>
+                  <a:tcPr marL="109728" marR="73152" marT="13716" marB="13716" anchor="ctr">
+                    <a:solidFill>
+                      <a:srgbClr val="FFFFFF"/>
+                    </a:solidFill>
+                  </a:tcPr>
+                </a:tc>
+                <a:tc>
+                  <a:txBody>
+                    <a:bodyPr/>
+                    <a:lstStyle/>
+                    <a:p>
+                      <a:pPr>
+                        <a:defRPr sz="1050" b="0">
+                          <a:solidFill>
+                            <a:srgbClr val="64748B"/>
+                          </a:solidFill>
+                          <a:latin typeface="Avenir Next"/>
+                        </a:defRPr>
+                      </a:pPr>
+                    </a:p>
+                  </a:txBody>
+                  <a:tcPr marL="109728" marR="73152" marT="13716" marB="13716" anchor="ctr">
+                    <a:solidFill>
+                      <a:srgbClr val="FFFFFF"/>
+                    </a:solidFill>
+                  </a:tcPr>
+                </a:tc>
+              </a:tr>
+              <a:tr h="301752">
+                <a:tc>
+                  <a:txBody>
+                    <a:bodyPr/>
+                    <a:lstStyle/>
+                    <a:p>
+                      <a:pPr>
+                        <a:defRPr sz="1100" b="1">
+                          <a:solidFill>
+                            <a:srgbClr val="0F172A"/>
+                          </a:solidFill>
+                          <a:latin typeface="Avenir Next"/>
+                        </a:defRPr>
+                      </a:pPr>
+                      <a:r>
+                        <a:t>sqlite</a:t>
+                      </a:r>
+                    </a:p>
+                  </a:txBody>
+                  <a:tcPr marL="109728" marR="73152" marT="13716" marB="13716" anchor="ctr">
+                    <a:solidFill>
+                      <a:srgbClr val="FFFFFF"/>
+                    </a:solidFill>
+                  </a:tcPr>
+                </a:tc>
+                <a:tc>
+                  <a:txBody>
+                    <a:bodyPr/>
+                    <a:lstStyle/>
+                    <a:p>
+                      <a:pPr>
+                        <a:defRPr sz="1100" b="0">
+                          <a:solidFill>
+                            <a:srgbClr val="334155"/>
+                          </a:solidFill>
+                          <a:latin typeface="Avenir Next"/>
+                        </a:defRPr>
+                      </a:pPr>
+                      <a:r>
+                        <a:t>3.53.1 · 3.51.2</a:t>
+                      </a:r>
+                    </a:p>
+                  </a:txBody>
+                  <a:tcPr marL="109728" marR="73152" marT="13716" marB="13716" anchor="ctr">
+                    <a:solidFill>
+                      <a:srgbClr val="FFFFFF"/>
+                    </a:solidFill>
+                  </a:tcPr>
+                </a:tc>
+                <a:tc>
+                  <a:txBody>
+                    <a:bodyPr/>
+                    <a:lstStyle/>
+                    <a:p>
+                      <a:pPr>
+                        <a:defRPr sz="1050" b="0">
+                          <a:solidFill>
+                            <a:srgbClr val="64748B"/>
+                          </a:solidFill>
+                          <a:latin typeface="Avenir Next"/>
+                        </a:defRPr>
+                      </a:pPr>
+                    </a:p>
+                  </a:txBody>
+                  <a:tcPr marL="109728" marR="73152" marT="13716" marB="13716" anchor="ctr">
+                    <a:solidFill>
+                      <a:srgbClr val="FFFFFF"/>
+                    </a:solidFill>
+                  </a:tcPr>
+                </a:tc>
+              </a:tr>
+            </a:tbl>
+          </a:graphicData>
+        </a:graphic>
+      </p:graphicFrame>
+      <p:sp>
+        <p:nvSpPr>
+          <p:cNvPr id="7" name="TextBox 6"/>
+          <p:cNvSpPr txBox="1"/>
+          <p:nvPr/>
+        </p:nvSpPr>
+        <p:spPr>
+          <a:xfrm>
+            <a:off x="548640" y="6583680"/>
+            <a:ext cx="11064240" cy="256032"/>
+          </a:xfrm>
+          <a:prstGeom prst="rect">
+            <a:avLst/>
+          </a:prstGeom>
+          <a:noFill/>
+        </p:spPr>
+        <p:txBody>
+          <a:bodyPr wrap="square" anchor="t">
+            <a:spAutoFit/>
+          </a:bodyPr>
+          <a:lstStyle/>
+          <a:p>
+            <a:pPr algn="l">
+              <a:defRPr sz="1050" b="0">
+                <a:solidFill>
+                  <a:srgbClr val="64748B"/>
+                </a:solidFill>
+                <a:latin typeface="Avenir Next"/>
+              </a:defRPr>
+            </a:pPr>
+            <a:r>
+              <a:t>Version policy: newest supported + immediate predecessor · pinned to spack-packages v2026.06.0 (Spack v1.1.1)</a:t>
+            </a:r>
+          </a:p>
+        </p:txBody>
+      </p:sp>
+    </p:spTree>
+  </p:cSld>
+  <p:clrMapOvr>
+    <a:masterClrMapping/>
+  </p:clrMapOvr>
+</p:sld>
+</file>
+
+<file path=ppt/slides/slide11.xml><?xml version="1.0" encoding="utf-8"?>
 <p:sld xmlns:a="http://schemas.openxmlformats.org/drawingml/2006/main" xmlns:p="http://schemas.openxmlformats.org/presentationml/2006/main" xmlns:r="http://schemas.openxmlformats.org/officeDocument/2006/relationships">
   <p:cSld>
     <p:spTree>
@@ -4642,7 +5815,7 @@
 </p:sld>
 </file>
 
-<file path=ppt/slides/slide11.xml><?xml version="1.0" encoding="utf-8"?>
+<file path=ppt/slides/slide12.xml><?xml version="1.0" encoding="utf-8"?>
 <p:sld xmlns:a="http://schemas.openxmlformats.org/drawingml/2006/main" xmlns:p="http://schemas.openxmlformats.org/presentationml/2006/main" xmlns:r="http://schemas.openxmlformats.org/officeDocument/2006/relationships">
   <p:cSld>
     <p:spTree>
@@ -9357,7 +10530,7 @@
               </a:defRPr>
             </a:pPr>
             <a:r>
-              <a:t>hdf5~mpi · fftw~mpi · boost</a:t>
+              <a:t>non-MPI hdf5 · fftw · boost, plus common BLAS/LAPACK</a:t>
             </a:r>
           </a:p>
         </p:txBody>
@@ -9461,7 +10634,7 @@
               </a:defRPr>
             </a:pPr>
             <a:r>
-              <a:t>Cray MPICH · hdf5+mpi · netcdf · tau</a:t>
+              <a:t>Cray MPICH · hdf5+mpi · fftw+mpi · tau · dakota</a:t>
             </a:r>
           </a:p>
         </p:txBody>
@@ -9565,7 +10738,7 @@
               </a:defRPr>
             </a:pPr>
             <a:r>
-              <a:t>GPU-aware MPI · rocm/cuda — arch from the probe</a:t>
+              <a:t>the MPI roster plus kokkos · rocm/cuda arch from the probe</a:t>
             </a:r>
           </a:p>
         </p:txBody>
@@ -10159,7 +11332,7 @@
               </a:defRPr>
             </a:pPr>
             <a:r>
-              <a:t>hdf5~mpi 2.1.0 / 1.14.6 · fftw · boost</a:t>
+              <a:t>non-MPI hdf5 · fftw · boost, plus openblas · gnuplot</a:t>
             </a:r>
           </a:p>
         </p:txBody>
@@ -10226,7 +11399,7 @@
               </a:defRPr>
             </a:pPr>
             <a:r>
-              <a:t>Cray MPICH · hdf5+mpi · netcdf · tau</a:t>
+              <a:t>Cray MPICH · hdf5+mpi · fftw+mpi · boost+mpi · tau</a:t>
             </a:r>
           </a:p>
         </p:txBody>
@@ -10293,7 +11466,7 @@
               </a:defRPr>
             </a:pPr>
             <a:r>
-              <a:t>GPU-aware MPI · kokkos +rocm gfx942</a:t>
+              <a:t>the MPI roster plus kokkos +rocm gfx942</a:t>
             </a:r>
           </a:p>
         </p:txBody>
@@ -10347,7 +11520,7 @@
               </a:defRPr>
             </a:pPr>
             <a:r>
-              <a:t>Only the chosen lane is visible — GPU includes its compatible MPI surface.</a:t>
+              <a:t>Only the chosen lane is visible; common packages (BLAS/LAPACK, gnuplot) are reachable from every lane.</a:t>
             </a:r>
           </a:p>
           <a:p>
@@ -10698,7 +11871,7 @@
               </a:defRPr>
             </a:pPr>
             <a:r>
-              <a:t>No MPI implementation exists for it, or it is a compiler-agnostic building block. Loads with the surface.</a:t>
+              <a:t>Compiler-agnostic building blocks and tools. They load with the surface, before any lane is chosen.</a:t>
             </a:r>
           </a:p>
         </p:txBody>
@@ -10734,7 +11907,7 @@
               </a:defRPr>
             </a:pPr>
             <a:r>
-              <a:t>gsl · python · miniforge · cmake</a:t>
+              <a:t>cmake · python · miniforge · gsl · sqlite</a:t>
             </a:r>
           </a:p>
         </p:txBody>
@@ -10894,7 +12067,7 @@
               </a:defRPr>
             </a:pPr>
             <a:r>
-              <a:t>MPI-capable — deliberately built without MPI for users who want it plain.</a:t>
+              <a:t>Two classes: non-MPI builds of MPI-capable packages, and common compiler-dependent packages that every lane can load.</a:t>
             </a:r>
           </a:p>
         </p:txBody>
@@ -10930,7 +12103,7 @@
               </a:defRPr>
             </a:pPr>
             <a:r>
-              <a:t>hdf5~mpi · fftw~mpi</a:t>
+              <a:t>hdf5~mpi · fftw~mpi  |  openblas · gnuplot</a:t>
             </a:r>
           </a:p>
         </p:txBody>
@@ -11286,7 +12459,7 @@
               </a:defRPr>
             </a:pPr>
             <a:r>
-              <a:t>Complete MPI+GPU lane over a compatible compiler, MPI, and GPU toolkit. Load GPU instead of MPI, not in addition to it.</a:t>
+              <a:t>Carries the full MPI roster plus the GPU payload. Load GPU instead of MPI, not in addition to it.</a:t>
             </a:r>
           </a:p>
         </p:txBody>
@@ -12902,7 +14075,7 @@
               </a:defRPr>
             </a:pPr>
             <a:r>
-              <a:t>Kokkos</a:t>
+              <a:t>Dakota</a:t>
             </a:r>
           </a:p>
         </p:txBody>
@@ -12956,7 +14129,7 @@
               </a:defRPr>
             </a:pPr>
             <a:r>
-              <a:t>CMake</a:t>
+              <a:t>Kokkos</a:t>
             </a:r>
           </a:p>
         </p:txBody>
@@ -13010,7 +14183,7 @@
               </a:defRPr>
             </a:pPr>
             <a:r>
-              <a:t>Python</a:t>
+              <a:t>Gnuplot</a:t>
             </a:r>
           </a:p>
         </p:txBody>
@@ -13064,6 +14237,60 @@
               </a:defRPr>
             </a:pPr>
             <a:r>
+              <a:t>Python</a:t>
+            </a:r>
+          </a:p>
+        </p:txBody>
+      </p:sp>
+      <p:sp>
+        <p:nvSpPr>
+          <p:cNvPr id="36" name="Rounded Rectangle 35"/>
+          <p:cNvSpPr/>
+          <p:nvPr/>
+        </p:nvSpPr>
+        <p:spPr>
+          <a:xfrm>
+            <a:off x="10314432" y="5449824"/>
+            <a:ext cx="1481328" cy="384048"/>
+          </a:xfrm>
+          <a:prstGeom prst="roundRect">
+            <a:avLst/>
+          </a:prstGeom>
+          <a:solidFill>
+            <a:srgbClr val="E2E8F0"/>
+          </a:solidFill>
+          <a:ln>
+            <a:noFill/>
+          </a:ln>
+          <a:effectLst/>
+        </p:spPr>
+        <p:style>
+          <a:lnRef idx="1">
+            <a:schemeClr val="accent1"/>
+          </a:lnRef>
+          <a:fillRef idx="3">
+            <a:schemeClr val="accent1"/>
+          </a:fillRef>
+          <a:effectRef idx="2">
+            <a:schemeClr val="accent1"/>
+          </a:effectRef>
+          <a:fontRef idx="minor">
+            <a:schemeClr val="lt1"/>
+          </a:fontRef>
+        </p:style>
+        <p:txBody>
+          <a:bodyPr rtlCol="0" anchor="ctr" wrap="square" lIns="109728" rIns="109728"/>
+          <a:lstStyle/>
+          <a:p>
+            <a:pPr algn="ctr">
+              <a:defRPr sz="1200" b="0">
+                <a:solidFill>
+                  <a:srgbClr val="334155"/>
+                </a:solidFill>
+                <a:latin typeface="Avenir Next"/>
+              </a:defRPr>
+            </a:pPr>
+            <a:r>
               <a:t>Miniforge</a:t>
             </a:r>
           </a:p>
@@ -13071,7 +14298,7 @@
       </p:sp>
       <p:sp>
         <p:nvSpPr>
-          <p:cNvPr id="36" name="TextBox 35"/>
+          <p:cNvPr id="37" name="TextBox 36"/>
           <p:cNvSpPr txBox="1"/>
           <p:nvPr/>
         </p:nvSpPr>
@@ -13968,7 +15195,7 @@
               </a:defRPr>
             </a:pPr>
             <a:r>
-              <a:t>APPENDIX · EXACT BUILD ROOTS</a:t>
+              <a:t>APPENDIX · HOW THE LAYERS STACK</a:t>
             </a:r>
           </a:p>
         </p:txBody>
@@ -14004,7 +15231,7 @@
               </a:defRPr>
             </a:pPr>
             <a:r>
-              <a:t>Core and foundation — built once per compiler surface</a:t>
+              <a:t>What each lane exposes</a:t>
             </a:r>
           </a:p>
         </p:txBody>
@@ -14053,974 +15280,16 @@
           </a:p>
         </p:txBody>
       </p:sp>
-      <p:graphicFrame>
-        <p:nvGraphicFramePr>
-          <p:cNvPr id="6" name="Table 5"/>
-          <p:cNvGraphicFramePr>
-            <a:graphicFrameLocks noGrp="1"/>
-          </p:cNvGraphicFramePr>
-          <p:nvPr/>
-        </p:nvGraphicFramePr>
-        <p:xfrm>
-          <a:off x="548640" y="1481328"/>
-          <a:ext cx="11091672" cy="4224528"/>
-        </p:xfrm>
-        <a:graphic>
-          <a:graphicData uri="http://schemas.openxmlformats.org/drawingml/2006/table">
-            <a:tbl>
-              <a:tblPr>
-                <a:tableStyleId>{5C22544A-7EE6-4342-B048-85BDC9FD1C3A}</a:tableStyleId>
-              </a:tblPr>
-              <a:tblGrid>
-                <a:gridCol w="1920240"/>
-                <a:gridCol w="2286000"/>
-                <a:gridCol w="6885432"/>
-              </a:tblGrid>
-              <a:tr h="301752">
-                <a:tc>
-                  <a:txBody>
-                    <a:bodyPr/>
-                    <a:lstStyle/>
-                    <a:p>
-                      <a:pPr>
-                        <a:defRPr sz="1100" b="1">
-                          <a:solidFill>
-                            <a:srgbClr val="64748B"/>
-                          </a:solidFill>
-                          <a:latin typeface="Avenir Next"/>
-                        </a:defRPr>
-                      </a:pPr>
-                      <a:r>
-                        <a:t>Package</a:t>
-                      </a:r>
-                    </a:p>
-                  </a:txBody>
-                  <a:tcPr marL="109728" marR="73152" marT="13716" marB="13716" anchor="ctr">
-                    <a:solidFill>
-                      <a:srgbClr val="FFFFFF"/>
-                    </a:solidFill>
-                  </a:tcPr>
-                </a:tc>
-                <a:tc>
-                  <a:txBody>
-                    <a:bodyPr/>
-                    <a:lstStyle/>
-                    <a:p>
-                      <a:pPr>
-                        <a:defRPr sz="1100" b="1">
-                          <a:solidFill>
-                            <a:srgbClr val="64748B"/>
-                          </a:solidFill>
-                          <a:latin typeface="Avenir Next"/>
-                        </a:defRPr>
-                      </a:pPr>
-                      <a:r>
-                        <a:t>Versions</a:t>
-                      </a:r>
-                    </a:p>
-                  </a:txBody>
-                  <a:tcPr marL="109728" marR="73152" marT="13716" marB="13716" anchor="ctr">
-                    <a:solidFill>
-                      <a:srgbClr val="FFFFFF"/>
-                    </a:solidFill>
-                  </a:tcPr>
-                </a:tc>
-                <a:tc>
-                  <a:txBody>
-                    <a:bodyPr/>
-                    <a:lstStyle/>
-                    <a:p>
-                      <a:pPr>
-                        <a:defRPr sz="1100" b="1">
-                          <a:solidFill>
-                            <a:srgbClr val="64748B"/>
-                          </a:solidFill>
-                          <a:latin typeface="Avenir Next"/>
-                        </a:defRPr>
-                      </a:pPr>
-                      <a:r>
-                        <a:t>Built as · pairing</a:t>
-                      </a:r>
-                    </a:p>
-                  </a:txBody>
-                  <a:tcPr marL="109728" marR="73152" marT="13716" marB="13716" anchor="ctr">
-                    <a:solidFill>
-                      <a:srgbClr val="FFFFFF"/>
-                    </a:solidFill>
-                  </a:tcPr>
-                </a:tc>
-              </a:tr>
-              <a:tr h="301752">
-                <a:tc gridSpan="3">
-                  <a:txBody>
-                    <a:bodyPr/>
-                    <a:lstStyle/>
-                    <a:p>
-                      <a:pPr>
-                        <a:defRPr sz="1150" b="1">
-                          <a:solidFill>
-                            <a:srgbClr val="FFFFFF"/>
-                          </a:solidFill>
-                          <a:latin typeface="Avenir Next"/>
-                        </a:defRPr>
-                      </a:pPr>
-                      <a:r>
-                        <a:t>Foundation — ambient in the lane view, never a module</a:t>
-                      </a:r>
-                    </a:p>
-                  </a:txBody>
-                  <a:tcPr marL="109728" marR="73152" marT="13716" marB="13716" anchor="ctr">
-                    <a:solidFill>
-                      <a:srgbClr val="475569"/>
-                    </a:solidFill>
-                  </a:tcPr>
-                </a:tc>
-                <a:tc hMerge="1">
-                  <a:txBody>
-                    <a:bodyPr/>
-                    <a:lstStyle/>
-                    <a:p/>
-                  </a:txBody>
-                  <a:tcPr/>
-                </a:tc>
-                <a:tc hMerge="1">
-                  <a:txBody>
-                    <a:bodyPr/>
-                    <a:lstStyle/>
-                    <a:p/>
-                  </a:txBody>
-                  <a:tcPr/>
-                </a:tc>
-              </a:tr>
-              <a:tr h="301752">
-                <a:tc>
-                  <a:txBody>
-                    <a:bodyPr/>
-                    <a:lstStyle/>
-                    <a:p>
-                      <a:pPr>
-                        <a:defRPr sz="1100" b="1">
-                          <a:solidFill>
-                            <a:srgbClr val="0F172A"/>
-                          </a:solidFill>
-                          <a:latin typeface="Avenir Next"/>
-                        </a:defRPr>
-                      </a:pPr>
-                      <a:r>
-                        <a:t>zlib</a:t>
-                      </a:r>
-                    </a:p>
-                  </a:txBody>
-                  <a:tcPr marL="109728" marR="73152" marT="13716" marB="13716" anchor="ctr">
-                    <a:solidFill>
-                      <a:srgbClr val="FFFFFF"/>
-                    </a:solidFill>
-                  </a:tcPr>
-                </a:tc>
-                <a:tc>
-                  <a:txBody>
-                    <a:bodyPr/>
-                    <a:lstStyle/>
-                    <a:p>
-                      <a:pPr>
-                        <a:defRPr sz="1100" b="0">
-                          <a:solidFill>
-                            <a:srgbClr val="334155"/>
-                          </a:solidFill>
-                          <a:latin typeface="Avenir Next"/>
-                        </a:defRPr>
-                      </a:pPr>
-                      <a:r>
-                        <a:t>1.3.1</a:t>
-                      </a:r>
-                    </a:p>
-                  </a:txBody>
-                  <a:tcPr marL="109728" marR="73152" marT="13716" marB="13716" anchor="ctr">
-                    <a:solidFill>
-                      <a:srgbClr val="FFFFFF"/>
-                    </a:solidFill>
-                  </a:tcPr>
-                </a:tc>
-                <a:tc>
-                  <a:txBody>
-                    <a:bodyPr/>
-                    <a:lstStyle/>
-                    <a:p>
-                      <a:pPr>
-                        <a:defRPr sz="1050" b="0">
-                          <a:solidFill>
-                            <a:srgbClr val="64748B"/>
-                          </a:solidFill>
-                          <a:latin typeface="Avenir Next"/>
-                        </a:defRPr>
-                      </a:pPr>
-                      <a:r>
-                        <a:t>single pinned version (require: pin)</a:t>
-                      </a:r>
-                    </a:p>
-                  </a:txBody>
-                  <a:tcPr marL="109728" marR="73152" marT="13716" marB="13716" anchor="ctr">
-                    <a:solidFill>
-                      <a:srgbClr val="FFFFFF"/>
-                    </a:solidFill>
-                  </a:tcPr>
-                </a:tc>
-              </a:tr>
-              <a:tr h="301752">
-                <a:tc>
-                  <a:txBody>
-                    <a:bodyPr/>
-                    <a:lstStyle/>
-                    <a:p>
-                      <a:pPr>
-                        <a:defRPr sz="1100" b="1">
-                          <a:solidFill>
-                            <a:srgbClr val="0F172A"/>
-                          </a:solidFill>
-                          <a:latin typeface="Avenir Next"/>
-                        </a:defRPr>
-                      </a:pPr>
-                      <a:r>
-                        <a:t>xz</a:t>
-                      </a:r>
-                    </a:p>
-                  </a:txBody>
-                  <a:tcPr marL="109728" marR="73152" marT="13716" marB="13716" anchor="ctr">
-                    <a:solidFill>
-                      <a:srgbClr val="FFFFFF"/>
-                    </a:solidFill>
-                  </a:tcPr>
-                </a:tc>
-                <a:tc>
-                  <a:txBody>
-                    <a:bodyPr/>
-                    <a:lstStyle/>
-                    <a:p>
-                      <a:pPr>
-                        <a:defRPr sz="1100" b="0">
-                          <a:solidFill>
-                            <a:srgbClr val="334155"/>
-                          </a:solidFill>
-                          <a:latin typeface="Avenir Next"/>
-                        </a:defRPr>
-                      </a:pPr>
-                      <a:r>
-                        <a:t>5.4.6</a:t>
-                      </a:r>
-                    </a:p>
-                  </a:txBody>
-                  <a:tcPr marL="109728" marR="73152" marT="13716" marB="13716" anchor="ctr">
-                    <a:solidFill>
-                      <a:srgbClr val="FFFFFF"/>
-                    </a:solidFill>
-                  </a:tcPr>
-                </a:tc>
-                <a:tc>
-                  <a:txBody>
-                    <a:bodyPr/>
-                    <a:lstStyle/>
-                    <a:p>
-                      <a:pPr>
-                        <a:defRPr sz="1050" b="0">
-                          <a:solidFill>
-                            <a:srgbClr val="64748B"/>
-                          </a:solidFill>
-                          <a:latin typeface="Avenir Next"/>
-                        </a:defRPr>
-                      </a:pPr>
-                      <a:r>
-                        <a:t>single pinned version</a:t>
-                      </a:r>
-                    </a:p>
-                  </a:txBody>
-                  <a:tcPr marL="109728" marR="73152" marT="13716" marB="13716" anchor="ctr">
-                    <a:solidFill>
-                      <a:srgbClr val="FFFFFF"/>
-                    </a:solidFill>
-                  </a:tcPr>
-                </a:tc>
-              </a:tr>
-              <a:tr h="301752">
-                <a:tc>
-                  <a:txBody>
-                    <a:bodyPr/>
-                    <a:lstStyle/>
-                    <a:p>
-                      <a:pPr>
-                        <a:defRPr sz="1100" b="1">
-                          <a:solidFill>
-                            <a:srgbClr val="0F172A"/>
-                          </a:solidFill>
-                          <a:latin typeface="Avenir Next"/>
-                        </a:defRPr>
-                      </a:pPr>
-                      <a:r>
-                        <a:t>zstd</a:t>
-                      </a:r>
-                    </a:p>
-                  </a:txBody>
-                  <a:tcPr marL="109728" marR="73152" marT="13716" marB="13716" anchor="ctr">
-                    <a:solidFill>
-                      <a:srgbClr val="FFFFFF"/>
-                    </a:solidFill>
-                  </a:tcPr>
-                </a:tc>
-                <a:tc>
-                  <a:txBody>
-                    <a:bodyPr/>
-                    <a:lstStyle/>
-                    <a:p>
-                      <a:pPr>
-                        <a:defRPr sz="1100" b="0">
-                          <a:solidFill>
-                            <a:srgbClr val="334155"/>
-                          </a:solidFill>
-                          <a:latin typeface="Avenir Next"/>
-                        </a:defRPr>
-                      </a:pPr>
-                      <a:r>
-                        <a:t>1.5.6</a:t>
-                      </a:r>
-                    </a:p>
-                  </a:txBody>
-                  <a:tcPr marL="109728" marR="73152" marT="13716" marB="13716" anchor="ctr">
-                    <a:solidFill>
-                      <a:srgbClr val="FFFFFF"/>
-                    </a:solidFill>
-                  </a:tcPr>
-                </a:tc>
-                <a:tc>
-                  <a:txBody>
-                    <a:bodyPr/>
-                    <a:lstStyle/>
-                    <a:p>
-                      <a:pPr>
-                        <a:defRPr sz="1050" b="0">
-                          <a:solidFill>
-                            <a:srgbClr val="64748B"/>
-                          </a:solidFill>
-                          <a:latin typeface="Avenir Next"/>
-                        </a:defRPr>
-                      </a:pPr>
-                      <a:r>
-                        <a:t>single pinned version</a:t>
-                      </a:r>
-                    </a:p>
-                  </a:txBody>
-                  <a:tcPr marL="109728" marR="73152" marT="13716" marB="13716" anchor="ctr">
-                    <a:solidFill>
-                      <a:srgbClr val="FFFFFF"/>
-                    </a:solidFill>
-                  </a:tcPr>
-                </a:tc>
-              </a:tr>
-              <a:tr h="301752">
-                <a:tc gridSpan="3">
-                  <a:txBody>
-                    <a:bodyPr/>
-                    <a:lstStyle/>
-                    <a:p>
-                      <a:pPr>
-                        <a:defRPr sz="1150" b="1">
-                          <a:solidFill>
-                            <a:srgbClr val="FFFFFF"/>
-                          </a:solidFill>
-                          <a:latin typeface="Avenir Next"/>
-                        </a:defRPr>
-                      </a:pPr>
-                      <a:r>
-                        <a:t>Core tools — user-loadable, compiler-agnostic</a:t>
-                      </a:r>
-                    </a:p>
-                  </a:txBody>
-                  <a:tcPr marL="109728" marR="73152" marT="13716" marB="13716" anchor="ctr">
-                    <a:solidFill>
-                      <a:srgbClr val="0D9488"/>
-                    </a:solidFill>
-                  </a:tcPr>
-                </a:tc>
-                <a:tc hMerge="1">
-                  <a:txBody>
-                    <a:bodyPr/>
-                    <a:lstStyle/>
-                    <a:p/>
-                  </a:txBody>
-                  <a:tcPr/>
-                </a:tc>
-                <a:tc hMerge="1">
-                  <a:txBody>
-                    <a:bodyPr/>
-                    <a:lstStyle/>
-                    <a:p/>
-                  </a:txBody>
-                  <a:tcPr/>
-                </a:tc>
-              </a:tr>
-              <a:tr h="301752">
-                <a:tc>
-                  <a:txBody>
-                    <a:bodyPr/>
-                    <a:lstStyle/>
-                    <a:p>
-                      <a:pPr>
-                        <a:defRPr sz="1100" b="1">
-                          <a:solidFill>
-                            <a:srgbClr val="0F172A"/>
-                          </a:solidFill>
-                          <a:latin typeface="Avenir Next"/>
-                        </a:defRPr>
-                      </a:pPr>
-                      <a:r>
-                        <a:t>cmake</a:t>
-                      </a:r>
-                    </a:p>
-                  </a:txBody>
-                  <a:tcPr marL="109728" marR="73152" marT="13716" marB="13716" anchor="ctr">
-                    <a:solidFill>
-                      <a:srgbClr val="FFFFFF"/>
-                    </a:solidFill>
-                  </a:tcPr>
-                </a:tc>
-                <a:tc>
-                  <a:txBody>
-                    <a:bodyPr/>
-                    <a:lstStyle/>
-                    <a:p>
-                      <a:pPr>
-                        <a:defRPr sz="1100" b="0">
-                          <a:solidFill>
-                            <a:srgbClr val="334155"/>
-                          </a:solidFill>
-                          <a:latin typeface="Avenir Next"/>
-                        </a:defRPr>
-                      </a:pPr>
-                      <a:r>
-                        <a:t>4.3.3 · 4.2.3</a:t>
-                      </a:r>
-                    </a:p>
-                  </a:txBody>
-                  <a:tcPr marL="109728" marR="73152" marT="13716" marB="13716" anchor="ctr">
-                    <a:solidFill>
-                      <a:srgbClr val="FFFFFF"/>
-                    </a:solidFill>
-                  </a:tcPr>
-                </a:tc>
-                <a:tc>
-                  <a:txBody>
-                    <a:bodyPr/>
-                    <a:lstStyle/>
-                    <a:p>
-                      <a:pPr>
-                        <a:defRPr sz="1050" b="0">
-                          <a:solidFill>
-                            <a:srgbClr val="64748B"/>
-                          </a:solidFill>
-                          <a:latin typeface="Avenir Next"/>
-                        </a:defRPr>
-                      </a:pPr>
-                    </a:p>
-                  </a:txBody>
-                  <a:tcPr marL="109728" marR="73152" marT="13716" marB="13716" anchor="ctr">
-                    <a:solidFill>
-                      <a:srgbClr val="FFFFFF"/>
-                    </a:solidFill>
-                  </a:tcPr>
-                </a:tc>
-              </a:tr>
-              <a:tr h="301752">
-                <a:tc>
-                  <a:txBody>
-                    <a:bodyPr/>
-                    <a:lstStyle/>
-                    <a:p>
-                      <a:pPr>
-                        <a:defRPr sz="1100" b="1">
-                          <a:solidFill>
-                            <a:srgbClr val="0F172A"/>
-                          </a:solidFill>
-                          <a:latin typeface="Avenir Next"/>
-                        </a:defRPr>
-                      </a:pPr>
-                      <a:r>
-                        <a:t>ninja · pkgconf · git</a:t>
-                      </a:r>
-                    </a:p>
-                  </a:txBody>
-                  <a:tcPr marL="109728" marR="73152" marT="13716" marB="13716" anchor="ctr">
-                    <a:solidFill>
-                      <a:srgbClr val="FFFFFF"/>
-                    </a:solidFill>
-                  </a:tcPr>
-                </a:tc>
-                <a:tc>
-                  <a:txBody>
-                    <a:bodyPr/>
-                    <a:lstStyle/>
-                    <a:p>
-                      <a:pPr>
-                        <a:defRPr sz="1100" b="0">
-                          <a:solidFill>
-                            <a:srgbClr val="334155"/>
-                          </a:solidFill>
-                          <a:latin typeface="Avenir Next"/>
-                        </a:defRPr>
-                      </a:pPr>
-                      <a:r>
-                        <a:t>newest</a:t>
-                      </a:r>
-                    </a:p>
-                  </a:txBody>
-                  <a:tcPr marL="109728" marR="73152" marT="13716" marB="13716" anchor="ctr">
-                    <a:solidFill>
-                      <a:srgbClr val="FFFFFF"/>
-                    </a:solidFill>
-                  </a:tcPr>
-                </a:tc>
-                <a:tc>
-                  <a:txBody>
-                    <a:bodyPr/>
-                    <a:lstStyle/>
-                    <a:p>
-                      <a:pPr>
-                        <a:defRPr sz="1050" b="0">
-                          <a:solidFill>
-                            <a:srgbClr val="64748B"/>
-                          </a:solidFill>
-                          <a:latin typeface="Avenir Next"/>
-                        </a:defRPr>
-                      </a:pPr>
-                      <a:r>
-                        <a:t>unpinned — newest from the recipe generation</a:t>
-                      </a:r>
-                    </a:p>
-                  </a:txBody>
-                  <a:tcPr marL="109728" marR="73152" marT="13716" marB="13716" anchor="ctr">
-                    <a:solidFill>
-                      <a:srgbClr val="FFFFFF"/>
-                    </a:solidFill>
-                  </a:tcPr>
-                </a:tc>
-              </a:tr>
-              <a:tr h="301752">
-                <a:tc>
-                  <a:txBody>
-                    <a:bodyPr/>
-                    <a:lstStyle/>
-                    <a:p>
-                      <a:pPr>
-                        <a:defRPr sz="1100" b="1">
-                          <a:solidFill>
-                            <a:srgbClr val="0F172A"/>
-                          </a:solidFill>
-                          <a:latin typeface="Avenir Next"/>
-                        </a:defRPr>
-                      </a:pPr>
-                      <a:r>
-                        <a:t>python</a:t>
-                      </a:r>
-                    </a:p>
-                  </a:txBody>
-                  <a:tcPr marL="109728" marR="73152" marT="13716" marB="13716" anchor="ctr">
-                    <a:solidFill>
-                      <a:srgbClr val="FFFFFF"/>
-                    </a:solidFill>
-                  </a:tcPr>
-                </a:tc>
-                <a:tc>
-                  <a:txBody>
-                    <a:bodyPr/>
-                    <a:lstStyle/>
-                    <a:p>
-                      <a:pPr>
-                        <a:defRPr sz="1100" b="0">
-                          <a:solidFill>
-                            <a:srgbClr val="334155"/>
-                          </a:solidFill>
-                          <a:latin typeface="Avenir Next"/>
-                        </a:defRPr>
-                      </a:pPr>
-                      <a:r>
-                        <a:t>3.14.5 · 3.13.13</a:t>
-                      </a:r>
-                    </a:p>
-                  </a:txBody>
-                  <a:tcPr marL="109728" marR="73152" marT="13716" marB="13716" anchor="ctr">
-                    <a:solidFill>
-                      <a:srgbClr val="FFFFFF"/>
-                    </a:solidFill>
-                  </a:tcPr>
-                </a:tc>
-                <a:tc>
-                  <a:txBody>
-                    <a:bodyPr/>
-                    <a:lstStyle/>
-                    <a:p>
-                      <a:pPr>
-                        <a:defRPr sz="1050" b="0">
-                          <a:solidFill>
-                            <a:srgbClr val="64748B"/>
-                          </a:solidFill>
-                          <a:latin typeface="Avenir Next"/>
-                        </a:defRPr>
-                      </a:pPr>
-                      <a:r>
-                        <a:t>the two newest supported minor lines</a:t>
-                      </a:r>
-                    </a:p>
-                  </a:txBody>
-                  <a:tcPr marL="109728" marR="73152" marT="13716" marB="13716" anchor="ctr">
-                    <a:solidFill>
-                      <a:srgbClr val="FFFFFF"/>
-                    </a:solidFill>
-                  </a:tcPr>
-                </a:tc>
-              </a:tr>
-              <a:tr h="301752">
-                <a:tc>
-                  <a:txBody>
-                    <a:bodyPr/>
-                    <a:lstStyle/>
-                    <a:p>
-                      <a:pPr>
-                        <a:defRPr sz="1100" b="1">
-                          <a:solidFill>
-                            <a:srgbClr val="0F172A"/>
-                          </a:solidFill>
-                          <a:latin typeface="Avenir Next"/>
-                        </a:defRPr>
-                      </a:pPr>
-                      <a:r>
-                        <a:t>py-numpy</a:t>
-                      </a:r>
-                    </a:p>
-                  </a:txBody>
-                  <a:tcPr marL="109728" marR="73152" marT="13716" marB="13716" anchor="ctr">
-                    <a:solidFill>
-                      <a:srgbClr val="FFFFFF"/>
-                    </a:solidFill>
-                  </a:tcPr>
-                </a:tc>
-                <a:tc>
-                  <a:txBody>
-                    <a:bodyPr/>
-                    <a:lstStyle/>
-                    <a:p>
-                      <a:pPr>
-                        <a:defRPr sz="1100" b="0">
-                          <a:solidFill>
-                            <a:srgbClr val="334155"/>
-                          </a:solidFill>
-                          <a:latin typeface="Avenir Next"/>
-                        </a:defRPr>
-                      </a:pPr>
-                      <a:r>
-                        <a:t>2.4.6</a:t>
-                      </a:r>
-                    </a:p>
-                  </a:txBody>
-                  <a:tcPr marL="109728" marR="73152" marT="13716" marB="13716" anchor="ctr">
-                    <a:solidFill>
-                      <a:srgbClr val="FFFFFF"/>
-                    </a:solidFill>
-                  </a:tcPr>
-                </a:tc>
-                <a:tc>
-                  <a:txBody>
-                    <a:bodyPr/>
-                    <a:lstStyle/>
-                    <a:p>
-                      <a:pPr>
-                        <a:defRPr sz="1050" b="0">
-                          <a:solidFill>
-                            <a:srgbClr val="64748B"/>
-                          </a:solidFill>
-                          <a:latin typeface="Avenir Next"/>
-                        </a:defRPr>
-                      </a:pPr>
-                      <a:r>
-                        <a:t>built against each python line (newest non-deprecated recipe)</a:t>
-                      </a:r>
-                    </a:p>
-                  </a:txBody>
-                  <a:tcPr marL="109728" marR="73152" marT="13716" marB="13716" anchor="ctr">
-                    <a:solidFill>
-                      <a:srgbClr val="FFFFFF"/>
-                    </a:solidFill>
-                  </a:tcPr>
-                </a:tc>
-              </a:tr>
-              <a:tr h="301752">
-                <a:tc>
-                  <a:txBody>
-                    <a:bodyPr/>
-                    <a:lstStyle/>
-                    <a:p>
-                      <a:pPr>
-                        <a:defRPr sz="1100" b="1">
-                          <a:solidFill>
-                            <a:srgbClr val="0F172A"/>
-                          </a:solidFill>
-                          <a:latin typeface="Avenir Next"/>
-                        </a:defRPr>
-                      </a:pPr>
-                      <a:r>
-                        <a:t>miniforge3</a:t>
-                      </a:r>
-                    </a:p>
-                  </a:txBody>
-                  <a:tcPr marL="109728" marR="73152" marT="13716" marB="13716" anchor="ctr">
-                    <a:solidFill>
-                      <a:srgbClr val="FFFFFF"/>
-                    </a:solidFill>
-                  </a:tcPr>
-                </a:tc>
-                <a:tc>
-                  <a:txBody>
-                    <a:bodyPr/>
-                    <a:lstStyle/>
-                    <a:p>
-                      <a:pPr>
-                        <a:defRPr sz="1100" b="0">
-                          <a:solidFill>
-                            <a:srgbClr val="334155"/>
-                          </a:solidFill>
-                          <a:latin typeface="Avenir Next"/>
-                        </a:defRPr>
-                      </a:pPr>
-                      <a:r>
-                        <a:t>26.1.1-3</a:t>
-                      </a:r>
-                    </a:p>
-                  </a:txBody>
-                  <a:tcPr marL="109728" marR="73152" marT="13716" marB="13716" anchor="ctr">
-                    <a:solidFill>
-                      <a:srgbClr val="FFFFFF"/>
-                    </a:solidFill>
-                  </a:tcPr>
-                </a:tc>
-                <a:tc>
-                  <a:txBody>
-                    <a:bodyPr/>
-                    <a:lstStyle/>
-                    <a:p>
-                      <a:pPr>
-                        <a:defRPr sz="1050" b="0">
-                          <a:solidFill>
-                            <a:srgbClr val="64748B"/>
-                          </a:solidFill>
-                          <a:latin typeface="Avenir Next"/>
-                        </a:defRPr>
-                      </a:pPr>
-                      <a:r>
-                        <a:t>single by nature — installer for user-managed environments</a:t>
-                      </a:r>
-                    </a:p>
-                  </a:txBody>
-                  <a:tcPr marL="109728" marR="73152" marT="13716" marB="13716" anchor="ctr">
-                    <a:solidFill>
-                      <a:srgbClr val="FFFFFF"/>
-                    </a:solidFill>
-                  </a:tcPr>
-                </a:tc>
-              </a:tr>
-              <a:tr h="301752">
-                <a:tc gridSpan="3">
-                  <a:txBody>
-                    <a:bodyPr/>
-                    <a:lstStyle/>
-                    <a:p>
-                      <a:pPr>
-                        <a:defRPr sz="1150" b="1">
-                          <a:solidFill>
-                            <a:srgbClr val="FFFFFF"/>
-                          </a:solidFill>
-                          <a:latin typeface="Avenir Next"/>
-                        </a:defRPr>
-                      </a:pPr>
-                      <a:r>
-                        <a:t>Only-serial by nature — no MPI implementation exists</a:t>
-                      </a:r>
-                    </a:p>
-                  </a:txBody>
-                  <a:tcPr marL="109728" marR="73152" marT="13716" marB="13716" anchor="ctr">
-                    <a:solidFill>
-                      <a:srgbClr val="0D9488"/>
-                    </a:solidFill>
-                  </a:tcPr>
-                </a:tc>
-                <a:tc hMerge="1">
-                  <a:txBody>
-                    <a:bodyPr/>
-                    <a:lstStyle/>
-                    <a:p/>
-                  </a:txBody>
-                  <a:tcPr/>
-                </a:tc>
-                <a:tc hMerge="1">
-                  <a:txBody>
-                    <a:bodyPr/>
-                    <a:lstStyle/>
-                    <a:p/>
-                  </a:txBody>
-                  <a:tcPr/>
-                </a:tc>
-              </a:tr>
-              <a:tr h="301752">
-                <a:tc>
-                  <a:txBody>
-                    <a:bodyPr/>
-                    <a:lstStyle/>
-                    <a:p>
-                      <a:pPr>
-                        <a:defRPr sz="1100" b="1">
-                          <a:solidFill>
-                            <a:srgbClr val="0F172A"/>
-                          </a:solidFill>
-                          <a:latin typeface="Avenir Next"/>
-                        </a:defRPr>
-                      </a:pPr>
-                      <a:r>
-                        <a:t>gsl</a:t>
-                      </a:r>
-                    </a:p>
-                  </a:txBody>
-                  <a:tcPr marL="109728" marR="73152" marT="13716" marB="13716" anchor="ctr">
-                    <a:solidFill>
-                      <a:srgbClr val="FFFFFF"/>
-                    </a:solidFill>
-                  </a:tcPr>
-                </a:tc>
-                <a:tc>
-                  <a:txBody>
-                    <a:bodyPr/>
-                    <a:lstStyle/>
-                    <a:p>
-                      <a:pPr>
-                        <a:defRPr sz="1100" b="0">
-                          <a:solidFill>
-                            <a:srgbClr val="334155"/>
-                          </a:solidFill>
-                          <a:latin typeface="Avenir Next"/>
-                        </a:defRPr>
-                      </a:pPr>
-                      <a:r>
-                        <a:t>2.8 · 2.7.1</a:t>
-                      </a:r>
-                    </a:p>
-                  </a:txBody>
-                  <a:tcPr marL="109728" marR="73152" marT="13716" marB="13716" anchor="ctr">
-                    <a:solidFill>
-                      <a:srgbClr val="FFFFFF"/>
-                    </a:solidFill>
-                  </a:tcPr>
-                </a:tc>
-                <a:tc>
-                  <a:txBody>
-                    <a:bodyPr/>
-                    <a:lstStyle/>
-                    <a:p>
-                      <a:pPr>
-                        <a:defRPr sz="1050" b="0">
-                          <a:solidFill>
-                            <a:srgbClr val="64748B"/>
-                          </a:solidFill>
-                          <a:latin typeface="Avenir Next"/>
-                        </a:defRPr>
-                      </a:pPr>
-                    </a:p>
-                  </a:txBody>
-                  <a:tcPr marL="109728" marR="73152" marT="13716" marB="13716" anchor="ctr">
-                    <a:solidFill>
-                      <a:srgbClr val="FFFFFF"/>
-                    </a:solidFill>
-                  </a:tcPr>
-                </a:tc>
-              </a:tr>
-              <a:tr h="301752">
-                <a:tc>
-                  <a:txBody>
-                    <a:bodyPr/>
-                    <a:lstStyle/>
-                    <a:p>
-                      <a:pPr>
-                        <a:defRPr sz="1100" b="1">
-                          <a:solidFill>
-                            <a:srgbClr val="0F172A"/>
-                          </a:solidFill>
-                          <a:latin typeface="Avenir Next"/>
-                        </a:defRPr>
-                      </a:pPr>
-                      <a:r>
-                        <a:t>sqlite</a:t>
-                      </a:r>
-                    </a:p>
-                  </a:txBody>
-                  <a:tcPr marL="109728" marR="73152" marT="13716" marB="13716" anchor="ctr">
-                    <a:solidFill>
-                      <a:srgbClr val="FFFFFF"/>
-                    </a:solidFill>
-                  </a:tcPr>
-                </a:tc>
-                <a:tc>
-                  <a:txBody>
-                    <a:bodyPr/>
-                    <a:lstStyle/>
-                    <a:p>
-                      <a:pPr>
-                        <a:defRPr sz="1100" b="0">
-                          <a:solidFill>
-                            <a:srgbClr val="334155"/>
-                          </a:solidFill>
-                          <a:latin typeface="Avenir Next"/>
-                        </a:defRPr>
-                      </a:pPr>
-                      <a:r>
-                        <a:t>3.53.1 · 3.51.2</a:t>
-                      </a:r>
-                    </a:p>
-                  </a:txBody>
-                  <a:tcPr marL="109728" marR="73152" marT="13716" marB="13716" anchor="ctr">
-                    <a:solidFill>
-                      <a:srgbClr val="FFFFFF"/>
-                    </a:solidFill>
-                  </a:tcPr>
-                </a:tc>
-                <a:tc>
-                  <a:txBody>
-                    <a:bodyPr/>
-                    <a:lstStyle/>
-                    <a:p>
-                      <a:pPr>
-                        <a:defRPr sz="1050" b="0">
-                          <a:solidFill>
-                            <a:srgbClr val="64748B"/>
-                          </a:solidFill>
-                          <a:latin typeface="Avenir Next"/>
-                        </a:defRPr>
-                      </a:pPr>
-                    </a:p>
-                  </a:txBody>
-                  <a:tcPr marL="109728" marR="73152" marT="13716" marB="13716" anchor="ctr">
-                    <a:solidFill>
-                      <a:srgbClr val="FFFFFF"/>
-                    </a:solidFill>
-                  </a:tcPr>
-                </a:tc>
-              </a:tr>
-            </a:tbl>
-          </a:graphicData>
-        </a:graphic>
-      </p:graphicFrame>
-      <p:sp>
-        <p:nvSpPr>
-          <p:cNvPr id="7" name="TextBox 6"/>
+      <p:sp>
+        <p:nvSpPr>
+          <p:cNvPr id="6" name="TextBox 5"/>
           <p:cNvSpPr txBox="1"/>
           <p:nvPr/>
         </p:nvSpPr>
         <p:spPr>
           <a:xfrm>
-            <a:off x="548640" y="6583680"/>
-            <a:ext cx="11064240" cy="256032"/>
+            <a:off x="548640" y="1389888"/>
+            <a:ext cx="11064240" cy="274320"/>
           </a:xfrm>
           <a:prstGeom prst="rect">
             <a:avLst/>
@@ -15033,8 +15302,554 @@
           </a:bodyPr>
           <a:lstStyle/>
           <a:p>
+            <a:pPr algn="ctr">
+              <a:defRPr sz="1150" b="1">
+                <a:solidFill>
+                  <a:srgbClr val="64748B"/>
+                </a:solidFill>
+                <a:latin typeface="Avenir Next"/>
+              </a:defRPr>
+            </a:pPr>
+            <a:r>
+              <a:t>CHOOSE EXACTLY ONE LANE</a:t>
+            </a:r>
+          </a:p>
+        </p:txBody>
+      </p:sp>
+      <p:sp>
+        <p:nvSpPr>
+          <p:cNvPr id="7" name="Rounded Rectangle 6"/>
+          <p:cNvSpPr/>
+          <p:nvPr/>
+        </p:nvSpPr>
+        <p:spPr>
+          <a:xfrm>
+            <a:off x="548640" y="1719072"/>
+            <a:ext cx="3611880" cy="1325880"/>
+          </a:xfrm>
+          <a:prstGeom prst="roundRect">
+            <a:avLst/>
+          </a:prstGeom>
+          <a:solidFill>
+            <a:srgbClr val="D97706"/>
+          </a:solidFill>
+          <a:ln>
+            <a:noFill/>
+          </a:ln>
+          <a:effectLst/>
+        </p:spPr>
+        <p:style>
+          <a:lnRef idx="1">
+            <a:schemeClr val="accent1"/>
+          </a:lnRef>
+          <a:fillRef idx="3">
+            <a:schemeClr val="accent1"/>
+          </a:fillRef>
+          <a:effectRef idx="2">
+            <a:schemeClr val="accent1"/>
+          </a:effectRef>
+          <a:fontRef idx="minor">
+            <a:schemeClr val="lt1"/>
+          </a:fontRef>
+        </p:style>
+        <p:txBody>
+          <a:bodyPr rtlCol="0" anchor="ctr" wrap="square" lIns="109728" rIns="109728"/>
+          <a:lstStyle/>
+          <a:p>
+            <a:pPr algn="ctr">
+              <a:defRPr sz="1500" b="1">
+                <a:solidFill>
+                  <a:srgbClr val="FFFFFF"/>
+                </a:solidFill>
+                <a:latin typeface="Avenir Next"/>
+              </a:defRPr>
+            </a:pPr>
+            <a:r>
+              <a:t>Serial</a:t>
+            </a:r>
+          </a:p>
+          <a:p>
+            <a:pPr algn="ctr">
+              <a:defRPr sz="1100" b="0">
+                <a:solidFill>
+                  <a:srgbClr val="FFFFFF"/>
+                </a:solidFill>
+                <a:latin typeface="Avenir Next"/>
+              </a:defRPr>
+            </a:pPr>
+            <a:r>
+              <a:t>hdf5 · netcdf · fftw · boost</a:t>
+            </a:r>
+          </a:p>
+          <a:p>
+            <a:pPr algn="ctr">
+              <a:defRPr sz="1000" b="0">
+                <a:solidFill>
+                  <a:srgbClr val="FFFFFF"/>
+                </a:solidFill>
+                <a:latin typeface="Avenir Next"/>
+              </a:defRPr>
+            </a:pPr>
+            <a:r>
+              <a:t>the same packages, built without MPI</a:t>
+            </a:r>
+          </a:p>
+        </p:txBody>
+      </p:sp>
+      <p:sp>
+        <p:nvSpPr>
+          <p:cNvPr id="8" name="Rounded Rectangle 7"/>
+          <p:cNvSpPr/>
+          <p:nvPr/>
+        </p:nvSpPr>
+        <p:spPr>
+          <a:xfrm>
+            <a:off x="4370831" y="1719072"/>
+            <a:ext cx="3611880" cy="1325880"/>
+          </a:xfrm>
+          <a:prstGeom prst="roundRect">
+            <a:avLst/>
+          </a:prstGeom>
+          <a:solidFill>
+            <a:srgbClr val="2563EB"/>
+          </a:solidFill>
+          <a:ln>
+            <a:noFill/>
+          </a:ln>
+          <a:effectLst/>
+        </p:spPr>
+        <p:style>
+          <a:lnRef idx="1">
+            <a:schemeClr val="accent1"/>
+          </a:lnRef>
+          <a:fillRef idx="3">
+            <a:schemeClr val="accent1"/>
+          </a:fillRef>
+          <a:effectRef idx="2">
+            <a:schemeClr val="accent1"/>
+          </a:effectRef>
+          <a:fontRef idx="minor">
+            <a:schemeClr val="lt1"/>
+          </a:fontRef>
+        </p:style>
+        <p:txBody>
+          <a:bodyPr rtlCol="0" anchor="ctr" wrap="square" lIns="109728" rIns="109728"/>
+          <a:lstStyle/>
+          <a:p>
+            <a:pPr algn="ctr">
+              <a:defRPr sz="1500" b="1">
+                <a:solidFill>
+                  <a:srgbClr val="FFFFFF"/>
+                </a:solidFill>
+                <a:latin typeface="Avenir Next"/>
+              </a:defRPr>
+            </a:pPr>
+            <a:r>
+              <a:t>MPI</a:t>
+            </a:r>
+          </a:p>
+          <a:p>
+            <a:pPr algn="ctr">
+              <a:defRPr sz="1100" b="0">
+                <a:solidFill>
+                  <a:srgbClr val="FFFFFF"/>
+                </a:solidFill>
+                <a:latin typeface="Avenir Next"/>
+              </a:defRPr>
+            </a:pPr>
+            <a:r>
+              <a:t>hdf5 · netcdf · fftw · boost · tau · dakota</a:t>
+            </a:r>
+          </a:p>
+          <a:p>
+            <a:pPr algn="ctr">
+              <a:defRPr sz="1000" b="0">
+                <a:solidFill>
+                  <a:srgbClr val="FFFFFF"/>
+                </a:solidFill>
+                <a:latin typeface="Avenir Next"/>
+              </a:defRPr>
+            </a:pPr>
+            <a:r>
+              <a:t>built against the system MPI</a:t>
+            </a:r>
+          </a:p>
+        </p:txBody>
+      </p:sp>
+      <p:sp>
+        <p:nvSpPr>
+          <p:cNvPr id="9" name="Rounded Rectangle 8"/>
+          <p:cNvSpPr/>
+          <p:nvPr/>
+        </p:nvSpPr>
+        <p:spPr>
+          <a:xfrm>
+            <a:off x="8193023" y="1719072"/>
+            <a:ext cx="3611880" cy="1325880"/>
+          </a:xfrm>
+          <a:prstGeom prst="roundRect">
+            <a:avLst/>
+          </a:prstGeom>
+          <a:solidFill>
+            <a:srgbClr val="7C3AED"/>
+          </a:solidFill>
+          <a:ln>
+            <a:noFill/>
+          </a:ln>
+          <a:effectLst/>
+        </p:spPr>
+        <p:style>
+          <a:lnRef idx="1">
+            <a:schemeClr val="accent1"/>
+          </a:lnRef>
+          <a:fillRef idx="3">
+            <a:schemeClr val="accent1"/>
+          </a:fillRef>
+          <a:effectRef idx="2">
+            <a:schemeClr val="accent1"/>
+          </a:effectRef>
+          <a:fontRef idx="minor">
+            <a:schemeClr val="lt1"/>
+          </a:fontRef>
+        </p:style>
+        <p:txBody>
+          <a:bodyPr rtlCol="0" anchor="ctr" wrap="square" lIns="109728" rIns="109728"/>
+          <a:lstStyle/>
+          <a:p>
+            <a:pPr algn="ctr">
+              <a:defRPr sz="1500" b="1">
+                <a:solidFill>
+                  <a:srgbClr val="FFFFFF"/>
+                </a:solidFill>
+                <a:latin typeface="Avenir Next"/>
+              </a:defRPr>
+            </a:pPr>
+            <a:r>
+              <a:t>GPU</a:t>
+            </a:r>
+          </a:p>
+          <a:p>
+            <a:pPr algn="ctr">
+              <a:defRPr sz="1100" b="0">
+                <a:solidFill>
+                  <a:srgbClr val="FFFFFF"/>
+                </a:solidFill>
+                <a:latin typeface="Avenir Next"/>
+              </a:defRPr>
+            </a:pPr>
+            <a:r>
+              <a:t>the MPI roster, plus kokkos</a:t>
+            </a:r>
+          </a:p>
+          <a:p>
+            <a:pPr algn="ctr">
+              <a:defRPr sz="1000" b="0">
+                <a:solidFill>
+                  <a:srgbClr val="FFFFFF"/>
+                </a:solidFill>
+                <a:latin typeface="Avenir Next"/>
+              </a:defRPr>
+            </a:pPr>
+            <a:r>
+              <a:t>+rocm / +cuda, arch from the probe</a:t>
+            </a:r>
+          </a:p>
+        </p:txBody>
+      </p:sp>
+      <p:sp>
+        <p:nvSpPr>
+          <p:cNvPr id="10" name="Rounded Rectangle 9"/>
+          <p:cNvSpPr/>
+          <p:nvPr/>
+        </p:nvSpPr>
+        <p:spPr>
+          <a:xfrm>
+            <a:off x="548640" y="3200400"/>
+            <a:ext cx="11091672" cy="640080"/>
+          </a:xfrm>
+          <a:prstGeom prst="roundRect">
+            <a:avLst/>
+          </a:prstGeom>
+          <a:solidFill>
+            <a:srgbClr val="15803D"/>
+          </a:solidFill>
+          <a:ln>
+            <a:noFill/>
+          </a:ln>
+          <a:effectLst/>
+        </p:spPr>
+        <p:style>
+          <a:lnRef idx="1">
+            <a:schemeClr val="accent1"/>
+          </a:lnRef>
+          <a:fillRef idx="3">
+            <a:schemeClr val="accent1"/>
+          </a:fillRef>
+          <a:effectRef idx="2">
+            <a:schemeClr val="accent1"/>
+          </a:effectRef>
+          <a:fontRef idx="minor">
+            <a:schemeClr val="lt1"/>
+          </a:fontRef>
+        </p:style>
+        <p:txBody>
+          <a:bodyPr rtlCol="0" anchor="ctr" wrap="square" lIns="109728" rIns="109728"/>
+          <a:lstStyle/>
+          <a:p>
+            <a:pPr algn="ctr">
+              <a:defRPr sz="1250" b="1">
+                <a:solidFill>
+                  <a:srgbClr val="FFFFFF"/>
+                </a:solidFill>
+                <a:latin typeface="Avenir Next"/>
+              </a:defRPr>
+            </a:pPr>
+            <a:r>
+              <a:t>Common compiler-dependent packages — loadable from every lane</a:t>
+            </a:r>
+          </a:p>
+          <a:p>
+            <a:pPr algn="ctr">
+              <a:defRPr sz="1050" b="0">
+                <a:solidFill>
+                  <a:srgbClr val="FFFFFF"/>
+                </a:solidFill>
+                <a:latin typeface="Avenir Next"/>
+              </a:defRPr>
+            </a:pPr>
+            <a:r>
+              <a:t>openblas · netlib-lapack · gnuplot — one Serial-lane build, one install, shared module root</a:t>
+            </a:r>
+          </a:p>
+        </p:txBody>
+      </p:sp>
+      <p:sp>
+        <p:nvSpPr>
+          <p:cNvPr id="11" name="Rounded Rectangle 10"/>
+          <p:cNvSpPr/>
+          <p:nvPr/>
+        </p:nvSpPr>
+        <p:spPr>
+          <a:xfrm>
+            <a:off x="548640" y="3959352"/>
+            <a:ext cx="11091672" cy="640080"/>
+          </a:xfrm>
+          <a:prstGeom prst="roundRect">
+            <a:avLst/>
+          </a:prstGeom>
+          <a:solidFill>
+            <a:srgbClr val="0D9488"/>
+          </a:solidFill>
+          <a:ln>
+            <a:noFill/>
+          </a:ln>
+          <a:effectLst/>
+        </p:spPr>
+        <p:style>
+          <a:lnRef idx="1">
+            <a:schemeClr val="accent1"/>
+          </a:lnRef>
+          <a:fillRef idx="3">
+            <a:schemeClr val="accent1"/>
+          </a:fillRef>
+          <a:effectRef idx="2">
+            <a:schemeClr val="accent1"/>
+          </a:effectRef>
+          <a:fontRef idx="minor">
+            <a:schemeClr val="lt1"/>
+          </a:fontRef>
+        </p:style>
+        <p:txBody>
+          <a:bodyPr rtlCol="0" anchor="ctr" wrap="square" lIns="109728" rIns="109728"/>
+          <a:lstStyle/>
+          <a:p>
+            <a:pPr algn="ctr">
+              <a:defRPr sz="1250" b="1">
+                <a:solidFill>
+                  <a:srgbClr val="FFFFFF"/>
+                </a:solidFill>
+                <a:latin typeface="Avenir Next"/>
+              </a:defRPr>
+            </a:pPr>
+            <a:r>
+              <a:t>Core — loads with the compiler surface</a:t>
+            </a:r>
+          </a:p>
+          <a:p>
+            <a:pPr algn="ctr">
+              <a:defRPr sz="1050" b="0">
+                <a:solidFill>
+                  <a:srgbClr val="FFFFFF"/>
+                </a:solidFill>
+                <a:latin typeface="Avenir Next"/>
+              </a:defRPr>
+            </a:pPr>
+            <a:r>
+              <a:t>cmake · ninja · git · python · py-numpy · miniforge · gsl · sqlite</a:t>
+            </a:r>
+          </a:p>
+        </p:txBody>
+      </p:sp>
+      <p:sp>
+        <p:nvSpPr>
+          <p:cNvPr id="12" name="Rounded Rectangle 11"/>
+          <p:cNvSpPr/>
+          <p:nvPr/>
+        </p:nvSpPr>
+        <p:spPr>
+          <a:xfrm>
+            <a:off x="548640" y="4718304"/>
+            <a:ext cx="11091672" cy="640080"/>
+          </a:xfrm>
+          <a:prstGeom prst="roundRect">
+            <a:avLst/>
+          </a:prstGeom>
+          <a:solidFill>
+            <a:srgbClr val="475569"/>
+          </a:solidFill>
+          <a:ln>
+            <a:noFill/>
+          </a:ln>
+          <a:effectLst/>
+        </p:spPr>
+        <p:style>
+          <a:lnRef idx="1">
+            <a:schemeClr val="accent1"/>
+          </a:lnRef>
+          <a:fillRef idx="3">
+            <a:schemeClr val="accent1"/>
+          </a:fillRef>
+          <a:effectRef idx="2">
+            <a:schemeClr val="accent1"/>
+          </a:effectRef>
+          <a:fontRef idx="minor">
+            <a:schemeClr val="lt1"/>
+          </a:fontRef>
+        </p:style>
+        <p:txBody>
+          <a:bodyPr rtlCol="0" anchor="ctr" wrap="square" lIns="109728" rIns="109728"/>
+          <a:lstStyle/>
+          <a:p>
+            <a:pPr algn="ctr">
+              <a:defRPr sz="1250" b="1">
+                <a:solidFill>
+                  <a:srgbClr val="FFFFFF"/>
+                </a:solidFill>
+                <a:latin typeface="Avenir Next"/>
+              </a:defRPr>
+            </a:pPr>
+            <a:r>
+              <a:t>Foundation — ambient in the view, never a module</a:t>
+            </a:r>
+          </a:p>
+          <a:p>
+            <a:pPr algn="ctr">
+              <a:defRPr sz="1050" b="0">
+                <a:solidFill>
+                  <a:srgbClr val="FFFFFF"/>
+                </a:solidFill>
+                <a:latin typeface="Avenir Next"/>
+              </a:defRPr>
+            </a:pPr>
+            <a:r>
+              <a:t>zlib · xz · zstd, single pinned version</a:t>
+            </a:r>
+          </a:p>
+        </p:txBody>
+      </p:sp>
+      <p:sp>
+        <p:nvSpPr>
+          <p:cNvPr id="13" name="Rounded Rectangle 12"/>
+          <p:cNvSpPr/>
+          <p:nvPr/>
+        </p:nvSpPr>
+        <p:spPr>
+          <a:xfrm>
+            <a:off x="548640" y="5504688"/>
+            <a:ext cx="11091672" cy="548640"/>
+          </a:xfrm>
+          <a:prstGeom prst="roundRect">
+            <a:avLst/>
+          </a:prstGeom>
+          <a:solidFill>
+            <a:srgbClr val="FFFFFF"/>
+          </a:solidFill>
+          <a:ln w="15875">
+            <a:solidFill>
+              <a:srgbClr val="E2E8F0"/>
+            </a:solidFill>
+          </a:ln>
+          <a:effectLst/>
+        </p:spPr>
+        <p:style>
+          <a:lnRef idx="1">
+            <a:schemeClr val="accent1"/>
+          </a:lnRef>
+          <a:fillRef idx="3">
+            <a:schemeClr val="accent1"/>
+          </a:fillRef>
+          <a:effectRef idx="2">
+            <a:schemeClr val="accent1"/>
+          </a:effectRef>
+          <a:fontRef idx="minor">
+            <a:schemeClr val="lt1"/>
+          </a:fontRef>
+        </p:style>
+        <p:txBody>
+          <a:bodyPr rtlCol="0" anchor="ctr" wrap="square" lIns="109728" rIns="109728"/>
+          <a:lstStyle/>
+          <a:p>
+            <a:pPr algn="ctr">
+              <a:defRPr sz="1300" b="1">
+                <a:solidFill>
+                  <a:srgbClr val="0F172A"/>
+                </a:solidFill>
+                <a:latin typeface="Avenir Next"/>
+              </a:defRPr>
+            </a:pPr>
+            <a:r>
+              <a:t>cse/&lt;Compiler&gt; surface — everything above sits on one compiler</a:t>
+            </a:r>
+          </a:p>
+          <a:p>
+            <a:pPr algn="ctr">
+              <a:defRPr sz="1050" b="0">
+                <a:solidFill>
+                  <a:srgbClr val="64748B"/>
+                </a:solidFill>
+                <a:latin typeface="Avenir Next"/>
+              </a:defRPr>
+            </a:pPr>
+            <a:r>
+              <a:t>lanes never mix compilers; loading a second lane fails loudly</a:t>
+            </a:r>
+          </a:p>
+        </p:txBody>
+      </p:sp>
+      <p:sp>
+        <p:nvSpPr>
+          <p:cNvPr id="14" name="TextBox 13"/>
+          <p:cNvSpPr txBox="1"/>
+          <p:nvPr/>
+        </p:nvSpPr>
+        <p:spPr>
+          <a:xfrm>
+            <a:off x="548640" y="6199632"/>
+            <a:ext cx="11064240" cy="457200"/>
+          </a:xfrm>
+          <a:prstGeom prst="rect">
+            <a:avLst/>
+          </a:prstGeom>
+          <a:noFill/>
+        </p:spPr>
+        <p:txBody>
+          <a:bodyPr wrap="square" anchor="t">
+            <a:spAutoFit/>
+          </a:bodyPr>
+          <a:lstStyle/>
+          <a:p>
             <a:pPr algn="l">
-              <a:defRPr sz="1050" b="0">
+              <a:defRPr sz="1150" b="0">
                 <a:solidFill>
                   <a:srgbClr val="64748B"/>
                 </a:solidFill>
@@ -15042,7 +15857,7 @@
               </a:defRPr>
             </a:pPr>
             <a:r>
-              <a:t>Version policy: newest supported + immediate predecessor · pinned to spack-packages v2026.06.0 (Spack v1.1.1)</a:t>
+              <a:t>A user's view is one column: the surface, Foundation, Core, the common packages, and exactly one payload. The other payloads stay invisible until their lane is loaded.</a:t>
             </a:r>
           </a:p>
         </p:txBody>

--- a/presentations/cse_lanes_model.pptx
+++ b/presentations/cse_lanes_model.pptx
@@ -9868,7 +9868,7 @@
               </a:defRPr>
             </a:pPr>
             <a:r>
-              <a:t>cluster-inspector</a:t>
+              <a:t>record the system's</a:t>
             </a:r>
           </a:p>
           <a:p>
@@ -9881,7 +9881,7 @@
               </a:defRPr>
             </a:pPr>
             <a:r>
-              <a:t>reads the system</a:t>
+              <a:t>facts, once</a:t>
             </a:r>
           </a:p>
         </p:txBody>
@@ -10106,7 +10106,7 @@
               </a:defRPr>
             </a:pPr>
             <a:r>
-              <a:t>stack-composer</a:t>
+              <a:t>derive every lane's</a:t>
             </a:r>
           </a:p>
           <a:p>
@@ -10119,7 +10119,7 @@
               </a:defRPr>
             </a:pPr>
             <a:r>
-              <a:t>emits every lane</a:t>
+              <a:t>build input</a:t>
             </a:r>
           </a:p>
         </p:txBody>

--- a/presentations/cse_lanes_model.pptx
+++ b/presentations/cse_lanes_model.pptx
@@ -3298,7 +3298,7 @@
               </a:defRPr>
             </a:pPr>
             <a:r>
-              <a:t>One clean build surface per compiler, MPI, and GPU — the lanes model</a:t>
+              <a:t>One clean build surface per compiler, MPI, and GPU: the lanes model</a:t>
             </a:r>
           </a:p>
           <a:p>
@@ -3657,7 +3657,7 @@
               </a:defRPr>
             </a:pPr>
             <a:r>
-              <a:t>Core and foundation — built once per compiler surface</a:t>
+              <a:t>Core and foundation: built once per compiler surface</a:t>
             </a:r>
           </a:p>
         </p:txBody>
@@ -3818,7 +3818,7 @@
                         </a:defRPr>
                       </a:pPr>
                       <a:r>
-                        <a:t>Foundation — ambient in the lane view, never a module</a:t>
+                        <a:t>Foundation: ambient in the lane view, never a module</a:t>
                       </a:r>
                     </a:p>
                   </a:txBody>
@@ -4082,7 +4082,7 @@
                         </a:defRPr>
                       </a:pPr>
                       <a:r>
-                        <a:t>Core tools — user-loadable, compiler-agnostic</a:t>
+                        <a:t>Core tools: user-loadable, compiler-agnostic</a:t>
                       </a:r>
                     </a:p>
                   </a:txBody>
@@ -4243,7 +4243,7 @@
                         </a:defRPr>
                       </a:pPr>
                       <a:r>
-                        <a:t>unpinned — newest from the recipe generation</a:t>
+                        <a:t>unpinned; newest from the recipe generation</a:t>
                       </a:r>
                     </a:p>
                   </a:txBody>
@@ -4465,7 +4465,7 @@
                         </a:defRPr>
                       </a:pPr>
                       <a:r>
-                        <a:t>single by nature — installer for user-managed environments</a:t>
+                        <a:t>single by nature; installer for user-managed environments</a:t>
                       </a:r>
                     </a:p>
                   </a:txBody>
@@ -4491,7 +4491,7 @@
                         </a:defRPr>
                       </a:pPr>
                       <a:r>
-                        <a:t>Only-serial by nature — no MPI implementation exists</a:t>
+                        <a:t>Only-serial by nature: no MPI implementation exists</a:t>
                       </a:r>
                     </a:p>
                   </a:txBody>
@@ -4829,7 +4829,7 @@
               </a:defRPr>
             </a:pPr>
             <a:r>
-              <a:t>Serial lane — MPI-capable, deliberately built without MPI</a:t>
+              <a:t>Serial lane: MPI-capable, deliberately built without MPI</a:t>
             </a:r>
           </a:p>
         </p:txBody>
@@ -4990,7 +4990,7 @@
                         </a:defRPr>
                       </a:pPr>
                       <a:r>
-                        <a:t>Serial data chains — each netcdf rides one named hdf5</a:t>
+                        <a:t>Serial data chains: each netcdf rides one named hdf5</a:t>
                       </a:r>
                     </a:p>
                   </a:txBody>
@@ -5154,7 +5154,7 @@
                         </a:defRPr>
                       </a:pPr>
                       <a:r>
-                        <a:t>~mpi — paired to hdf5 2.1.0 / 1.14.6</a:t>
+                        <a:t>~mpi, paired to hdf5 2.1.0 / 1.14.6</a:t>
                       </a:r>
                     </a:p>
                   </a:txBody>
@@ -5302,7 +5302,7 @@
                         </a:defRPr>
                       </a:pPr>
                       <a:r>
-                        <a:t>single recipe version — newest chain only</a:t>
+                        <a:t>single recipe version; newest chain only</a:t>
                       </a:r>
                     </a:p>
                   </a:txBody>
@@ -5518,7 +5518,7 @@
                         </a:defRPr>
                       </a:pPr>
                       <a:r>
-                        <a:t>Common compiler-dependent — built here once, available in every lane</a:t>
+                        <a:t>Common compiler-dependent: built here once, available in every lane</a:t>
                       </a:r>
                     </a:p>
                   </a:txBody>
@@ -5936,7 +5936,7 @@
               </a:defRPr>
             </a:pPr>
             <a:r>
-              <a:t>MPI and GPU lanes — built against the system MPI</a:t>
+              <a:t>MPI and GPU lanes: built against the system MPI</a:t>
             </a:r>
           </a:p>
         </p:txBody>
@@ -6097,7 +6097,7 @@
                         </a:defRPr>
                       </a:pPr>
                       <a:r>
-                        <a:t>MPI data chains — same pairing rule as serial</a:t>
+                        <a:t>MPI data chains: same pairing rule as serial</a:t>
                       </a:r>
                     </a:p>
                   </a:txBody>
@@ -6261,7 +6261,7 @@
                         </a:defRPr>
                       </a:pPr>
                       <a:r>
-                        <a:t>+mpi +parallel-netcdf — paired to hdf5 2.1.0 / 1.14.6</a:t>
+                        <a:t>+mpi +parallel-netcdf, paired to hdf5 2.1.0 / 1.14.6</a:t>
                       </a:r>
                     </a:p>
                   </a:txBody>
@@ -6409,7 +6409,7 @@
                         </a:defRPr>
                       </a:pPr>
                       <a:r>
-                        <a:t>single recipe version — newest chain only</a:t>
+                        <a:t>single recipe version; newest chain only</a:t>
                       </a:r>
                     </a:p>
                   </a:txBody>
@@ -6747,7 +6747,7 @@
                         </a:defRPr>
                       </a:pPr>
                       <a:r>
-                        <a:t>+mpi — heaviest build in the roster</a:t>
+                        <a:t>+mpi; heaviest build in the roster</a:t>
                       </a:r>
                     </a:p>
                   </a:txBody>
@@ -6773,7 +6773,7 @@
                         </a:defRPr>
                       </a:pPr>
                       <a:r>
-                        <a:t>GPU lane — selects the full MPI roster above, plus the GPU payload</a:t>
+                        <a:t>GPU lane: selects the full MPI roster above, plus the GPU payload</a:t>
                       </a:r>
                     </a:p>
                   </a:txBody>
@@ -6889,7 +6889,7 @@
                         </a:defRPr>
                       </a:pPr>
                       <a:r>
-                        <a:t>Common compiler-dependent — the Serial-lane build, available here too</a:t>
+                        <a:t>Common compiler-dependent: the Serial-lane build, available here too</a:t>
                       </a:r>
                     </a:p>
                   </a:txBody>
@@ -7005,7 +7005,7 @@
                         </a:defRPr>
                       </a:pPr>
                       <a:r>
-                        <a:t>Externals — used from the system, never built</a:t>
+                        <a:t>Externals: used from the system, never built</a:t>
                       </a:r>
                     </a:p>
                   </a:txBody>
@@ -7399,7 +7399,7 @@
               </a:defRPr>
             </a:pPr>
             <a:r>
-              <a:t>Today — CSEinit</a:t>
+              <a:t>Today: CSEinit</a:t>
             </a:r>
           </a:p>
         </p:txBody>
@@ -8145,7 +8145,7 @@
               </a:defRPr>
             </a:pPr>
             <a:r>
-              <a:t>hand-curated per system — upgrades mean rebuilding everything</a:t>
+              <a:t>hand-curated per system; upgrades mean rebuilding everything</a:t>
             </a:r>
           </a:p>
         </p:txBody>
@@ -8372,7 +8372,7 @@
               </a:defRPr>
             </a:pPr>
             <a:r>
-              <a:t>Core — automatic</a:t>
+              <a:t>Core (automatic)</a:t>
             </a:r>
           </a:p>
         </p:txBody>
@@ -8426,7 +8426,7 @@
               </a:defRPr>
             </a:pPr>
             <a:r>
-              <a:t>Foundation — in view</a:t>
+              <a:t>Foundation (in view)</a:t>
             </a:r>
           </a:p>
         </p:txBody>
@@ -9110,7 +9110,7 @@
               </a:defRPr>
             </a:pPr>
             <a:r>
-              <a:t>compiler_mixing: false — lanes stay isolated</a:t>
+              <a:t>compiler_mixing: false keeps lanes isolated</a:t>
             </a:r>
           </a:p>
           <a:p>
@@ -10413,7 +10413,7 @@
               </a:defRPr>
             </a:pPr>
             <a:r>
-              <a:t>Core + Foundation — built once per compiler surface, portable target</a:t>
+              <a:t>Core + Foundation: built once per compiler surface, portable target</a:t>
             </a:r>
           </a:p>
           <a:p>
@@ -10774,7 +10774,7 @@
               </a:defRPr>
             </a:pPr>
             <a:r>
-              <a:t>A new system is a probe + a render — not months of curation.</a:t>
+              <a:t>A new system is a probe and a render, not months of curation.</a:t>
             </a:r>
           </a:p>
           <a:p>
@@ -11112,7 +11112,7 @@
               </a:defRPr>
             </a:pPr>
             <a:r>
-              <a:t>Core — loads automatically</a:t>
+              <a:t>Core: loads automatically</a:t>
             </a:r>
           </a:p>
           <a:p>
@@ -11179,7 +11179,7 @@
               </a:defRPr>
             </a:pPr>
             <a:r>
-              <a:t>Foundation — ambient in the view</a:t>
+              <a:t>Foundation: ambient in the view</a:t>
             </a:r>
           </a:p>
           <a:p>
@@ -11192,7 +11192,7 @@
               </a:defRPr>
             </a:pPr>
             <a:r>
-              <a:t>zlib · xz · zstd — one pinned version</a:t>
+              <a:t>zlib · xz · zstd · one pinned version</a:t>
             </a:r>
           </a:p>
         </p:txBody>
@@ -12549,7 +12549,7 @@
               </a:defRPr>
             </a:pPr>
             <a:r>
-              <a:t>Modules: cse/&lt;Compiler&gt;/&lt;Lane&gt; — short names for users; dependency compatibility is enforced by module metadata.</a:t>
+              <a:t>Modules: cse/&lt;Compiler&gt;/&lt;Lane&gt;. Short names for users; dependency compatibility is enforced by module metadata.</a:t>
             </a:r>
           </a:p>
         </p:txBody>
@@ -13535,7 +13535,7 @@
               </a:defRPr>
             </a:pPr>
             <a:r>
-              <a:t>Representative roster — newest two supported releases</a:t>
+              <a:t>Representative roster: newest two supported releases</a:t>
             </a:r>
           </a:p>
         </p:txBody>
@@ -15605,7 +15605,7 @@
               </a:defRPr>
             </a:pPr>
             <a:r>
-              <a:t>Common compiler-dependent packages — loadable from every lane</a:t>
+              <a:t>Common compiler-dependent packages: loadable from every lane</a:t>
             </a:r>
           </a:p>
           <a:p>
@@ -15618,7 +15618,7 @@
               </a:defRPr>
             </a:pPr>
             <a:r>
-              <a:t>openblas · netlib-lapack · gnuplot — one Serial-lane build, one install, shared module root</a:t>
+              <a:t>openblas · netlib-lapack · gnuplot · one Serial-lane build, one install, shared module root</a:t>
             </a:r>
           </a:p>
         </p:txBody>
@@ -15672,7 +15672,7 @@
               </a:defRPr>
             </a:pPr>
             <a:r>
-              <a:t>Core — loads with the compiler surface</a:t>
+              <a:t>Core: loads with the compiler surface</a:t>
             </a:r>
           </a:p>
           <a:p>
@@ -15739,7 +15739,7 @@
               </a:defRPr>
             </a:pPr>
             <a:r>
-              <a:t>Foundation — ambient in the view, never a module</a:t>
+              <a:t>Foundation: ambient in the view, never a module</a:t>
             </a:r>
           </a:p>
           <a:p>
@@ -15808,7 +15808,7 @@
               </a:defRPr>
             </a:pPr>
             <a:r>
-              <a:t>cse/&lt;Compiler&gt; surface — everything above sits on one compiler</a:t>
+              <a:t>cse/&lt;Compiler&gt; surface: everything above sits on one compiler</a:t>
             </a:r>
           </a:p>
           <a:p>

--- a/presentations/cse_lanes_model.pptx
+++ b/presentations/cse_lanes_model.pptx
@@ -3818,7 +3818,7 @@
                         </a:defRPr>
                       </a:pPr>
                       <a:r>
-                        <a:t>Foundation: ambient in the lane view, never a module</a:t>
+                        <a:t>Foundation: on your paths automatically, never a loadable module</a:t>
                       </a:r>
                     </a:p>
                   </a:txBody>
@@ -8426,7 +8426,7 @@
               </a:defRPr>
             </a:pPr>
             <a:r>
-              <a:t>Foundation (in view)</a:t>
+              <a:t>Foundation (on the path)</a:t>
             </a:r>
           </a:p>
         </p:txBody>
@@ -11179,7 +11179,7 @@
               </a:defRPr>
             </a:pPr>
             <a:r>
-              <a:t>Foundation: ambient in the view</a:t>
+              <a:t>Foundation: on your paths automatically</a:t>
             </a:r>
           </a:p>
           <a:p>
@@ -15739,7 +15739,7 @@
               </a:defRPr>
             </a:pPr>
             <a:r>
-              <a:t>Foundation: ambient in the view, never a module</a:t>
+              <a:t>Foundation: on your paths automatically, nothing to load</a:t>
             </a:r>
           </a:p>
           <a:p>

--- a/presentations/cse_lanes_model.pptx
+++ b/presentations/cse_lanes_model.pptx
@@ -12951,7 +12951,7 @@
               </a:defRPr>
             </a:pPr>
             <a:r>
-              <a:t>Foundation (view)</a:t>
+              <a:t>Foundation (on the path)</a:t>
             </a:r>
           </a:p>
         </p:txBody>
@@ -13337,7 +13337,7 @@
               </a:defRPr>
             </a:pPr>
             <a:r>
-              <a:t>Foundation (view)</a:t>
+              <a:t>Foundation (on the path)</a:t>
             </a:r>
           </a:p>
         </p:txBody>

--- a/presentations/cse_lanes_model.pptx
+++ b/presentations/cse_lanes_model.pptx
@@ -17,6 +17,7 @@
     <p:sldId id="265" r:id="rId16"/>
     <p:sldId id="266" r:id="rId17"/>
     <p:sldId id="267" r:id="rId18"/>
+    <p:sldId id="268" r:id="rId19"/>
   </p:sldIdLst>
   <p:sldSz cx="12191695" cy="6858000" type="screen4x3"/>
   <p:notesSz cx="6858000" cy="9144000"/>
@@ -3537,6 +3538,766 @@
 </file>
 
 <file path=ppt/slides/slide10.xml><?xml version="1.0" encoding="utf-8"?>
+<p:sld xmlns:a="http://schemas.openxmlformats.org/drawingml/2006/main" xmlns:p="http://schemas.openxmlformats.org/presentationml/2006/main" xmlns:r="http://schemas.openxmlformats.org/officeDocument/2006/relationships">
+  <p:cSld>
+    <p:spTree>
+      <p:nvGrpSpPr>
+        <p:cNvPr id="1" name=""/>
+        <p:cNvGrpSpPr/>
+        <p:nvPr/>
+      </p:nvGrpSpPr>
+      <p:grpSpPr/>
+      <p:sp>
+        <p:nvSpPr>
+          <p:cNvPr id="2" name="Rectangle 1"/>
+          <p:cNvSpPr/>
+          <p:nvPr/>
+        </p:nvSpPr>
+        <p:spPr>
+          <a:xfrm>
+            <a:off x="0" y="0"/>
+            <a:ext cx="12191695" cy="6858000"/>
+          </a:xfrm>
+          <a:prstGeom prst="rect">
+            <a:avLst/>
+          </a:prstGeom>
+          <a:solidFill>
+            <a:srgbClr val="FFFFFF"/>
+          </a:solidFill>
+          <a:ln>
+            <a:noFill/>
+          </a:ln>
+          <a:effectLst/>
+        </p:spPr>
+        <p:style>
+          <a:lnRef idx="1">
+            <a:schemeClr val="accent1"/>
+          </a:lnRef>
+          <a:fillRef idx="3">
+            <a:schemeClr val="accent1"/>
+          </a:fillRef>
+          <a:effectRef idx="2">
+            <a:schemeClr val="accent1"/>
+          </a:effectRef>
+          <a:fontRef idx="minor">
+            <a:schemeClr val="lt1"/>
+          </a:fontRef>
+        </p:style>
+        <p:txBody>
+          <a:bodyPr rtlCol="0" anchor="ctr"/>
+          <a:lstStyle/>
+          <a:p>
+            <a:pPr algn="ctr"/>
+          </a:p>
+        </p:txBody>
+      </p:sp>
+      <p:sp>
+        <p:nvSpPr>
+          <p:cNvPr id="3" name="TextBox 2"/>
+          <p:cNvSpPr txBox="1"/>
+          <p:nvPr/>
+        </p:nvSpPr>
+        <p:spPr>
+          <a:xfrm>
+            <a:off x="548640" y="256032"/>
+            <a:ext cx="10972800" cy="365760"/>
+          </a:xfrm>
+          <a:prstGeom prst="rect">
+            <a:avLst/>
+          </a:prstGeom>
+          <a:noFill/>
+        </p:spPr>
+        <p:txBody>
+          <a:bodyPr wrap="square" anchor="t">
+            <a:spAutoFit/>
+          </a:bodyPr>
+          <a:lstStyle/>
+          <a:p>
+            <a:pPr algn="l">
+              <a:defRPr sz="1300" b="1">
+                <a:solidFill>
+                  <a:srgbClr val="0D9488"/>
+                </a:solidFill>
+                <a:latin typeface="Avenir Next"/>
+              </a:defRPr>
+            </a:pPr>
+            <a:r>
+              <a:t>APPENDIX · HOW THE LAYERS STACK</a:t>
+            </a:r>
+          </a:p>
+        </p:txBody>
+      </p:sp>
+      <p:sp>
+        <p:nvSpPr>
+          <p:cNvPr id="4" name="TextBox 3"/>
+          <p:cNvSpPr txBox="1"/>
+          <p:nvPr/>
+        </p:nvSpPr>
+        <p:spPr>
+          <a:xfrm>
+            <a:off x="548640" y="566928"/>
+            <a:ext cx="11064240" cy="731520"/>
+          </a:xfrm>
+          <a:prstGeom prst="rect">
+            <a:avLst/>
+          </a:prstGeom>
+          <a:noFill/>
+        </p:spPr>
+        <p:txBody>
+          <a:bodyPr wrap="square" anchor="t">
+            <a:spAutoFit/>
+          </a:bodyPr>
+          <a:lstStyle/>
+          <a:p>
+            <a:pPr algn="l">
+              <a:defRPr sz="3000" b="1">
+                <a:solidFill>
+                  <a:srgbClr val="0F172A"/>
+                </a:solidFill>
+                <a:latin typeface="Avenir Next"/>
+              </a:defRPr>
+            </a:pPr>
+            <a:r>
+              <a:t>What each lane exposes</a:t>
+            </a:r>
+          </a:p>
+        </p:txBody>
+      </p:sp>
+      <p:sp>
+        <p:nvSpPr>
+          <p:cNvPr id="5" name="Rectangle 4"/>
+          <p:cNvSpPr/>
+          <p:nvPr/>
+        </p:nvSpPr>
+        <p:spPr>
+          <a:xfrm>
+            <a:off x="566928" y="1298448"/>
+            <a:ext cx="1463040" cy="41148"/>
+          </a:xfrm>
+          <a:prstGeom prst="rect">
+            <a:avLst/>
+          </a:prstGeom>
+          <a:solidFill>
+            <a:srgbClr val="0D9488"/>
+          </a:solidFill>
+          <a:ln>
+            <a:noFill/>
+          </a:ln>
+          <a:effectLst/>
+        </p:spPr>
+        <p:style>
+          <a:lnRef idx="1">
+            <a:schemeClr val="accent1"/>
+          </a:lnRef>
+          <a:fillRef idx="3">
+            <a:schemeClr val="accent1"/>
+          </a:fillRef>
+          <a:effectRef idx="2">
+            <a:schemeClr val="accent1"/>
+          </a:effectRef>
+          <a:fontRef idx="minor">
+            <a:schemeClr val="lt1"/>
+          </a:fontRef>
+        </p:style>
+        <p:txBody>
+          <a:bodyPr rtlCol="0" anchor="ctr"/>
+          <a:lstStyle/>
+          <a:p>
+            <a:pPr algn="ctr"/>
+          </a:p>
+        </p:txBody>
+      </p:sp>
+      <p:sp>
+        <p:nvSpPr>
+          <p:cNvPr id="6" name="TextBox 5"/>
+          <p:cNvSpPr txBox="1"/>
+          <p:nvPr/>
+        </p:nvSpPr>
+        <p:spPr>
+          <a:xfrm>
+            <a:off x="548640" y="1389888"/>
+            <a:ext cx="11064240" cy="274320"/>
+          </a:xfrm>
+          <a:prstGeom prst="rect">
+            <a:avLst/>
+          </a:prstGeom>
+          <a:noFill/>
+        </p:spPr>
+        <p:txBody>
+          <a:bodyPr wrap="square" anchor="t">
+            <a:spAutoFit/>
+          </a:bodyPr>
+          <a:lstStyle/>
+          <a:p>
+            <a:pPr algn="ctr">
+              <a:defRPr sz="1150" b="1">
+                <a:solidFill>
+                  <a:srgbClr val="64748B"/>
+                </a:solidFill>
+                <a:latin typeface="Avenir Next"/>
+              </a:defRPr>
+            </a:pPr>
+            <a:r>
+              <a:t>CHOOSE EXACTLY ONE LANE</a:t>
+            </a:r>
+          </a:p>
+        </p:txBody>
+      </p:sp>
+      <p:sp>
+        <p:nvSpPr>
+          <p:cNvPr id="7" name="Rounded Rectangle 6"/>
+          <p:cNvSpPr/>
+          <p:nvPr/>
+        </p:nvSpPr>
+        <p:spPr>
+          <a:xfrm>
+            <a:off x="548640" y="1719072"/>
+            <a:ext cx="3611880" cy="1325880"/>
+          </a:xfrm>
+          <a:prstGeom prst="roundRect">
+            <a:avLst/>
+          </a:prstGeom>
+          <a:solidFill>
+            <a:srgbClr val="D97706"/>
+          </a:solidFill>
+          <a:ln>
+            <a:noFill/>
+          </a:ln>
+          <a:effectLst/>
+        </p:spPr>
+        <p:style>
+          <a:lnRef idx="1">
+            <a:schemeClr val="accent1"/>
+          </a:lnRef>
+          <a:fillRef idx="3">
+            <a:schemeClr val="accent1"/>
+          </a:fillRef>
+          <a:effectRef idx="2">
+            <a:schemeClr val="accent1"/>
+          </a:effectRef>
+          <a:fontRef idx="minor">
+            <a:schemeClr val="lt1"/>
+          </a:fontRef>
+        </p:style>
+        <p:txBody>
+          <a:bodyPr rtlCol="0" anchor="ctr" wrap="square" lIns="109728" rIns="109728"/>
+          <a:lstStyle/>
+          <a:p>
+            <a:pPr algn="ctr">
+              <a:defRPr sz="1500" b="1">
+                <a:solidFill>
+                  <a:srgbClr val="FFFFFF"/>
+                </a:solidFill>
+                <a:latin typeface="Avenir Next"/>
+              </a:defRPr>
+            </a:pPr>
+            <a:r>
+              <a:t>Serial</a:t>
+            </a:r>
+          </a:p>
+          <a:p>
+            <a:pPr algn="ctr">
+              <a:defRPr sz="1100" b="0">
+                <a:solidFill>
+                  <a:srgbClr val="FFFFFF"/>
+                </a:solidFill>
+                <a:latin typeface="Avenir Next"/>
+              </a:defRPr>
+            </a:pPr>
+            <a:r>
+              <a:t>hdf5 · netcdf · fftw · boost</a:t>
+            </a:r>
+          </a:p>
+          <a:p>
+            <a:pPr algn="ctr">
+              <a:defRPr sz="1000" b="0">
+                <a:solidFill>
+                  <a:srgbClr val="FFFFFF"/>
+                </a:solidFill>
+                <a:latin typeface="Avenir Next"/>
+              </a:defRPr>
+            </a:pPr>
+            <a:r>
+              <a:t>the same packages, built without MPI</a:t>
+            </a:r>
+          </a:p>
+        </p:txBody>
+      </p:sp>
+      <p:sp>
+        <p:nvSpPr>
+          <p:cNvPr id="8" name="Rounded Rectangle 7"/>
+          <p:cNvSpPr/>
+          <p:nvPr/>
+        </p:nvSpPr>
+        <p:spPr>
+          <a:xfrm>
+            <a:off x="4370831" y="1719072"/>
+            <a:ext cx="3611880" cy="1325880"/>
+          </a:xfrm>
+          <a:prstGeom prst="roundRect">
+            <a:avLst/>
+          </a:prstGeom>
+          <a:solidFill>
+            <a:srgbClr val="2563EB"/>
+          </a:solidFill>
+          <a:ln>
+            <a:noFill/>
+          </a:ln>
+          <a:effectLst/>
+        </p:spPr>
+        <p:style>
+          <a:lnRef idx="1">
+            <a:schemeClr val="accent1"/>
+          </a:lnRef>
+          <a:fillRef idx="3">
+            <a:schemeClr val="accent1"/>
+          </a:fillRef>
+          <a:effectRef idx="2">
+            <a:schemeClr val="accent1"/>
+          </a:effectRef>
+          <a:fontRef idx="minor">
+            <a:schemeClr val="lt1"/>
+          </a:fontRef>
+        </p:style>
+        <p:txBody>
+          <a:bodyPr rtlCol="0" anchor="ctr" wrap="square" lIns="109728" rIns="109728"/>
+          <a:lstStyle/>
+          <a:p>
+            <a:pPr algn="ctr">
+              <a:defRPr sz="1500" b="1">
+                <a:solidFill>
+                  <a:srgbClr val="FFFFFF"/>
+                </a:solidFill>
+                <a:latin typeface="Avenir Next"/>
+              </a:defRPr>
+            </a:pPr>
+            <a:r>
+              <a:t>MPI</a:t>
+            </a:r>
+          </a:p>
+          <a:p>
+            <a:pPr algn="ctr">
+              <a:defRPr sz="1100" b="0">
+                <a:solidFill>
+                  <a:srgbClr val="FFFFFF"/>
+                </a:solidFill>
+                <a:latin typeface="Avenir Next"/>
+              </a:defRPr>
+            </a:pPr>
+            <a:r>
+              <a:t>hdf5 · netcdf · fftw · boost · tau · dakota</a:t>
+            </a:r>
+          </a:p>
+          <a:p>
+            <a:pPr algn="ctr">
+              <a:defRPr sz="1000" b="0">
+                <a:solidFill>
+                  <a:srgbClr val="FFFFFF"/>
+                </a:solidFill>
+                <a:latin typeface="Avenir Next"/>
+              </a:defRPr>
+            </a:pPr>
+            <a:r>
+              <a:t>built against the system MPI</a:t>
+            </a:r>
+          </a:p>
+        </p:txBody>
+      </p:sp>
+      <p:sp>
+        <p:nvSpPr>
+          <p:cNvPr id="9" name="Rounded Rectangle 8"/>
+          <p:cNvSpPr/>
+          <p:nvPr/>
+        </p:nvSpPr>
+        <p:spPr>
+          <a:xfrm>
+            <a:off x="8193023" y="1719072"/>
+            <a:ext cx="3611880" cy="1325880"/>
+          </a:xfrm>
+          <a:prstGeom prst="roundRect">
+            <a:avLst/>
+          </a:prstGeom>
+          <a:solidFill>
+            <a:srgbClr val="7C3AED"/>
+          </a:solidFill>
+          <a:ln>
+            <a:noFill/>
+          </a:ln>
+          <a:effectLst/>
+        </p:spPr>
+        <p:style>
+          <a:lnRef idx="1">
+            <a:schemeClr val="accent1"/>
+          </a:lnRef>
+          <a:fillRef idx="3">
+            <a:schemeClr val="accent1"/>
+          </a:fillRef>
+          <a:effectRef idx="2">
+            <a:schemeClr val="accent1"/>
+          </a:effectRef>
+          <a:fontRef idx="minor">
+            <a:schemeClr val="lt1"/>
+          </a:fontRef>
+        </p:style>
+        <p:txBody>
+          <a:bodyPr rtlCol="0" anchor="ctr" wrap="square" lIns="109728" rIns="109728"/>
+          <a:lstStyle/>
+          <a:p>
+            <a:pPr algn="ctr">
+              <a:defRPr sz="1500" b="1">
+                <a:solidFill>
+                  <a:srgbClr val="FFFFFF"/>
+                </a:solidFill>
+                <a:latin typeface="Avenir Next"/>
+              </a:defRPr>
+            </a:pPr>
+            <a:r>
+              <a:t>GPU</a:t>
+            </a:r>
+          </a:p>
+          <a:p>
+            <a:pPr algn="ctr">
+              <a:defRPr sz="1100" b="0">
+                <a:solidFill>
+                  <a:srgbClr val="FFFFFF"/>
+                </a:solidFill>
+                <a:latin typeface="Avenir Next"/>
+              </a:defRPr>
+            </a:pPr>
+            <a:r>
+              <a:t>the MPI roster, plus kokkos</a:t>
+            </a:r>
+          </a:p>
+          <a:p>
+            <a:pPr algn="ctr">
+              <a:defRPr sz="1000" b="0">
+                <a:solidFill>
+                  <a:srgbClr val="FFFFFF"/>
+                </a:solidFill>
+                <a:latin typeface="Avenir Next"/>
+              </a:defRPr>
+            </a:pPr>
+            <a:r>
+              <a:t>+rocm / +cuda, arch from the probe</a:t>
+            </a:r>
+          </a:p>
+        </p:txBody>
+      </p:sp>
+      <p:sp>
+        <p:nvSpPr>
+          <p:cNvPr id="10" name="Rounded Rectangle 9"/>
+          <p:cNvSpPr/>
+          <p:nvPr/>
+        </p:nvSpPr>
+        <p:spPr>
+          <a:xfrm>
+            <a:off x="548640" y="3200400"/>
+            <a:ext cx="11091672" cy="640080"/>
+          </a:xfrm>
+          <a:prstGeom prst="roundRect">
+            <a:avLst/>
+          </a:prstGeom>
+          <a:solidFill>
+            <a:srgbClr val="15803D"/>
+          </a:solidFill>
+          <a:ln>
+            <a:noFill/>
+          </a:ln>
+          <a:effectLst/>
+        </p:spPr>
+        <p:style>
+          <a:lnRef idx="1">
+            <a:schemeClr val="accent1"/>
+          </a:lnRef>
+          <a:fillRef idx="3">
+            <a:schemeClr val="accent1"/>
+          </a:fillRef>
+          <a:effectRef idx="2">
+            <a:schemeClr val="accent1"/>
+          </a:effectRef>
+          <a:fontRef idx="minor">
+            <a:schemeClr val="lt1"/>
+          </a:fontRef>
+        </p:style>
+        <p:txBody>
+          <a:bodyPr rtlCol="0" anchor="ctr" wrap="square" lIns="109728" rIns="109728"/>
+          <a:lstStyle/>
+          <a:p>
+            <a:pPr algn="ctr">
+              <a:defRPr sz="1250" b="1">
+                <a:solidFill>
+                  <a:srgbClr val="FFFFFF"/>
+                </a:solidFill>
+                <a:latin typeface="Avenir Next"/>
+              </a:defRPr>
+            </a:pPr>
+            <a:r>
+              <a:t>Common compiler-dependent packages: loadable from every lane</a:t>
+            </a:r>
+          </a:p>
+          <a:p>
+            <a:pPr algn="ctr">
+              <a:defRPr sz="1050" b="0">
+                <a:solidFill>
+                  <a:srgbClr val="FFFFFF"/>
+                </a:solidFill>
+                <a:latin typeface="Avenir Next"/>
+              </a:defRPr>
+            </a:pPr>
+            <a:r>
+              <a:t>openblas · netlib-lapack · gnuplot · one Serial-lane build, one install, shared module root</a:t>
+            </a:r>
+          </a:p>
+        </p:txBody>
+      </p:sp>
+      <p:sp>
+        <p:nvSpPr>
+          <p:cNvPr id="11" name="Rounded Rectangle 10"/>
+          <p:cNvSpPr/>
+          <p:nvPr/>
+        </p:nvSpPr>
+        <p:spPr>
+          <a:xfrm>
+            <a:off x="548640" y="3959352"/>
+            <a:ext cx="11091672" cy="640080"/>
+          </a:xfrm>
+          <a:prstGeom prst="roundRect">
+            <a:avLst/>
+          </a:prstGeom>
+          <a:solidFill>
+            <a:srgbClr val="0D9488"/>
+          </a:solidFill>
+          <a:ln>
+            <a:noFill/>
+          </a:ln>
+          <a:effectLst/>
+        </p:spPr>
+        <p:style>
+          <a:lnRef idx="1">
+            <a:schemeClr val="accent1"/>
+          </a:lnRef>
+          <a:fillRef idx="3">
+            <a:schemeClr val="accent1"/>
+          </a:fillRef>
+          <a:effectRef idx="2">
+            <a:schemeClr val="accent1"/>
+          </a:effectRef>
+          <a:fontRef idx="minor">
+            <a:schemeClr val="lt1"/>
+          </a:fontRef>
+        </p:style>
+        <p:txBody>
+          <a:bodyPr rtlCol="0" anchor="ctr" wrap="square" lIns="109728" rIns="109728"/>
+          <a:lstStyle/>
+          <a:p>
+            <a:pPr algn="ctr">
+              <a:defRPr sz="1250" b="1">
+                <a:solidFill>
+                  <a:srgbClr val="FFFFFF"/>
+                </a:solidFill>
+                <a:latin typeface="Avenir Next"/>
+              </a:defRPr>
+            </a:pPr>
+            <a:r>
+              <a:t>Core: loads with the compiler surface</a:t>
+            </a:r>
+          </a:p>
+          <a:p>
+            <a:pPr algn="ctr">
+              <a:defRPr sz="1050" b="0">
+                <a:solidFill>
+                  <a:srgbClr val="FFFFFF"/>
+                </a:solidFill>
+                <a:latin typeface="Avenir Next"/>
+              </a:defRPr>
+            </a:pPr>
+            <a:r>
+              <a:t>cmake · ninja · git · python · py-numpy · miniforge · gsl · sqlite</a:t>
+            </a:r>
+          </a:p>
+        </p:txBody>
+      </p:sp>
+      <p:sp>
+        <p:nvSpPr>
+          <p:cNvPr id="12" name="Rounded Rectangle 11"/>
+          <p:cNvSpPr/>
+          <p:nvPr/>
+        </p:nvSpPr>
+        <p:spPr>
+          <a:xfrm>
+            <a:off x="548640" y="4718304"/>
+            <a:ext cx="11091672" cy="640080"/>
+          </a:xfrm>
+          <a:prstGeom prst="roundRect">
+            <a:avLst/>
+          </a:prstGeom>
+          <a:solidFill>
+            <a:srgbClr val="475569"/>
+          </a:solidFill>
+          <a:ln>
+            <a:noFill/>
+          </a:ln>
+          <a:effectLst/>
+        </p:spPr>
+        <p:style>
+          <a:lnRef idx="1">
+            <a:schemeClr val="accent1"/>
+          </a:lnRef>
+          <a:fillRef idx="3">
+            <a:schemeClr val="accent1"/>
+          </a:fillRef>
+          <a:effectRef idx="2">
+            <a:schemeClr val="accent1"/>
+          </a:effectRef>
+          <a:fontRef idx="minor">
+            <a:schemeClr val="lt1"/>
+          </a:fontRef>
+        </p:style>
+        <p:txBody>
+          <a:bodyPr rtlCol="0" anchor="ctr" wrap="square" lIns="109728" rIns="109728"/>
+          <a:lstStyle/>
+          <a:p>
+            <a:pPr algn="ctr">
+              <a:defRPr sz="1250" b="1">
+                <a:solidFill>
+                  <a:srgbClr val="FFFFFF"/>
+                </a:solidFill>
+                <a:latin typeface="Avenir Next"/>
+              </a:defRPr>
+            </a:pPr>
+            <a:r>
+              <a:t>Foundation: on your paths automatically, nothing to load</a:t>
+            </a:r>
+          </a:p>
+          <a:p>
+            <a:pPr algn="ctr">
+              <a:defRPr sz="1050" b="0">
+                <a:solidFill>
+                  <a:srgbClr val="FFFFFF"/>
+                </a:solidFill>
+                <a:latin typeface="Avenir Next"/>
+              </a:defRPr>
+            </a:pPr>
+            <a:r>
+              <a:t>zlib · xz · zstd, single pinned version</a:t>
+            </a:r>
+          </a:p>
+        </p:txBody>
+      </p:sp>
+      <p:sp>
+        <p:nvSpPr>
+          <p:cNvPr id="13" name="Rounded Rectangle 12"/>
+          <p:cNvSpPr/>
+          <p:nvPr/>
+        </p:nvSpPr>
+        <p:spPr>
+          <a:xfrm>
+            <a:off x="548640" y="5504688"/>
+            <a:ext cx="11091672" cy="548640"/>
+          </a:xfrm>
+          <a:prstGeom prst="roundRect">
+            <a:avLst/>
+          </a:prstGeom>
+          <a:solidFill>
+            <a:srgbClr val="FFFFFF"/>
+          </a:solidFill>
+          <a:ln w="15875">
+            <a:solidFill>
+              <a:srgbClr val="E2E8F0"/>
+            </a:solidFill>
+          </a:ln>
+          <a:effectLst/>
+        </p:spPr>
+        <p:style>
+          <a:lnRef idx="1">
+            <a:schemeClr val="accent1"/>
+          </a:lnRef>
+          <a:fillRef idx="3">
+            <a:schemeClr val="accent1"/>
+          </a:fillRef>
+          <a:effectRef idx="2">
+            <a:schemeClr val="accent1"/>
+          </a:effectRef>
+          <a:fontRef idx="minor">
+            <a:schemeClr val="lt1"/>
+          </a:fontRef>
+        </p:style>
+        <p:txBody>
+          <a:bodyPr rtlCol="0" anchor="ctr" wrap="square" lIns="109728" rIns="109728"/>
+          <a:lstStyle/>
+          <a:p>
+            <a:pPr algn="ctr">
+              <a:defRPr sz="1300" b="1">
+                <a:solidFill>
+                  <a:srgbClr val="0F172A"/>
+                </a:solidFill>
+                <a:latin typeface="Avenir Next"/>
+              </a:defRPr>
+            </a:pPr>
+            <a:r>
+              <a:t>cse/&lt;Compiler&gt; surface: everything above sits on one compiler</a:t>
+            </a:r>
+          </a:p>
+          <a:p>
+            <a:pPr algn="ctr">
+              <a:defRPr sz="1050" b="0">
+                <a:solidFill>
+                  <a:srgbClr val="64748B"/>
+                </a:solidFill>
+                <a:latin typeface="Avenir Next"/>
+              </a:defRPr>
+            </a:pPr>
+            <a:r>
+              <a:t>lanes never mix compilers; loading a second lane fails loudly</a:t>
+            </a:r>
+          </a:p>
+        </p:txBody>
+      </p:sp>
+      <p:sp>
+        <p:nvSpPr>
+          <p:cNvPr id="14" name="TextBox 13"/>
+          <p:cNvSpPr txBox="1"/>
+          <p:nvPr/>
+        </p:nvSpPr>
+        <p:spPr>
+          <a:xfrm>
+            <a:off x="548640" y="6199632"/>
+            <a:ext cx="11064240" cy="457200"/>
+          </a:xfrm>
+          <a:prstGeom prst="rect">
+            <a:avLst/>
+          </a:prstGeom>
+          <a:noFill/>
+        </p:spPr>
+        <p:txBody>
+          <a:bodyPr wrap="square" anchor="t">
+            <a:spAutoFit/>
+          </a:bodyPr>
+          <a:lstStyle/>
+          <a:p>
+            <a:pPr algn="l">
+              <a:defRPr sz="1150" b="0">
+                <a:solidFill>
+                  <a:srgbClr val="64748B"/>
+                </a:solidFill>
+                <a:latin typeface="Avenir Next"/>
+              </a:defRPr>
+            </a:pPr>
+            <a:r>
+              <a:t>A user's view is one column: the surface, Foundation, Core, the common packages, and exactly one payload. The other payloads stay invisible until their lane is loaded.</a:t>
+            </a:r>
+          </a:p>
+        </p:txBody>
+      </p:sp>
+    </p:spTree>
+  </p:cSld>
+  <p:clrMapOvr>
+    <a:masterClrMapping/>
+  </p:clrMapOvr>
+</p:sld>
+</file>
+
+<file path=ppt/slides/slide11.xml><?xml version="1.0" encoding="utf-8"?>
 <p:sld xmlns:a="http://schemas.openxmlformats.org/drawingml/2006/main" xmlns:p="http://schemas.openxmlformats.org/presentationml/2006/main" xmlns:r="http://schemas.openxmlformats.org/officeDocument/2006/relationships">
   <p:cSld>
     <p:spTree>
@@ -4708,7 +5469,7 @@
 </p:sld>
 </file>
 
-<file path=ppt/slides/slide11.xml><?xml version="1.0" encoding="utf-8"?>
+<file path=ppt/slides/slide12.xml><?xml version="1.0" encoding="utf-8"?>
 <p:sld xmlns:a="http://schemas.openxmlformats.org/drawingml/2006/main" xmlns:p="http://schemas.openxmlformats.org/presentationml/2006/main" xmlns:r="http://schemas.openxmlformats.org/officeDocument/2006/relationships">
   <p:cSld>
     <p:spTree>
@@ -5815,7 +6576,7 @@
 </p:sld>
 </file>
 
-<file path=ppt/slides/slide12.xml><?xml version="1.0" encoding="utf-8"?>
+<file path=ppt/slides/slide13.xml><?xml version="1.0" encoding="utf-8"?>
 <p:sld xmlns:a="http://schemas.openxmlformats.org/drawingml/2006/main" xmlns:p="http://schemas.openxmlformats.org/presentationml/2006/main" xmlns:r="http://schemas.openxmlformats.org/officeDocument/2006/relationships">
   <p:cSld>
     <p:spTree>
@@ -12647,7 +13408,7 @@
               </a:defRPr>
             </a:pPr>
             <a:r>
-              <a:t>TWO COMPILER SURFACES · ONE CRAY SYSTEM FIRST</a:t>
+              <a:t>TWO COMPILER SURFACES · FOUR-SYSTEM VALIDATION</a:t>
             </a:r>
           </a:p>
         </p:txBody>
@@ -14425,7 +15186,7 @@
               </a:defRPr>
             </a:pPr>
             <a:r>
-              <a:t>WHERE THE PIPELINE IS TODAY</a:t>
+              <a:t>TEST MATRIX · BREADTH BY DESIGN</a:t>
             </a:r>
           </a:p>
         </p:txBody>
@@ -14461,7 +15222,7 @@
               </a:defRPr>
             </a:pPr>
             <a:r>
-              <a:t>Status and next steps</a:t>
+              <a:t>Four systems will prove the pilot</a:t>
             </a:r>
           </a:p>
         </p:txBody>
@@ -14518,8 +15279,8 @@
         </p:nvSpPr>
         <p:spPr>
           <a:xfrm>
-            <a:off x="548640" y="1645920"/>
-            <a:ext cx="5440680" cy="4480560"/>
+            <a:off x="548640" y="1627632"/>
+            <a:ext cx="5394960" cy="1783080"/>
           </a:xfrm>
           <a:prstGeom prst="roundRect">
             <a:avLst/>
@@ -14556,14 +15317,58 @@
       </p:sp>
       <p:sp>
         <p:nvSpPr>
-          <p:cNvPr id="7" name="TextBox 6"/>
+          <p:cNvPr id="7" name="Rectangle 6"/>
+          <p:cNvSpPr/>
+          <p:nvPr/>
+        </p:nvSpPr>
+        <p:spPr>
+          <a:xfrm>
+            <a:off x="548640" y="1627632"/>
+            <a:ext cx="109728" cy="1783080"/>
+          </a:xfrm>
+          <a:prstGeom prst="rect">
+            <a:avLst/>
+          </a:prstGeom>
+          <a:solidFill>
+            <a:srgbClr val="7C3AED"/>
+          </a:solidFill>
+          <a:ln>
+            <a:noFill/>
+          </a:ln>
+          <a:effectLst/>
+        </p:spPr>
+        <p:style>
+          <a:lnRef idx="1">
+            <a:schemeClr val="accent1"/>
+          </a:lnRef>
+          <a:fillRef idx="3">
+            <a:schemeClr val="accent1"/>
+          </a:fillRef>
+          <a:effectRef idx="2">
+            <a:schemeClr val="accent1"/>
+          </a:effectRef>
+          <a:fontRef idx="minor">
+            <a:schemeClr val="lt1"/>
+          </a:fontRef>
+        </p:style>
+        <p:txBody>
+          <a:bodyPr rtlCol="0" anchor="ctr"/>
+          <a:lstStyle/>
+          <a:p>
+            <a:pPr algn="ctr"/>
+          </a:p>
+        </p:txBody>
+      </p:sp>
+      <p:sp>
+        <p:nvSpPr>
+          <p:cNvPr id="8" name="TextBox 7"/>
           <p:cNvSpPr txBox="1"/>
           <p:nvPr/>
         </p:nvSpPr>
         <p:spPr>
           <a:xfrm>
-            <a:off x="822960" y="1828800"/>
-            <a:ext cx="4937760" cy="457200"/>
+            <a:off x="822959" y="1773936"/>
+            <a:ext cx="1920240" cy="365760"/>
           </a:xfrm>
           <a:prstGeom prst="rect">
             <a:avLst/>
@@ -14579,27 +15384,27 @@
             <a:pPr algn="l">
               <a:defRPr sz="1700" b="1">
                 <a:solidFill>
-                  <a:srgbClr val="15803D"/>
-                </a:solidFill>
-                <a:latin typeface="Avenir Next"/>
-              </a:defRPr>
-            </a:pPr>
-            <a:r>
-              <a:t>Done</a:t>
-            </a:r>
-          </a:p>
-        </p:txBody>
-      </p:sp>
-      <p:sp>
-        <p:nvSpPr>
-          <p:cNvPr id="8" name="TextBox 7"/>
+                  <a:srgbClr val="0F172A"/>
+                </a:solidFill>
+                <a:latin typeface="Avenir Next"/>
+              </a:defRPr>
+            </a:pPr>
+            <a:r>
+              <a:t>Blueback</a:t>
+            </a:r>
+          </a:p>
+        </p:txBody>
+      </p:sp>
+      <p:sp>
+        <p:nvSpPr>
+          <p:cNvPr id="9" name="TextBox 8"/>
           <p:cNvSpPr txBox="1"/>
           <p:nvPr/>
         </p:nvSpPr>
         <p:spPr>
           <a:xfrm>
-            <a:off x="822960" y="2377440"/>
-            <a:ext cx="365760" cy="457200"/>
+            <a:off x="2697480" y="1801368"/>
+            <a:ext cx="2971800" cy="320040"/>
           </a:xfrm>
           <a:prstGeom prst="rect">
             <a:avLst/>
@@ -14612,30 +15417,30 @@
           </a:bodyPr>
           <a:lstStyle/>
           <a:p>
-            <a:pPr algn="l">
-              <a:defRPr sz="1600" b="1">
-                <a:solidFill>
-                  <a:srgbClr val="15803D"/>
-                </a:solidFill>
-                <a:latin typeface="Avenir Next"/>
-              </a:defRPr>
-            </a:pPr>
-            <a:r>
-              <a:t>✓</a:t>
-            </a:r>
-          </a:p>
-        </p:txBody>
-      </p:sp>
-      <p:sp>
-        <p:nvSpPr>
-          <p:cNvPr id="9" name="TextBox 8"/>
+            <a:pPr algn="r">
+              <a:defRPr sz="1150" b="1">
+                <a:solidFill>
+                  <a:srgbClr val="7C3AED"/>
+                </a:solidFill>
+                <a:latin typeface="Avenir Next"/>
+              </a:defRPr>
+            </a:pPr>
+            <a:r>
+              <a:t>CRAY PE · AMD APU</a:t>
+            </a:r>
+          </a:p>
+        </p:txBody>
+      </p:sp>
+      <p:sp>
+        <p:nvSpPr>
+          <p:cNvPr id="10" name="TextBox 9"/>
           <p:cNvSpPr txBox="1"/>
           <p:nvPr/>
         </p:nvSpPr>
         <p:spPr>
           <a:xfrm>
-            <a:off x="1234440" y="2377440"/>
-            <a:ext cx="4526280" cy="1005840"/>
+            <a:off x="822959" y="2221992"/>
+            <a:ext cx="4846320" cy="292608"/>
           </a:xfrm>
           <a:prstGeom prst="rect">
             <a:avLst/>
@@ -14649,7 +15454,7 @@
           <a:lstStyle/>
           <a:p>
             <a:pPr algn="l">
-              <a:defRPr sz="1300" b="0">
+              <a:defRPr sz="1250" b="1">
                 <a:solidFill>
                   <a:srgbClr val="334155"/>
                 </a:solidFill>
@@ -14657,21 +15462,21 @@
               </a:defRPr>
             </a:pPr>
             <a:r>
-              <a:t>End-to-end Cray smoke: probe → render → concretize → build (PrgEnv-gnu · cray-mpich · ROCm)</a:t>
-            </a:r>
-          </a:p>
-        </p:txBody>
-      </p:sp>
-      <p:sp>
-        <p:nvSpPr>
-          <p:cNvPr id="10" name="TextBox 9"/>
+              <a:t>NAVY · HPE Cray EX4000</a:t>
+            </a:r>
+          </a:p>
+        </p:txBody>
+      </p:sp>
+      <p:sp>
+        <p:nvSpPr>
+          <p:cNvPr id="11" name="TextBox 10"/>
           <p:cNvSpPr txBox="1"/>
           <p:nvPr/>
         </p:nvSpPr>
         <p:spPr>
           <a:xfrm>
-            <a:off x="822960" y="3429000"/>
-            <a:ext cx="365760" cy="457200"/>
+            <a:off x="822959" y="2578608"/>
+            <a:ext cx="4846320" cy="274320"/>
           </a:xfrm>
           <a:prstGeom prst="rect">
             <a:avLst/>
@@ -14685,29 +15490,29 @@
           <a:lstStyle/>
           <a:p>
             <a:pPr algn="l">
-              <a:defRPr sz="1600" b="1">
-                <a:solidFill>
-                  <a:srgbClr val="15803D"/>
-                </a:solidFill>
-                <a:latin typeface="Avenir Next"/>
-              </a:defRPr>
-            </a:pPr>
-            <a:r>
-              <a:t>✓</a:t>
-            </a:r>
-          </a:p>
-        </p:txBody>
-      </p:sp>
-      <p:sp>
-        <p:nvSpPr>
-          <p:cNvPr id="11" name="TextBox 10"/>
+              <a:defRPr sz="1200" b="0">
+                <a:solidFill>
+                  <a:srgbClr val="64748B"/>
+                </a:solidFill>
+                <a:latin typeface="Avenir Next"/>
+              </a:defRPr>
+            </a:pPr>
+            <a:r>
+              <a:t>SLES · AMD Instinct MI300A APU · 96 cores</a:t>
+            </a:r>
+          </a:p>
+        </p:txBody>
+      </p:sp>
+      <p:sp>
+        <p:nvSpPr>
+          <p:cNvPr id="12" name="TextBox 11"/>
           <p:cNvSpPr txBox="1"/>
           <p:nvPr/>
         </p:nvSpPr>
         <p:spPr>
           <a:xfrm>
-            <a:off x="1234440" y="3429000"/>
-            <a:ext cx="4526280" cy="1005840"/>
+            <a:off x="822959" y="2907791"/>
+            <a:ext cx="4846320" cy="274320"/>
           </a:xfrm>
           <a:prstGeom prst="rect">
             <a:avLst/>
@@ -14721,101 +15526,29 @@
           <a:lstStyle/>
           <a:p>
             <a:pPr algn="l">
-              <a:defRPr sz="1300" b="0">
-                <a:solidFill>
-                  <a:srgbClr val="334155"/>
-                </a:solidFill>
-                <a:latin typeface="Avenir Next"/>
-              </a:defRPr>
-            </a:pPr>
-            <a:r>
-              <a:t>Second system validated the generic-Linux path and hardened the prober</a:t>
-            </a:r>
-          </a:p>
-        </p:txBody>
-      </p:sp>
-      <p:sp>
-        <p:nvSpPr>
-          <p:cNvPr id="12" name="TextBox 11"/>
-          <p:cNvSpPr txBox="1"/>
-          <p:nvPr/>
-        </p:nvSpPr>
-        <p:spPr>
-          <a:xfrm>
-            <a:off x="822960" y="4480560"/>
-            <a:ext cx="365760" cy="457200"/>
-          </a:xfrm>
-          <a:prstGeom prst="rect">
-            <a:avLst/>
-          </a:prstGeom>
-          <a:noFill/>
-        </p:spPr>
-        <p:txBody>
-          <a:bodyPr wrap="square" anchor="t">
-            <a:spAutoFit/>
-          </a:bodyPr>
-          <a:lstStyle/>
-          <a:p>
-            <a:pPr algn="l">
-              <a:defRPr sz="1600" b="1">
-                <a:solidFill>
-                  <a:srgbClr val="15803D"/>
-                </a:solidFill>
-                <a:latin typeface="Avenir Next"/>
-              </a:defRPr>
-            </a:pPr>
-            <a:r>
-              <a:t>✓</a:t>
-            </a:r>
-          </a:p>
-        </p:txBody>
-      </p:sp>
-      <p:sp>
-        <p:nvSpPr>
-          <p:cNvPr id="13" name="TextBox 12"/>
-          <p:cNvSpPr txBox="1"/>
-          <p:nvPr/>
-        </p:nvSpPr>
-        <p:spPr>
-          <a:xfrm>
-            <a:off x="1234440" y="4480560"/>
-            <a:ext cx="4526280" cy="1005840"/>
-          </a:xfrm>
-          <a:prstGeom prst="rect">
-            <a:avLst/>
-          </a:prstGeom>
-          <a:noFill/>
-        </p:spPr>
-        <p:txBody>
-          <a:bodyPr wrap="square" anchor="t">
-            <a:spAutoFit/>
-          </a:bodyPr>
-          <a:lstStyle/>
-          <a:p>
-            <a:pPr algn="l">
-              <a:defRPr sz="1300" b="0">
-                <a:solidFill>
-                  <a:srgbClr val="334155"/>
-                </a:solidFill>
-                <a:latin typeface="Avenir Next"/>
-              </a:defRPr>
-            </a:pPr>
-            <a:r>
-              <a:t>Science stack renders clean today: four lanes, two-version roster</a:t>
-            </a:r>
-          </a:p>
-        </p:txBody>
-      </p:sp>
-      <p:sp>
-        <p:nvSpPr>
-          <p:cNvPr id="14" name="Rounded Rectangle 13"/>
+              <a:defRPr sz="1200" b="0">
+                <a:solidFill>
+                  <a:srgbClr val="64748B"/>
+                </a:solidFill>
+                <a:latin typeface="Avenir Next"/>
+              </a:defRPr>
+            </a:pPr>
+            <a:r>
+              <a:t>AI/ML nodes: 4 × AMD MI300A (gfx942)</a:t>
+            </a:r>
+          </a:p>
+        </p:txBody>
+      </p:sp>
+      <p:sp>
+        <p:nvSpPr>
+          <p:cNvPr id="13" name="Rounded Rectangle 12"/>
           <p:cNvSpPr/>
           <p:nvPr/>
         </p:nvSpPr>
         <p:spPr>
           <a:xfrm>
-            <a:off x="6263640" y="1645920"/>
-            <a:ext cx="5349240" cy="4480560"/>
+            <a:off x="6263640" y="1627632"/>
+            <a:ext cx="5394960" cy="1783080"/>
           </a:xfrm>
           <a:prstGeom prst="roundRect">
             <a:avLst/>
@@ -14852,14 +15585,58 @@
       </p:sp>
       <p:sp>
         <p:nvSpPr>
+          <p:cNvPr id="14" name="Rectangle 13"/>
+          <p:cNvSpPr/>
+          <p:nvPr/>
+        </p:nvSpPr>
+        <p:spPr>
+          <a:xfrm>
+            <a:off x="6263640" y="1627632"/>
+            <a:ext cx="109728" cy="1783080"/>
+          </a:xfrm>
+          <a:prstGeom prst="rect">
+            <a:avLst/>
+          </a:prstGeom>
+          <a:solidFill>
+            <a:srgbClr val="2563EB"/>
+          </a:solidFill>
+          <a:ln>
+            <a:noFill/>
+          </a:ln>
+          <a:effectLst/>
+        </p:spPr>
+        <p:style>
+          <a:lnRef idx="1">
+            <a:schemeClr val="accent1"/>
+          </a:lnRef>
+          <a:fillRef idx="3">
+            <a:schemeClr val="accent1"/>
+          </a:fillRef>
+          <a:effectRef idx="2">
+            <a:schemeClr val="accent1"/>
+          </a:effectRef>
+          <a:fontRef idx="minor">
+            <a:schemeClr val="lt1"/>
+          </a:fontRef>
+        </p:style>
+        <p:txBody>
+          <a:bodyPr rtlCol="0" anchor="ctr"/>
+          <a:lstStyle/>
+          <a:p>
+            <a:pPr algn="ctr"/>
+          </a:p>
+        </p:txBody>
+      </p:sp>
+      <p:sp>
+        <p:nvSpPr>
           <p:cNvPr id="15" name="TextBox 14"/>
           <p:cNvSpPr txBox="1"/>
           <p:nvPr/>
         </p:nvSpPr>
         <p:spPr>
           <a:xfrm>
-            <a:off x="6537960" y="1828800"/>
-            <a:ext cx="4846320" cy="457200"/>
+            <a:off x="6537959" y="1773936"/>
+            <a:ext cx="1920240" cy="365760"/>
           </a:xfrm>
           <a:prstGeom prst="rect">
             <a:avLst/>
@@ -14875,13 +15652,13 @@
             <a:pPr algn="l">
               <a:defRPr sz="1700" b="1">
                 <a:solidFill>
-                  <a:srgbClr val="D97706"/>
-                </a:solidFill>
-                <a:latin typeface="Avenir Next"/>
-              </a:defRPr>
-            </a:pPr>
-            <a:r>
-              <a:t>Next</a:t>
+                  <a:srgbClr val="0F172A"/>
+                </a:solidFill>
+                <a:latin typeface="Avenir Next"/>
+              </a:defRPr>
+            </a:pPr>
+            <a:r>
+              <a:t>Fran</a:t>
             </a:r>
           </a:p>
         </p:txBody>
@@ -14894,8 +15671,8 @@
         </p:nvSpPr>
         <p:spPr>
           <a:xfrm>
-            <a:off x="6537960" y="2377440"/>
-            <a:ext cx="365760" cy="457200"/>
+            <a:off x="8412480" y="1801368"/>
+            <a:ext cx="2971800" cy="320040"/>
           </a:xfrm>
           <a:prstGeom prst="rect">
             <a:avLst/>
@@ -14908,16 +15685,16 @@
           </a:bodyPr>
           <a:lstStyle/>
           <a:p>
-            <a:pPr algn="l">
-              <a:defRPr sz="1600" b="1">
-                <a:solidFill>
-                  <a:srgbClr val="D97706"/>
-                </a:solidFill>
-                <a:latin typeface="Avenir Next"/>
-              </a:defRPr>
-            </a:pPr>
-            <a:r>
-              <a:t>→</a:t>
+            <a:pPr algn="r">
+              <a:defRPr sz="1150" b="1">
+                <a:solidFill>
+                  <a:srgbClr val="2563EB"/>
+                </a:solidFill>
+                <a:latin typeface="Avenir Next"/>
+              </a:defRPr>
+            </a:pPr>
+            <a:r>
+              <a:t>SECOND CRAY SITE · NEWEST NVIDIA</a:t>
             </a:r>
           </a:p>
         </p:txBody>
@@ -14930,8 +15707,8 @@
         </p:nvSpPr>
         <p:spPr>
           <a:xfrm>
-            <a:off x="6949440" y="2377440"/>
-            <a:ext cx="4434840" cy="1005840"/>
+            <a:off x="6537959" y="2221992"/>
+            <a:ext cx="4846320" cy="292608"/>
           </a:xfrm>
           <a:prstGeom prst="rect">
             <a:avLst/>
@@ -14945,7 +15722,7 @@
           <a:lstStyle/>
           <a:p>
             <a:pPr algn="l">
-              <a:defRPr sz="1300" b="0">
+              <a:defRPr sz="1250" b="1">
                 <a:solidFill>
                   <a:srgbClr val="334155"/>
                 </a:solidFill>
@@ -14953,7 +15730,7 @@
               </a:defRPr>
             </a:pPr>
             <a:r>
-              <a:t>Build the science lanes on the Cray and Linux systems; verify the module/view front door</a:t>
+              <a:t>ARL · HPE Cray EX4000</a:t>
             </a:r>
           </a:p>
         </p:txBody>
@@ -14966,8 +15743,8 @@
         </p:nvSpPr>
         <p:spPr>
           <a:xfrm>
-            <a:off x="6537960" y="3429000"/>
-            <a:ext cx="365760" cy="457200"/>
+            <a:off x="6537959" y="2578608"/>
+            <a:ext cx="4846320" cy="274320"/>
           </a:xfrm>
           <a:prstGeom prst="rect">
             <a:avLst/>
@@ -14981,15 +15758,15 @@
           <a:lstStyle/>
           <a:p>
             <a:pPr algn="l">
-              <a:defRPr sz="1600" b="1">
-                <a:solidFill>
-                  <a:srgbClr val="D97706"/>
-                </a:solidFill>
-                <a:latin typeface="Avenir Next"/>
-              </a:defRPr>
-            </a:pPr>
-            <a:r>
-              <a:t>→</a:t>
+              <a:defRPr sz="1200" b="0">
+                <a:solidFill>
+                  <a:srgbClr val="64748B"/>
+                </a:solidFill>
+                <a:latin typeface="Avenir Next"/>
+              </a:defRPr>
+            </a:pPr>
+            <a:r>
+              <a:t>RHEL 9 · AMD EPYC Genoa · Slingshot-11</a:t>
             </a:r>
           </a:p>
         </p:txBody>
@@ -15002,8 +15779,8 @@
         </p:nvSpPr>
         <p:spPr>
           <a:xfrm>
-            <a:off x="6949440" y="3429000"/>
-            <a:ext cx="4434840" cy="1005840"/>
+            <a:off x="6537959" y="2907791"/>
+            <a:ext cx="4846320" cy="274320"/>
           </a:xfrm>
           <a:prstGeom prst="rect">
             <a:avLst/>
@@ -15017,29 +15794,117 @@
           <a:lstStyle/>
           <a:p>
             <a:pPr algn="l">
-              <a:defRPr sz="1300" b="0">
-                <a:solidFill>
-                  <a:srgbClr val="334155"/>
-                </a:solidFill>
-                <a:latin typeface="Avenir Next"/>
-              </a:defRPr>
-            </a:pPr>
-            <a:r>
-              <a:t>Encode module compatibility checks for multi-version package chains</a:t>
-            </a:r>
-          </a:p>
-        </p:txBody>
-      </p:sp>
-      <p:sp>
-        <p:nvSpPr>
-          <p:cNvPr id="20" name="TextBox 19"/>
+              <a:defRPr sz="1200" b="0">
+                <a:solidFill>
+                  <a:srgbClr val="64748B"/>
+                </a:solidFill>
+                <a:latin typeface="Avenir Next"/>
+              </a:defRPr>
+            </a:pPr>
+            <a:r>
+              <a:t>AI/ML nodes: NVIDIA H200</a:t>
+            </a:r>
+          </a:p>
+        </p:txBody>
+      </p:sp>
+      <p:sp>
+        <p:nvSpPr>
+          <p:cNvPr id="20" name="Rounded Rectangle 19"/>
+          <p:cNvSpPr/>
+          <p:nvPr/>
+        </p:nvSpPr>
+        <p:spPr>
+          <a:xfrm>
+            <a:off x="548640" y="3685032"/>
+            <a:ext cx="5394960" cy="1783080"/>
+          </a:xfrm>
+          <a:prstGeom prst="roundRect">
+            <a:avLst/>
+          </a:prstGeom>
+          <a:solidFill>
+            <a:srgbClr val="F1F5F9"/>
+          </a:solidFill>
+          <a:ln>
+            <a:noFill/>
+          </a:ln>
+          <a:effectLst/>
+        </p:spPr>
+        <p:style>
+          <a:lnRef idx="1">
+            <a:schemeClr val="accent1"/>
+          </a:lnRef>
+          <a:fillRef idx="3">
+            <a:schemeClr val="accent1"/>
+          </a:fillRef>
+          <a:effectRef idx="2">
+            <a:schemeClr val="accent1"/>
+          </a:effectRef>
+          <a:fontRef idx="minor">
+            <a:schemeClr val="lt1"/>
+          </a:fontRef>
+        </p:style>
+        <p:txBody>
+          <a:bodyPr rtlCol="0" anchor="ctr"/>
+          <a:lstStyle/>
+          <a:p>
+            <a:pPr algn="ctr"/>
+          </a:p>
+        </p:txBody>
+      </p:sp>
+      <p:sp>
+        <p:nvSpPr>
+          <p:cNvPr id="21" name="Rectangle 20"/>
+          <p:cNvSpPr/>
+          <p:nvPr/>
+        </p:nvSpPr>
+        <p:spPr>
+          <a:xfrm>
+            <a:off x="548640" y="3685032"/>
+            <a:ext cx="109728" cy="1783080"/>
+          </a:xfrm>
+          <a:prstGeom prst="rect">
+            <a:avLst/>
+          </a:prstGeom>
+          <a:solidFill>
+            <a:srgbClr val="0D9488"/>
+          </a:solidFill>
+          <a:ln>
+            <a:noFill/>
+          </a:ln>
+          <a:effectLst/>
+        </p:spPr>
+        <p:style>
+          <a:lnRef idx="1">
+            <a:schemeClr val="accent1"/>
+          </a:lnRef>
+          <a:fillRef idx="3">
+            <a:schemeClr val="accent1"/>
+          </a:fillRef>
+          <a:effectRef idx="2">
+            <a:schemeClr val="accent1"/>
+          </a:effectRef>
+          <a:fontRef idx="minor">
+            <a:schemeClr val="lt1"/>
+          </a:fontRef>
+        </p:style>
+        <p:txBody>
+          <a:bodyPr rtlCol="0" anchor="ctr"/>
+          <a:lstStyle/>
+          <a:p>
+            <a:pPr algn="ctr"/>
+          </a:p>
+        </p:txBody>
+      </p:sp>
+      <p:sp>
+        <p:nvSpPr>
+          <p:cNvPr id="22" name="TextBox 21"/>
           <p:cNvSpPr txBox="1"/>
           <p:nvPr/>
         </p:nvSpPr>
         <p:spPr>
           <a:xfrm>
-            <a:off x="6537960" y="4480560"/>
-            <a:ext cx="365760" cy="457200"/>
+            <a:off x="822959" y="3831336"/>
+            <a:ext cx="1920240" cy="365760"/>
           </a:xfrm>
           <a:prstGeom prst="rect">
             <a:avLst/>
@@ -15053,29 +15918,29 @@
           <a:lstStyle/>
           <a:p>
             <a:pPr algn="l">
-              <a:defRPr sz="1600" b="1">
-                <a:solidFill>
-                  <a:srgbClr val="D97706"/>
-                </a:solidFill>
-                <a:latin typeface="Avenir Next"/>
-              </a:defRPr>
-            </a:pPr>
-            <a:r>
-              <a:t>→</a:t>
-            </a:r>
-          </a:p>
-        </p:txBody>
-      </p:sp>
-      <p:sp>
-        <p:nvSpPr>
-          <p:cNvPr id="21" name="TextBox 20"/>
+              <a:defRPr sz="1700" b="1">
+                <a:solidFill>
+                  <a:srgbClr val="0F172A"/>
+                </a:solidFill>
+                <a:latin typeface="Avenir Next"/>
+              </a:defRPr>
+            </a:pPr>
+            <a:r>
+              <a:t>Raider</a:t>
+            </a:r>
+          </a:p>
+        </p:txBody>
+      </p:sp>
+      <p:sp>
+        <p:nvSpPr>
+          <p:cNvPr id="23" name="TextBox 22"/>
           <p:cNvSpPr txBox="1"/>
           <p:nvPr/>
         </p:nvSpPr>
         <p:spPr>
           <a:xfrm>
-            <a:off x="6949440" y="4480560"/>
-            <a:ext cx="4434840" cy="1005840"/>
+            <a:off x="2697480" y="3858768"/>
+            <a:ext cx="2971800" cy="320040"/>
           </a:xfrm>
           <a:prstGeom prst="rect">
             <a:avLst/>
@@ -15088,8 +15953,44 @@
           </a:bodyPr>
           <a:lstStyle/>
           <a:p>
+            <a:pPr algn="r">
+              <a:defRPr sz="1150" b="1">
+                <a:solidFill>
+                  <a:srgbClr val="0D9488"/>
+                </a:solidFill>
+                <a:latin typeface="Avenir Next"/>
+              </a:defRPr>
+            </a:pPr>
+            <a:r>
+              <a:t>GENERIC LINUX · CUDA</a:t>
+            </a:r>
+          </a:p>
+        </p:txBody>
+      </p:sp>
+      <p:sp>
+        <p:nvSpPr>
+          <p:cNvPr id="24" name="TextBox 23"/>
+          <p:cNvSpPr txBox="1"/>
+          <p:nvPr/>
+        </p:nvSpPr>
+        <p:spPr>
+          <a:xfrm>
+            <a:off x="822959" y="4279392"/>
+            <a:ext cx="4846320" cy="292608"/>
+          </a:xfrm>
+          <a:prstGeom prst="rect">
+            <a:avLst/>
+          </a:prstGeom>
+          <a:noFill/>
+        </p:spPr>
+        <p:txBody>
+          <a:bodyPr wrap="square" anchor="t">
+            <a:spAutoFit/>
+          </a:bodyPr>
+          <a:lstStyle/>
+          <a:p>
             <a:pPr algn="l">
-              <a:defRPr sz="1300" b="0">
+              <a:defRPr sz="1250" b="1">
                 <a:solidFill>
                   <a:srgbClr val="334155"/>
                 </a:solidFill>
@@ -15097,7 +15998,437 @@
               </a:defRPr>
             </a:pPr>
             <a:r>
-              <a:t>Release process: build caches, lockfiles, release manifest</a:t>
+              <a:t>AFRL · Penguin TrueHPC</a:t>
+            </a:r>
+          </a:p>
+        </p:txBody>
+      </p:sp>
+      <p:sp>
+        <p:nvSpPr>
+          <p:cNvPr id="25" name="TextBox 24"/>
+          <p:cNvSpPr txBox="1"/>
+          <p:nvPr/>
+        </p:nvSpPr>
+        <p:spPr>
+          <a:xfrm>
+            <a:off x="822959" y="4636008"/>
+            <a:ext cx="4846320" cy="274320"/>
+          </a:xfrm>
+          <a:prstGeom prst="rect">
+            <a:avLst/>
+          </a:prstGeom>
+          <a:noFill/>
+        </p:spPr>
+        <p:txBody>
+          <a:bodyPr wrap="square" anchor="t">
+            <a:spAutoFit/>
+          </a:bodyPr>
+          <a:lstStyle/>
+          <a:p>
+            <a:pPr algn="l">
+              <a:defRPr sz="1200" b="0">
+                <a:solidFill>
+                  <a:srgbClr val="64748B"/>
+                </a:solidFill>
+                <a:latin typeface="Avenir Next"/>
+              </a:defRPr>
+            </a:pPr>
+            <a:r>
+              <a:t>RHEL 8 · AMD EPYC 7713 Milan · 128 cores</a:t>
+            </a:r>
+          </a:p>
+        </p:txBody>
+      </p:sp>
+      <p:sp>
+        <p:nvSpPr>
+          <p:cNvPr id="26" name="TextBox 25"/>
+          <p:cNvSpPr txBox="1"/>
+          <p:nvPr/>
+        </p:nvSpPr>
+        <p:spPr>
+          <a:xfrm>
+            <a:off x="822959" y="4965192"/>
+            <a:ext cx="4846320" cy="274320"/>
+          </a:xfrm>
+          <a:prstGeom prst="rect">
+            <a:avLst/>
+          </a:prstGeom>
+          <a:noFill/>
+        </p:spPr>
+        <p:txBody>
+          <a:bodyPr wrap="square" anchor="t">
+            <a:spAutoFit/>
+          </a:bodyPr>
+          <a:lstStyle/>
+          <a:p>
+            <a:pPr algn="l">
+              <a:defRPr sz="1200" b="0">
+                <a:solidFill>
+                  <a:srgbClr val="64748B"/>
+                </a:solidFill>
+                <a:latin typeface="Avenir Next"/>
+              </a:defRPr>
+            </a:pPr>
+            <a:r>
+              <a:t>MLA nodes: 4 × NVIDIA A100 SXM4</a:t>
+            </a:r>
+          </a:p>
+        </p:txBody>
+      </p:sp>
+      <p:sp>
+        <p:nvSpPr>
+          <p:cNvPr id="27" name="Rounded Rectangle 26"/>
+          <p:cNvSpPr/>
+          <p:nvPr/>
+        </p:nvSpPr>
+        <p:spPr>
+          <a:xfrm>
+            <a:off x="6263640" y="3685032"/>
+            <a:ext cx="5394960" cy="1783080"/>
+          </a:xfrm>
+          <a:prstGeom prst="roundRect">
+            <a:avLst/>
+          </a:prstGeom>
+          <a:solidFill>
+            <a:srgbClr val="F1F5F9"/>
+          </a:solidFill>
+          <a:ln>
+            <a:noFill/>
+          </a:ln>
+          <a:effectLst/>
+        </p:spPr>
+        <p:style>
+          <a:lnRef idx="1">
+            <a:schemeClr val="accent1"/>
+          </a:lnRef>
+          <a:fillRef idx="3">
+            <a:schemeClr val="accent1"/>
+          </a:fillRef>
+          <a:effectRef idx="2">
+            <a:schemeClr val="accent1"/>
+          </a:effectRef>
+          <a:fontRef idx="minor">
+            <a:schemeClr val="lt1"/>
+          </a:fontRef>
+        </p:style>
+        <p:txBody>
+          <a:bodyPr rtlCol="0" anchor="ctr"/>
+          <a:lstStyle/>
+          <a:p>
+            <a:pPr algn="ctr"/>
+          </a:p>
+        </p:txBody>
+      </p:sp>
+      <p:sp>
+        <p:nvSpPr>
+          <p:cNvPr id="28" name="Rectangle 27"/>
+          <p:cNvSpPr/>
+          <p:nvPr/>
+        </p:nvSpPr>
+        <p:spPr>
+          <a:xfrm>
+            <a:off x="6263640" y="3685032"/>
+            <a:ext cx="109728" cy="1783080"/>
+          </a:xfrm>
+          <a:prstGeom prst="rect">
+            <a:avLst/>
+          </a:prstGeom>
+          <a:solidFill>
+            <a:srgbClr val="D97706"/>
+          </a:solidFill>
+          <a:ln>
+            <a:noFill/>
+          </a:ln>
+          <a:effectLst/>
+        </p:spPr>
+        <p:style>
+          <a:lnRef idx="1">
+            <a:schemeClr val="accent1"/>
+          </a:lnRef>
+          <a:fillRef idx="3">
+            <a:schemeClr val="accent1"/>
+          </a:fillRef>
+          <a:effectRef idx="2">
+            <a:schemeClr val="accent1"/>
+          </a:effectRef>
+          <a:fontRef idx="minor">
+            <a:schemeClr val="lt1"/>
+          </a:fontRef>
+        </p:style>
+        <p:txBody>
+          <a:bodyPr rtlCol="0" anchor="ctr"/>
+          <a:lstStyle/>
+          <a:p>
+            <a:pPr algn="ctr"/>
+          </a:p>
+        </p:txBody>
+      </p:sp>
+      <p:sp>
+        <p:nvSpPr>
+          <p:cNvPr id="29" name="TextBox 28"/>
+          <p:cNvSpPr txBox="1"/>
+          <p:nvPr/>
+        </p:nvSpPr>
+        <p:spPr>
+          <a:xfrm>
+            <a:off x="6537959" y="3831336"/>
+            <a:ext cx="1920240" cy="365760"/>
+          </a:xfrm>
+          <a:prstGeom prst="rect">
+            <a:avLst/>
+          </a:prstGeom>
+          <a:noFill/>
+        </p:spPr>
+        <p:txBody>
+          <a:bodyPr wrap="square" anchor="t">
+            <a:spAutoFit/>
+          </a:bodyPr>
+          <a:lstStyle/>
+          <a:p>
+            <a:pPr algn="l">
+              <a:defRPr sz="1700" b="1">
+                <a:solidFill>
+                  <a:srgbClr val="0F172A"/>
+                </a:solidFill>
+                <a:latin typeface="Avenir Next"/>
+              </a:defRPr>
+            </a:pPr>
+            <a:r>
+              <a:t>Wheat</a:t>
+            </a:r>
+          </a:p>
+        </p:txBody>
+      </p:sp>
+      <p:sp>
+        <p:nvSpPr>
+          <p:cNvPr id="30" name="TextBox 29"/>
+          <p:cNvSpPr txBox="1"/>
+          <p:nvPr/>
+        </p:nvSpPr>
+        <p:spPr>
+          <a:xfrm>
+            <a:off x="8412480" y="3858768"/>
+            <a:ext cx="2971800" cy="320040"/>
+          </a:xfrm>
+          <a:prstGeom prst="rect">
+            <a:avLst/>
+          </a:prstGeom>
+          <a:noFill/>
+        </p:spPr>
+        <p:txBody>
+          <a:bodyPr wrap="square" anchor="t">
+            <a:spAutoFit/>
+          </a:bodyPr>
+          <a:lstStyle/>
+          <a:p>
+            <a:pPr algn="r">
+              <a:defRPr sz="1150" b="1">
+                <a:solidFill>
+                  <a:srgbClr val="D97706"/>
+                </a:solidFill>
+                <a:latin typeface="Avenir Next"/>
+              </a:defRPr>
+            </a:pPr>
+            <a:r>
+              <a:t>INTEL CPU · COMPOSABLE GPU</a:t>
+            </a:r>
+          </a:p>
+        </p:txBody>
+      </p:sp>
+      <p:sp>
+        <p:nvSpPr>
+          <p:cNvPr id="31" name="TextBox 30"/>
+          <p:cNvSpPr txBox="1"/>
+          <p:nvPr/>
+        </p:nvSpPr>
+        <p:spPr>
+          <a:xfrm>
+            <a:off x="6537959" y="4279392"/>
+            <a:ext cx="4846320" cy="292608"/>
+          </a:xfrm>
+          <a:prstGeom prst="rect">
+            <a:avLst/>
+          </a:prstGeom>
+          <a:noFill/>
+        </p:spPr>
+        <p:txBody>
+          <a:bodyPr wrap="square" anchor="t">
+            <a:spAutoFit/>
+          </a:bodyPr>
+          <a:lstStyle/>
+          <a:p>
+            <a:pPr algn="l">
+              <a:defRPr sz="1250" b="1">
+                <a:solidFill>
+                  <a:srgbClr val="334155"/>
+                </a:solidFill>
+                <a:latin typeface="Avenir Next"/>
+              </a:defRPr>
+            </a:pPr>
+            <a:r>
+              <a:t>ERDC · Liqid composable</a:t>
+            </a:r>
+          </a:p>
+        </p:txBody>
+      </p:sp>
+      <p:sp>
+        <p:nvSpPr>
+          <p:cNvPr id="32" name="TextBox 31"/>
+          <p:cNvSpPr txBox="1"/>
+          <p:nvPr/>
+        </p:nvSpPr>
+        <p:spPr>
+          <a:xfrm>
+            <a:off x="6537959" y="4636008"/>
+            <a:ext cx="4846320" cy="274320"/>
+          </a:xfrm>
+          <a:prstGeom prst="rect">
+            <a:avLst/>
+          </a:prstGeom>
+          <a:noFill/>
+        </p:spPr>
+        <p:txBody>
+          <a:bodyPr wrap="square" anchor="t">
+            <a:spAutoFit/>
+          </a:bodyPr>
+          <a:lstStyle/>
+          <a:p>
+            <a:pPr algn="l">
+              <a:defRPr sz="1200" b="0">
+                <a:solidFill>
+                  <a:srgbClr val="64748B"/>
+                </a:solidFill>
+                <a:latin typeface="Avenir Next"/>
+              </a:defRPr>
+            </a:pPr>
+            <a:r>
+              <a:t>RHEL 8 · Intel Xeon 9242 Cascade Lake · 92 cores</a:t>
+            </a:r>
+          </a:p>
+        </p:txBody>
+      </p:sp>
+      <p:sp>
+        <p:nvSpPr>
+          <p:cNvPr id="33" name="TextBox 32"/>
+          <p:cNvSpPr txBox="1"/>
+          <p:nvPr/>
+        </p:nvSpPr>
+        <p:spPr>
+          <a:xfrm>
+            <a:off x="6537959" y="4965192"/>
+            <a:ext cx="4846320" cy="274320"/>
+          </a:xfrm>
+          <a:prstGeom prst="rect">
+            <a:avLst/>
+          </a:prstGeom>
+          <a:noFill/>
+        </p:spPr>
+        <p:txBody>
+          <a:bodyPr wrap="square" anchor="t">
+            <a:spAutoFit/>
+          </a:bodyPr>
+          <a:lstStyle/>
+          <a:p>
+            <a:pPr algn="l">
+              <a:defRPr sz="1200" b="0">
+                <a:solidFill>
+                  <a:srgbClr val="64748B"/>
+                </a:solidFill>
+                <a:latin typeface="Avenir Next"/>
+              </a:defRPr>
+            </a:pPr>
+            <a:r>
+              <a:t>MLA nodes: 4 or 6 × NVIDIA A100</a:t>
+            </a:r>
+          </a:p>
+        </p:txBody>
+      </p:sp>
+      <p:sp>
+        <p:nvSpPr>
+          <p:cNvPr id="34" name="Rounded Rectangle 33"/>
+          <p:cNvSpPr/>
+          <p:nvPr/>
+        </p:nvSpPr>
+        <p:spPr>
+          <a:xfrm>
+            <a:off x="548640" y="5806440"/>
+            <a:ext cx="11091672" cy="530352"/>
+          </a:xfrm>
+          <a:prstGeom prst="roundRect">
+            <a:avLst/>
+          </a:prstGeom>
+          <a:solidFill>
+            <a:srgbClr val="E2E8F0"/>
+          </a:solidFill>
+          <a:ln>
+            <a:noFill/>
+          </a:ln>
+          <a:effectLst/>
+        </p:spPr>
+        <p:style>
+          <a:lnRef idx="1">
+            <a:schemeClr val="accent1"/>
+          </a:lnRef>
+          <a:fillRef idx="3">
+            <a:schemeClr val="accent1"/>
+          </a:fillRef>
+          <a:effectRef idx="2">
+            <a:schemeClr val="accent1"/>
+          </a:effectRef>
+          <a:fontRef idx="minor">
+            <a:schemeClr val="lt1"/>
+          </a:fontRef>
+        </p:style>
+        <p:txBody>
+          <a:bodyPr rtlCol="0" anchor="ctr" wrap="square" lIns="109728" rIns="109728"/>
+          <a:lstStyle/>
+          <a:p>
+            <a:pPr algn="ctr">
+              <a:defRPr sz="1300" b="1">
+                <a:solidFill>
+                  <a:srgbClr val="0F172A"/>
+                </a:solidFill>
+                <a:latin typeface="Avenir Next"/>
+              </a:defRPr>
+            </a:pPr>
+            <a:r>
+              <a:t>Coverage: SLES + RHEL 8 + RHEL 9 · AMD + Intel CPUs · AMD MI300A + NVIDIA H200 and A100</a:t>
+            </a:r>
+          </a:p>
+        </p:txBody>
+      </p:sp>
+      <p:sp>
+        <p:nvSpPr>
+          <p:cNvPr id="35" name="TextBox 34"/>
+          <p:cNvSpPr txBox="1"/>
+          <p:nvPr/>
+        </p:nvSpPr>
+        <p:spPr>
+          <a:xfrm>
+            <a:off x="548640" y="6419088"/>
+            <a:ext cx="11064240" cy="219456"/>
+          </a:xfrm>
+          <a:prstGeom prst="rect">
+            <a:avLst/>
+          </a:prstGeom>
+          <a:noFill/>
+        </p:spPr>
+        <p:txBody>
+          <a:bodyPr wrap="square" anchor="t">
+            <a:spAutoFit/>
+          </a:bodyPr>
+          <a:lstStyle/>
+          <a:p>
+            <a:pPr algn="r">
+              <a:defRPr sz="950" b="0">
+                <a:solidFill>
+                  <a:srgbClr val="64748B"/>
+                </a:solidFill>
+                <a:latin typeface="Avenir Next"/>
+              </a:defRPr>
+            </a:pPr>
+            <a:r>
+              <a:t>The accelerated (AI/ML, MLA) node types are the pilot target on each system. Source: centers.hpc.mil hardware inventory, July 2026; Fran accelerator detail from program info.</a:t>
             </a:r>
           </a:p>
         </p:txBody>
@@ -15195,7 +16526,7 @@
               </a:defRPr>
             </a:pPr>
             <a:r>
-              <a:t>APPENDIX · HOW THE LAYERS STACK</a:t>
+              <a:t>WHERE THE PIPELINE IS TODAY</a:t>
             </a:r>
           </a:p>
         </p:txBody>
@@ -15231,7 +16562,7 @@
               </a:defRPr>
             </a:pPr>
             <a:r>
-              <a:t>What each lane exposes</a:t>
+              <a:t>Status and next steps</a:t>
             </a:r>
           </a:p>
         </p:txBody>
@@ -15282,56 +16613,20 @@
       </p:sp>
       <p:sp>
         <p:nvSpPr>
-          <p:cNvPr id="6" name="TextBox 5"/>
-          <p:cNvSpPr txBox="1"/>
-          <p:nvPr/>
-        </p:nvSpPr>
-        <p:spPr>
-          <a:xfrm>
-            <a:off x="548640" y="1389888"/>
-            <a:ext cx="11064240" cy="274320"/>
-          </a:xfrm>
-          <a:prstGeom prst="rect">
-            <a:avLst/>
-          </a:prstGeom>
-          <a:noFill/>
-        </p:spPr>
-        <p:txBody>
-          <a:bodyPr wrap="square" anchor="t">
-            <a:spAutoFit/>
-          </a:bodyPr>
-          <a:lstStyle/>
-          <a:p>
-            <a:pPr algn="ctr">
-              <a:defRPr sz="1150" b="1">
-                <a:solidFill>
-                  <a:srgbClr val="64748B"/>
-                </a:solidFill>
-                <a:latin typeface="Avenir Next"/>
-              </a:defRPr>
-            </a:pPr>
-            <a:r>
-              <a:t>CHOOSE EXACTLY ONE LANE</a:t>
-            </a:r>
-          </a:p>
-        </p:txBody>
-      </p:sp>
-      <p:sp>
-        <p:nvSpPr>
-          <p:cNvPr id="7" name="Rounded Rectangle 6"/>
+          <p:cNvPr id="6" name="Rounded Rectangle 5"/>
           <p:cNvSpPr/>
           <p:nvPr/>
         </p:nvSpPr>
         <p:spPr>
           <a:xfrm>
-            <a:off x="548640" y="1719072"/>
-            <a:ext cx="3611880" cy="1325880"/>
+            <a:off x="548640" y="1645920"/>
+            <a:ext cx="5440680" cy="4480560"/>
           </a:xfrm>
           <a:prstGeom prst="roundRect">
             <a:avLst/>
           </a:prstGeom>
           <a:solidFill>
-            <a:srgbClr val="D97706"/>
+            <a:srgbClr val="F1F5F9"/>
           </a:solidFill>
           <a:ln>
             <a:noFill/>
@@ -15353,65 +16648,281 @@
           </a:fontRef>
         </p:style>
         <p:txBody>
-          <a:bodyPr rtlCol="0" anchor="ctr" wrap="square" lIns="109728" rIns="109728"/>
-          <a:lstStyle/>
-          <a:p>
-            <a:pPr algn="ctr">
-              <a:defRPr sz="1500" b="1">
-                <a:solidFill>
-                  <a:srgbClr val="FFFFFF"/>
-                </a:solidFill>
-                <a:latin typeface="Avenir Next"/>
-              </a:defRPr>
-            </a:pPr>
-            <a:r>
-              <a:t>Serial</a:t>
-            </a:r>
-          </a:p>
-          <a:p>
-            <a:pPr algn="ctr">
-              <a:defRPr sz="1100" b="0">
-                <a:solidFill>
-                  <a:srgbClr val="FFFFFF"/>
-                </a:solidFill>
-                <a:latin typeface="Avenir Next"/>
-              </a:defRPr>
-            </a:pPr>
-            <a:r>
-              <a:t>hdf5 · netcdf · fftw · boost</a:t>
-            </a:r>
-          </a:p>
-          <a:p>
-            <a:pPr algn="ctr">
-              <a:defRPr sz="1000" b="0">
-                <a:solidFill>
-                  <a:srgbClr val="FFFFFF"/>
-                </a:solidFill>
-                <a:latin typeface="Avenir Next"/>
-              </a:defRPr>
-            </a:pPr>
-            <a:r>
-              <a:t>the same packages, built without MPI</a:t>
-            </a:r>
-          </a:p>
-        </p:txBody>
-      </p:sp>
-      <p:sp>
-        <p:nvSpPr>
-          <p:cNvPr id="8" name="Rounded Rectangle 7"/>
+          <a:bodyPr rtlCol="0" anchor="ctr"/>
+          <a:lstStyle/>
+          <a:p>
+            <a:pPr algn="ctr"/>
+          </a:p>
+        </p:txBody>
+      </p:sp>
+      <p:sp>
+        <p:nvSpPr>
+          <p:cNvPr id="7" name="TextBox 6"/>
+          <p:cNvSpPr txBox="1"/>
+          <p:nvPr/>
+        </p:nvSpPr>
+        <p:spPr>
+          <a:xfrm>
+            <a:off x="822960" y="1828800"/>
+            <a:ext cx="4937760" cy="457200"/>
+          </a:xfrm>
+          <a:prstGeom prst="rect">
+            <a:avLst/>
+          </a:prstGeom>
+          <a:noFill/>
+        </p:spPr>
+        <p:txBody>
+          <a:bodyPr wrap="square" anchor="t">
+            <a:spAutoFit/>
+          </a:bodyPr>
+          <a:lstStyle/>
+          <a:p>
+            <a:pPr algn="l">
+              <a:defRPr sz="1700" b="1">
+                <a:solidFill>
+                  <a:srgbClr val="15803D"/>
+                </a:solidFill>
+                <a:latin typeface="Avenir Next"/>
+              </a:defRPr>
+            </a:pPr>
+            <a:r>
+              <a:t>Done</a:t>
+            </a:r>
+          </a:p>
+        </p:txBody>
+      </p:sp>
+      <p:sp>
+        <p:nvSpPr>
+          <p:cNvPr id="8" name="TextBox 7"/>
+          <p:cNvSpPr txBox="1"/>
+          <p:nvPr/>
+        </p:nvSpPr>
+        <p:spPr>
+          <a:xfrm>
+            <a:off x="822960" y="2377440"/>
+            <a:ext cx="365760" cy="457200"/>
+          </a:xfrm>
+          <a:prstGeom prst="rect">
+            <a:avLst/>
+          </a:prstGeom>
+          <a:noFill/>
+        </p:spPr>
+        <p:txBody>
+          <a:bodyPr wrap="square" anchor="t">
+            <a:spAutoFit/>
+          </a:bodyPr>
+          <a:lstStyle/>
+          <a:p>
+            <a:pPr algn="l">
+              <a:defRPr sz="1600" b="1">
+                <a:solidFill>
+                  <a:srgbClr val="15803D"/>
+                </a:solidFill>
+                <a:latin typeface="Avenir Next"/>
+              </a:defRPr>
+            </a:pPr>
+            <a:r>
+              <a:t>✓</a:t>
+            </a:r>
+          </a:p>
+        </p:txBody>
+      </p:sp>
+      <p:sp>
+        <p:nvSpPr>
+          <p:cNvPr id="9" name="TextBox 8"/>
+          <p:cNvSpPr txBox="1"/>
+          <p:nvPr/>
+        </p:nvSpPr>
+        <p:spPr>
+          <a:xfrm>
+            <a:off x="1234440" y="2377440"/>
+            <a:ext cx="4526280" cy="1005840"/>
+          </a:xfrm>
+          <a:prstGeom prst="rect">
+            <a:avLst/>
+          </a:prstGeom>
+          <a:noFill/>
+        </p:spPr>
+        <p:txBody>
+          <a:bodyPr wrap="square" anchor="t">
+            <a:spAutoFit/>
+          </a:bodyPr>
+          <a:lstStyle/>
+          <a:p>
+            <a:pPr algn="l">
+              <a:defRPr sz="1300" b="0">
+                <a:solidFill>
+                  <a:srgbClr val="334155"/>
+                </a:solidFill>
+                <a:latin typeface="Avenir Next"/>
+              </a:defRPr>
+            </a:pPr>
+            <a:r>
+              <a:t>End-to-end Cray smoke: probe → render → concretize → build (PrgEnv-gnu · cray-mpich · ROCm)</a:t>
+            </a:r>
+          </a:p>
+        </p:txBody>
+      </p:sp>
+      <p:sp>
+        <p:nvSpPr>
+          <p:cNvPr id="10" name="TextBox 9"/>
+          <p:cNvSpPr txBox="1"/>
+          <p:nvPr/>
+        </p:nvSpPr>
+        <p:spPr>
+          <a:xfrm>
+            <a:off x="822960" y="3429000"/>
+            <a:ext cx="365760" cy="457200"/>
+          </a:xfrm>
+          <a:prstGeom prst="rect">
+            <a:avLst/>
+          </a:prstGeom>
+          <a:noFill/>
+        </p:spPr>
+        <p:txBody>
+          <a:bodyPr wrap="square" anchor="t">
+            <a:spAutoFit/>
+          </a:bodyPr>
+          <a:lstStyle/>
+          <a:p>
+            <a:pPr algn="l">
+              <a:defRPr sz="1600" b="1">
+                <a:solidFill>
+                  <a:srgbClr val="15803D"/>
+                </a:solidFill>
+                <a:latin typeface="Avenir Next"/>
+              </a:defRPr>
+            </a:pPr>
+            <a:r>
+              <a:t>✓</a:t>
+            </a:r>
+          </a:p>
+        </p:txBody>
+      </p:sp>
+      <p:sp>
+        <p:nvSpPr>
+          <p:cNvPr id="11" name="TextBox 10"/>
+          <p:cNvSpPr txBox="1"/>
+          <p:nvPr/>
+        </p:nvSpPr>
+        <p:spPr>
+          <a:xfrm>
+            <a:off x="1234440" y="3429000"/>
+            <a:ext cx="4526280" cy="1005840"/>
+          </a:xfrm>
+          <a:prstGeom prst="rect">
+            <a:avLst/>
+          </a:prstGeom>
+          <a:noFill/>
+        </p:spPr>
+        <p:txBody>
+          <a:bodyPr wrap="square" anchor="t">
+            <a:spAutoFit/>
+          </a:bodyPr>
+          <a:lstStyle/>
+          <a:p>
+            <a:pPr algn="l">
+              <a:defRPr sz="1300" b="0">
+                <a:solidFill>
+                  <a:srgbClr val="334155"/>
+                </a:solidFill>
+                <a:latin typeface="Avenir Next"/>
+              </a:defRPr>
+            </a:pPr>
+            <a:r>
+              <a:t>Second system validated the generic-Linux path and hardened the prober</a:t>
+            </a:r>
+          </a:p>
+        </p:txBody>
+      </p:sp>
+      <p:sp>
+        <p:nvSpPr>
+          <p:cNvPr id="12" name="TextBox 11"/>
+          <p:cNvSpPr txBox="1"/>
+          <p:nvPr/>
+        </p:nvSpPr>
+        <p:spPr>
+          <a:xfrm>
+            <a:off x="822960" y="4480560"/>
+            <a:ext cx="365760" cy="457200"/>
+          </a:xfrm>
+          <a:prstGeom prst="rect">
+            <a:avLst/>
+          </a:prstGeom>
+          <a:noFill/>
+        </p:spPr>
+        <p:txBody>
+          <a:bodyPr wrap="square" anchor="t">
+            <a:spAutoFit/>
+          </a:bodyPr>
+          <a:lstStyle/>
+          <a:p>
+            <a:pPr algn="l">
+              <a:defRPr sz="1600" b="1">
+                <a:solidFill>
+                  <a:srgbClr val="15803D"/>
+                </a:solidFill>
+                <a:latin typeface="Avenir Next"/>
+              </a:defRPr>
+            </a:pPr>
+            <a:r>
+              <a:t>✓</a:t>
+            </a:r>
+          </a:p>
+        </p:txBody>
+      </p:sp>
+      <p:sp>
+        <p:nvSpPr>
+          <p:cNvPr id="13" name="TextBox 12"/>
+          <p:cNvSpPr txBox="1"/>
+          <p:nvPr/>
+        </p:nvSpPr>
+        <p:spPr>
+          <a:xfrm>
+            <a:off x="1234440" y="4480560"/>
+            <a:ext cx="4526280" cy="1005840"/>
+          </a:xfrm>
+          <a:prstGeom prst="rect">
+            <a:avLst/>
+          </a:prstGeom>
+          <a:noFill/>
+        </p:spPr>
+        <p:txBody>
+          <a:bodyPr wrap="square" anchor="t">
+            <a:spAutoFit/>
+          </a:bodyPr>
+          <a:lstStyle/>
+          <a:p>
+            <a:pPr algn="l">
+              <a:defRPr sz="1300" b="0">
+                <a:solidFill>
+                  <a:srgbClr val="334155"/>
+                </a:solidFill>
+                <a:latin typeface="Avenir Next"/>
+              </a:defRPr>
+            </a:pPr>
+            <a:r>
+              <a:t>Pilot stack renders clean today: four lanes, two-version roster</a:t>
+            </a:r>
+          </a:p>
+        </p:txBody>
+      </p:sp>
+      <p:sp>
+        <p:nvSpPr>
+          <p:cNvPr id="14" name="Rounded Rectangle 13"/>
           <p:cNvSpPr/>
           <p:nvPr/>
         </p:nvSpPr>
         <p:spPr>
           <a:xfrm>
-            <a:off x="4370831" y="1719072"/>
-            <a:ext cx="3611880" cy="1325880"/>
+            <a:off x="6263640" y="1645920"/>
+            <a:ext cx="5349240" cy="4480560"/>
           </a:xfrm>
           <a:prstGeom prst="roundRect">
             <a:avLst/>
           </a:prstGeom>
           <a:solidFill>
-            <a:srgbClr val="2563EB"/>
+            <a:srgbClr val="F1F5F9"/>
           </a:solidFill>
           <a:ln>
             <a:noFill/>
@@ -15433,409 +16944,23 @@
           </a:fontRef>
         </p:style>
         <p:txBody>
-          <a:bodyPr rtlCol="0" anchor="ctr" wrap="square" lIns="109728" rIns="109728"/>
-          <a:lstStyle/>
-          <a:p>
-            <a:pPr algn="ctr">
-              <a:defRPr sz="1500" b="1">
-                <a:solidFill>
-                  <a:srgbClr val="FFFFFF"/>
-                </a:solidFill>
-                <a:latin typeface="Avenir Next"/>
-              </a:defRPr>
-            </a:pPr>
-            <a:r>
-              <a:t>MPI</a:t>
-            </a:r>
-          </a:p>
-          <a:p>
-            <a:pPr algn="ctr">
-              <a:defRPr sz="1100" b="0">
-                <a:solidFill>
-                  <a:srgbClr val="FFFFFF"/>
-                </a:solidFill>
-                <a:latin typeface="Avenir Next"/>
-              </a:defRPr>
-            </a:pPr>
-            <a:r>
-              <a:t>hdf5 · netcdf · fftw · boost · tau · dakota</a:t>
-            </a:r>
-          </a:p>
-          <a:p>
-            <a:pPr algn="ctr">
-              <a:defRPr sz="1000" b="0">
-                <a:solidFill>
-                  <a:srgbClr val="FFFFFF"/>
-                </a:solidFill>
-                <a:latin typeface="Avenir Next"/>
-              </a:defRPr>
-            </a:pPr>
-            <a:r>
-              <a:t>built against the system MPI</a:t>
-            </a:r>
-          </a:p>
-        </p:txBody>
-      </p:sp>
-      <p:sp>
-        <p:nvSpPr>
-          <p:cNvPr id="9" name="Rounded Rectangle 8"/>
-          <p:cNvSpPr/>
-          <p:nvPr/>
-        </p:nvSpPr>
-        <p:spPr>
-          <a:xfrm>
-            <a:off x="8193023" y="1719072"/>
-            <a:ext cx="3611880" cy="1325880"/>
-          </a:xfrm>
-          <a:prstGeom prst="roundRect">
-            <a:avLst/>
-          </a:prstGeom>
-          <a:solidFill>
-            <a:srgbClr val="7C3AED"/>
-          </a:solidFill>
-          <a:ln>
-            <a:noFill/>
-          </a:ln>
-          <a:effectLst/>
-        </p:spPr>
-        <p:style>
-          <a:lnRef idx="1">
-            <a:schemeClr val="accent1"/>
-          </a:lnRef>
-          <a:fillRef idx="3">
-            <a:schemeClr val="accent1"/>
-          </a:fillRef>
-          <a:effectRef idx="2">
-            <a:schemeClr val="accent1"/>
-          </a:effectRef>
-          <a:fontRef idx="minor">
-            <a:schemeClr val="lt1"/>
-          </a:fontRef>
-        </p:style>
-        <p:txBody>
-          <a:bodyPr rtlCol="0" anchor="ctr" wrap="square" lIns="109728" rIns="109728"/>
-          <a:lstStyle/>
-          <a:p>
-            <a:pPr algn="ctr">
-              <a:defRPr sz="1500" b="1">
-                <a:solidFill>
-                  <a:srgbClr val="FFFFFF"/>
-                </a:solidFill>
-                <a:latin typeface="Avenir Next"/>
-              </a:defRPr>
-            </a:pPr>
-            <a:r>
-              <a:t>GPU</a:t>
-            </a:r>
-          </a:p>
-          <a:p>
-            <a:pPr algn="ctr">
-              <a:defRPr sz="1100" b="0">
-                <a:solidFill>
-                  <a:srgbClr val="FFFFFF"/>
-                </a:solidFill>
-                <a:latin typeface="Avenir Next"/>
-              </a:defRPr>
-            </a:pPr>
-            <a:r>
-              <a:t>the MPI roster, plus kokkos</a:t>
-            </a:r>
-          </a:p>
-          <a:p>
-            <a:pPr algn="ctr">
-              <a:defRPr sz="1000" b="0">
-                <a:solidFill>
-                  <a:srgbClr val="FFFFFF"/>
-                </a:solidFill>
-                <a:latin typeface="Avenir Next"/>
-              </a:defRPr>
-            </a:pPr>
-            <a:r>
-              <a:t>+rocm / +cuda, arch from the probe</a:t>
-            </a:r>
-          </a:p>
-        </p:txBody>
-      </p:sp>
-      <p:sp>
-        <p:nvSpPr>
-          <p:cNvPr id="10" name="Rounded Rectangle 9"/>
-          <p:cNvSpPr/>
-          <p:nvPr/>
-        </p:nvSpPr>
-        <p:spPr>
-          <a:xfrm>
-            <a:off x="548640" y="3200400"/>
-            <a:ext cx="11091672" cy="640080"/>
-          </a:xfrm>
-          <a:prstGeom prst="roundRect">
-            <a:avLst/>
-          </a:prstGeom>
-          <a:solidFill>
-            <a:srgbClr val="15803D"/>
-          </a:solidFill>
-          <a:ln>
-            <a:noFill/>
-          </a:ln>
-          <a:effectLst/>
-        </p:spPr>
-        <p:style>
-          <a:lnRef idx="1">
-            <a:schemeClr val="accent1"/>
-          </a:lnRef>
-          <a:fillRef idx="3">
-            <a:schemeClr val="accent1"/>
-          </a:fillRef>
-          <a:effectRef idx="2">
-            <a:schemeClr val="accent1"/>
-          </a:effectRef>
-          <a:fontRef idx="minor">
-            <a:schemeClr val="lt1"/>
-          </a:fontRef>
-        </p:style>
-        <p:txBody>
-          <a:bodyPr rtlCol="0" anchor="ctr" wrap="square" lIns="109728" rIns="109728"/>
-          <a:lstStyle/>
-          <a:p>
-            <a:pPr algn="ctr">
-              <a:defRPr sz="1250" b="1">
-                <a:solidFill>
-                  <a:srgbClr val="FFFFFF"/>
-                </a:solidFill>
-                <a:latin typeface="Avenir Next"/>
-              </a:defRPr>
-            </a:pPr>
-            <a:r>
-              <a:t>Common compiler-dependent packages: loadable from every lane</a:t>
-            </a:r>
-          </a:p>
-          <a:p>
-            <a:pPr algn="ctr">
-              <a:defRPr sz="1050" b="0">
-                <a:solidFill>
-                  <a:srgbClr val="FFFFFF"/>
-                </a:solidFill>
-                <a:latin typeface="Avenir Next"/>
-              </a:defRPr>
-            </a:pPr>
-            <a:r>
-              <a:t>openblas · netlib-lapack · gnuplot · one Serial-lane build, one install, shared module root</a:t>
-            </a:r>
-          </a:p>
-        </p:txBody>
-      </p:sp>
-      <p:sp>
-        <p:nvSpPr>
-          <p:cNvPr id="11" name="Rounded Rectangle 10"/>
-          <p:cNvSpPr/>
-          <p:nvPr/>
-        </p:nvSpPr>
-        <p:spPr>
-          <a:xfrm>
-            <a:off x="548640" y="3959352"/>
-            <a:ext cx="11091672" cy="640080"/>
-          </a:xfrm>
-          <a:prstGeom prst="roundRect">
-            <a:avLst/>
-          </a:prstGeom>
-          <a:solidFill>
-            <a:srgbClr val="0D9488"/>
-          </a:solidFill>
-          <a:ln>
-            <a:noFill/>
-          </a:ln>
-          <a:effectLst/>
-        </p:spPr>
-        <p:style>
-          <a:lnRef idx="1">
-            <a:schemeClr val="accent1"/>
-          </a:lnRef>
-          <a:fillRef idx="3">
-            <a:schemeClr val="accent1"/>
-          </a:fillRef>
-          <a:effectRef idx="2">
-            <a:schemeClr val="accent1"/>
-          </a:effectRef>
-          <a:fontRef idx="minor">
-            <a:schemeClr val="lt1"/>
-          </a:fontRef>
-        </p:style>
-        <p:txBody>
-          <a:bodyPr rtlCol="0" anchor="ctr" wrap="square" lIns="109728" rIns="109728"/>
-          <a:lstStyle/>
-          <a:p>
-            <a:pPr algn="ctr">
-              <a:defRPr sz="1250" b="1">
-                <a:solidFill>
-                  <a:srgbClr val="FFFFFF"/>
-                </a:solidFill>
-                <a:latin typeface="Avenir Next"/>
-              </a:defRPr>
-            </a:pPr>
-            <a:r>
-              <a:t>Core: loads with the compiler surface</a:t>
-            </a:r>
-          </a:p>
-          <a:p>
-            <a:pPr algn="ctr">
-              <a:defRPr sz="1050" b="0">
-                <a:solidFill>
-                  <a:srgbClr val="FFFFFF"/>
-                </a:solidFill>
-                <a:latin typeface="Avenir Next"/>
-              </a:defRPr>
-            </a:pPr>
-            <a:r>
-              <a:t>cmake · ninja · git · python · py-numpy · miniforge · gsl · sqlite</a:t>
-            </a:r>
-          </a:p>
-        </p:txBody>
-      </p:sp>
-      <p:sp>
-        <p:nvSpPr>
-          <p:cNvPr id="12" name="Rounded Rectangle 11"/>
-          <p:cNvSpPr/>
-          <p:nvPr/>
-        </p:nvSpPr>
-        <p:spPr>
-          <a:xfrm>
-            <a:off x="548640" y="4718304"/>
-            <a:ext cx="11091672" cy="640080"/>
-          </a:xfrm>
-          <a:prstGeom prst="roundRect">
-            <a:avLst/>
-          </a:prstGeom>
-          <a:solidFill>
-            <a:srgbClr val="475569"/>
-          </a:solidFill>
-          <a:ln>
-            <a:noFill/>
-          </a:ln>
-          <a:effectLst/>
-        </p:spPr>
-        <p:style>
-          <a:lnRef idx="1">
-            <a:schemeClr val="accent1"/>
-          </a:lnRef>
-          <a:fillRef idx="3">
-            <a:schemeClr val="accent1"/>
-          </a:fillRef>
-          <a:effectRef idx="2">
-            <a:schemeClr val="accent1"/>
-          </a:effectRef>
-          <a:fontRef idx="minor">
-            <a:schemeClr val="lt1"/>
-          </a:fontRef>
-        </p:style>
-        <p:txBody>
-          <a:bodyPr rtlCol="0" anchor="ctr" wrap="square" lIns="109728" rIns="109728"/>
-          <a:lstStyle/>
-          <a:p>
-            <a:pPr algn="ctr">
-              <a:defRPr sz="1250" b="1">
-                <a:solidFill>
-                  <a:srgbClr val="FFFFFF"/>
-                </a:solidFill>
-                <a:latin typeface="Avenir Next"/>
-              </a:defRPr>
-            </a:pPr>
-            <a:r>
-              <a:t>Foundation: on your paths automatically, nothing to load</a:t>
-            </a:r>
-          </a:p>
-          <a:p>
-            <a:pPr algn="ctr">
-              <a:defRPr sz="1050" b="0">
-                <a:solidFill>
-                  <a:srgbClr val="FFFFFF"/>
-                </a:solidFill>
-                <a:latin typeface="Avenir Next"/>
-              </a:defRPr>
-            </a:pPr>
-            <a:r>
-              <a:t>zlib · xz · zstd, single pinned version</a:t>
-            </a:r>
-          </a:p>
-        </p:txBody>
-      </p:sp>
-      <p:sp>
-        <p:nvSpPr>
-          <p:cNvPr id="13" name="Rounded Rectangle 12"/>
-          <p:cNvSpPr/>
-          <p:nvPr/>
-        </p:nvSpPr>
-        <p:spPr>
-          <a:xfrm>
-            <a:off x="548640" y="5504688"/>
-            <a:ext cx="11091672" cy="548640"/>
-          </a:xfrm>
-          <a:prstGeom prst="roundRect">
-            <a:avLst/>
-          </a:prstGeom>
-          <a:solidFill>
-            <a:srgbClr val="FFFFFF"/>
-          </a:solidFill>
-          <a:ln w="15875">
-            <a:solidFill>
-              <a:srgbClr val="E2E8F0"/>
-            </a:solidFill>
-          </a:ln>
-          <a:effectLst/>
-        </p:spPr>
-        <p:style>
-          <a:lnRef idx="1">
-            <a:schemeClr val="accent1"/>
-          </a:lnRef>
-          <a:fillRef idx="3">
-            <a:schemeClr val="accent1"/>
-          </a:fillRef>
-          <a:effectRef idx="2">
-            <a:schemeClr val="accent1"/>
-          </a:effectRef>
-          <a:fontRef idx="minor">
-            <a:schemeClr val="lt1"/>
-          </a:fontRef>
-        </p:style>
-        <p:txBody>
-          <a:bodyPr rtlCol="0" anchor="ctr" wrap="square" lIns="109728" rIns="109728"/>
-          <a:lstStyle/>
-          <a:p>
-            <a:pPr algn="ctr">
-              <a:defRPr sz="1300" b="1">
-                <a:solidFill>
-                  <a:srgbClr val="0F172A"/>
-                </a:solidFill>
-                <a:latin typeface="Avenir Next"/>
-              </a:defRPr>
-            </a:pPr>
-            <a:r>
-              <a:t>cse/&lt;Compiler&gt; surface: everything above sits on one compiler</a:t>
-            </a:r>
-          </a:p>
-          <a:p>
-            <a:pPr algn="ctr">
-              <a:defRPr sz="1050" b="0">
-                <a:solidFill>
-                  <a:srgbClr val="64748B"/>
-                </a:solidFill>
-                <a:latin typeface="Avenir Next"/>
-              </a:defRPr>
-            </a:pPr>
-            <a:r>
-              <a:t>lanes never mix compilers; loading a second lane fails loudly</a:t>
-            </a:r>
-          </a:p>
-        </p:txBody>
-      </p:sp>
-      <p:sp>
-        <p:nvSpPr>
-          <p:cNvPr id="14" name="TextBox 13"/>
+          <a:bodyPr rtlCol="0" anchor="ctr"/>
+          <a:lstStyle/>
+          <a:p>
+            <a:pPr algn="ctr"/>
+          </a:p>
+        </p:txBody>
+      </p:sp>
+      <p:sp>
+        <p:nvSpPr>
+          <p:cNvPr id="15" name="TextBox 14"/>
           <p:cNvSpPr txBox="1"/>
           <p:nvPr/>
         </p:nvSpPr>
         <p:spPr>
           <a:xfrm>
-            <a:off x="548640" y="6199632"/>
-            <a:ext cx="11064240" cy="457200"/>
+            <a:off x="6537960" y="1828800"/>
+            <a:ext cx="4846320" cy="457200"/>
           </a:xfrm>
           <a:prstGeom prst="rect">
             <a:avLst/>
@@ -15849,15 +16974,231 @@
           <a:lstStyle/>
           <a:p>
             <a:pPr algn="l">
-              <a:defRPr sz="1150" b="0">
-                <a:solidFill>
-                  <a:srgbClr val="64748B"/>
-                </a:solidFill>
-                <a:latin typeface="Avenir Next"/>
-              </a:defRPr>
-            </a:pPr>
-            <a:r>
-              <a:t>A user's view is one column: the surface, Foundation, Core, the common packages, and exactly one payload. The other payloads stay invisible until their lane is loaded.</a:t>
+              <a:defRPr sz="1700" b="1">
+                <a:solidFill>
+                  <a:srgbClr val="D97706"/>
+                </a:solidFill>
+                <a:latin typeface="Avenir Next"/>
+              </a:defRPr>
+            </a:pPr>
+            <a:r>
+              <a:t>Next</a:t>
+            </a:r>
+          </a:p>
+        </p:txBody>
+      </p:sp>
+      <p:sp>
+        <p:nvSpPr>
+          <p:cNvPr id="16" name="TextBox 15"/>
+          <p:cNvSpPr txBox="1"/>
+          <p:nvPr/>
+        </p:nvSpPr>
+        <p:spPr>
+          <a:xfrm>
+            <a:off x="6537960" y="2377440"/>
+            <a:ext cx="365760" cy="457200"/>
+          </a:xfrm>
+          <a:prstGeom prst="rect">
+            <a:avLst/>
+          </a:prstGeom>
+          <a:noFill/>
+        </p:spPr>
+        <p:txBody>
+          <a:bodyPr wrap="square" anchor="t">
+            <a:spAutoFit/>
+          </a:bodyPr>
+          <a:lstStyle/>
+          <a:p>
+            <a:pPr algn="l">
+              <a:defRPr sz="1600" b="1">
+                <a:solidFill>
+                  <a:srgbClr val="D97706"/>
+                </a:solidFill>
+                <a:latin typeface="Avenir Next"/>
+              </a:defRPr>
+            </a:pPr>
+            <a:r>
+              <a:t>→</a:t>
+            </a:r>
+          </a:p>
+        </p:txBody>
+      </p:sp>
+      <p:sp>
+        <p:nvSpPr>
+          <p:cNvPr id="17" name="TextBox 16"/>
+          <p:cNvSpPr txBox="1"/>
+          <p:nvPr/>
+        </p:nvSpPr>
+        <p:spPr>
+          <a:xfrm>
+            <a:off x="6949440" y="2377440"/>
+            <a:ext cx="4434840" cy="1005840"/>
+          </a:xfrm>
+          <a:prstGeom prst="rect">
+            <a:avLst/>
+          </a:prstGeom>
+          <a:noFill/>
+        </p:spPr>
+        <p:txBody>
+          <a:bodyPr wrap="square" anchor="t">
+            <a:spAutoFit/>
+          </a:bodyPr>
+          <a:lstStyle/>
+          <a:p>
+            <a:pPr algn="l">
+              <a:defRPr sz="1300" b="0">
+                <a:solidFill>
+                  <a:srgbClr val="334155"/>
+                </a:solidFill>
+                <a:latin typeface="Avenir Next"/>
+              </a:defRPr>
+            </a:pPr>
+            <a:r>
+              <a:t>Build the pilot stack on Fran, Wheat, Raider, and Blueback; verify the module/view front door</a:t>
+            </a:r>
+          </a:p>
+        </p:txBody>
+      </p:sp>
+      <p:sp>
+        <p:nvSpPr>
+          <p:cNvPr id="18" name="TextBox 17"/>
+          <p:cNvSpPr txBox="1"/>
+          <p:nvPr/>
+        </p:nvSpPr>
+        <p:spPr>
+          <a:xfrm>
+            <a:off x="6537960" y="3429000"/>
+            <a:ext cx="365760" cy="457200"/>
+          </a:xfrm>
+          <a:prstGeom prst="rect">
+            <a:avLst/>
+          </a:prstGeom>
+          <a:noFill/>
+        </p:spPr>
+        <p:txBody>
+          <a:bodyPr wrap="square" anchor="t">
+            <a:spAutoFit/>
+          </a:bodyPr>
+          <a:lstStyle/>
+          <a:p>
+            <a:pPr algn="l">
+              <a:defRPr sz="1600" b="1">
+                <a:solidFill>
+                  <a:srgbClr val="D97706"/>
+                </a:solidFill>
+                <a:latin typeface="Avenir Next"/>
+              </a:defRPr>
+            </a:pPr>
+            <a:r>
+              <a:t>→</a:t>
+            </a:r>
+          </a:p>
+        </p:txBody>
+      </p:sp>
+      <p:sp>
+        <p:nvSpPr>
+          <p:cNvPr id="19" name="TextBox 18"/>
+          <p:cNvSpPr txBox="1"/>
+          <p:nvPr/>
+        </p:nvSpPr>
+        <p:spPr>
+          <a:xfrm>
+            <a:off x="6949440" y="3429000"/>
+            <a:ext cx="4434840" cy="1005840"/>
+          </a:xfrm>
+          <a:prstGeom prst="rect">
+            <a:avLst/>
+          </a:prstGeom>
+          <a:noFill/>
+        </p:spPr>
+        <p:txBody>
+          <a:bodyPr wrap="square" anchor="t">
+            <a:spAutoFit/>
+          </a:bodyPr>
+          <a:lstStyle/>
+          <a:p>
+            <a:pPr algn="l">
+              <a:defRPr sz="1300" b="0">
+                <a:solidFill>
+                  <a:srgbClr val="334155"/>
+                </a:solidFill>
+                <a:latin typeface="Avenir Next"/>
+              </a:defRPr>
+            </a:pPr>
+            <a:r>
+              <a:t>Encode module compatibility checks for multi-version package chains</a:t>
+            </a:r>
+          </a:p>
+        </p:txBody>
+      </p:sp>
+      <p:sp>
+        <p:nvSpPr>
+          <p:cNvPr id="20" name="TextBox 19"/>
+          <p:cNvSpPr txBox="1"/>
+          <p:nvPr/>
+        </p:nvSpPr>
+        <p:spPr>
+          <a:xfrm>
+            <a:off x="6537960" y="4480560"/>
+            <a:ext cx="365760" cy="457200"/>
+          </a:xfrm>
+          <a:prstGeom prst="rect">
+            <a:avLst/>
+          </a:prstGeom>
+          <a:noFill/>
+        </p:spPr>
+        <p:txBody>
+          <a:bodyPr wrap="square" anchor="t">
+            <a:spAutoFit/>
+          </a:bodyPr>
+          <a:lstStyle/>
+          <a:p>
+            <a:pPr algn="l">
+              <a:defRPr sz="1600" b="1">
+                <a:solidFill>
+                  <a:srgbClr val="D97706"/>
+                </a:solidFill>
+                <a:latin typeface="Avenir Next"/>
+              </a:defRPr>
+            </a:pPr>
+            <a:r>
+              <a:t>→</a:t>
+            </a:r>
+          </a:p>
+        </p:txBody>
+      </p:sp>
+      <p:sp>
+        <p:nvSpPr>
+          <p:cNvPr id="21" name="TextBox 20"/>
+          <p:cNvSpPr txBox="1"/>
+          <p:nvPr/>
+        </p:nvSpPr>
+        <p:spPr>
+          <a:xfrm>
+            <a:off x="6949440" y="4480560"/>
+            <a:ext cx="4434840" cy="1005840"/>
+          </a:xfrm>
+          <a:prstGeom prst="rect">
+            <a:avLst/>
+          </a:prstGeom>
+          <a:noFill/>
+        </p:spPr>
+        <p:txBody>
+          <a:bodyPr wrap="square" anchor="t">
+            <a:spAutoFit/>
+          </a:bodyPr>
+          <a:lstStyle/>
+          <a:p>
+            <a:pPr algn="l">
+              <a:defRPr sz="1300" b="0">
+                <a:solidFill>
+                  <a:srgbClr val="334155"/>
+                </a:solidFill>
+                <a:latin typeface="Avenir Next"/>
+              </a:defRPr>
+            </a:pPr>
+            <a:r>
+              <a:t>Release process: build caches, lockfiles, release manifest</a:t>
             </a:r>
           </a:p>
         </p:txBody>

--- a/presentations/cse_lanes_model.pptx
+++ b/presentations/cse_lanes_model.pptx
@@ -15462,7 +15462,7 @@
               </a:defRPr>
             </a:pPr>
             <a:r>
-              <a:t>NAVY · HPE Cray EX4000</a:t>
+              <a:t>NAVY · HPE Cray EX4000 · SLES</a:t>
             </a:r>
           </a:p>
         </p:txBody>
@@ -15498,7 +15498,7 @@
               </a:defRPr>
             </a:pPr>
             <a:r>
-              <a:t>SLES · AMD Instinct MI300A APU · 96 cores</a:t>
+              <a:t>Standard: AMD EPYC 9654 Genoa, 192 cores</a:t>
             </a:r>
           </a:p>
         </p:txBody>
@@ -15534,7 +15534,7 @@
               </a:defRPr>
             </a:pPr>
             <a:r>
-              <a:t>AI/ML nodes: 4 × AMD MI300A (gfx942)</a:t>
+              <a:t>AI/ML: AMD Instinct MI300A APU, 96 cores + 4 × MI300A</a:t>
             </a:r>
           </a:p>
         </p:txBody>
@@ -15730,7 +15730,7 @@
               </a:defRPr>
             </a:pPr>
             <a:r>
-              <a:t>ARL · HPE Cray EX4000</a:t>
+              <a:t>ARL · HPE Cray EX4000 · RHEL 9</a:t>
             </a:r>
           </a:p>
         </p:txBody>
@@ -15766,7 +15766,7 @@
               </a:defRPr>
             </a:pPr>
             <a:r>
-              <a:t>RHEL 9 · AMD EPYC Genoa · Slingshot-11</a:t>
+              <a:t>Standard: AMD EPYC Genoa, cores TBD</a:t>
             </a:r>
           </a:p>
         </p:txBody>
@@ -15802,7 +15802,7 @@
               </a:defRPr>
             </a:pPr>
             <a:r>
-              <a:t>AI/ML nodes: NVIDIA H200</a:t>
+              <a:t>AI/ML: NVIDIA H200</a:t>
             </a:r>
           </a:p>
         </p:txBody>
@@ -15998,7 +15998,7 @@
               </a:defRPr>
             </a:pPr>
             <a:r>
-              <a:t>AFRL · Penguin TrueHPC</a:t>
+              <a:t>AFRL · Penguin TrueHPC · RHEL 8</a:t>
             </a:r>
           </a:p>
         </p:txBody>
@@ -16034,7 +16034,7 @@
               </a:defRPr>
             </a:pPr>
             <a:r>
-              <a:t>RHEL 8 · AMD EPYC 7713 Milan · 128 cores</a:t>
+              <a:t>Standard: AMD EPYC 7713 Milan, 128 cores</a:t>
             </a:r>
           </a:p>
         </p:txBody>
@@ -16070,7 +16070,7 @@
               </a:defRPr>
             </a:pPr>
             <a:r>
-              <a:t>MLA nodes: 4 × NVIDIA A100 SXM4</a:t>
+              <a:t>AI/ML: same CPU + 4 × NVIDIA A100 SXM4</a:t>
             </a:r>
           </a:p>
         </p:txBody>
@@ -16266,7 +16266,7 @@
               </a:defRPr>
             </a:pPr>
             <a:r>
-              <a:t>ERDC · Liqid composable</a:t>
+              <a:t>ERDC · Liqid composable · RHEL 8</a:t>
             </a:r>
           </a:p>
         </p:txBody>
@@ -16302,7 +16302,7 @@
               </a:defRPr>
             </a:pPr>
             <a:r>
-              <a:t>RHEL 8 · Intel Xeon 9242 Cascade Lake · 92 cores</a:t>
+              <a:t>Standard: Intel Xeon 9242 Cascade Lake, 92 cores</a:t>
             </a:r>
           </a:p>
         </p:txBody>
@@ -16338,7 +16338,7 @@
               </a:defRPr>
             </a:pPr>
             <a:r>
-              <a:t>MLA nodes: 4 or 6 × NVIDIA A100</a:t>
+              <a:t>AI/ML: same CPU + 4 or 6 × NVIDIA A100</a:t>
             </a:r>
           </a:p>
         </p:txBody>
@@ -16428,7 +16428,7 @@
               </a:defRPr>
             </a:pPr>
             <a:r>
-              <a:t>The accelerated (AI/ML, MLA) node types are the pilot target on each system. Source: centers.hpc.mil hardware inventory, July 2026; Fran accelerator detail from program info.</a:t>
+              <a:t>AI/ML is this deck's label for each site's accelerated node type (named MLA on Raider and Wheat). Source: centers.hpc.mil hardware inventory, July 2026; Fran accelerator detail from program info.</a:t>
             </a:r>
           </a:p>
         </p:txBody>

--- a/presentations/cse_lanes_model.pptx
+++ b/presentations/cse_lanes_model.pptx
@@ -15766,7 +15766,7 @@
               </a:defRPr>
             </a:pPr>
             <a:r>
-              <a:t>Standard: AMD EPYC Genoa, cores TBD</a:t>
+              <a:t>Standard: AMD EPYC Genoa, 192 cores</a:t>
             </a:r>
           </a:p>
         </p:txBody>

--- a/presentations/cse_lanes_model.pptx
+++ b/presentations/cse_lanes_model.pptx
@@ -18,6 +18,7 @@
     <p:sldId id="266" r:id="rId17"/>
     <p:sldId id="267" r:id="rId18"/>
     <p:sldId id="268" r:id="rId19"/>
+    <p:sldId id="269" r:id="rId20"/>
   </p:sldIdLst>
   <p:sldSz cx="12191695" cy="6858000" type="screen4x3"/>
   <p:notesSz cx="6858000" cy="9144000"/>
@@ -3622,6 +3623,1020 @@
               </a:defRPr>
             </a:pPr>
             <a:r>
+              <a:t>DECISIONS WE NEED · NOT SETTLED YET</a:t>
+            </a:r>
+          </a:p>
+        </p:txBody>
+      </p:sp>
+      <p:sp>
+        <p:nvSpPr>
+          <p:cNvPr id="4" name="TextBox 3"/>
+          <p:cNvSpPr txBox="1"/>
+          <p:nvPr/>
+        </p:nvSpPr>
+        <p:spPr>
+          <a:xfrm>
+            <a:off x="548640" y="566928"/>
+            <a:ext cx="11064240" cy="731520"/>
+          </a:xfrm>
+          <a:prstGeom prst="rect">
+            <a:avLst/>
+          </a:prstGeom>
+          <a:noFill/>
+        </p:spPr>
+        <p:txBody>
+          <a:bodyPr wrap="square" anchor="t">
+            <a:spAutoFit/>
+          </a:bodyPr>
+          <a:lstStyle/>
+          <a:p>
+            <a:pPr algn="l">
+              <a:defRPr sz="3000" b="1">
+                <a:solidFill>
+                  <a:srgbClr val="0F172A"/>
+                </a:solidFill>
+                <a:latin typeface="Avenir Next"/>
+              </a:defRPr>
+            </a:pPr>
+            <a:r>
+              <a:t>Open questions for the team</a:t>
+            </a:r>
+          </a:p>
+        </p:txBody>
+      </p:sp>
+      <p:sp>
+        <p:nvSpPr>
+          <p:cNvPr id="5" name="Rectangle 4"/>
+          <p:cNvSpPr/>
+          <p:nvPr/>
+        </p:nvSpPr>
+        <p:spPr>
+          <a:xfrm>
+            <a:off x="566928" y="1298448"/>
+            <a:ext cx="1463040" cy="41148"/>
+          </a:xfrm>
+          <a:prstGeom prst="rect">
+            <a:avLst/>
+          </a:prstGeom>
+          <a:solidFill>
+            <a:srgbClr val="0D9488"/>
+          </a:solidFill>
+          <a:ln>
+            <a:noFill/>
+          </a:ln>
+          <a:effectLst/>
+        </p:spPr>
+        <p:style>
+          <a:lnRef idx="1">
+            <a:schemeClr val="accent1"/>
+          </a:lnRef>
+          <a:fillRef idx="3">
+            <a:schemeClr val="accent1"/>
+          </a:fillRef>
+          <a:effectRef idx="2">
+            <a:schemeClr val="accent1"/>
+          </a:effectRef>
+          <a:fontRef idx="minor">
+            <a:schemeClr val="lt1"/>
+          </a:fontRef>
+        </p:style>
+        <p:txBody>
+          <a:bodyPr rtlCol="0" anchor="ctr"/>
+          <a:lstStyle/>
+          <a:p>
+            <a:pPr algn="ctr"/>
+          </a:p>
+        </p:txBody>
+      </p:sp>
+      <p:sp>
+        <p:nvSpPr>
+          <p:cNvPr id="6" name="Rounded Rectangle 5"/>
+          <p:cNvSpPr/>
+          <p:nvPr/>
+        </p:nvSpPr>
+        <p:spPr>
+          <a:xfrm>
+            <a:off x="548640" y="1572768"/>
+            <a:ext cx="11091672" cy="804672"/>
+          </a:xfrm>
+          <a:prstGeom prst="roundRect">
+            <a:avLst/>
+          </a:prstGeom>
+          <a:solidFill>
+            <a:srgbClr val="F1F5F9"/>
+          </a:solidFill>
+          <a:ln>
+            <a:noFill/>
+          </a:ln>
+          <a:effectLst/>
+        </p:spPr>
+        <p:style>
+          <a:lnRef idx="1">
+            <a:schemeClr val="accent1"/>
+          </a:lnRef>
+          <a:fillRef idx="3">
+            <a:schemeClr val="accent1"/>
+          </a:fillRef>
+          <a:effectRef idx="2">
+            <a:schemeClr val="accent1"/>
+          </a:effectRef>
+          <a:fontRef idx="minor">
+            <a:schemeClr val="lt1"/>
+          </a:fontRef>
+        </p:style>
+        <p:txBody>
+          <a:bodyPr rtlCol="0" anchor="ctr"/>
+          <a:lstStyle/>
+          <a:p>
+            <a:pPr algn="ctr"/>
+          </a:p>
+        </p:txBody>
+      </p:sp>
+      <p:sp>
+        <p:nvSpPr>
+          <p:cNvPr id="7" name="Rectangle 6"/>
+          <p:cNvSpPr/>
+          <p:nvPr/>
+        </p:nvSpPr>
+        <p:spPr>
+          <a:xfrm>
+            <a:off x="548640" y="1572768"/>
+            <a:ext cx="91440" cy="804672"/>
+          </a:xfrm>
+          <a:prstGeom prst="rect">
+            <a:avLst/>
+          </a:prstGeom>
+          <a:solidFill>
+            <a:srgbClr val="15803D"/>
+          </a:solidFill>
+          <a:ln>
+            <a:noFill/>
+          </a:ln>
+          <a:effectLst/>
+        </p:spPr>
+        <p:style>
+          <a:lnRef idx="1">
+            <a:schemeClr val="accent1"/>
+          </a:lnRef>
+          <a:fillRef idx="3">
+            <a:schemeClr val="accent1"/>
+          </a:fillRef>
+          <a:effectRef idx="2">
+            <a:schemeClr val="accent1"/>
+          </a:effectRef>
+          <a:fontRef idx="minor">
+            <a:schemeClr val="lt1"/>
+          </a:fontRef>
+        </p:style>
+        <p:txBody>
+          <a:bodyPr rtlCol="0" anchor="ctr"/>
+          <a:lstStyle/>
+          <a:p>
+            <a:pPr algn="ctr"/>
+          </a:p>
+        </p:txBody>
+      </p:sp>
+      <p:sp>
+        <p:nvSpPr>
+          <p:cNvPr id="8" name="TextBox 7"/>
+          <p:cNvSpPr txBox="1"/>
+          <p:nvPr/>
+        </p:nvSpPr>
+        <p:spPr>
+          <a:xfrm>
+            <a:off x="868680" y="1664208"/>
+            <a:ext cx="10515600" cy="274320"/>
+          </a:xfrm>
+          <a:prstGeom prst="rect">
+            <a:avLst/>
+          </a:prstGeom>
+          <a:noFill/>
+        </p:spPr>
+        <p:txBody>
+          <a:bodyPr wrap="square" anchor="t">
+            <a:spAutoFit/>
+          </a:bodyPr>
+          <a:lstStyle/>
+          <a:p>
+            <a:pPr algn="l">
+              <a:defRPr sz="1350" b="1">
+                <a:solidFill>
+                  <a:srgbClr val="0F172A"/>
+                </a:solidFill>
+                <a:latin typeface="Avenir Next"/>
+              </a:defRPr>
+            </a:pPr>
+            <a:r>
+              <a:t>Which BLAS and LAPACK do users get?</a:t>
+            </a:r>
+          </a:p>
+        </p:txBody>
+      </p:sp>
+      <p:sp>
+        <p:nvSpPr>
+          <p:cNvPr id="9" name="TextBox 8"/>
+          <p:cNvSpPr txBox="1"/>
+          <p:nvPr/>
+        </p:nvSpPr>
+        <p:spPr>
+          <a:xfrm>
+            <a:off x="868680" y="1956816"/>
+            <a:ext cx="10515600" cy="384048"/>
+          </a:xfrm>
+          <a:prstGeom prst="rect">
+            <a:avLst/>
+          </a:prstGeom>
+          <a:noFill/>
+        </p:spPr>
+        <p:txBody>
+          <a:bodyPr wrap="square" anchor="t">
+            <a:spAutoFit/>
+          </a:bodyPr>
+          <a:lstStyle/>
+          <a:p>
+            <a:pPr algn="l">
+              <a:defRPr sz="1100" b="0">
+                <a:solidFill>
+                  <a:srgbClr val="64748B"/>
+                </a:solidFill>
+                <a:latin typeface="Avenir Next"/>
+              </a:defRPr>
+            </a:pPr>
+            <a:r>
+              <a:t>Today the stack builds OpenBLAS and reference LAPACK. OpenBLAS already provides the LAPACK API, so the pair ships it twice. Cray LibSci is on the path already; Intel systems would expect MKL.</a:t>
+            </a:r>
+          </a:p>
+        </p:txBody>
+      </p:sp>
+      <p:sp>
+        <p:nvSpPr>
+          <p:cNvPr id="10" name="Rounded Rectangle 9"/>
+          <p:cNvSpPr/>
+          <p:nvPr/>
+        </p:nvSpPr>
+        <p:spPr>
+          <a:xfrm>
+            <a:off x="548640" y="2487168"/>
+            <a:ext cx="11091672" cy="804672"/>
+          </a:xfrm>
+          <a:prstGeom prst="roundRect">
+            <a:avLst/>
+          </a:prstGeom>
+          <a:solidFill>
+            <a:srgbClr val="F1F5F9"/>
+          </a:solidFill>
+          <a:ln>
+            <a:noFill/>
+          </a:ln>
+          <a:effectLst/>
+        </p:spPr>
+        <p:style>
+          <a:lnRef idx="1">
+            <a:schemeClr val="accent1"/>
+          </a:lnRef>
+          <a:fillRef idx="3">
+            <a:schemeClr val="accent1"/>
+          </a:fillRef>
+          <a:effectRef idx="2">
+            <a:schemeClr val="accent1"/>
+          </a:effectRef>
+          <a:fontRef idx="minor">
+            <a:schemeClr val="lt1"/>
+          </a:fontRef>
+        </p:style>
+        <p:txBody>
+          <a:bodyPr rtlCol="0" anchor="ctr"/>
+          <a:lstStyle/>
+          <a:p>
+            <a:pPr algn="ctr"/>
+          </a:p>
+        </p:txBody>
+      </p:sp>
+      <p:sp>
+        <p:nvSpPr>
+          <p:cNvPr id="11" name="Rectangle 10"/>
+          <p:cNvSpPr/>
+          <p:nvPr/>
+        </p:nvSpPr>
+        <p:spPr>
+          <a:xfrm>
+            <a:off x="548640" y="2487168"/>
+            <a:ext cx="91440" cy="804672"/>
+          </a:xfrm>
+          <a:prstGeom prst="rect">
+            <a:avLst/>
+          </a:prstGeom>
+          <a:solidFill>
+            <a:srgbClr val="2563EB"/>
+          </a:solidFill>
+          <a:ln>
+            <a:noFill/>
+          </a:ln>
+          <a:effectLst/>
+        </p:spPr>
+        <p:style>
+          <a:lnRef idx="1">
+            <a:schemeClr val="accent1"/>
+          </a:lnRef>
+          <a:fillRef idx="3">
+            <a:schemeClr val="accent1"/>
+          </a:fillRef>
+          <a:effectRef idx="2">
+            <a:schemeClr val="accent1"/>
+          </a:effectRef>
+          <a:fontRef idx="minor">
+            <a:schemeClr val="lt1"/>
+          </a:fontRef>
+        </p:style>
+        <p:txBody>
+          <a:bodyPr rtlCol="0" anchor="ctr"/>
+          <a:lstStyle/>
+          <a:p>
+            <a:pPr algn="ctr"/>
+          </a:p>
+        </p:txBody>
+      </p:sp>
+      <p:sp>
+        <p:nvSpPr>
+          <p:cNvPr id="12" name="TextBox 11"/>
+          <p:cNvSpPr txBox="1"/>
+          <p:nvPr/>
+        </p:nvSpPr>
+        <p:spPr>
+          <a:xfrm>
+            <a:off x="868680" y="2578608"/>
+            <a:ext cx="10515600" cy="274320"/>
+          </a:xfrm>
+          <a:prstGeom prst="rect">
+            <a:avLst/>
+          </a:prstGeom>
+          <a:noFill/>
+        </p:spPr>
+        <p:txBody>
+          <a:bodyPr wrap="square" anchor="t">
+            <a:spAutoFit/>
+          </a:bodyPr>
+          <a:lstStyle/>
+          <a:p>
+            <a:pPr algn="l">
+              <a:defRPr sz="1350" b="1">
+                <a:solidFill>
+                  <a:srgbClr val="0F172A"/>
+                </a:solidFill>
+                <a:latin typeface="Avenir Next"/>
+              </a:defRPr>
+            </a:pPr>
+            <a:r>
+              <a:t>ScaLAPACK is not in the roster.</a:t>
+            </a:r>
+          </a:p>
+        </p:txBody>
+      </p:sp>
+      <p:sp>
+        <p:nvSpPr>
+          <p:cNvPr id="13" name="TextBox 12"/>
+          <p:cNvSpPr txBox="1"/>
+          <p:nvPr/>
+        </p:nvSpPr>
+        <p:spPr>
+          <a:xfrm>
+            <a:off x="868680" y="2871215"/>
+            <a:ext cx="10515600" cy="384048"/>
+          </a:xfrm>
+          <a:prstGeom prst="rect">
+            <a:avLst/>
+          </a:prstGeom>
+          <a:noFill/>
+        </p:spPr>
+        <p:txBody>
+          <a:bodyPr wrap="square" anchor="t">
+            <a:spAutoFit/>
+          </a:bodyPr>
+          <a:lstStyle/>
+          <a:p>
+            <a:pPr algn="l">
+              <a:defRPr sz="1100" b="0">
+                <a:solidFill>
+                  <a:srgbClr val="64748B"/>
+                </a:solidFill>
+                <a:latin typeface="Avenir Next"/>
+              </a:defRPr>
+            </a:pPr>
+            <a:r>
+              <a:t>Distributed dense solvers need it, and both LibSci and MKL include it. It is MPI-only by nature, so the MPI and GPU lanes are its home if we carry it.</a:t>
+            </a:r>
+          </a:p>
+        </p:txBody>
+      </p:sp>
+      <p:sp>
+        <p:nvSpPr>
+          <p:cNvPr id="14" name="Rounded Rectangle 13"/>
+          <p:cNvSpPr/>
+          <p:nvPr/>
+        </p:nvSpPr>
+        <p:spPr>
+          <a:xfrm>
+            <a:off x="548640" y="3401568"/>
+            <a:ext cx="11091672" cy="804672"/>
+          </a:xfrm>
+          <a:prstGeom prst="roundRect">
+            <a:avLst/>
+          </a:prstGeom>
+          <a:solidFill>
+            <a:srgbClr val="F1F5F9"/>
+          </a:solidFill>
+          <a:ln>
+            <a:noFill/>
+          </a:ln>
+          <a:effectLst/>
+        </p:spPr>
+        <p:style>
+          <a:lnRef idx="1">
+            <a:schemeClr val="accent1"/>
+          </a:lnRef>
+          <a:fillRef idx="3">
+            <a:schemeClr val="accent1"/>
+          </a:fillRef>
+          <a:effectRef idx="2">
+            <a:schemeClr val="accent1"/>
+          </a:effectRef>
+          <a:fontRef idx="minor">
+            <a:schemeClr val="lt1"/>
+          </a:fontRef>
+        </p:style>
+        <p:txBody>
+          <a:bodyPr rtlCol="0" anchor="ctr"/>
+          <a:lstStyle/>
+          <a:p>
+            <a:pPr algn="ctr"/>
+          </a:p>
+        </p:txBody>
+      </p:sp>
+      <p:sp>
+        <p:nvSpPr>
+          <p:cNvPr id="15" name="Rectangle 14"/>
+          <p:cNvSpPr/>
+          <p:nvPr/>
+        </p:nvSpPr>
+        <p:spPr>
+          <a:xfrm>
+            <a:off x="548640" y="3401568"/>
+            <a:ext cx="91440" cy="804672"/>
+          </a:xfrm>
+          <a:prstGeom prst="rect">
+            <a:avLst/>
+          </a:prstGeom>
+          <a:solidFill>
+            <a:srgbClr val="0D9488"/>
+          </a:solidFill>
+          <a:ln>
+            <a:noFill/>
+          </a:ln>
+          <a:effectLst/>
+        </p:spPr>
+        <p:style>
+          <a:lnRef idx="1">
+            <a:schemeClr val="accent1"/>
+          </a:lnRef>
+          <a:fillRef idx="3">
+            <a:schemeClr val="accent1"/>
+          </a:fillRef>
+          <a:effectRef idx="2">
+            <a:schemeClr val="accent1"/>
+          </a:effectRef>
+          <a:fontRef idx="minor">
+            <a:schemeClr val="lt1"/>
+          </a:fontRef>
+        </p:style>
+        <p:txBody>
+          <a:bodyPr rtlCol="0" anchor="ctr"/>
+          <a:lstStyle/>
+          <a:p>
+            <a:pPr algn="ctr"/>
+          </a:p>
+        </p:txBody>
+      </p:sp>
+      <p:sp>
+        <p:nvSpPr>
+          <p:cNvPr id="16" name="TextBox 15"/>
+          <p:cNvSpPr txBox="1"/>
+          <p:nvPr/>
+        </p:nvSpPr>
+        <p:spPr>
+          <a:xfrm>
+            <a:off x="868680" y="3493008"/>
+            <a:ext cx="10515600" cy="274320"/>
+          </a:xfrm>
+          <a:prstGeom prst="rect">
+            <a:avLst/>
+          </a:prstGeom>
+          <a:noFill/>
+        </p:spPr>
+        <p:txBody>
+          <a:bodyPr wrap="square" anchor="t">
+            <a:spAutoFit/>
+          </a:bodyPr>
+          <a:lstStyle/>
+          <a:p>
+            <a:pPr algn="l">
+              <a:defRPr sz="1350" b="1">
+                <a:solidFill>
+                  <a:srgbClr val="0F172A"/>
+                </a:solidFill>
+                <a:latin typeface="Avenir Next"/>
+              </a:defRPr>
+            </a:pPr>
+            <a:r>
+              <a:t>How many compiler surfaces per system?</a:t>
+            </a:r>
+          </a:p>
+        </p:txBody>
+      </p:sp>
+      <p:sp>
+        <p:nvSpPr>
+          <p:cNvPr id="17" name="TextBox 16"/>
+          <p:cNvSpPr txBox="1"/>
+          <p:nvPr/>
+        </p:nvSpPr>
+        <p:spPr>
+          <a:xfrm>
+            <a:off x="868680" y="3785615"/>
+            <a:ext cx="10515600" cy="384048"/>
+          </a:xfrm>
+          <a:prstGeom prst="rect">
+            <a:avLst/>
+          </a:prstGeom>
+          <a:noFill/>
+        </p:spPr>
+        <p:txBody>
+          <a:bodyPr wrap="square" anchor="t">
+            <a:spAutoFit/>
+          </a:bodyPr>
+          <a:lstStyle/>
+          <a:p>
+            <a:pPr algn="l">
+              <a:defRPr sz="1100" b="0">
+                <a:solidFill>
+                  <a:srgbClr val="64748B"/>
+                </a:solidFill>
+                <a:latin typeface="Avenir Next"/>
+              </a:defRPr>
+            </a:pPr>
+            <a:r>
+              <a:t>CSEinit offers GCC and Intel today. The pilot input builds the system baseline only. Adding a surface is a one-line policy change, not a redesign, but it is a decision.</a:t>
+            </a:r>
+          </a:p>
+        </p:txBody>
+      </p:sp>
+      <p:sp>
+        <p:nvSpPr>
+          <p:cNvPr id="18" name="Rounded Rectangle 17"/>
+          <p:cNvSpPr/>
+          <p:nvPr/>
+        </p:nvSpPr>
+        <p:spPr>
+          <a:xfrm>
+            <a:off x="548640" y="4315968"/>
+            <a:ext cx="11091672" cy="804672"/>
+          </a:xfrm>
+          <a:prstGeom prst="roundRect">
+            <a:avLst/>
+          </a:prstGeom>
+          <a:solidFill>
+            <a:srgbClr val="F1F5F9"/>
+          </a:solidFill>
+          <a:ln>
+            <a:noFill/>
+          </a:ln>
+          <a:effectLst/>
+        </p:spPr>
+        <p:style>
+          <a:lnRef idx="1">
+            <a:schemeClr val="accent1"/>
+          </a:lnRef>
+          <a:fillRef idx="3">
+            <a:schemeClr val="accent1"/>
+          </a:fillRef>
+          <a:effectRef idx="2">
+            <a:schemeClr val="accent1"/>
+          </a:effectRef>
+          <a:fontRef idx="minor">
+            <a:schemeClr val="lt1"/>
+          </a:fontRef>
+        </p:style>
+        <p:txBody>
+          <a:bodyPr rtlCol="0" anchor="ctr"/>
+          <a:lstStyle/>
+          <a:p>
+            <a:pPr algn="ctr"/>
+          </a:p>
+        </p:txBody>
+      </p:sp>
+      <p:sp>
+        <p:nvSpPr>
+          <p:cNvPr id="19" name="Rectangle 18"/>
+          <p:cNvSpPr/>
+          <p:nvPr/>
+        </p:nvSpPr>
+        <p:spPr>
+          <a:xfrm>
+            <a:off x="548640" y="4315968"/>
+            <a:ext cx="91440" cy="804672"/>
+          </a:xfrm>
+          <a:prstGeom prst="rect">
+            <a:avLst/>
+          </a:prstGeom>
+          <a:solidFill>
+            <a:srgbClr val="D97706"/>
+          </a:solidFill>
+          <a:ln>
+            <a:noFill/>
+          </a:ln>
+          <a:effectLst/>
+        </p:spPr>
+        <p:style>
+          <a:lnRef idx="1">
+            <a:schemeClr val="accent1"/>
+          </a:lnRef>
+          <a:fillRef idx="3">
+            <a:schemeClr val="accent1"/>
+          </a:fillRef>
+          <a:effectRef idx="2">
+            <a:schemeClr val="accent1"/>
+          </a:effectRef>
+          <a:fontRef idx="minor">
+            <a:schemeClr val="lt1"/>
+          </a:fontRef>
+        </p:style>
+        <p:txBody>
+          <a:bodyPr rtlCol="0" anchor="ctr"/>
+          <a:lstStyle/>
+          <a:p>
+            <a:pPr algn="ctr"/>
+          </a:p>
+        </p:txBody>
+      </p:sp>
+      <p:sp>
+        <p:nvSpPr>
+          <p:cNvPr id="20" name="TextBox 19"/>
+          <p:cNvSpPr txBox="1"/>
+          <p:nvPr/>
+        </p:nvSpPr>
+        <p:spPr>
+          <a:xfrm>
+            <a:off x="868680" y="4407407"/>
+            <a:ext cx="10515600" cy="274320"/>
+          </a:xfrm>
+          <a:prstGeom prst="rect">
+            <a:avLst/>
+          </a:prstGeom>
+          <a:noFill/>
+        </p:spPr>
+        <p:txBody>
+          <a:bodyPr wrap="square" anchor="t">
+            <a:spAutoFit/>
+          </a:bodyPr>
+          <a:lstStyle/>
+          <a:p>
+            <a:pPr algn="l">
+              <a:defRPr sz="1350" b="1">
+                <a:solidFill>
+                  <a:srgbClr val="0F172A"/>
+                </a:solidFill>
+                <a:latin typeface="Avenir Next"/>
+              </a:defRPr>
+            </a:pPr>
+            <a:r>
+              <a:t>Does the Serial lane stay?</a:t>
+            </a:r>
+          </a:p>
+        </p:txBody>
+      </p:sp>
+      <p:sp>
+        <p:nvSpPr>
+          <p:cNvPr id="21" name="TextBox 20"/>
+          <p:cNvSpPr txBox="1"/>
+          <p:nvPr/>
+        </p:nvSpPr>
+        <p:spPr>
+          <a:xfrm>
+            <a:off x="868680" y="4700016"/>
+            <a:ext cx="10515600" cy="384048"/>
+          </a:xfrm>
+          <a:prstGeom prst="rect">
+            <a:avLst/>
+          </a:prstGeom>
+          <a:noFill/>
+        </p:spPr>
+        <p:txBody>
+          <a:bodyPr wrap="square" anchor="t">
+            <a:spAutoFit/>
+          </a:bodyPr>
+          <a:lstStyle/>
+          <a:p>
+            <a:pPr algn="l">
+              <a:defRPr sz="1100" b="0">
+                <a:solidFill>
+                  <a:srgbClr val="64748B"/>
+                </a:solidFill>
+                <a:latin typeface="Avenir Next"/>
+              </a:defRPr>
+            </a:pPr>
+            <a:r>
+              <a:t>An MPI build run on one rank does a serial job. We keep Serial because users ask for plain builds, but it is a deliberate cost: a second build of every MPI-capable package.</a:t>
+            </a:r>
+          </a:p>
+        </p:txBody>
+      </p:sp>
+      <p:sp>
+        <p:nvSpPr>
+          <p:cNvPr id="22" name="Rounded Rectangle 21"/>
+          <p:cNvSpPr/>
+          <p:nvPr/>
+        </p:nvSpPr>
+        <p:spPr>
+          <a:xfrm>
+            <a:off x="548640" y="5230368"/>
+            <a:ext cx="11091672" cy="804672"/>
+          </a:xfrm>
+          <a:prstGeom prst="roundRect">
+            <a:avLst/>
+          </a:prstGeom>
+          <a:solidFill>
+            <a:srgbClr val="F1F5F9"/>
+          </a:solidFill>
+          <a:ln>
+            <a:noFill/>
+          </a:ln>
+          <a:effectLst/>
+        </p:spPr>
+        <p:style>
+          <a:lnRef idx="1">
+            <a:schemeClr val="accent1"/>
+          </a:lnRef>
+          <a:fillRef idx="3">
+            <a:schemeClr val="accent1"/>
+          </a:fillRef>
+          <a:effectRef idx="2">
+            <a:schemeClr val="accent1"/>
+          </a:effectRef>
+          <a:fontRef idx="minor">
+            <a:schemeClr val="lt1"/>
+          </a:fontRef>
+        </p:style>
+        <p:txBody>
+          <a:bodyPr rtlCol="0" anchor="ctr"/>
+          <a:lstStyle/>
+          <a:p>
+            <a:pPr algn="ctr"/>
+          </a:p>
+        </p:txBody>
+      </p:sp>
+      <p:sp>
+        <p:nvSpPr>
+          <p:cNvPr id="23" name="Rectangle 22"/>
+          <p:cNvSpPr/>
+          <p:nvPr/>
+        </p:nvSpPr>
+        <p:spPr>
+          <a:xfrm>
+            <a:off x="548640" y="5230368"/>
+            <a:ext cx="91440" cy="804672"/>
+          </a:xfrm>
+          <a:prstGeom prst="rect">
+            <a:avLst/>
+          </a:prstGeom>
+          <a:solidFill>
+            <a:srgbClr val="7C3AED"/>
+          </a:solidFill>
+          <a:ln>
+            <a:noFill/>
+          </a:ln>
+          <a:effectLst/>
+        </p:spPr>
+        <p:style>
+          <a:lnRef idx="1">
+            <a:schemeClr val="accent1"/>
+          </a:lnRef>
+          <a:fillRef idx="3">
+            <a:schemeClr val="accent1"/>
+          </a:fillRef>
+          <a:effectRef idx="2">
+            <a:schemeClr val="accent1"/>
+          </a:effectRef>
+          <a:fontRef idx="minor">
+            <a:schemeClr val="lt1"/>
+          </a:fontRef>
+        </p:style>
+        <p:txBody>
+          <a:bodyPr rtlCol="0" anchor="ctr"/>
+          <a:lstStyle/>
+          <a:p>
+            <a:pPr algn="ctr"/>
+          </a:p>
+        </p:txBody>
+      </p:sp>
+      <p:sp>
+        <p:nvSpPr>
+          <p:cNvPr id="24" name="TextBox 23"/>
+          <p:cNvSpPr txBox="1"/>
+          <p:nvPr/>
+        </p:nvSpPr>
+        <p:spPr>
+          <a:xfrm>
+            <a:off x="868680" y="5321807"/>
+            <a:ext cx="10515600" cy="274320"/>
+          </a:xfrm>
+          <a:prstGeom prst="rect">
+            <a:avLst/>
+          </a:prstGeom>
+          <a:noFill/>
+        </p:spPr>
+        <p:txBody>
+          <a:bodyPr wrap="square" anchor="t">
+            <a:spAutoFit/>
+          </a:bodyPr>
+          <a:lstStyle/>
+          <a:p>
+            <a:pPr algn="l">
+              <a:defRPr sz="1350" b="1">
+                <a:solidFill>
+                  <a:srgbClr val="0F172A"/>
+                </a:solidFill>
+                <a:latin typeface="Avenir Next"/>
+              </a:defRPr>
+            </a:pPr>
+            <a:r>
+              <a:t>When do we turn on performance targeting?</a:t>
+            </a:r>
+          </a:p>
+        </p:txBody>
+      </p:sp>
+      <p:sp>
+        <p:nvSpPr>
+          <p:cNvPr id="25" name="TextBox 24"/>
+          <p:cNvSpPr txBox="1"/>
+          <p:nvPr/>
+        </p:nvSpPr>
+        <p:spPr>
+          <a:xfrm>
+            <a:off x="868680" y="5614416"/>
+            <a:ext cx="10515600" cy="384048"/>
+          </a:xfrm>
+          <a:prstGeom prst="rect">
+            <a:avLst/>
+          </a:prstGeom>
+          <a:noFill/>
+        </p:spPr>
+        <p:txBody>
+          <a:bodyPr wrap="square" anchor="t">
+            <a:spAutoFit/>
+          </a:bodyPr>
+          <a:lstStyle/>
+          <a:p>
+            <a:pPr algn="l">
+              <a:defRPr sz="1100" b="0">
+                <a:solidFill>
+                  <a:srgbClr val="64748B"/>
+                </a:solidFill>
+                <a:latin typeface="Avenir Next"/>
+              </a:defRPr>
+            </a:pPr>
+            <a:r>
+              <a:t>Everything builds at the portable baseline today. Tuning for Genoa, Milan, or Cascade Lake is a per-lane flag plus a full rebuild, so it is a scheduling question, not a design one.</a:t>
+            </a:r>
+          </a:p>
+        </p:txBody>
+      </p:sp>
+      <p:sp>
+        <p:nvSpPr>
+          <p:cNvPr id="26" name="TextBox 25"/>
+          <p:cNvSpPr txBox="1"/>
+          <p:nvPr/>
+        </p:nvSpPr>
+        <p:spPr>
+          <a:xfrm>
+            <a:off x="548640" y="6263640"/>
+            <a:ext cx="11064240" cy="365760"/>
+          </a:xfrm>
+          <a:prstGeom prst="rect">
+            <a:avLst/>
+          </a:prstGeom>
+          <a:noFill/>
+        </p:spPr>
+        <p:txBody>
+          <a:bodyPr wrap="square" anchor="t">
+            <a:spAutoFit/>
+          </a:bodyPr>
+          <a:lstStyle/>
+          <a:p>
+            <a:pPr algn="l">
+              <a:defRPr sz="1100" b="0">
+                <a:solidFill>
+                  <a:srgbClr val="64748B"/>
+                </a:solidFill>
+                <a:latin typeface="Avenir Next"/>
+              </a:defRPr>
+            </a:pPr>
+            <a:r>
+              <a:t>Per-package placement and the full reasoning: docs/package_placement_map_v1.html</a:t>
+            </a:r>
+          </a:p>
+        </p:txBody>
+      </p:sp>
+    </p:spTree>
+  </p:cSld>
+  <p:clrMapOvr>
+    <a:masterClrMapping/>
+  </p:clrMapOvr>
+</p:sld>
+</file>
+
+<file path=ppt/slides/slide11.xml><?xml version="1.0" encoding="utf-8"?>
+<p:sld xmlns:a="http://schemas.openxmlformats.org/drawingml/2006/main" xmlns:p="http://schemas.openxmlformats.org/presentationml/2006/main" xmlns:r="http://schemas.openxmlformats.org/officeDocument/2006/relationships">
+  <p:cSld>
+    <p:spTree>
+      <p:nvGrpSpPr>
+        <p:cNvPr id="1" name=""/>
+        <p:cNvGrpSpPr/>
+        <p:nvPr/>
+      </p:nvGrpSpPr>
+      <p:grpSpPr/>
+      <p:sp>
+        <p:nvSpPr>
+          <p:cNvPr id="2" name="Rectangle 1"/>
+          <p:cNvSpPr/>
+          <p:nvPr/>
+        </p:nvSpPr>
+        <p:spPr>
+          <a:xfrm>
+            <a:off x="0" y="0"/>
+            <a:ext cx="12191695" cy="6858000"/>
+          </a:xfrm>
+          <a:prstGeom prst="rect">
+            <a:avLst/>
+          </a:prstGeom>
+          <a:solidFill>
+            <a:srgbClr val="FFFFFF"/>
+          </a:solidFill>
+          <a:ln>
+            <a:noFill/>
+          </a:ln>
+          <a:effectLst/>
+        </p:spPr>
+        <p:style>
+          <a:lnRef idx="1">
+            <a:schemeClr val="accent1"/>
+          </a:lnRef>
+          <a:fillRef idx="3">
+            <a:schemeClr val="accent1"/>
+          </a:fillRef>
+          <a:effectRef idx="2">
+            <a:schemeClr val="accent1"/>
+          </a:effectRef>
+          <a:fontRef idx="minor">
+            <a:schemeClr val="lt1"/>
+          </a:fontRef>
+        </p:style>
+        <p:txBody>
+          <a:bodyPr rtlCol="0" anchor="ctr"/>
+          <a:lstStyle/>
+          <a:p>
+            <a:pPr algn="ctr"/>
+          </a:p>
+        </p:txBody>
+      </p:sp>
+      <p:sp>
+        <p:nvSpPr>
+          <p:cNvPr id="3" name="TextBox 2"/>
+          <p:cNvSpPr txBox="1"/>
+          <p:nvPr/>
+        </p:nvSpPr>
+        <p:spPr>
+          <a:xfrm>
+            <a:off x="548640" y="256032"/>
+            <a:ext cx="10972800" cy="365760"/>
+          </a:xfrm>
+          <a:prstGeom prst="rect">
+            <a:avLst/>
+          </a:prstGeom>
+          <a:noFill/>
+        </p:spPr>
+        <p:txBody>
+          <a:bodyPr wrap="square" anchor="t">
+            <a:spAutoFit/>
+          </a:bodyPr>
+          <a:lstStyle/>
+          <a:p>
+            <a:pPr algn="l">
+              <a:defRPr sz="1300" b="1">
+                <a:solidFill>
+                  <a:srgbClr val="0D9488"/>
+                </a:solidFill>
+                <a:latin typeface="Avenir Next"/>
+              </a:defRPr>
+            </a:pPr>
+            <a:r>
               <a:t>APPENDIX · HOW THE LAYERS STACK</a:t>
             </a:r>
           </a:p>
@@ -4297,7 +5312,7 @@
 </p:sld>
 </file>
 
-<file path=ppt/slides/slide11.xml><?xml version="1.0" encoding="utf-8"?>
+<file path=ppt/slides/slide12.xml><?xml version="1.0" encoding="utf-8"?>
 <p:sld xmlns:a="http://schemas.openxmlformats.org/drawingml/2006/main" xmlns:p="http://schemas.openxmlformats.org/presentationml/2006/main" xmlns:r="http://schemas.openxmlformats.org/officeDocument/2006/relationships">
   <p:cSld>
     <p:spTree>
@@ -5469,7 +6484,7 @@
 </p:sld>
 </file>
 
-<file path=ppt/slides/slide12.xml><?xml version="1.0" encoding="utf-8"?>
+<file path=ppt/slides/slide13.xml><?xml version="1.0" encoding="utf-8"?>
 <p:sld xmlns:a="http://schemas.openxmlformats.org/drawingml/2006/main" xmlns:p="http://schemas.openxmlformats.org/presentationml/2006/main" xmlns:r="http://schemas.openxmlformats.org/officeDocument/2006/relationships">
   <p:cSld>
     <p:spTree>
@@ -6576,7 +7591,7 @@
 </p:sld>
 </file>
 
-<file path=ppt/slides/slide13.xml><?xml version="1.0" encoding="utf-8"?>
+<file path=ppt/slides/slide14.xml><?xml version="1.0" encoding="utf-8"?>
 <p:sld xmlns:a="http://schemas.openxmlformats.org/drawingml/2006/main" xmlns:p="http://schemas.openxmlformats.org/presentationml/2006/main" xmlns:r="http://schemas.openxmlformats.org/officeDocument/2006/relationships">
   <p:cSld>
     <p:spTree>

--- a/presentations/cse_lanes_model.pptx
+++ b/presentations/cse_lanes_model.pptx
@@ -3716,8 +3716,8 @@
         </p:nvSpPr>
         <p:spPr>
           <a:xfrm>
-            <a:off x="548640" y="1572768"/>
-            <a:ext cx="11091672" cy="804672"/>
+            <a:off x="548640" y="1600200"/>
+            <a:ext cx="11091672" cy="914400"/>
           </a:xfrm>
           <a:prstGeom prst="roundRect">
             <a:avLst/>
@@ -3760,8 +3760,8 @@
         </p:nvSpPr>
         <p:spPr>
           <a:xfrm>
-            <a:off x="548640" y="1572768"/>
-            <a:ext cx="91440" cy="804672"/>
+            <a:off x="548640" y="1600200"/>
+            <a:ext cx="91440" cy="914400"/>
           </a:xfrm>
           <a:prstGeom prst="rect">
             <a:avLst/>
@@ -3804,7 +3804,7 @@
         </p:nvSpPr>
         <p:spPr>
           <a:xfrm>
-            <a:off x="868680" y="1664208"/>
+            <a:off x="868680" y="1728216"/>
             <a:ext cx="10515600" cy="274320"/>
           </a:xfrm>
           <a:prstGeom prst="rect">
@@ -3827,7 +3827,7 @@
               </a:defRPr>
             </a:pPr>
             <a:r>
-              <a:t>Which BLAS and LAPACK do users get?</a:t>
+              <a:t>Do we offer the vendor's math libraries as well as OpenBLAS?</a:t>
             </a:r>
           </a:p>
         </p:txBody>
@@ -3840,8 +3840,8 @@
         </p:nvSpPr>
         <p:spPr>
           <a:xfrm>
-            <a:off x="868680" y="1956816"/>
-            <a:ext cx="10515600" cy="384048"/>
+            <a:off x="868680" y="2029967"/>
+            <a:ext cx="10515600" cy="420624"/>
           </a:xfrm>
           <a:prstGeom prst="rect">
             <a:avLst/>
@@ -3863,7 +3863,7 @@
               </a:defRPr>
             </a:pPr>
             <a:r>
-              <a:t>Today the stack builds OpenBLAS and reference LAPACK. OpenBLAS already provides the LAPACK API, so the pair ships it twice. Cray LibSci is on the path already; Intel systems would expect MKL.</a:t>
+              <a:t>OpenBLAS is now the one BLAS and LAPACK, so users get the same library on every system. Cray LibSci is already on the path on Blueback and Fran, and Intel systems would expect MKL. Both are registered rather than built, so this is policy per system, not build cost.</a:t>
             </a:r>
           </a:p>
         </p:txBody>
@@ -3876,8 +3876,8 @@
         </p:nvSpPr>
         <p:spPr>
           <a:xfrm>
-            <a:off x="548640" y="2487168"/>
-            <a:ext cx="11091672" cy="804672"/>
+            <a:off x="548640" y="2679191"/>
+            <a:ext cx="11091672" cy="914400"/>
           </a:xfrm>
           <a:prstGeom prst="roundRect">
             <a:avLst/>
@@ -3920,14 +3920,14 @@
         </p:nvSpPr>
         <p:spPr>
           <a:xfrm>
-            <a:off x="548640" y="2487168"/>
-            <a:ext cx="91440" cy="804672"/>
+            <a:off x="548640" y="2679191"/>
+            <a:ext cx="91440" cy="914400"/>
           </a:xfrm>
           <a:prstGeom prst="rect">
             <a:avLst/>
           </a:prstGeom>
           <a:solidFill>
-            <a:srgbClr val="2563EB"/>
+            <a:srgbClr val="0D9488"/>
           </a:solidFill>
           <a:ln>
             <a:noFill/>
@@ -3964,7 +3964,7 @@
         </p:nvSpPr>
         <p:spPr>
           <a:xfrm>
-            <a:off x="868680" y="2578608"/>
+            <a:off x="868680" y="2807208"/>
             <a:ext cx="10515600" cy="274320"/>
           </a:xfrm>
           <a:prstGeom prst="rect">
@@ -3987,7 +3987,7 @@
               </a:defRPr>
             </a:pPr>
             <a:r>
-              <a:t>ScaLAPACK is not in the roster.</a:t>
+              <a:t>How many compiler surfaces per system?</a:t>
             </a:r>
           </a:p>
         </p:txBody>
@@ -4000,8 +4000,8 @@
         </p:nvSpPr>
         <p:spPr>
           <a:xfrm>
-            <a:off x="868680" y="2871215"/>
-            <a:ext cx="10515600" cy="384048"/>
+            <a:off x="868680" y="3108959"/>
+            <a:ext cx="10515600" cy="420624"/>
           </a:xfrm>
           <a:prstGeom prst="rect">
             <a:avLst/>
@@ -4023,7 +4023,7 @@
               </a:defRPr>
             </a:pPr>
             <a:r>
-              <a:t>Distributed dense solvers need it, and both LibSci and MKL include it. It is MPI-only by nature, so the MPI and GPU lanes are its home if we carry it.</a:t>
+              <a:t>CSEinit offers GCC and Intel today. The pilot input builds the system baseline only. Adding a surface is a one-line policy change, not a redesign, but it is a decision.</a:t>
             </a:r>
           </a:p>
         </p:txBody>
@@ -4036,8 +4036,8 @@
         </p:nvSpPr>
         <p:spPr>
           <a:xfrm>
-            <a:off x="548640" y="3401568"/>
-            <a:ext cx="11091672" cy="804672"/>
+            <a:off x="548640" y="3758183"/>
+            <a:ext cx="11091672" cy="914400"/>
           </a:xfrm>
           <a:prstGeom prst="roundRect">
             <a:avLst/>
@@ -4080,14 +4080,14 @@
         </p:nvSpPr>
         <p:spPr>
           <a:xfrm>
-            <a:off x="548640" y="3401568"/>
-            <a:ext cx="91440" cy="804672"/>
+            <a:off x="548640" y="3758183"/>
+            <a:ext cx="91440" cy="914400"/>
           </a:xfrm>
           <a:prstGeom prst="rect">
             <a:avLst/>
           </a:prstGeom>
           <a:solidFill>
-            <a:srgbClr val="0D9488"/>
+            <a:srgbClr val="D97706"/>
           </a:solidFill>
           <a:ln>
             <a:noFill/>
@@ -4124,7 +4124,7 @@
         </p:nvSpPr>
         <p:spPr>
           <a:xfrm>
-            <a:off x="868680" y="3493008"/>
+            <a:off x="868680" y="3886199"/>
             <a:ext cx="10515600" cy="274320"/>
           </a:xfrm>
           <a:prstGeom prst="rect">
@@ -4147,7 +4147,7 @@
               </a:defRPr>
             </a:pPr>
             <a:r>
-              <a:t>How many compiler surfaces per system?</a:t>
+              <a:t>Does the Serial lane stay?</a:t>
             </a:r>
           </a:p>
         </p:txBody>
@@ -4160,8 +4160,8 @@
         </p:nvSpPr>
         <p:spPr>
           <a:xfrm>
-            <a:off x="868680" y="3785615"/>
-            <a:ext cx="10515600" cy="384048"/>
+            <a:off x="868680" y="4187951"/>
+            <a:ext cx="10515600" cy="420624"/>
           </a:xfrm>
           <a:prstGeom prst="rect">
             <a:avLst/>
@@ -4183,7 +4183,7 @@
               </a:defRPr>
             </a:pPr>
             <a:r>
-              <a:t>CSEinit offers GCC and Intel today. The pilot input builds the system baseline only. Adding a surface is a one-line policy change, not a redesign, but it is a decision.</a:t>
+              <a:t>An MPI build run on one rank does a serial job. We keep Serial because users ask for plain builds, but it is a deliberate cost: a second build of every MPI-capable package.</a:t>
             </a:r>
           </a:p>
         </p:txBody>
@@ -4196,8 +4196,8 @@
         </p:nvSpPr>
         <p:spPr>
           <a:xfrm>
-            <a:off x="548640" y="4315968"/>
-            <a:ext cx="11091672" cy="804672"/>
+            <a:off x="548640" y="4837176"/>
+            <a:ext cx="11091672" cy="914400"/>
           </a:xfrm>
           <a:prstGeom prst="roundRect">
             <a:avLst/>
@@ -4240,168 +4240,8 @@
         </p:nvSpPr>
         <p:spPr>
           <a:xfrm>
-            <a:off x="548640" y="4315968"/>
-            <a:ext cx="91440" cy="804672"/>
-          </a:xfrm>
-          <a:prstGeom prst="rect">
-            <a:avLst/>
-          </a:prstGeom>
-          <a:solidFill>
-            <a:srgbClr val="D97706"/>
-          </a:solidFill>
-          <a:ln>
-            <a:noFill/>
-          </a:ln>
-          <a:effectLst/>
-        </p:spPr>
-        <p:style>
-          <a:lnRef idx="1">
-            <a:schemeClr val="accent1"/>
-          </a:lnRef>
-          <a:fillRef idx="3">
-            <a:schemeClr val="accent1"/>
-          </a:fillRef>
-          <a:effectRef idx="2">
-            <a:schemeClr val="accent1"/>
-          </a:effectRef>
-          <a:fontRef idx="minor">
-            <a:schemeClr val="lt1"/>
-          </a:fontRef>
-        </p:style>
-        <p:txBody>
-          <a:bodyPr rtlCol="0" anchor="ctr"/>
-          <a:lstStyle/>
-          <a:p>
-            <a:pPr algn="ctr"/>
-          </a:p>
-        </p:txBody>
-      </p:sp>
-      <p:sp>
-        <p:nvSpPr>
-          <p:cNvPr id="20" name="TextBox 19"/>
-          <p:cNvSpPr txBox="1"/>
-          <p:nvPr/>
-        </p:nvSpPr>
-        <p:spPr>
-          <a:xfrm>
-            <a:off x="868680" y="4407407"/>
-            <a:ext cx="10515600" cy="274320"/>
-          </a:xfrm>
-          <a:prstGeom prst="rect">
-            <a:avLst/>
-          </a:prstGeom>
-          <a:noFill/>
-        </p:spPr>
-        <p:txBody>
-          <a:bodyPr wrap="square" anchor="t">
-            <a:spAutoFit/>
-          </a:bodyPr>
-          <a:lstStyle/>
-          <a:p>
-            <a:pPr algn="l">
-              <a:defRPr sz="1350" b="1">
-                <a:solidFill>
-                  <a:srgbClr val="0F172A"/>
-                </a:solidFill>
-                <a:latin typeface="Avenir Next"/>
-              </a:defRPr>
-            </a:pPr>
-            <a:r>
-              <a:t>Does the Serial lane stay?</a:t>
-            </a:r>
-          </a:p>
-        </p:txBody>
-      </p:sp>
-      <p:sp>
-        <p:nvSpPr>
-          <p:cNvPr id="21" name="TextBox 20"/>
-          <p:cNvSpPr txBox="1"/>
-          <p:nvPr/>
-        </p:nvSpPr>
-        <p:spPr>
-          <a:xfrm>
-            <a:off x="868680" y="4700016"/>
-            <a:ext cx="10515600" cy="384048"/>
-          </a:xfrm>
-          <a:prstGeom prst="rect">
-            <a:avLst/>
-          </a:prstGeom>
-          <a:noFill/>
-        </p:spPr>
-        <p:txBody>
-          <a:bodyPr wrap="square" anchor="t">
-            <a:spAutoFit/>
-          </a:bodyPr>
-          <a:lstStyle/>
-          <a:p>
-            <a:pPr algn="l">
-              <a:defRPr sz="1100" b="0">
-                <a:solidFill>
-                  <a:srgbClr val="64748B"/>
-                </a:solidFill>
-                <a:latin typeface="Avenir Next"/>
-              </a:defRPr>
-            </a:pPr>
-            <a:r>
-              <a:t>An MPI build run on one rank does a serial job. We keep Serial because users ask for plain builds, but it is a deliberate cost: a second build of every MPI-capable package.</a:t>
-            </a:r>
-          </a:p>
-        </p:txBody>
-      </p:sp>
-      <p:sp>
-        <p:nvSpPr>
-          <p:cNvPr id="22" name="Rounded Rectangle 21"/>
-          <p:cNvSpPr/>
-          <p:nvPr/>
-        </p:nvSpPr>
-        <p:spPr>
-          <a:xfrm>
-            <a:off x="548640" y="5230368"/>
-            <a:ext cx="11091672" cy="804672"/>
-          </a:xfrm>
-          <a:prstGeom prst="roundRect">
-            <a:avLst/>
-          </a:prstGeom>
-          <a:solidFill>
-            <a:srgbClr val="F1F5F9"/>
-          </a:solidFill>
-          <a:ln>
-            <a:noFill/>
-          </a:ln>
-          <a:effectLst/>
-        </p:spPr>
-        <p:style>
-          <a:lnRef idx="1">
-            <a:schemeClr val="accent1"/>
-          </a:lnRef>
-          <a:fillRef idx="3">
-            <a:schemeClr val="accent1"/>
-          </a:fillRef>
-          <a:effectRef idx="2">
-            <a:schemeClr val="accent1"/>
-          </a:effectRef>
-          <a:fontRef idx="minor">
-            <a:schemeClr val="lt1"/>
-          </a:fontRef>
-        </p:style>
-        <p:txBody>
-          <a:bodyPr rtlCol="0" anchor="ctr"/>
-          <a:lstStyle/>
-          <a:p>
-            <a:pPr algn="ctr"/>
-          </a:p>
-        </p:txBody>
-      </p:sp>
-      <p:sp>
-        <p:nvSpPr>
-          <p:cNvPr id="23" name="Rectangle 22"/>
-          <p:cNvSpPr/>
-          <p:nvPr/>
-        </p:nvSpPr>
-        <p:spPr>
-          <a:xfrm>
-            <a:off x="548640" y="5230368"/>
-            <a:ext cx="91440" cy="804672"/>
+            <a:off x="548640" y="4837176"/>
+            <a:ext cx="91440" cy="914400"/>
           </a:xfrm>
           <a:prstGeom prst="rect">
             <a:avLst/>
@@ -4438,13 +4278,13 @@
       </p:sp>
       <p:sp>
         <p:nvSpPr>
-          <p:cNvPr id="24" name="TextBox 23"/>
+          <p:cNvPr id="20" name="TextBox 19"/>
           <p:cNvSpPr txBox="1"/>
           <p:nvPr/>
         </p:nvSpPr>
         <p:spPr>
           <a:xfrm>
-            <a:off x="868680" y="5321807"/>
+            <a:off x="868680" y="4965192"/>
             <a:ext cx="10515600" cy="274320"/>
           </a:xfrm>
           <a:prstGeom prst="rect">
@@ -4474,14 +4314,14 @@
       </p:sp>
       <p:sp>
         <p:nvSpPr>
-          <p:cNvPr id="25" name="TextBox 24"/>
+          <p:cNvPr id="21" name="TextBox 20"/>
           <p:cNvSpPr txBox="1"/>
           <p:nvPr/>
         </p:nvSpPr>
         <p:spPr>
           <a:xfrm>
-            <a:off x="868680" y="5614416"/>
-            <a:ext cx="10515600" cy="384048"/>
+            <a:off x="868680" y="5266944"/>
+            <a:ext cx="10515600" cy="420624"/>
           </a:xfrm>
           <a:prstGeom prst="rect">
             <a:avLst/>
@@ -4510,7 +4350,7 @@
       </p:sp>
       <p:sp>
         <p:nvSpPr>
-          <p:cNvPr id="26" name="TextBox 25"/>
+          <p:cNvPr id="22" name="TextBox 21"/>
           <p:cNvSpPr txBox="1"/>
           <p:nvPr/>
         </p:nvSpPr>
@@ -5060,7 +4900,7 @@
               </a:defRPr>
             </a:pPr>
             <a:r>
-              <a:t>openblas · netlib-lapack · gnuplot · one Serial-lane build, one install, shared module root</a:t>
+              <a:t>openblas · gnuplot · one Serial-lane build, one install, shared module root</a:t>
             </a:r>
           </a:p>
         </p:txBody>
@@ -6664,7 +6504,7 @@
         </p:nvGraphicFramePr>
         <p:xfrm>
           <a:off x="548640" y="1481328"/>
-          <a:ext cx="11091672" cy="3922776"/>
+          <a:ext cx="11091672" cy="3621024"/>
         </p:xfrm>
         <a:graphic>
           <a:graphicData uri="http://schemas.openxmlformats.org/drawingml/2006/table">
@@ -7384,81 +7224,7 @@
                         </a:defRPr>
                       </a:pPr>
                       <a:r>
-                        <a:t>performance-sensitive, so payload rather than core; the BLAS every lane links</a:t>
-                      </a:r>
-                    </a:p>
-                  </a:txBody>
-                  <a:tcPr marL="109728" marR="73152" marT="13716" marB="13716" anchor="ctr">
-                    <a:solidFill>
-                      <a:srgbClr val="FFFFFF"/>
-                    </a:solidFill>
-                  </a:tcPr>
-                </a:tc>
-              </a:tr>
-              <a:tr h="301752">
-                <a:tc>
-                  <a:txBody>
-                    <a:bodyPr/>
-                    <a:lstStyle/>
-                    <a:p>
-                      <a:pPr>
-                        <a:defRPr sz="1100" b="1">
-                          <a:solidFill>
-                            <a:srgbClr val="0F172A"/>
-                          </a:solidFill>
-                          <a:latin typeface="Avenir Next"/>
-                        </a:defRPr>
-                      </a:pPr>
-                      <a:r>
-                        <a:t>netlib-lapack</a:t>
-                      </a:r>
-                    </a:p>
-                  </a:txBody>
-                  <a:tcPr marL="109728" marR="73152" marT="13716" marB="13716" anchor="ctr">
-                    <a:solidFill>
-                      <a:srgbClr val="FFFFFF"/>
-                    </a:solidFill>
-                  </a:tcPr>
-                </a:tc>
-                <a:tc>
-                  <a:txBody>
-                    <a:bodyPr/>
-                    <a:lstStyle/>
-                    <a:p>
-                      <a:pPr>
-                        <a:defRPr sz="1100" b="0">
-                          <a:solidFill>
-                            <a:srgbClr val="334155"/>
-                          </a:solidFill>
-                          <a:latin typeface="Avenir Next"/>
-                        </a:defRPr>
-                      </a:pPr>
-                      <a:r>
-                        <a:t>3.12.1 · 3.12.0</a:t>
-                      </a:r>
-                    </a:p>
-                  </a:txBody>
-                  <a:tcPr marL="109728" marR="73152" marT="13716" marB="13716" anchor="ctr">
-                    <a:solidFill>
-                      <a:srgbClr val="FFFFFF"/>
-                    </a:solidFill>
-                  </a:tcPr>
-                </a:tc>
-                <a:tc>
-                  <a:txBody>
-                    <a:bodyPr/>
-                    <a:lstStyle/>
-                    <a:p>
-                      <a:pPr>
-                        <a:defRPr sz="1050" b="0">
-                          <a:solidFill>
-                            <a:srgbClr val="64748B"/>
-                          </a:solidFill>
-                          <a:latin typeface="Avenir Next"/>
-                        </a:defRPr>
-                      </a:pPr>
-                      <a:r>
-                        <a:t>reference LAPACK alongside openblas (flagged for team review)</a:t>
+                        <a:t>the one BLAS and LAPACK: openblas provides both APIs. Payload rather than core: performance-sensitive</a:t>
                       </a:r>
                     </a:p>
                   </a:txBody>
@@ -7771,7 +7537,7 @@
         </p:nvGraphicFramePr>
         <p:xfrm>
           <a:off x="548640" y="1481328"/>
-          <a:ext cx="11091672" cy="5129784"/>
+          <a:ext cx="11091672" cy="5125212"/>
         </p:xfrm>
         <a:graphic>
           <a:graphicData uri="http://schemas.openxmlformats.org/drawingml/2006/table">
@@ -7784,7 +7550,7 @@
                 <a:gridCol w="2286000"/>
                 <a:gridCol w="6885432"/>
               </a:tblGrid>
-              <a:tr h="301752">
+              <a:tr h="269748">
                 <a:tc>
                   <a:txBody>
                     <a:bodyPr/>
@@ -7858,7 +7624,7 @@
                   </a:tcPr>
                 </a:tc>
               </a:tr>
-              <a:tr h="301752">
+              <a:tr h="269748">
                 <a:tc gridSpan="3">
                   <a:txBody>
                     <a:bodyPr/>
@@ -7900,7 +7666,7 @@
                   <a:tcPr/>
                 </a:tc>
               </a:tr>
-              <a:tr h="301752">
+              <a:tr h="269748">
                 <a:tc>
                   <a:txBody>
                     <a:bodyPr/>
@@ -7974,7 +7740,7 @@
                   </a:tcPr>
                 </a:tc>
               </a:tr>
-              <a:tr h="301752">
+              <a:tr h="269748">
                 <a:tc>
                   <a:txBody>
                     <a:bodyPr/>
@@ -8048,7 +7814,7 @@
                   </a:tcPr>
                 </a:tc>
               </a:tr>
-              <a:tr h="301752">
+              <a:tr h="269748">
                 <a:tc>
                   <a:txBody>
                     <a:bodyPr/>
@@ -8122,7 +7888,7 @@
                   </a:tcPr>
                 </a:tc>
               </a:tr>
-              <a:tr h="301752">
+              <a:tr h="269748">
                 <a:tc>
                   <a:txBody>
                     <a:bodyPr/>
@@ -8196,7 +7962,7 @@
                   </a:tcPr>
                 </a:tc>
               </a:tr>
-              <a:tr h="301752">
+              <a:tr h="269748">
                 <a:tc gridSpan="3">
                   <a:txBody>
                     <a:bodyPr/>
@@ -8238,7 +8004,7 @@
                   <a:tcPr/>
                 </a:tc>
               </a:tr>
-              <a:tr h="301752">
+              <a:tr h="269748">
                 <a:tc>
                   <a:txBody>
                     <a:bodyPr/>
@@ -8312,7 +8078,7 @@
                   </a:tcPr>
                 </a:tc>
               </a:tr>
-              <a:tr h="301752">
+              <a:tr h="269748">
                 <a:tc>
                   <a:txBody>
                     <a:bodyPr/>
@@ -8386,7 +8152,81 @@
                   </a:tcPr>
                 </a:tc>
               </a:tr>
-              <a:tr h="301752">
+              <a:tr h="269748">
+                <a:tc>
+                  <a:txBody>
+                    <a:bodyPr/>
+                    <a:lstStyle/>
+                    <a:p>
+                      <a:pPr>
+                        <a:defRPr sz="1100" b="1">
+                          <a:solidFill>
+                            <a:srgbClr val="0F172A"/>
+                          </a:solidFill>
+                          <a:latin typeface="Avenir Next"/>
+                        </a:defRPr>
+                      </a:pPr>
+                      <a:r>
+                        <a:t>netlib-scalapack</a:t>
+                      </a:r>
+                    </a:p>
+                  </a:txBody>
+                  <a:tcPr marL="109728" marR="73152" marT="13716" marB="13716" anchor="ctr">
+                    <a:solidFill>
+                      <a:srgbClr val="FFFFFF"/>
+                    </a:solidFill>
+                  </a:tcPr>
+                </a:tc>
+                <a:tc>
+                  <a:txBody>
+                    <a:bodyPr/>
+                    <a:lstStyle/>
+                    <a:p>
+                      <a:pPr>
+                        <a:defRPr sz="1100" b="0">
+                          <a:solidFill>
+                            <a:srgbClr val="334155"/>
+                          </a:solidFill>
+                          <a:latin typeface="Avenir Next"/>
+                        </a:defRPr>
+                      </a:pPr>
+                      <a:r>
+                        <a:t>2.2.3 · 2.2.2</a:t>
+                      </a:r>
+                    </a:p>
+                  </a:txBody>
+                  <a:tcPr marL="109728" marR="73152" marT="13716" marB="13716" anchor="ctr">
+                    <a:solidFill>
+                      <a:srgbClr val="FFFFFF"/>
+                    </a:solidFill>
+                  </a:tcPr>
+                </a:tc>
+                <a:tc>
+                  <a:txBody>
+                    <a:bodyPr/>
+                    <a:lstStyle/>
+                    <a:p>
+                      <a:pPr>
+                        <a:defRPr sz="1050" b="0">
+                          <a:solidFill>
+                            <a:srgbClr val="64748B"/>
+                          </a:solidFill>
+                          <a:latin typeface="Avenir Next"/>
+                        </a:defRPr>
+                      </a:pPr>
+                      <a:r>
+                        <a:t>distributed dense solvers; MPI by nature, no serial form</a:t>
+                      </a:r>
+                    </a:p>
+                  </a:txBody>
+                  <a:tcPr marL="109728" marR="73152" marT="13716" marB="13716" anchor="ctr">
+                    <a:solidFill>
+                      <a:srgbClr val="FFFFFF"/>
+                    </a:solidFill>
+                  </a:tcPr>
+                </a:tc>
+              </a:tr>
+              <a:tr h="269748">
                 <a:tc>
                   <a:txBody>
                     <a:bodyPr/>
@@ -8425,7 +8265,7 @@
                         </a:defRPr>
                       </a:pPr>
                       <a:r>
-                        <a:t>2.35.1 · 2.35</a:t>
+                        <a:t>2.35.1</a:t>
                       </a:r>
                     </a:p>
                   </a:txBody>
@@ -8449,7 +8289,7 @@
                         </a:defRPr>
                       </a:pPr>
                       <a:r>
-                        <a:t>+mpi</a:t>
+                        <a:t>+mpi; one version, a tool users run</a:t>
                       </a:r>
                     </a:p>
                   </a:txBody>
@@ -8460,7 +8300,7 @@
                   </a:tcPr>
                 </a:tc>
               </a:tr>
-              <a:tr h="301752">
+              <a:tr h="269748">
                 <a:tc>
                   <a:txBody>
                     <a:bodyPr/>
@@ -8534,7 +8374,7 @@
                   </a:tcPr>
                 </a:tc>
               </a:tr>
-              <a:tr h="301752">
+              <a:tr h="269748">
                 <a:tc gridSpan="3">
                   <a:txBody>
                     <a:bodyPr/>
@@ -8576,7 +8416,81 @@
                   <a:tcPr/>
                 </a:tc>
               </a:tr>
-              <a:tr h="301752">
+              <a:tr h="269748">
+                <a:tc>
+                  <a:txBody>
+                    <a:bodyPr/>
+                    <a:lstStyle/>
+                    <a:p>
+                      <a:pPr>
+                        <a:defRPr sz="1100" b="1">
+                          <a:solidFill>
+                            <a:srgbClr val="0F172A"/>
+                          </a:solidFill>
+                          <a:latin typeface="Avenir Next"/>
+                        </a:defRPr>
+                      </a:pPr>
+                      <a:r>
+                        <a:t>tau</a:t>
+                      </a:r>
+                    </a:p>
+                  </a:txBody>
+                  <a:tcPr marL="109728" marR="73152" marT="13716" marB="13716" anchor="ctr">
+                    <a:solidFill>
+                      <a:srgbClr val="FFFFFF"/>
+                    </a:solidFill>
+                  </a:tcPr>
+                </a:tc>
+                <a:tc>
+                  <a:txBody>
+                    <a:bodyPr/>
+                    <a:lstStyle/>
+                    <a:p>
+                      <a:pPr>
+                        <a:defRPr sz="1100" b="0">
+                          <a:solidFill>
+                            <a:srgbClr val="334155"/>
+                          </a:solidFill>
+                          <a:latin typeface="Avenir Next"/>
+                        </a:defRPr>
+                      </a:pPr>
+                      <a:r>
+                        <a:t>2.35.1</a:t>
+                      </a:r>
+                    </a:p>
+                  </a:txBody>
+                  <a:tcPr marL="109728" marR="73152" marT="13716" marB="13716" anchor="ctr">
+                    <a:solidFill>
+                      <a:srgbClr val="FFFFFF"/>
+                    </a:solidFill>
+                  </a:tcPr>
+                </a:tc>
+                <a:tc>
+                  <a:txBody>
+                    <a:bodyPr/>
+                    <a:lstStyle/>
+                    <a:p>
+                      <a:pPr>
+                        <a:defRPr sz="1050" b="0">
+                          <a:solidFill>
+                            <a:srgbClr val="64748B"/>
+                          </a:solidFill>
+                          <a:latin typeface="Avenir Next"/>
+                        </a:defRPr>
+                      </a:pPr>
+                      <a:r>
+                        <a:t>+mpi +gpu_runtime: its own build, so it can see kernels as well as MPI</a:t>
+                      </a:r>
+                    </a:p>
+                  </a:txBody>
+                  <a:tcPr marL="109728" marR="73152" marT="13716" marB="13716" anchor="ctr">
+                    <a:solidFill>
+                      <a:srgbClr val="FFFFFF"/>
+                    </a:solidFill>
+                  </a:tcPr>
+                </a:tc>
+              </a:tr>
+              <a:tr h="269748">
                 <a:tc>
                   <a:txBody>
                     <a:bodyPr/>
@@ -8650,7 +8564,7 @@
                   </a:tcPr>
                 </a:tc>
               </a:tr>
-              <a:tr h="301752">
+              <a:tr h="269748">
                 <a:tc gridSpan="3">
                   <a:txBody>
                     <a:bodyPr/>
@@ -8692,7 +8606,7 @@
                   <a:tcPr/>
                 </a:tc>
               </a:tr>
-              <a:tr h="301752">
+              <a:tr h="269748">
                 <a:tc>
                   <a:txBody>
                     <a:bodyPr/>
@@ -8755,7 +8669,7 @@
                         </a:defRPr>
                       </a:pPr>
                       <a:r>
-                        <a:t>openblas · netlib-lapack · gnuplot: the same modules through the shared root, nothing rebuilt</a:t>
+                        <a:t>openblas · gnuplot: the same modules through the shared root, nothing rebuilt</a:t>
                       </a:r>
                     </a:p>
                   </a:txBody>
@@ -8766,7 +8680,7 @@
                   </a:tcPr>
                 </a:tc>
               </a:tr>
-              <a:tr h="301752">
+              <a:tr h="269748">
                 <a:tc gridSpan="3">
                   <a:txBody>
                     <a:bodyPr/>
@@ -8808,7 +8722,7 @@
                   <a:tcPr/>
                 </a:tc>
               </a:tr>
-              <a:tr h="301752">
+              <a:tr h="269748">
                 <a:tc>
                   <a:txBody>
                     <a:bodyPr/>

--- a/presentations/cse_lanes_model.pptx
+++ b/presentations/cse_lanes_model.pptx
@@ -3717,7 +3717,7 @@
         <p:spPr>
           <a:xfrm>
             <a:off x="548640" y="1600200"/>
-            <a:ext cx="11091672" cy="914400"/>
+            <a:ext cx="11091672" cy="987552"/>
           </a:xfrm>
           <a:prstGeom prst="roundRect">
             <a:avLst/>
@@ -3761,7 +3761,7 @@
         <p:spPr>
           <a:xfrm>
             <a:off x="548640" y="1600200"/>
-            <a:ext cx="91440" cy="914400"/>
+            <a:ext cx="91440" cy="987552"/>
           </a:xfrm>
           <a:prstGeom prst="rect">
             <a:avLst/>
@@ -3840,8 +3840,8 @@
         </p:nvSpPr>
         <p:spPr>
           <a:xfrm>
-            <a:off x="868680" y="2029967"/>
-            <a:ext cx="10515600" cy="420624"/>
+            <a:off x="868680" y="2011680"/>
+            <a:ext cx="10515600" cy="530352"/>
           </a:xfrm>
           <a:prstGeom prst="rect">
             <a:avLst/>
@@ -3877,7 +3877,7 @@
         <p:spPr>
           <a:xfrm>
             <a:off x="548640" y="2679191"/>
-            <a:ext cx="11091672" cy="914400"/>
+            <a:ext cx="11091672" cy="987552"/>
           </a:xfrm>
           <a:prstGeom prst="roundRect">
             <a:avLst/>
@@ -3921,7 +3921,7 @@
         <p:spPr>
           <a:xfrm>
             <a:off x="548640" y="2679191"/>
-            <a:ext cx="91440" cy="914400"/>
+            <a:ext cx="91440" cy="987552"/>
           </a:xfrm>
           <a:prstGeom prst="rect">
             <a:avLst/>
@@ -3987,7 +3987,7 @@
               </a:defRPr>
             </a:pPr>
             <a:r>
-              <a:t>How many compiler surfaces per system?</a:t>
+              <a:t>Which compiler surfaces does the pilot carry?</a:t>
             </a:r>
           </a:p>
         </p:txBody>
@@ -4000,8 +4000,8 @@
         </p:nvSpPr>
         <p:spPr>
           <a:xfrm>
-            <a:off x="868680" y="3108959"/>
-            <a:ext cx="10515600" cy="420624"/>
+            <a:off x="868680" y="3090672"/>
+            <a:ext cx="10515600" cy="530352"/>
           </a:xfrm>
           <a:prstGeom prst="rect">
             <a:avLst/>
@@ -4023,7 +4023,7 @@
               </a:defRPr>
             </a:pPr>
             <a:r>
-              <a:t>CSEinit offers GCC and Intel today. The pilot input builds the system baseline only. Adding a surface is a one-line policy change, not a redesign, but it is a decision.</a:t>
+              <a:t>The pilot carries two per system: the one the machine blesses as its baseline, plus GCC as the portable reference. CSEinit offers GCC and Intel today, so whether Intel is one of the two on the systems that have it is the open part.</a:t>
             </a:r>
           </a:p>
         </p:txBody>
@@ -4037,7 +4037,7 @@
         <p:spPr>
           <a:xfrm>
             <a:off x="548640" y="3758183"/>
-            <a:ext cx="11091672" cy="914400"/>
+            <a:ext cx="11091672" cy="987552"/>
           </a:xfrm>
           <a:prstGeom prst="roundRect">
             <a:avLst/>
@@ -4081,7 +4081,7 @@
         <p:spPr>
           <a:xfrm>
             <a:off x="548640" y="3758183"/>
-            <a:ext cx="91440" cy="914400"/>
+            <a:ext cx="91440" cy="987552"/>
           </a:xfrm>
           <a:prstGeom prst="rect">
             <a:avLst/>
@@ -4160,8 +4160,8 @@
         </p:nvSpPr>
         <p:spPr>
           <a:xfrm>
-            <a:off x="868680" y="4187951"/>
-            <a:ext cx="10515600" cy="420624"/>
+            <a:off x="868680" y="4169663"/>
+            <a:ext cx="10515600" cy="530352"/>
           </a:xfrm>
           <a:prstGeom prst="rect">
             <a:avLst/>
@@ -4183,7 +4183,7 @@
               </a:defRPr>
             </a:pPr>
             <a:r>
-              <a:t>An MPI build run on one rank does a serial job. We keep Serial because users ask for plain builds, but it is a deliberate cost: a second build of every MPI-capable package.</a:t>
+              <a:t>Serial exists so users who are not running parallel do not carry the MPI runtime: analysis and post-processing on a login node, small tools, anything linking HDF5 or NetCDF without wanting libmpi behind it. An MPI build on one rank does the same work, so dropping Serial would halve the build matrix and push the MPI runtime onto everyone.</a:t>
             </a:r>
           </a:p>
         </p:txBody>
@@ -4197,7 +4197,7 @@
         <p:spPr>
           <a:xfrm>
             <a:off x="548640" y="4837176"/>
-            <a:ext cx="11091672" cy="914400"/>
+            <a:ext cx="11091672" cy="987552"/>
           </a:xfrm>
           <a:prstGeom prst="roundRect">
             <a:avLst/>
@@ -4241,7 +4241,7 @@
         <p:spPr>
           <a:xfrm>
             <a:off x="548640" y="4837176"/>
-            <a:ext cx="91440" cy="914400"/>
+            <a:ext cx="91440" cy="987552"/>
           </a:xfrm>
           <a:prstGeom prst="rect">
             <a:avLst/>
@@ -4307,7 +4307,7 @@
               </a:defRPr>
             </a:pPr>
             <a:r>
-              <a:t>When do we turn on performance targeting?</a:t>
+              <a:t>Performance targeting: baseline first, tuning after.</a:t>
             </a:r>
           </a:p>
         </p:txBody>
@@ -4320,8 +4320,8 @@
         </p:nvSpPr>
         <p:spPr>
           <a:xfrm>
-            <a:off x="868680" y="5266944"/>
-            <a:ext cx="10515600" cy="420624"/>
+            <a:off x="868680" y="5248656"/>
+            <a:ext cx="10515600" cy="530352"/>
           </a:xfrm>
           <a:prstGeom prst="rect">
             <a:avLst/>
@@ -4343,7 +4343,7 @@
               </a:defRPr>
             </a:pPr>
             <a:r>
-              <a:t>Everything builds at the portable baseline today. Tuning for Genoa, Milan, or Cascade Lake is a per-lane flag plus a full rebuild, so it is a scheduling question, not a design one.</a:t>
+              <a:t>The plan is to build every lane at the portable baseline, prove the model, then turn on per-lane tuning for Genoa, Milan, or Cascade Lake. Each target is a flag plus a full rebuild, so the open part is when, not whether.</a:t>
             </a:r>
           </a:p>
         </p:txBody>

--- a/presentations/cse_lanes_model.pptx
+++ b/presentations/cse_lanes_model.pptx
@@ -17357,7 +17357,7 @@
               </a:defRPr>
             </a:pPr>
             <a:r>
-              <a:t>AI/ML is this deck's label for each site's accelerated node type (named MLA on Raider and Wheat). Source: centers.hpc.mil hardware inventory, July 2026; Fran accelerator detail from program info.</a:t>
+              <a:t>Source: HPC Centers hardware inventory, July 2026</a:t>
             </a:r>
           </a:p>
         </p:txBody>
@@ -17455,7 +17455,7 @@
               </a:defRPr>
             </a:pPr>
             <a:r>
-              <a:t>WHERE THE PIPELINE IS TODAY</a:t>
+              <a:t>THE PLAN FROM HERE</a:t>
             </a:r>
           </a:p>
         </p:txBody>
@@ -17491,7 +17491,7 @@
               </a:defRPr>
             </a:pPr>
             <a:r>
-              <a:t>Status and next steps</a:t>
+              <a:t>What happens next</a:t>
             </a:r>
           </a:p>
         </p:txBody>
@@ -17549,7 +17549,7 @@
         <p:spPr>
           <a:xfrm>
             <a:off x="548640" y="1645920"/>
-            <a:ext cx="5440680" cy="4480560"/>
+            <a:ext cx="11091672" cy="1051560"/>
           </a:xfrm>
           <a:prstGeom prst="roundRect">
             <a:avLst/>
@@ -17586,14 +17586,68 @@
       </p:sp>
       <p:sp>
         <p:nvSpPr>
-          <p:cNvPr id="7" name="TextBox 6"/>
+          <p:cNvPr id="7" name="Rounded Rectangle 6"/>
+          <p:cNvSpPr/>
+          <p:nvPr/>
+        </p:nvSpPr>
+        <p:spPr>
+          <a:xfrm>
+            <a:off x="548640" y="1645920"/>
+            <a:ext cx="566928" cy="1051560"/>
+          </a:xfrm>
+          <a:prstGeom prst="roundRect">
+            <a:avLst/>
+          </a:prstGeom>
+          <a:solidFill>
+            <a:srgbClr val="0D9488"/>
+          </a:solidFill>
+          <a:ln>
+            <a:noFill/>
+          </a:ln>
+          <a:effectLst/>
+        </p:spPr>
+        <p:style>
+          <a:lnRef idx="1">
+            <a:schemeClr val="accent1"/>
+          </a:lnRef>
+          <a:fillRef idx="3">
+            <a:schemeClr val="accent1"/>
+          </a:fillRef>
+          <a:effectRef idx="2">
+            <a:schemeClr val="accent1"/>
+          </a:effectRef>
+          <a:fontRef idx="minor">
+            <a:schemeClr val="lt1"/>
+          </a:fontRef>
+        </p:style>
+        <p:txBody>
+          <a:bodyPr rtlCol="0" anchor="ctr" wrap="square" lIns="109728" rIns="109728"/>
+          <a:lstStyle/>
+          <a:p>
+            <a:pPr algn="ctr">
+              <a:defRPr sz="1900" b="1">
+                <a:solidFill>
+                  <a:srgbClr val="FFFFFF"/>
+                </a:solidFill>
+                <a:latin typeface="Avenir Next"/>
+              </a:defRPr>
+            </a:pPr>
+            <a:r>
+              <a:t>1</a:t>
+            </a:r>
+          </a:p>
+        </p:txBody>
+      </p:sp>
+      <p:sp>
+        <p:nvSpPr>
+          <p:cNvPr id="8" name="TextBox 7"/>
           <p:cNvSpPr txBox="1"/>
           <p:nvPr/>
         </p:nvSpPr>
         <p:spPr>
           <a:xfrm>
-            <a:off x="822960" y="1828800"/>
-            <a:ext cx="4937760" cy="457200"/>
+            <a:off x="1325880" y="1810512"/>
+            <a:ext cx="10058400" cy="310896"/>
           </a:xfrm>
           <a:prstGeom prst="rect">
             <a:avLst/>
@@ -17607,29 +17661,29 @@
           <a:lstStyle/>
           <a:p>
             <a:pPr algn="l">
-              <a:defRPr sz="1700" b="1">
-                <a:solidFill>
-                  <a:srgbClr val="15803D"/>
-                </a:solidFill>
-                <a:latin typeface="Avenir Next"/>
-              </a:defRPr>
-            </a:pPr>
-            <a:r>
-              <a:t>Done</a:t>
-            </a:r>
-          </a:p>
-        </p:txBody>
-      </p:sp>
-      <p:sp>
-        <p:nvSpPr>
-          <p:cNvPr id="8" name="TextBox 7"/>
+              <a:defRPr sz="1550" b="1">
+                <a:solidFill>
+                  <a:srgbClr val="0F172A"/>
+                </a:solidFill>
+                <a:latin typeface="Avenir Next"/>
+              </a:defRPr>
+            </a:pPr>
+            <a:r>
+              <a:t>Build the pilot stack on the four systems</a:t>
+            </a:r>
+          </a:p>
+        </p:txBody>
+      </p:sp>
+      <p:sp>
+        <p:nvSpPr>
+          <p:cNvPr id="9" name="TextBox 8"/>
           <p:cNvSpPr txBox="1"/>
           <p:nvPr/>
         </p:nvSpPr>
         <p:spPr>
           <a:xfrm>
-            <a:off x="822960" y="2377440"/>
-            <a:ext cx="365760" cy="457200"/>
+            <a:off x="1325880" y="2176272"/>
+            <a:ext cx="10058400" cy="420624"/>
           </a:xfrm>
           <a:prstGeom prst="rect">
             <a:avLst/>
@@ -17643,209 +17697,29 @@
           <a:lstStyle/>
           <a:p>
             <a:pPr algn="l">
-              <a:defRPr sz="1600" b="1">
-                <a:solidFill>
-                  <a:srgbClr val="15803D"/>
-                </a:solidFill>
-                <a:latin typeface="Avenir Next"/>
-              </a:defRPr>
-            </a:pPr>
-            <a:r>
-              <a:t>✓</a:t>
-            </a:r>
-          </a:p>
-        </p:txBody>
-      </p:sp>
-      <p:sp>
-        <p:nvSpPr>
-          <p:cNvPr id="9" name="TextBox 8"/>
-          <p:cNvSpPr txBox="1"/>
-          <p:nvPr/>
-        </p:nvSpPr>
-        <p:spPr>
-          <a:xfrm>
-            <a:off x="1234440" y="2377440"/>
-            <a:ext cx="4526280" cy="1005840"/>
-          </a:xfrm>
-          <a:prstGeom prst="rect">
-            <a:avLst/>
-          </a:prstGeom>
-          <a:noFill/>
-        </p:spPr>
-        <p:txBody>
-          <a:bodyPr wrap="square" anchor="t">
-            <a:spAutoFit/>
-          </a:bodyPr>
-          <a:lstStyle/>
-          <a:p>
-            <a:pPr algn="l">
-              <a:defRPr sz="1300" b="0">
-                <a:solidFill>
-                  <a:srgbClr val="334155"/>
-                </a:solidFill>
-                <a:latin typeface="Avenir Next"/>
-              </a:defRPr>
-            </a:pPr>
-            <a:r>
-              <a:t>End-to-end Cray smoke: probe → render → concretize → build (PrgEnv-gnu · cray-mpich · ROCm)</a:t>
-            </a:r>
-          </a:p>
-        </p:txBody>
-      </p:sp>
-      <p:sp>
-        <p:nvSpPr>
-          <p:cNvPr id="10" name="TextBox 9"/>
-          <p:cNvSpPr txBox="1"/>
-          <p:nvPr/>
-        </p:nvSpPr>
-        <p:spPr>
-          <a:xfrm>
-            <a:off x="822960" y="3429000"/>
-            <a:ext cx="365760" cy="457200"/>
-          </a:xfrm>
-          <a:prstGeom prst="rect">
-            <a:avLst/>
-          </a:prstGeom>
-          <a:noFill/>
-        </p:spPr>
-        <p:txBody>
-          <a:bodyPr wrap="square" anchor="t">
-            <a:spAutoFit/>
-          </a:bodyPr>
-          <a:lstStyle/>
-          <a:p>
-            <a:pPr algn="l">
-              <a:defRPr sz="1600" b="1">
-                <a:solidFill>
-                  <a:srgbClr val="15803D"/>
-                </a:solidFill>
-                <a:latin typeface="Avenir Next"/>
-              </a:defRPr>
-            </a:pPr>
-            <a:r>
-              <a:t>✓</a:t>
-            </a:r>
-          </a:p>
-        </p:txBody>
-      </p:sp>
-      <p:sp>
-        <p:nvSpPr>
-          <p:cNvPr id="11" name="TextBox 10"/>
-          <p:cNvSpPr txBox="1"/>
-          <p:nvPr/>
-        </p:nvSpPr>
-        <p:spPr>
-          <a:xfrm>
-            <a:off x="1234440" y="3429000"/>
-            <a:ext cx="4526280" cy="1005840"/>
-          </a:xfrm>
-          <a:prstGeom prst="rect">
-            <a:avLst/>
-          </a:prstGeom>
-          <a:noFill/>
-        </p:spPr>
-        <p:txBody>
-          <a:bodyPr wrap="square" anchor="t">
-            <a:spAutoFit/>
-          </a:bodyPr>
-          <a:lstStyle/>
-          <a:p>
-            <a:pPr algn="l">
-              <a:defRPr sz="1300" b="0">
-                <a:solidFill>
-                  <a:srgbClr val="334155"/>
-                </a:solidFill>
-                <a:latin typeface="Avenir Next"/>
-              </a:defRPr>
-            </a:pPr>
-            <a:r>
-              <a:t>Second system validated the generic-Linux path and hardened the prober</a:t>
-            </a:r>
-          </a:p>
-        </p:txBody>
-      </p:sp>
-      <p:sp>
-        <p:nvSpPr>
-          <p:cNvPr id="12" name="TextBox 11"/>
-          <p:cNvSpPr txBox="1"/>
-          <p:nvPr/>
-        </p:nvSpPr>
-        <p:spPr>
-          <a:xfrm>
-            <a:off x="822960" y="4480560"/>
-            <a:ext cx="365760" cy="457200"/>
-          </a:xfrm>
-          <a:prstGeom prst="rect">
-            <a:avLst/>
-          </a:prstGeom>
-          <a:noFill/>
-        </p:spPr>
-        <p:txBody>
-          <a:bodyPr wrap="square" anchor="t">
-            <a:spAutoFit/>
-          </a:bodyPr>
-          <a:lstStyle/>
-          <a:p>
-            <a:pPr algn="l">
-              <a:defRPr sz="1600" b="1">
-                <a:solidFill>
-                  <a:srgbClr val="15803D"/>
-                </a:solidFill>
-                <a:latin typeface="Avenir Next"/>
-              </a:defRPr>
-            </a:pPr>
-            <a:r>
-              <a:t>✓</a:t>
-            </a:r>
-          </a:p>
-        </p:txBody>
-      </p:sp>
-      <p:sp>
-        <p:nvSpPr>
-          <p:cNvPr id="13" name="TextBox 12"/>
-          <p:cNvSpPr txBox="1"/>
-          <p:nvPr/>
-        </p:nvSpPr>
-        <p:spPr>
-          <a:xfrm>
-            <a:off x="1234440" y="4480560"/>
-            <a:ext cx="4526280" cy="1005840"/>
-          </a:xfrm>
-          <a:prstGeom prst="rect">
-            <a:avLst/>
-          </a:prstGeom>
-          <a:noFill/>
-        </p:spPr>
-        <p:txBody>
-          <a:bodyPr wrap="square" anchor="t">
-            <a:spAutoFit/>
-          </a:bodyPr>
-          <a:lstStyle/>
-          <a:p>
-            <a:pPr algn="l">
-              <a:defRPr sz="1300" b="0">
-                <a:solidFill>
-                  <a:srgbClr val="334155"/>
-                </a:solidFill>
-                <a:latin typeface="Avenir Next"/>
-              </a:defRPr>
-            </a:pPr>
-            <a:r>
-              <a:t>Pilot stack renders clean today: four lanes, two-version roster</a:t>
-            </a:r>
-          </a:p>
-        </p:txBody>
-      </p:sp>
-      <p:sp>
-        <p:nvSpPr>
-          <p:cNvPr id="14" name="Rounded Rectangle 13"/>
+              <a:defRPr sz="1150" b="0">
+                <a:solidFill>
+                  <a:srgbClr val="64748B"/>
+                </a:solidFill>
+                <a:latin typeface="Avenir Next"/>
+              </a:defRPr>
+            </a:pPr>
+            <a:r>
+              <a:t>Probe each machine, render its lanes, concretize, install. The front door is the first real test of the naming: one compiler surface, then one lane, then a package.</a:t>
+            </a:r>
+          </a:p>
+        </p:txBody>
+      </p:sp>
+      <p:sp>
+        <p:nvSpPr>
+          <p:cNvPr id="10" name="Rounded Rectangle 9"/>
           <p:cNvSpPr/>
           <p:nvPr/>
         </p:nvSpPr>
         <p:spPr>
           <a:xfrm>
-            <a:off x="6263640" y="1645920"/>
-            <a:ext cx="5349240" cy="4480560"/>
+            <a:off x="548640" y="2852928"/>
+            <a:ext cx="11091672" cy="1051560"/>
           </a:xfrm>
           <a:prstGeom prst="roundRect">
             <a:avLst/>
@@ -17882,14 +17756,68 @@
       </p:sp>
       <p:sp>
         <p:nvSpPr>
-          <p:cNvPr id="15" name="TextBox 14"/>
+          <p:cNvPr id="11" name="Rounded Rectangle 10"/>
+          <p:cNvSpPr/>
+          <p:nvPr/>
+        </p:nvSpPr>
+        <p:spPr>
+          <a:xfrm>
+            <a:off x="548640" y="2852928"/>
+            <a:ext cx="566928" cy="1051560"/>
+          </a:xfrm>
+          <a:prstGeom prst="roundRect">
+            <a:avLst/>
+          </a:prstGeom>
+          <a:solidFill>
+            <a:srgbClr val="2563EB"/>
+          </a:solidFill>
+          <a:ln>
+            <a:noFill/>
+          </a:ln>
+          <a:effectLst/>
+        </p:spPr>
+        <p:style>
+          <a:lnRef idx="1">
+            <a:schemeClr val="accent1"/>
+          </a:lnRef>
+          <a:fillRef idx="3">
+            <a:schemeClr val="accent1"/>
+          </a:fillRef>
+          <a:effectRef idx="2">
+            <a:schemeClr val="accent1"/>
+          </a:effectRef>
+          <a:fontRef idx="minor">
+            <a:schemeClr val="lt1"/>
+          </a:fontRef>
+        </p:style>
+        <p:txBody>
+          <a:bodyPr rtlCol="0" anchor="ctr" wrap="square" lIns="109728" rIns="109728"/>
+          <a:lstStyle/>
+          <a:p>
+            <a:pPr algn="ctr">
+              <a:defRPr sz="1900" b="1">
+                <a:solidFill>
+                  <a:srgbClr val="FFFFFF"/>
+                </a:solidFill>
+                <a:latin typeface="Avenir Next"/>
+              </a:defRPr>
+            </a:pPr>
+            <a:r>
+              <a:t>2</a:t>
+            </a:r>
+          </a:p>
+        </p:txBody>
+      </p:sp>
+      <p:sp>
+        <p:nvSpPr>
+          <p:cNvPr id="12" name="TextBox 11"/>
           <p:cNvSpPr txBox="1"/>
           <p:nvPr/>
         </p:nvSpPr>
         <p:spPr>
           <a:xfrm>
-            <a:off x="6537960" y="1828800"/>
-            <a:ext cx="4846320" cy="457200"/>
+            <a:off x="1325880" y="3017520"/>
+            <a:ext cx="10058400" cy="310896"/>
           </a:xfrm>
           <a:prstGeom prst="rect">
             <a:avLst/>
@@ -17903,29 +17831,29 @@
           <a:lstStyle/>
           <a:p>
             <a:pPr algn="l">
-              <a:defRPr sz="1700" b="1">
-                <a:solidFill>
-                  <a:srgbClr val="D97706"/>
-                </a:solidFill>
-                <a:latin typeface="Avenir Next"/>
-              </a:defRPr>
-            </a:pPr>
-            <a:r>
-              <a:t>Next</a:t>
-            </a:r>
-          </a:p>
-        </p:txBody>
-      </p:sp>
-      <p:sp>
-        <p:nvSpPr>
-          <p:cNvPr id="16" name="TextBox 15"/>
+              <a:defRPr sz="1550" b="1">
+                <a:solidFill>
+                  <a:srgbClr val="0F172A"/>
+                </a:solidFill>
+                <a:latin typeface="Avenir Next"/>
+              </a:defRPr>
+            </a:pPr>
+            <a:r>
+              <a:t>Prove the module contract</a:t>
+            </a:r>
+          </a:p>
+        </p:txBody>
+      </p:sp>
+      <p:sp>
+        <p:nvSpPr>
+          <p:cNvPr id="13" name="TextBox 12"/>
           <p:cNvSpPr txBox="1"/>
           <p:nvPr/>
         </p:nvSpPr>
         <p:spPr>
           <a:xfrm>
-            <a:off x="6537960" y="2377440"/>
-            <a:ext cx="365760" cy="457200"/>
+            <a:off x="1325880" y="3383280"/>
+            <a:ext cx="10058400" cy="420624"/>
           </a:xfrm>
           <a:prstGeom prst="rect">
             <a:avLst/>
@@ -17939,29 +17867,127 @@
           <a:lstStyle/>
           <a:p>
             <a:pPr algn="l">
-              <a:defRPr sz="1600" b="1">
-                <a:solidFill>
-                  <a:srgbClr val="D97706"/>
-                </a:solidFill>
-                <a:latin typeface="Avenir Next"/>
-              </a:defRPr>
-            </a:pPr>
-            <a:r>
-              <a:t>→</a:t>
-            </a:r>
-          </a:p>
-        </p:txBody>
-      </p:sp>
-      <p:sp>
-        <p:nvSpPr>
-          <p:cNvPr id="17" name="TextBox 16"/>
+              <a:defRPr sz="1150" b="0">
+                <a:solidFill>
+                  <a:srgbClr val="64748B"/>
+                </a:solidFill>
+                <a:latin typeface="Avenir Next"/>
+              </a:defRPr>
+            </a:pPr>
+            <a:r>
+              <a:t>Compatible chains load and incompatible mixes fail. Lane purity and version pairing are checked in the concretized lockfile, never assumed from the render.</a:t>
+            </a:r>
+          </a:p>
+        </p:txBody>
+      </p:sp>
+      <p:sp>
+        <p:nvSpPr>
+          <p:cNvPr id="14" name="Rounded Rectangle 13"/>
+          <p:cNvSpPr/>
+          <p:nvPr/>
+        </p:nvSpPr>
+        <p:spPr>
+          <a:xfrm>
+            <a:off x="548640" y="4059936"/>
+            <a:ext cx="11091672" cy="1051560"/>
+          </a:xfrm>
+          <a:prstGeom prst="roundRect">
+            <a:avLst/>
+          </a:prstGeom>
+          <a:solidFill>
+            <a:srgbClr val="F1F5F9"/>
+          </a:solidFill>
+          <a:ln>
+            <a:noFill/>
+          </a:ln>
+          <a:effectLst/>
+        </p:spPr>
+        <p:style>
+          <a:lnRef idx="1">
+            <a:schemeClr val="accent1"/>
+          </a:lnRef>
+          <a:fillRef idx="3">
+            <a:schemeClr val="accent1"/>
+          </a:fillRef>
+          <a:effectRef idx="2">
+            <a:schemeClr val="accent1"/>
+          </a:effectRef>
+          <a:fontRef idx="minor">
+            <a:schemeClr val="lt1"/>
+          </a:fontRef>
+        </p:style>
+        <p:txBody>
+          <a:bodyPr rtlCol="0" anchor="ctr"/>
+          <a:lstStyle/>
+          <a:p>
+            <a:pPr algn="ctr"/>
+          </a:p>
+        </p:txBody>
+      </p:sp>
+      <p:sp>
+        <p:nvSpPr>
+          <p:cNvPr id="15" name="Rounded Rectangle 14"/>
+          <p:cNvSpPr/>
+          <p:nvPr/>
+        </p:nvSpPr>
+        <p:spPr>
+          <a:xfrm>
+            <a:off x="548640" y="4059936"/>
+            <a:ext cx="566928" cy="1051560"/>
+          </a:xfrm>
+          <a:prstGeom prst="roundRect">
+            <a:avLst/>
+          </a:prstGeom>
+          <a:solidFill>
+            <a:srgbClr val="7C3AED"/>
+          </a:solidFill>
+          <a:ln>
+            <a:noFill/>
+          </a:ln>
+          <a:effectLst/>
+        </p:spPr>
+        <p:style>
+          <a:lnRef idx="1">
+            <a:schemeClr val="accent1"/>
+          </a:lnRef>
+          <a:fillRef idx="3">
+            <a:schemeClr val="accent1"/>
+          </a:fillRef>
+          <a:effectRef idx="2">
+            <a:schemeClr val="accent1"/>
+          </a:effectRef>
+          <a:fontRef idx="minor">
+            <a:schemeClr val="lt1"/>
+          </a:fontRef>
+        </p:style>
+        <p:txBody>
+          <a:bodyPr rtlCol="0" anchor="ctr" wrap="square" lIns="109728" rIns="109728"/>
+          <a:lstStyle/>
+          <a:p>
+            <a:pPr algn="ctr">
+              <a:defRPr sz="1900" b="1">
+                <a:solidFill>
+                  <a:srgbClr val="FFFFFF"/>
+                </a:solidFill>
+                <a:latin typeface="Avenir Next"/>
+              </a:defRPr>
+            </a:pPr>
+            <a:r>
+              <a:t>3</a:t>
+            </a:r>
+          </a:p>
+        </p:txBody>
+      </p:sp>
+      <p:sp>
+        <p:nvSpPr>
+          <p:cNvPr id="16" name="TextBox 15"/>
           <p:cNvSpPr txBox="1"/>
           <p:nvPr/>
         </p:nvSpPr>
         <p:spPr>
           <a:xfrm>
-            <a:off x="6949440" y="2377440"/>
-            <a:ext cx="4434840" cy="1005840"/>
+            <a:off x="1325880" y="4224528"/>
+            <a:ext cx="10058400" cy="310896"/>
           </a:xfrm>
           <a:prstGeom prst="rect">
             <a:avLst/>
@@ -17975,29 +18001,29 @@
           <a:lstStyle/>
           <a:p>
             <a:pPr algn="l">
-              <a:defRPr sz="1300" b="0">
-                <a:solidFill>
-                  <a:srgbClr val="334155"/>
-                </a:solidFill>
-                <a:latin typeface="Avenir Next"/>
-              </a:defRPr>
-            </a:pPr>
-            <a:r>
-              <a:t>Build the pilot stack on Fran, Wheat, Raider, and Blueback; verify the module/view front door</a:t>
-            </a:r>
-          </a:p>
-        </p:txBody>
-      </p:sp>
-      <p:sp>
-        <p:nvSpPr>
-          <p:cNvPr id="18" name="TextBox 17"/>
+              <a:defRPr sz="1550" b="1">
+                <a:solidFill>
+                  <a:srgbClr val="0F172A"/>
+                </a:solidFill>
+                <a:latin typeface="Avenir Next"/>
+              </a:defRPr>
+            </a:pPr>
+            <a:r>
+              <a:t>Stand up the release process</a:t>
+            </a:r>
+          </a:p>
+        </p:txBody>
+      </p:sp>
+      <p:sp>
+        <p:nvSpPr>
+          <p:cNvPr id="17" name="TextBox 16"/>
           <p:cNvSpPr txBox="1"/>
           <p:nvPr/>
         </p:nvSpPr>
         <p:spPr>
           <a:xfrm>
-            <a:off x="6537960" y="3429000"/>
-            <a:ext cx="365760" cy="457200"/>
+            <a:off x="1325880" y="4590288"/>
+            <a:ext cx="10058400" cy="420624"/>
           </a:xfrm>
           <a:prstGeom prst="rect">
             <a:avLst/>
@@ -18011,29 +18037,127 @@
           <a:lstStyle/>
           <a:p>
             <a:pPr algn="l">
-              <a:defRPr sz="1600" b="1">
-                <a:solidFill>
-                  <a:srgbClr val="D97706"/>
-                </a:solidFill>
-                <a:latin typeface="Avenir Next"/>
-              </a:defRPr>
-            </a:pPr>
-            <a:r>
-              <a:t>→</a:t>
-            </a:r>
-          </a:p>
-        </p:txBody>
-      </p:sp>
-      <p:sp>
-        <p:nvSpPr>
-          <p:cNvPr id="19" name="TextBox 18"/>
+              <a:defRPr sz="1150" b="0">
+                <a:solidFill>
+                  <a:srgbClr val="64748B"/>
+                </a:solidFill>
+                <a:latin typeface="Avenir Next"/>
+              </a:defRPr>
+            </a:pPr>
+            <a:r>
+              <a:t>Build caches, a lockfile per lane, and a release manifest, so a release can be rebuilt exactly, promoted deliberately, and rolled back by moving a pointer.</a:t>
+            </a:r>
+          </a:p>
+        </p:txBody>
+      </p:sp>
+      <p:sp>
+        <p:nvSpPr>
+          <p:cNvPr id="18" name="Rounded Rectangle 17"/>
+          <p:cNvSpPr/>
+          <p:nvPr/>
+        </p:nvSpPr>
+        <p:spPr>
+          <a:xfrm>
+            <a:off x="548640" y="5266944"/>
+            <a:ext cx="11091672" cy="1051560"/>
+          </a:xfrm>
+          <a:prstGeom prst="roundRect">
+            <a:avLst/>
+          </a:prstGeom>
+          <a:solidFill>
+            <a:srgbClr val="F1F5F9"/>
+          </a:solidFill>
+          <a:ln>
+            <a:noFill/>
+          </a:ln>
+          <a:effectLst/>
+        </p:spPr>
+        <p:style>
+          <a:lnRef idx="1">
+            <a:schemeClr val="accent1"/>
+          </a:lnRef>
+          <a:fillRef idx="3">
+            <a:schemeClr val="accent1"/>
+          </a:fillRef>
+          <a:effectRef idx="2">
+            <a:schemeClr val="accent1"/>
+          </a:effectRef>
+          <a:fontRef idx="minor">
+            <a:schemeClr val="lt1"/>
+          </a:fontRef>
+        </p:style>
+        <p:txBody>
+          <a:bodyPr rtlCol="0" anchor="ctr"/>
+          <a:lstStyle/>
+          <a:p>
+            <a:pPr algn="ctr"/>
+          </a:p>
+        </p:txBody>
+      </p:sp>
+      <p:sp>
+        <p:nvSpPr>
+          <p:cNvPr id="19" name="Rounded Rectangle 18"/>
+          <p:cNvSpPr/>
+          <p:nvPr/>
+        </p:nvSpPr>
+        <p:spPr>
+          <a:xfrm>
+            <a:off x="548640" y="5266944"/>
+            <a:ext cx="566928" cy="1051560"/>
+          </a:xfrm>
+          <a:prstGeom prst="roundRect">
+            <a:avLst/>
+          </a:prstGeom>
+          <a:solidFill>
+            <a:srgbClr val="D97706"/>
+          </a:solidFill>
+          <a:ln>
+            <a:noFill/>
+          </a:ln>
+          <a:effectLst/>
+        </p:spPr>
+        <p:style>
+          <a:lnRef idx="1">
+            <a:schemeClr val="accent1"/>
+          </a:lnRef>
+          <a:fillRef idx="3">
+            <a:schemeClr val="accent1"/>
+          </a:fillRef>
+          <a:effectRef idx="2">
+            <a:schemeClr val="accent1"/>
+          </a:effectRef>
+          <a:fontRef idx="minor">
+            <a:schemeClr val="lt1"/>
+          </a:fontRef>
+        </p:style>
+        <p:txBody>
+          <a:bodyPr rtlCol="0" anchor="ctr" wrap="square" lIns="109728" rIns="109728"/>
+          <a:lstStyle/>
+          <a:p>
+            <a:pPr algn="ctr">
+              <a:defRPr sz="1900" b="1">
+                <a:solidFill>
+                  <a:srgbClr val="FFFFFF"/>
+                </a:solidFill>
+                <a:latin typeface="Avenir Next"/>
+              </a:defRPr>
+            </a:pPr>
+            <a:r>
+              <a:t>4</a:t>
+            </a:r>
+          </a:p>
+        </p:txBody>
+      </p:sp>
+      <p:sp>
+        <p:nvSpPr>
+          <p:cNvPr id="20" name="TextBox 19"/>
           <p:cNvSpPr txBox="1"/>
           <p:nvPr/>
         </p:nvSpPr>
         <p:spPr>
           <a:xfrm>
-            <a:off x="6949440" y="3429000"/>
-            <a:ext cx="4434840" cy="1005840"/>
+            <a:off x="1325880" y="5431536"/>
+            <a:ext cx="10058400" cy="310896"/>
           </a:xfrm>
           <a:prstGeom prst="rect">
             <a:avLst/>
@@ -18047,29 +18171,29 @@
           <a:lstStyle/>
           <a:p>
             <a:pPr algn="l">
-              <a:defRPr sz="1300" b="0">
-                <a:solidFill>
-                  <a:srgbClr val="334155"/>
-                </a:solidFill>
-                <a:latin typeface="Avenir Next"/>
-              </a:defRPr>
-            </a:pPr>
-            <a:r>
-              <a:t>Encode module compatibility checks for multi-version package chains</a:t>
-            </a:r>
-          </a:p>
-        </p:txBody>
-      </p:sp>
-      <p:sp>
-        <p:nvSpPr>
-          <p:cNvPr id="20" name="TextBox 19"/>
+              <a:defRPr sz="1550" b="1">
+                <a:solidFill>
+                  <a:srgbClr val="0F172A"/>
+                </a:solidFill>
+                <a:latin typeface="Avenir Next"/>
+              </a:defRPr>
+            </a:pPr>
+            <a:r>
+              <a:t>Settle the open decisions</a:t>
+            </a:r>
+          </a:p>
+        </p:txBody>
+      </p:sp>
+      <p:sp>
+        <p:nvSpPr>
+          <p:cNvPr id="21" name="TextBox 20"/>
           <p:cNvSpPr txBox="1"/>
           <p:nvPr/>
         </p:nvSpPr>
         <p:spPr>
           <a:xfrm>
-            <a:off x="6537960" y="4480560"/>
-            <a:ext cx="365760" cy="457200"/>
+            <a:off x="1325880" y="5797296"/>
+            <a:ext cx="10058400" cy="420624"/>
           </a:xfrm>
           <a:prstGeom prst="rect">
             <a:avLst/>
@@ -18083,51 +18207,15 @@
           <a:lstStyle/>
           <a:p>
             <a:pPr algn="l">
-              <a:defRPr sz="1600" b="1">
-                <a:solidFill>
-                  <a:srgbClr val="D97706"/>
-                </a:solidFill>
-                <a:latin typeface="Avenir Next"/>
-              </a:defRPr>
-            </a:pPr>
-            <a:r>
-              <a:t>→</a:t>
-            </a:r>
-          </a:p>
-        </p:txBody>
-      </p:sp>
-      <p:sp>
-        <p:nvSpPr>
-          <p:cNvPr id="21" name="TextBox 20"/>
-          <p:cNvSpPr txBox="1"/>
-          <p:nvPr/>
-        </p:nvSpPr>
-        <p:spPr>
-          <a:xfrm>
-            <a:off x="6949440" y="4480560"/>
-            <a:ext cx="4434840" cy="1005840"/>
-          </a:xfrm>
-          <a:prstGeom prst="rect">
-            <a:avLst/>
-          </a:prstGeom>
-          <a:noFill/>
-        </p:spPr>
-        <p:txBody>
-          <a:bodyPr wrap="square" anchor="t">
-            <a:spAutoFit/>
-          </a:bodyPr>
-          <a:lstStyle/>
-          <a:p>
-            <a:pPr algn="l">
-              <a:defRPr sz="1300" b="0">
-                <a:solidFill>
-                  <a:srgbClr val="334155"/>
-                </a:solidFill>
-                <a:latin typeface="Avenir Next"/>
-              </a:defRPr>
-            </a:pPr>
-            <a:r>
-              <a:t>Release process: build caches, lockfiles, release manifest</a:t>
+              <a:defRPr sz="1150" b="0">
+                <a:solidFill>
+                  <a:srgbClr val="64748B"/>
+                </a:solidFill>
+                <a:latin typeface="Avenir Next"/>
+              </a:defRPr>
+            </a:pPr>
+            <a:r>
+              <a:t>Vendor math libraries, compiler surfaces, the Serial tier, and when performance targeting turns on. These shape the roster before it is fixed for v1.</a:t>
             </a:r>
           </a:p>
         </p:txBody>

--- a/presentations/cse_lanes_model.pptx
+++ b/presentations/cse_lanes_model.pptx
@@ -4344,42 +4344,6 @@
             </a:pPr>
             <a:r>
               <a:t>The plan is to build every lane at the portable baseline, prove the model, then turn on per-lane tuning for Genoa, Milan, or Cascade Lake. Each target is a flag plus a full rebuild, so the open part is when, not whether.</a:t>
-            </a:r>
-          </a:p>
-        </p:txBody>
-      </p:sp>
-      <p:sp>
-        <p:nvSpPr>
-          <p:cNvPr id="22" name="TextBox 21"/>
-          <p:cNvSpPr txBox="1"/>
-          <p:nvPr/>
-        </p:nvSpPr>
-        <p:spPr>
-          <a:xfrm>
-            <a:off x="548640" y="6263640"/>
-            <a:ext cx="11064240" cy="365760"/>
-          </a:xfrm>
-          <a:prstGeom prst="rect">
-            <a:avLst/>
-          </a:prstGeom>
-          <a:noFill/>
-        </p:spPr>
-        <p:txBody>
-          <a:bodyPr wrap="square" anchor="t">
-            <a:spAutoFit/>
-          </a:bodyPr>
-          <a:lstStyle/>
-          <a:p>
-            <a:pPr algn="l">
-              <a:defRPr sz="1100" b="0">
-                <a:solidFill>
-                  <a:srgbClr val="64748B"/>
-                </a:solidFill>
-                <a:latin typeface="Avenir Next"/>
-              </a:defRPr>
-            </a:pPr>
-            <a:r>
-              <a:t>Per-package placement and the full reasoning: docs/package_placement_map_v1.html</a:t>
             </a:r>
           </a:p>
         </p:txBody>
@@ -6311,7 +6275,7 @@
               </a:defRPr>
             </a:pPr>
             <a:r>
-              <a:t>Version policy: newest supported + immediate predecessor · pinned to spack-packages v2026.06.0 (Spack v1.1.1)</a:t>
+              <a:t>Version policy: the newest supported release and its immediate predecessor</a:t>
             </a:r>
           </a:p>
         </p:txBody>
@@ -7344,7 +7308,7 @@
               </a:defRPr>
             </a:pPr>
             <a:r>
-              <a:t>Version policy: newest supported + immediate predecessor · pinned to spack-packages v2026.06.0 (Spack v1.1.1)</a:t>
+              <a:t>Version policy: the newest supported release and its immediate predecessor</a:t>
             </a:r>
           </a:p>
         </p:txBody>
@@ -8831,7 +8795,7 @@
               </a:defRPr>
             </a:pPr>
             <a:r>
-              <a:t>Version policy: newest supported + immediate predecessor · pinned to spack-packages v2026.06.0 (Spack v1.1.1)</a:t>
+              <a:t>Version policy: the newest supported release and its immediate predecessor</a:t>
             </a:r>
           </a:p>
         </p:txBody>

--- a/presentations/cse_lanes_model.pptx
+++ b/presentations/cse_lanes_model.pptx
@@ -7501,7 +7501,7 @@
         </p:nvGraphicFramePr>
         <p:xfrm>
           <a:off x="548640" y="1481328"/>
-          <a:ext cx="11091672" cy="5125212"/>
+          <a:ext cx="11091672" cy="4829860"/>
         </p:xfrm>
         <a:graphic>
           <a:graphicData uri="http://schemas.openxmlformats.org/drawingml/2006/table">
@@ -7514,7 +7514,7 @@
                 <a:gridCol w="2286000"/>
                 <a:gridCol w="6885432"/>
               </a:tblGrid>
-              <a:tr h="269748">
+              <a:tr h="254203">
                 <a:tc>
                   <a:txBody>
                     <a:bodyPr/>
@@ -7588,7 +7588,7 @@
                   </a:tcPr>
                 </a:tc>
               </a:tr>
-              <a:tr h="269748">
+              <a:tr h="254203">
                 <a:tc gridSpan="3">
                   <a:txBody>
                     <a:bodyPr/>
@@ -7630,7 +7630,7 @@
                   <a:tcPr/>
                 </a:tc>
               </a:tr>
-              <a:tr h="269748">
+              <a:tr h="254203">
                 <a:tc>
                   <a:txBody>
                     <a:bodyPr/>
@@ -7704,7 +7704,7 @@
                   </a:tcPr>
                 </a:tc>
               </a:tr>
-              <a:tr h="269748">
+              <a:tr h="254203">
                 <a:tc>
                   <a:txBody>
                     <a:bodyPr/>
@@ -7778,7 +7778,7 @@
                   </a:tcPr>
                 </a:tc>
               </a:tr>
-              <a:tr h="269748">
+              <a:tr h="254203">
                 <a:tc>
                   <a:txBody>
                     <a:bodyPr/>
@@ -7852,7 +7852,7 @@
                   </a:tcPr>
                 </a:tc>
               </a:tr>
-              <a:tr h="269748">
+              <a:tr h="254203">
                 <a:tc>
                   <a:txBody>
                     <a:bodyPr/>
@@ -7926,7 +7926,7 @@
                   </a:tcPr>
                 </a:tc>
               </a:tr>
-              <a:tr h="269748">
+              <a:tr h="254203">
                 <a:tc gridSpan="3">
                   <a:txBody>
                     <a:bodyPr/>
@@ -7968,7 +7968,7 @@
                   <a:tcPr/>
                 </a:tc>
               </a:tr>
-              <a:tr h="269748">
+              <a:tr h="254203">
                 <a:tc>
                   <a:txBody>
                     <a:bodyPr/>
@@ -8042,7 +8042,7 @@
                   </a:tcPr>
                 </a:tc>
               </a:tr>
-              <a:tr h="269748">
+              <a:tr h="254203">
                 <a:tc>
                   <a:txBody>
                     <a:bodyPr/>
@@ -8116,7 +8116,7 @@
                   </a:tcPr>
                 </a:tc>
               </a:tr>
-              <a:tr h="269748">
+              <a:tr h="254203">
                 <a:tc>
                   <a:txBody>
                     <a:bodyPr/>
@@ -8190,7 +8190,7 @@
                   </a:tcPr>
                 </a:tc>
               </a:tr>
-              <a:tr h="269748">
+              <a:tr h="254203">
                 <a:tc>
                   <a:txBody>
                     <a:bodyPr/>
@@ -8264,7 +8264,7 @@
                   </a:tcPr>
                 </a:tc>
               </a:tr>
-              <a:tr h="269748">
+              <a:tr h="254203">
                 <a:tc>
                   <a:txBody>
                     <a:bodyPr/>
@@ -8338,7 +8338,7 @@
                   </a:tcPr>
                 </a:tc>
               </a:tr>
-              <a:tr h="269748">
+              <a:tr h="254203">
                 <a:tc gridSpan="3">
                   <a:txBody>
                     <a:bodyPr/>
@@ -8380,7 +8380,7 @@
                   <a:tcPr/>
                 </a:tc>
               </a:tr>
-              <a:tr h="269748">
+              <a:tr h="254203">
                 <a:tc>
                   <a:txBody>
                     <a:bodyPr/>
@@ -8443,7 +8443,7 @@
                         </a:defRPr>
                       </a:pPr>
                       <a:r>
-                        <a:t>+mpi +gpu_runtime: its own build, so it can see kernels as well as MPI</a:t>
+                        <a:t>built with MPI and the lane's GPU backend, so it sees kernels as well as MPI</a:t>
                       </a:r>
                     </a:p>
                   </a:txBody>
@@ -8454,7 +8454,7 @@
                   </a:tcPr>
                 </a:tc>
               </a:tr>
-              <a:tr h="269748">
+              <a:tr h="254203">
                 <a:tc>
                   <a:txBody>
                     <a:bodyPr/>
@@ -8517,7 +8517,7 @@
                         </a:defRPr>
                       </a:pPr>
                       <a:r>
-                        <a:t>+gpu → expands per lane: +rocm amdgpu_target=&lt;arch&gt; or +cuda cuda_arch=&lt;n&gt;</a:t>
+                        <a:t>built for the lane's GPU architecture from the probe; new here, it proves the GPU path</a:t>
                       </a:r>
                     </a:p>
                   </a:txBody>
@@ -8528,7 +8528,7 @@
                   </a:tcPr>
                 </a:tc>
               </a:tr>
-              <a:tr h="269748">
+              <a:tr h="254203">
                 <a:tc gridSpan="3">
                   <a:txBody>
                     <a:bodyPr/>
@@ -8570,7 +8570,7 @@
                   <a:tcPr/>
                 </a:tc>
               </a:tr>
-              <a:tr h="269748">
+              <a:tr h="254203">
                 <a:tc>
                   <a:txBody>
                     <a:bodyPr/>
@@ -8644,7 +8644,7 @@
                   </a:tcPr>
                 </a:tc>
               </a:tr>
-              <a:tr h="269748">
+              <a:tr h="254203">
                 <a:tc gridSpan="3">
                   <a:txBody>
                     <a:bodyPr/>
@@ -8686,7 +8686,7 @@
                   <a:tcPr/>
                 </a:tc>
               </a:tr>
-              <a:tr h="269748">
+              <a:tr h="254206">
                 <a:tc>
                   <a:txBody>
                     <a:bodyPr/>

--- a/presentations/cse_lanes_model.pptx
+++ b/presentations/cse_lanes_model.pptx
@@ -4851,7 +4851,7 @@
               </a:defRPr>
             </a:pPr>
             <a:r>
-              <a:t>Common compiler-dependent packages: loadable from every lane</a:t>
+              <a:t>Compiler-common: built for this compiler, independent of the lane</a:t>
             </a:r>
           </a:p>
           <a:p>
@@ -4864,7 +4864,7 @@
               </a:defRPr>
             </a:pPr>
             <a:r>
-              <a:t>openblas · gnuplot · one Serial-lane build, one install, shared module root</a:t>
+              <a:t>openblas · gnuplot · load them from Serial, MPI, or GPU alike; one build, one install</a:t>
             </a:r>
           </a:p>
         </p:txBody>
@@ -7098,7 +7098,7 @@
                         </a:defRPr>
                       </a:pPr>
                       <a:r>
-                        <a:t>Common compiler-dependent: built here once, available in every lane</a:t>
+                        <a:t>Compiler-common: built for this compiler, loadable from any lane</a:t>
                       </a:r>
                     </a:p>
                   </a:txBody>
@@ -8543,7 +8543,7 @@
                         </a:defRPr>
                       </a:pPr>
                       <a:r>
-                        <a:t>Common compiler-dependent: the Serial-lane build, available here too</a:t>
+                        <a:t>Compiler-common: independent of the lane, loadable from any of them</a:t>
                       </a:r>
                     </a:p>
                   </a:txBody>
@@ -8585,7 +8585,7 @@
                         </a:defRPr>
                       </a:pPr>
                       <a:r>
-                        <a:t>common packages</a:t>
+                        <a:t>compiler-common</a:t>
                       </a:r>
                     </a:p>
                   </a:txBody>
@@ -8609,7 +8609,7 @@
                         </a:defRPr>
                       </a:pPr>
                       <a:r>
-                        <a:t>see Serial</a:t>
+                        <a:t>see below</a:t>
                       </a:r>
                     </a:p>
                   </a:txBody>
@@ -8633,7 +8633,7 @@
                         </a:defRPr>
                       </a:pPr>
                       <a:r>
-                        <a:t>openblas · gnuplot: the same modules through the shared root, nothing rebuilt</a:t>
+                        <a:t>openblas · gnuplot: its own group, loadable from any lane of this compiler</a:t>
                       </a:r>
                     </a:p>
                   </a:txBody>
@@ -13721,7 +13721,7 @@
               </a:defRPr>
             </a:pPr>
             <a:r>
-              <a:t>Two classes: non-MPI builds of MPI-capable packages, and common compiler-dependent packages that every lane can load.</a:t>
+              <a:t>MPI-capable packages built without MPI on purpose, for work that never launches a parallel job.</a:t>
             </a:r>
           </a:p>
         </p:txBody>
@@ -13757,7 +13757,7 @@
               </a:defRPr>
             </a:pPr>
             <a:r>
-              <a:t>hdf5~mpi · fftw~mpi  |  openblas · gnuplot</a:t>
+              <a:t>hdf5~mpi · netcdf~mpi · fftw~mpi · boost~mpi</a:t>
             </a:r>
           </a:p>
         </p:txBody>

--- a/presentations/cse_lanes_model.pptx
+++ b/presentations/cse_lanes_model.pptx
@@ -4864,7 +4864,7 @@
               </a:defRPr>
             </a:pPr>
             <a:r>
-              <a:t>openblas · gnuplot · load them from Serial, MPI, or GPU alike; one build, one install</a:t>
+              <a:t>openblas · gnuplot · loadable as soon as the surface loads, before any lane; one build, one install</a:t>
             </a:r>
           </a:p>
         </p:txBody>
@@ -5296,7 +5296,7 @@
         </p:nvGraphicFramePr>
         <p:xfrm>
           <a:off x="548640" y="1481328"/>
-          <a:ext cx="11091672" cy="4224528"/>
+          <a:ext cx="11091672" cy="5129784"/>
         </p:xfrm>
         <a:graphic>
           <a:graphicData uri="http://schemas.openxmlformats.org/drawingml/2006/table">
@@ -6240,6 +6240,196 @@
                   </a:tcPr>
                 </a:tc>
               </a:tr>
+              <a:tr h="301752">
+                <a:tc gridSpan="3">
+                  <a:txBody>
+                    <a:bodyPr/>
+                    <a:lstStyle/>
+                    <a:p>
+                      <a:pPr>
+                        <a:defRPr sz="1150" b="1">
+                          <a:solidFill>
+                            <a:srgbClr val="FFFFFF"/>
+                          </a:solidFill>
+                          <a:latin typeface="Avenir Next"/>
+                        </a:defRPr>
+                      </a:pPr>
+                      <a:r>
+                        <a:t>Compiler-common: its own group, loadable before any lane</a:t>
+                      </a:r>
+                    </a:p>
+                  </a:txBody>
+                  <a:tcPr marL="109728" marR="73152" marT="13716" marB="13716" anchor="ctr">
+                    <a:solidFill>
+                      <a:srgbClr val="15803D"/>
+                    </a:solidFill>
+                  </a:tcPr>
+                </a:tc>
+                <a:tc hMerge="1">
+                  <a:txBody>
+                    <a:bodyPr/>
+                    <a:lstStyle/>
+                    <a:p/>
+                  </a:txBody>
+                  <a:tcPr/>
+                </a:tc>
+                <a:tc hMerge="1">
+                  <a:txBody>
+                    <a:bodyPr/>
+                    <a:lstStyle/>
+                    <a:p/>
+                  </a:txBody>
+                  <a:tcPr/>
+                </a:tc>
+              </a:tr>
+              <a:tr h="301752">
+                <a:tc>
+                  <a:txBody>
+                    <a:bodyPr/>
+                    <a:lstStyle/>
+                    <a:p>
+                      <a:pPr>
+                        <a:defRPr sz="1100" b="1">
+                          <a:solidFill>
+                            <a:srgbClr val="0F172A"/>
+                          </a:solidFill>
+                          <a:latin typeface="Avenir Next"/>
+                        </a:defRPr>
+                      </a:pPr>
+                      <a:r>
+                        <a:t>openblas</a:t>
+                      </a:r>
+                    </a:p>
+                  </a:txBody>
+                  <a:tcPr marL="109728" marR="73152" marT="13716" marB="13716" anchor="ctr">
+                    <a:solidFill>
+                      <a:srgbClr val="FFFFFF"/>
+                    </a:solidFill>
+                  </a:tcPr>
+                </a:tc>
+                <a:tc>
+                  <a:txBody>
+                    <a:bodyPr/>
+                    <a:lstStyle/>
+                    <a:p>
+                      <a:pPr>
+                        <a:defRPr sz="1100" b="0">
+                          <a:solidFill>
+                            <a:srgbClr val="334155"/>
+                          </a:solidFill>
+                          <a:latin typeface="Avenir Next"/>
+                        </a:defRPr>
+                      </a:pPr>
+                      <a:r>
+                        <a:t>0.3.33 · 0.3.32</a:t>
+                      </a:r>
+                    </a:p>
+                  </a:txBody>
+                  <a:tcPr marL="109728" marR="73152" marT="13716" marB="13716" anchor="ctr">
+                    <a:solidFill>
+                      <a:srgbClr val="FFFFFF"/>
+                    </a:solidFill>
+                  </a:tcPr>
+                </a:tc>
+                <a:tc>
+                  <a:txBody>
+                    <a:bodyPr/>
+                    <a:lstStyle/>
+                    <a:p>
+                      <a:pPr>
+                        <a:defRPr sz="1050" b="0">
+                          <a:solidFill>
+                            <a:srgbClr val="64748B"/>
+                          </a:solidFill>
+                          <a:latin typeface="Avenir Next"/>
+                        </a:defRPr>
+                      </a:pPr>
+                      <a:r>
+                        <a:t>the one BLAS and LAPACK: openblas provides both APIs</a:t>
+                      </a:r>
+                    </a:p>
+                  </a:txBody>
+                  <a:tcPr marL="109728" marR="73152" marT="13716" marB="13716" anchor="ctr">
+                    <a:solidFill>
+                      <a:srgbClr val="FFFFFF"/>
+                    </a:solidFill>
+                  </a:tcPr>
+                </a:tc>
+              </a:tr>
+              <a:tr h="301752">
+                <a:tc>
+                  <a:txBody>
+                    <a:bodyPr/>
+                    <a:lstStyle/>
+                    <a:p>
+                      <a:pPr>
+                        <a:defRPr sz="1100" b="1">
+                          <a:solidFill>
+                            <a:srgbClr val="0F172A"/>
+                          </a:solidFill>
+                          <a:latin typeface="Avenir Next"/>
+                        </a:defRPr>
+                      </a:pPr>
+                      <a:r>
+                        <a:t>gnuplot</a:t>
+                      </a:r>
+                    </a:p>
+                  </a:txBody>
+                  <a:tcPr marL="109728" marR="73152" marT="13716" marB="13716" anchor="ctr">
+                    <a:solidFill>
+                      <a:srgbClr val="FFFFFF"/>
+                    </a:solidFill>
+                  </a:tcPr>
+                </a:tc>
+                <a:tc>
+                  <a:txBody>
+                    <a:bodyPr/>
+                    <a:lstStyle/>
+                    <a:p>
+                      <a:pPr>
+                        <a:defRPr sz="1100" b="0">
+                          <a:solidFill>
+                            <a:srgbClr val="334155"/>
+                          </a:solidFill>
+                          <a:latin typeface="Avenir Next"/>
+                        </a:defRPr>
+                      </a:pPr>
+                      <a:r>
+                        <a:t>6.0.0 · 5.4.10</a:t>
+                      </a:r>
+                    </a:p>
+                  </a:txBody>
+                  <a:tcPr marL="109728" marR="73152" marT="13716" marB="13716" anchor="ctr">
+                    <a:solidFill>
+                      <a:srgbClr val="FFFFFF"/>
+                    </a:solidFill>
+                  </a:tcPr>
+                </a:tc>
+                <a:tc>
+                  <a:txBody>
+                    <a:bodyPr/>
+                    <a:lstStyle/>
+                    <a:p>
+                      <a:pPr>
+                        <a:defRPr sz="1050" b="0">
+                          <a:solidFill>
+                            <a:srgbClr val="64748B"/>
+                          </a:solidFill>
+                          <a:latin typeface="Avenir Next"/>
+                        </a:defRPr>
+                      </a:pPr>
+                      <a:r>
+                        <a:t>needs the surface's compiler, so not Core</a:t>
+                      </a:r>
+                    </a:p>
+                  </a:txBody>
+                  <a:tcPr marL="109728" marR="73152" marT="13716" marB="13716" anchor="ctr">
+                    <a:solidFill>
+                      <a:srgbClr val="FFFFFF"/>
+                    </a:solidFill>
+                  </a:tcPr>
+                </a:tc>
+              </a:tr>
             </a:tbl>
           </a:graphicData>
         </a:graphic>
@@ -6468,7 +6658,7 @@
         </p:nvGraphicFramePr>
         <p:xfrm>
           <a:off x="548640" y="1481328"/>
-          <a:ext cx="11091672" cy="3621024"/>
+          <a:ext cx="11091672" cy="2715768"/>
         </p:xfrm>
         <a:graphic>
           <a:graphicData uri="http://schemas.openxmlformats.org/drawingml/2006/table">
@@ -7073,196 +7263,6 @@
                       </a:pPr>
                       <a:r>
                         <a:t>~mpi here; the MPI lane carries its own +mpi build</a:t>
-                      </a:r>
-                    </a:p>
-                  </a:txBody>
-                  <a:tcPr marL="109728" marR="73152" marT="13716" marB="13716" anchor="ctr">
-                    <a:solidFill>
-                      <a:srgbClr val="FFFFFF"/>
-                    </a:solidFill>
-                  </a:tcPr>
-                </a:tc>
-              </a:tr>
-              <a:tr h="301752">
-                <a:tc gridSpan="3">
-                  <a:txBody>
-                    <a:bodyPr/>
-                    <a:lstStyle/>
-                    <a:p>
-                      <a:pPr>
-                        <a:defRPr sz="1150" b="1">
-                          <a:solidFill>
-                            <a:srgbClr val="FFFFFF"/>
-                          </a:solidFill>
-                          <a:latin typeface="Avenir Next"/>
-                        </a:defRPr>
-                      </a:pPr>
-                      <a:r>
-                        <a:t>Compiler-common: built for this compiler, loadable from any lane</a:t>
-                      </a:r>
-                    </a:p>
-                  </a:txBody>
-                  <a:tcPr marL="109728" marR="73152" marT="13716" marB="13716" anchor="ctr">
-                    <a:solidFill>
-                      <a:srgbClr val="15803D"/>
-                    </a:solidFill>
-                  </a:tcPr>
-                </a:tc>
-                <a:tc hMerge="1">
-                  <a:txBody>
-                    <a:bodyPr/>
-                    <a:lstStyle/>
-                    <a:p/>
-                  </a:txBody>
-                  <a:tcPr/>
-                </a:tc>
-                <a:tc hMerge="1">
-                  <a:txBody>
-                    <a:bodyPr/>
-                    <a:lstStyle/>
-                    <a:p/>
-                  </a:txBody>
-                  <a:tcPr/>
-                </a:tc>
-              </a:tr>
-              <a:tr h="301752">
-                <a:tc>
-                  <a:txBody>
-                    <a:bodyPr/>
-                    <a:lstStyle/>
-                    <a:p>
-                      <a:pPr>
-                        <a:defRPr sz="1100" b="1">
-                          <a:solidFill>
-                            <a:srgbClr val="0F172A"/>
-                          </a:solidFill>
-                          <a:latin typeface="Avenir Next"/>
-                        </a:defRPr>
-                      </a:pPr>
-                      <a:r>
-                        <a:t>openblas</a:t>
-                      </a:r>
-                    </a:p>
-                  </a:txBody>
-                  <a:tcPr marL="109728" marR="73152" marT="13716" marB="13716" anchor="ctr">
-                    <a:solidFill>
-                      <a:srgbClr val="FFFFFF"/>
-                    </a:solidFill>
-                  </a:tcPr>
-                </a:tc>
-                <a:tc>
-                  <a:txBody>
-                    <a:bodyPr/>
-                    <a:lstStyle/>
-                    <a:p>
-                      <a:pPr>
-                        <a:defRPr sz="1100" b="0">
-                          <a:solidFill>
-                            <a:srgbClr val="334155"/>
-                          </a:solidFill>
-                          <a:latin typeface="Avenir Next"/>
-                        </a:defRPr>
-                      </a:pPr>
-                      <a:r>
-                        <a:t>0.3.33 · 0.3.32</a:t>
-                      </a:r>
-                    </a:p>
-                  </a:txBody>
-                  <a:tcPr marL="109728" marR="73152" marT="13716" marB="13716" anchor="ctr">
-                    <a:solidFill>
-                      <a:srgbClr val="FFFFFF"/>
-                    </a:solidFill>
-                  </a:tcPr>
-                </a:tc>
-                <a:tc>
-                  <a:txBody>
-                    <a:bodyPr/>
-                    <a:lstStyle/>
-                    <a:p>
-                      <a:pPr>
-                        <a:defRPr sz="1050" b="0">
-                          <a:solidFill>
-                            <a:srgbClr val="64748B"/>
-                          </a:solidFill>
-                          <a:latin typeface="Avenir Next"/>
-                        </a:defRPr>
-                      </a:pPr>
-                      <a:r>
-                        <a:t>the one BLAS and LAPACK: openblas provides both APIs. Payload rather than core: performance-sensitive</a:t>
-                      </a:r>
-                    </a:p>
-                  </a:txBody>
-                  <a:tcPr marL="109728" marR="73152" marT="13716" marB="13716" anchor="ctr">
-                    <a:solidFill>
-                      <a:srgbClr val="FFFFFF"/>
-                    </a:solidFill>
-                  </a:tcPr>
-                </a:tc>
-              </a:tr>
-              <a:tr h="301752">
-                <a:tc>
-                  <a:txBody>
-                    <a:bodyPr/>
-                    <a:lstStyle/>
-                    <a:p>
-                      <a:pPr>
-                        <a:defRPr sz="1100" b="1">
-                          <a:solidFill>
-                            <a:srgbClr val="0F172A"/>
-                          </a:solidFill>
-                          <a:latin typeface="Avenir Next"/>
-                        </a:defRPr>
-                      </a:pPr>
-                      <a:r>
-                        <a:t>gnuplot</a:t>
-                      </a:r>
-                    </a:p>
-                  </a:txBody>
-                  <a:tcPr marL="109728" marR="73152" marT="13716" marB="13716" anchor="ctr">
-                    <a:solidFill>
-                      <a:srgbClr val="FFFFFF"/>
-                    </a:solidFill>
-                  </a:tcPr>
-                </a:tc>
-                <a:tc>
-                  <a:txBody>
-                    <a:bodyPr/>
-                    <a:lstStyle/>
-                    <a:p>
-                      <a:pPr>
-                        <a:defRPr sz="1100" b="0">
-                          <a:solidFill>
-                            <a:srgbClr val="334155"/>
-                          </a:solidFill>
-                          <a:latin typeface="Avenir Next"/>
-                        </a:defRPr>
-                      </a:pPr>
-                      <a:r>
-                        <a:t>6.0.0 · 5.4.10</a:t>
-                      </a:r>
-                    </a:p>
-                  </a:txBody>
-                  <a:tcPr marL="109728" marR="73152" marT="13716" marB="13716" anchor="ctr">
-                    <a:solidFill>
-                      <a:srgbClr val="FFFFFF"/>
-                    </a:solidFill>
-                  </a:tcPr>
-                </a:tc>
-                <a:tc>
-                  <a:txBody>
-                    <a:bodyPr/>
-                    <a:lstStyle/>
-                    <a:p>
-                      <a:pPr>
-                        <a:defRPr sz="1050" b="0">
-                          <a:solidFill>
-                            <a:srgbClr val="64748B"/>
-                          </a:solidFill>
-                          <a:latin typeface="Avenir Next"/>
-                        </a:defRPr>
-                      </a:pPr>
-                      <a:r>
-                        <a:t>needs the surface's compiler, so payload rather than core</a:t>
                       </a:r>
                     </a:p>
                   </a:txBody>
@@ -8543,7 +8543,7 @@
                         </a:defRPr>
                       </a:pPr>
                       <a:r>
-                        <a:t>Compiler-common: independent of the lane, loadable from any of them</a:t>
+                        <a:t>Compiler-common: loadable here too, from the surface</a:t>
                       </a:r>
                     </a:p>
                   </a:txBody>
@@ -8609,7 +8609,7 @@
                         </a:defRPr>
                       </a:pPr>
                       <a:r>
-                        <a:t>see below</a:t>
+                        <a:t>see Core slide</a:t>
                       </a:r>
                     </a:p>
                   </a:txBody>
@@ -8633,7 +8633,7 @@
                         </a:defRPr>
                       </a:pPr>
                       <a:r>
-                        <a:t>openblas · gnuplot: its own group, loadable from any lane of this compiler</a:t>
+                        <a:t>openblas · gnuplot: available before and regardless of the lane choice</a:t>
                       </a:r>
                     </a:p>
                   </a:txBody>
@@ -13174,7 +13174,7 @@
               </a:defRPr>
             </a:pPr>
             <a:r>
-              <a:t>Only the chosen lane is visible; common packages (BLAS/LAPACK, gnuplot) are reachable from every lane.</a:t>
+              <a:t>Only the chosen lane is visible; common packages (BLAS/LAPACK, gnuplot) load from the surface itself.</a:t>
             </a:r>
           </a:p>
           <a:p>

--- a/presentations/cse_lanes_model.pptx
+++ b/presentations/cse_lanes_model.pptx
@@ -9986,7 +9986,7 @@
         <p:spPr>
           <a:xfrm>
             <a:off x="6766560" y="3063240"/>
-            <a:ext cx="2103120" cy="566928"/>
+            <a:ext cx="1371600" cy="566928"/>
           </a:xfrm>
           <a:prstGeom prst="roundRect">
             <a:avLst/>
@@ -10018,7 +10018,7 @@
           <a:lstStyle/>
           <a:p>
             <a:pPr algn="ctr">
-              <a:defRPr sz="1250" b="1">
+              <a:defRPr sz="1150" b="1">
                 <a:solidFill>
                   <a:srgbClr val="FFFFFF"/>
                 </a:solidFill>
@@ -10026,7 +10026,20 @@
               </a:defRPr>
             </a:pPr>
             <a:r>
-              <a:t>Core (automatic)</a:t>
+              <a:t>Core</a:t>
+            </a:r>
+          </a:p>
+          <a:p>
+            <a:pPr algn="ctr">
+              <a:defRPr sz="950" b="0">
+                <a:solidFill>
+                  <a:srgbClr val="FFFFFF"/>
+                </a:solidFill>
+                <a:latin typeface="Avenir Next"/>
+              </a:defRPr>
+            </a:pPr>
+            <a:r>
+              <a:t>modules</a:t>
             </a:r>
           </a:p>
         </p:txBody>
@@ -10039,8 +10052,75 @@
         </p:nvSpPr>
         <p:spPr>
           <a:xfrm>
-            <a:off x="9006840" y="3063240"/>
-            <a:ext cx="2103120" cy="566928"/>
+            <a:off x="8229600" y="3063240"/>
+            <a:ext cx="1371600" cy="566928"/>
+          </a:xfrm>
+          <a:prstGeom prst="roundRect">
+            <a:avLst/>
+          </a:prstGeom>
+          <a:solidFill>
+            <a:srgbClr val="15803D"/>
+          </a:solidFill>
+          <a:ln>
+            <a:noFill/>
+          </a:ln>
+          <a:effectLst/>
+        </p:spPr>
+        <p:style>
+          <a:lnRef idx="1">
+            <a:schemeClr val="accent1"/>
+          </a:lnRef>
+          <a:fillRef idx="3">
+            <a:schemeClr val="accent1"/>
+          </a:fillRef>
+          <a:effectRef idx="2">
+            <a:schemeClr val="accent1"/>
+          </a:effectRef>
+          <a:fontRef idx="minor">
+            <a:schemeClr val="lt1"/>
+          </a:fontRef>
+        </p:style>
+        <p:txBody>
+          <a:bodyPr rtlCol="0" anchor="ctr" wrap="square" lIns="109728" rIns="109728"/>
+          <a:lstStyle/>
+          <a:p>
+            <a:pPr algn="ctr">
+              <a:defRPr sz="1150" b="1">
+                <a:solidFill>
+                  <a:srgbClr val="FFFFFF"/>
+                </a:solidFill>
+                <a:latin typeface="Avenir Next"/>
+              </a:defRPr>
+            </a:pPr>
+            <a:r>
+              <a:t>Common</a:t>
+            </a:r>
+          </a:p>
+          <a:p>
+            <a:pPr algn="ctr">
+              <a:defRPr sz="950" b="0">
+                <a:solidFill>
+                  <a:srgbClr val="FFFFFF"/>
+                </a:solidFill>
+                <a:latin typeface="Avenir Next"/>
+              </a:defRPr>
+            </a:pPr>
+            <a:r>
+              <a:t>modules</a:t>
+            </a:r>
+          </a:p>
+        </p:txBody>
+      </p:sp>
+      <p:sp>
+        <p:nvSpPr>
+          <p:cNvPr id="28" name="Rounded Rectangle 27"/>
+          <p:cNvSpPr/>
+          <p:nvPr/>
+        </p:nvSpPr>
+        <p:spPr>
+          <a:xfrm>
+            <a:off x="9692640" y="3063240"/>
+            <a:ext cx="1417320" cy="566928"/>
           </a:xfrm>
           <a:prstGeom prst="roundRect">
             <a:avLst/>
@@ -10072,7 +10152,7 @@
           <a:lstStyle/>
           <a:p>
             <a:pPr algn="ctr">
-              <a:defRPr sz="1250" b="1">
+              <a:defRPr sz="1150" b="1">
                 <a:solidFill>
                   <a:srgbClr val="FFFFFF"/>
                 </a:solidFill>
@@ -10080,14 +10160,27 @@
               </a:defRPr>
             </a:pPr>
             <a:r>
-              <a:t>Foundation (on the path)</a:t>
+              <a:t>Foundation</a:t>
+            </a:r>
+          </a:p>
+          <a:p>
+            <a:pPr algn="ctr">
+              <a:defRPr sz="950" b="0">
+                <a:solidFill>
+                  <a:srgbClr val="FFFFFF"/>
+                </a:solidFill>
+                <a:latin typeface="Avenir Next"/>
+              </a:defRPr>
+            </a:pPr>
+            <a:r>
+              <a:t>on the path</a:t>
             </a:r>
           </a:p>
         </p:txBody>
       </p:sp>
       <p:cxnSp>
         <p:nvCxnSpPr>
-          <p:cNvPr id="28" name="Connector 27"/>
+          <p:cNvPr id="29" name="Connector 28"/>
           <p:cNvCxnSpPr/>
           <p:nvPr/>
         </p:nvCxnSpPr>
@@ -10124,7 +10217,7 @@
       </p:cxnSp>
       <p:sp>
         <p:nvSpPr>
-          <p:cNvPr id="29" name="TextBox 28"/>
+          <p:cNvPr id="30" name="TextBox 29"/>
           <p:cNvSpPr txBox="1"/>
           <p:nvPr/>
         </p:nvSpPr>
@@ -10160,7 +10253,7 @@
       </p:sp>
       <p:sp>
         <p:nvSpPr>
-          <p:cNvPr id="30" name="Rounded Rectangle 29"/>
+          <p:cNvPr id="31" name="Rounded Rectangle 30"/>
           <p:cNvSpPr/>
           <p:nvPr/>
         </p:nvSpPr>
@@ -10214,7 +10307,7 @@
       </p:sp>
       <p:sp>
         <p:nvSpPr>
-          <p:cNvPr id="31" name="Rounded Rectangle 30"/>
+          <p:cNvPr id="32" name="Rounded Rectangle 31"/>
           <p:cNvSpPr/>
           <p:nvPr/>
         </p:nvSpPr>
@@ -10268,7 +10361,7 @@
       </p:sp>
       <p:sp>
         <p:nvSpPr>
-          <p:cNvPr id="32" name="Rounded Rectangle 31"/>
+          <p:cNvPr id="33" name="Rounded Rectangle 32"/>
           <p:cNvSpPr/>
           <p:nvPr/>
         </p:nvSpPr>
@@ -10322,7 +10415,7 @@
       </p:sp>
       <p:sp>
         <p:nvSpPr>
-          <p:cNvPr id="33" name="TextBox 32"/>
+          <p:cNvPr id="34" name="TextBox 33"/>
           <p:cNvSpPr txBox="1"/>
           <p:nvPr/>
         </p:nvSpPr>
@@ -12725,8 +12818,8 @@
         </p:nvSpPr>
         <p:spPr>
           <a:xfrm>
-            <a:off x="2163470" y="2578608"/>
-            <a:ext cx="3749039" cy="914400"/>
+            <a:off x="685800" y="2578608"/>
+            <a:ext cx="3474720" cy="914400"/>
           </a:xfrm>
           <a:prstGeom prst="roundRect">
             <a:avLst/>
@@ -12758,7 +12851,7 @@
           <a:lstStyle/>
           <a:p>
             <a:pPr algn="ctr">
-              <a:defRPr sz="1450" b="1">
+              <a:defRPr sz="1300" b="1">
                 <a:solidFill>
                   <a:srgbClr val="FFFFFF"/>
                 </a:solidFill>
@@ -12766,12 +12859,12 @@
               </a:defRPr>
             </a:pPr>
             <a:r>
-              <a:t>Core: loads automatically</a:t>
+              <a:t>Core: modules available</a:t>
             </a:r>
           </a:p>
           <a:p>
             <a:pPr algn="ctr">
-              <a:defRPr sz="1150" b="0">
+              <a:defRPr sz="1050" b="0">
                 <a:solidFill>
                   <a:srgbClr val="FFFFFF"/>
                 </a:solidFill>
@@ -12792,8 +12885,75 @@
         </p:nvSpPr>
         <p:spPr>
           <a:xfrm>
-            <a:off x="6278270" y="2578608"/>
-            <a:ext cx="3749039" cy="914400"/>
+            <a:off x="4361688" y="2578608"/>
+            <a:ext cx="3474720" cy="914400"/>
+          </a:xfrm>
+          <a:prstGeom prst="roundRect">
+            <a:avLst/>
+          </a:prstGeom>
+          <a:solidFill>
+            <a:srgbClr val="15803D"/>
+          </a:solidFill>
+          <a:ln>
+            <a:noFill/>
+          </a:ln>
+          <a:effectLst/>
+        </p:spPr>
+        <p:style>
+          <a:lnRef idx="1">
+            <a:schemeClr val="accent1"/>
+          </a:lnRef>
+          <a:fillRef idx="3">
+            <a:schemeClr val="accent1"/>
+          </a:fillRef>
+          <a:effectRef idx="2">
+            <a:schemeClr val="accent1"/>
+          </a:effectRef>
+          <a:fontRef idx="minor">
+            <a:schemeClr val="lt1"/>
+          </a:fontRef>
+        </p:style>
+        <p:txBody>
+          <a:bodyPr rtlCol="0" anchor="ctr" wrap="square" lIns="109728" rIns="109728"/>
+          <a:lstStyle/>
+          <a:p>
+            <a:pPr algn="ctr">
+              <a:defRPr sz="1300" b="1">
+                <a:solidFill>
+                  <a:srgbClr val="FFFFFF"/>
+                </a:solidFill>
+                <a:latin typeface="Avenir Next"/>
+              </a:defRPr>
+            </a:pPr>
+            <a:r>
+              <a:t>GCC Common: modules available</a:t>
+            </a:r>
+          </a:p>
+          <a:p>
+            <a:pPr algn="ctr">
+              <a:defRPr sz="1050" b="0">
+                <a:solidFill>
+                  <a:srgbClr val="FFFFFF"/>
+                </a:solidFill>
+                <a:latin typeface="Avenir Next"/>
+              </a:defRPr>
+            </a:pPr>
+            <a:r>
+              <a:t>openblas · gnuplot</a:t>
+            </a:r>
+          </a:p>
+        </p:txBody>
+      </p:sp>
+      <p:sp>
+        <p:nvSpPr>
+          <p:cNvPr id="10" name="Rounded Rectangle 9"/>
+          <p:cNvSpPr/>
+          <p:nvPr/>
+        </p:nvSpPr>
+        <p:spPr>
+          <a:xfrm>
+            <a:off x="8037575" y="2578608"/>
+            <a:ext cx="3474720" cy="914400"/>
           </a:xfrm>
           <a:prstGeom prst="roundRect">
             <a:avLst/>
@@ -12825,7 +12985,7 @@
           <a:lstStyle/>
           <a:p>
             <a:pPr algn="ctr">
-              <a:defRPr sz="1450" b="1">
+              <a:defRPr sz="1300" b="1">
                 <a:solidFill>
                   <a:srgbClr val="FFFFFF"/>
                 </a:solidFill>
@@ -12833,12 +12993,12 @@
               </a:defRPr>
             </a:pPr>
             <a:r>
-              <a:t>Foundation: on your paths automatically</a:t>
+              <a:t>Foundation: on your paths</a:t>
             </a:r>
           </a:p>
           <a:p>
             <a:pPr algn="ctr">
-              <a:defRPr sz="1150" b="0">
+              <a:defRPr sz="1050" b="0">
                 <a:solidFill>
                   <a:srgbClr val="FFFFFF"/>
                 </a:solidFill>
@@ -12853,7 +13013,7 @@
       </p:sp>
       <p:cxnSp>
         <p:nvCxnSpPr>
-          <p:cNvPr id="10" name="Connector 9"/>
+          <p:cNvPr id="11" name="Connector 10"/>
           <p:cNvCxnSpPr/>
           <p:nvPr/>
         </p:nvCxnSpPr>
@@ -12890,7 +13050,7 @@
       </p:cxnSp>
       <p:sp>
         <p:nvSpPr>
-          <p:cNvPr id="11" name="TextBox 10"/>
+          <p:cNvPr id="12" name="TextBox 11"/>
           <p:cNvSpPr txBox="1"/>
           <p:nvPr/>
         </p:nvSpPr>
@@ -12926,7 +13086,7 @@
       </p:sp>
       <p:sp>
         <p:nvSpPr>
-          <p:cNvPr id="12" name="Rounded Rectangle 11"/>
+          <p:cNvPr id="13" name="Rounded Rectangle 12"/>
           <p:cNvSpPr/>
           <p:nvPr/>
         </p:nvSpPr>
@@ -12986,14 +13146,14 @@
               </a:defRPr>
             </a:pPr>
             <a:r>
-              <a:t>non-MPI hdf5 · fftw · boost, plus openblas · gnuplot</a:t>
-            </a:r>
-          </a:p>
-        </p:txBody>
-      </p:sp>
-      <p:sp>
-        <p:nvSpPr>
-          <p:cNvPr id="13" name="Rounded Rectangle 12"/>
+              <a:t>non-MPI hdf5 · netcdf · fftw · boost</a:t>
+            </a:r>
+          </a:p>
+        </p:txBody>
+      </p:sp>
+      <p:sp>
+        <p:nvSpPr>
+          <p:cNvPr id="14" name="Rounded Rectangle 13"/>
           <p:cNvSpPr/>
           <p:nvPr/>
         </p:nvSpPr>
@@ -13060,7 +13220,7 @@
       </p:sp>
       <p:sp>
         <p:nvSpPr>
-          <p:cNvPr id="14" name="Rounded Rectangle 13"/>
+          <p:cNvPr id="15" name="Rounded Rectangle 14"/>
           <p:cNvSpPr/>
           <p:nvPr/>
         </p:nvSpPr>
@@ -13127,7 +13287,7 @@
       </p:sp>
       <p:sp>
         <p:nvSpPr>
-          <p:cNvPr id="15" name="Rounded Rectangle 14"/>
+          <p:cNvPr id="16" name="Rounded Rectangle 15"/>
           <p:cNvSpPr/>
           <p:nvPr/>
         </p:nvSpPr>
@@ -13379,7 +13539,7 @@
         <p:spPr>
           <a:xfrm>
             <a:off x="548640" y="1645920"/>
-            <a:ext cx="2743200" cy="3246120"/>
+            <a:ext cx="2048256" cy="3429000"/>
           </a:xfrm>
           <a:prstGeom prst="roundRect">
             <a:avLst/>
@@ -13423,7 +13583,7 @@
         <p:spPr>
           <a:xfrm>
             <a:off x="548640" y="1645920"/>
-            <a:ext cx="2743200" cy="685800"/>
+            <a:ext cx="2048256" cy="594360"/>
           </a:xfrm>
           <a:prstGeom prst="roundRect">
             <a:avLst/>
@@ -13466,8 +13626,8 @@
         </p:nvSpPr>
         <p:spPr>
           <a:xfrm>
-            <a:off x="685800" y="1755648"/>
-            <a:ext cx="2468880" cy="502920"/>
+            <a:off x="640080" y="1773936"/>
+            <a:ext cx="1865376" cy="457200"/>
           </a:xfrm>
           <a:prstGeom prst="rect">
             <a:avLst/>
@@ -13481,7 +13641,7 @@
           <a:lstStyle/>
           <a:p>
             <a:pPr algn="ctr">
-              <a:defRPr sz="1700" b="1">
+              <a:defRPr sz="1500" b="1">
                 <a:solidFill>
                   <a:srgbClr val="FFFFFF"/>
                 </a:solidFill>
@@ -13502,8 +13662,8 @@
         </p:nvSpPr>
         <p:spPr>
           <a:xfrm>
-            <a:off x="749808" y="2514600"/>
-            <a:ext cx="2377440" cy="1554480"/>
+            <a:off x="694944" y="2377440"/>
+            <a:ext cx="1783080" cy="1920240"/>
           </a:xfrm>
           <a:prstGeom prst="rect">
             <a:avLst/>
@@ -13517,7 +13677,7 @@
           <a:lstStyle/>
           <a:p>
             <a:pPr algn="l">
-              <a:defRPr sz="1250" b="0">
+              <a:defRPr sz="1100" b="0">
                 <a:solidFill>
                   <a:srgbClr val="334155"/>
                 </a:solidFill>
@@ -13525,7 +13685,7 @@
               </a:defRPr>
             </a:pPr>
             <a:r>
-              <a:t>Compiler-agnostic building blocks and tools. They load with the surface, before any lane is chosen.</a:t>
+              <a:t>Compiler-agnostic building blocks and tools. Available as soon as the surface loads.</a:t>
             </a:r>
           </a:p>
         </p:txBody>
@@ -13538,8 +13698,8 @@
         </p:nvSpPr>
         <p:spPr>
           <a:xfrm>
-            <a:off x="749808" y="4160520"/>
-            <a:ext cx="2377440" cy="640080"/>
+            <a:off x="694944" y="4343400"/>
+            <a:ext cx="1783080" cy="640080"/>
           </a:xfrm>
           <a:prstGeom prst="rect">
             <a:avLst/>
@@ -13553,7 +13713,7 @@
           <a:lstStyle/>
           <a:p>
             <a:pPr algn="l">
-              <a:defRPr sz="1150" b="0">
+              <a:defRPr sz="1000" b="0">
                 <a:solidFill>
                   <a:srgbClr val="64748B"/>
                 </a:solidFill>
@@ -13561,7 +13721,7 @@
               </a:defRPr>
             </a:pPr>
             <a:r>
-              <a:t>cmake · python · miniforge · gsl · sqlite</a:t>
+              <a:t>cmake · python · miniforge · gsl</a:t>
             </a:r>
           </a:p>
         </p:txBody>
@@ -13574,8 +13734,8 @@
         </p:nvSpPr>
         <p:spPr>
           <a:xfrm>
-            <a:off x="3493008" y="1645920"/>
-            <a:ext cx="2743200" cy="3246120"/>
+            <a:off x="2706624" y="1645920"/>
+            <a:ext cx="2048256" cy="3429000"/>
           </a:xfrm>
           <a:prstGeom prst="roundRect">
             <a:avLst/>
@@ -13618,8 +13778,204 @@
         </p:nvSpPr>
         <p:spPr>
           <a:xfrm>
-            <a:off x="3493008" y="1645920"/>
-            <a:ext cx="2743200" cy="685800"/>
+            <a:off x="2706624" y="1645920"/>
+            <a:ext cx="2048256" cy="594360"/>
+          </a:xfrm>
+          <a:prstGeom prst="roundRect">
+            <a:avLst/>
+          </a:prstGeom>
+          <a:solidFill>
+            <a:srgbClr val="15803D"/>
+          </a:solidFill>
+          <a:ln>
+            <a:noFill/>
+          </a:ln>
+          <a:effectLst/>
+        </p:spPr>
+        <p:style>
+          <a:lnRef idx="1">
+            <a:schemeClr val="accent1"/>
+          </a:lnRef>
+          <a:fillRef idx="3">
+            <a:schemeClr val="accent1"/>
+          </a:fillRef>
+          <a:effectRef idx="2">
+            <a:schemeClr val="accent1"/>
+          </a:effectRef>
+          <a:fontRef idx="minor">
+            <a:schemeClr val="lt1"/>
+          </a:fontRef>
+        </p:style>
+        <p:txBody>
+          <a:bodyPr rtlCol="0" anchor="ctr"/>
+          <a:lstStyle/>
+          <a:p>
+            <a:pPr algn="ctr"/>
+          </a:p>
+        </p:txBody>
+      </p:sp>
+      <p:sp>
+        <p:nvSpPr>
+          <p:cNvPr id="13" name="TextBox 12"/>
+          <p:cNvSpPr txBox="1"/>
+          <p:nvPr/>
+        </p:nvSpPr>
+        <p:spPr>
+          <a:xfrm>
+            <a:off x="2798064" y="1773936"/>
+            <a:ext cx="1865376" cy="457200"/>
+          </a:xfrm>
+          <a:prstGeom prst="rect">
+            <a:avLst/>
+          </a:prstGeom>
+          <a:noFill/>
+        </p:spPr>
+        <p:txBody>
+          <a:bodyPr wrap="square" anchor="t">
+            <a:spAutoFit/>
+          </a:bodyPr>
+          <a:lstStyle/>
+          <a:p>
+            <a:pPr algn="ctr">
+              <a:defRPr sz="1500" b="1">
+                <a:solidFill>
+                  <a:srgbClr val="FFFFFF"/>
+                </a:solidFill>
+                <a:latin typeface="Avenir Next"/>
+              </a:defRPr>
+            </a:pPr>
+            <a:r>
+              <a:t>Common</a:t>
+            </a:r>
+          </a:p>
+        </p:txBody>
+      </p:sp>
+      <p:sp>
+        <p:nvSpPr>
+          <p:cNvPr id="14" name="TextBox 13"/>
+          <p:cNvSpPr txBox="1"/>
+          <p:nvPr/>
+        </p:nvSpPr>
+        <p:spPr>
+          <a:xfrm>
+            <a:off x="2852928" y="2377440"/>
+            <a:ext cx="1783080" cy="1920240"/>
+          </a:xfrm>
+          <a:prstGeom prst="rect">
+            <a:avLst/>
+          </a:prstGeom>
+          <a:noFill/>
+        </p:spPr>
+        <p:txBody>
+          <a:bodyPr wrap="square" anchor="t">
+            <a:spAutoFit/>
+          </a:bodyPr>
+          <a:lstStyle/>
+          <a:p>
+            <a:pPr algn="l">
+              <a:defRPr sz="1100" b="0">
+                <a:solidFill>
+                  <a:srgbClr val="334155"/>
+                </a:solidFill>
+                <a:latin typeface="Avenir Next"/>
+              </a:defRPr>
+            </a:pPr>
+            <a:r>
+              <a:t>Built for this compiler, one build for every lane. Available with the surface, like Core.</a:t>
+            </a:r>
+          </a:p>
+        </p:txBody>
+      </p:sp>
+      <p:sp>
+        <p:nvSpPr>
+          <p:cNvPr id="15" name="TextBox 14"/>
+          <p:cNvSpPr txBox="1"/>
+          <p:nvPr/>
+        </p:nvSpPr>
+        <p:spPr>
+          <a:xfrm>
+            <a:off x="2852928" y="4343400"/>
+            <a:ext cx="1783080" cy="640080"/>
+          </a:xfrm>
+          <a:prstGeom prst="rect">
+            <a:avLst/>
+          </a:prstGeom>
+          <a:noFill/>
+        </p:spPr>
+        <p:txBody>
+          <a:bodyPr wrap="square" anchor="t">
+            <a:spAutoFit/>
+          </a:bodyPr>
+          <a:lstStyle/>
+          <a:p>
+            <a:pPr algn="l">
+              <a:defRPr sz="1000" b="0">
+                <a:solidFill>
+                  <a:srgbClr val="64748B"/>
+                </a:solidFill>
+                <a:latin typeface="Avenir Next"/>
+              </a:defRPr>
+            </a:pPr>
+            <a:r>
+              <a:t>openblas · gnuplot</a:t>
+            </a:r>
+          </a:p>
+        </p:txBody>
+      </p:sp>
+      <p:sp>
+        <p:nvSpPr>
+          <p:cNvPr id="16" name="Rounded Rectangle 15"/>
+          <p:cNvSpPr/>
+          <p:nvPr/>
+        </p:nvSpPr>
+        <p:spPr>
+          <a:xfrm>
+            <a:off x="4864607" y="1645920"/>
+            <a:ext cx="2048256" cy="3429000"/>
+          </a:xfrm>
+          <a:prstGeom prst="roundRect">
+            <a:avLst/>
+          </a:prstGeom>
+          <a:solidFill>
+            <a:srgbClr val="F1F5F9"/>
+          </a:solidFill>
+          <a:ln>
+            <a:noFill/>
+          </a:ln>
+          <a:effectLst/>
+        </p:spPr>
+        <p:style>
+          <a:lnRef idx="1">
+            <a:schemeClr val="accent1"/>
+          </a:lnRef>
+          <a:fillRef idx="3">
+            <a:schemeClr val="accent1"/>
+          </a:fillRef>
+          <a:effectRef idx="2">
+            <a:schemeClr val="accent1"/>
+          </a:effectRef>
+          <a:fontRef idx="minor">
+            <a:schemeClr val="lt1"/>
+          </a:fontRef>
+        </p:style>
+        <p:txBody>
+          <a:bodyPr rtlCol="0" anchor="ctr"/>
+          <a:lstStyle/>
+          <a:p>
+            <a:pPr algn="ctr"/>
+          </a:p>
+        </p:txBody>
+      </p:sp>
+      <p:sp>
+        <p:nvSpPr>
+          <p:cNvPr id="17" name="Rounded Rectangle 16"/>
+          <p:cNvSpPr/>
+          <p:nvPr/>
+        </p:nvSpPr>
+        <p:spPr>
+          <a:xfrm>
+            <a:off x="4864607" y="1645920"/>
+            <a:ext cx="2048256" cy="594360"/>
           </a:xfrm>
           <a:prstGeom prst="roundRect">
             <a:avLst/>
@@ -13656,14 +14012,14 @@
       </p:sp>
       <p:sp>
         <p:nvSpPr>
-          <p:cNvPr id="13" name="TextBox 12"/>
+          <p:cNvPr id="18" name="TextBox 17"/>
           <p:cNvSpPr txBox="1"/>
           <p:nvPr/>
         </p:nvSpPr>
         <p:spPr>
           <a:xfrm>
-            <a:off x="3630168" y="1755648"/>
-            <a:ext cx="2468880" cy="502920"/>
+            <a:off x="4956047" y="1773936"/>
+            <a:ext cx="1865376" cy="457200"/>
           </a:xfrm>
           <a:prstGeom prst="rect">
             <a:avLst/>
@@ -13677,7 +14033,7 @@
           <a:lstStyle/>
           <a:p>
             <a:pPr algn="ctr">
-              <a:defRPr sz="1700" b="1">
+              <a:defRPr sz="1500" b="1">
                 <a:solidFill>
                   <a:srgbClr val="FFFFFF"/>
                 </a:solidFill>
@@ -13692,14 +14048,14 @@
       </p:sp>
       <p:sp>
         <p:nvSpPr>
-          <p:cNvPr id="14" name="TextBox 13"/>
+          <p:cNvPr id="19" name="TextBox 18"/>
           <p:cNvSpPr txBox="1"/>
           <p:nvPr/>
         </p:nvSpPr>
         <p:spPr>
           <a:xfrm>
-            <a:off x="3694176" y="2514600"/>
-            <a:ext cx="2377440" cy="1554480"/>
+            <a:off x="5010912" y="2377440"/>
+            <a:ext cx="1783080" cy="1920240"/>
           </a:xfrm>
           <a:prstGeom prst="rect">
             <a:avLst/>
@@ -13713,7 +14069,7 @@
           <a:lstStyle/>
           <a:p>
             <a:pPr algn="l">
-              <a:defRPr sz="1250" b="0">
+              <a:defRPr sz="1100" b="0">
                 <a:solidFill>
                   <a:srgbClr val="334155"/>
                 </a:solidFill>
@@ -13728,14 +14084,14 @@
       </p:sp>
       <p:sp>
         <p:nvSpPr>
-          <p:cNvPr id="15" name="TextBox 14"/>
+          <p:cNvPr id="20" name="TextBox 19"/>
           <p:cNvSpPr txBox="1"/>
           <p:nvPr/>
         </p:nvSpPr>
         <p:spPr>
           <a:xfrm>
-            <a:off x="3694176" y="4160520"/>
-            <a:ext cx="2377440" cy="640080"/>
+            <a:off x="5010912" y="4343400"/>
+            <a:ext cx="1783080" cy="640080"/>
           </a:xfrm>
           <a:prstGeom prst="rect">
             <a:avLst/>
@@ -13749,7 +14105,7 @@
           <a:lstStyle/>
           <a:p>
             <a:pPr algn="l">
-              <a:defRPr sz="1150" b="0">
+              <a:defRPr sz="1000" b="0">
                 <a:solidFill>
                   <a:srgbClr val="64748B"/>
                 </a:solidFill>
@@ -13757,21 +14113,21 @@
               </a:defRPr>
             </a:pPr>
             <a:r>
-              <a:t>hdf5~mpi · netcdf~mpi · fftw~mpi · boost~mpi</a:t>
-            </a:r>
-          </a:p>
-        </p:txBody>
-      </p:sp>
-      <p:sp>
-        <p:nvSpPr>
-          <p:cNvPr id="16" name="Rounded Rectangle 15"/>
+              <a:t>hdf5~mpi · fftw~mpi · boost~mpi</a:t>
+            </a:r>
+          </a:p>
+        </p:txBody>
+      </p:sp>
+      <p:sp>
+        <p:nvSpPr>
+          <p:cNvPr id="21" name="Rounded Rectangle 20"/>
           <p:cNvSpPr/>
           <p:nvPr/>
         </p:nvSpPr>
         <p:spPr>
           <a:xfrm>
-            <a:off x="6437376" y="1645920"/>
-            <a:ext cx="2743200" cy="3246120"/>
+            <a:off x="7022592" y="1645920"/>
+            <a:ext cx="2048256" cy="3429000"/>
           </a:xfrm>
           <a:prstGeom prst="roundRect">
             <a:avLst/>
@@ -13808,14 +14164,14 @@
       </p:sp>
       <p:sp>
         <p:nvSpPr>
-          <p:cNvPr id="17" name="Rounded Rectangle 16"/>
+          <p:cNvPr id="22" name="Rounded Rectangle 21"/>
           <p:cNvSpPr/>
           <p:nvPr/>
         </p:nvSpPr>
         <p:spPr>
           <a:xfrm>
-            <a:off x="6437376" y="1645920"/>
-            <a:ext cx="2743200" cy="685800"/>
+            <a:off x="7022592" y="1645920"/>
+            <a:ext cx="2048256" cy="594360"/>
           </a:xfrm>
           <a:prstGeom prst="roundRect">
             <a:avLst/>
@@ -13852,14 +14208,14 @@
       </p:sp>
       <p:sp>
         <p:nvSpPr>
-          <p:cNvPr id="18" name="TextBox 17"/>
+          <p:cNvPr id="23" name="TextBox 22"/>
           <p:cNvSpPr txBox="1"/>
           <p:nvPr/>
         </p:nvSpPr>
         <p:spPr>
           <a:xfrm>
-            <a:off x="6574536" y="1755648"/>
-            <a:ext cx="2468880" cy="502920"/>
+            <a:off x="7114031" y="1773936"/>
+            <a:ext cx="1865376" cy="457200"/>
           </a:xfrm>
           <a:prstGeom prst="rect">
             <a:avLst/>
@@ -13873,7 +14229,7 @@
           <a:lstStyle/>
           <a:p>
             <a:pPr algn="ctr">
-              <a:defRPr sz="1700" b="1">
+              <a:defRPr sz="1500" b="1">
                 <a:solidFill>
                   <a:srgbClr val="FFFFFF"/>
                 </a:solidFill>
@@ -13888,14 +14244,14 @@
       </p:sp>
       <p:sp>
         <p:nvSpPr>
-          <p:cNvPr id="19" name="TextBox 18"/>
+          <p:cNvPr id="24" name="TextBox 23"/>
           <p:cNvSpPr txBox="1"/>
           <p:nvPr/>
         </p:nvSpPr>
         <p:spPr>
           <a:xfrm>
-            <a:off x="6638544" y="2514600"/>
-            <a:ext cx="2377440" cy="1554480"/>
+            <a:off x="7168896" y="2377440"/>
+            <a:ext cx="1783080" cy="1920240"/>
           </a:xfrm>
           <a:prstGeom prst="rect">
             <a:avLst/>
@@ -13909,7 +14265,7 @@
           <a:lstStyle/>
           <a:p>
             <a:pPr algn="l">
-              <a:defRPr sz="1250" b="0">
+              <a:defRPr sz="1100" b="0">
                 <a:solidFill>
                   <a:srgbClr val="334155"/>
                 </a:solidFill>
@@ -13924,14 +14280,14 @@
       </p:sp>
       <p:sp>
         <p:nvSpPr>
-          <p:cNvPr id="20" name="TextBox 19"/>
+          <p:cNvPr id="25" name="TextBox 24"/>
           <p:cNvSpPr txBox="1"/>
           <p:nvPr/>
         </p:nvSpPr>
         <p:spPr>
           <a:xfrm>
-            <a:off x="6638544" y="4160520"/>
-            <a:ext cx="2377440" cy="640080"/>
+            <a:off x="7168896" y="4343400"/>
+            <a:ext cx="1783080" cy="640080"/>
           </a:xfrm>
           <a:prstGeom prst="rect">
             <a:avLst/>
@@ -13945,7 +14301,7 @@
           <a:lstStyle/>
           <a:p>
             <a:pPr algn="l">
-              <a:defRPr sz="1150" b="0">
+              <a:defRPr sz="1000" b="0">
                 <a:solidFill>
                   <a:srgbClr val="64748B"/>
                 </a:solidFill>
@@ -13953,21 +14309,21 @@
               </a:defRPr>
             </a:pPr>
             <a:r>
-              <a:t>MPI  ·  or MPI-openmpi / MPI-mpich</a:t>
-            </a:r>
-          </a:p>
-        </p:txBody>
-      </p:sp>
-      <p:sp>
-        <p:nvSpPr>
-          <p:cNvPr id="21" name="Rounded Rectangle 20"/>
+              <a:t>MPI · or MPI-openmpi / MPI-mpich</a:t>
+            </a:r>
+          </a:p>
+        </p:txBody>
+      </p:sp>
+      <p:sp>
+        <p:nvSpPr>
+          <p:cNvPr id="26" name="Rounded Rectangle 25"/>
           <p:cNvSpPr/>
           <p:nvPr/>
         </p:nvSpPr>
         <p:spPr>
           <a:xfrm>
-            <a:off x="9381744" y="1645920"/>
-            <a:ext cx="2743200" cy="3246120"/>
+            <a:off x="9180576" y="1645920"/>
+            <a:ext cx="2048256" cy="3429000"/>
           </a:xfrm>
           <a:prstGeom prst="roundRect">
             <a:avLst/>
@@ -14004,14 +14360,14 @@
       </p:sp>
       <p:sp>
         <p:nvSpPr>
-          <p:cNvPr id="22" name="Rounded Rectangle 21"/>
+          <p:cNvPr id="27" name="Rounded Rectangle 26"/>
           <p:cNvSpPr/>
           <p:nvPr/>
         </p:nvSpPr>
         <p:spPr>
           <a:xfrm>
-            <a:off x="9381744" y="1645920"/>
-            <a:ext cx="2743200" cy="685800"/>
+            <a:off x="9180576" y="1645920"/>
+            <a:ext cx="2048256" cy="594360"/>
           </a:xfrm>
           <a:prstGeom prst="roundRect">
             <a:avLst/>
@@ -14048,14 +14404,14 @@
       </p:sp>
       <p:sp>
         <p:nvSpPr>
-          <p:cNvPr id="23" name="TextBox 22"/>
+          <p:cNvPr id="28" name="TextBox 27"/>
           <p:cNvSpPr txBox="1"/>
           <p:nvPr/>
         </p:nvSpPr>
         <p:spPr>
           <a:xfrm>
-            <a:off x="9518904" y="1755648"/>
-            <a:ext cx="2468880" cy="502920"/>
+            <a:off x="9272015" y="1773936"/>
+            <a:ext cx="1865376" cy="457200"/>
           </a:xfrm>
           <a:prstGeom prst="rect">
             <a:avLst/>
@@ -14069,7 +14425,7 @@
           <a:lstStyle/>
           <a:p>
             <a:pPr algn="ctr">
-              <a:defRPr sz="1700" b="1">
+              <a:defRPr sz="1500" b="1">
                 <a:solidFill>
                   <a:srgbClr val="FFFFFF"/>
                 </a:solidFill>
@@ -14084,14 +14440,14 @@
       </p:sp>
       <p:sp>
         <p:nvSpPr>
-          <p:cNvPr id="24" name="TextBox 23"/>
+          <p:cNvPr id="29" name="TextBox 28"/>
           <p:cNvSpPr txBox="1"/>
           <p:nvPr/>
         </p:nvSpPr>
         <p:spPr>
           <a:xfrm>
-            <a:off x="9582912" y="2514600"/>
-            <a:ext cx="2377440" cy="1554480"/>
+            <a:off x="9326880" y="2377440"/>
+            <a:ext cx="1783080" cy="1920240"/>
           </a:xfrm>
           <a:prstGeom prst="rect">
             <a:avLst/>
@@ -14105,7 +14461,7 @@
           <a:lstStyle/>
           <a:p>
             <a:pPr algn="l">
-              <a:defRPr sz="1250" b="0">
+              <a:defRPr sz="1100" b="0">
                 <a:solidFill>
                   <a:srgbClr val="334155"/>
                 </a:solidFill>
@@ -14113,21 +14469,21 @@
               </a:defRPr>
             </a:pPr>
             <a:r>
-              <a:t>Carries the full MPI roster plus the GPU payload. Load GPU instead of MPI, not in addition to it.</a:t>
-            </a:r>
-          </a:p>
-        </p:txBody>
-      </p:sp>
-      <p:sp>
-        <p:nvSpPr>
-          <p:cNvPr id="25" name="TextBox 24"/>
+              <a:t>The full MPI roster plus the GPU payload. Load GPU instead of MPI, not in addition.</a:t>
+            </a:r>
+          </a:p>
+        </p:txBody>
+      </p:sp>
+      <p:sp>
+        <p:nvSpPr>
+          <p:cNvPr id="30" name="TextBox 29"/>
           <p:cNvSpPr txBox="1"/>
           <p:nvPr/>
         </p:nvSpPr>
         <p:spPr>
           <a:xfrm>
-            <a:off x="9582912" y="4160520"/>
-            <a:ext cx="2377440" cy="640080"/>
+            <a:off x="9326880" y="4343400"/>
+            <a:ext cx="1783080" cy="640080"/>
           </a:xfrm>
           <a:prstGeom prst="rect">
             <a:avLst/>
@@ -14141,7 +14497,7 @@
           <a:lstStyle/>
           <a:p>
             <a:pPr algn="l">
-              <a:defRPr sz="1150" b="0">
+              <a:defRPr sz="1000" b="0">
                 <a:solidFill>
                   <a:srgbClr val="64748B"/>
                 </a:solidFill>
@@ -14149,14 +14505,14 @@
               </a:defRPr>
             </a:pPr>
             <a:r>
-              <a:t>GPU  ·  or GPU-gfx90a / GPU-gfx942</a:t>
-            </a:r>
-          </a:p>
-        </p:txBody>
-      </p:sp>
-      <p:sp>
-        <p:nvSpPr>
-          <p:cNvPr id="26" name="Rounded Rectangle 25"/>
+              <a:t>GPU · or GPU-gfx90a / GPU-gfx942</a:t>
+            </a:r>
+          </a:p>
+        </p:txBody>
+      </p:sp>
+      <p:sp>
+        <p:nvSpPr>
+          <p:cNvPr id="31" name="Rounded Rectangle 30"/>
           <p:cNvSpPr/>
           <p:nvPr/>
         </p:nvSpPr>
@@ -14511,7 +14867,7 @@
         <p:spPr>
           <a:xfrm>
             <a:off x="822959" y="2743200"/>
-            <a:ext cx="2331720" cy="502920"/>
+            <a:ext cx="1508760" cy="502920"/>
           </a:xfrm>
           <a:prstGeom prst="roundRect">
             <a:avLst/>
@@ -14543,7 +14899,7 @@
           <a:lstStyle/>
           <a:p>
             <a:pPr algn="ctr">
-              <a:defRPr sz="1200" b="1">
+              <a:defRPr sz="1100" b="1">
                 <a:solidFill>
                   <a:srgbClr val="FFFFFF"/>
                 </a:solidFill>
@@ -14551,7 +14907,7 @@
               </a:defRPr>
             </a:pPr>
             <a:r>
-              <a:t>Core (automatic)</a:t>
+              <a:t>Core</a:t>
             </a:r>
           </a:p>
         </p:txBody>
@@ -14564,8 +14920,62 @@
         </p:nvSpPr>
         <p:spPr>
           <a:xfrm>
-            <a:off x="3291840" y="2743200"/>
-            <a:ext cx="2331720" cy="502920"/>
+            <a:off x="2468880" y="2743200"/>
+            <a:ext cx="1508760" cy="502920"/>
+          </a:xfrm>
+          <a:prstGeom prst="roundRect">
+            <a:avLst/>
+          </a:prstGeom>
+          <a:solidFill>
+            <a:srgbClr val="15803D"/>
+          </a:solidFill>
+          <a:ln>
+            <a:noFill/>
+          </a:ln>
+          <a:effectLst/>
+        </p:spPr>
+        <p:style>
+          <a:lnRef idx="1">
+            <a:schemeClr val="accent1"/>
+          </a:lnRef>
+          <a:fillRef idx="3">
+            <a:schemeClr val="accent1"/>
+          </a:fillRef>
+          <a:effectRef idx="2">
+            <a:schemeClr val="accent1"/>
+          </a:effectRef>
+          <a:fontRef idx="minor">
+            <a:schemeClr val="lt1"/>
+          </a:fontRef>
+        </p:style>
+        <p:txBody>
+          <a:bodyPr rtlCol="0" anchor="ctr" wrap="square" lIns="109728" rIns="109728"/>
+          <a:lstStyle/>
+          <a:p>
+            <a:pPr algn="ctr">
+              <a:defRPr sz="1100" b="1">
+                <a:solidFill>
+                  <a:srgbClr val="FFFFFF"/>
+                </a:solidFill>
+                <a:latin typeface="Avenir Next"/>
+              </a:defRPr>
+            </a:pPr>
+            <a:r>
+              <a:t>Common</a:t>
+            </a:r>
+          </a:p>
+        </p:txBody>
+      </p:sp>
+      <p:sp>
+        <p:nvSpPr>
+          <p:cNvPr id="11" name="Rounded Rectangle 10"/>
+          <p:cNvSpPr/>
+          <p:nvPr/>
+        </p:nvSpPr>
+        <p:spPr>
+          <a:xfrm>
+            <a:off x="4114800" y="2743200"/>
+            <a:ext cx="1508760" cy="502920"/>
           </a:xfrm>
           <a:prstGeom prst="roundRect">
             <a:avLst/>
@@ -14597,7 +15007,7 @@
           <a:lstStyle/>
           <a:p>
             <a:pPr algn="ctr">
-              <a:defRPr sz="1200" b="1">
+              <a:defRPr sz="1100" b="1">
                 <a:solidFill>
                   <a:srgbClr val="FFFFFF"/>
                 </a:solidFill>
@@ -14605,14 +15015,14 @@
               </a:defRPr>
             </a:pPr>
             <a:r>
-              <a:t>Foundation (on the path)</a:t>
-            </a:r>
-          </a:p>
-        </p:txBody>
-      </p:sp>
-      <p:sp>
-        <p:nvSpPr>
-          <p:cNvPr id="11" name="Rounded Rectangle 10"/>
+              <a:t>Foundation</a:t>
+            </a:r>
+          </a:p>
+        </p:txBody>
+      </p:sp>
+      <p:sp>
+        <p:nvSpPr>
+          <p:cNvPr id="12" name="Rounded Rectangle 11"/>
           <p:cNvSpPr/>
           <p:nvPr/>
         </p:nvSpPr>
@@ -14666,7 +15076,7 @@
       </p:sp>
       <p:sp>
         <p:nvSpPr>
-          <p:cNvPr id="12" name="Rounded Rectangle 11"/>
+          <p:cNvPr id="13" name="Rounded Rectangle 12"/>
           <p:cNvSpPr/>
           <p:nvPr/>
         </p:nvSpPr>
@@ -14720,7 +15130,7 @@
       </p:sp>
       <p:sp>
         <p:nvSpPr>
-          <p:cNvPr id="13" name="Rounded Rectangle 12"/>
+          <p:cNvPr id="14" name="Rounded Rectangle 13"/>
           <p:cNvSpPr/>
           <p:nvPr/>
         </p:nvSpPr>
@@ -14774,7 +15184,7 @@
       </p:sp>
       <p:sp>
         <p:nvSpPr>
-          <p:cNvPr id="14" name="Rounded Rectangle 13"/>
+          <p:cNvPr id="15" name="Rounded Rectangle 14"/>
           <p:cNvSpPr/>
           <p:nvPr/>
         </p:nvSpPr>
@@ -14818,7 +15228,7 @@
       </p:sp>
       <p:sp>
         <p:nvSpPr>
-          <p:cNvPr id="15" name="TextBox 14"/>
+          <p:cNvPr id="16" name="TextBox 15"/>
           <p:cNvSpPr txBox="1"/>
           <p:nvPr/>
         </p:nvSpPr>
@@ -14854,7 +15264,7 @@
       </p:sp>
       <p:sp>
         <p:nvSpPr>
-          <p:cNvPr id="16" name="TextBox 15"/>
+          <p:cNvPr id="17" name="TextBox 16"/>
           <p:cNvSpPr txBox="1"/>
           <p:nvPr/>
         </p:nvSpPr>
@@ -14890,14 +15300,14 @@
       </p:sp>
       <p:sp>
         <p:nvSpPr>
-          <p:cNvPr id="17" name="Rounded Rectangle 16"/>
+          <p:cNvPr id="18" name="Rounded Rectangle 17"/>
           <p:cNvSpPr/>
           <p:nvPr/>
         </p:nvSpPr>
         <p:spPr>
           <a:xfrm>
             <a:off x="6537959" y="2743200"/>
-            <a:ext cx="2331720" cy="502920"/>
+            <a:ext cx="1508760" cy="502920"/>
           </a:xfrm>
           <a:prstGeom prst="roundRect">
             <a:avLst/>
@@ -14929,7 +15339,7 @@
           <a:lstStyle/>
           <a:p>
             <a:pPr algn="ctr">
-              <a:defRPr sz="1200" b="1">
+              <a:defRPr sz="1100" b="1">
                 <a:solidFill>
                   <a:srgbClr val="FFFFFF"/>
                 </a:solidFill>
@@ -14937,21 +15347,75 @@
               </a:defRPr>
             </a:pPr>
             <a:r>
-              <a:t>Core (automatic)</a:t>
-            </a:r>
-          </a:p>
-        </p:txBody>
-      </p:sp>
-      <p:sp>
-        <p:nvSpPr>
-          <p:cNvPr id="18" name="Rounded Rectangle 17"/>
+              <a:t>Core</a:t>
+            </a:r>
+          </a:p>
+        </p:txBody>
+      </p:sp>
+      <p:sp>
+        <p:nvSpPr>
+          <p:cNvPr id="19" name="Rounded Rectangle 18"/>
           <p:cNvSpPr/>
           <p:nvPr/>
         </p:nvSpPr>
         <p:spPr>
           <a:xfrm>
-            <a:off x="9006840" y="2743200"/>
-            <a:ext cx="2331720" cy="502920"/>
+            <a:off x="8183879" y="2743200"/>
+            <a:ext cx="1508760" cy="502920"/>
+          </a:xfrm>
+          <a:prstGeom prst="roundRect">
+            <a:avLst/>
+          </a:prstGeom>
+          <a:solidFill>
+            <a:srgbClr val="15803D"/>
+          </a:solidFill>
+          <a:ln>
+            <a:noFill/>
+          </a:ln>
+          <a:effectLst/>
+        </p:spPr>
+        <p:style>
+          <a:lnRef idx="1">
+            <a:schemeClr val="accent1"/>
+          </a:lnRef>
+          <a:fillRef idx="3">
+            <a:schemeClr val="accent1"/>
+          </a:fillRef>
+          <a:effectRef idx="2">
+            <a:schemeClr val="accent1"/>
+          </a:effectRef>
+          <a:fontRef idx="minor">
+            <a:schemeClr val="lt1"/>
+          </a:fontRef>
+        </p:style>
+        <p:txBody>
+          <a:bodyPr rtlCol="0" anchor="ctr" wrap="square" lIns="109728" rIns="109728"/>
+          <a:lstStyle/>
+          <a:p>
+            <a:pPr algn="ctr">
+              <a:defRPr sz="1100" b="1">
+                <a:solidFill>
+                  <a:srgbClr val="FFFFFF"/>
+                </a:solidFill>
+                <a:latin typeface="Avenir Next"/>
+              </a:defRPr>
+            </a:pPr>
+            <a:r>
+              <a:t>Common</a:t>
+            </a:r>
+          </a:p>
+        </p:txBody>
+      </p:sp>
+      <p:sp>
+        <p:nvSpPr>
+          <p:cNvPr id="20" name="Rounded Rectangle 19"/>
+          <p:cNvSpPr/>
+          <p:nvPr/>
+        </p:nvSpPr>
+        <p:spPr>
+          <a:xfrm>
+            <a:off x="9829800" y="2743200"/>
+            <a:ext cx="1508760" cy="502920"/>
           </a:xfrm>
           <a:prstGeom prst="roundRect">
             <a:avLst/>
@@ -14983,7 +15447,7 @@
           <a:lstStyle/>
           <a:p>
             <a:pPr algn="ctr">
-              <a:defRPr sz="1200" b="1">
+              <a:defRPr sz="1100" b="1">
                 <a:solidFill>
                   <a:srgbClr val="FFFFFF"/>
                 </a:solidFill>
@@ -14991,14 +15455,14 @@
               </a:defRPr>
             </a:pPr>
             <a:r>
-              <a:t>Foundation (on the path)</a:t>
-            </a:r>
-          </a:p>
-        </p:txBody>
-      </p:sp>
-      <p:sp>
-        <p:nvSpPr>
-          <p:cNvPr id="19" name="Rounded Rectangle 18"/>
+              <a:t>Foundation</a:t>
+            </a:r>
+          </a:p>
+        </p:txBody>
+      </p:sp>
+      <p:sp>
+        <p:nvSpPr>
+          <p:cNvPr id="21" name="Rounded Rectangle 20"/>
           <p:cNvSpPr/>
           <p:nvPr/>
         </p:nvSpPr>
@@ -15052,7 +15516,7 @@
       </p:sp>
       <p:sp>
         <p:nvSpPr>
-          <p:cNvPr id="20" name="Rounded Rectangle 19"/>
+          <p:cNvPr id="22" name="Rounded Rectangle 21"/>
           <p:cNvSpPr/>
           <p:nvPr/>
         </p:nvSpPr>
@@ -15106,7 +15570,7 @@
       </p:sp>
       <p:sp>
         <p:nvSpPr>
-          <p:cNvPr id="21" name="Rounded Rectangle 20"/>
+          <p:cNvPr id="23" name="Rounded Rectangle 22"/>
           <p:cNvSpPr/>
           <p:nvPr/>
         </p:nvSpPr>
@@ -15160,7 +15624,7 @@
       </p:sp>
       <p:sp>
         <p:nvSpPr>
-          <p:cNvPr id="22" name="TextBox 21"/>
+          <p:cNvPr id="24" name="TextBox 23"/>
           <p:cNvSpPr txBox="1"/>
           <p:nvPr/>
         </p:nvSpPr>
@@ -15196,7 +15660,7 @@
       </p:sp>
       <p:sp>
         <p:nvSpPr>
-          <p:cNvPr id="23" name="Rounded Rectangle 22"/>
+          <p:cNvPr id="25" name="Rounded Rectangle 24"/>
           <p:cNvSpPr/>
           <p:nvPr/>
         </p:nvSpPr>
@@ -15250,7 +15714,7 @@
       </p:sp>
       <p:sp>
         <p:nvSpPr>
-          <p:cNvPr id="24" name="Rounded Rectangle 23"/>
+          <p:cNvPr id="26" name="Rounded Rectangle 25"/>
           <p:cNvSpPr/>
           <p:nvPr/>
         </p:nvSpPr>
@@ -15304,7 +15768,7 @@
       </p:sp>
       <p:sp>
         <p:nvSpPr>
-          <p:cNvPr id="25" name="Rounded Rectangle 24"/>
+          <p:cNvPr id="27" name="Rounded Rectangle 26"/>
           <p:cNvSpPr/>
           <p:nvPr/>
         </p:nvSpPr>
@@ -15358,7 +15822,7 @@
       </p:sp>
       <p:sp>
         <p:nvSpPr>
-          <p:cNvPr id="26" name="Rounded Rectangle 25"/>
+          <p:cNvPr id="28" name="Rounded Rectangle 27"/>
           <p:cNvSpPr/>
           <p:nvPr/>
         </p:nvSpPr>
@@ -15412,7 +15876,7 @@
       </p:sp>
       <p:sp>
         <p:nvSpPr>
-          <p:cNvPr id="27" name="Rounded Rectangle 26"/>
+          <p:cNvPr id="29" name="Rounded Rectangle 28"/>
           <p:cNvSpPr/>
           <p:nvPr/>
         </p:nvSpPr>
@@ -15466,7 +15930,7 @@
       </p:sp>
       <p:sp>
         <p:nvSpPr>
-          <p:cNvPr id="28" name="Rounded Rectangle 27"/>
+          <p:cNvPr id="30" name="Rounded Rectangle 29"/>
           <p:cNvSpPr/>
           <p:nvPr/>
         </p:nvSpPr>
@@ -15520,7 +15984,7 @@
       </p:sp>
       <p:sp>
         <p:nvSpPr>
-          <p:cNvPr id="29" name="Rounded Rectangle 28"/>
+          <p:cNvPr id="31" name="Rounded Rectangle 30"/>
           <p:cNvSpPr/>
           <p:nvPr/>
         </p:nvSpPr>
@@ -15574,7 +16038,7 @@
       </p:sp>
       <p:sp>
         <p:nvSpPr>
-          <p:cNvPr id="30" name="Rounded Rectangle 29"/>
+          <p:cNvPr id="32" name="Rounded Rectangle 31"/>
           <p:cNvSpPr/>
           <p:nvPr/>
         </p:nvSpPr>
@@ -15628,7 +16092,7 @@
       </p:sp>
       <p:sp>
         <p:nvSpPr>
-          <p:cNvPr id="31" name="Rounded Rectangle 30"/>
+          <p:cNvPr id="33" name="Rounded Rectangle 32"/>
           <p:cNvSpPr/>
           <p:nvPr/>
         </p:nvSpPr>
@@ -15682,7 +16146,7 @@
       </p:sp>
       <p:sp>
         <p:nvSpPr>
-          <p:cNvPr id="32" name="Rounded Rectangle 31"/>
+          <p:cNvPr id="34" name="Rounded Rectangle 33"/>
           <p:cNvSpPr/>
           <p:nvPr/>
         </p:nvSpPr>
@@ -15736,7 +16200,7 @@
       </p:sp>
       <p:sp>
         <p:nvSpPr>
-          <p:cNvPr id="33" name="Rounded Rectangle 32"/>
+          <p:cNvPr id="35" name="Rounded Rectangle 34"/>
           <p:cNvSpPr/>
           <p:nvPr/>
         </p:nvSpPr>
@@ -15790,7 +16254,7 @@
       </p:sp>
       <p:sp>
         <p:nvSpPr>
-          <p:cNvPr id="34" name="Rounded Rectangle 33"/>
+          <p:cNvPr id="36" name="Rounded Rectangle 35"/>
           <p:cNvSpPr/>
           <p:nvPr/>
         </p:nvSpPr>
@@ -15844,7 +16308,7 @@
       </p:sp>
       <p:sp>
         <p:nvSpPr>
-          <p:cNvPr id="35" name="Rounded Rectangle 34"/>
+          <p:cNvPr id="37" name="Rounded Rectangle 36"/>
           <p:cNvSpPr/>
           <p:nvPr/>
         </p:nvSpPr>
@@ -15898,7 +16362,7 @@
       </p:sp>
       <p:sp>
         <p:nvSpPr>
-          <p:cNvPr id="36" name="Rounded Rectangle 35"/>
+          <p:cNvPr id="38" name="Rounded Rectangle 37"/>
           <p:cNvSpPr/>
           <p:nvPr/>
         </p:nvSpPr>
@@ -15952,7 +16416,7 @@
       </p:sp>
       <p:sp>
         <p:nvSpPr>
-          <p:cNvPr id="37" name="TextBox 36"/>
+          <p:cNvPr id="39" name="TextBox 38"/>
           <p:cNvSpPr txBox="1"/>
           <p:nvPr/>
         </p:nvSpPr>

--- a/presentations/cse_lanes_model.pptx
+++ b/presentations/cse_lanes_model.pptx
@@ -3325,7 +3325,7 @@
             <a:avLst/>
           </a:prstGeom>
           <a:solidFill>
-            <a:srgbClr val="1D6E6A"/>
+            <a:srgbClr val="117A72"/>
           </a:solidFill>
           <a:ln>
             <a:noFill/>
@@ -3369,7 +3369,7 @@
             <a:avLst/>
           </a:prstGeom>
           <a:solidFill>
-            <a:srgbClr val="A86A14"/>
+            <a:srgbClr val="BA740E"/>
           </a:solidFill>
           <a:ln>
             <a:noFill/>
@@ -3413,7 +3413,7 @@
             <a:avLst/>
           </a:prstGeom>
           <a:solidFill>
-            <a:srgbClr val="2C5AA0"/>
+            <a:srgbClr val="2B62B8"/>
           </a:solidFill>
           <a:ln>
             <a:noFill/>
@@ -3457,7 +3457,7 @@
             <a:avLst/>
           </a:prstGeom>
           <a:solidFill>
-            <a:srgbClr val="634A94"/>
+            <a:srgbClr val="6D4EAA"/>
           </a:solidFill>
           <a:ln>
             <a:noFill/>
@@ -3573,7 +3573,7 @@
             <a:pPr algn="l">
               <a:defRPr sz="1300" b="1">
                 <a:solidFill>
-                  <a:srgbClr val="8C6D1F"/>
+                  <a:srgbClr val="9A7614"/>
                 </a:solidFill>
                 <a:latin typeface="Avenir Next"/>
               </a:defRPr>
@@ -3689,7 +3689,7 @@
             <a:pPr algn="l">
               <a:defRPr sz="1350" b="1">
                 <a:solidFill>
-                  <a:srgbClr val="2E6B45"/>
+                  <a:srgbClr val="2C7A4B"/>
                 </a:solidFill>
                 <a:latin typeface="Avenir Next"/>
               </a:defRPr>
@@ -3805,7 +3805,7 @@
             <a:pPr algn="l">
               <a:defRPr sz="1350" b="1">
                 <a:solidFill>
-                  <a:srgbClr val="1D6E6A"/>
+                  <a:srgbClr val="117A72"/>
                 </a:solidFill>
                 <a:latin typeface="Avenir Next"/>
               </a:defRPr>
@@ -3921,7 +3921,7 @@
             <a:pPr algn="l">
               <a:defRPr sz="1350" b="1">
                 <a:solidFill>
-                  <a:srgbClr val="A86A14"/>
+                  <a:srgbClr val="BA740E"/>
                 </a:solidFill>
                 <a:latin typeface="Avenir Next"/>
               </a:defRPr>
@@ -4037,7 +4037,7 @@
             <a:pPr algn="l">
               <a:defRPr sz="1350" b="1">
                 <a:solidFill>
-                  <a:srgbClr val="634A94"/>
+                  <a:srgbClr val="6D4EAA"/>
                 </a:solidFill>
                 <a:latin typeface="Avenir Next"/>
               </a:defRPr>
@@ -4171,7 +4171,7 @@
             <a:pPr algn="l">
               <a:defRPr sz="1300" b="1">
                 <a:solidFill>
-                  <a:srgbClr val="8C6D1F"/>
+                  <a:srgbClr val="9A7614"/>
                 </a:solidFill>
                 <a:latin typeface="Avenir Next"/>
               </a:defRPr>
@@ -4269,7 +4269,7 @@
             <a:avLst/>
           </a:prstGeom>
           <a:solidFill>
-            <a:srgbClr val="A86A14"/>
+            <a:srgbClr val="BA740E"/>
           </a:solidFill>
           <a:ln>
             <a:noFill/>
@@ -4349,7 +4349,7 @@
             <a:avLst/>
           </a:prstGeom>
           <a:solidFill>
-            <a:srgbClr val="2C5AA0"/>
+            <a:srgbClr val="2B62B8"/>
           </a:solidFill>
           <a:ln>
             <a:noFill/>
@@ -4429,7 +4429,7 @@
             <a:avLst/>
           </a:prstGeom>
           <a:solidFill>
-            <a:srgbClr val="634A94"/>
+            <a:srgbClr val="6D4EAA"/>
           </a:solidFill>
           <a:ln>
             <a:noFill/>
@@ -4509,7 +4509,7 @@
             <a:avLst/>
           </a:prstGeom>
           <a:solidFill>
-            <a:srgbClr val="2E6B45"/>
+            <a:srgbClr val="2C7A4B"/>
           </a:solidFill>
           <a:ln>
             <a:noFill/>
@@ -4576,7 +4576,7 @@
             <a:avLst/>
           </a:prstGeom>
           <a:solidFill>
-            <a:srgbClr val="1D6E6A"/>
+            <a:srgbClr val="117A72"/>
           </a:solidFill>
           <a:ln>
             <a:noFill/>
@@ -4887,7 +4887,7 @@
             <a:pPr algn="l">
               <a:defRPr sz="1300" b="1">
                 <a:solidFill>
-                  <a:srgbClr val="8C6D1F"/>
+                  <a:srgbClr val="9A7614"/>
                 </a:solidFill>
                 <a:latin typeface="Avenir Next"/>
               </a:defRPr>
@@ -5316,7 +5316,7 @@
                   </a:txBody>
                   <a:tcPr marL="109728" marR="73152" marT="13716" marB="13716" anchor="ctr">
                     <a:solidFill>
-                      <a:srgbClr val="1D6E6A"/>
+                      <a:srgbClr val="117A72"/>
                     </a:solidFill>
                   </a:tcPr>
                 </a:tc>
@@ -5725,7 +5725,7 @@
                   </a:txBody>
                   <a:tcPr marL="109728" marR="73152" marT="13716" marB="13716" anchor="ctr">
                     <a:solidFill>
-                      <a:srgbClr val="1D6E6A"/>
+                      <a:srgbClr val="117A72"/>
                     </a:solidFill>
                   </a:tcPr>
                 </a:tc>
@@ -5909,7 +5909,7 @@
                   </a:txBody>
                   <a:tcPr marL="109728" marR="73152" marT="13716" marB="13716" anchor="ctr">
                     <a:solidFill>
-                      <a:srgbClr val="2E6B45"/>
+                      <a:srgbClr val="2C7A4B"/>
                     </a:solidFill>
                   </a:tcPr>
                 </a:tc>
@@ -6205,7 +6205,7 @@
             <a:pPr algn="l">
               <a:defRPr sz="1300" b="1">
                 <a:solidFill>
-                  <a:srgbClr val="8C6D1F"/>
+                  <a:srgbClr val="9A7614"/>
                 </a:solidFill>
                 <a:latin typeface="Avenir Next"/>
               </a:defRPr>
@@ -6370,7 +6370,7 @@
                   </a:txBody>
                   <a:tcPr marL="109728" marR="73152" marT="13716" marB="13716" anchor="ctr">
                     <a:solidFill>
-                      <a:srgbClr val="A86A14"/>
+                      <a:srgbClr val="BA740E"/>
                     </a:solidFill>
                   </a:tcPr>
                 </a:tc>
@@ -6708,7 +6708,7 @@
                   </a:txBody>
                   <a:tcPr marL="109728" marR="73152" marT="13716" marB="13716" anchor="ctr">
                     <a:solidFill>
-                      <a:srgbClr val="A86A14"/>
+                      <a:srgbClr val="BA740E"/>
                     </a:solidFill>
                   </a:tcPr>
                 </a:tc>
@@ -7004,7 +7004,7 @@
             <a:pPr algn="l">
               <a:defRPr sz="1300" b="1">
                 <a:solidFill>
-                  <a:srgbClr val="8C6D1F"/>
+                  <a:srgbClr val="9A7614"/>
                 </a:solidFill>
                 <a:latin typeface="Avenir Next"/>
               </a:defRPr>
@@ -7169,7 +7169,7 @@
                   </a:txBody>
                   <a:tcPr marL="109728" marR="73152" marT="13716" marB="13716" anchor="ctr">
                     <a:solidFill>
-                      <a:srgbClr val="2C5AA0"/>
+                      <a:srgbClr val="2B62B8"/>
                     </a:solidFill>
                   </a:tcPr>
                 </a:tc>
@@ -7507,7 +7507,7 @@
                   </a:txBody>
                   <a:tcPr marL="109728" marR="73152" marT="13716" marB="13716" anchor="ctr">
                     <a:solidFill>
-                      <a:srgbClr val="2C5AA0"/>
+                      <a:srgbClr val="2B62B8"/>
                     </a:solidFill>
                   </a:tcPr>
                 </a:tc>
@@ -7919,7 +7919,7 @@
                   </a:txBody>
                   <a:tcPr marL="109728" marR="73152" marT="13716" marB="13716" anchor="ctr">
                     <a:solidFill>
-                      <a:srgbClr val="634A94"/>
+                      <a:srgbClr val="6D4EAA"/>
                     </a:solidFill>
                   </a:tcPr>
                 </a:tc>
@@ -8109,7 +8109,7 @@
                   </a:txBody>
                   <a:tcPr marL="109728" marR="73152" marT="13716" marB="13716" anchor="ctr">
                     <a:solidFill>
-                      <a:srgbClr val="2E6B45"/>
+                      <a:srgbClr val="2C7A4B"/>
                     </a:solidFill>
                   </a:tcPr>
                 </a:tc>
@@ -8447,7 +8447,7 @@
             <a:pPr algn="l">
               <a:defRPr sz="1300" b="1">
                 <a:solidFill>
-                  <a:srgbClr val="8C6D1F"/>
+                  <a:srgbClr val="9A7614"/>
                 </a:solidFill>
                 <a:latin typeface="Avenir Next"/>
               </a:defRPr>
@@ -9283,7 +9283,7 @@
             <a:pPr algn="l">
               <a:defRPr sz="1350" b="1">
                 <a:solidFill>
-                  <a:srgbClr val="A86A14"/>
+                  <a:srgbClr val="BA740E"/>
                 </a:solidFill>
                 <a:latin typeface="Avenir Next"/>
               </a:defRPr>
@@ -9472,7 +9472,7 @@
           </a:prstGeom>
           <a:ln w="28575">
             <a:solidFill>
-              <a:srgbClr val="1D6E6A"/>
+              <a:srgbClr val="117A72"/>
             </a:solidFill>
             <a:tailEnd type="triangle" w="med" len="med"/>
           </a:ln>
@@ -9508,7 +9508,7 @@
             <a:avLst/>
           </a:prstGeom>
           <a:solidFill>
-            <a:srgbClr val="1D6E6A"/>
+            <a:srgbClr val="117A72"/>
           </a:solidFill>
           <a:ln>
             <a:noFill/>
@@ -9575,7 +9575,7 @@
             <a:avLst/>
           </a:prstGeom>
           <a:solidFill>
-            <a:srgbClr val="2E6B45"/>
+            <a:srgbClr val="2C7A4B"/>
           </a:solidFill>
           <a:ln>
             <a:noFill/>
@@ -9710,7 +9710,7 @@
           </a:prstGeom>
           <a:ln w="28575">
             <a:solidFill>
-              <a:srgbClr val="1D6E6A"/>
+              <a:srgbClr val="117A72"/>
             </a:solidFill>
             <a:tailEnd type="triangle" w="med" len="med"/>
           </a:ln>
@@ -9782,7 +9782,7 @@
             <a:avLst/>
           </a:prstGeom>
           <a:solidFill>
-            <a:srgbClr val="A86A14"/>
+            <a:srgbClr val="BA740E"/>
           </a:solidFill>
           <a:ln>
             <a:noFill/>
@@ -9836,7 +9836,7 @@
             <a:avLst/>
           </a:prstGeom>
           <a:solidFill>
-            <a:srgbClr val="2C5AA0"/>
+            <a:srgbClr val="2B62B8"/>
           </a:solidFill>
           <a:ln>
             <a:noFill/>
@@ -9890,7 +9890,7 @@
             <a:avLst/>
           </a:prstGeom>
           <a:solidFill>
-            <a:srgbClr val="634A94"/>
+            <a:srgbClr val="6D4EAA"/>
           </a:solidFill>
           <a:ln>
             <a:noFill/>
@@ -9954,7 +9954,7 @@
             <a:pPr algn="l">
               <a:defRPr sz="1350" b="1">
                 <a:solidFill>
-                  <a:srgbClr val="1D6E6A"/>
+                  <a:srgbClr val="117A72"/>
                 </a:solidFill>
                 <a:latin typeface="Avenir Next"/>
               </a:defRPr>
@@ -10078,7 +10078,7 @@
             <a:pPr algn="l">
               <a:defRPr sz="1300" b="1">
                 <a:solidFill>
-                  <a:srgbClr val="8C6D1F"/>
+                  <a:srgbClr val="9A7614"/>
                 </a:solidFill>
                 <a:latin typeface="Avenir Next"/>
               </a:defRPr>
@@ -10194,7 +10194,7 @@
             <a:pPr algn="l">
               <a:defRPr sz="1450" b="1">
                 <a:solidFill>
-                  <a:srgbClr val="2C5AA0"/>
+                  <a:srgbClr val="2B62B8"/>
                 </a:solidFill>
                 <a:latin typeface="Avenir Next"/>
               </a:defRPr>
@@ -10230,7 +10230,7 @@
             <a:pPr algn="l">
               <a:defRPr sz="1600" b="1">
                 <a:solidFill>
-                  <a:srgbClr val="2C5AA0"/>
+                  <a:srgbClr val="2B62B8"/>
                 </a:solidFill>
                 <a:latin typeface="Avenir Next"/>
               </a:defRPr>
@@ -10372,7 +10372,7 @@
             <a:pPr algn="l">
               <a:defRPr sz="1450" b="1">
                 <a:solidFill>
-                  <a:srgbClr val="634A94"/>
+                  <a:srgbClr val="6D4EAA"/>
                 </a:solidFill>
                 <a:latin typeface="Avenir Next"/>
               </a:defRPr>
@@ -10408,7 +10408,7 @@
             <a:pPr algn="l">
               <a:defRPr sz="1600" b="1">
                 <a:solidFill>
-                  <a:srgbClr val="634A94"/>
+                  <a:srgbClr val="6D4EAA"/>
                 </a:solidFill>
                 <a:latin typeface="Avenir Next"/>
               </a:defRPr>
@@ -10550,7 +10550,7 @@
             <a:pPr algn="l">
               <a:defRPr sz="1450" b="1">
                 <a:solidFill>
-                  <a:srgbClr val="1D6E6A"/>
+                  <a:srgbClr val="117A72"/>
                 </a:solidFill>
                 <a:latin typeface="Avenir Next"/>
               </a:defRPr>
@@ -10586,7 +10586,7 @@
             <a:pPr algn="l">
               <a:defRPr sz="1600" b="1">
                 <a:solidFill>
-                  <a:srgbClr val="1D6E6A"/>
+                  <a:srgbClr val="117A72"/>
                 </a:solidFill>
                 <a:latin typeface="Avenir Next"/>
               </a:defRPr>
@@ -10800,7 +10800,7 @@
             <a:pPr algn="l">
               <a:defRPr sz="1300" b="1">
                 <a:solidFill>
-                  <a:srgbClr val="8C6D1F"/>
+                  <a:srgbClr val="9A7614"/>
                 </a:solidFill>
                 <a:latin typeface="Avenir Next"/>
               </a:defRPr>
@@ -10945,7 +10945,7 @@
           </a:prstGeom>
           <a:ln w="28575">
             <a:solidFill>
-              <a:srgbClr val="1D6E6A"/>
+              <a:srgbClr val="117A72"/>
             </a:solidFill>
             <a:tailEnd type="triangle" w="med" len="med"/>
           </a:ln>
@@ -11064,7 +11064,7 @@
           </a:prstGeom>
           <a:ln w="28575">
             <a:solidFill>
-              <a:srgbClr val="1D6E6A"/>
+              <a:srgbClr val="117A72"/>
             </a:solidFill>
             <a:tailEnd type="triangle" w="med" len="med"/>
           </a:ln>
@@ -11183,7 +11183,7 @@
           </a:prstGeom>
           <a:ln w="28575">
             <a:solidFill>
-              <a:srgbClr val="1D6E6A"/>
+              <a:srgbClr val="117A72"/>
             </a:solidFill>
             <a:tailEnd type="triangle" w="med" len="med"/>
           </a:ln>
@@ -11302,7 +11302,7 @@
           </a:prstGeom>
           <a:ln w="28575">
             <a:solidFill>
-              <a:srgbClr val="1D6E6A"/>
+              <a:srgbClr val="117A72"/>
             </a:solidFill>
             <a:tailEnd type="triangle" w="med" len="med"/>
           </a:ln>
@@ -11424,7 +11424,7 @@
           </a:solidFill>
           <a:ln w="15875">
             <a:solidFill>
-              <a:srgbClr val="1D6E6A"/>
+              <a:srgbClr val="117A72"/>
             </a:solidFill>
           </a:ln>
           <a:effectLst/>
@@ -11490,7 +11490,7 @@
           </a:prstGeom>
           <a:ln w="28575">
             <a:solidFill>
-              <a:srgbClr val="A86A14"/>
+              <a:srgbClr val="BA740E"/>
             </a:solidFill>
             <a:tailEnd type="triangle" w="med" len="med"/>
           </a:ln>
@@ -11526,7 +11526,7 @@
             <a:avLst/>
           </a:prstGeom>
           <a:solidFill>
-            <a:srgbClr val="A86A14"/>
+            <a:srgbClr val="BA740E"/>
           </a:solidFill>
           <a:ln>
             <a:noFill/>
@@ -11594,7 +11594,7 @@
           </a:prstGeom>
           <a:ln w="28575">
             <a:solidFill>
-              <a:srgbClr val="2C5AA0"/>
+              <a:srgbClr val="2B62B8"/>
             </a:solidFill>
             <a:tailEnd type="triangle" w="med" len="med"/>
           </a:ln>
@@ -11630,7 +11630,7 @@
             <a:avLst/>
           </a:prstGeom>
           <a:solidFill>
-            <a:srgbClr val="2C5AA0"/>
+            <a:srgbClr val="2B62B8"/>
           </a:solidFill>
           <a:ln>
             <a:noFill/>
@@ -11698,7 +11698,7 @@
           </a:prstGeom>
           <a:ln w="28575">
             <a:solidFill>
-              <a:srgbClr val="634A94"/>
+              <a:srgbClr val="6D4EAA"/>
             </a:solidFill>
             <a:tailEnd type="triangle" w="med" len="med"/>
           </a:ln>
@@ -11734,7 +11734,7 @@
             <a:avLst/>
           </a:prstGeom>
           <a:solidFill>
-            <a:srgbClr val="634A94"/>
+            <a:srgbClr val="6D4EAA"/>
           </a:solidFill>
           <a:ln>
             <a:noFill/>
@@ -11811,7 +11811,7 @@
             <a:pPr algn="l">
               <a:defRPr sz="1400" b="1">
                 <a:solidFill>
-                  <a:srgbClr val="1D6E6A"/>
+                  <a:srgbClr val="117A72"/>
                 </a:solidFill>
                 <a:latin typeface="Avenir Next"/>
               </a:defRPr>
@@ -11922,7 +11922,7 @@
             <a:pPr algn="l">
               <a:defRPr sz="1300" b="1">
                 <a:solidFill>
-                  <a:srgbClr val="8C6D1F"/>
+                  <a:srgbClr val="9A7614"/>
                 </a:solidFill>
                 <a:latin typeface="Avenir Next"/>
               </a:defRPr>
@@ -12041,7 +12041,7 @@
           </a:prstGeom>
           <a:ln w="28575">
             <a:solidFill>
-              <a:srgbClr val="1D6E6A"/>
+              <a:srgbClr val="117A72"/>
             </a:solidFill>
             <a:tailEnd type="triangle" w="med" len="med"/>
           </a:ln>
@@ -12077,7 +12077,7 @@
             <a:avLst/>
           </a:prstGeom>
           <a:solidFill>
-            <a:srgbClr val="1D6E6A"/>
+            <a:srgbClr val="117A72"/>
           </a:solidFill>
           <a:ln>
             <a:noFill/>
@@ -12144,7 +12144,7 @@
             <a:avLst/>
           </a:prstGeom>
           <a:solidFill>
-            <a:srgbClr val="2E6B45"/>
+            <a:srgbClr val="2C7A4B"/>
           </a:solidFill>
           <a:ln>
             <a:noFill/>
@@ -12279,7 +12279,7 @@
           </a:prstGeom>
           <a:ln w="28575">
             <a:solidFill>
-              <a:srgbClr val="1D6E6A"/>
+              <a:srgbClr val="117A72"/>
             </a:solidFill>
             <a:tailEnd type="triangle" w="med" len="med"/>
           </a:ln>
@@ -12351,7 +12351,7 @@
             <a:avLst/>
           </a:prstGeom>
           <a:solidFill>
-            <a:srgbClr val="A86A14"/>
+            <a:srgbClr val="BA740E"/>
           </a:solidFill>
           <a:ln>
             <a:noFill/>
@@ -12418,7 +12418,7 @@
             <a:avLst/>
           </a:prstGeom>
           <a:solidFill>
-            <a:srgbClr val="2C5AA0"/>
+            <a:srgbClr val="2B62B8"/>
           </a:solidFill>
           <a:ln>
             <a:noFill/>
@@ -12485,7 +12485,7 @@
             <a:avLst/>
           </a:prstGeom>
           <a:solidFill>
-            <a:srgbClr val="634A94"/>
+            <a:srgbClr val="6D4EAA"/>
           </a:solidFill>
           <a:ln>
             <a:noFill/>
@@ -12691,7 +12691,7 @@
             <a:pPr algn="l">
               <a:defRPr sz="1300" b="1">
                 <a:solidFill>
-                  <a:srgbClr val="8C6D1F"/>
+                  <a:srgbClr val="9A7614"/>
                 </a:solidFill>
                 <a:latin typeface="Avenir Next"/>
               </a:defRPr>
@@ -12797,7 +12797,7 @@
             <a:avLst/>
           </a:prstGeom>
           <a:solidFill>
-            <a:srgbClr val="1D6E6A"/>
+            <a:srgbClr val="117A72"/>
           </a:solidFill>
           <a:ln>
             <a:noFill/>
@@ -12993,7 +12993,7 @@
             <a:avLst/>
           </a:prstGeom>
           <a:solidFill>
-            <a:srgbClr val="2E6B45"/>
+            <a:srgbClr val="2C7A4B"/>
           </a:solidFill>
           <a:ln>
             <a:noFill/>
@@ -13189,7 +13189,7 @@
             <a:avLst/>
           </a:prstGeom>
           <a:solidFill>
-            <a:srgbClr val="A86A14"/>
+            <a:srgbClr val="BA740E"/>
           </a:solidFill>
           <a:ln>
             <a:noFill/>
@@ -13385,7 +13385,7 @@
             <a:avLst/>
           </a:prstGeom>
           <a:solidFill>
-            <a:srgbClr val="2C5AA0"/>
+            <a:srgbClr val="2B62B8"/>
           </a:solidFill>
           <a:ln>
             <a:noFill/>
@@ -13581,7 +13581,7 @@
             <a:avLst/>
           </a:prstGeom>
           <a:solidFill>
-            <a:srgbClr val="634A94"/>
+            <a:srgbClr val="6D4EAA"/>
           </a:solidFill>
           <a:ln>
             <a:noFill/>
@@ -13859,7 +13859,7 @@
             <a:pPr algn="l">
               <a:defRPr sz="1300" b="1">
                 <a:solidFill>
-                  <a:srgbClr val="8C6D1F"/>
+                  <a:srgbClr val="9A7614"/>
                 </a:solidFill>
                 <a:latin typeface="Avenir Next"/>
               </a:defRPr>
@@ -14037,7 +14037,7 @@
             <a:avLst/>
           </a:prstGeom>
           <a:solidFill>
-            <a:srgbClr val="1D6E6A"/>
+            <a:srgbClr val="117A72"/>
           </a:solidFill>
           <a:ln>
             <a:noFill/>
@@ -14091,7 +14091,7 @@
             <a:avLst/>
           </a:prstGeom>
           <a:solidFill>
-            <a:srgbClr val="2E6B45"/>
+            <a:srgbClr val="2C7A4B"/>
           </a:solidFill>
           <a:ln>
             <a:noFill/>
@@ -14199,7 +14199,7 @@
             <a:avLst/>
           </a:prstGeom>
           <a:solidFill>
-            <a:srgbClr val="A86A14"/>
+            <a:srgbClr val="BA740E"/>
           </a:solidFill>
           <a:ln>
             <a:noFill/>
@@ -14253,7 +14253,7 @@
             <a:avLst/>
           </a:prstGeom>
           <a:solidFill>
-            <a:srgbClr val="2C5AA0"/>
+            <a:srgbClr val="2B62B8"/>
           </a:solidFill>
           <a:ln>
             <a:noFill/>
@@ -14307,7 +14307,7 @@
             <a:avLst/>
           </a:prstGeom>
           <a:solidFill>
-            <a:srgbClr val="634A94"/>
+            <a:srgbClr val="6D4EAA"/>
           </a:solidFill>
           <a:ln>
             <a:noFill/>
@@ -14477,7 +14477,7 @@
             <a:avLst/>
           </a:prstGeom>
           <a:solidFill>
-            <a:srgbClr val="1D6E6A"/>
+            <a:srgbClr val="117A72"/>
           </a:solidFill>
           <a:ln>
             <a:noFill/>
@@ -14531,7 +14531,7 @@
             <a:avLst/>
           </a:prstGeom>
           <a:solidFill>
-            <a:srgbClr val="2E6B45"/>
+            <a:srgbClr val="2C7A4B"/>
           </a:solidFill>
           <a:ln>
             <a:noFill/>
@@ -14639,7 +14639,7 @@
             <a:avLst/>
           </a:prstGeom>
           <a:solidFill>
-            <a:srgbClr val="A86A14"/>
+            <a:srgbClr val="BA740E"/>
           </a:solidFill>
           <a:ln>
             <a:noFill/>
@@ -14693,7 +14693,7 @@
             <a:avLst/>
           </a:prstGeom>
           <a:solidFill>
-            <a:srgbClr val="2C5AA0"/>
+            <a:srgbClr val="2B62B8"/>
           </a:solidFill>
           <a:ln>
             <a:noFill/>
@@ -14747,7 +14747,7 @@
             <a:avLst/>
           </a:prstGeom>
           <a:solidFill>
-            <a:srgbClr val="634A94"/>
+            <a:srgbClr val="6D4EAA"/>
           </a:solidFill>
           <a:ln>
             <a:noFill/>
@@ -15701,7 +15701,7 @@
             <a:pPr algn="l">
               <a:defRPr sz="1300" b="1">
                 <a:solidFill>
-                  <a:srgbClr val="8C6D1F"/>
+                  <a:srgbClr val="9A7614"/>
                 </a:solidFill>
                 <a:latin typeface="Avenir Next"/>
               </a:defRPr>
@@ -15817,7 +15817,7 @@
             <a:pPr algn="l">
               <a:defRPr sz="1700" b="1">
                 <a:solidFill>
-                  <a:srgbClr val="634A94"/>
+                  <a:srgbClr val="6D4EAA"/>
                 </a:solidFill>
                 <a:latin typeface="Avenir Next"/>
               </a:defRPr>
@@ -15853,7 +15853,7 @@
             <a:pPr algn="r">
               <a:defRPr sz="1150" b="1">
                 <a:solidFill>
-                  <a:srgbClr val="634A94"/>
+                  <a:srgbClr val="6D4EAA"/>
                 </a:solidFill>
                 <a:latin typeface="Avenir Next"/>
               </a:defRPr>
@@ -15895,7 +15895,7 @@
               </a:defRPr>
             </a:pPr>
             <a:r>
-              <a:t>NAVY · HPE Cray EX4000 · SLES</a:t>
+              <a:t>NAVY · HPE Cray EX4000 · SLES · Slurm</a:t>
             </a:r>
           </a:p>
         </p:txBody>
@@ -16041,7 +16041,7 @@
             <a:pPr algn="l">
               <a:defRPr sz="1700" b="1">
                 <a:solidFill>
-                  <a:srgbClr val="2C5AA0"/>
+                  <a:srgbClr val="2B62B8"/>
                 </a:solidFill>
                 <a:latin typeface="Avenir Next"/>
               </a:defRPr>
@@ -16077,7 +16077,7 @@
             <a:pPr algn="r">
               <a:defRPr sz="1150" b="1">
                 <a:solidFill>
-                  <a:srgbClr val="2C5AA0"/>
+                  <a:srgbClr val="2B62B8"/>
                 </a:solidFill>
                 <a:latin typeface="Avenir Next"/>
               </a:defRPr>
@@ -16119,7 +16119,7 @@
               </a:defRPr>
             </a:pPr>
             <a:r>
-              <a:t>ARL · HPE Cray EX4000 · RHEL 9</a:t>
+              <a:t>ARL · HPE Cray EX4000 · RHEL 9 · Slurm</a:t>
             </a:r>
           </a:p>
         </p:txBody>
@@ -16265,7 +16265,7 @@
             <a:pPr algn="l">
               <a:defRPr sz="1700" b="1">
                 <a:solidFill>
-                  <a:srgbClr val="1D6E6A"/>
+                  <a:srgbClr val="117A72"/>
                 </a:solidFill>
                 <a:latin typeface="Avenir Next"/>
               </a:defRPr>
@@ -16301,7 +16301,7 @@
             <a:pPr algn="r">
               <a:defRPr sz="1150" b="1">
                 <a:solidFill>
-                  <a:srgbClr val="1D6E6A"/>
+                  <a:srgbClr val="117A72"/>
                 </a:solidFill>
                 <a:latin typeface="Avenir Next"/>
               </a:defRPr>
@@ -16343,7 +16343,7 @@
               </a:defRPr>
             </a:pPr>
             <a:r>
-              <a:t>AFRL · Penguin TrueHPC · RHEL 8</a:t>
+              <a:t>AFRL · Penguin TrueHPC · RHEL 8 · Slurm</a:t>
             </a:r>
           </a:p>
         </p:txBody>
@@ -16489,7 +16489,7 @@
             <a:pPr algn="l">
               <a:defRPr sz="1700" b="1">
                 <a:solidFill>
-                  <a:srgbClr val="A86A14"/>
+                  <a:srgbClr val="BA740E"/>
                 </a:solidFill>
                 <a:latin typeface="Avenir Next"/>
               </a:defRPr>
@@ -16525,7 +16525,7 @@
             <a:pPr algn="r">
               <a:defRPr sz="1150" b="1">
                 <a:solidFill>
-                  <a:srgbClr val="A86A14"/>
+                  <a:srgbClr val="BA740E"/>
                 </a:solidFill>
                 <a:latin typeface="Avenir Next"/>
               </a:defRPr>
@@ -16567,7 +16567,7 @@
               </a:defRPr>
             </a:pPr>
             <a:r>
-              <a:t>ERDC · Liqid composable · RHEL 8</a:t>
+              <a:t>ERDC · Liqid composable · RHEL 8 · PBS</a:t>
             </a:r>
           </a:p>
         </p:txBody>
@@ -16693,7 +16693,7 @@
               </a:defRPr>
             </a:pPr>
             <a:r>
-              <a:t>Coverage: SLES + RHEL 8 + RHEL 9 · AMD + Intel CPUs · AMD MI300A + NVIDIA H200 and A100</a:t>
+              <a:t>Coverage: SLES + RHEL 8/9 · AMD + Intel CPUs · MI300A + H200 + A100 · Slurm + PBS</a:t>
             </a:r>
           </a:p>
         </p:txBody>
@@ -16821,7 +16821,7 @@
             <a:pPr algn="l">
               <a:defRPr sz="1300" b="1">
                 <a:solidFill>
-                  <a:srgbClr val="8C6D1F"/>
+                  <a:srgbClr val="9A7614"/>
                 </a:solidFill>
                 <a:latin typeface="Avenir Next"/>
               </a:defRPr>
@@ -16927,7 +16927,7 @@
             <a:avLst/>
           </a:prstGeom>
           <a:solidFill>
-            <a:srgbClr val="1D6E6A"/>
+            <a:srgbClr val="117A72"/>
           </a:solidFill>
           <a:ln>
             <a:noFill/>
@@ -17097,7 +17097,7 @@
             <a:avLst/>
           </a:prstGeom>
           <a:solidFill>
-            <a:srgbClr val="2C5AA0"/>
+            <a:srgbClr val="2B62B8"/>
           </a:solidFill>
           <a:ln>
             <a:noFill/>
@@ -17267,7 +17267,7 @@
             <a:avLst/>
           </a:prstGeom>
           <a:solidFill>
-            <a:srgbClr val="634A94"/>
+            <a:srgbClr val="6D4EAA"/>
           </a:solidFill>
           <a:ln>
             <a:noFill/>
@@ -17437,7 +17437,7 @@
             <a:avLst/>
           </a:prstGeom>
           <a:solidFill>
-            <a:srgbClr val="A86A14"/>
+            <a:srgbClr val="BA740E"/>
           </a:solidFill>
           <a:ln>
             <a:noFill/>

--- a/presentations/cse_lanes_model.pptx
+++ b/presentations/cse_lanes_model.pptx
@@ -3628,8 +3628,8 @@
         </p:nvSpPr>
         <p:spPr>
           <a:xfrm>
-            <a:off x="548640" y="1600200"/>
-            <a:ext cx="11091672" cy="987552"/>
+            <a:off x="548640" y="1517904"/>
+            <a:ext cx="11091672" cy="896112"/>
           </a:xfrm>
           <a:prstGeom prst="roundRect">
             <a:avLst/>
@@ -3672,7 +3672,7 @@
         </p:nvSpPr>
         <p:spPr>
           <a:xfrm>
-            <a:off x="868680" y="1728216"/>
+            <a:off x="868680" y="1609344"/>
             <a:ext cx="10515600" cy="274320"/>
           </a:xfrm>
           <a:prstGeom prst="rect">
@@ -3687,7 +3687,7 @@
           <a:lstStyle/>
           <a:p>
             <a:pPr algn="l">
-              <a:defRPr sz="1350" b="1">
+              <a:defRPr sz="1300" b="1">
                 <a:solidFill>
                   <a:srgbClr val="2C7A4B"/>
                 </a:solidFill>
@@ -3708,8 +3708,8 @@
         </p:nvSpPr>
         <p:spPr>
           <a:xfrm>
-            <a:off x="868680" y="2011680"/>
-            <a:ext cx="10515600" cy="530352"/>
+            <a:off x="868680" y="1892807"/>
+            <a:ext cx="10515600" cy="493776"/>
           </a:xfrm>
           <a:prstGeom prst="rect">
             <a:avLst/>
@@ -3723,7 +3723,7 @@
           <a:lstStyle/>
           <a:p>
             <a:pPr algn="l">
-              <a:defRPr sz="1100" b="0">
+              <a:defRPr sz="1050" b="0">
                 <a:solidFill>
                   <a:srgbClr val="6E7B90"/>
                 </a:solidFill>
@@ -3744,8 +3744,8 @@
         </p:nvSpPr>
         <p:spPr>
           <a:xfrm>
-            <a:off x="548640" y="2679191"/>
-            <a:ext cx="11091672" cy="987552"/>
+            <a:off x="548640" y="2487168"/>
+            <a:ext cx="11091672" cy="896112"/>
           </a:xfrm>
           <a:prstGeom prst="roundRect">
             <a:avLst/>
@@ -3788,7 +3788,7 @@
         </p:nvSpPr>
         <p:spPr>
           <a:xfrm>
-            <a:off x="868680" y="2807208"/>
+            <a:off x="868680" y="2578608"/>
             <a:ext cx="10515600" cy="274320"/>
           </a:xfrm>
           <a:prstGeom prst="rect">
@@ -3803,7 +3803,7 @@
           <a:lstStyle/>
           <a:p>
             <a:pPr algn="l">
-              <a:defRPr sz="1350" b="1">
+              <a:defRPr sz="1300" b="1">
                 <a:solidFill>
                   <a:srgbClr val="117A72"/>
                 </a:solidFill>
@@ -3824,8 +3824,8 @@
         </p:nvSpPr>
         <p:spPr>
           <a:xfrm>
-            <a:off x="868680" y="3090672"/>
-            <a:ext cx="10515600" cy="530352"/>
+            <a:off x="868680" y="2862072"/>
+            <a:ext cx="10515600" cy="493776"/>
           </a:xfrm>
           <a:prstGeom prst="rect">
             <a:avLst/>
@@ -3839,7 +3839,7 @@
           <a:lstStyle/>
           <a:p>
             <a:pPr algn="l">
-              <a:defRPr sz="1100" b="0">
+              <a:defRPr sz="1050" b="0">
                 <a:solidFill>
                   <a:srgbClr val="6E7B90"/>
                 </a:solidFill>
@@ -3860,8 +3860,8 @@
         </p:nvSpPr>
         <p:spPr>
           <a:xfrm>
-            <a:off x="548640" y="3758183"/>
-            <a:ext cx="11091672" cy="987552"/>
+            <a:off x="548640" y="3456432"/>
+            <a:ext cx="11091672" cy="896112"/>
           </a:xfrm>
           <a:prstGeom prst="roundRect">
             <a:avLst/>
@@ -3904,7 +3904,7 @@
         </p:nvSpPr>
         <p:spPr>
           <a:xfrm>
-            <a:off x="868680" y="3886199"/>
+            <a:off x="868680" y="3547872"/>
             <a:ext cx="10515600" cy="274320"/>
           </a:xfrm>
           <a:prstGeom prst="rect">
@@ -3919,7 +3919,7 @@
           <a:lstStyle/>
           <a:p>
             <a:pPr algn="l">
-              <a:defRPr sz="1350" b="1">
+              <a:defRPr sz="1300" b="1">
                 <a:solidFill>
                   <a:srgbClr val="BA740E"/>
                 </a:solidFill>
@@ -3940,8 +3940,8 @@
         </p:nvSpPr>
         <p:spPr>
           <a:xfrm>
-            <a:off x="868680" y="4169663"/>
-            <a:ext cx="10515600" cy="530352"/>
+            <a:off x="868680" y="3831336"/>
+            <a:ext cx="10515600" cy="493776"/>
           </a:xfrm>
           <a:prstGeom prst="rect">
             <a:avLst/>
@@ -3955,7 +3955,7 @@
           <a:lstStyle/>
           <a:p>
             <a:pPr algn="l">
-              <a:defRPr sz="1100" b="0">
+              <a:defRPr sz="1050" b="0">
                 <a:solidFill>
                   <a:srgbClr val="6E7B90"/>
                 </a:solidFill>
@@ -3976,8 +3976,8 @@
         </p:nvSpPr>
         <p:spPr>
           <a:xfrm>
-            <a:off x="548640" y="4837176"/>
-            <a:ext cx="11091672" cy="987552"/>
+            <a:off x="548640" y="4425696"/>
+            <a:ext cx="11091672" cy="896112"/>
           </a:xfrm>
           <a:prstGeom prst="roundRect">
             <a:avLst/>
@@ -4020,7 +4020,7 @@
         </p:nvSpPr>
         <p:spPr>
           <a:xfrm>
-            <a:off x="868680" y="4965192"/>
+            <a:off x="868680" y="4517136"/>
             <a:ext cx="10515600" cy="274320"/>
           </a:xfrm>
           <a:prstGeom prst="rect">
@@ -4035,7 +4035,7 @@
           <a:lstStyle/>
           <a:p>
             <a:pPr algn="l">
-              <a:defRPr sz="1350" b="1">
+              <a:defRPr sz="1300" b="1">
                 <a:solidFill>
                   <a:srgbClr val="6D4EAA"/>
                 </a:solidFill>
@@ -4056,8 +4056,8 @@
         </p:nvSpPr>
         <p:spPr>
           <a:xfrm>
-            <a:off x="868680" y="5248656"/>
-            <a:ext cx="10515600" cy="530352"/>
+            <a:off x="868680" y="4800600"/>
+            <a:ext cx="10515600" cy="493776"/>
           </a:xfrm>
           <a:prstGeom prst="rect">
             <a:avLst/>
@@ -4071,7 +4071,7 @@
           <a:lstStyle/>
           <a:p>
             <a:pPr algn="l">
-              <a:defRPr sz="1100" b="0">
+              <a:defRPr sz="1050" b="0">
                 <a:solidFill>
                   <a:srgbClr val="6E7B90"/>
                 </a:solidFill>
@@ -4080,6 +4080,122 @@
             </a:pPr>
             <a:r>
               <a:t>The plan is to build every lane at the portable baseline, prove the model, then turn on per-lane tuning for Genoa, Milan, or Cascade Lake. Each target is a flag plus a full rebuild, so the open part is when, not whether.</a:t>
+            </a:r>
+          </a:p>
+        </p:txBody>
+      </p:sp>
+      <p:sp>
+        <p:nvSpPr>
+          <p:cNvPr id="17" name="Rounded Rectangle 16"/>
+          <p:cNvSpPr/>
+          <p:nvPr/>
+        </p:nvSpPr>
+        <p:spPr>
+          <a:xfrm>
+            <a:off x="548640" y="5394960"/>
+            <a:ext cx="11091672" cy="896112"/>
+          </a:xfrm>
+          <a:prstGeom prst="roundRect">
+            <a:avLst/>
+          </a:prstGeom>
+          <a:solidFill>
+            <a:srgbClr val="F2F4F7"/>
+          </a:solidFill>
+          <a:ln>
+            <a:noFill/>
+          </a:ln>
+          <a:effectLst/>
+        </p:spPr>
+        <p:style>
+          <a:lnRef idx="1">
+            <a:schemeClr val="accent1"/>
+          </a:lnRef>
+          <a:fillRef idx="3">
+            <a:schemeClr val="accent1"/>
+          </a:fillRef>
+          <a:effectRef idx="2">
+            <a:schemeClr val="accent1"/>
+          </a:effectRef>
+          <a:fontRef idx="minor">
+            <a:schemeClr val="lt1"/>
+          </a:fontRef>
+        </p:style>
+        <p:txBody>
+          <a:bodyPr rtlCol="0" anchor="ctr"/>
+          <a:lstStyle/>
+          <a:p>
+            <a:pPr algn="ctr"/>
+          </a:p>
+        </p:txBody>
+      </p:sp>
+      <p:sp>
+        <p:nvSpPr>
+          <p:cNvPr id="18" name="TextBox 17"/>
+          <p:cNvSpPr txBox="1"/>
+          <p:nvPr/>
+        </p:nvSpPr>
+        <p:spPr>
+          <a:xfrm>
+            <a:off x="868680" y="5486400"/>
+            <a:ext cx="10515600" cy="274320"/>
+          </a:xfrm>
+          <a:prstGeom prst="rect">
+            <a:avLst/>
+          </a:prstGeom>
+          <a:noFill/>
+        </p:spPr>
+        <p:txBody>
+          <a:bodyPr wrap="square" anchor="t">
+            <a:spAutoFit/>
+          </a:bodyPr>
+          <a:lstStyle/>
+          <a:p>
+            <a:pPr algn="l">
+              <a:defRPr sz="1300" b="1">
+                <a:solidFill>
+                  <a:srgbClr val="9A7614"/>
+                </a:solidFill>
+                <a:latin typeface="Avenir Next"/>
+              </a:defRPr>
+            </a:pPr>
+            <a:r>
+              <a:t>What is CSE promising: the same interface, or the same binaries?</a:t>
+            </a:r>
+          </a:p>
+        </p:txBody>
+      </p:sp>
+      <p:sp>
+        <p:nvSpPr>
+          <p:cNvPr id="19" name="TextBox 18"/>
+          <p:cNvSpPr txBox="1"/>
+          <p:nvPr/>
+        </p:nvSpPr>
+        <p:spPr>
+          <a:xfrm>
+            <a:off x="868680" y="5769864"/>
+            <a:ext cx="10515600" cy="493776"/>
+          </a:xfrm>
+          <a:prstGeom prst="rect">
+            <a:avLst/>
+          </a:prstGeom>
+          <a:noFill/>
+        </p:spPr>
+        <p:txBody>
+          <a:bodyPr wrap="square" anchor="t">
+            <a:spAutoFit/>
+          </a:bodyPr>
+          <a:lstStyle/>
+          <a:p>
+            <a:pPr algn="l">
+              <a:defRPr sz="1050" b="0">
+                <a:solidFill>
+                  <a:srgbClr val="6E7B90"/>
+                </a:solidFill>
+                <a:latin typeface="Avenir Next"/>
+              </a:defRPr>
+            </a:pPr>
+            <a:r>
+              <a:t>The lanes already give every DSRC the same front door, names, and rosters, with the native MPI behind them. A stock MPICH lane with ABI substitution on the Crays would add binary-level consistency, and a pinned CSE GCC would anchor the compilers.</a:t>
             </a:r>
           </a:p>
         </p:txBody>

--- a/presentations/cse_lanes_model.pptx
+++ b/presentations/cse_lanes_model.pptx
@@ -4159,7 +4159,7 @@
               </a:defRPr>
             </a:pPr>
             <a:r>
-              <a:t>What is CSE promising: the same interface, or the same binaries?</a:t>
+              <a:t>What is CSE promising: same interface, same build steps, or same binaries?</a:t>
             </a:r>
           </a:p>
         </p:txBody>
@@ -4195,7 +4195,7 @@
               </a:defRPr>
             </a:pPr>
             <a:r>
-              <a:t>The lanes already give every DSRC the same front door, names, and rosters, with the native MPI behind them. A stock MPICH lane with ABI substitution on the Crays would add binary-level consistency, and a pinned CSE GCC would anchor the compilers.</a:t>
+              <a:t>The lanes give every DSRC the same front door and rosters, and the same spec plus the same steps already build on any system, with that system's MPI and compiler underneath. Same binaries is the open part: a stock MPICH lane with ABI substitution on the Crays.</a:t>
             </a:r>
           </a:p>
         </p:txBody>

--- a/presentations/cse_lanes_model.pptx
+++ b/presentations/cse_lanes_model.pptx
@@ -4159,7 +4159,7 @@
               </a:defRPr>
             </a:pPr>
             <a:r>
-              <a:t>What is CSE promising: same interface, same build steps, or same binaries?</a:t>
+              <a:t>Consistency means the same functionality, not the same implementations.</a:t>
             </a:r>
           </a:p>
         </p:txBody>
@@ -4195,7 +4195,7 @@
               </a:defRPr>
             </a:pPr>
             <a:r>
-              <a:t>The lanes give every DSRC the same front door and rosters, and the same spec plus the same steps already build on any system, with that system's MPI and compiler underneath. Same binaries is the open part: a stock MPICH lane with ABI substitution on the Crays.</a:t>
+              <a:t>A user builds and runs the same way on every system: same front door, same rosters, same workflow, with each machine's native MPI and compiler underneath. The open part is the floor: which capabilities every system must provide, and whether one pinned CSE GCC anchors the compilers.</a:t>
             </a:r>
           </a:p>
         </p:txBody>

--- a/presentations/cse_lanes_model.pptx
+++ b/presentations/cse_lanes_model.pptx
@@ -19,6 +19,7 @@
     <p:sldId id="267" r:id="rId18"/>
     <p:sldId id="268" r:id="rId19"/>
     <p:sldId id="269" r:id="rId20"/>
+    <p:sldId id="270" r:id="rId21"/>
   </p:sldIdLst>
   <p:sldSz cx="12191695" cy="6858000" type="screen4x3"/>
   <p:notesSz cx="6858000" cy="9144000"/>
@@ -4293,6 +4294,1143 @@
               </a:defRPr>
             </a:pPr>
             <a:r>
+              <a:t>DISCUSSION · FROM MODEL TO FIRST INSTALLS</a:t>
+            </a:r>
+          </a:p>
+        </p:txBody>
+      </p:sp>
+      <p:sp>
+        <p:nvSpPr>
+          <p:cNvPr id="4" name="TextBox 3"/>
+          <p:cNvSpPr txBox="1"/>
+          <p:nvPr/>
+        </p:nvSpPr>
+        <p:spPr>
+          <a:xfrm>
+            <a:off x="548640" y="566928"/>
+            <a:ext cx="11064240" cy="731520"/>
+          </a:xfrm>
+          <a:prstGeom prst="rect">
+            <a:avLst/>
+          </a:prstGeom>
+          <a:noFill/>
+        </p:spPr>
+        <p:txBody>
+          <a:bodyPr wrap="square" anchor="t">
+            <a:spAutoFit/>
+          </a:bodyPr>
+          <a:lstStyle/>
+          <a:p>
+            <a:pPr algn="l">
+              <a:defRPr sz="3000" b="1">
+                <a:solidFill>
+                  <a:srgbClr val="16243D"/>
+                </a:solidFill>
+                <a:latin typeface="Avenir Next"/>
+              </a:defRPr>
+            </a:pPr>
+            <a:r>
+              <a:t>Starting the builds: what to decide together</a:t>
+            </a:r>
+          </a:p>
+        </p:txBody>
+      </p:sp>
+      <p:sp>
+        <p:nvSpPr>
+          <p:cNvPr id="5" name="TextBox 4"/>
+          <p:cNvSpPr txBox="1"/>
+          <p:nvPr/>
+        </p:nvSpPr>
+        <p:spPr>
+          <a:xfrm>
+            <a:off x="548640" y="1481328"/>
+            <a:ext cx="5394960" cy="365760"/>
+          </a:xfrm>
+          <a:prstGeom prst="rect">
+            <a:avLst/>
+          </a:prstGeom>
+          <a:noFill/>
+        </p:spPr>
+        <p:txBody>
+          <a:bodyPr wrap="square" anchor="t">
+            <a:spAutoFit/>
+          </a:bodyPr>
+          <a:lstStyle/>
+          <a:p>
+            <a:pPr algn="l">
+              <a:defRPr sz="1500" b="1">
+                <a:solidFill>
+                  <a:srgbClr val="2C7A4B"/>
+                </a:solidFill>
+                <a:latin typeface="Avenir Next"/>
+              </a:defRPr>
+            </a:pPr>
+            <a:r>
+              <a:t>What I'm bringing</a:t>
+            </a:r>
+          </a:p>
+        </p:txBody>
+      </p:sp>
+      <p:sp>
+        <p:nvSpPr>
+          <p:cNvPr id="6" name="TextBox 5"/>
+          <p:cNvSpPr txBox="1"/>
+          <p:nvPr/>
+        </p:nvSpPr>
+        <p:spPr>
+          <a:xfrm>
+            <a:off x="548640" y="1938528"/>
+            <a:ext cx="365760" cy="365760"/>
+          </a:xfrm>
+          <a:prstGeom prst="rect">
+            <a:avLst/>
+          </a:prstGeom>
+          <a:noFill/>
+        </p:spPr>
+        <p:txBody>
+          <a:bodyPr wrap="square" anchor="t">
+            <a:spAutoFit/>
+          </a:bodyPr>
+          <a:lstStyle/>
+          <a:p>
+            <a:pPr algn="l">
+              <a:defRPr sz="1500" b="1">
+                <a:solidFill>
+                  <a:srgbClr val="2C7A4B"/>
+                </a:solidFill>
+                <a:latin typeface="Avenir Next"/>
+              </a:defRPr>
+            </a:pPr>
+            <a:r>
+              <a:t>✓</a:t>
+            </a:r>
+          </a:p>
+        </p:txBody>
+      </p:sp>
+      <p:sp>
+        <p:nvSpPr>
+          <p:cNvPr id="7" name="TextBox 6"/>
+          <p:cNvSpPr txBox="1"/>
+          <p:nvPr/>
+        </p:nvSpPr>
+        <p:spPr>
+          <a:xfrm>
+            <a:off x="960120" y="1938528"/>
+            <a:ext cx="5029200" cy="292608"/>
+          </a:xfrm>
+          <a:prstGeom prst="rect">
+            <a:avLst/>
+          </a:prstGeom>
+          <a:noFill/>
+        </p:spPr>
+        <p:txBody>
+          <a:bodyPr wrap="square" anchor="t">
+            <a:spAutoFit/>
+          </a:bodyPr>
+          <a:lstStyle/>
+          <a:p>
+            <a:pPr algn="l">
+              <a:defRPr sz="1300" b="1">
+                <a:solidFill>
+                  <a:srgbClr val="16243D"/>
+                </a:solidFill>
+                <a:latin typeface="Avenir Next"/>
+              </a:defRPr>
+            </a:pPr>
+            <a:r>
+              <a:t>Pilot systems and order</a:t>
+            </a:r>
+          </a:p>
+        </p:txBody>
+      </p:sp>
+      <p:sp>
+        <p:nvSpPr>
+          <p:cNvPr id="8" name="TextBox 7"/>
+          <p:cNvSpPr txBox="1"/>
+          <p:nvPr/>
+        </p:nvSpPr>
+        <p:spPr>
+          <a:xfrm>
+            <a:off x="960120" y="2249424"/>
+            <a:ext cx="5029200" cy="566928"/>
+          </a:xfrm>
+          <a:prstGeom prst="rect">
+            <a:avLst/>
+          </a:prstGeom>
+          <a:noFill/>
+        </p:spPr>
+        <p:txBody>
+          <a:bodyPr wrap="square" anchor="t">
+            <a:spAutoFit/>
+          </a:bodyPr>
+          <a:lstStyle/>
+          <a:p>
+            <a:pPr algn="l">
+              <a:defRPr sz="1100" b="0">
+                <a:solidFill>
+                  <a:srgbClr val="6E7B90"/>
+                </a:solidFill>
+                <a:latin typeface="Avenir Next"/>
+              </a:defRPr>
+            </a:pPr>
+            <a:r>
+              <a:t>Blueback first, then Raider and Wheat; Fran when it arrives</a:t>
+            </a:r>
+          </a:p>
+        </p:txBody>
+      </p:sp>
+      <p:sp>
+        <p:nvSpPr>
+          <p:cNvPr id="9" name="TextBox 8"/>
+          <p:cNvSpPr txBox="1"/>
+          <p:nvPr/>
+        </p:nvSpPr>
+        <p:spPr>
+          <a:xfrm>
+            <a:off x="548640" y="2944368"/>
+            <a:ext cx="365760" cy="365760"/>
+          </a:xfrm>
+          <a:prstGeom prst="rect">
+            <a:avLst/>
+          </a:prstGeom>
+          <a:noFill/>
+        </p:spPr>
+        <p:txBody>
+          <a:bodyPr wrap="square" anchor="t">
+            <a:spAutoFit/>
+          </a:bodyPr>
+          <a:lstStyle/>
+          <a:p>
+            <a:pPr algn="l">
+              <a:defRPr sz="1500" b="1">
+                <a:solidFill>
+                  <a:srgbClr val="2C7A4B"/>
+                </a:solidFill>
+                <a:latin typeface="Avenir Next"/>
+              </a:defRPr>
+            </a:pPr>
+            <a:r>
+              <a:t>✓</a:t>
+            </a:r>
+          </a:p>
+        </p:txBody>
+      </p:sp>
+      <p:sp>
+        <p:nvSpPr>
+          <p:cNvPr id="10" name="TextBox 9"/>
+          <p:cNvSpPr txBox="1"/>
+          <p:nvPr/>
+        </p:nvSpPr>
+        <p:spPr>
+          <a:xfrm>
+            <a:off x="960120" y="2944368"/>
+            <a:ext cx="5029200" cy="292608"/>
+          </a:xfrm>
+          <a:prstGeom prst="rect">
+            <a:avLst/>
+          </a:prstGeom>
+          <a:noFill/>
+        </p:spPr>
+        <p:txBody>
+          <a:bodyPr wrap="square" anchor="t">
+            <a:spAutoFit/>
+          </a:bodyPr>
+          <a:lstStyle/>
+          <a:p>
+            <a:pPr algn="l">
+              <a:defRPr sz="1300" b="1">
+                <a:solidFill>
+                  <a:srgbClr val="16243D"/>
+                </a:solidFill>
+                <a:latin typeface="Avenir Next"/>
+              </a:defRPr>
+            </a:pPr>
+            <a:r>
+              <a:t>A package roster with versions</a:t>
+            </a:r>
+          </a:p>
+        </p:txBody>
+      </p:sp>
+      <p:sp>
+        <p:nvSpPr>
+          <p:cNvPr id="11" name="TextBox 10"/>
+          <p:cNvSpPr txBox="1"/>
+          <p:nvPr/>
+        </p:nvSpPr>
+        <p:spPr>
+          <a:xfrm>
+            <a:off x="960120" y="3255264"/>
+            <a:ext cx="5029200" cy="566928"/>
+          </a:xfrm>
+          <a:prstGeom prst="rect">
+            <a:avLst/>
+          </a:prstGeom>
+          <a:noFill/>
+        </p:spPr>
+        <p:txBody>
+          <a:bodyPr wrap="square" anchor="t">
+            <a:spAutoFit/>
+          </a:bodyPr>
+          <a:lstStyle/>
+          <a:p>
+            <a:pPr algn="l">
+              <a:defRPr sz="1100" b="0">
+                <a:solidFill>
+                  <a:srgbClr val="6E7B90"/>
+                </a:solidFill>
+                <a:latin typeface="Avenir Next"/>
+              </a:defRPr>
+            </a:pPr>
+            <a:r>
+              <a:t>newest supported release plus its predecessor, variants written down</a:t>
+            </a:r>
+          </a:p>
+        </p:txBody>
+      </p:sp>
+      <p:sp>
+        <p:nvSpPr>
+          <p:cNvPr id="12" name="TextBox 11"/>
+          <p:cNvSpPr txBox="1"/>
+          <p:nvPr/>
+        </p:nvSpPr>
+        <p:spPr>
+          <a:xfrm>
+            <a:off x="548640" y="3950208"/>
+            <a:ext cx="365760" cy="365760"/>
+          </a:xfrm>
+          <a:prstGeom prst="rect">
+            <a:avLst/>
+          </a:prstGeom>
+          <a:noFill/>
+        </p:spPr>
+        <p:txBody>
+          <a:bodyPr wrap="square" anchor="t">
+            <a:spAutoFit/>
+          </a:bodyPr>
+          <a:lstStyle/>
+          <a:p>
+            <a:pPr algn="l">
+              <a:defRPr sz="1500" b="1">
+                <a:solidFill>
+                  <a:srgbClr val="2C7A4B"/>
+                </a:solidFill>
+                <a:latin typeface="Avenir Next"/>
+              </a:defRPr>
+            </a:pPr>
+            <a:r>
+              <a:t>✓</a:t>
+            </a:r>
+          </a:p>
+        </p:txBody>
+      </p:sp>
+      <p:sp>
+        <p:nvSpPr>
+          <p:cNvPr id="13" name="TextBox 12"/>
+          <p:cNvSpPr txBox="1"/>
+          <p:nvPr/>
+        </p:nvSpPr>
+        <p:spPr>
+          <a:xfrm>
+            <a:off x="960120" y="3950208"/>
+            <a:ext cx="5029200" cy="292608"/>
+          </a:xfrm>
+          <a:prstGeom prst="rect">
+            <a:avLst/>
+          </a:prstGeom>
+          <a:noFill/>
+        </p:spPr>
+        <p:txBody>
+          <a:bodyPr wrap="square" anchor="t">
+            <a:spAutoFit/>
+          </a:bodyPr>
+          <a:lstStyle/>
+          <a:p>
+            <a:pPr algn="l">
+              <a:defRPr sz="1300" b="1">
+                <a:solidFill>
+                  <a:srgbClr val="16243D"/>
+                </a:solidFill>
+                <a:latin typeface="Avenir Next"/>
+              </a:defRPr>
+            </a:pPr>
+            <a:r>
+              <a:t>A baseline CPU target</a:t>
+            </a:r>
+          </a:p>
+        </p:txBody>
+      </p:sp>
+      <p:sp>
+        <p:nvSpPr>
+          <p:cNvPr id="14" name="TextBox 13"/>
+          <p:cNvSpPr txBox="1"/>
+          <p:nvPr/>
+        </p:nvSpPr>
+        <p:spPr>
+          <a:xfrm>
+            <a:off x="960120" y="4261104"/>
+            <a:ext cx="5029200" cy="566928"/>
+          </a:xfrm>
+          <a:prstGeom prst="rect">
+            <a:avLst/>
+          </a:prstGeom>
+          <a:noFill/>
+        </p:spPr>
+        <p:txBody>
+          <a:bodyPr wrap="square" anchor="t">
+            <a:spAutoFit/>
+          </a:bodyPr>
+          <a:lstStyle/>
+          <a:p>
+            <a:pPr algn="l">
+              <a:defRPr sz="1100" b="0">
+                <a:solidFill>
+                  <a:srgbClr val="6E7B90"/>
+                </a:solidFill>
+                <a:latin typeface="Avenir Next"/>
+              </a:defRPr>
+            </a:pPr>
+            <a:r>
+              <a:t>x86_64_v3 runs natively on every pilot system; tuning is a later flag</a:t>
+            </a:r>
+          </a:p>
+        </p:txBody>
+      </p:sp>
+      <p:sp>
+        <p:nvSpPr>
+          <p:cNvPr id="15" name="TextBox 14"/>
+          <p:cNvSpPr txBox="1"/>
+          <p:nvPr/>
+        </p:nvSpPr>
+        <p:spPr>
+          <a:xfrm>
+            <a:off x="548640" y="4956048"/>
+            <a:ext cx="365760" cy="365760"/>
+          </a:xfrm>
+          <a:prstGeom prst="rect">
+            <a:avLst/>
+          </a:prstGeom>
+          <a:noFill/>
+        </p:spPr>
+        <p:txBody>
+          <a:bodyPr wrap="square" anchor="t">
+            <a:spAutoFit/>
+          </a:bodyPr>
+          <a:lstStyle/>
+          <a:p>
+            <a:pPr algn="l">
+              <a:defRPr sz="1500" b="1">
+                <a:solidFill>
+                  <a:srgbClr val="2C7A4B"/>
+                </a:solidFill>
+                <a:latin typeface="Avenir Next"/>
+              </a:defRPr>
+            </a:pPr>
+            <a:r>
+              <a:t>✓</a:t>
+            </a:r>
+          </a:p>
+        </p:txBody>
+      </p:sp>
+      <p:sp>
+        <p:nvSpPr>
+          <p:cNvPr id="16" name="TextBox 15"/>
+          <p:cNvSpPr txBox="1"/>
+          <p:nvPr/>
+        </p:nvSpPr>
+        <p:spPr>
+          <a:xfrm>
+            <a:off x="960120" y="4956048"/>
+            <a:ext cx="5029200" cy="292608"/>
+          </a:xfrm>
+          <a:prstGeom prst="rect">
+            <a:avLst/>
+          </a:prstGeom>
+          <a:noFill/>
+        </p:spPr>
+        <p:txBody>
+          <a:bodyPr wrap="square" anchor="t">
+            <a:spAutoFit/>
+          </a:bodyPr>
+          <a:lstStyle/>
+          <a:p>
+            <a:pPr algn="l">
+              <a:defRPr sz="1300" b="1">
+                <a:solidFill>
+                  <a:srgbClr val="16243D"/>
+                </a:solidFill>
+                <a:latin typeface="Avenir Next"/>
+              </a:defRPr>
+            </a:pPr>
+            <a:r>
+              <a:t>A draft definition of done</a:t>
+            </a:r>
+          </a:p>
+        </p:txBody>
+      </p:sp>
+      <p:sp>
+        <p:nvSpPr>
+          <p:cNvPr id="17" name="TextBox 16"/>
+          <p:cNvSpPr txBox="1"/>
+          <p:nvPr/>
+        </p:nvSpPr>
+        <p:spPr>
+          <a:xfrm>
+            <a:off x="960120" y="5266944"/>
+            <a:ext cx="5029200" cy="566928"/>
+          </a:xfrm>
+          <a:prstGeom prst="rect">
+            <a:avLst/>
+          </a:prstGeom>
+          <a:noFill/>
+        </p:spPr>
+        <p:txBody>
+          <a:bodyPr wrap="square" anchor="t">
+            <a:spAutoFit/>
+          </a:bodyPr>
+          <a:lstStyle/>
+          <a:p>
+            <a:pPr algn="l">
+              <a:defRPr sz="1100" b="0">
+                <a:solidFill>
+                  <a:srgbClr val="6E7B90"/>
+                </a:solidFill>
+                <a:latin typeface="Avenir Next"/>
+              </a:defRPr>
+            </a:pPr>
+            <a:r>
+              <a:t>five checks, spelled out below</a:t>
+            </a:r>
+          </a:p>
+        </p:txBody>
+      </p:sp>
+      <p:sp>
+        <p:nvSpPr>
+          <p:cNvPr id="18" name="TextBox 17"/>
+          <p:cNvSpPr txBox="1"/>
+          <p:nvPr/>
+        </p:nvSpPr>
+        <p:spPr>
+          <a:xfrm>
+            <a:off x="6263640" y="1481328"/>
+            <a:ext cx="5394960" cy="365760"/>
+          </a:xfrm>
+          <a:prstGeom prst="rect">
+            <a:avLst/>
+          </a:prstGeom>
+          <a:noFill/>
+        </p:spPr>
+        <p:txBody>
+          <a:bodyPr wrap="square" anchor="t">
+            <a:spAutoFit/>
+          </a:bodyPr>
+          <a:lstStyle/>
+          <a:p>
+            <a:pPr algn="l">
+              <a:defRPr sz="1500" b="1">
+                <a:solidFill>
+                  <a:srgbClr val="9A7614"/>
+                </a:solidFill>
+                <a:latin typeface="Avenir Next"/>
+              </a:defRPr>
+            </a:pPr>
+            <a:r>
+              <a:t>What I need from you</a:t>
+            </a:r>
+          </a:p>
+        </p:txBody>
+      </p:sp>
+      <p:sp>
+        <p:nvSpPr>
+          <p:cNvPr id="19" name="TextBox 18"/>
+          <p:cNvSpPr txBox="1"/>
+          <p:nvPr/>
+        </p:nvSpPr>
+        <p:spPr>
+          <a:xfrm>
+            <a:off x="6263640" y="1938528"/>
+            <a:ext cx="365760" cy="365760"/>
+          </a:xfrm>
+          <a:prstGeom prst="rect">
+            <a:avLst/>
+          </a:prstGeom>
+          <a:noFill/>
+        </p:spPr>
+        <p:txBody>
+          <a:bodyPr wrap="square" anchor="t">
+            <a:spAutoFit/>
+          </a:bodyPr>
+          <a:lstStyle/>
+          <a:p>
+            <a:pPr algn="l">
+              <a:defRPr sz="1500" b="1">
+                <a:solidFill>
+                  <a:srgbClr val="9A7614"/>
+                </a:solidFill>
+                <a:latin typeface="Avenir Next"/>
+              </a:defRPr>
+            </a:pPr>
+            <a:r>
+              <a:t>→</a:t>
+            </a:r>
+          </a:p>
+        </p:txBody>
+      </p:sp>
+      <p:sp>
+        <p:nvSpPr>
+          <p:cNvPr id="20" name="TextBox 19"/>
+          <p:cNvSpPr txBox="1"/>
+          <p:nvPr/>
+        </p:nvSpPr>
+        <p:spPr>
+          <a:xfrm>
+            <a:off x="6675120" y="1938528"/>
+            <a:ext cx="4937760" cy="292608"/>
+          </a:xfrm>
+          <a:prstGeom prst="rect">
+            <a:avLst/>
+          </a:prstGeom>
+          <a:noFill/>
+        </p:spPr>
+        <p:txBody>
+          <a:bodyPr wrap="square" anchor="t">
+            <a:spAutoFit/>
+          </a:bodyPr>
+          <a:lstStyle/>
+          <a:p>
+            <a:pPr algn="l">
+              <a:defRPr sz="1300" b="1">
+                <a:solidFill>
+                  <a:srgbClr val="16243D"/>
+                </a:solidFill>
+                <a:latin typeface="Avenir Next"/>
+              </a:defRPr>
+            </a:pPr>
+            <a:r>
+              <a:t>Which GCC on each system</a:t>
+            </a:r>
+          </a:p>
+        </p:txBody>
+      </p:sp>
+      <p:sp>
+        <p:nvSpPr>
+          <p:cNvPr id="21" name="TextBox 20"/>
+          <p:cNvSpPr txBox="1"/>
+          <p:nvPr/>
+        </p:nvSpPr>
+        <p:spPr>
+          <a:xfrm>
+            <a:off x="6675120" y="2249424"/>
+            <a:ext cx="4937760" cy="566928"/>
+          </a:xfrm>
+          <a:prstGeom prst="rect">
+            <a:avLst/>
+          </a:prstGeom>
+          <a:noFill/>
+        </p:spPr>
+        <p:txBody>
+          <a:bodyPr wrap="square" anchor="t">
+            <a:spAutoFit/>
+          </a:bodyPr>
+          <a:lstStyle/>
+          <a:p>
+            <a:pPr algn="l">
+              <a:defRPr sz="1100" b="0">
+                <a:solidFill>
+                  <a:srgbClr val="6E7B90"/>
+                </a:solidFill>
+                <a:latin typeface="Avenir Next"/>
+              </a:defRPr>
+            </a:pPr>
+            <a:r>
+              <a:t>the system's own, or one version built everywhere; every package rests on this</a:t>
+            </a:r>
+          </a:p>
+        </p:txBody>
+      </p:sp>
+      <p:sp>
+        <p:nvSpPr>
+          <p:cNvPr id="22" name="TextBox 21"/>
+          <p:cNvSpPr txBox="1"/>
+          <p:nvPr/>
+        </p:nvSpPr>
+        <p:spPr>
+          <a:xfrm>
+            <a:off x="6263640" y="2944368"/>
+            <a:ext cx="365760" cy="365760"/>
+          </a:xfrm>
+          <a:prstGeom prst="rect">
+            <a:avLst/>
+          </a:prstGeom>
+          <a:noFill/>
+        </p:spPr>
+        <p:txBody>
+          <a:bodyPr wrap="square" anchor="t">
+            <a:spAutoFit/>
+          </a:bodyPr>
+          <a:lstStyle/>
+          <a:p>
+            <a:pPr algn="l">
+              <a:defRPr sz="1500" b="1">
+                <a:solidFill>
+                  <a:srgbClr val="9A7614"/>
+                </a:solidFill>
+                <a:latin typeface="Avenir Next"/>
+              </a:defRPr>
+            </a:pPr>
+            <a:r>
+              <a:t>→</a:t>
+            </a:r>
+          </a:p>
+        </p:txBody>
+      </p:sp>
+      <p:sp>
+        <p:nvSpPr>
+          <p:cNvPr id="23" name="TextBox 22"/>
+          <p:cNvSpPr txBox="1"/>
+          <p:nvPr/>
+        </p:nvSpPr>
+        <p:spPr>
+          <a:xfrm>
+            <a:off x="6675120" y="2944368"/>
+            <a:ext cx="4937760" cy="292608"/>
+          </a:xfrm>
+          <a:prstGeom prst="rect">
+            <a:avLst/>
+          </a:prstGeom>
+          <a:noFill/>
+        </p:spPr>
+        <p:txBody>
+          <a:bodyPr wrap="square" anchor="t">
+            <a:spAutoFit/>
+          </a:bodyPr>
+          <a:lstStyle/>
+          <a:p>
+            <a:pPr algn="l">
+              <a:defRPr sz="1300" b="1">
+                <a:solidFill>
+                  <a:srgbClr val="16243D"/>
+                </a:solidFill>
+                <a:latin typeface="Avenir Next"/>
+              </a:defRPr>
+            </a:pPr>
+            <a:r>
+              <a:t>MPI pairing on Raider and Wheat</a:t>
+            </a:r>
+          </a:p>
+        </p:txBody>
+      </p:sp>
+      <p:sp>
+        <p:nvSpPr>
+          <p:cNvPr id="24" name="TextBox 23"/>
+          <p:cNvSpPr txBox="1"/>
+          <p:nvPr/>
+        </p:nvSpPr>
+        <p:spPr>
+          <a:xfrm>
+            <a:off x="6675120" y="3255264"/>
+            <a:ext cx="4937760" cy="566928"/>
+          </a:xfrm>
+          <a:prstGeom prst="rect">
+            <a:avLst/>
+          </a:prstGeom>
+          <a:noFill/>
+        </p:spPr>
+        <p:txBody>
+          <a:bodyPr wrap="square" anchor="t">
+            <a:spAutoFit/>
+          </a:bodyPr>
+          <a:lstStyle/>
+          <a:p>
+            <a:pPr algn="l">
+              <a:defRPr sz="1100" b="0">
+                <a:solidFill>
+                  <a:srgbClr val="6E7B90"/>
+                </a:solidFill>
+                <a:latin typeface="Avenir Next"/>
+              </a:defRPr>
+            </a:pPr>
+            <a:r>
+              <a:t>the Crays point at cray-mpich; the others need the site MPI confirmed</a:t>
+            </a:r>
+          </a:p>
+        </p:txBody>
+      </p:sp>
+      <p:sp>
+        <p:nvSpPr>
+          <p:cNvPr id="25" name="TextBox 24"/>
+          <p:cNvSpPr txBox="1"/>
+          <p:nvPr/>
+        </p:nvSpPr>
+        <p:spPr>
+          <a:xfrm>
+            <a:off x="6263640" y="3950208"/>
+            <a:ext cx="365760" cy="365760"/>
+          </a:xfrm>
+          <a:prstGeom prst="rect">
+            <a:avLst/>
+          </a:prstGeom>
+          <a:noFill/>
+        </p:spPr>
+        <p:txBody>
+          <a:bodyPr wrap="square" anchor="t">
+            <a:spAutoFit/>
+          </a:bodyPr>
+          <a:lstStyle/>
+          <a:p>
+            <a:pPr algn="l">
+              <a:defRPr sz="1500" b="1">
+                <a:solidFill>
+                  <a:srgbClr val="9A7614"/>
+                </a:solidFill>
+                <a:latin typeface="Avenir Next"/>
+              </a:defRPr>
+            </a:pPr>
+            <a:r>
+              <a:t>→</a:t>
+            </a:r>
+          </a:p>
+        </p:txBody>
+      </p:sp>
+      <p:sp>
+        <p:nvSpPr>
+          <p:cNvPr id="26" name="TextBox 25"/>
+          <p:cNvSpPr txBox="1"/>
+          <p:nvPr/>
+        </p:nvSpPr>
+        <p:spPr>
+          <a:xfrm>
+            <a:off x="6675120" y="3950208"/>
+            <a:ext cx="4937760" cy="292608"/>
+          </a:xfrm>
+          <a:prstGeom prst="rect">
+            <a:avLst/>
+          </a:prstGeom>
+          <a:noFill/>
+        </p:spPr>
+        <p:txBody>
+          <a:bodyPr wrap="square" anchor="t">
+            <a:spAutoFit/>
+          </a:bodyPr>
+          <a:lstStyle/>
+          <a:p>
+            <a:pPr algn="l">
+              <a:defRPr sz="1300" b="1">
+                <a:solidFill>
+                  <a:srgbClr val="16243D"/>
+                </a:solidFill>
+                <a:latin typeface="Avenir Next"/>
+              </a:defRPr>
+            </a:pPr>
+            <a:r>
+              <a:t>System details and install paths</a:t>
+            </a:r>
+          </a:p>
+        </p:txBody>
+      </p:sp>
+      <p:sp>
+        <p:nvSpPr>
+          <p:cNvPr id="27" name="TextBox 26"/>
+          <p:cNvSpPr txBox="1"/>
+          <p:nvPr/>
+        </p:nvSpPr>
+        <p:spPr>
+          <a:xfrm>
+            <a:off x="6675120" y="4261104"/>
+            <a:ext cx="4937760" cy="566928"/>
+          </a:xfrm>
+          <a:prstGeom prst="rect">
+            <a:avLst/>
+          </a:prstGeom>
+          <a:noFill/>
+        </p:spPr>
+        <p:txBody>
+          <a:bodyPr wrap="square" anchor="t">
+            <a:spAutoFit/>
+          </a:bodyPr>
+          <a:lstStyle/>
+          <a:p>
+            <a:pPr algn="l">
+              <a:defRPr sz="1100" b="0">
+                <a:solidFill>
+                  <a:srgbClr val="6E7B90"/>
+                </a:solidFill>
+                <a:latin typeface="Avenir Next"/>
+              </a:defRPr>
+            </a:pPr>
+            <a:r>
+              <a:t>each system needs its facts confirmed and locations chosen, with an owner</a:t>
+            </a:r>
+          </a:p>
+        </p:txBody>
+      </p:sp>
+      <p:sp>
+        <p:nvSpPr>
+          <p:cNvPr id="28" name="TextBox 27"/>
+          <p:cNvSpPr txBox="1"/>
+          <p:nvPr/>
+        </p:nvSpPr>
+        <p:spPr>
+          <a:xfrm>
+            <a:off x="6263640" y="4956048"/>
+            <a:ext cx="365760" cy="365760"/>
+          </a:xfrm>
+          <a:prstGeom prst="rect">
+            <a:avLst/>
+          </a:prstGeom>
+          <a:noFill/>
+        </p:spPr>
+        <p:txBody>
+          <a:bodyPr wrap="square" anchor="t">
+            <a:spAutoFit/>
+          </a:bodyPr>
+          <a:lstStyle/>
+          <a:p>
+            <a:pPr algn="l">
+              <a:defRPr sz="1500" b="1">
+                <a:solidFill>
+                  <a:srgbClr val="9A7614"/>
+                </a:solidFill>
+                <a:latin typeface="Avenir Next"/>
+              </a:defRPr>
+            </a:pPr>
+            <a:r>
+              <a:t>→</a:t>
+            </a:r>
+          </a:p>
+        </p:txBody>
+      </p:sp>
+      <p:sp>
+        <p:nvSpPr>
+          <p:cNvPr id="29" name="TextBox 28"/>
+          <p:cNvSpPr txBox="1"/>
+          <p:nvPr/>
+        </p:nvSpPr>
+        <p:spPr>
+          <a:xfrm>
+            <a:off x="6675120" y="4956048"/>
+            <a:ext cx="4937760" cy="292608"/>
+          </a:xfrm>
+          <a:prstGeom prst="rect">
+            <a:avLst/>
+          </a:prstGeom>
+          <a:noFill/>
+        </p:spPr>
+        <p:txBody>
+          <a:bodyPr wrap="square" anchor="t">
+            <a:spAutoFit/>
+          </a:bodyPr>
+          <a:lstStyle/>
+          <a:p>
+            <a:pPr algn="l">
+              <a:defRPr sz="1300" b="1">
+                <a:solidFill>
+                  <a:srgbClr val="16243D"/>
+                </a:solidFill>
+                <a:latin typeface="Avenir Next"/>
+              </a:defRPr>
+            </a:pPr>
+            <a:r>
+              <a:t>Agreement on the definition of done</a:t>
+            </a:r>
+          </a:p>
+        </p:txBody>
+      </p:sp>
+      <p:sp>
+        <p:nvSpPr>
+          <p:cNvPr id="30" name="TextBox 29"/>
+          <p:cNvSpPr txBox="1"/>
+          <p:nvPr/>
+        </p:nvSpPr>
+        <p:spPr>
+          <a:xfrm>
+            <a:off x="6675120" y="5266944"/>
+            <a:ext cx="4937760" cy="566928"/>
+          </a:xfrm>
+          <a:prstGeom prst="rect">
+            <a:avLst/>
+          </a:prstGeom>
+          <a:noFill/>
+        </p:spPr>
+        <p:txBody>
+          <a:bodyPr wrap="square" anchor="t">
+            <a:spAutoFit/>
+          </a:bodyPr>
+          <a:lstStyle/>
+          <a:p>
+            <a:pPr algn="l">
+              <a:defRPr sz="1100" b="0">
+                <a:solidFill>
+                  <a:srgbClr val="6E7B90"/>
+                </a:solidFill>
+                <a:latin typeface="Avenir Next"/>
+              </a:defRPr>
+            </a:pPr>
+            <a:r>
+              <a:t>so the first build has a finish line</a:t>
+            </a:r>
+          </a:p>
+        </p:txBody>
+      </p:sp>
+      <p:sp>
+        <p:nvSpPr>
+          <p:cNvPr id="31" name="Rounded Rectangle 30"/>
+          <p:cNvSpPr/>
+          <p:nvPr/>
+        </p:nvSpPr>
+        <p:spPr>
+          <a:xfrm>
+            <a:off x="548640" y="5943600"/>
+            <a:ext cx="11091672" cy="713232"/>
+          </a:xfrm>
+          <a:prstGeom prst="roundRect">
+            <a:avLst/>
+          </a:prstGeom>
+          <a:solidFill>
+            <a:srgbClr val="E3E7EE"/>
+          </a:solidFill>
+          <a:ln>
+            <a:noFill/>
+          </a:ln>
+          <a:effectLst/>
+        </p:spPr>
+        <p:style>
+          <a:lnRef idx="1">
+            <a:schemeClr val="accent1"/>
+          </a:lnRef>
+          <a:fillRef idx="3">
+            <a:schemeClr val="accent1"/>
+          </a:fillRef>
+          <a:effectRef idx="2">
+            <a:schemeClr val="accent1"/>
+          </a:effectRef>
+          <a:fontRef idx="minor">
+            <a:schemeClr val="lt1"/>
+          </a:fontRef>
+        </p:style>
+        <p:txBody>
+          <a:bodyPr rtlCol="0" anchor="ctr" wrap="square" lIns="109728" rIns="109728"/>
+          <a:lstStyle/>
+          <a:p>
+            <a:pPr algn="ctr">
+              <a:defRPr sz="1250" b="1">
+                <a:solidFill>
+                  <a:srgbClr val="16243D"/>
+                </a:solidFill>
+                <a:latin typeface="Avenir Next"/>
+              </a:defRPr>
+            </a:pPr>
+            <a:r>
+              <a:t>Draft definition of done: packages build · sample C, C++, and Fortran codes compile and run ·</a:t>
+            </a:r>
+          </a:p>
+          <a:p>
+            <a:pPr algn="ctr">
+              <a:defRPr sz="1250" b="1">
+                <a:solidFill>
+                  <a:srgbClr val="16243D"/>
+                </a:solidFill>
+                <a:latin typeface="Avenir Next"/>
+              </a:defRPr>
+            </a:pPr>
+            <a:r>
+              <a:t>MPI jobs run across nodes · a rebuild reproduces the result · installs come from the build cache</a:t>
+            </a:r>
+          </a:p>
+        </p:txBody>
+      </p:sp>
+    </p:spTree>
+  </p:cSld>
+  <p:clrMapOvr>
+    <a:masterClrMapping/>
+  </p:clrMapOvr>
+</p:sld>
+</file>
+
+<file path=ppt/slides/slide12.xml><?xml version="1.0" encoding="utf-8"?>
+<p:sld xmlns:a="http://schemas.openxmlformats.org/drawingml/2006/main" xmlns:p="http://schemas.openxmlformats.org/presentationml/2006/main" xmlns:r="http://schemas.openxmlformats.org/officeDocument/2006/relationships">
+  <p:cSld>
+    <p:spTree>
+      <p:nvGrpSpPr>
+        <p:cNvPr id="1" name=""/>
+        <p:cNvGrpSpPr/>
+        <p:nvPr/>
+      </p:nvGrpSpPr>
+      <p:grpSpPr/>
+      <p:sp>
+        <p:nvSpPr>
+          <p:cNvPr id="2" name="Rectangle 1"/>
+          <p:cNvSpPr/>
+          <p:nvPr/>
+        </p:nvSpPr>
+        <p:spPr>
+          <a:xfrm>
+            <a:off x="0" y="0"/>
+            <a:ext cx="12191695" cy="6858000"/>
+          </a:xfrm>
+          <a:prstGeom prst="rect">
+            <a:avLst/>
+          </a:prstGeom>
+          <a:solidFill>
+            <a:srgbClr val="FFFFFF"/>
+          </a:solidFill>
+          <a:ln>
+            <a:noFill/>
+          </a:ln>
+          <a:effectLst/>
+        </p:spPr>
+        <p:style>
+          <a:lnRef idx="1">
+            <a:schemeClr val="accent1"/>
+          </a:lnRef>
+          <a:fillRef idx="3">
+            <a:schemeClr val="accent1"/>
+          </a:fillRef>
+          <a:effectRef idx="2">
+            <a:schemeClr val="accent1"/>
+          </a:effectRef>
+          <a:fontRef idx="minor">
+            <a:schemeClr val="lt1"/>
+          </a:fontRef>
+        </p:style>
+        <p:txBody>
+          <a:bodyPr rtlCol="0" anchor="ctr"/>
+          <a:lstStyle/>
+          <a:p>
+            <a:pPr algn="ctr"/>
+          </a:p>
+        </p:txBody>
+      </p:sp>
+      <p:sp>
+        <p:nvSpPr>
+          <p:cNvPr id="3" name="TextBox 2"/>
+          <p:cNvSpPr txBox="1"/>
+          <p:nvPr/>
+        </p:nvSpPr>
+        <p:spPr>
+          <a:xfrm>
+            <a:off x="548640" y="256032"/>
+            <a:ext cx="10972800" cy="365760"/>
+          </a:xfrm>
+          <a:prstGeom prst="rect">
+            <a:avLst/>
+          </a:prstGeom>
+          <a:noFill/>
+        </p:spPr>
+        <p:txBody>
+          <a:bodyPr wrap="square" anchor="t">
+            <a:spAutoFit/>
+          </a:bodyPr>
+          <a:lstStyle/>
+          <a:p>
+            <a:pPr algn="l">
+              <a:defRPr sz="1300" b="1">
+                <a:solidFill>
+                  <a:srgbClr val="9A7614"/>
+                </a:solidFill>
+                <a:latin typeface="Avenir Next"/>
+              </a:defRPr>
+            </a:pPr>
+            <a:r>
               <a:t>APPENDIX · HOW THE LAYERS STACK</a:t>
             </a:r>
           </a:p>
@@ -4924,7 +6062,7 @@
 </p:sld>
 </file>
 
-<file path=ppt/slides/slide12.xml><?xml version="1.0" encoding="utf-8"?>
+<file path=ppt/slides/slide13.xml><?xml version="1.0" encoding="utf-8"?>
 <p:sld xmlns:a="http://schemas.openxmlformats.org/drawingml/2006/main" xmlns:p="http://schemas.openxmlformats.org/presentationml/2006/main" xmlns:r="http://schemas.openxmlformats.org/officeDocument/2006/relationships">
   <p:cSld>
     <p:spTree>
@@ -6242,7 +7380,7 @@
 </p:sld>
 </file>
 
-<file path=ppt/slides/slide13.xml><?xml version="1.0" encoding="utf-8"?>
+<file path=ppt/slides/slide14.xml><?xml version="1.0" encoding="utf-8"?>
 <p:sld xmlns:a="http://schemas.openxmlformats.org/drawingml/2006/main" xmlns:p="http://schemas.openxmlformats.org/presentationml/2006/main" xmlns:r="http://schemas.openxmlformats.org/officeDocument/2006/relationships">
   <p:cSld>
     <p:spTree>
@@ -7041,7 +8179,7 @@
 </p:sld>
 </file>
 
-<file path=ppt/slides/slide14.xml><?xml version="1.0" encoding="utf-8"?>
+<file path=ppt/slides/slide15.xml><?xml version="1.0" encoding="utf-8"?>
 <p:sld xmlns:a="http://schemas.openxmlformats.org/drawingml/2006/main" xmlns:p="http://schemas.openxmlformats.org/presentationml/2006/main" xmlns:r="http://schemas.openxmlformats.org/officeDocument/2006/relationships">
   <p:cSld>
     <p:spTree>

--- a/presentations/cse_lanes_model.pptx
+++ b/presentations/cse_lanes_model.pptx
@@ -4294,7 +4294,7 @@
               </a:defRPr>
             </a:pPr>
             <a:r>
-              <a:t>DISCUSSION · FROM MODEL TO FIRST INSTALLS</a:t>
+              <a:t>DISCUSSION · STARTER QUESTIONS FOR THE BUILD</a:t>
             </a:r>
           </a:p>
         </p:txBody>
@@ -4330,21 +4330,65 @@
               </a:defRPr>
             </a:pPr>
             <a:r>
-              <a:t>Starting the builds: what to decide together</a:t>
-            </a:r>
-          </a:p>
-        </p:txBody>
-      </p:sp>
-      <p:sp>
-        <p:nvSpPr>
-          <p:cNvPr id="5" name="TextBox 4"/>
+              <a:t>If we start building: what has to be decided?</a:t>
+            </a:r>
+          </a:p>
+        </p:txBody>
+      </p:sp>
+      <p:sp>
+        <p:nvSpPr>
+          <p:cNvPr id="5" name="Rounded Rectangle 4"/>
+          <p:cNvSpPr/>
+          <p:nvPr/>
+        </p:nvSpPr>
+        <p:spPr>
+          <a:xfrm>
+            <a:off x="548640" y="1517904"/>
+            <a:ext cx="11091672" cy="896112"/>
+          </a:xfrm>
+          <a:prstGeom prst="roundRect">
+            <a:avLst/>
+          </a:prstGeom>
+          <a:solidFill>
+            <a:srgbClr val="F2F4F7"/>
+          </a:solidFill>
+          <a:ln>
+            <a:noFill/>
+          </a:ln>
+          <a:effectLst/>
+        </p:spPr>
+        <p:style>
+          <a:lnRef idx="1">
+            <a:schemeClr val="accent1"/>
+          </a:lnRef>
+          <a:fillRef idx="3">
+            <a:schemeClr val="accent1"/>
+          </a:fillRef>
+          <a:effectRef idx="2">
+            <a:schemeClr val="accent1"/>
+          </a:effectRef>
+          <a:fontRef idx="minor">
+            <a:schemeClr val="lt1"/>
+          </a:fontRef>
+        </p:style>
+        <p:txBody>
+          <a:bodyPr rtlCol="0" anchor="ctr"/>
+          <a:lstStyle/>
+          <a:p>
+            <a:pPr algn="ctr"/>
+          </a:p>
+        </p:txBody>
+      </p:sp>
+      <p:sp>
+        <p:nvSpPr>
+          <p:cNvPr id="6" name="TextBox 5"/>
           <p:cNvSpPr txBox="1"/>
           <p:nvPr/>
         </p:nvSpPr>
         <p:spPr>
           <a:xfrm>
-            <a:off x="548640" y="1481328"/>
-            <a:ext cx="5394960" cy="365760"/>
+            <a:off x="868680" y="1609344"/>
+            <a:ext cx="10515600" cy="274320"/>
           </a:xfrm>
           <a:prstGeom prst="rect">
             <a:avLst/>
@@ -4358,29 +4402,29 @@
           <a:lstStyle/>
           <a:p>
             <a:pPr algn="l">
-              <a:defRPr sz="1500" b="1">
-                <a:solidFill>
-                  <a:srgbClr val="2C7A4B"/>
-                </a:solidFill>
-                <a:latin typeface="Avenir Next"/>
-              </a:defRPr>
-            </a:pPr>
-            <a:r>
-              <a:t>What I'm bringing</a:t>
-            </a:r>
-          </a:p>
-        </p:txBody>
-      </p:sp>
-      <p:sp>
-        <p:nvSpPr>
-          <p:cNvPr id="6" name="TextBox 5"/>
+              <a:defRPr sz="1300" b="1">
+                <a:solidFill>
+                  <a:srgbClr val="117A72"/>
+                </a:solidFill>
+                <a:latin typeface="Avenir Next"/>
+              </a:defRPr>
+            </a:pPr>
+            <a:r>
+              <a:t>Which compiler anchors each system's stack?</a:t>
+            </a:r>
+          </a:p>
+        </p:txBody>
+      </p:sp>
+      <p:sp>
+        <p:nvSpPr>
+          <p:cNvPr id="7" name="TextBox 6"/>
           <p:cNvSpPr txBox="1"/>
           <p:nvPr/>
         </p:nvSpPr>
         <p:spPr>
           <a:xfrm>
-            <a:off x="548640" y="1938528"/>
-            <a:ext cx="365760" cy="365760"/>
+            <a:off x="868680" y="1892807"/>
+            <a:ext cx="10515600" cy="493776"/>
           </a:xfrm>
           <a:prstGeom prst="rect">
             <a:avLst/>
@@ -4394,29 +4438,73 @@
           <a:lstStyle/>
           <a:p>
             <a:pPr algn="l">
-              <a:defRPr sz="1500" b="1">
-                <a:solidFill>
-                  <a:srgbClr val="2C7A4B"/>
-                </a:solidFill>
-                <a:latin typeface="Avenir Next"/>
-              </a:defRPr>
-            </a:pPr>
-            <a:r>
-              <a:t>✓</a:t>
-            </a:r>
-          </a:p>
-        </p:txBody>
-      </p:sp>
-      <p:sp>
-        <p:nvSpPr>
-          <p:cNvPr id="7" name="TextBox 6"/>
+              <a:defRPr sz="1050" b="0">
+                <a:solidFill>
+                  <a:srgbClr val="6E7B90"/>
+                </a:solidFill>
+                <a:latin typeface="Avenir Next"/>
+              </a:defRPr>
+            </a:pPr>
+            <a:r>
+              <a:t>Every package on a system builds against this choice, so it comes first. The system's own compiler, one common version everywhere, or something else?</a:t>
+            </a:r>
+          </a:p>
+        </p:txBody>
+      </p:sp>
+      <p:sp>
+        <p:nvSpPr>
+          <p:cNvPr id="8" name="Rounded Rectangle 7"/>
+          <p:cNvSpPr/>
+          <p:nvPr/>
+        </p:nvSpPr>
+        <p:spPr>
+          <a:xfrm>
+            <a:off x="548640" y="2487168"/>
+            <a:ext cx="11091672" cy="896112"/>
+          </a:xfrm>
+          <a:prstGeom prst="roundRect">
+            <a:avLst/>
+          </a:prstGeom>
+          <a:solidFill>
+            <a:srgbClr val="F2F4F7"/>
+          </a:solidFill>
+          <a:ln>
+            <a:noFill/>
+          </a:ln>
+          <a:effectLst/>
+        </p:spPr>
+        <p:style>
+          <a:lnRef idx="1">
+            <a:schemeClr val="accent1"/>
+          </a:lnRef>
+          <a:fillRef idx="3">
+            <a:schemeClr val="accent1"/>
+          </a:fillRef>
+          <a:effectRef idx="2">
+            <a:schemeClr val="accent1"/>
+          </a:effectRef>
+          <a:fontRef idx="minor">
+            <a:schemeClr val="lt1"/>
+          </a:fontRef>
+        </p:style>
+        <p:txBody>
+          <a:bodyPr rtlCol="0" anchor="ctr"/>
+          <a:lstStyle/>
+          <a:p>
+            <a:pPr algn="ctr"/>
+          </a:p>
+        </p:txBody>
+      </p:sp>
+      <p:sp>
+        <p:nvSpPr>
+          <p:cNvPr id="9" name="TextBox 8"/>
           <p:cNvSpPr txBox="1"/>
           <p:nvPr/>
         </p:nvSpPr>
         <p:spPr>
           <a:xfrm>
-            <a:off x="960120" y="1938528"/>
-            <a:ext cx="5029200" cy="292608"/>
+            <a:off x="868680" y="2578608"/>
+            <a:ext cx="10515600" cy="274320"/>
           </a:xfrm>
           <a:prstGeom prst="rect">
             <a:avLst/>
@@ -4432,27 +4520,27 @@
             <a:pPr algn="l">
               <a:defRPr sz="1300" b="1">
                 <a:solidFill>
-                  <a:srgbClr val="16243D"/>
-                </a:solidFill>
-                <a:latin typeface="Avenir Next"/>
-              </a:defRPr>
-            </a:pPr>
-            <a:r>
-              <a:t>Pilot systems and order</a:t>
-            </a:r>
-          </a:p>
-        </p:txBody>
-      </p:sp>
-      <p:sp>
-        <p:nvSpPr>
-          <p:cNvPr id="8" name="TextBox 7"/>
+                  <a:srgbClr val="2B62B8"/>
+                </a:solidFill>
+                <a:latin typeface="Avenir Next"/>
+              </a:defRPr>
+            </a:pPr>
+            <a:r>
+              <a:t>Which MPI pairs with it on each system?</a:t>
+            </a:r>
+          </a:p>
+        </p:txBody>
+      </p:sp>
+      <p:sp>
+        <p:nvSpPr>
+          <p:cNvPr id="10" name="TextBox 9"/>
           <p:cNvSpPr txBox="1"/>
           <p:nvPr/>
         </p:nvSpPr>
         <p:spPr>
           <a:xfrm>
-            <a:off x="960120" y="2249424"/>
-            <a:ext cx="5029200" cy="566928"/>
+            <a:off x="868680" y="2862072"/>
+            <a:ext cx="10515600" cy="493776"/>
           </a:xfrm>
           <a:prstGeom prst="rect">
             <a:avLst/>
@@ -4466,7 +4554,7 @@
           <a:lstStyle/>
           <a:p>
             <a:pPr algn="l">
-              <a:defRPr sz="1100" b="0">
+              <a:defRPr sz="1050" b="0">
                 <a:solidFill>
                   <a:srgbClr val="6E7B90"/>
                 </a:solidFill>
@@ -4474,21 +4562,65 @@
               </a:defRPr>
             </a:pPr>
             <a:r>
-              <a:t>Blueback first, then Raider and Wheat; Fran when it arrives</a:t>
-            </a:r>
-          </a:p>
-        </p:txBody>
-      </p:sp>
-      <p:sp>
-        <p:nvSpPr>
-          <p:cNvPr id="9" name="TextBox 8"/>
+              <a:t>Whatever we pick has to work with each machine's fabric and job launcher. Do we take what each site provides, and what do we do where that answer is unclear?</a:t>
+            </a:r>
+          </a:p>
+        </p:txBody>
+      </p:sp>
+      <p:sp>
+        <p:nvSpPr>
+          <p:cNvPr id="11" name="Rounded Rectangle 10"/>
+          <p:cNvSpPr/>
+          <p:nvPr/>
+        </p:nvSpPr>
+        <p:spPr>
+          <a:xfrm>
+            <a:off x="548640" y="3456432"/>
+            <a:ext cx="11091672" cy="896112"/>
+          </a:xfrm>
+          <a:prstGeom prst="roundRect">
+            <a:avLst/>
+          </a:prstGeom>
+          <a:solidFill>
+            <a:srgbClr val="F2F4F7"/>
+          </a:solidFill>
+          <a:ln>
+            <a:noFill/>
+          </a:ln>
+          <a:effectLst/>
+        </p:spPr>
+        <p:style>
+          <a:lnRef idx="1">
+            <a:schemeClr val="accent1"/>
+          </a:lnRef>
+          <a:fillRef idx="3">
+            <a:schemeClr val="accent1"/>
+          </a:fillRef>
+          <a:effectRef idx="2">
+            <a:schemeClr val="accent1"/>
+          </a:effectRef>
+          <a:fontRef idx="minor">
+            <a:schemeClr val="lt1"/>
+          </a:fontRef>
+        </p:style>
+        <p:txBody>
+          <a:bodyPr rtlCol="0" anchor="ctr"/>
+          <a:lstStyle/>
+          <a:p>
+            <a:pPr algn="ctr"/>
+          </a:p>
+        </p:txBody>
+      </p:sp>
+      <p:sp>
+        <p:nvSpPr>
+          <p:cNvPr id="12" name="TextBox 11"/>
           <p:cNvSpPr txBox="1"/>
           <p:nvPr/>
         </p:nvSpPr>
         <p:spPr>
           <a:xfrm>
-            <a:off x="548640" y="2944368"/>
-            <a:ext cx="365760" cy="365760"/>
+            <a:off x="868680" y="3547872"/>
+            <a:ext cx="10515600" cy="274320"/>
           </a:xfrm>
           <a:prstGeom prst="rect">
             <a:avLst/>
@@ -4502,29 +4634,29 @@
           <a:lstStyle/>
           <a:p>
             <a:pPr algn="l">
-              <a:defRPr sz="1500" b="1">
-                <a:solidFill>
-                  <a:srgbClr val="2C7A4B"/>
-                </a:solidFill>
-                <a:latin typeface="Avenir Next"/>
-              </a:defRPr>
-            </a:pPr>
-            <a:r>
-              <a:t>✓</a:t>
-            </a:r>
-          </a:p>
-        </p:txBody>
-      </p:sp>
-      <p:sp>
-        <p:nvSpPr>
-          <p:cNvPr id="10" name="TextBox 9"/>
+              <a:defRPr sz="1300" b="1">
+                <a:solidFill>
+                  <a:srgbClr val="BA740E"/>
+                </a:solidFill>
+                <a:latin typeface="Avenir Next"/>
+              </a:defRPr>
+            </a:pPr>
+            <a:r>
+              <a:t>What CPU baseline do we build for?</a:t>
+            </a:r>
+          </a:p>
+        </p:txBody>
+      </p:sp>
+      <p:sp>
+        <p:nvSpPr>
+          <p:cNvPr id="13" name="TextBox 12"/>
           <p:cNvSpPr txBox="1"/>
           <p:nvPr/>
         </p:nvSpPr>
         <p:spPr>
           <a:xfrm>
-            <a:off x="960120" y="2944368"/>
-            <a:ext cx="5029200" cy="292608"/>
+            <a:off x="868680" y="3831336"/>
+            <a:ext cx="10515600" cy="493776"/>
           </a:xfrm>
           <a:prstGeom prst="rect">
             <a:avLst/>
@@ -4538,29 +4670,73 @@
           <a:lstStyle/>
           <a:p>
             <a:pPr algn="l">
-              <a:defRPr sz="1300" b="1">
-                <a:solidFill>
-                  <a:srgbClr val="16243D"/>
-                </a:solidFill>
-                <a:latin typeface="Avenir Next"/>
-              </a:defRPr>
-            </a:pPr>
-            <a:r>
-              <a:t>A package roster with versions</a:t>
-            </a:r>
-          </a:p>
-        </p:txBody>
-      </p:sp>
-      <p:sp>
-        <p:nvSpPr>
-          <p:cNvPr id="11" name="TextBox 10"/>
+              <a:defRPr sz="1050" b="0">
+                <a:solidFill>
+                  <a:srgbClr val="6E7B90"/>
+                </a:solidFill>
+                <a:latin typeface="Avenir Next"/>
+              </a:defRPr>
+            </a:pPr>
+            <a:r>
+              <a:t>One portable target that runs on every pilot system, or per-system tuning from day one? This sets how many builds exist and where they can run.</a:t>
+            </a:r>
+          </a:p>
+        </p:txBody>
+      </p:sp>
+      <p:sp>
+        <p:nvSpPr>
+          <p:cNvPr id="14" name="Rounded Rectangle 13"/>
+          <p:cNvSpPr/>
+          <p:nvPr/>
+        </p:nvSpPr>
+        <p:spPr>
+          <a:xfrm>
+            <a:off x="548640" y="4425696"/>
+            <a:ext cx="11091672" cy="896112"/>
+          </a:xfrm>
+          <a:prstGeom prst="roundRect">
+            <a:avLst/>
+          </a:prstGeom>
+          <a:solidFill>
+            <a:srgbClr val="F2F4F7"/>
+          </a:solidFill>
+          <a:ln>
+            <a:noFill/>
+          </a:ln>
+          <a:effectLst/>
+        </p:spPr>
+        <p:style>
+          <a:lnRef idx="1">
+            <a:schemeClr val="accent1"/>
+          </a:lnRef>
+          <a:fillRef idx="3">
+            <a:schemeClr val="accent1"/>
+          </a:fillRef>
+          <a:effectRef idx="2">
+            <a:schemeClr val="accent1"/>
+          </a:effectRef>
+          <a:fontRef idx="minor">
+            <a:schemeClr val="lt1"/>
+          </a:fontRef>
+        </p:style>
+        <p:txBody>
+          <a:bodyPr rtlCol="0" anchor="ctr"/>
+          <a:lstStyle/>
+          <a:p>
+            <a:pPr algn="ctr"/>
+          </a:p>
+        </p:txBody>
+      </p:sp>
+      <p:sp>
+        <p:nvSpPr>
+          <p:cNvPr id="15" name="TextBox 14"/>
           <p:cNvSpPr txBox="1"/>
           <p:nvPr/>
         </p:nvSpPr>
         <p:spPr>
           <a:xfrm>
-            <a:off x="960120" y="3255264"/>
-            <a:ext cx="5029200" cy="566928"/>
+            <a:off x="868680" y="4517136"/>
+            <a:ext cx="10515600" cy="274320"/>
           </a:xfrm>
           <a:prstGeom prst="rect">
             <a:avLst/>
@@ -4574,29 +4750,29 @@
           <a:lstStyle/>
           <a:p>
             <a:pPr algn="l">
-              <a:defRPr sz="1100" b="0">
-                <a:solidFill>
-                  <a:srgbClr val="6E7B90"/>
-                </a:solidFill>
-                <a:latin typeface="Avenir Next"/>
-              </a:defRPr>
-            </a:pPr>
-            <a:r>
-              <a:t>newest supported release plus its predecessor, variants written down</a:t>
-            </a:r>
-          </a:p>
-        </p:txBody>
-      </p:sp>
-      <p:sp>
-        <p:nvSpPr>
-          <p:cNvPr id="12" name="TextBox 11"/>
+              <a:defRPr sz="1300" b="1">
+                <a:solidFill>
+                  <a:srgbClr val="6D4EAA"/>
+                </a:solidFill>
+                <a:latin typeface="Avenir Next"/>
+              </a:defRPr>
+            </a:pPr>
+            <a:r>
+              <a:t>Where does the software live on each system?</a:t>
+            </a:r>
+          </a:p>
+        </p:txBody>
+      </p:sp>
+      <p:sp>
+        <p:nvSpPr>
+          <p:cNvPr id="16" name="TextBox 15"/>
           <p:cNvSpPr txBox="1"/>
           <p:nvPr/>
         </p:nvSpPr>
         <p:spPr>
           <a:xfrm>
-            <a:off x="548640" y="3950208"/>
-            <a:ext cx="365760" cy="365760"/>
+            <a:off x="868680" y="4800600"/>
+            <a:ext cx="10515600" cy="493776"/>
           </a:xfrm>
           <a:prstGeom prst="rect">
             <a:avLst/>
@@ -4610,29 +4786,73 @@
           <a:lstStyle/>
           <a:p>
             <a:pPr algn="l">
-              <a:defRPr sz="1500" b="1">
-                <a:solidFill>
-                  <a:srgbClr val="2C7A4B"/>
-                </a:solidFill>
-                <a:latin typeface="Avenir Next"/>
-              </a:defRPr>
-            </a:pPr>
-            <a:r>
-              <a:t>✓</a:t>
-            </a:r>
-          </a:p>
-        </p:txBody>
-      </p:sp>
-      <p:sp>
-        <p:nvSpPr>
-          <p:cNvPr id="13" name="TextBox 12"/>
+              <a:defRPr sz="1050" b="0">
+                <a:solidFill>
+                  <a:srgbClr val="6E7B90"/>
+                </a:solidFill>
+                <a:latin typeface="Avenir Next"/>
+              </a:defRPr>
+            </a:pPr>
+            <a:r>
+              <a:t>Install locations, and who owns them, per system. Nothing installs until someone can answer this for their machine.</a:t>
+            </a:r>
+          </a:p>
+        </p:txBody>
+      </p:sp>
+      <p:sp>
+        <p:nvSpPr>
+          <p:cNvPr id="17" name="Rounded Rectangle 16"/>
+          <p:cNvSpPr/>
+          <p:nvPr/>
+        </p:nvSpPr>
+        <p:spPr>
+          <a:xfrm>
+            <a:off x="548640" y="5394960"/>
+            <a:ext cx="11091672" cy="896112"/>
+          </a:xfrm>
+          <a:prstGeom prst="roundRect">
+            <a:avLst/>
+          </a:prstGeom>
+          <a:solidFill>
+            <a:srgbClr val="F2F4F7"/>
+          </a:solidFill>
+          <a:ln>
+            <a:noFill/>
+          </a:ln>
+          <a:effectLst/>
+        </p:spPr>
+        <p:style>
+          <a:lnRef idx="1">
+            <a:schemeClr val="accent1"/>
+          </a:lnRef>
+          <a:fillRef idx="3">
+            <a:schemeClr val="accent1"/>
+          </a:fillRef>
+          <a:effectRef idx="2">
+            <a:schemeClr val="accent1"/>
+          </a:effectRef>
+          <a:fontRef idx="minor">
+            <a:schemeClr val="lt1"/>
+          </a:fontRef>
+        </p:style>
+        <p:txBody>
+          <a:bodyPr rtlCol="0" anchor="ctr"/>
+          <a:lstStyle/>
+          <a:p>
+            <a:pPr algn="ctr"/>
+          </a:p>
+        </p:txBody>
+      </p:sp>
+      <p:sp>
+        <p:nvSpPr>
+          <p:cNvPr id="18" name="TextBox 17"/>
           <p:cNvSpPr txBox="1"/>
           <p:nvPr/>
         </p:nvSpPr>
         <p:spPr>
           <a:xfrm>
-            <a:off x="960120" y="3950208"/>
-            <a:ext cx="5029200" cy="292608"/>
+            <a:off x="868680" y="5486400"/>
+            <a:ext cx="10515600" cy="274320"/>
           </a:xfrm>
           <a:prstGeom prst="rect">
             <a:avLst/>
@@ -4648,27 +4868,27 @@
             <a:pPr algn="l">
               <a:defRPr sz="1300" b="1">
                 <a:solidFill>
-                  <a:srgbClr val="16243D"/>
-                </a:solidFill>
-                <a:latin typeface="Avenir Next"/>
-              </a:defRPr>
-            </a:pPr>
-            <a:r>
-              <a:t>A baseline CPU target</a:t>
-            </a:r>
-          </a:p>
-        </p:txBody>
-      </p:sp>
-      <p:sp>
-        <p:nvSpPr>
-          <p:cNvPr id="14" name="TextBox 13"/>
+                  <a:srgbClr val="9A7614"/>
+                </a:solidFill>
+                <a:latin typeface="Avenir Next"/>
+              </a:defRPr>
+            </a:pPr>
+            <a:r>
+              <a:t>What has to pass before a build counts as done?</a:t>
+            </a:r>
+          </a:p>
+        </p:txBody>
+      </p:sp>
+      <p:sp>
+        <p:nvSpPr>
+          <p:cNvPr id="19" name="TextBox 18"/>
           <p:cNvSpPr txBox="1"/>
           <p:nvPr/>
         </p:nvSpPr>
         <p:spPr>
           <a:xfrm>
-            <a:off x="960120" y="4261104"/>
-            <a:ext cx="5029200" cy="566928"/>
+            <a:off x="868680" y="5769864"/>
+            <a:ext cx="10515600" cy="493776"/>
           </a:xfrm>
           <a:prstGeom prst="rect">
             <a:avLst/>
@@ -4682,7 +4902,7 @@
           <a:lstStyle/>
           <a:p>
             <a:pPr algn="l">
-              <a:defRPr sz="1100" b="0">
+              <a:defRPr sz="1050" b="0">
                 <a:solidFill>
                   <a:srgbClr val="6E7B90"/>
                 </a:solidFill>
@@ -4690,597 +4910,21 @@
               </a:defRPr>
             </a:pPr>
             <a:r>
-              <a:t>x86_64_v3 runs natively on every pilot system; tuning is a later flag</a:t>
-            </a:r>
-          </a:p>
-        </p:txBody>
-      </p:sp>
-      <p:sp>
-        <p:nvSpPr>
-          <p:cNvPr id="15" name="TextBox 14"/>
-          <p:cNvSpPr txBox="1"/>
-          <p:nvPr/>
-        </p:nvSpPr>
-        <p:spPr>
-          <a:xfrm>
-            <a:off x="548640" y="4956048"/>
-            <a:ext cx="365760" cy="365760"/>
-          </a:xfrm>
-          <a:prstGeom prst="rect">
-            <a:avLst/>
-          </a:prstGeom>
-          <a:noFill/>
-        </p:spPr>
-        <p:txBody>
-          <a:bodyPr wrap="square" anchor="t">
-            <a:spAutoFit/>
-          </a:bodyPr>
-          <a:lstStyle/>
-          <a:p>
-            <a:pPr algn="l">
-              <a:defRPr sz="1500" b="1">
-                <a:solidFill>
-                  <a:srgbClr val="2C7A4B"/>
-                </a:solidFill>
-                <a:latin typeface="Avenir Next"/>
-              </a:defRPr>
-            </a:pPr>
-            <a:r>
-              <a:t>✓</a:t>
-            </a:r>
-          </a:p>
-        </p:txBody>
-      </p:sp>
-      <p:sp>
-        <p:nvSpPr>
-          <p:cNvPr id="16" name="TextBox 15"/>
-          <p:cNvSpPr txBox="1"/>
-          <p:nvPr/>
-        </p:nvSpPr>
-        <p:spPr>
-          <a:xfrm>
-            <a:off x="960120" y="4956048"/>
-            <a:ext cx="5029200" cy="292608"/>
-          </a:xfrm>
-          <a:prstGeom prst="rect">
-            <a:avLst/>
-          </a:prstGeom>
-          <a:noFill/>
-        </p:spPr>
-        <p:txBody>
-          <a:bodyPr wrap="square" anchor="t">
-            <a:spAutoFit/>
-          </a:bodyPr>
-          <a:lstStyle/>
-          <a:p>
-            <a:pPr algn="l">
-              <a:defRPr sz="1300" b="1">
-                <a:solidFill>
-                  <a:srgbClr val="16243D"/>
-                </a:solidFill>
-                <a:latin typeface="Avenir Next"/>
-              </a:defRPr>
-            </a:pPr>
-            <a:r>
-              <a:t>A draft definition of done</a:t>
-            </a:r>
-          </a:p>
-        </p:txBody>
-      </p:sp>
-      <p:sp>
-        <p:nvSpPr>
-          <p:cNvPr id="17" name="TextBox 16"/>
-          <p:cNvSpPr txBox="1"/>
-          <p:nvPr/>
-        </p:nvSpPr>
-        <p:spPr>
-          <a:xfrm>
-            <a:off x="960120" y="5266944"/>
-            <a:ext cx="5029200" cy="566928"/>
-          </a:xfrm>
-          <a:prstGeom prst="rect">
-            <a:avLst/>
-          </a:prstGeom>
-          <a:noFill/>
-        </p:spPr>
-        <p:txBody>
-          <a:bodyPr wrap="square" anchor="t">
-            <a:spAutoFit/>
-          </a:bodyPr>
-          <a:lstStyle/>
-          <a:p>
-            <a:pPr algn="l">
-              <a:defRPr sz="1100" b="0">
-                <a:solidFill>
-                  <a:srgbClr val="6E7B90"/>
-                </a:solidFill>
-                <a:latin typeface="Avenir Next"/>
-              </a:defRPr>
-            </a:pPr>
-            <a:r>
-              <a:t>five checks, spelled out below</a:t>
-            </a:r>
-          </a:p>
-        </p:txBody>
-      </p:sp>
-      <p:sp>
-        <p:nvSpPr>
-          <p:cNvPr id="18" name="TextBox 17"/>
-          <p:cNvSpPr txBox="1"/>
-          <p:nvPr/>
-        </p:nvSpPr>
-        <p:spPr>
-          <a:xfrm>
-            <a:off x="6263640" y="1481328"/>
-            <a:ext cx="5394960" cy="365760"/>
-          </a:xfrm>
-          <a:prstGeom prst="rect">
-            <a:avLst/>
-          </a:prstGeom>
-          <a:noFill/>
-        </p:spPr>
-        <p:txBody>
-          <a:bodyPr wrap="square" anchor="t">
-            <a:spAutoFit/>
-          </a:bodyPr>
-          <a:lstStyle/>
-          <a:p>
-            <a:pPr algn="l">
-              <a:defRPr sz="1500" b="1">
-                <a:solidFill>
-                  <a:srgbClr val="9A7614"/>
-                </a:solidFill>
-                <a:latin typeface="Avenir Next"/>
-              </a:defRPr>
-            </a:pPr>
-            <a:r>
-              <a:t>What I need from you</a:t>
-            </a:r>
-          </a:p>
-        </p:txBody>
-      </p:sp>
-      <p:sp>
-        <p:nvSpPr>
-          <p:cNvPr id="19" name="TextBox 18"/>
-          <p:cNvSpPr txBox="1"/>
-          <p:nvPr/>
-        </p:nvSpPr>
-        <p:spPr>
-          <a:xfrm>
-            <a:off x="6263640" y="1938528"/>
-            <a:ext cx="365760" cy="365760"/>
-          </a:xfrm>
-          <a:prstGeom prst="rect">
-            <a:avLst/>
-          </a:prstGeom>
-          <a:noFill/>
-        </p:spPr>
-        <p:txBody>
-          <a:bodyPr wrap="square" anchor="t">
-            <a:spAutoFit/>
-          </a:bodyPr>
-          <a:lstStyle/>
-          <a:p>
-            <a:pPr algn="l">
-              <a:defRPr sz="1500" b="1">
-                <a:solidFill>
-                  <a:srgbClr val="9A7614"/>
-                </a:solidFill>
-                <a:latin typeface="Avenir Next"/>
-              </a:defRPr>
-            </a:pPr>
-            <a:r>
-              <a:t>→</a:t>
-            </a:r>
-          </a:p>
-        </p:txBody>
-      </p:sp>
-      <p:sp>
-        <p:nvSpPr>
-          <p:cNvPr id="20" name="TextBox 19"/>
-          <p:cNvSpPr txBox="1"/>
-          <p:nvPr/>
-        </p:nvSpPr>
-        <p:spPr>
-          <a:xfrm>
-            <a:off x="6675120" y="1938528"/>
-            <a:ext cx="4937760" cy="292608"/>
-          </a:xfrm>
-          <a:prstGeom prst="rect">
-            <a:avLst/>
-          </a:prstGeom>
-          <a:noFill/>
-        </p:spPr>
-        <p:txBody>
-          <a:bodyPr wrap="square" anchor="t">
-            <a:spAutoFit/>
-          </a:bodyPr>
-          <a:lstStyle/>
-          <a:p>
-            <a:pPr algn="l">
-              <a:defRPr sz="1300" b="1">
-                <a:solidFill>
-                  <a:srgbClr val="16243D"/>
-                </a:solidFill>
-                <a:latin typeface="Avenir Next"/>
-              </a:defRPr>
-            </a:pPr>
-            <a:r>
-              <a:t>Which GCC on each system</a:t>
-            </a:r>
-          </a:p>
-        </p:txBody>
-      </p:sp>
-      <p:sp>
-        <p:nvSpPr>
-          <p:cNvPr id="21" name="TextBox 20"/>
-          <p:cNvSpPr txBox="1"/>
-          <p:nvPr/>
-        </p:nvSpPr>
-        <p:spPr>
-          <a:xfrm>
-            <a:off x="6675120" y="2249424"/>
-            <a:ext cx="4937760" cy="566928"/>
-          </a:xfrm>
-          <a:prstGeom prst="rect">
-            <a:avLst/>
-          </a:prstGeom>
-          <a:noFill/>
-        </p:spPr>
-        <p:txBody>
-          <a:bodyPr wrap="square" anchor="t">
-            <a:spAutoFit/>
-          </a:bodyPr>
-          <a:lstStyle/>
-          <a:p>
-            <a:pPr algn="l">
-              <a:defRPr sz="1100" b="0">
-                <a:solidFill>
-                  <a:srgbClr val="6E7B90"/>
-                </a:solidFill>
-                <a:latin typeface="Avenir Next"/>
-              </a:defRPr>
-            </a:pPr>
-            <a:r>
-              <a:t>the system's own, or one version built everywhere; every package rests on this</a:t>
-            </a:r>
-          </a:p>
-        </p:txBody>
-      </p:sp>
-      <p:sp>
-        <p:nvSpPr>
-          <p:cNvPr id="22" name="TextBox 21"/>
-          <p:cNvSpPr txBox="1"/>
-          <p:nvPr/>
-        </p:nvSpPr>
-        <p:spPr>
-          <a:xfrm>
-            <a:off x="6263640" y="2944368"/>
-            <a:ext cx="365760" cy="365760"/>
-          </a:xfrm>
-          <a:prstGeom prst="rect">
-            <a:avLst/>
-          </a:prstGeom>
-          <a:noFill/>
-        </p:spPr>
-        <p:txBody>
-          <a:bodyPr wrap="square" anchor="t">
-            <a:spAutoFit/>
-          </a:bodyPr>
-          <a:lstStyle/>
-          <a:p>
-            <a:pPr algn="l">
-              <a:defRPr sz="1500" b="1">
-                <a:solidFill>
-                  <a:srgbClr val="9A7614"/>
-                </a:solidFill>
-                <a:latin typeface="Avenir Next"/>
-              </a:defRPr>
-            </a:pPr>
-            <a:r>
-              <a:t>→</a:t>
-            </a:r>
-          </a:p>
-        </p:txBody>
-      </p:sp>
-      <p:sp>
-        <p:nvSpPr>
-          <p:cNvPr id="23" name="TextBox 22"/>
-          <p:cNvSpPr txBox="1"/>
-          <p:nvPr/>
-        </p:nvSpPr>
-        <p:spPr>
-          <a:xfrm>
-            <a:off x="6675120" y="2944368"/>
-            <a:ext cx="4937760" cy="292608"/>
-          </a:xfrm>
-          <a:prstGeom prst="rect">
-            <a:avLst/>
-          </a:prstGeom>
-          <a:noFill/>
-        </p:spPr>
-        <p:txBody>
-          <a:bodyPr wrap="square" anchor="t">
-            <a:spAutoFit/>
-          </a:bodyPr>
-          <a:lstStyle/>
-          <a:p>
-            <a:pPr algn="l">
-              <a:defRPr sz="1300" b="1">
-                <a:solidFill>
-                  <a:srgbClr val="16243D"/>
-                </a:solidFill>
-                <a:latin typeface="Avenir Next"/>
-              </a:defRPr>
-            </a:pPr>
-            <a:r>
-              <a:t>MPI pairing on Raider and Wheat</a:t>
-            </a:r>
-          </a:p>
-        </p:txBody>
-      </p:sp>
-      <p:sp>
-        <p:nvSpPr>
-          <p:cNvPr id="24" name="TextBox 23"/>
-          <p:cNvSpPr txBox="1"/>
-          <p:nvPr/>
-        </p:nvSpPr>
-        <p:spPr>
-          <a:xfrm>
-            <a:off x="6675120" y="3255264"/>
-            <a:ext cx="4937760" cy="566928"/>
-          </a:xfrm>
-          <a:prstGeom prst="rect">
-            <a:avLst/>
-          </a:prstGeom>
-          <a:noFill/>
-        </p:spPr>
-        <p:txBody>
-          <a:bodyPr wrap="square" anchor="t">
-            <a:spAutoFit/>
-          </a:bodyPr>
-          <a:lstStyle/>
-          <a:p>
-            <a:pPr algn="l">
-              <a:defRPr sz="1100" b="0">
-                <a:solidFill>
-                  <a:srgbClr val="6E7B90"/>
-                </a:solidFill>
-                <a:latin typeface="Avenir Next"/>
-              </a:defRPr>
-            </a:pPr>
-            <a:r>
-              <a:t>the Crays point at cray-mpich; the others need the site MPI confirmed</a:t>
-            </a:r>
-          </a:p>
-        </p:txBody>
-      </p:sp>
-      <p:sp>
-        <p:nvSpPr>
-          <p:cNvPr id="25" name="TextBox 24"/>
-          <p:cNvSpPr txBox="1"/>
-          <p:nvPr/>
-        </p:nvSpPr>
-        <p:spPr>
-          <a:xfrm>
-            <a:off x="6263640" y="3950208"/>
-            <a:ext cx="365760" cy="365760"/>
-          </a:xfrm>
-          <a:prstGeom prst="rect">
-            <a:avLst/>
-          </a:prstGeom>
-          <a:noFill/>
-        </p:spPr>
-        <p:txBody>
-          <a:bodyPr wrap="square" anchor="t">
-            <a:spAutoFit/>
-          </a:bodyPr>
-          <a:lstStyle/>
-          <a:p>
-            <a:pPr algn="l">
-              <a:defRPr sz="1500" b="1">
-                <a:solidFill>
-                  <a:srgbClr val="9A7614"/>
-                </a:solidFill>
-                <a:latin typeface="Avenir Next"/>
-              </a:defRPr>
-            </a:pPr>
-            <a:r>
-              <a:t>→</a:t>
-            </a:r>
-          </a:p>
-        </p:txBody>
-      </p:sp>
-      <p:sp>
-        <p:nvSpPr>
-          <p:cNvPr id="26" name="TextBox 25"/>
-          <p:cNvSpPr txBox="1"/>
-          <p:nvPr/>
-        </p:nvSpPr>
-        <p:spPr>
-          <a:xfrm>
-            <a:off x="6675120" y="3950208"/>
-            <a:ext cx="4937760" cy="292608"/>
-          </a:xfrm>
-          <a:prstGeom prst="rect">
-            <a:avLst/>
-          </a:prstGeom>
-          <a:noFill/>
-        </p:spPr>
-        <p:txBody>
-          <a:bodyPr wrap="square" anchor="t">
-            <a:spAutoFit/>
-          </a:bodyPr>
-          <a:lstStyle/>
-          <a:p>
-            <a:pPr algn="l">
-              <a:defRPr sz="1300" b="1">
-                <a:solidFill>
-                  <a:srgbClr val="16243D"/>
-                </a:solidFill>
-                <a:latin typeface="Avenir Next"/>
-              </a:defRPr>
-            </a:pPr>
-            <a:r>
-              <a:t>System details and install paths</a:t>
-            </a:r>
-          </a:p>
-        </p:txBody>
-      </p:sp>
-      <p:sp>
-        <p:nvSpPr>
-          <p:cNvPr id="27" name="TextBox 26"/>
-          <p:cNvSpPr txBox="1"/>
-          <p:nvPr/>
-        </p:nvSpPr>
-        <p:spPr>
-          <a:xfrm>
-            <a:off x="6675120" y="4261104"/>
-            <a:ext cx="4937760" cy="566928"/>
-          </a:xfrm>
-          <a:prstGeom prst="rect">
-            <a:avLst/>
-          </a:prstGeom>
-          <a:noFill/>
-        </p:spPr>
-        <p:txBody>
-          <a:bodyPr wrap="square" anchor="t">
-            <a:spAutoFit/>
-          </a:bodyPr>
-          <a:lstStyle/>
-          <a:p>
-            <a:pPr algn="l">
-              <a:defRPr sz="1100" b="0">
-                <a:solidFill>
-                  <a:srgbClr val="6E7B90"/>
-                </a:solidFill>
-                <a:latin typeface="Avenir Next"/>
-              </a:defRPr>
-            </a:pPr>
-            <a:r>
-              <a:t>each system needs its facts confirmed and locations chosen, with an owner</a:t>
-            </a:r>
-          </a:p>
-        </p:txBody>
-      </p:sp>
-      <p:sp>
-        <p:nvSpPr>
-          <p:cNvPr id="28" name="TextBox 27"/>
-          <p:cNvSpPr txBox="1"/>
-          <p:nvPr/>
-        </p:nvSpPr>
-        <p:spPr>
-          <a:xfrm>
-            <a:off x="6263640" y="4956048"/>
-            <a:ext cx="365760" cy="365760"/>
-          </a:xfrm>
-          <a:prstGeom prst="rect">
-            <a:avLst/>
-          </a:prstGeom>
-          <a:noFill/>
-        </p:spPr>
-        <p:txBody>
-          <a:bodyPr wrap="square" anchor="t">
-            <a:spAutoFit/>
-          </a:bodyPr>
-          <a:lstStyle/>
-          <a:p>
-            <a:pPr algn="l">
-              <a:defRPr sz="1500" b="1">
-                <a:solidFill>
-                  <a:srgbClr val="9A7614"/>
-                </a:solidFill>
-                <a:latin typeface="Avenir Next"/>
-              </a:defRPr>
-            </a:pPr>
-            <a:r>
-              <a:t>→</a:t>
-            </a:r>
-          </a:p>
-        </p:txBody>
-      </p:sp>
-      <p:sp>
-        <p:nvSpPr>
-          <p:cNvPr id="29" name="TextBox 28"/>
-          <p:cNvSpPr txBox="1"/>
-          <p:nvPr/>
-        </p:nvSpPr>
-        <p:spPr>
-          <a:xfrm>
-            <a:off x="6675120" y="4956048"/>
-            <a:ext cx="4937760" cy="292608"/>
-          </a:xfrm>
-          <a:prstGeom prst="rect">
-            <a:avLst/>
-          </a:prstGeom>
-          <a:noFill/>
-        </p:spPr>
-        <p:txBody>
-          <a:bodyPr wrap="square" anchor="t">
-            <a:spAutoFit/>
-          </a:bodyPr>
-          <a:lstStyle/>
-          <a:p>
-            <a:pPr algn="l">
-              <a:defRPr sz="1300" b="1">
-                <a:solidFill>
-                  <a:srgbClr val="16243D"/>
-                </a:solidFill>
-                <a:latin typeface="Avenir Next"/>
-              </a:defRPr>
-            </a:pPr>
-            <a:r>
-              <a:t>Agreement on the definition of done</a:t>
-            </a:r>
-          </a:p>
-        </p:txBody>
-      </p:sp>
-      <p:sp>
-        <p:nvSpPr>
-          <p:cNvPr id="30" name="TextBox 29"/>
-          <p:cNvSpPr txBox="1"/>
-          <p:nvPr/>
-        </p:nvSpPr>
-        <p:spPr>
-          <a:xfrm>
-            <a:off x="6675120" y="5266944"/>
-            <a:ext cx="4937760" cy="566928"/>
-          </a:xfrm>
-          <a:prstGeom prst="rect">
-            <a:avLst/>
-          </a:prstGeom>
-          <a:noFill/>
-        </p:spPr>
-        <p:txBody>
-          <a:bodyPr wrap="square" anchor="t">
-            <a:spAutoFit/>
-          </a:bodyPr>
-          <a:lstStyle/>
-          <a:p>
-            <a:pPr algn="l">
-              <a:defRPr sz="1100" b="0">
-                <a:solidFill>
-                  <a:srgbClr val="6E7B90"/>
-                </a:solidFill>
-                <a:latin typeface="Avenir Next"/>
-              </a:defRPr>
-            </a:pPr>
-            <a:r>
-              <a:t>so the first build has a finish line</a:t>
-            </a:r>
-          </a:p>
-        </p:txBody>
-      </p:sp>
-      <p:sp>
-        <p:nvSpPr>
-          <p:cNvPr id="31" name="Rounded Rectangle 30"/>
+              <a:t>A shared finish line, agreed before the first build starts: what compiles, what runs, and what we can rebuild from scratch.</a:t>
+            </a:r>
+          </a:p>
+        </p:txBody>
+      </p:sp>
+      <p:sp>
+        <p:nvSpPr>
+          <p:cNvPr id="20" name="Rounded Rectangle 19"/>
           <p:cNvSpPr/>
           <p:nvPr/>
         </p:nvSpPr>
         <p:spPr>
           <a:xfrm>
-            <a:off x="548640" y="5943600"/>
-            <a:ext cx="11091672" cy="713232"/>
+            <a:off x="548640" y="6382512"/>
+            <a:ext cx="11091672" cy="384048"/>
           </a:xfrm>
           <a:prstGeom prst="roundRect">
             <a:avLst/>
@@ -5312,7 +4956,7 @@
           <a:lstStyle/>
           <a:p>
             <a:pPr algn="ctr">
-              <a:defRPr sz="1250" b="1">
+              <a:defRPr sz="1200" b="1">
                 <a:solidFill>
                   <a:srgbClr val="16243D"/>
                 </a:solidFill>
@@ -5320,20 +4964,7 @@
               </a:defRPr>
             </a:pPr>
             <a:r>
-              <a:t>Draft definition of done: packages build · sample C, C++, and Fortran codes compile and run ·</a:t>
-            </a:r>
-          </a:p>
-          <a:p>
-            <a:pPr algn="ctr">
-              <a:defRPr sz="1250" b="1">
-                <a:solidFill>
-                  <a:srgbClr val="16243D"/>
-                </a:solidFill>
-                <a:latin typeface="Avenir Next"/>
-              </a:defRPr>
-            </a:pPr>
-            <a:r>
-              <a:t>MPI jobs run across nodes · a rebuild reproduces the result · installs come from the build cache</a:t>
+              <a:t>And just as useful: which of these can wait until after the first builds?</a:t>
             </a:r>
           </a:p>
         </p:txBody>

--- a/presentations/cse_lanes_model.pptx
+++ b/presentations/cse_lanes_model.pptx
@@ -3629,8 +3629,8 @@
         </p:nvSpPr>
         <p:spPr>
           <a:xfrm>
-            <a:off x="548640" y="1517904"/>
-            <a:ext cx="11091672" cy="896112"/>
+            <a:off x="548640" y="1463040"/>
+            <a:ext cx="11091672" cy="822960"/>
           </a:xfrm>
           <a:prstGeom prst="roundRect">
             <a:avLst/>
@@ -3673,7 +3673,7 @@
         </p:nvSpPr>
         <p:spPr>
           <a:xfrm>
-            <a:off x="868680" y="1609344"/>
+            <a:off x="868680" y="1545336"/>
             <a:ext cx="10515600" cy="274320"/>
           </a:xfrm>
           <a:prstGeom prst="rect">
@@ -3709,8 +3709,8 @@
         </p:nvSpPr>
         <p:spPr>
           <a:xfrm>
-            <a:off x="868680" y="1892807"/>
-            <a:ext cx="10515600" cy="493776"/>
+            <a:off x="868680" y="1828800"/>
+            <a:ext cx="10515600" cy="457200"/>
           </a:xfrm>
           <a:prstGeom prst="rect">
             <a:avLst/>
@@ -3724,7 +3724,7 @@
           <a:lstStyle/>
           <a:p>
             <a:pPr algn="l">
-              <a:defRPr sz="1050" b="0">
+              <a:defRPr sz="1000" b="0">
                 <a:solidFill>
                   <a:srgbClr val="6E7B90"/>
                 </a:solidFill>
@@ -3732,7 +3732,7 @@
               </a:defRPr>
             </a:pPr>
             <a:r>
-              <a:t>OpenBLAS is now the one BLAS and LAPACK, so users get the same library on every system. Cray LibSci is already on the path on Blueback and Fran, and Intel systems would expect MKL. Both are registered rather than built, so this is policy per system, not build cost.</a:t>
+              <a:t>OpenBLAS is the one BLAS and LAPACK today. Cray LibSci is already on the path on the Cray systems, and Intel systems expect MKL. Both are registered rather than built, so this is policy per system, not build cost.</a:t>
             </a:r>
           </a:p>
         </p:txBody>
@@ -3745,8 +3745,8 @@
         </p:nvSpPr>
         <p:spPr>
           <a:xfrm>
-            <a:off x="548640" y="2487168"/>
-            <a:ext cx="11091672" cy="896112"/>
+            <a:off x="548640" y="2345436"/>
+            <a:ext cx="11091672" cy="822960"/>
           </a:xfrm>
           <a:prstGeom prst="roundRect">
             <a:avLst/>
@@ -3789,7 +3789,7 @@
         </p:nvSpPr>
         <p:spPr>
           <a:xfrm>
-            <a:off x="868680" y="2578608"/>
+            <a:off x="868680" y="2427732"/>
             <a:ext cx="10515600" cy="274320"/>
           </a:xfrm>
           <a:prstGeom prst="rect">
@@ -3825,8 +3825,8 @@
         </p:nvSpPr>
         <p:spPr>
           <a:xfrm>
-            <a:off x="868680" y="2862072"/>
-            <a:ext cx="10515600" cy="493776"/>
+            <a:off x="868680" y="2711196"/>
+            <a:ext cx="10515600" cy="457200"/>
           </a:xfrm>
           <a:prstGeom prst="rect">
             <a:avLst/>
@@ -3840,7 +3840,7 @@
           <a:lstStyle/>
           <a:p>
             <a:pPr algn="l">
-              <a:defRPr sz="1050" b="0">
+              <a:defRPr sz="1000" b="0">
                 <a:solidFill>
                   <a:srgbClr val="6E7B90"/>
                 </a:solidFill>
@@ -3848,7 +3848,7 @@
               </a:defRPr>
             </a:pPr>
             <a:r>
-              <a:t>The pilot carries two per system: the one the machine blesses as its baseline, plus GCC as the portable reference. CSEinit offers GCC and Intel today, so whether Intel is one of the two on the systems that have it is the open part.</a:t>
+              <a:t>Two per system: the one the machine blesses as its baseline, plus GCC as the portable reference. CSEinit offers GCC and Intel today, so whether Intel stays one of the two on the systems that have it is the open part.</a:t>
             </a:r>
           </a:p>
         </p:txBody>
@@ -3861,8 +3861,8 @@
         </p:nvSpPr>
         <p:spPr>
           <a:xfrm>
-            <a:off x="548640" y="3456432"/>
-            <a:ext cx="11091672" cy="896112"/>
+            <a:off x="548640" y="3227832"/>
+            <a:ext cx="11091672" cy="822960"/>
           </a:xfrm>
           <a:prstGeom prst="roundRect">
             <a:avLst/>
@@ -3905,7 +3905,7 @@
         </p:nvSpPr>
         <p:spPr>
           <a:xfrm>
-            <a:off x="868680" y="3547872"/>
+            <a:off x="868680" y="3310128"/>
             <a:ext cx="10515600" cy="274320"/>
           </a:xfrm>
           <a:prstGeom prst="rect">
@@ -3922,13 +3922,13 @@
             <a:pPr algn="l">
               <a:defRPr sz="1300" b="1">
                 <a:solidFill>
-                  <a:srgbClr val="BA740E"/>
-                </a:solidFill>
-                <a:latin typeface="Avenir Next"/>
-              </a:defRPr>
-            </a:pPr>
-            <a:r>
-              <a:t>Does the Serial lane stay?</a:t>
+                  <a:srgbClr val="2B62B8"/>
+                </a:solidFill>
+                <a:latin typeface="Avenir Next"/>
+              </a:defRPr>
+            </a:pPr>
+            <a:r>
+              <a:t>Do we anchor the older version to what the systems run today?</a:t>
             </a:r>
           </a:p>
         </p:txBody>
@@ -3941,8 +3941,8 @@
         </p:nvSpPr>
         <p:spPr>
           <a:xfrm>
-            <a:off x="868680" y="3831336"/>
-            <a:ext cx="10515600" cy="493776"/>
+            <a:off x="868680" y="3593592"/>
+            <a:ext cx="10515600" cy="457200"/>
           </a:xfrm>
           <a:prstGeom prst="rect">
             <a:avLst/>
@@ -3956,7 +3956,7 @@
           <a:lstStyle/>
           <a:p>
             <a:pPr algn="l">
-              <a:defRPr sz="1050" b="0">
+              <a:defRPr sz="1000" b="0">
                 <a:solidFill>
                   <a:srgbClr val="6E7B90"/>
                 </a:solidFill>
@@ -3964,7 +3964,7 @@
               </a:defRPr>
             </a:pPr>
             <a:r>
-              <a:t>Serial exists so users who are not running parallel do not carry the MPI runtime: analysis and post-processing on a login node, small tools, anything linking HDF5 or NetCDF without wanting libmpi behind it. An MPI build on one rank does the same work, so dropping Serial would halve the build matrix and push the MPI runtime onto everyone.</a:t>
+              <a:t>Each package carries two versions, and the newer is always the newest release. The older is the open part: match what is deployed on the systems now so existing code keeps building, or just carry the previous release and move users up. Decide before the roster locks.</a:t>
             </a:r>
           </a:p>
         </p:txBody>
@@ -3977,8 +3977,8 @@
         </p:nvSpPr>
         <p:spPr>
           <a:xfrm>
-            <a:off x="548640" y="4425696"/>
-            <a:ext cx="11091672" cy="896112"/>
+            <a:off x="548640" y="4110228"/>
+            <a:ext cx="11091672" cy="822960"/>
           </a:xfrm>
           <a:prstGeom prst="roundRect">
             <a:avLst/>
@@ -4021,7 +4021,7 @@
         </p:nvSpPr>
         <p:spPr>
           <a:xfrm>
-            <a:off x="868680" y="4517136"/>
+            <a:off x="868680" y="4192524"/>
             <a:ext cx="10515600" cy="274320"/>
           </a:xfrm>
           <a:prstGeom prst="rect">
@@ -4038,13 +4038,13 @@
             <a:pPr algn="l">
               <a:defRPr sz="1300" b="1">
                 <a:solidFill>
-                  <a:srgbClr val="6D4EAA"/>
-                </a:solidFill>
-                <a:latin typeface="Avenir Next"/>
-              </a:defRPr>
-            </a:pPr>
-            <a:r>
-              <a:t>Performance targeting: baseline first, tuning after.</a:t>
+                  <a:srgbClr val="BA740E"/>
+                </a:solidFill>
+                <a:latin typeface="Avenir Next"/>
+              </a:defRPr>
+            </a:pPr>
+            <a:r>
+              <a:t>Does the Serial lane stay?</a:t>
             </a:r>
           </a:p>
         </p:txBody>
@@ -4057,8 +4057,8 @@
         </p:nvSpPr>
         <p:spPr>
           <a:xfrm>
-            <a:off x="868680" y="4800600"/>
-            <a:ext cx="10515600" cy="493776"/>
+            <a:off x="868680" y="4475988"/>
+            <a:ext cx="10515600" cy="457200"/>
           </a:xfrm>
           <a:prstGeom prst="rect">
             <a:avLst/>
@@ -4072,7 +4072,7 @@
           <a:lstStyle/>
           <a:p>
             <a:pPr algn="l">
-              <a:defRPr sz="1050" b="0">
+              <a:defRPr sz="1000" b="0">
                 <a:solidFill>
                   <a:srgbClr val="6E7B90"/>
                 </a:solidFill>
@@ -4080,7 +4080,7 @@
               </a:defRPr>
             </a:pPr>
             <a:r>
-              <a:t>The plan is to build every lane at the portable baseline, prove the model, then turn on per-lane tuning for Genoa, Milan, or Cascade Lake. Each target is a flag plus a full rebuild, so the open part is when, not whether.</a:t>
+              <a:t>Serial spares non-parallel users the MPI runtime: analysis, post-processing, small tools, anything linking HDF5 or NetCDF without libmpi behind it. An MPI build on one rank does the same work, so dropping Serial halves the build matrix but pushes the MPI runtime onto everyone.</a:t>
             </a:r>
           </a:p>
         </p:txBody>
@@ -4093,8 +4093,8 @@
         </p:nvSpPr>
         <p:spPr>
           <a:xfrm>
-            <a:off x="548640" y="5394960"/>
-            <a:ext cx="11091672" cy="896112"/>
+            <a:off x="548640" y="4992624"/>
+            <a:ext cx="11091672" cy="822960"/>
           </a:xfrm>
           <a:prstGeom prst="roundRect">
             <a:avLst/>
@@ -4137,7 +4137,7 @@
         </p:nvSpPr>
         <p:spPr>
           <a:xfrm>
-            <a:off x="868680" y="5486400"/>
+            <a:off x="868680" y="5074920"/>
             <a:ext cx="10515600" cy="274320"/>
           </a:xfrm>
           <a:prstGeom prst="rect">
@@ -4154,13 +4154,13 @@
             <a:pPr algn="l">
               <a:defRPr sz="1300" b="1">
                 <a:solidFill>
-                  <a:srgbClr val="9A7614"/>
-                </a:solidFill>
-                <a:latin typeface="Avenir Next"/>
-              </a:defRPr>
-            </a:pPr>
-            <a:r>
-              <a:t>Consistency means the same functionality, not the same implementations.</a:t>
+                  <a:srgbClr val="6D4EAA"/>
+                </a:solidFill>
+                <a:latin typeface="Avenir Next"/>
+              </a:defRPr>
+            </a:pPr>
+            <a:r>
+              <a:t>Performance targeting: baseline first, tuning after.</a:t>
             </a:r>
           </a:p>
         </p:txBody>
@@ -4173,8 +4173,8 @@
         </p:nvSpPr>
         <p:spPr>
           <a:xfrm>
-            <a:off x="868680" y="5769864"/>
-            <a:ext cx="10515600" cy="493776"/>
+            <a:off x="868680" y="5358384"/>
+            <a:ext cx="10515600" cy="457200"/>
           </a:xfrm>
           <a:prstGeom prst="rect">
             <a:avLst/>
@@ -4188,7 +4188,7 @@
           <a:lstStyle/>
           <a:p>
             <a:pPr algn="l">
-              <a:defRPr sz="1050" b="0">
+              <a:defRPr sz="1000" b="0">
                 <a:solidFill>
                   <a:srgbClr val="6E7B90"/>
                 </a:solidFill>
@@ -4196,7 +4196,123 @@
               </a:defRPr>
             </a:pPr>
             <a:r>
-              <a:t>A user builds and runs the same way on every system: same front door, same rosters, same workflow, with each machine's native MPI and compiler underneath. The open part is the floor: which capabilities every system must provide, and whether one pinned CSE GCC anchors the compilers.</a:t>
+              <a:t>Build every lane at the portable baseline, prove the model, then turn on per-lane tuning for Genoa, Milan, or Cascade Lake. Each target is a flag plus a full rebuild, so the open part is when, not whether.</a:t>
+            </a:r>
+          </a:p>
+        </p:txBody>
+      </p:sp>
+      <p:sp>
+        <p:nvSpPr>
+          <p:cNvPr id="20" name="Rounded Rectangle 19"/>
+          <p:cNvSpPr/>
+          <p:nvPr/>
+        </p:nvSpPr>
+        <p:spPr>
+          <a:xfrm>
+            <a:off x="548640" y="5875020"/>
+            <a:ext cx="11091672" cy="822960"/>
+          </a:xfrm>
+          <a:prstGeom prst="roundRect">
+            <a:avLst/>
+          </a:prstGeom>
+          <a:solidFill>
+            <a:srgbClr val="F2F4F7"/>
+          </a:solidFill>
+          <a:ln>
+            <a:noFill/>
+          </a:ln>
+          <a:effectLst/>
+        </p:spPr>
+        <p:style>
+          <a:lnRef idx="1">
+            <a:schemeClr val="accent1"/>
+          </a:lnRef>
+          <a:fillRef idx="3">
+            <a:schemeClr val="accent1"/>
+          </a:fillRef>
+          <a:effectRef idx="2">
+            <a:schemeClr val="accent1"/>
+          </a:effectRef>
+          <a:fontRef idx="minor">
+            <a:schemeClr val="lt1"/>
+          </a:fontRef>
+        </p:style>
+        <p:txBody>
+          <a:bodyPr rtlCol="0" anchor="ctr"/>
+          <a:lstStyle/>
+          <a:p>
+            <a:pPr algn="ctr"/>
+          </a:p>
+        </p:txBody>
+      </p:sp>
+      <p:sp>
+        <p:nvSpPr>
+          <p:cNvPr id="21" name="TextBox 20"/>
+          <p:cNvSpPr txBox="1"/>
+          <p:nvPr/>
+        </p:nvSpPr>
+        <p:spPr>
+          <a:xfrm>
+            <a:off x="868680" y="5957316"/>
+            <a:ext cx="10515600" cy="274320"/>
+          </a:xfrm>
+          <a:prstGeom prst="rect">
+            <a:avLst/>
+          </a:prstGeom>
+          <a:noFill/>
+        </p:spPr>
+        <p:txBody>
+          <a:bodyPr wrap="square" anchor="t">
+            <a:spAutoFit/>
+          </a:bodyPr>
+          <a:lstStyle/>
+          <a:p>
+            <a:pPr algn="l">
+              <a:defRPr sz="1300" b="1">
+                <a:solidFill>
+                  <a:srgbClr val="9A7614"/>
+                </a:solidFill>
+                <a:latin typeface="Avenir Next"/>
+              </a:defRPr>
+            </a:pPr>
+            <a:r>
+              <a:t>Consistency means the same functionality, not the same implementations.</a:t>
+            </a:r>
+          </a:p>
+        </p:txBody>
+      </p:sp>
+      <p:sp>
+        <p:nvSpPr>
+          <p:cNvPr id="22" name="TextBox 21"/>
+          <p:cNvSpPr txBox="1"/>
+          <p:nvPr/>
+        </p:nvSpPr>
+        <p:spPr>
+          <a:xfrm>
+            <a:off x="868680" y="6240780"/>
+            <a:ext cx="10515600" cy="457200"/>
+          </a:xfrm>
+          <a:prstGeom prst="rect">
+            <a:avLst/>
+          </a:prstGeom>
+          <a:noFill/>
+        </p:spPr>
+        <p:txBody>
+          <a:bodyPr wrap="square" anchor="t">
+            <a:spAutoFit/>
+          </a:bodyPr>
+          <a:lstStyle/>
+          <a:p>
+            <a:pPr algn="l">
+              <a:defRPr sz="1000" b="0">
+                <a:solidFill>
+                  <a:srgbClr val="6E7B90"/>
+                </a:solidFill>
+                <a:latin typeface="Avenir Next"/>
+              </a:defRPr>
+            </a:pPr>
+            <a:r>
+              <a:t>Same front door, same rosters, same workflow on every system, with each machine's native MPI and compiler underneath. The open part is the floor: which capabilities every system must provide, and whether one pinned CSE GCC anchors the compilers.</a:t>
             </a:r>
           </a:p>
         </p:txBody>
@@ -4343,8 +4459,8 @@
         </p:nvSpPr>
         <p:spPr>
           <a:xfrm>
-            <a:off x="548640" y="1517904"/>
-            <a:ext cx="11091672" cy="896112"/>
+            <a:off x="548640" y="1463040"/>
+            <a:ext cx="11091672" cy="822960"/>
           </a:xfrm>
           <a:prstGeom prst="roundRect">
             <a:avLst/>
@@ -4387,7 +4503,7 @@
         </p:nvSpPr>
         <p:spPr>
           <a:xfrm>
-            <a:off x="868680" y="1609344"/>
+            <a:off x="868680" y="1545336"/>
             <a:ext cx="10515600" cy="274320"/>
           </a:xfrm>
           <a:prstGeom prst="rect">
@@ -4423,8 +4539,8 @@
         </p:nvSpPr>
         <p:spPr>
           <a:xfrm>
-            <a:off x="868680" y="1892807"/>
-            <a:ext cx="10515600" cy="493776"/>
+            <a:off x="868680" y="1828800"/>
+            <a:ext cx="10515600" cy="457200"/>
           </a:xfrm>
           <a:prstGeom prst="rect">
             <a:avLst/>
@@ -4438,7 +4554,7 @@
           <a:lstStyle/>
           <a:p>
             <a:pPr algn="l">
-              <a:defRPr sz="1050" b="0">
+              <a:defRPr sz="1000" b="0">
                 <a:solidFill>
                   <a:srgbClr val="6E7B90"/>
                 </a:solidFill>
@@ -4446,7 +4562,7 @@
               </a:defRPr>
             </a:pPr>
             <a:r>
-              <a:t>Every package on a system builds against this choice, so it comes first. The system's own compiler, one common version everywhere, or something else?</a:t>
+              <a:t>It comes first, because everything else on the system is built with it. Each machine's own compiler, one shared version across systems, or a mix?</a:t>
             </a:r>
           </a:p>
         </p:txBody>
@@ -4459,8 +4575,8 @@
         </p:nvSpPr>
         <p:spPr>
           <a:xfrm>
-            <a:off x="548640" y="2487168"/>
-            <a:ext cx="11091672" cy="896112"/>
+            <a:off x="548640" y="2345436"/>
+            <a:ext cx="11091672" cy="822960"/>
           </a:xfrm>
           <a:prstGeom prst="roundRect">
             <a:avLst/>
@@ -4503,7 +4619,7 @@
         </p:nvSpPr>
         <p:spPr>
           <a:xfrm>
-            <a:off x="868680" y="2578608"/>
+            <a:off x="868680" y="2427732"/>
             <a:ext cx="10515600" cy="274320"/>
           </a:xfrm>
           <a:prstGeom prst="rect">
@@ -4520,13 +4636,13 @@
             <a:pPr algn="l">
               <a:defRPr sz="1300" b="1">
                 <a:solidFill>
-                  <a:srgbClr val="2B62B8"/>
-                </a:solidFill>
-                <a:latin typeface="Avenir Next"/>
-              </a:defRPr>
-            </a:pPr>
-            <a:r>
-              <a:t>Which MPI pairs with it on each system?</a:t>
+                  <a:srgbClr val="2C7A4B"/>
+                </a:solidFill>
+                <a:latin typeface="Avenir Next"/>
+              </a:defRPr>
+            </a:pPr>
+            <a:r>
+              <a:t>Which components do we take from the system instead of building?</a:t>
             </a:r>
           </a:p>
         </p:txBody>
@@ -4539,8 +4655,8 @@
         </p:nvSpPr>
         <p:spPr>
           <a:xfrm>
-            <a:off x="868680" y="2862072"/>
-            <a:ext cx="10515600" cy="493776"/>
+            <a:off x="868680" y="2711196"/>
+            <a:ext cx="10515600" cy="457200"/>
           </a:xfrm>
           <a:prstGeom prst="rect">
             <a:avLst/>
@@ -4554,7 +4670,7 @@
           <a:lstStyle/>
           <a:p>
             <a:pPr algn="l">
-              <a:defRPr sz="1050" b="0">
+              <a:defRPr sz="1000" b="0">
                 <a:solidFill>
                   <a:srgbClr val="6E7B90"/>
                 </a:solidFill>
@@ -4562,7 +4678,7 @@
               </a:defRPr>
             </a:pPr>
             <a:r>
-              <a:t>Whatever we pick has to work with each machine's fabric and job launcher. Do we take what each site provides, and what do we do where that answer is unclear?</a:t>
+              <a:t>OpenSSL and curl look like clear cases to start. Which others do we commit to as system-provided rather than build ourselves?</a:t>
             </a:r>
           </a:p>
         </p:txBody>
@@ -4575,8 +4691,8 @@
         </p:nvSpPr>
         <p:spPr>
           <a:xfrm>
-            <a:off x="548640" y="3456432"/>
-            <a:ext cx="11091672" cy="896112"/>
+            <a:off x="548640" y="3227832"/>
+            <a:ext cx="11091672" cy="822960"/>
           </a:xfrm>
           <a:prstGeom prst="roundRect">
             <a:avLst/>
@@ -4619,7 +4735,7 @@
         </p:nvSpPr>
         <p:spPr>
           <a:xfrm>
-            <a:off x="868680" y="3547872"/>
+            <a:off x="868680" y="3310128"/>
             <a:ext cx="10515600" cy="274320"/>
           </a:xfrm>
           <a:prstGeom prst="rect">
@@ -4636,13 +4752,13 @@
             <a:pPr algn="l">
               <a:defRPr sz="1300" b="1">
                 <a:solidFill>
-                  <a:srgbClr val="BA740E"/>
-                </a:solidFill>
-                <a:latin typeface="Avenir Next"/>
-              </a:defRPr>
-            </a:pPr>
-            <a:r>
-              <a:t>What CPU baseline do we build for?</a:t>
+                  <a:srgbClr val="2B62B8"/>
+                </a:solidFill>
+                <a:latin typeface="Avenir Next"/>
+              </a:defRPr>
+            </a:pPr>
+            <a:r>
+              <a:t>Which MPI do we use on each system?</a:t>
             </a:r>
           </a:p>
         </p:txBody>
@@ -4655,8 +4771,8 @@
         </p:nvSpPr>
         <p:spPr>
           <a:xfrm>
-            <a:off x="868680" y="3831336"/>
-            <a:ext cx="10515600" cy="493776"/>
+            <a:off x="868680" y="3593592"/>
+            <a:ext cx="10515600" cy="457200"/>
           </a:xfrm>
           <a:prstGeom prst="rect">
             <a:avLst/>
@@ -4670,7 +4786,7 @@
           <a:lstStyle/>
           <a:p>
             <a:pPr algn="l">
-              <a:defRPr sz="1050" b="0">
+              <a:defRPr sz="1000" b="0">
                 <a:solidFill>
                   <a:srgbClr val="6E7B90"/>
                 </a:solidFill>
@@ -4678,7 +4794,7 @@
               </a:defRPr>
             </a:pPr>
             <a:r>
-              <a:t>One portable target that runs on every pilot system, or per-system tuning from day one? This sets how many builds exist and where they can run.</a:t>
+              <a:t>cray-mpich on the Cray machines, once we confirm we can build against it; OpenMPI on the rest, ideally the same one across them.</a:t>
             </a:r>
           </a:p>
         </p:txBody>
@@ -4691,8 +4807,8 @@
         </p:nvSpPr>
         <p:spPr>
           <a:xfrm>
-            <a:off x="548640" y="4425696"/>
-            <a:ext cx="11091672" cy="896112"/>
+            <a:off x="548640" y="4110228"/>
+            <a:ext cx="11091672" cy="822960"/>
           </a:xfrm>
           <a:prstGeom prst="roundRect">
             <a:avLst/>
@@ -4735,7 +4851,7 @@
         </p:nvSpPr>
         <p:spPr>
           <a:xfrm>
-            <a:off x="868680" y="4517136"/>
+            <a:off x="868680" y="4192524"/>
             <a:ext cx="10515600" cy="274320"/>
           </a:xfrm>
           <a:prstGeom prst="rect">
@@ -4752,13 +4868,13 @@
             <a:pPr algn="l">
               <a:defRPr sz="1300" b="1">
                 <a:solidFill>
-                  <a:srgbClr val="6D4EAA"/>
-                </a:solidFill>
-                <a:latin typeface="Avenir Next"/>
-              </a:defRPr>
-            </a:pPr>
-            <a:r>
-              <a:t>Where does the software live on each system?</a:t>
+                  <a:srgbClr val="BA740E"/>
+                </a:solidFill>
+                <a:latin typeface="Avenir Next"/>
+              </a:defRPr>
+            </a:pPr>
+            <a:r>
+              <a:t>What CPU baseline do we set?</a:t>
             </a:r>
           </a:p>
         </p:txBody>
@@ -4771,8 +4887,8 @@
         </p:nvSpPr>
         <p:spPr>
           <a:xfrm>
-            <a:off x="868680" y="4800600"/>
-            <a:ext cx="10515600" cy="493776"/>
+            <a:off x="868680" y="4475988"/>
+            <a:ext cx="10515600" cy="457200"/>
           </a:xfrm>
           <a:prstGeom prst="rect">
             <a:avLst/>
@@ -4786,7 +4902,7 @@
           <a:lstStyle/>
           <a:p>
             <a:pPr algn="l">
-              <a:defRPr sz="1050" b="0">
+              <a:defRPr sz="1000" b="0">
                 <a:solidFill>
                   <a:srgbClr val="6E7B90"/>
                 </a:solidFill>
@@ -4794,7 +4910,7 @@
               </a:defRPr>
             </a:pPr>
             <a:r>
-              <a:t>Install locations, and who owns them, per system. Nothing installs until someone can answer this for their machine.</a:t>
+              <a:t>We name the target rather than let the tools choose it. Which baseline, and where do we allow per-system tuning later?</a:t>
             </a:r>
           </a:p>
         </p:txBody>
@@ -4807,8 +4923,8 @@
         </p:nvSpPr>
         <p:spPr>
           <a:xfrm>
-            <a:off x="548640" y="5394960"/>
-            <a:ext cx="11091672" cy="896112"/>
+            <a:off x="548640" y="4992624"/>
+            <a:ext cx="11091672" cy="822960"/>
           </a:xfrm>
           <a:prstGeom prst="roundRect">
             <a:avLst/>
@@ -4851,7 +4967,7 @@
         </p:nvSpPr>
         <p:spPr>
           <a:xfrm>
-            <a:off x="868680" y="5486400"/>
+            <a:off x="868680" y="5074920"/>
             <a:ext cx="10515600" cy="274320"/>
           </a:xfrm>
           <a:prstGeom prst="rect">
@@ -4868,13 +4984,13 @@
             <a:pPr algn="l">
               <a:defRPr sz="1300" b="1">
                 <a:solidFill>
-                  <a:srgbClr val="9A7614"/>
-                </a:solidFill>
-                <a:latin typeface="Avenir Next"/>
-              </a:defRPr>
-            </a:pPr>
-            <a:r>
-              <a:t>What has to pass before a build counts as done?</a:t>
+                  <a:srgbClr val="6D4EAA"/>
+                </a:solidFill>
+                <a:latin typeface="Avenir Next"/>
+              </a:defRPr>
+            </a:pPr>
+            <a:r>
+              <a:t>Where does the stack live, and which Spack builds it?</a:t>
             </a:r>
           </a:p>
         </p:txBody>
@@ -4887,8 +5003,8 @@
         </p:nvSpPr>
         <p:spPr>
           <a:xfrm>
-            <a:off x="868680" y="5769864"/>
-            <a:ext cx="10515600" cy="493776"/>
+            <a:off x="868680" y="5358384"/>
+            <a:ext cx="10515600" cy="457200"/>
           </a:xfrm>
           <a:prstGeom prst="rect">
             <a:avLst/>
@@ -4902,7 +5018,7 @@
           <a:lstStyle/>
           <a:p>
             <a:pPr algn="l">
-              <a:defRPr sz="1050" b="0">
+              <a:defRPr sz="1000" b="0">
                 <a:solidFill>
                   <a:srgbClr val="6E7B90"/>
                 </a:solidFill>
@@ -4910,7 +5026,7 @@
               </a:defRPr>
             </a:pPr>
             <a:r>
-              <a:t>A shared finish line, agreed before the first build starts: what compiles, what runs, and what we can rebuild from scratch.</a:t>
+              <a:t>Install locations per system, most likely the CSE directory, and the Spack version we standardize on for the pilot.</a:t>
             </a:r>
           </a:p>
         </p:txBody>
@@ -4923,14 +5039,14 @@
         </p:nvSpPr>
         <p:spPr>
           <a:xfrm>
-            <a:off x="548640" y="6382512"/>
-            <a:ext cx="11091672" cy="384048"/>
+            <a:off x="548640" y="5875020"/>
+            <a:ext cx="11091672" cy="822960"/>
           </a:xfrm>
           <a:prstGeom prst="roundRect">
             <a:avLst/>
           </a:prstGeom>
           <a:solidFill>
-            <a:srgbClr val="E3E7EE"/>
+            <a:srgbClr val="F2F4F7"/>
           </a:solidFill>
           <a:ln>
             <a:noFill/>
@@ -4952,19 +5068,81 @@
           </a:fontRef>
         </p:style>
         <p:txBody>
-          <a:bodyPr rtlCol="0" anchor="ctr" wrap="square" lIns="109728" rIns="109728"/>
-          <a:lstStyle/>
-          <a:p>
-            <a:pPr algn="ctr">
-              <a:defRPr sz="1200" b="1">
-                <a:solidFill>
-                  <a:srgbClr val="16243D"/>
-                </a:solidFill>
-                <a:latin typeface="Avenir Next"/>
-              </a:defRPr>
-            </a:pPr>
-            <a:r>
-              <a:t>And just as useful: which of these can wait until after the first builds?</a:t>
+          <a:bodyPr rtlCol="0" anchor="ctr"/>
+          <a:lstStyle/>
+          <a:p>
+            <a:pPr algn="ctr"/>
+          </a:p>
+        </p:txBody>
+      </p:sp>
+      <p:sp>
+        <p:nvSpPr>
+          <p:cNvPr id="21" name="TextBox 20"/>
+          <p:cNvSpPr txBox="1"/>
+          <p:nvPr/>
+        </p:nvSpPr>
+        <p:spPr>
+          <a:xfrm>
+            <a:off x="868680" y="5957316"/>
+            <a:ext cx="10515600" cy="274320"/>
+          </a:xfrm>
+          <a:prstGeom prst="rect">
+            <a:avLst/>
+          </a:prstGeom>
+          <a:noFill/>
+        </p:spPr>
+        <p:txBody>
+          <a:bodyPr wrap="square" anchor="t">
+            <a:spAutoFit/>
+          </a:bodyPr>
+          <a:lstStyle/>
+          <a:p>
+            <a:pPr algn="l">
+              <a:defRPr sz="1300" b="1">
+                <a:solidFill>
+                  <a:srgbClr val="9A7614"/>
+                </a:solidFill>
+                <a:latin typeface="Avenir Next"/>
+              </a:defRPr>
+            </a:pPr>
+            <a:r>
+              <a:t>What counts as done?</a:t>
+            </a:r>
+          </a:p>
+        </p:txBody>
+      </p:sp>
+      <p:sp>
+        <p:nvSpPr>
+          <p:cNvPr id="22" name="TextBox 21"/>
+          <p:cNvSpPr txBox="1"/>
+          <p:nvPr/>
+        </p:nvSpPr>
+        <p:spPr>
+          <a:xfrm>
+            <a:off x="868680" y="6240780"/>
+            <a:ext cx="10515600" cy="457200"/>
+          </a:xfrm>
+          <a:prstGeom prst="rect">
+            <a:avLst/>
+          </a:prstGeom>
+          <a:noFill/>
+        </p:spPr>
+        <p:txBody>
+          <a:bodyPr wrap="square" anchor="t">
+            <a:spAutoFit/>
+          </a:bodyPr>
+          <a:lstStyle/>
+          <a:p>
+            <a:pPr algn="l">
+              <a:defRPr sz="1000" b="0">
+                <a:solidFill>
+                  <a:srgbClr val="6E7B90"/>
+                </a:solidFill>
+                <a:latin typeface="Avenir Next"/>
+              </a:defRPr>
+            </a:pPr>
+            <a:r>
+              <a:t>The packages built and tested, or the full user environment stood up and ready to load?</a:t>
             </a:r>
           </a:p>
         </p:txBody>

--- a/presentations/cse_lanes_model.pptx
+++ b/presentations/cse_lanes_model.pptx
@@ -3690,13 +3690,13 @@
             <a:pPr algn="l">
               <a:defRPr sz="1300" b="1">
                 <a:solidFill>
-                  <a:srgbClr val="2C7A4B"/>
-                </a:solidFill>
-                <a:latin typeface="Avenir Next"/>
-              </a:defRPr>
-            </a:pPr>
-            <a:r>
-              <a:t>Do we offer the vendor's math libraries as well as OpenBLAS?</a:t>
+                  <a:srgbClr val="117A72"/>
+                </a:solidFill>
+                <a:latin typeface="Avenir Next"/>
+              </a:defRPr>
+            </a:pPr>
+            <a:r>
+              <a:t>Which compiler surfaces does the pilot carry?</a:t>
             </a:r>
           </a:p>
         </p:txBody>
@@ -3732,7 +3732,7 @@
               </a:defRPr>
             </a:pPr>
             <a:r>
-              <a:t>OpenBLAS is the one BLAS and LAPACK today. Cray LibSci is already on the path on the Cray systems, and Intel systems expect MKL. Both are registered rather than built, so this is policy per system, not build cost.</a:t>
+              <a:t>Two per system: the one the machine blesses as its baseline, plus GCC as the portable reference. CSEinit offers GCC and Intel today, so whether Intel stays one of the two on the systems that have it is the open part.</a:t>
             </a:r>
           </a:p>
         </p:txBody>
@@ -3806,13 +3806,13 @@
             <a:pPr algn="l">
               <a:defRPr sz="1300" b="1">
                 <a:solidFill>
-                  <a:srgbClr val="117A72"/>
-                </a:solidFill>
-                <a:latin typeface="Avenir Next"/>
-              </a:defRPr>
-            </a:pPr>
-            <a:r>
-              <a:t>Which compiler surfaces does the pilot carry?</a:t>
+                  <a:srgbClr val="BA740E"/>
+                </a:solidFill>
+                <a:latin typeface="Avenir Next"/>
+              </a:defRPr>
+            </a:pPr>
+            <a:r>
+              <a:t>Is a separate Serial lane worth its own builds?</a:t>
             </a:r>
           </a:p>
         </p:txBody>
@@ -3848,7 +3848,7 @@
               </a:defRPr>
             </a:pPr>
             <a:r>
-              <a:t>Two per system: the one the machine blesses as its baseline, plus GCC as the portable reference. CSEinit offers GCC and Intel today, so whether Intel stays one of the two on the systems that have it is the open part.</a:t>
+              <a:t>Serial spares users who are not running parallel from the MPI runtime: login-node analysis, post-processing, small tools, anything linking HDF5 or NetCDF without libmpi behind it. The cost is a second build of those packages. Worth it, or does one MPI build on a single rank cover them?</a:t>
             </a:r>
           </a:p>
         </p:txBody>
@@ -4038,13 +4038,13 @@
             <a:pPr algn="l">
               <a:defRPr sz="1300" b="1">
                 <a:solidFill>
-                  <a:srgbClr val="BA740E"/>
-                </a:solidFill>
-                <a:latin typeface="Avenir Next"/>
-              </a:defRPr>
-            </a:pPr>
-            <a:r>
-              <a:t>Does the Serial lane stay?</a:t>
+                  <a:srgbClr val="2C7A4B"/>
+                </a:solidFill>
+                <a:latin typeface="Avenir Next"/>
+              </a:defRPr>
+            </a:pPr>
+            <a:r>
+              <a:t>Do we offer the vendor's math libraries as well as OpenBLAS?</a:t>
             </a:r>
           </a:p>
         </p:txBody>
@@ -4080,7 +4080,7 @@
               </a:defRPr>
             </a:pPr>
             <a:r>
-              <a:t>Serial spares non-parallel users the MPI runtime: analysis, post-processing, small tools, anything linking HDF5 or NetCDF without libmpi behind it. An MPI build on one rank does the same work, so dropping Serial halves the build matrix but pushes the MPI runtime onto everyone.</a:t>
+              <a:t>OpenBLAS is the one BLAS and LAPACK today. Cray LibSci is already on the path on the Cray systems, and Intel systems expect MKL. Both are registered rather than built, so this is policy per system, not build cost.</a:t>
             </a:r>
           </a:p>
         </p:txBody>
@@ -4276,7 +4276,7 @@
               </a:defRPr>
             </a:pPr>
             <a:r>
-              <a:t>Consistency means the same functionality, not the same implementations.</a:t>
+              <a:t>What does consistency promise across systems?</a:t>
             </a:r>
           </a:p>
         </p:txBody>
@@ -4312,7 +4312,7 @@
               </a:defRPr>
             </a:pPr>
             <a:r>
-              <a:t>Same front door, same rosters, same workflow on every system, with each machine's native MPI and compiler underneath. The open part is the floor: which capabilities every system must provide, and whether one pinned CSE GCC anchors the compilers.</a:t>
+              <a:t>Users build, link, and run the same way everywhere: same front door, same rosters, same workflow. That much is the goal. The open part is what sits underneath: each machine's native MPI and compiler, or a pinned CSE compiler and a shared MPI? Which promise do we make?</a:t>
             </a:r>
           </a:p>
         </p:txBody>

--- a/presentations/cse_lanes_model.pptx
+++ b/presentations/cse_lanes_model.pptx
@@ -3629,8 +3629,8 @@
         </p:nvSpPr>
         <p:spPr>
           <a:xfrm>
-            <a:off x="548640" y="1463040"/>
-            <a:ext cx="11091672" cy="822960"/>
+            <a:off x="548640" y="1517904"/>
+            <a:ext cx="11091672" cy="896112"/>
           </a:xfrm>
           <a:prstGeom prst="roundRect">
             <a:avLst/>
@@ -3673,7 +3673,7 @@
         </p:nvSpPr>
         <p:spPr>
           <a:xfrm>
-            <a:off x="868680" y="1545336"/>
+            <a:off x="868680" y="1609344"/>
             <a:ext cx="10515600" cy="274320"/>
           </a:xfrm>
           <a:prstGeom prst="rect">
@@ -3709,8 +3709,8 @@
         </p:nvSpPr>
         <p:spPr>
           <a:xfrm>
-            <a:off x="868680" y="1828800"/>
-            <a:ext cx="10515600" cy="457200"/>
+            <a:off x="868680" y="1892807"/>
+            <a:ext cx="10515600" cy="493776"/>
           </a:xfrm>
           <a:prstGeom prst="rect">
             <a:avLst/>
@@ -3724,7 +3724,7 @@
           <a:lstStyle/>
           <a:p>
             <a:pPr algn="l">
-              <a:defRPr sz="1000" b="0">
+              <a:defRPr sz="1050" b="0">
                 <a:solidFill>
                   <a:srgbClr val="6E7B90"/>
                 </a:solidFill>
@@ -3745,8 +3745,8 @@
         </p:nvSpPr>
         <p:spPr>
           <a:xfrm>
-            <a:off x="548640" y="2345436"/>
-            <a:ext cx="11091672" cy="822960"/>
+            <a:off x="548640" y="2487168"/>
+            <a:ext cx="11091672" cy="896112"/>
           </a:xfrm>
           <a:prstGeom prst="roundRect">
             <a:avLst/>
@@ -3789,7 +3789,7 @@
         </p:nvSpPr>
         <p:spPr>
           <a:xfrm>
-            <a:off x="868680" y="2427732"/>
+            <a:off x="868680" y="2578608"/>
             <a:ext cx="10515600" cy="274320"/>
           </a:xfrm>
           <a:prstGeom prst="rect">
@@ -3806,13 +3806,13 @@
             <a:pPr algn="l">
               <a:defRPr sz="1300" b="1">
                 <a:solidFill>
-                  <a:srgbClr val="BA740E"/>
-                </a:solidFill>
-                <a:latin typeface="Avenir Next"/>
-              </a:defRPr>
-            </a:pPr>
-            <a:r>
-              <a:t>Is a separate Serial lane worth its own builds?</a:t>
+                  <a:srgbClr val="2B62B8"/>
+                </a:solidFill>
+                <a:latin typeface="Avenir Next"/>
+              </a:defRPr>
+            </a:pPr>
+            <a:r>
+              <a:t>Do we anchor the older version to what the systems run today?</a:t>
             </a:r>
           </a:p>
         </p:txBody>
@@ -3825,8 +3825,8 @@
         </p:nvSpPr>
         <p:spPr>
           <a:xfrm>
-            <a:off x="868680" y="2711196"/>
-            <a:ext cx="10515600" cy="457200"/>
+            <a:off x="868680" y="2862072"/>
+            <a:ext cx="10515600" cy="493776"/>
           </a:xfrm>
           <a:prstGeom prst="rect">
             <a:avLst/>
@@ -3840,7 +3840,7 @@
           <a:lstStyle/>
           <a:p>
             <a:pPr algn="l">
-              <a:defRPr sz="1000" b="0">
+              <a:defRPr sz="1050" b="0">
                 <a:solidFill>
                   <a:srgbClr val="6E7B90"/>
                 </a:solidFill>
@@ -3848,7 +3848,7 @@
               </a:defRPr>
             </a:pPr>
             <a:r>
-              <a:t>Serial spares users who are not running parallel from the MPI runtime: login-node analysis, post-processing, small tools, anything linking HDF5 or NetCDF without libmpi behind it. The cost is a second build of those packages. Worth it, or does one MPI build on a single rank cover them?</a:t>
+              <a:t>Each package carries two versions, and the newer is always the newest release. The older is the open part: match what is deployed on the systems now so existing code keeps building, or just carry the previous release and move users up. Decide before the roster locks.</a:t>
             </a:r>
           </a:p>
         </p:txBody>
@@ -3861,8 +3861,8 @@
         </p:nvSpPr>
         <p:spPr>
           <a:xfrm>
-            <a:off x="548640" y="3227832"/>
-            <a:ext cx="11091672" cy="822960"/>
+            <a:off x="548640" y="3456432"/>
+            <a:ext cx="11091672" cy="896112"/>
           </a:xfrm>
           <a:prstGeom prst="roundRect">
             <a:avLst/>
@@ -3905,7 +3905,7 @@
         </p:nvSpPr>
         <p:spPr>
           <a:xfrm>
-            <a:off x="868680" y="3310128"/>
+            <a:off x="868680" y="3547872"/>
             <a:ext cx="10515600" cy="274320"/>
           </a:xfrm>
           <a:prstGeom prst="rect">
@@ -3922,13 +3922,13 @@
             <a:pPr algn="l">
               <a:defRPr sz="1300" b="1">
                 <a:solidFill>
-                  <a:srgbClr val="2B62B8"/>
-                </a:solidFill>
-                <a:latin typeface="Avenir Next"/>
-              </a:defRPr>
-            </a:pPr>
-            <a:r>
-              <a:t>Do we anchor the older version to what the systems run today?</a:t>
+                  <a:srgbClr val="2C7A4B"/>
+                </a:solidFill>
+                <a:latin typeface="Avenir Next"/>
+              </a:defRPr>
+            </a:pPr>
+            <a:r>
+              <a:t>Do we offer the vendor's math libraries as well as OpenBLAS?</a:t>
             </a:r>
           </a:p>
         </p:txBody>
@@ -3941,8 +3941,8 @@
         </p:nvSpPr>
         <p:spPr>
           <a:xfrm>
-            <a:off x="868680" y="3593592"/>
-            <a:ext cx="10515600" cy="457200"/>
+            <a:off x="868680" y="3831336"/>
+            <a:ext cx="10515600" cy="493776"/>
           </a:xfrm>
           <a:prstGeom prst="rect">
             <a:avLst/>
@@ -3956,7 +3956,7 @@
           <a:lstStyle/>
           <a:p>
             <a:pPr algn="l">
-              <a:defRPr sz="1000" b="0">
+              <a:defRPr sz="1050" b="0">
                 <a:solidFill>
                   <a:srgbClr val="6E7B90"/>
                 </a:solidFill>
@@ -3964,7 +3964,7 @@
               </a:defRPr>
             </a:pPr>
             <a:r>
-              <a:t>Each package carries two versions, and the newer is always the newest release. The older is the open part: match what is deployed on the systems now so existing code keeps building, or just carry the previous release and move users up. Decide before the roster locks.</a:t>
+              <a:t>OpenBLAS is the one BLAS and LAPACK today. Cray LibSci is already on the path on the Cray systems, and Intel systems expect MKL. Both are registered rather than built, so this is policy per system, not build cost.</a:t>
             </a:r>
           </a:p>
         </p:txBody>
@@ -3977,8 +3977,8 @@
         </p:nvSpPr>
         <p:spPr>
           <a:xfrm>
-            <a:off x="548640" y="4110228"/>
-            <a:ext cx="11091672" cy="822960"/>
+            <a:off x="548640" y="4425696"/>
+            <a:ext cx="11091672" cy="896112"/>
           </a:xfrm>
           <a:prstGeom prst="roundRect">
             <a:avLst/>
@@ -4021,7 +4021,7 @@
         </p:nvSpPr>
         <p:spPr>
           <a:xfrm>
-            <a:off x="868680" y="4192524"/>
+            <a:off x="868680" y="4517136"/>
             <a:ext cx="10515600" cy="274320"/>
           </a:xfrm>
           <a:prstGeom prst="rect">
@@ -4038,13 +4038,13 @@
             <a:pPr algn="l">
               <a:defRPr sz="1300" b="1">
                 <a:solidFill>
-                  <a:srgbClr val="2C7A4B"/>
-                </a:solidFill>
-                <a:latin typeface="Avenir Next"/>
-              </a:defRPr>
-            </a:pPr>
-            <a:r>
-              <a:t>Do we offer the vendor's math libraries as well as OpenBLAS?</a:t>
+                  <a:srgbClr val="6D4EAA"/>
+                </a:solidFill>
+                <a:latin typeface="Avenir Next"/>
+              </a:defRPr>
+            </a:pPr>
+            <a:r>
+              <a:t>Performance targeting: baseline first, tuning after.</a:t>
             </a:r>
           </a:p>
         </p:txBody>
@@ -4057,8 +4057,8 @@
         </p:nvSpPr>
         <p:spPr>
           <a:xfrm>
-            <a:off x="868680" y="4475988"/>
-            <a:ext cx="10515600" cy="457200"/>
+            <a:off x="868680" y="4800600"/>
+            <a:ext cx="10515600" cy="493776"/>
           </a:xfrm>
           <a:prstGeom prst="rect">
             <a:avLst/>
@@ -4072,7 +4072,7 @@
           <a:lstStyle/>
           <a:p>
             <a:pPr algn="l">
-              <a:defRPr sz="1000" b="0">
+              <a:defRPr sz="1050" b="0">
                 <a:solidFill>
                   <a:srgbClr val="6E7B90"/>
                 </a:solidFill>
@@ -4080,7 +4080,7 @@
               </a:defRPr>
             </a:pPr>
             <a:r>
-              <a:t>OpenBLAS is the one BLAS and LAPACK today. Cray LibSci is already on the path on the Cray systems, and Intel systems expect MKL. Both are registered rather than built, so this is policy per system, not build cost.</a:t>
+              <a:t>Build every lane at the portable baseline, prove the model, then turn on per-lane tuning for Genoa, Milan, or Cascade Lake. Each target is a flag plus a full rebuild, so the open part is when, not whether.</a:t>
             </a:r>
           </a:p>
         </p:txBody>
@@ -4093,8 +4093,8 @@
         </p:nvSpPr>
         <p:spPr>
           <a:xfrm>
-            <a:off x="548640" y="4992624"/>
-            <a:ext cx="11091672" cy="822960"/>
+            <a:off x="548640" y="5394960"/>
+            <a:ext cx="11091672" cy="896112"/>
           </a:xfrm>
           <a:prstGeom prst="roundRect">
             <a:avLst/>
@@ -4137,7 +4137,7 @@
         </p:nvSpPr>
         <p:spPr>
           <a:xfrm>
-            <a:off x="868680" y="5074920"/>
+            <a:off x="868680" y="5486400"/>
             <a:ext cx="10515600" cy="274320"/>
           </a:xfrm>
           <a:prstGeom prst="rect">
@@ -4154,13 +4154,13 @@
             <a:pPr algn="l">
               <a:defRPr sz="1300" b="1">
                 <a:solidFill>
-                  <a:srgbClr val="6D4EAA"/>
-                </a:solidFill>
-                <a:latin typeface="Avenir Next"/>
-              </a:defRPr>
-            </a:pPr>
-            <a:r>
-              <a:t>Performance targeting: baseline first, tuning after.</a:t>
+                  <a:srgbClr val="9A7614"/>
+                </a:solidFill>
+                <a:latin typeface="Avenir Next"/>
+              </a:defRPr>
+            </a:pPr>
+            <a:r>
+              <a:t>What does consistency promise across systems?</a:t>
             </a:r>
           </a:p>
         </p:txBody>
@@ -4173,8 +4173,8 @@
         </p:nvSpPr>
         <p:spPr>
           <a:xfrm>
-            <a:off x="868680" y="5358384"/>
-            <a:ext cx="10515600" cy="457200"/>
+            <a:off x="868680" y="5769864"/>
+            <a:ext cx="10515600" cy="493776"/>
           </a:xfrm>
           <a:prstGeom prst="rect">
             <a:avLst/>
@@ -4188,123 +4188,7 @@
           <a:lstStyle/>
           <a:p>
             <a:pPr algn="l">
-              <a:defRPr sz="1000" b="0">
-                <a:solidFill>
-                  <a:srgbClr val="6E7B90"/>
-                </a:solidFill>
-                <a:latin typeface="Avenir Next"/>
-              </a:defRPr>
-            </a:pPr>
-            <a:r>
-              <a:t>Build every lane at the portable baseline, prove the model, then turn on per-lane tuning for Genoa, Milan, or Cascade Lake. Each target is a flag plus a full rebuild, so the open part is when, not whether.</a:t>
-            </a:r>
-          </a:p>
-        </p:txBody>
-      </p:sp>
-      <p:sp>
-        <p:nvSpPr>
-          <p:cNvPr id="20" name="Rounded Rectangle 19"/>
-          <p:cNvSpPr/>
-          <p:nvPr/>
-        </p:nvSpPr>
-        <p:spPr>
-          <a:xfrm>
-            <a:off x="548640" y="5875020"/>
-            <a:ext cx="11091672" cy="822960"/>
-          </a:xfrm>
-          <a:prstGeom prst="roundRect">
-            <a:avLst/>
-          </a:prstGeom>
-          <a:solidFill>
-            <a:srgbClr val="F2F4F7"/>
-          </a:solidFill>
-          <a:ln>
-            <a:noFill/>
-          </a:ln>
-          <a:effectLst/>
-        </p:spPr>
-        <p:style>
-          <a:lnRef idx="1">
-            <a:schemeClr val="accent1"/>
-          </a:lnRef>
-          <a:fillRef idx="3">
-            <a:schemeClr val="accent1"/>
-          </a:fillRef>
-          <a:effectRef idx="2">
-            <a:schemeClr val="accent1"/>
-          </a:effectRef>
-          <a:fontRef idx="minor">
-            <a:schemeClr val="lt1"/>
-          </a:fontRef>
-        </p:style>
-        <p:txBody>
-          <a:bodyPr rtlCol="0" anchor="ctr"/>
-          <a:lstStyle/>
-          <a:p>
-            <a:pPr algn="ctr"/>
-          </a:p>
-        </p:txBody>
-      </p:sp>
-      <p:sp>
-        <p:nvSpPr>
-          <p:cNvPr id="21" name="TextBox 20"/>
-          <p:cNvSpPr txBox="1"/>
-          <p:nvPr/>
-        </p:nvSpPr>
-        <p:spPr>
-          <a:xfrm>
-            <a:off x="868680" y="5957316"/>
-            <a:ext cx="10515600" cy="274320"/>
-          </a:xfrm>
-          <a:prstGeom prst="rect">
-            <a:avLst/>
-          </a:prstGeom>
-          <a:noFill/>
-        </p:spPr>
-        <p:txBody>
-          <a:bodyPr wrap="square" anchor="t">
-            <a:spAutoFit/>
-          </a:bodyPr>
-          <a:lstStyle/>
-          <a:p>
-            <a:pPr algn="l">
-              <a:defRPr sz="1300" b="1">
-                <a:solidFill>
-                  <a:srgbClr val="9A7614"/>
-                </a:solidFill>
-                <a:latin typeface="Avenir Next"/>
-              </a:defRPr>
-            </a:pPr>
-            <a:r>
-              <a:t>What does consistency promise across systems?</a:t>
-            </a:r>
-          </a:p>
-        </p:txBody>
-      </p:sp>
-      <p:sp>
-        <p:nvSpPr>
-          <p:cNvPr id="22" name="TextBox 21"/>
-          <p:cNvSpPr txBox="1"/>
-          <p:nvPr/>
-        </p:nvSpPr>
-        <p:spPr>
-          <a:xfrm>
-            <a:off x="868680" y="6240780"/>
-            <a:ext cx="10515600" cy="457200"/>
-          </a:xfrm>
-          <a:prstGeom prst="rect">
-            <a:avLst/>
-          </a:prstGeom>
-          <a:noFill/>
-        </p:spPr>
-        <p:txBody>
-          <a:bodyPr wrap="square" anchor="t">
-            <a:spAutoFit/>
-          </a:bodyPr>
-          <a:lstStyle/>
-          <a:p>
-            <a:pPr algn="l">
-              <a:defRPr sz="1000" b="0">
+              <a:defRPr sz="1050" b="0">
                 <a:solidFill>
                   <a:srgbClr val="6E7B90"/>
                 </a:solidFill>

--- a/presentations/cse_lanes_model.pptx
+++ b/presentations/cse_lanes_model.pptx
@@ -3580,7 +3580,7 @@
               </a:defRPr>
             </a:pPr>
             <a:r>
-              <a:t>DECISIONS WE NEED · NOT SETTLED YET</a:t>
+              <a:t>SCOPE AND POLICY · NOT SETTLED YET</a:t>
             </a:r>
           </a:p>
         </p:txBody>
@@ -3616,7 +3616,7 @@
               </a:defRPr>
             </a:pPr>
             <a:r>
-              <a:t>Open questions for the team</a:t>
+              <a:t>Bigger questions to settle together</a:t>
             </a:r>
           </a:p>
         </p:txBody>
@@ -3629,8 +3629,8 @@
         </p:nvSpPr>
         <p:spPr>
           <a:xfrm>
-            <a:off x="548640" y="1517904"/>
-            <a:ext cx="11091672" cy="896112"/>
+            <a:off x="548640" y="1600200"/>
+            <a:ext cx="11091672" cy="1024128"/>
           </a:xfrm>
           <a:prstGeom prst="roundRect">
             <a:avLst/>
@@ -3673,7 +3673,7 @@
         </p:nvSpPr>
         <p:spPr>
           <a:xfrm>
-            <a:off x="868680" y="1609344"/>
+            <a:off x="868680" y="1728216"/>
             <a:ext cx="10515600" cy="274320"/>
           </a:xfrm>
           <a:prstGeom prst="rect">
@@ -3690,13 +3690,13 @@
             <a:pPr algn="l">
               <a:defRPr sz="1300" b="1">
                 <a:solidFill>
-                  <a:srgbClr val="117A72"/>
-                </a:solidFill>
-                <a:latin typeface="Avenir Next"/>
-              </a:defRPr>
-            </a:pPr>
-            <a:r>
-              <a:t>Which compiler surfaces does the pilot carry?</a:t>
+                  <a:srgbClr val="2B62B8"/>
+                </a:solidFill>
+                <a:latin typeface="Avenir Next"/>
+              </a:defRPr>
+            </a:pPr>
+            <a:r>
+              <a:t>Do we anchor the older version to what the systems run today?</a:t>
             </a:r>
           </a:p>
         </p:txBody>
@@ -3709,8 +3709,8 @@
         </p:nvSpPr>
         <p:spPr>
           <a:xfrm>
-            <a:off x="868680" y="1892807"/>
-            <a:ext cx="10515600" cy="493776"/>
+            <a:off x="868680" y="2039112"/>
+            <a:ext cx="10515600" cy="512064"/>
           </a:xfrm>
           <a:prstGeom prst="rect">
             <a:avLst/>
@@ -3732,7 +3732,7 @@
               </a:defRPr>
             </a:pPr>
             <a:r>
-              <a:t>Two per system: the one the machine blesses as its baseline, plus GCC as the portable reference. CSEinit offers GCC and Intel today, so whether Intel stays one of the two on the systems that have it is the open part.</a:t>
+              <a:t>Each package carries two versions, and the newer is always the newest release. The older is the open part: match what is deployed on the systems now so existing code keeps building, or just carry the previous release and move users up. Decide before the roster locks.</a:t>
             </a:r>
           </a:p>
         </p:txBody>
@@ -3745,8 +3745,8 @@
         </p:nvSpPr>
         <p:spPr>
           <a:xfrm>
-            <a:off x="548640" y="2487168"/>
-            <a:ext cx="11091672" cy="896112"/>
+            <a:off x="548640" y="2770632"/>
+            <a:ext cx="11091672" cy="1024128"/>
           </a:xfrm>
           <a:prstGeom prst="roundRect">
             <a:avLst/>
@@ -3789,7 +3789,7 @@
         </p:nvSpPr>
         <p:spPr>
           <a:xfrm>
-            <a:off x="868680" y="2578608"/>
+            <a:off x="868680" y="2898648"/>
             <a:ext cx="10515600" cy="274320"/>
           </a:xfrm>
           <a:prstGeom prst="rect">
@@ -3806,13 +3806,13 @@
             <a:pPr algn="l">
               <a:defRPr sz="1300" b="1">
                 <a:solidFill>
-                  <a:srgbClr val="2B62B8"/>
-                </a:solidFill>
-                <a:latin typeface="Avenir Next"/>
-              </a:defRPr>
-            </a:pPr>
-            <a:r>
-              <a:t>Do we anchor the older version to what the systems run today?</a:t>
+                  <a:srgbClr val="2C7A4B"/>
+                </a:solidFill>
+                <a:latin typeface="Avenir Next"/>
+              </a:defRPr>
+            </a:pPr>
+            <a:r>
+              <a:t>Do we offer the vendor's math libraries as well as OpenBLAS?</a:t>
             </a:r>
           </a:p>
         </p:txBody>
@@ -3825,8 +3825,8 @@
         </p:nvSpPr>
         <p:spPr>
           <a:xfrm>
-            <a:off x="868680" y="2862072"/>
-            <a:ext cx="10515600" cy="493776"/>
+            <a:off x="868680" y="3209544"/>
+            <a:ext cx="10515600" cy="512064"/>
           </a:xfrm>
           <a:prstGeom prst="rect">
             <a:avLst/>
@@ -3848,7 +3848,7 @@
               </a:defRPr>
             </a:pPr>
             <a:r>
-              <a:t>Each package carries two versions, and the newer is always the newest release. The older is the open part: match what is deployed on the systems now so existing code keeps building, or just carry the previous release and move users up. Decide before the roster locks.</a:t>
+              <a:t>OpenBLAS is the one BLAS and LAPACK today. Cray LibSci is already on the path on the Cray systems, and Intel systems expect MKL. Both are registered rather than built, so this is policy per system, not build cost.</a:t>
             </a:r>
           </a:p>
         </p:txBody>
@@ -3861,8 +3861,8 @@
         </p:nvSpPr>
         <p:spPr>
           <a:xfrm>
-            <a:off x="548640" y="3456432"/>
-            <a:ext cx="11091672" cy="896112"/>
+            <a:off x="548640" y="3941064"/>
+            <a:ext cx="11091672" cy="1024128"/>
           </a:xfrm>
           <a:prstGeom prst="roundRect">
             <a:avLst/>
@@ -3905,7 +3905,7 @@
         </p:nvSpPr>
         <p:spPr>
           <a:xfrm>
-            <a:off x="868680" y="3547872"/>
+            <a:off x="868680" y="4069080"/>
             <a:ext cx="10515600" cy="274320"/>
           </a:xfrm>
           <a:prstGeom prst="rect">
@@ -3922,13 +3922,13 @@
             <a:pPr algn="l">
               <a:defRPr sz="1300" b="1">
                 <a:solidFill>
-                  <a:srgbClr val="2C7A4B"/>
-                </a:solidFill>
-                <a:latin typeface="Avenir Next"/>
-              </a:defRPr>
-            </a:pPr>
-            <a:r>
-              <a:t>Do we offer the vendor's math libraries as well as OpenBLAS?</a:t>
+                  <a:srgbClr val="6D4EAA"/>
+                </a:solidFill>
+                <a:latin typeface="Avenir Next"/>
+              </a:defRPr>
+            </a:pPr>
+            <a:r>
+              <a:t>Performance targeting: baseline first, tuning after.</a:t>
             </a:r>
           </a:p>
         </p:txBody>
@@ -3941,8 +3941,8 @@
         </p:nvSpPr>
         <p:spPr>
           <a:xfrm>
-            <a:off x="868680" y="3831336"/>
-            <a:ext cx="10515600" cy="493776"/>
+            <a:off x="868680" y="4379976"/>
+            <a:ext cx="10515600" cy="512064"/>
           </a:xfrm>
           <a:prstGeom prst="rect">
             <a:avLst/>
@@ -3964,7 +3964,7 @@
               </a:defRPr>
             </a:pPr>
             <a:r>
-              <a:t>OpenBLAS is the one BLAS and LAPACK today. Cray LibSci is already on the path on the Cray systems, and Intel systems expect MKL. Both are registered rather than built, so this is policy per system, not build cost.</a:t>
+              <a:t>Build every lane at the portable baseline, prove the model, then turn on per-lane tuning for Genoa, Milan, or Cascade Lake. Each target is a flag plus a full rebuild, so the open part is when, not whether.</a:t>
             </a:r>
           </a:p>
         </p:txBody>
@@ -3977,8 +3977,8 @@
         </p:nvSpPr>
         <p:spPr>
           <a:xfrm>
-            <a:off x="548640" y="4425696"/>
-            <a:ext cx="11091672" cy="896112"/>
+            <a:off x="548640" y="5111496"/>
+            <a:ext cx="11091672" cy="1024128"/>
           </a:xfrm>
           <a:prstGeom prst="roundRect">
             <a:avLst/>
@@ -4021,7 +4021,7 @@
         </p:nvSpPr>
         <p:spPr>
           <a:xfrm>
-            <a:off x="868680" y="4517136"/>
+            <a:off x="868680" y="5239512"/>
             <a:ext cx="10515600" cy="274320"/>
           </a:xfrm>
           <a:prstGeom prst="rect">
@@ -4038,13 +4038,13 @@
             <a:pPr algn="l">
               <a:defRPr sz="1300" b="1">
                 <a:solidFill>
-                  <a:srgbClr val="6D4EAA"/>
-                </a:solidFill>
-                <a:latin typeface="Avenir Next"/>
-              </a:defRPr>
-            </a:pPr>
-            <a:r>
-              <a:t>Performance targeting: baseline first, tuning after.</a:t>
+                  <a:srgbClr val="9A7614"/>
+                </a:solidFill>
+                <a:latin typeface="Avenir Next"/>
+              </a:defRPr>
+            </a:pPr>
+            <a:r>
+              <a:t>What does consistency promise across systems?</a:t>
             </a:r>
           </a:p>
         </p:txBody>
@@ -4057,124 +4057,8 @@
         </p:nvSpPr>
         <p:spPr>
           <a:xfrm>
-            <a:off x="868680" y="4800600"/>
-            <a:ext cx="10515600" cy="493776"/>
-          </a:xfrm>
-          <a:prstGeom prst="rect">
-            <a:avLst/>
-          </a:prstGeom>
-          <a:noFill/>
-        </p:spPr>
-        <p:txBody>
-          <a:bodyPr wrap="square" anchor="t">
-            <a:spAutoFit/>
-          </a:bodyPr>
-          <a:lstStyle/>
-          <a:p>
-            <a:pPr algn="l">
-              <a:defRPr sz="1050" b="0">
-                <a:solidFill>
-                  <a:srgbClr val="6E7B90"/>
-                </a:solidFill>
-                <a:latin typeface="Avenir Next"/>
-              </a:defRPr>
-            </a:pPr>
-            <a:r>
-              <a:t>Build every lane at the portable baseline, prove the model, then turn on per-lane tuning for Genoa, Milan, or Cascade Lake. Each target is a flag plus a full rebuild, so the open part is when, not whether.</a:t>
-            </a:r>
-          </a:p>
-        </p:txBody>
-      </p:sp>
-      <p:sp>
-        <p:nvSpPr>
-          <p:cNvPr id="17" name="Rounded Rectangle 16"/>
-          <p:cNvSpPr/>
-          <p:nvPr/>
-        </p:nvSpPr>
-        <p:spPr>
-          <a:xfrm>
-            <a:off x="548640" y="5394960"/>
-            <a:ext cx="11091672" cy="896112"/>
-          </a:xfrm>
-          <a:prstGeom prst="roundRect">
-            <a:avLst/>
-          </a:prstGeom>
-          <a:solidFill>
-            <a:srgbClr val="F2F4F7"/>
-          </a:solidFill>
-          <a:ln>
-            <a:noFill/>
-          </a:ln>
-          <a:effectLst/>
-        </p:spPr>
-        <p:style>
-          <a:lnRef idx="1">
-            <a:schemeClr val="accent1"/>
-          </a:lnRef>
-          <a:fillRef idx="3">
-            <a:schemeClr val="accent1"/>
-          </a:fillRef>
-          <a:effectRef idx="2">
-            <a:schemeClr val="accent1"/>
-          </a:effectRef>
-          <a:fontRef idx="minor">
-            <a:schemeClr val="lt1"/>
-          </a:fontRef>
-        </p:style>
-        <p:txBody>
-          <a:bodyPr rtlCol="0" anchor="ctr"/>
-          <a:lstStyle/>
-          <a:p>
-            <a:pPr algn="ctr"/>
-          </a:p>
-        </p:txBody>
-      </p:sp>
-      <p:sp>
-        <p:nvSpPr>
-          <p:cNvPr id="18" name="TextBox 17"/>
-          <p:cNvSpPr txBox="1"/>
-          <p:nvPr/>
-        </p:nvSpPr>
-        <p:spPr>
-          <a:xfrm>
-            <a:off x="868680" y="5486400"/>
-            <a:ext cx="10515600" cy="274320"/>
-          </a:xfrm>
-          <a:prstGeom prst="rect">
-            <a:avLst/>
-          </a:prstGeom>
-          <a:noFill/>
-        </p:spPr>
-        <p:txBody>
-          <a:bodyPr wrap="square" anchor="t">
-            <a:spAutoFit/>
-          </a:bodyPr>
-          <a:lstStyle/>
-          <a:p>
-            <a:pPr algn="l">
-              <a:defRPr sz="1300" b="1">
-                <a:solidFill>
-                  <a:srgbClr val="9A7614"/>
-                </a:solidFill>
-                <a:latin typeface="Avenir Next"/>
-              </a:defRPr>
-            </a:pPr>
-            <a:r>
-              <a:t>What does consistency promise across systems?</a:t>
-            </a:r>
-          </a:p>
-        </p:txBody>
-      </p:sp>
-      <p:sp>
-        <p:nvSpPr>
-          <p:cNvPr id="19" name="TextBox 18"/>
-          <p:cNvSpPr txBox="1"/>
-          <p:nvPr/>
-        </p:nvSpPr>
-        <p:spPr>
-          <a:xfrm>
-            <a:off x="868680" y="5769864"/>
-            <a:ext cx="10515600" cy="493776"/>
+            <a:off x="868680" y="5550408"/>
+            <a:ext cx="10515600" cy="512064"/>
           </a:xfrm>
           <a:prstGeom prst="rect">
             <a:avLst/>
@@ -4294,7 +4178,7 @@
               </a:defRPr>
             </a:pPr>
             <a:r>
-              <a:t>DISCUSSION · STARTER QUESTIONS FOR THE BUILD</a:t>
+              <a:t>SETUP · WHAT BLOCKS THE FIRST BUILD</a:t>
             </a:r>
           </a:p>
         </p:txBody>
@@ -4446,7 +4330,7 @@
               </a:defRPr>
             </a:pPr>
             <a:r>
-              <a:t>It comes first, because everything else on the system is built with it. Each machine's own compiler, one shared version across systems, or a mix?</a:t>
+              <a:t>It comes first, because everything else on the system is built with it: each machine's own compiler, one shared version across systems, or a mix. Whether Intel stays a surface where it still exists is part of this.</a:t>
             </a:r>
           </a:p>
         </p:txBody>
